--- a/From On-Premises to Cloud.pptx
+++ b/From On-Premises to Cloud.pptx
@@ -10,6 +10,9 @@
     <p:sldId id="258" r:id="rId4"/>
     <p:sldId id="259" r:id="rId5"/>
     <p:sldId id="260" r:id="rId6"/>
+    <p:sldId id="261" r:id="rId7"/>
+    <p:sldId id="262" r:id="rId8"/>
+    <p:sldId id="263" r:id="rId9"/>
   </p:sldIdLst>
   <p:sldSz cx="12192000" cy="6858000"/>
   <p:notesSz cx="6858000" cy="9144000"/>
@@ -108,6 +111,11 @@
       </a:defRPr>
     </a:lvl9pPr>
   </p:defaultTextStyle>
+  <p:extLst>
+    <p:ext uri="{EFAFB233-063F-42B5-8137-9DF3F51BA10A}">
+      <p15:sldGuideLst xmlns:p15="http://schemas.microsoft.com/office/powerpoint/2012/main"/>
+    </p:ext>
+  </p:extLst>
 </p:presentation>
 </file>
 
@@ -4462,7 +4470,7 @@
             <a:fld id="{5923F103-BC34-4FE4-A40E-EDDEECFDA5D0}" type="datetimeFigureOut">
               <a:rPr lang="en-US" dirty="0"/>
               <a:pPr/>
-              <a:t>10/21/2026</a:t>
+              <a:t>10/22/2026</a:t>
             </a:fld>
             <a:endParaRPr lang="en-US" dirty="0"/>
           </a:p>
@@ -5546,7 +5554,7 @@
           <a:p>
             <a:fld id="{923A1CC3-2375-41D4-9E03-427CAF2A4C1A}" type="datetimeFigureOut">
               <a:rPr lang="en-US" dirty="0"/>
-              <a:t>10/21/2026</a:t>
+              <a:t>10/22/2026</a:t>
             </a:fld>
             <a:endParaRPr lang="en-US" dirty="0"/>
           </a:p>
@@ -6522,7 +6530,7 @@
           <a:p>
             <a:fld id="{AFF16868-8199-4C2C-A5B1-63AEE139F88E}" type="datetimeFigureOut">
               <a:rPr lang="en-US" dirty="0"/>
-              <a:t>10/21/2026</a:t>
+              <a:t>10/22/2026</a:t>
             </a:fld>
             <a:endParaRPr lang="en-US" dirty="0"/>
           </a:p>
@@ -7652,7 +7660,7 @@
           <a:p>
             <a:fld id="{AAD9FF7F-6988-44CC-821B-644E70CD2F73}" type="datetimeFigureOut">
               <a:rPr lang="en-US" dirty="0"/>
-              <a:t>10/21/2026</a:t>
+              <a:t>10/22/2026</a:t>
             </a:fld>
             <a:endParaRPr lang="en-US" dirty="0"/>
           </a:p>
@@ -8681,7 +8689,7 @@
           <a:p>
             <a:fld id="{5C12C299-16B2-4475-990D-751901EACC14}" type="datetimeFigureOut">
               <a:rPr lang="en-US" dirty="0"/>
-              <a:t>10/21/2026</a:t>
+              <a:t>10/22/2026</a:t>
             </a:fld>
             <a:endParaRPr lang="en-US" dirty="0"/>
           </a:p>
@@ -9337,7 +9345,7 @@
           <a:p>
             <a:fld id="{9FE86839-B9D8-4651-8783-F325ECE74E65}" type="datetimeFigureOut">
               <a:rPr lang="en-US" dirty="0"/>
-              <a:t>10/21/2026</a:t>
+              <a:t>10/22/2026</a:t>
             </a:fld>
             <a:endParaRPr lang="en-US" dirty="0"/>
           </a:p>
@@ -10194,7 +10202,7 @@
           <a:p>
             <a:fld id="{FD484F64-32F6-45C5-931F-ADC1662401D0}" type="datetimeFigureOut">
               <a:rPr lang="en-US" dirty="0"/>
-              <a:t>10/21/2026</a:t>
+              <a:t>10/22/2026</a:t>
             </a:fld>
             <a:endParaRPr lang="en-US" dirty="0"/>
           </a:p>
@@ -10380,7 +10388,7 @@
           <a:p>
             <a:fld id="{53086D93-FCAC-47E0-A2EE-787E62CA814C}" type="datetimeFigureOut">
               <a:rPr lang="en-US" dirty="0"/>
-              <a:t>10/21/2026</a:t>
+              <a:t>10/22/2026</a:t>
             </a:fld>
             <a:endParaRPr lang="en-US" dirty="0"/>
           </a:p>
@@ -11348,7 +11356,7 @@
           <a:p>
             <a:fld id="{CDA879A6-0FD0-4734-A311-86BFCA472E6E}" type="datetimeFigureOut">
               <a:rPr lang="en-US" dirty="0"/>
-              <a:t>10/21/2026</a:t>
+              <a:t>10/22/2026</a:t>
             </a:fld>
             <a:endParaRPr lang="en-US" dirty="0"/>
           </a:p>
@@ -11555,7 +11563,7 @@
           <a:p>
             <a:fld id="{19C9CA7B-DFD4-44B5-8C60-D14B8CD1FB59}" type="datetimeFigureOut">
               <a:rPr lang="en-US" dirty="0"/>
-              <a:t>10/21/2026</a:t>
+              <a:t>10/22/2026</a:t>
             </a:fld>
             <a:endParaRPr lang="en-US" dirty="0"/>
           </a:p>
@@ -12585,7 +12593,7 @@
           <a:p>
             <a:fld id="{F34E6425-0181-43F2-84FC-787E803FD2F8}" type="datetimeFigureOut">
               <a:rPr lang="en-US" dirty="0"/>
-              <a:t>10/21/2026</a:t>
+              <a:t>10/22/2026</a:t>
             </a:fld>
             <a:endParaRPr lang="en-US" dirty="0"/>
           </a:p>
@@ -12853,7 +12861,7 @@
           <a:p>
             <a:fld id="{3BDB8791-F1B0-41E7-B7FD-A781E65C4266}" type="datetimeFigureOut">
               <a:rPr lang="en-US" dirty="0"/>
-              <a:t>10/21/2026</a:t>
+              <a:t>10/22/2026</a:t>
             </a:fld>
             <a:endParaRPr lang="en-US" dirty="0"/>
           </a:p>
@@ -13259,7 +13267,7 @@
           <a:p>
             <a:fld id="{5FDD63B2-E120-4ED8-B27B-C685F510A5FE}" type="datetimeFigureOut">
               <a:rPr lang="en-US" dirty="0"/>
-              <a:t>10/21/2026</a:t>
+              <a:t>10/22/2026</a:t>
             </a:fld>
             <a:endParaRPr lang="en-US" dirty="0"/>
           </a:p>
@@ -13382,7 +13390,7 @@
           <a:p>
             <a:fld id="{7AA18ACC-A947-437B-A130-35BD54FDF1E9}" type="datetimeFigureOut">
               <a:rPr lang="en-US" dirty="0"/>
-              <a:t>10/21/2026</a:t>
+              <a:t>10/22/2026</a:t>
             </a:fld>
             <a:endParaRPr lang="en-US" dirty="0"/>
           </a:p>
@@ -13473,7 +13481,7 @@
           <a:p>
             <a:fld id="{7C8D7E02-BCB8-4D50-A234-369438C08659}" type="datetimeFigureOut">
               <a:rPr lang="en-US" dirty="0"/>
-              <a:t>10/21/2026</a:t>
+              <a:t>10/22/2026</a:t>
             </a:fld>
             <a:endParaRPr lang="en-US" dirty="0"/>
           </a:p>
@@ -14550,7 +14558,7 @@
           <a:p>
             <a:fld id="{76E86A4C-8E40-4F87-A4F0-01A0687C5742}" type="datetimeFigureOut">
               <a:rPr lang="en-US" dirty="0"/>
-              <a:t>10/21/2026</a:t>
+              <a:t>10/22/2026</a:t>
             </a:fld>
             <a:endParaRPr lang="en-US" dirty="0"/>
           </a:p>
@@ -15654,7 +15662,7 @@
           <a:p>
             <a:fld id="{35E72C73-2D91-4E12-BA25-F0AA0C03599B}" type="datetimeFigureOut">
               <a:rPr lang="en-US" dirty="0"/>
-              <a:t>10/21/2026</a:t>
+              <a:t>10/22/2026</a:t>
             </a:fld>
             <a:endParaRPr lang="en-US" dirty="0"/>
           </a:p>
@@ -16647,7 +16655,7 @@
           <a:p>
             <a:fld id="{2BE451C3-0FF4-47C4-B829-773ADF60F88C}" type="datetimeFigureOut">
               <a:rPr lang="en-US" dirty="0"/>
-              <a:t>10/21/2026</a:t>
+              <a:t>10/22/2026</a:t>
             </a:fld>
             <a:endParaRPr lang="en-US" dirty="0"/>
           </a:p>
@@ -17569,6 +17577,45 @@
           </a:p>
         </p:txBody>
       </p:sp>
+      <p:sp>
+        <p:nvSpPr>
+          <p:cNvPr id="5" name="TextBox 4">
+            <a:extLst>
+              <a:ext uri="{FF2B5EF4-FFF2-40B4-BE49-F238E27FC236}">
+                <a16:creationId xmlns:a16="http://schemas.microsoft.com/office/drawing/2014/main" id="{A28A9202-98E5-0852-D355-C6C8631CCA54}"/>
+              </a:ext>
+            </a:extLst>
+          </p:cNvPr>
+          <p:cNvSpPr txBox="1"/>
+          <p:nvPr/>
+        </p:nvSpPr>
+        <p:spPr>
+          <a:xfrm>
+            <a:off x="8007875" y="6182405"/>
+            <a:ext cx="3713070" cy="215444"/>
+          </a:xfrm>
+          <a:prstGeom prst="rect">
+            <a:avLst/>
+          </a:prstGeom>
+          <a:noFill/>
+        </p:spPr>
+        <p:txBody>
+          <a:bodyPr wrap="square" rtlCol="0">
+            <a:spAutoFit/>
+          </a:bodyPr>
+          <a:lstStyle/>
+          <a:p>
+            <a:r>
+              <a:rPr lang="en-US" sz="800" dirty="0">
+                <a:solidFill>
+                  <a:schemeClr val="bg1"/>
+                </a:solidFill>
+              </a:rPr>
+              <a:t>2026 Women in Statistics and Data Science Conference, Cincinnati, OH</a:t>
+            </a:r>
+          </a:p>
+        </p:txBody>
+      </p:sp>
     </p:spTree>
     <p:extLst>
       <p:ext uri="{BB962C8B-B14F-4D97-AF65-F5344CB8AC3E}">
@@ -17650,13 +17697,13 @@
           <a:p>
             <a:r>
               <a:rPr lang="en-US" dirty="0"/>
-              <a:t>Background</a:t>
+              <a:t>Background - Fannie Mae</a:t>
             </a:r>
           </a:p>
           <a:p>
             <a:r>
               <a:rPr lang="en-US" dirty="0"/>
-              <a:t>Cloud Migration at Fannie Mae</a:t>
+              <a:t>Cloud Migration</a:t>
             </a:r>
           </a:p>
           <a:p>
@@ -17679,6 +17726,41 @@
           </a:p>
           <a:p>
             <a:endParaRPr lang="en-US" dirty="0"/>
+          </a:p>
+        </p:txBody>
+      </p:sp>
+      <p:sp>
+        <p:nvSpPr>
+          <p:cNvPr id="4" name="TextBox 3">
+            <a:extLst>
+              <a:ext uri="{FF2B5EF4-FFF2-40B4-BE49-F238E27FC236}">
+                <a16:creationId xmlns:a16="http://schemas.microsoft.com/office/drawing/2014/main" id="{7854E66F-8A13-1A8B-6EEA-628C9B863288}"/>
+              </a:ext>
+            </a:extLst>
+          </p:cNvPr>
+          <p:cNvSpPr txBox="1"/>
+          <p:nvPr/>
+        </p:nvSpPr>
+        <p:spPr>
+          <a:xfrm>
+            <a:off x="8318270" y="6642556"/>
+            <a:ext cx="3873730" cy="215444"/>
+          </a:xfrm>
+          <a:prstGeom prst="rect">
+            <a:avLst/>
+          </a:prstGeom>
+          <a:noFill/>
+        </p:spPr>
+        <p:txBody>
+          <a:bodyPr wrap="square" rtlCol="0">
+            <a:spAutoFit/>
+          </a:bodyPr>
+          <a:lstStyle/>
+          <a:p>
+            <a:r>
+              <a:rPr lang="en-US" sz="800" dirty="0"/>
+              <a:t>2026 Women in Statistics and Data Science Conference, Cincinnati, OH</a:t>
+            </a:r>
           </a:p>
         </p:txBody>
       </p:sp>
@@ -17730,7 +17812,7 @@
         </p:nvSpPr>
         <p:spPr>
           <a:xfrm>
-            <a:off x="426720" y="957043"/>
+            <a:off x="676102" y="915479"/>
             <a:ext cx="11338560" cy="706964"/>
           </a:xfrm>
         </p:spPr>
@@ -17740,7 +17822,7 @@
           <a:p>
             <a:r>
               <a:rPr lang="en-US" dirty="0"/>
-              <a:t>1.Background – Fannie Mae and cloud migration</a:t>
+              <a:t>1. Background - Fannie Mae</a:t>
             </a:r>
           </a:p>
         </p:txBody>
@@ -17855,6 +17937,41 @@
           </a:graphicData>
         </a:graphic>
       </p:graphicFrame>
+      <p:sp>
+        <p:nvSpPr>
+          <p:cNvPr id="5" name="TextBox 4">
+            <a:extLst>
+              <a:ext uri="{FF2B5EF4-FFF2-40B4-BE49-F238E27FC236}">
+                <a16:creationId xmlns:a16="http://schemas.microsoft.com/office/drawing/2014/main" id="{38FDC64A-E5D9-9D5C-400B-437AA99E9EAE}"/>
+              </a:ext>
+            </a:extLst>
+          </p:cNvPr>
+          <p:cNvSpPr txBox="1"/>
+          <p:nvPr/>
+        </p:nvSpPr>
+        <p:spPr>
+          <a:xfrm>
+            <a:off x="8318270" y="6642556"/>
+            <a:ext cx="3873730" cy="215444"/>
+          </a:xfrm>
+          <a:prstGeom prst="rect">
+            <a:avLst/>
+          </a:prstGeom>
+          <a:noFill/>
+        </p:spPr>
+        <p:txBody>
+          <a:bodyPr wrap="square" rtlCol="0">
+            <a:spAutoFit/>
+          </a:bodyPr>
+          <a:lstStyle/>
+          <a:p>
+            <a:r>
+              <a:rPr lang="en-US" sz="800" dirty="0"/>
+              <a:t>2026 Women in Statistics and Data Science Conference, Cincinnati, OH</a:t>
+            </a:r>
+          </a:p>
+        </p:txBody>
+      </p:sp>
     </p:spTree>
     <p:extLst>
       <p:ext uri="{BB962C8B-B14F-4D97-AF65-F5344CB8AC3E}">
@@ -17901,7 +18018,12 @@
             <p:ph type="title"/>
           </p:nvPr>
         </p:nvSpPr>
-        <p:spPr/>
+        <p:spPr>
+          <a:xfrm>
+            <a:off x="622940" y="904805"/>
+            <a:ext cx="8761413" cy="706964"/>
+          </a:xfrm>
+        </p:spPr>
         <p:txBody>
           <a:bodyPr/>
           <a:lstStyle/>
@@ -17973,7 +18095,7 @@
         <p:spPr>
           <a:xfrm>
             <a:off x="429070" y="3063876"/>
-            <a:ext cx="4140679" cy="3428999"/>
+            <a:ext cx="4390862" cy="3636182"/>
           </a:xfrm>
           <a:prstGeom prst="rect">
             <a:avLst/>
@@ -18190,6 +18312,41 @@
           </a:prstGeom>
         </p:spPr>
       </p:pic>
+      <p:sp>
+        <p:nvSpPr>
+          <p:cNvPr id="12" name="TextBox 11">
+            <a:extLst>
+              <a:ext uri="{FF2B5EF4-FFF2-40B4-BE49-F238E27FC236}">
+                <a16:creationId xmlns:a16="http://schemas.microsoft.com/office/drawing/2014/main" id="{43EF7885-8894-6379-FF11-E2671C4ACAF7}"/>
+              </a:ext>
+            </a:extLst>
+          </p:cNvPr>
+          <p:cNvSpPr txBox="1"/>
+          <p:nvPr/>
+        </p:nvSpPr>
+        <p:spPr>
+          <a:xfrm>
+            <a:off x="8318270" y="6642556"/>
+            <a:ext cx="3873730" cy="215444"/>
+          </a:xfrm>
+          <a:prstGeom prst="rect">
+            <a:avLst/>
+          </a:prstGeom>
+          <a:noFill/>
+        </p:spPr>
+        <p:txBody>
+          <a:bodyPr wrap="square" rtlCol="0">
+            <a:spAutoFit/>
+          </a:bodyPr>
+          <a:lstStyle/>
+          <a:p>
+            <a:r>
+              <a:rPr lang="en-US" sz="800" dirty="0"/>
+              <a:t>2026 Women in Statistics and Data Science Conference, Cincinnati, OH</a:t>
+            </a:r>
+          </a:p>
+        </p:txBody>
+      </p:sp>
     </p:spTree>
     <p:extLst>
       <p:ext uri="{BB962C8B-B14F-4D97-AF65-F5344CB8AC3E}">
@@ -18238,7 +18395,7 @@
         </p:nvSpPr>
         <p:spPr>
           <a:xfrm>
-            <a:off x="1154954" y="973668"/>
+            <a:off x="614627" y="872232"/>
             <a:ext cx="10164979" cy="706964"/>
           </a:xfrm>
         </p:spPr>
@@ -18248,7 +18405,7 @@
           <a:p>
             <a:r>
               <a:rPr lang="en-US" dirty="0"/>
-              <a:t>Background – cloud in other organizations</a:t>
+              <a:t>2. Cloud in other organizations</a:t>
             </a:r>
           </a:p>
         </p:txBody>
@@ -18559,10 +18716,2219 @@
           </a:prstGeom>
         </p:spPr>
       </p:pic>
+      <p:sp>
+        <p:nvSpPr>
+          <p:cNvPr id="13" name="TextBox 12">
+            <a:extLst>
+              <a:ext uri="{FF2B5EF4-FFF2-40B4-BE49-F238E27FC236}">
+                <a16:creationId xmlns:a16="http://schemas.microsoft.com/office/drawing/2014/main" id="{F88CB34E-20BE-1714-5A1C-D6DA56BD9749}"/>
+              </a:ext>
+            </a:extLst>
+          </p:cNvPr>
+          <p:cNvSpPr txBox="1"/>
+          <p:nvPr/>
+        </p:nvSpPr>
+        <p:spPr>
+          <a:xfrm>
+            <a:off x="8318270" y="6642556"/>
+            <a:ext cx="3873730" cy="215444"/>
+          </a:xfrm>
+          <a:prstGeom prst="rect">
+            <a:avLst/>
+          </a:prstGeom>
+          <a:noFill/>
+        </p:spPr>
+        <p:txBody>
+          <a:bodyPr wrap="square" rtlCol="0">
+            <a:spAutoFit/>
+          </a:bodyPr>
+          <a:lstStyle/>
+          <a:p>
+            <a:r>
+              <a:rPr lang="en-US" sz="800" dirty="0"/>
+              <a:t>2026 Women in Statistics and Data Science Conference, Cincinnati, OH</a:t>
+            </a:r>
+          </a:p>
+        </p:txBody>
+      </p:sp>
     </p:spTree>
     <p:extLst>
       <p:ext uri="{BB962C8B-B14F-4D97-AF65-F5344CB8AC3E}">
         <p14:creationId xmlns:p14="http://schemas.microsoft.com/office/powerpoint/2010/main" val="771836698"/>
+      </p:ext>
+    </p:extLst>
+  </p:cSld>
+  <p:clrMapOvr>
+    <a:masterClrMapping/>
+  </p:clrMapOvr>
+</p:sld>
+</file>
+
+<file path=ppt/slides/slide6.xml><?xml version="1.0" encoding="utf-8"?>
+<p:sld xmlns:a="http://schemas.openxmlformats.org/drawingml/2006/main" xmlns:r="http://schemas.openxmlformats.org/officeDocument/2006/relationships" xmlns:p="http://schemas.openxmlformats.org/presentationml/2006/main">
+  <p:cSld>
+    <p:spTree>
+      <p:nvGrpSpPr>
+        <p:cNvPr id="1" name=""/>
+        <p:cNvGrpSpPr/>
+        <p:nvPr/>
+      </p:nvGrpSpPr>
+      <p:grpSpPr>
+        <a:xfrm>
+          <a:off x="0" y="0"/>
+          <a:ext cx="0" cy="0"/>
+          <a:chOff x="0" y="0"/>
+          <a:chExt cx="0" cy="0"/>
+        </a:xfrm>
+      </p:grpSpPr>
+      <p:sp>
+        <p:nvSpPr>
+          <p:cNvPr id="2" name="Title 1">
+            <a:extLst>
+              <a:ext uri="{FF2B5EF4-FFF2-40B4-BE49-F238E27FC236}">
+                <a16:creationId xmlns:a16="http://schemas.microsoft.com/office/drawing/2014/main" id="{A29CEDFC-FB8B-5C8E-0043-6AAE4647DE6D}"/>
+              </a:ext>
+            </a:extLst>
+          </p:cNvPr>
+          <p:cNvSpPr>
+            <a:spLocks noGrp="1"/>
+          </p:cNvSpPr>
+          <p:nvPr>
+            <p:ph type="title"/>
+          </p:nvPr>
+        </p:nvSpPr>
+        <p:spPr>
+          <a:xfrm>
+            <a:off x="590197" y="877915"/>
+            <a:ext cx="8761413" cy="706964"/>
+          </a:xfrm>
+        </p:spPr>
+        <p:txBody>
+          <a:bodyPr/>
+          <a:lstStyle/>
+          <a:p>
+            <a:r>
+              <a:rPr lang="en-US" dirty="0"/>
+              <a:t>3. My work in the cloud migration</a:t>
+            </a:r>
+          </a:p>
+        </p:txBody>
+      </p:sp>
+      <p:sp>
+        <p:nvSpPr>
+          <p:cNvPr id="3" name="Content Placeholder 2">
+            <a:extLst>
+              <a:ext uri="{FF2B5EF4-FFF2-40B4-BE49-F238E27FC236}">
+                <a16:creationId xmlns:a16="http://schemas.microsoft.com/office/drawing/2014/main" id="{DD60E313-0497-11D3-5F35-E50D606AC664}"/>
+              </a:ext>
+            </a:extLst>
+          </p:cNvPr>
+          <p:cNvSpPr>
+            <a:spLocks noGrp="1"/>
+          </p:cNvSpPr>
+          <p:nvPr>
+            <p:ph idx="1"/>
+          </p:nvPr>
+        </p:nvSpPr>
+        <p:spPr>
+          <a:xfrm>
+            <a:off x="117248" y="2413649"/>
+            <a:ext cx="11287814" cy="462437"/>
+          </a:xfrm>
+        </p:spPr>
+        <p:txBody>
+          <a:bodyPr>
+            <a:normAutofit/>
+          </a:bodyPr>
+          <a:lstStyle/>
+          <a:p>
+            <a:r>
+              <a:rPr lang="en-US" altLang="zh-CN" dirty="0"/>
+              <a:t>I worked in EMA to migrate CCAF models from SAS to</a:t>
+            </a:r>
+            <a:r>
+              <a:rPr lang="zh-CN" altLang="en-US" dirty="0"/>
+              <a:t> </a:t>
+            </a:r>
+            <a:r>
+              <a:rPr lang="en-US" altLang="zh-CN" dirty="0"/>
+              <a:t>R/Python</a:t>
+            </a:r>
+            <a:endParaRPr lang="en-US" dirty="0"/>
+          </a:p>
+        </p:txBody>
+      </p:sp>
+      <p:sp>
+        <p:nvSpPr>
+          <p:cNvPr id="4" name="Rectangle 3">
+            <a:extLst>
+              <a:ext uri="{FF2B5EF4-FFF2-40B4-BE49-F238E27FC236}">
+                <a16:creationId xmlns:a16="http://schemas.microsoft.com/office/drawing/2014/main" id="{44D608DF-4CF0-28B6-9BE2-8FDAC1198024}"/>
+              </a:ext>
+            </a:extLst>
+          </p:cNvPr>
+          <p:cNvSpPr/>
+          <p:nvPr/>
+        </p:nvSpPr>
+        <p:spPr>
+          <a:xfrm>
+            <a:off x="590197" y="2979089"/>
+            <a:ext cx="1850969" cy="894214"/>
+          </a:xfrm>
+          <a:prstGeom prst="rect">
+            <a:avLst/>
+          </a:prstGeom>
+        </p:spPr>
+        <p:style>
+          <a:lnRef idx="2">
+            <a:schemeClr val="accent1">
+              <a:shade val="15000"/>
+            </a:schemeClr>
+          </a:lnRef>
+          <a:fillRef idx="1">
+            <a:schemeClr val="accent1"/>
+          </a:fillRef>
+          <a:effectRef idx="0">
+            <a:schemeClr val="accent1"/>
+          </a:effectRef>
+          <a:fontRef idx="minor">
+            <a:schemeClr val="lt1"/>
+          </a:fontRef>
+        </p:style>
+        <p:txBody>
+          <a:bodyPr rtlCol="0" anchor="ctr"/>
+          <a:lstStyle/>
+          <a:p>
+            <a:pPr algn="ctr"/>
+            <a:r>
+              <a:rPr lang="en-US" altLang="zh-CN" dirty="0"/>
+              <a:t>EMA</a:t>
+            </a:r>
+            <a:endParaRPr lang="en-US" dirty="0"/>
+          </a:p>
+        </p:txBody>
+      </p:sp>
+      <p:sp>
+        <p:nvSpPr>
+          <p:cNvPr id="5" name="Rectangle 4">
+            <a:extLst>
+              <a:ext uri="{FF2B5EF4-FFF2-40B4-BE49-F238E27FC236}">
+                <a16:creationId xmlns:a16="http://schemas.microsoft.com/office/drawing/2014/main" id="{159B3F70-0DC5-D7B7-C565-FA648C385C04}"/>
+              </a:ext>
+            </a:extLst>
+          </p:cNvPr>
+          <p:cNvSpPr/>
+          <p:nvPr/>
+        </p:nvSpPr>
+        <p:spPr>
+          <a:xfrm>
+            <a:off x="5184498" y="2987326"/>
+            <a:ext cx="1823004" cy="894214"/>
+          </a:xfrm>
+          <a:prstGeom prst="rect">
+            <a:avLst/>
+          </a:prstGeom>
+        </p:spPr>
+        <p:style>
+          <a:lnRef idx="2">
+            <a:schemeClr val="accent1">
+              <a:shade val="15000"/>
+            </a:schemeClr>
+          </a:lnRef>
+          <a:fillRef idx="1">
+            <a:schemeClr val="accent1"/>
+          </a:fillRef>
+          <a:effectRef idx="0">
+            <a:schemeClr val="accent1"/>
+          </a:effectRef>
+          <a:fontRef idx="minor">
+            <a:schemeClr val="lt1"/>
+          </a:fontRef>
+        </p:style>
+        <p:txBody>
+          <a:bodyPr rtlCol="0" anchor="ctr"/>
+          <a:lstStyle/>
+          <a:p>
+            <a:pPr algn="ctr"/>
+            <a:r>
+              <a:rPr lang="en-US" altLang="zh-CN" dirty="0"/>
+              <a:t>CCFA</a:t>
+            </a:r>
+            <a:endParaRPr lang="en-US" dirty="0"/>
+          </a:p>
+        </p:txBody>
+      </p:sp>
+      <p:sp>
+        <p:nvSpPr>
+          <p:cNvPr id="6" name="Content Placeholder 2">
+            <a:extLst>
+              <a:ext uri="{FF2B5EF4-FFF2-40B4-BE49-F238E27FC236}">
+                <a16:creationId xmlns:a16="http://schemas.microsoft.com/office/drawing/2014/main" id="{7BCF8376-67F8-6314-44DB-92293730E99C}"/>
+              </a:ext>
+            </a:extLst>
+          </p:cNvPr>
+          <p:cNvSpPr txBox="1">
+            <a:spLocks/>
+          </p:cNvSpPr>
+          <p:nvPr/>
+        </p:nvSpPr>
+        <p:spPr>
+          <a:xfrm>
+            <a:off x="4550349" y="4009561"/>
+            <a:ext cx="3461737" cy="377999"/>
+          </a:xfrm>
+          <a:prstGeom prst="rect">
+            <a:avLst/>
+          </a:prstGeom>
+        </p:spPr>
+        <p:txBody>
+          <a:bodyPr vert="horz" lIns="91440" tIns="45720" rIns="91440" bIns="45720" rtlCol="0">
+            <a:normAutofit/>
+          </a:bodyPr>
+          <a:lstStyle>
+            <a:lvl1pPr marL="342900" indent="-342900" algn="l" defTabSz="457200" rtl="0" eaLnBrk="1" latinLnBrk="0" hangingPunct="1">
+              <a:spcBef>
+                <a:spcPts val="1000"/>
+              </a:spcBef>
+              <a:spcAft>
+                <a:spcPts val="0"/>
+              </a:spcAft>
+              <a:buClr>
+                <a:schemeClr val="accent1"/>
+              </a:buClr>
+              <a:buSzPct val="80000"/>
+              <a:buFont typeface="Wingdings 3" charset="2"/>
+              <a:buChar char=""/>
+              <a:defRPr sz="1800" b="0" i="0" kern="1200">
+                <a:solidFill>
+                  <a:schemeClr val="tx1">
+                    <a:lumMod val="75000"/>
+                    <a:lumOff val="25000"/>
+                  </a:schemeClr>
+                </a:solidFill>
+                <a:latin typeface="+mn-lt"/>
+                <a:ea typeface="+mn-ea"/>
+                <a:cs typeface="+mn-cs"/>
+              </a:defRPr>
+            </a:lvl1pPr>
+            <a:lvl2pPr marL="742950" indent="-285750" algn="l" defTabSz="457200" rtl="0" eaLnBrk="1" latinLnBrk="0" hangingPunct="1">
+              <a:spcBef>
+                <a:spcPts val="1000"/>
+              </a:spcBef>
+              <a:spcAft>
+                <a:spcPts val="0"/>
+              </a:spcAft>
+              <a:buClr>
+                <a:schemeClr val="accent1"/>
+              </a:buClr>
+              <a:buSzPct val="80000"/>
+              <a:buFont typeface="Wingdings 3" charset="2"/>
+              <a:buChar char=""/>
+              <a:defRPr sz="1600" b="0" i="0" kern="1200">
+                <a:solidFill>
+                  <a:schemeClr val="tx1">
+                    <a:lumMod val="75000"/>
+                    <a:lumOff val="25000"/>
+                  </a:schemeClr>
+                </a:solidFill>
+                <a:latin typeface="+mn-lt"/>
+                <a:ea typeface="+mn-ea"/>
+                <a:cs typeface="+mn-cs"/>
+              </a:defRPr>
+            </a:lvl2pPr>
+            <a:lvl3pPr marL="1143000" indent="-228600" algn="l" defTabSz="457200" rtl="0" eaLnBrk="1" latinLnBrk="0" hangingPunct="1">
+              <a:spcBef>
+                <a:spcPts val="1000"/>
+              </a:spcBef>
+              <a:spcAft>
+                <a:spcPts val="0"/>
+              </a:spcAft>
+              <a:buClr>
+                <a:schemeClr val="accent1"/>
+              </a:buClr>
+              <a:buSzPct val="80000"/>
+              <a:buFont typeface="Wingdings 3" charset="2"/>
+              <a:buChar char=""/>
+              <a:defRPr sz="1400" b="0" i="0" kern="1200">
+                <a:solidFill>
+                  <a:schemeClr val="tx1">
+                    <a:lumMod val="75000"/>
+                    <a:lumOff val="25000"/>
+                  </a:schemeClr>
+                </a:solidFill>
+                <a:latin typeface="+mn-lt"/>
+                <a:ea typeface="+mn-ea"/>
+                <a:cs typeface="+mn-cs"/>
+              </a:defRPr>
+            </a:lvl3pPr>
+            <a:lvl4pPr marL="1600200" indent="-228600" algn="l" defTabSz="457200" rtl="0" eaLnBrk="1" latinLnBrk="0" hangingPunct="1">
+              <a:spcBef>
+                <a:spcPts val="1000"/>
+              </a:spcBef>
+              <a:spcAft>
+                <a:spcPts val="0"/>
+              </a:spcAft>
+              <a:buClr>
+                <a:schemeClr val="accent1"/>
+              </a:buClr>
+              <a:buSzPct val="80000"/>
+              <a:buFont typeface="Wingdings 3" charset="2"/>
+              <a:buChar char=""/>
+              <a:defRPr sz="1200" b="0" i="0" kern="1200">
+                <a:solidFill>
+                  <a:schemeClr val="tx1">
+                    <a:lumMod val="75000"/>
+                    <a:lumOff val="25000"/>
+                  </a:schemeClr>
+                </a:solidFill>
+                <a:latin typeface="+mn-lt"/>
+                <a:ea typeface="+mn-ea"/>
+                <a:cs typeface="+mn-cs"/>
+              </a:defRPr>
+            </a:lvl4pPr>
+            <a:lvl5pPr marL="2057400" indent="-228600" algn="l" defTabSz="457200" rtl="0" eaLnBrk="1" latinLnBrk="0" hangingPunct="1">
+              <a:spcBef>
+                <a:spcPts val="1000"/>
+              </a:spcBef>
+              <a:spcAft>
+                <a:spcPts val="0"/>
+              </a:spcAft>
+              <a:buClr>
+                <a:schemeClr val="accent1"/>
+              </a:buClr>
+              <a:buSzPct val="80000"/>
+              <a:buFont typeface="Wingdings 3" charset="2"/>
+              <a:buChar char=""/>
+              <a:defRPr sz="1200" b="0" i="0" kern="1200">
+                <a:solidFill>
+                  <a:schemeClr val="tx1">
+                    <a:lumMod val="75000"/>
+                    <a:lumOff val="25000"/>
+                  </a:schemeClr>
+                </a:solidFill>
+                <a:latin typeface="+mn-lt"/>
+                <a:ea typeface="+mn-ea"/>
+                <a:cs typeface="+mn-cs"/>
+              </a:defRPr>
+            </a:lvl5pPr>
+            <a:lvl6pPr marL="2514600" indent="-228600" algn="l" defTabSz="457200" rtl="0" eaLnBrk="1" latinLnBrk="0" hangingPunct="1">
+              <a:spcBef>
+                <a:spcPts val="1000"/>
+              </a:spcBef>
+              <a:spcAft>
+                <a:spcPts val="0"/>
+              </a:spcAft>
+              <a:buClr>
+                <a:schemeClr val="accent1"/>
+              </a:buClr>
+              <a:buSzPct val="80000"/>
+              <a:buFont typeface="Wingdings 3" charset="2"/>
+              <a:buChar char=""/>
+              <a:defRPr sz="1200" b="0" i="0" kern="1200">
+                <a:solidFill>
+                  <a:schemeClr val="tx1">
+                    <a:lumMod val="75000"/>
+                    <a:lumOff val="25000"/>
+                  </a:schemeClr>
+                </a:solidFill>
+                <a:latin typeface="+mn-lt"/>
+                <a:ea typeface="+mn-ea"/>
+                <a:cs typeface="+mn-cs"/>
+              </a:defRPr>
+            </a:lvl6pPr>
+            <a:lvl7pPr marL="2971800" indent="-228600" algn="l" defTabSz="457200" rtl="0" eaLnBrk="1" latinLnBrk="0" hangingPunct="1">
+              <a:spcBef>
+                <a:spcPts val="1000"/>
+              </a:spcBef>
+              <a:spcAft>
+                <a:spcPts val="0"/>
+              </a:spcAft>
+              <a:buClr>
+                <a:schemeClr val="accent1"/>
+              </a:buClr>
+              <a:buSzPct val="80000"/>
+              <a:buFont typeface="Wingdings 3" charset="2"/>
+              <a:buChar char=""/>
+              <a:defRPr sz="1200" b="0" i="0" kern="1200">
+                <a:solidFill>
+                  <a:schemeClr val="tx1">
+                    <a:lumMod val="75000"/>
+                    <a:lumOff val="25000"/>
+                  </a:schemeClr>
+                </a:solidFill>
+                <a:latin typeface="+mn-lt"/>
+                <a:ea typeface="+mn-ea"/>
+                <a:cs typeface="+mn-cs"/>
+              </a:defRPr>
+            </a:lvl7pPr>
+            <a:lvl8pPr marL="3429000" indent="-228600" algn="l" defTabSz="457200" rtl="0" eaLnBrk="1" latinLnBrk="0" hangingPunct="1">
+              <a:spcBef>
+                <a:spcPts val="1000"/>
+              </a:spcBef>
+              <a:spcAft>
+                <a:spcPts val="0"/>
+              </a:spcAft>
+              <a:buClr>
+                <a:schemeClr val="accent1"/>
+              </a:buClr>
+              <a:buSzPct val="80000"/>
+              <a:buFont typeface="Wingdings 3" charset="2"/>
+              <a:buChar char=""/>
+              <a:defRPr sz="1200" b="0" i="0" kern="1200">
+                <a:solidFill>
+                  <a:schemeClr val="tx1">
+                    <a:lumMod val="75000"/>
+                    <a:lumOff val="25000"/>
+                  </a:schemeClr>
+                </a:solidFill>
+                <a:latin typeface="+mn-lt"/>
+                <a:ea typeface="+mn-ea"/>
+                <a:cs typeface="+mn-cs"/>
+              </a:defRPr>
+            </a:lvl8pPr>
+            <a:lvl9pPr marL="3886200" indent="-228600" algn="l" defTabSz="457200" rtl="0" eaLnBrk="1" latinLnBrk="0" hangingPunct="1">
+              <a:spcBef>
+                <a:spcPts val="1000"/>
+              </a:spcBef>
+              <a:spcAft>
+                <a:spcPts val="0"/>
+              </a:spcAft>
+              <a:buClr>
+                <a:schemeClr val="accent1"/>
+              </a:buClr>
+              <a:buSzPct val="80000"/>
+              <a:buFont typeface="Wingdings 3" charset="2"/>
+              <a:buChar char=""/>
+              <a:defRPr sz="1200" b="0" i="0" kern="1200">
+                <a:solidFill>
+                  <a:schemeClr val="tx1">
+                    <a:lumMod val="75000"/>
+                    <a:lumOff val="25000"/>
+                  </a:schemeClr>
+                </a:solidFill>
+                <a:latin typeface="+mn-lt"/>
+                <a:ea typeface="+mn-ea"/>
+                <a:cs typeface="+mn-cs"/>
+              </a:defRPr>
+            </a:lvl9pPr>
+          </a:lstStyle>
+          <a:p>
+            <a:pPr marL="0" indent="0">
+              <a:buNone/>
+            </a:pPr>
+            <a:r>
+              <a:rPr lang="en-US" sz="1400" dirty="0"/>
+              <a:t>Common Cash Flow Applications</a:t>
+            </a:r>
+          </a:p>
+        </p:txBody>
+      </p:sp>
+      <p:sp>
+        <p:nvSpPr>
+          <p:cNvPr id="7" name="Content Placeholder 2">
+            <a:extLst>
+              <a:ext uri="{FF2B5EF4-FFF2-40B4-BE49-F238E27FC236}">
+                <a16:creationId xmlns:a16="http://schemas.microsoft.com/office/drawing/2014/main" id="{EE1A2269-9CB7-D78D-F2AA-2C255022BB68}"/>
+              </a:ext>
+            </a:extLst>
+          </p:cNvPr>
+          <p:cNvSpPr txBox="1">
+            <a:spLocks/>
+          </p:cNvSpPr>
+          <p:nvPr/>
+        </p:nvSpPr>
+        <p:spPr>
+          <a:xfrm>
+            <a:off x="117248" y="4196468"/>
+            <a:ext cx="4062668" cy="377999"/>
+          </a:xfrm>
+          <a:prstGeom prst="rect">
+            <a:avLst/>
+          </a:prstGeom>
+        </p:spPr>
+        <p:txBody>
+          <a:bodyPr vert="horz" lIns="91440" tIns="45720" rIns="91440" bIns="45720" rtlCol="0">
+            <a:normAutofit/>
+          </a:bodyPr>
+          <a:lstStyle>
+            <a:lvl1pPr marL="342900" indent="-342900" algn="l" defTabSz="457200" rtl="0" eaLnBrk="1" latinLnBrk="0" hangingPunct="1">
+              <a:spcBef>
+                <a:spcPts val="1000"/>
+              </a:spcBef>
+              <a:spcAft>
+                <a:spcPts val="0"/>
+              </a:spcAft>
+              <a:buClr>
+                <a:schemeClr val="accent1"/>
+              </a:buClr>
+              <a:buSzPct val="80000"/>
+              <a:buFont typeface="Wingdings 3" charset="2"/>
+              <a:buChar char=""/>
+              <a:defRPr sz="1800" b="0" i="0" kern="1200">
+                <a:solidFill>
+                  <a:schemeClr val="tx1">
+                    <a:lumMod val="75000"/>
+                    <a:lumOff val="25000"/>
+                  </a:schemeClr>
+                </a:solidFill>
+                <a:latin typeface="+mn-lt"/>
+                <a:ea typeface="+mn-ea"/>
+                <a:cs typeface="+mn-cs"/>
+              </a:defRPr>
+            </a:lvl1pPr>
+            <a:lvl2pPr marL="742950" indent="-285750" algn="l" defTabSz="457200" rtl="0" eaLnBrk="1" latinLnBrk="0" hangingPunct="1">
+              <a:spcBef>
+                <a:spcPts val="1000"/>
+              </a:spcBef>
+              <a:spcAft>
+                <a:spcPts val="0"/>
+              </a:spcAft>
+              <a:buClr>
+                <a:schemeClr val="accent1"/>
+              </a:buClr>
+              <a:buSzPct val="80000"/>
+              <a:buFont typeface="Wingdings 3" charset="2"/>
+              <a:buChar char=""/>
+              <a:defRPr sz="1600" b="0" i="0" kern="1200">
+                <a:solidFill>
+                  <a:schemeClr val="tx1">
+                    <a:lumMod val="75000"/>
+                    <a:lumOff val="25000"/>
+                  </a:schemeClr>
+                </a:solidFill>
+                <a:latin typeface="+mn-lt"/>
+                <a:ea typeface="+mn-ea"/>
+                <a:cs typeface="+mn-cs"/>
+              </a:defRPr>
+            </a:lvl2pPr>
+            <a:lvl3pPr marL="1143000" indent="-228600" algn="l" defTabSz="457200" rtl="0" eaLnBrk="1" latinLnBrk="0" hangingPunct="1">
+              <a:spcBef>
+                <a:spcPts val="1000"/>
+              </a:spcBef>
+              <a:spcAft>
+                <a:spcPts val="0"/>
+              </a:spcAft>
+              <a:buClr>
+                <a:schemeClr val="accent1"/>
+              </a:buClr>
+              <a:buSzPct val="80000"/>
+              <a:buFont typeface="Wingdings 3" charset="2"/>
+              <a:buChar char=""/>
+              <a:defRPr sz="1400" b="0" i="0" kern="1200">
+                <a:solidFill>
+                  <a:schemeClr val="tx1">
+                    <a:lumMod val="75000"/>
+                    <a:lumOff val="25000"/>
+                  </a:schemeClr>
+                </a:solidFill>
+                <a:latin typeface="+mn-lt"/>
+                <a:ea typeface="+mn-ea"/>
+                <a:cs typeface="+mn-cs"/>
+              </a:defRPr>
+            </a:lvl3pPr>
+            <a:lvl4pPr marL="1600200" indent="-228600" algn="l" defTabSz="457200" rtl="0" eaLnBrk="1" latinLnBrk="0" hangingPunct="1">
+              <a:spcBef>
+                <a:spcPts val="1000"/>
+              </a:spcBef>
+              <a:spcAft>
+                <a:spcPts val="0"/>
+              </a:spcAft>
+              <a:buClr>
+                <a:schemeClr val="accent1"/>
+              </a:buClr>
+              <a:buSzPct val="80000"/>
+              <a:buFont typeface="Wingdings 3" charset="2"/>
+              <a:buChar char=""/>
+              <a:defRPr sz="1200" b="0" i="0" kern="1200">
+                <a:solidFill>
+                  <a:schemeClr val="tx1">
+                    <a:lumMod val="75000"/>
+                    <a:lumOff val="25000"/>
+                  </a:schemeClr>
+                </a:solidFill>
+                <a:latin typeface="+mn-lt"/>
+                <a:ea typeface="+mn-ea"/>
+                <a:cs typeface="+mn-cs"/>
+              </a:defRPr>
+            </a:lvl4pPr>
+            <a:lvl5pPr marL="2057400" indent="-228600" algn="l" defTabSz="457200" rtl="0" eaLnBrk="1" latinLnBrk="0" hangingPunct="1">
+              <a:spcBef>
+                <a:spcPts val="1000"/>
+              </a:spcBef>
+              <a:spcAft>
+                <a:spcPts val="0"/>
+              </a:spcAft>
+              <a:buClr>
+                <a:schemeClr val="accent1"/>
+              </a:buClr>
+              <a:buSzPct val="80000"/>
+              <a:buFont typeface="Wingdings 3" charset="2"/>
+              <a:buChar char=""/>
+              <a:defRPr sz="1200" b="0" i="0" kern="1200">
+                <a:solidFill>
+                  <a:schemeClr val="tx1">
+                    <a:lumMod val="75000"/>
+                    <a:lumOff val="25000"/>
+                  </a:schemeClr>
+                </a:solidFill>
+                <a:latin typeface="+mn-lt"/>
+                <a:ea typeface="+mn-ea"/>
+                <a:cs typeface="+mn-cs"/>
+              </a:defRPr>
+            </a:lvl5pPr>
+            <a:lvl6pPr marL="2514600" indent="-228600" algn="l" defTabSz="457200" rtl="0" eaLnBrk="1" latinLnBrk="0" hangingPunct="1">
+              <a:spcBef>
+                <a:spcPts val="1000"/>
+              </a:spcBef>
+              <a:spcAft>
+                <a:spcPts val="0"/>
+              </a:spcAft>
+              <a:buClr>
+                <a:schemeClr val="accent1"/>
+              </a:buClr>
+              <a:buSzPct val="80000"/>
+              <a:buFont typeface="Wingdings 3" charset="2"/>
+              <a:buChar char=""/>
+              <a:defRPr sz="1200" b="0" i="0" kern="1200">
+                <a:solidFill>
+                  <a:schemeClr val="tx1">
+                    <a:lumMod val="75000"/>
+                    <a:lumOff val="25000"/>
+                  </a:schemeClr>
+                </a:solidFill>
+                <a:latin typeface="+mn-lt"/>
+                <a:ea typeface="+mn-ea"/>
+                <a:cs typeface="+mn-cs"/>
+              </a:defRPr>
+            </a:lvl6pPr>
+            <a:lvl7pPr marL="2971800" indent="-228600" algn="l" defTabSz="457200" rtl="0" eaLnBrk="1" latinLnBrk="0" hangingPunct="1">
+              <a:spcBef>
+                <a:spcPts val="1000"/>
+              </a:spcBef>
+              <a:spcAft>
+                <a:spcPts val="0"/>
+              </a:spcAft>
+              <a:buClr>
+                <a:schemeClr val="accent1"/>
+              </a:buClr>
+              <a:buSzPct val="80000"/>
+              <a:buFont typeface="Wingdings 3" charset="2"/>
+              <a:buChar char=""/>
+              <a:defRPr sz="1200" b="0" i="0" kern="1200">
+                <a:solidFill>
+                  <a:schemeClr val="tx1">
+                    <a:lumMod val="75000"/>
+                    <a:lumOff val="25000"/>
+                  </a:schemeClr>
+                </a:solidFill>
+                <a:latin typeface="+mn-lt"/>
+                <a:ea typeface="+mn-ea"/>
+                <a:cs typeface="+mn-cs"/>
+              </a:defRPr>
+            </a:lvl7pPr>
+            <a:lvl8pPr marL="3429000" indent="-228600" algn="l" defTabSz="457200" rtl="0" eaLnBrk="1" latinLnBrk="0" hangingPunct="1">
+              <a:spcBef>
+                <a:spcPts val="1000"/>
+              </a:spcBef>
+              <a:spcAft>
+                <a:spcPts val="0"/>
+              </a:spcAft>
+              <a:buClr>
+                <a:schemeClr val="accent1"/>
+              </a:buClr>
+              <a:buSzPct val="80000"/>
+              <a:buFont typeface="Wingdings 3" charset="2"/>
+              <a:buChar char=""/>
+              <a:defRPr sz="1200" b="0" i="0" kern="1200">
+                <a:solidFill>
+                  <a:schemeClr val="tx1">
+                    <a:lumMod val="75000"/>
+                    <a:lumOff val="25000"/>
+                  </a:schemeClr>
+                </a:solidFill>
+                <a:latin typeface="+mn-lt"/>
+                <a:ea typeface="+mn-ea"/>
+                <a:cs typeface="+mn-cs"/>
+              </a:defRPr>
+            </a:lvl8pPr>
+            <a:lvl9pPr marL="3886200" indent="-228600" algn="l" defTabSz="457200" rtl="0" eaLnBrk="1" latinLnBrk="0" hangingPunct="1">
+              <a:spcBef>
+                <a:spcPts val="1000"/>
+              </a:spcBef>
+              <a:spcAft>
+                <a:spcPts val="0"/>
+              </a:spcAft>
+              <a:buClr>
+                <a:schemeClr val="accent1"/>
+              </a:buClr>
+              <a:buSzPct val="80000"/>
+              <a:buFont typeface="Wingdings 3" charset="2"/>
+              <a:buChar char=""/>
+              <a:defRPr sz="1200" b="0" i="0" kern="1200">
+                <a:solidFill>
+                  <a:schemeClr val="tx1">
+                    <a:lumMod val="75000"/>
+                    <a:lumOff val="25000"/>
+                  </a:schemeClr>
+                </a:solidFill>
+                <a:latin typeface="+mn-lt"/>
+                <a:ea typeface="+mn-ea"/>
+                <a:cs typeface="+mn-cs"/>
+              </a:defRPr>
+            </a:lvl9pPr>
+          </a:lstStyle>
+          <a:p>
+            <a:pPr marL="0" indent="0">
+              <a:buNone/>
+            </a:pPr>
+            <a:endParaRPr lang="en-US" dirty="0"/>
+          </a:p>
+        </p:txBody>
+      </p:sp>
+      <p:sp>
+        <p:nvSpPr>
+          <p:cNvPr id="9" name="TextBox 8">
+            <a:extLst>
+              <a:ext uri="{FF2B5EF4-FFF2-40B4-BE49-F238E27FC236}">
+                <a16:creationId xmlns:a16="http://schemas.microsoft.com/office/drawing/2014/main" id="{935065E8-B245-ACF7-1E53-587354147EDB}"/>
+              </a:ext>
+            </a:extLst>
+          </p:cNvPr>
+          <p:cNvSpPr txBox="1"/>
+          <p:nvPr/>
+        </p:nvSpPr>
+        <p:spPr>
+          <a:xfrm>
+            <a:off x="259643" y="4009561"/>
+            <a:ext cx="3098700" cy="307777"/>
+          </a:xfrm>
+          <a:prstGeom prst="rect">
+            <a:avLst/>
+          </a:prstGeom>
+          <a:noFill/>
+        </p:spPr>
+        <p:txBody>
+          <a:bodyPr wrap="square">
+            <a:spAutoFit/>
+          </a:bodyPr>
+          <a:lstStyle/>
+          <a:p>
+            <a:r>
+              <a:rPr lang="en-US" sz="1400" dirty="0"/>
+              <a:t>Enterprise Modeling and Analytics</a:t>
+            </a:r>
+          </a:p>
+        </p:txBody>
+      </p:sp>
+      <p:sp>
+        <p:nvSpPr>
+          <p:cNvPr id="10" name="Rectangle 9">
+            <a:extLst>
+              <a:ext uri="{FF2B5EF4-FFF2-40B4-BE49-F238E27FC236}">
+                <a16:creationId xmlns:a16="http://schemas.microsoft.com/office/drawing/2014/main" id="{82420277-E640-F602-1271-98EC524CF2D6}"/>
+              </a:ext>
+            </a:extLst>
+          </p:cNvPr>
+          <p:cNvSpPr/>
+          <p:nvPr/>
+        </p:nvSpPr>
+        <p:spPr>
+          <a:xfrm>
+            <a:off x="9684328" y="2987326"/>
+            <a:ext cx="1850970" cy="890251"/>
+          </a:xfrm>
+          <a:prstGeom prst="rect">
+            <a:avLst/>
+          </a:prstGeom>
+        </p:spPr>
+        <p:style>
+          <a:lnRef idx="2">
+            <a:schemeClr val="accent1">
+              <a:shade val="15000"/>
+            </a:schemeClr>
+          </a:lnRef>
+          <a:fillRef idx="1">
+            <a:schemeClr val="accent1"/>
+          </a:fillRef>
+          <a:effectRef idx="0">
+            <a:schemeClr val="accent1"/>
+          </a:effectRef>
+          <a:fontRef idx="minor">
+            <a:schemeClr val="lt1"/>
+          </a:fontRef>
+        </p:style>
+        <p:txBody>
+          <a:bodyPr rtlCol="0" anchor="ctr"/>
+          <a:lstStyle/>
+          <a:p>
+            <a:pPr algn="ctr"/>
+            <a:r>
+              <a:rPr lang="en-US" altLang="zh-CN" dirty="0"/>
+              <a:t>Loss severity</a:t>
+            </a:r>
+            <a:endParaRPr lang="en-US" dirty="0"/>
+          </a:p>
+        </p:txBody>
+      </p:sp>
+      <p:sp>
+        <p:nvSpPr>
+          <p:cNvPr id="11" name="Content Placeholder 2">
+            <a:extLst>
+              <a:ext uri="{FF2B5EF4-FFF2-40B4-BE49-F238E27FC236}">
+                <a16:creationId xmlns:a16="http://schemas.microsoft.com/office/drawing/2014/main" id="{FA3CF30E-B820-0981-059C-A22403E3347E}"/>
+              </a:ext>
+            </a:extLst>
+          </p:cNvPr>
+          <p:cNvSpPr txBox="1">
+            <a:spLocks/>
+          </p:cNvSpPr>
+          <p:nvPr/>
+        </p:nvSpPr>
+        <p:spPr>
+          <a:xfrm>
+            <a:off x="8753302" y="4001789"/>
+            <a:ext cx="3546764" cy="377999"/>
+          </a:xfrm>
+          <a:prstGeom prst="rect">
+            <a:avLst/>
+          </a:prstGeom>
+        </p:spPr>
+        <p:txBody>
+          <a:bodyPr vert="horz" lIns="91440" tIns="45720" rIns="91440" bIns="45720" rtlCol="0">
+            <a:noAutofit/>
+          </a:bodyPr>
+          <a:lstStyle>
+            <a:lvl1pPr marL="342900" indent="-342900" algn="l" defTabSz="457200" rtl="0" eaLnBrk="1" latinLnBrk="0" hangingPunct="1">
+              <a:spcBef>
+                <a:spcPts val="1000"/>
+              </a:spcBef>
+              <a:spcAft>
+                <a:spcPts val="0"/>
+              </a:spcAft>
+              <a:buClr>
+                <a:schemeClr val="accent1"/>
+              </a:buClr>
+              <a:buSzPct val="80000"/>
+              <a:buFont typeface="Wingdings 3" charset="2"/>
+              <a:buChar char=""/>
+              <a:defRPr sz="1800" b="0" i="0" kern="1200">
+                <a:solidFill>
+                  <a:schemeClr val="tx1">
+                    <a:lumMod val="75000"/>
+                    <a:lumOff val="25000"/>
+                  </a:schemeClr>
+                </a:solidFill>
+                <a:latin typeface="+mn-lt"/>
+                <a:ea typeface="+mn-ea"/>
+                <a:cs typeface="+mn-cs"/>
+              </a:defRPr>
+            </a:lvl1pPr>
+            <a:lvl2pPr marL="742950" indent="-285750" algn="l" defTabSz="457200" rtl="0" eaLnBrk="1" latinLnBrk="0" hangingPunct="1">
+              <a:spcBef>
+                <a:spcPts val="1000"/>
+              </a:spcBef>
+              <a:spcAft>
+                <a:spcPts val="0"/>
+              </a:spcAft>
+              <a:buClr>
+                <a:schemeClr val="accent1"/>
+              </a:buClr>
+              <a:buSzPct val="80000"/>
+              <a:buFont typeface="Wingdings 3" charset="2"/>
+              <a:buChar char=""/>
+              <a:defRPr sz="1600" b="0" i="0" kern="1200">
+                <a:solidFill>
+                  <a:schemeClr val="tx1">
+                    <a:lumMod val="75000"/>
+                    <a:lumOff val="25000"/>
+                  </a:schemeClr>
+                </a:solidFill>
+                <a:latin typeface="+mn-lt"/>
+                <a:ea typeface="+mn-ea"/>
+                <a:cs typeface="+mn-cs"/>
+              </a:defRPr>
+            </a:lvl2pPr>
+            <a:lvl3pPr marL="1143000" indent="-228600" algn="l" defTabSz="457200" rtl="0" eaLnBrk="1" latinLnBrk="0" hangingPunct="1">
+              <a:spcBef>
+                <a:spcPts val="1000"/>
+              </a:spcBef>
+              <a:spcAft>
+                <a:spcPts val="0"/>
+              </a:spcAft>
+              <a:buClr>
+                <a:schemeClr val="accent1"/>
+              </a:buClr>
+              <a:buSzPct val="80000"/>
+              <a:buFont typeface="Wingdings 3" charset="2"/>
+              <a:buChar char=""/>
+              <a:defRPr sz="1400" b="0" i="0" kern="1200">
+                <a:solidFill>
+                  <a:schemeClr val="tx1">
+                    <a:lumMod val="75000"/>
+                    <a:lumOff val="25000"/>
+                  </a:schemeClr>
+                </a:solidFill>
+                <a:latin typeface="+mn-lt"/>
+                <a:ea typeface="+mn-ea"/>
+                <a:cs typeface="+mn-cs"/>
+              </a:defRPr>
+            </a:lvl3pPr>
+            <a:lvl4pPr marL="1600200" indent="-228600" algn="l" defTabSz="457200" rtl="0" eaLnBrk="1" latinLnBrk="0" hangingPunct="1">
+              <a:spcBef>
+                <a:spcPts val="1000"/>
+              </a:spcBef>
+              <a:spcAft>
+                <a:spcPts val="0"/>
+              </a:spcAft>
+              <a:buClr>
+                <a:schemeClr val="accent1"/>
+              </a:buClr>
+              <a:buSzPct val="80000"/>
+              <a:buFont typeface="Wingdings 3" charset="2"/>
+              <a:buChar char=""/>
+              <a:defRPr sz="1200" b="0" i="0" kern="1200">
+                <a:solidFill>
+                  <a:schemeClr val="tx1">
+                    <a:lumMod val="75000"/>
+                    <a:lumOff val="25000"/>
+                  </a:schemeClr>
+                </a:solidFill>
+                <a:latin typeface="+mn-lt"/>
+                <a:ea typeface="+mn-ea"/>
+                <a:cs typeface="+mn-cs"/>
+              </a:defRPr>
+            </a:lvl4pPr>
+            <a:lvl5pPr marL="2057400" indent="-228600" algn="l" defTabSz="457200" rtl="0" eaLnBrk="1" latinLnBrk="0" hangingPunct="1">
+              <a:spcBef>
+                <a:spcPts val="1000"/>
+              </a:spcBef>
+              <a:spcAft>
+                <a:spcPts val="0"/>
+              </a:spcAft>
+              <a:buClr>
+                <a:schemeClr val="accent1"/>
+              </a:buClr>
+              <a:buSzPct val="80000"/>
+              <a:buFont typeface="Wingdings 3" charset="2"/>
+              <a:buChar char=""/>
+              <a:defRPr sz="1200" b="0" i="0" kern="1200">
+                <a:solidFill>
+                  <a:schemeClr val="tx1">
+                    <a:lumMod val="75000"/>
+                    <a:lumOff val="25000"/>
+                  </a:schemeClr>
+                </a:solidFill>
+                <a:latin typeface="+mn-lt"/>
+                <a:ea typeface="+mn-ea"/>
+                <a:cs typeface="+mn-cs"/>
+              </a:defRPr>
+            </a:lvl5pPr>
+            <a:lvl6pPr marL="2514600" indent="-228600" algn="l" defTabSz="457200" rtl="0" eaLnBrk="1" latinLnBrk="0" hangingPunct="1">
+              <a:spcBef>
+                <a:spcPts val="1000"/>
+              </a:spcBef>
+              <a:spcAft>
+                <a:spcPts val="0"/>
+              </a:spcAft>
+              <a:buClr>
+                <a:schemeClr val="accent1"/>
+              </a:buClr>
+              <a:buSzPct val="80000"/>
+              <a:buFont typeface="Wingdings 3" charset="2"/>
+              <a:buChar char=""/>
+              <a:defRPr sz="1200" b="0" i="0" kern="1200">
+                <a:solidFill>
+                  <a:schemeClr val="tx1">
+                    <a:lumMod val="75000"/>
+                    <a:lumOff val="25000"/>
+                  </a:schemeClr>
+                </a:solidFill>
+                <a:latin typeface="+mn-lt"/>
+                <a:ea typeface="+mn-ea"/>
+                <a:cs typeface="+mn-cs"/>
+              </a:defRPr>
+            </a:lvl6pPr>
+            <a:lvl7pPr marL="2971800" indent="-228600" algn="l" defTabSz="457200" rtl="0" eaLnBrk="1" latinLnBrk="0" hangingPunct="1">
+              <a:spcBef>
+                <a:spcPts val="1000"/>
+              </a:spcBef>
+              <a:spcAft>
+                <a:spcPts val="0"/>
+              </a:spcAft>
+              <a:buClr>
+                <a:schemeClr val="accent1"/>
+              </a:buClr>
+              <a:buSzPct val="80000"/>
+              <a:buFont typeface="Wingdings 3" charset="2"/>
+              <a:buChar char=""/>
+              <a:defRPr sz="1200" b="0" i="0" kern="1200">
+                <a:solidFill>
+                  <a:schemeClr val="tx1">
+                    <a:lumMod val="75000"/>
+                    <a:lumOff val="25000"/>
+                  </a:schemeClr>
+                </a:solidFill>
+                <a:latin typeface="+mn-lt"/>
+                <a:ea typeface="+mn-ea"/>
+                <a:cs typeface="+mn-cs"/>
+              </a:defRPr>
+            </a:lvl7pPr>
+            <a:lvl8pPr marL="3429000" indent="-228600" algn="l" defTabSz="457200" rtl="0" eaLnBrk="1" latinLnBrk="0" hangingPunct="1">
+              <a:spcBef>
+                <a:spcPts val="1000"/>
+              </a:spcBef>
+              <a:spcAft>
+                <a:spcPts val="0"/>
+              </a:spcAft>
+              <a:buClr>
+                <a:schemeClr val="accent1"/>
+              </a:buClr>
+              <a:buSzPct val="80000"/>
+              <a:buFont typeface="Wingdings 3" charset="2"/>
+              <a:buChar char=""/>
+              <a:defRPr sz="1200" b="0" i="0" kern="1200">
+                <a:solidFill>
+                  <a:schemeClr val="tx1">
+                    <a:lumMod val="75000"/>
+                    <a:lumOff val="25000"/>
+                  </a:schemeClr>
+                </a:solidFill>
+                <a:latin typeface="+mn-lt"/>
+                <a:ea typeface="+mn-ea"/>
+                <a:cs typeface="+mn-cs"/>
+              </a:defRPr>
+            </a:lvl8pPr>
+            <a:lvl9pPr marL="3886200" indent="-228600" algn="l" defTabSz="457200" rtl="0" eaLnBrk="1" latinLnBrk="0" hangingPunct="1">
+              <a:spcBef>
+                <a:spcPts val="1000"/>
+              </a:spcBef>
+              <a:spcAft>
+                <a:spcPts val="0"/>
+              </a:spcAft>
+              <a:buClr>
+                <a:schemeClr val="accent1"/>
+              </a:buClr>
+              <a:buSzPct val="80000"/>
+              <a:buFont typeface="Wingdings 3" charset="2"/>
+              <a:buChar char=""/>
+              <a:defRPr sz="1200" b="0" i="0" kern="1200">
+                <a:solidFill>
+                  <a:schemeClr val="tx1">
+                    <a:lumMod val="75000"/>
+                    <a:lumOff val="25000"/>
+                  </a:schemeClr>
+                </a:solidFill>
+                <a:latin typeface="+mn-lt"/>
+                <a:ea typeface="+mn-ea"/>
+                <a:cs typeface="+mn-cs"/>
+              </a:defRPr>
+            </a:lvl9pPr>
+          </a:lstStyle>
+          <a:p>
+            <a:pPr marL="0" indent="0">
+              <a:buNone/>
+            </a:pPr>
+            <a:r>
+              <a:rPr lang="en-US" sz="1400" dirty="0"/>
+              <a:t>Dollar loss / unpaid principal balance</a:t>
+            </a:r>
+          </a:p>
+        </p:txBody>
+      </p:sp>
+      <p:sp>
+        <p:nvSpPr>
+          <p:cNvPr id="12" name="Rectangle 11">
+            <a:extLst>
+              <a:ext uri="{FF2B5EF4-FFF2-40B4-BE49-F238E27FC236}">
+                <a16:creationId xmlns:a16="http://schemas.microsoft.com/office/drawing/2014/main" id="{F346B9A0-8B8D-3E4A-DEC0-964368D39743}"/>
+              </a:ext>
+            </a:extLst>
+          </p:cNvPr>
+          <p:cNvSpPr/>
+          <p:nvPr/>
+        </p:nvSpPr>
+        <p:spPr>
+          <a:xfrm>
+            <a:off x="618597" y="5558667"/>
+            <a:ext cx="922717" cy="442557"/>
+          </a:xfrm>
+          <a:prstGeom prst="rect">
+            <a:avLst/>
+          </a:prstGeom>
+        </p:spPr>
+        <p:style>
+          <a:lnRef idx="2">
+            <a:schemeClr val="accent1">
+              <a:shade val="15000"/>
+            </a:schemeClr>
+          </a:lnRef>
+          <a:fillRef idx="1">
+            <a:schemeClr val="accent1"/>
+          </a:fillRef>
+          <a:effectRef idx="0">
+            <a:schemeClr val="accent1"/>
+          </a:effectRef>
+          <a:fontRef idx="minor">
+            <a:schemeClr val="lt1"/>
+          </a:fontRef>
+        </p:style>
+        <p:txBody>
+          <a:bodyPr rtlCol="0" anchor="ctr"/>
+          <a:lstStyle/>
+          <a:p>
+            <a:pPr algn="ctr"/>
+            <a:r>
+              <a:rPr lang="en-US" altLang="zh-CN" dirty="0"/>
+              <a:t>SAS</a:t>
+            </a:r>
+            <a:endParaRPr lang="en-US" dirty="0"/>
+          </a:p>
+        </p:txBody>
+      </p:sp>
+      <p:sp>
+        <p:nvSpPr>
+          <p:cNvPr id="13" name="Rectangle 12">
+            <a:extLst>
+              <a:ext uri="{FF2B5EF4-FFF2-40B4-BE49-F238E27FC236}">
+                <a16:creationId xmlns:a16="http://schemas.microsoft.com/office/drawing/2014/main" id="{D1A1B61F-DCDF-8FCC-0127-A0A9DE0F238C}"/>
+              </a:ext>
+            </a:extLst>
+          </p:cNvPr>
+          <p:cNvSpPr/>
+          <p:nvPr/>
+        </p:nvSpPr>
+        <p:spPr>
+          <a:xfrm>
+            <a:off x="2441166" y="5250713"/>
+            <a:ext cx="1023503" cy="386104"/>
+          </a:xfrm>
+          <a:prstGeom prst="rect">
+            <a:avLst/>
+          </a:prstGeom>
+        </p:spPr>
+        <p:style>
+          <a:lnRef idx="2">
+            <a:schemeClr val="accent1">
+              <a:shade val="15000"/>
+            </a:schemeClr>
+          </a:lnRef>
+          <a:fillRef idx="1">
+            <a:schemeClr val="accent1"/>
+          </a:fillRef>
+          <a:effectRef idx="0">
+            <a:schemeClr val="accent1"/>
+          </a:effectRef>
+          <a:fontRef idx="minor">
+            <a:schemeClr val="lt1"/>
+          </a:fontRef>
+        </p:style>
+        <p:txBody>
+          <a:bodyPr rtlCol="0" anchor="ctr"/>
+          <a:lstStyle/>
+          <a:p>
+            <a:pPr algn="ctr"/>
+            <a:r>
+              <a:rPr lang="en-US" altLang="zh-CN" sz="1400" dirty="0"/>
+              <a:t>R/RStudio</a:t>
+            </a:r>
+            <a:endParaRPr lang="en-US" sz="1400" dirty="0"/>
+          </a:p>
+        </p:txBody>
+      </p:sp>
+      <p:sp>
+        <p:nvSpPr>
+          <p:cNvPr id="14" name="Rectangle 13">
+            <a:extLst>
+              <a:ext uri="{FF2B5EF4-FFF2-40B4-BE49-F238E27FC236}">
+                <a16:creationId xmlns:a16="http://schemas.microsoft.com/office/drawing/2014/main" id="{39E02AED-2106-FDE2-19E1-34D40C3491F9}"/>
+              </a:ext>
+            </a:extLst>
+          </p:cNvPr>
+          <p:cNvSpPr/>
+          <p:nvPr/>
+        </p:nvSpPr>
+        <p:spPr>
+          <a:xfrm>
+            <a:off x="5184933" y="5779946"/>
+            <a:ext cx="922717" cy="398721"/>
+          </a:xfrm>
+          <a:prstGeom prst="rect">
+            <a:avLst/>
+          </a:prstGeom>
+        </p:spPr>
+        <p:style>
+          <a:lnRef idx="2">
+            <a:schemeClr val="accent1">
+              <a:shade val="15000"/>
+            </a:schemeClr>
+          </a:lnRef>
+          <a:fillRef idx="1">
+            <a:schemeClr val="accent1"/>
+          </a:fillRef>
+          <a:effectRef idx="0">
+            <a:schemeClr val="accent1"/>
+          </a:effectRef>
+          <a:fontRef idx="minor">
+            <a:schemeClr val="lt1"/>
+          </a:fontRef>
+        </p:style>
+        <p:txBody>
+          <a:bodyPr rtlCol="0" anchor="ctr"/>
+          <a:lstStyle/>
+          <a:p>
+            <a:pPr algn="ctr"/>
+            <a:r>
+              <a:rPr lang="en-US" altLang="zh-CN" dirty="0"/>
+              <a:t>Unix</a:t>
+            </a:r>
+            <a:endParaRPr lang="en-US" dirty="0"/>
+          </a:p>
+        </p:txBody>
+      </p:sp>
+      <p:sp>
+        <p:nvSpPr>
+          <p:cNvPr id="15" name="Rectangle 14">
+            <a:extLst>
+              <a:ext uri="{FF2B5EF4-FFF2-40B4-BE49-F238E27FC236}">
+                <a16:creationId xmlns:a16="http://schemas.microsoft.com/office/drawing/2014/main" id="{6FE94FFC-12F0-1356-CFB5-F73145587BD5}"/>
+              </a:ext>
+            </a:extLst>
+          </p:cNvPr>
+          <p:cNvSpPr/>
+          <p:nvPr/>
+        </p:nvSpPr>
+        <p:spPr>
+          <a:xfrm>
+            <a:off x="8833758" y="5790567"/>
+            <a:ext cx="922717" cy="392414"/>
+          </a:xfrm>
+          <a:prstGeom prst="rect">
+            <a:avLst/>
+          </a:prstGeom>
+        </p:spPr>
+        <p:style>
+          <a:lnRef idx="2">
+            <a:schemeClr val="accent1">
+              <a:shade val="15000"/>
+            </a:schemeClr>
+          </a:lnRef>
+          <a:fillRef idx="1">
+            <a:schemeClr val="accent1"/>
+          </a:fillRef>
+          <a:effectRef idx="0">
+            <a:schemeClr val="accent1"/>
+          </a:effectRef>
+          <a:fontRef idx="minor">
+            <a:schemeClr val="lt1"/>
+          </a:fontRef>
+        </p:style>
+        <p:txBody>
+          <a:bodyPr rtlCol="0" anchor="ctr"/>
+          <a:lstStyle/>
+          <a:p>
+            <a:pPr algn="ctr"/>
+            <a:r>
+              <a:rPr lang="en-US" altLang="zh-CN" dirty="0"/>
+              <a:t>Putty</a:t>
+            </a:r>
+            <a:endParaRPr lang="en-US" dirty="0"/>
+          </a:p>
+        </p:txBody>
+      </p:sp>
+      <p:sp>
+        <p:nvSpPr>
+          <p:cNvPr id="16" name="Rectangle 15">
+            <a:extLst>
+              <a:ext uri="{FF2B5EF4-FFF2-40B4-BE49-F238E27FC236}">
+                <a16:creationId xmlns:a16="http://schemas.microsoft.com/office/drawing/2014/main" id="{8E091B60-5CA9-8B90-801C-EF861E3BDE58}"/>
+              </a:ext>
+            </a:extLst>
+          </p:cNvPr>
+          <p:cNvSpPr/>
+          <p:nvPr/>
+        </p:nvSpPr>
+        <p:spPr>
+          <a:xfrm>
+            <a:off x="7007502" y="5764108"/>
+            <a:ext cx="1023503" cy="431142"/>
+          </a:xfrm>
+          <a:prstGeom prst="rect">
+            <a:avLst/>
+          </a:prstGeom>
+        </p:spPr>
+        <p:style>
+          <a:lnRef idx="2">
+            <a:schemeClr val="accent1">
+              <a:shade val="15000"/>
+            </a:schemeClr>
+          </a:lnRef>
+          <a:fillRef idx="1">
+            <a:schemeClr val="accent1"/>
+          </a:fillRef>
+          <a:effectRef idx="0">
+            <a:schemeClr val="accent1"/>
+          </a:effectRef>
+          <a:fontRef idx="minor">
+            <a:schemeClr val="lt1"/>
+          </a:fontRef>
+        </p:style>
+        <p:txBody>
+          <a:bodyPr rtlCol="0" anchor="ctr"/>
+          <a:lstStyle/>
+          <a:p>
+            <a:pPr algn="ctr"/>
+            <a:r>
+              <a:rPr lang="en-US" altLang="zh-CN" dirty="0"/>
+              <a:t>WinSCP</a:t>
+            </a:r>
+            <a:endParaRPr lang="en-US" dirty="0"/>
+          </a:p>
+        </p:txBody>
+      </p:sp>
+      <p:sp>
+        <p:nvSpPr>
+          <p:cNvPr id="17" name="Rectangle 16">
+            <a:extLst>
+              <a:ext uri="{FF2B5EF4-FFF2-40B4-BE49-F238E27FC236}">
+                <a16:creationId xmlns:a16="http://schemas.microsoft.com/office/drawing/2014/main" id="{A1E22C01-B998-89AB-8C13-AF595AFC69FB}"/>
+              </a:ext>
+            </a:extLst>
+          </p:cNvPr>
+          <p:cNvSpPr/>
+          <p:nvPr/>
+        </p:nvSpPr>
+        <p:spPr>
+          <a:xfrm>
+            <a:off x="10346874" y="5764108"/>
+            <a:ext cx="940940" cy="389723"/>
+          </a:xfrm>
+          <a:prstGeom prst="rect">
+            <a:avLst/>
+          </a:prstGeom>
+        </p:spPr>
+        <p:style>
+          <a:lnRef idx="2">
+            <a:schemeClr val="accent1">
+              <a:shade val="15000"/>
+            </a:schemeClr>
+          </a:lnRef>
+          <a:fillRef idx="1">
+            <a:schemeClr val="accent1"/>
+          </a:fillRef>
+          <a:effectRef idx="0">
+            <a:schemeClr val="accent1"/>
+          </a:effectRef>
+          <a:fontRef idx="minor">
+            <a:schemeClr val="lt1"/>
+          </a:fontRef>
+        </p:style>
+        <p:txBody>
+          <a:bodyPr rtlCol="0" anchor="ctr"/>
+          <a:lstStyle/>
+          <a:p>
+            <a:pPr algn="ctr"/>
+            <a:r>
+              <a:rPr lang="en-US" altLang="zh-CN" dirty="0"/>
+              <a:t>Git</a:t>
+            </a:r>
+            <a:endParaRPr lang="en-US" dirty="0"/>
+          </a:p>
+        </p:txBody>
+      </p:sp>
+      <p:sp>
+        <p:nvSpPr>
+          <p:cNvPr id="18" name="Rectangle 17">
+            <a:extLst>
+              <a:ext uri="{FF2B5EF4-FFF2-40B4-BE49-F238E27FC236}">
+                <a16:creationId xmlns:a16="http://schemas.microsoft.com/office/drawing/2014/main" id="{47A74971-E5B0-9D99-12DB-F048AD38DDA6}"/>
+              </a:ext>
+            </a:extLst>
+          </p:cNvPr>
+          <p:cNvSpPr/>
+          <p:nvPr/>
+        </p:nvSpPr>
+        <p:spPr>
+          <a:xfrm>
+            <a:off x="2435525" y="6178667"/>
+            <a:ext cx="922717" cy="386104"/>
+          </a:xfrm>
+          <a:prstGeom prst="rect">
+            <a:avLst/>
+          </a:prstGeom>
+        </p:spPr>
+        <p:style>
+          <a:lnRef idx="2">
+            <a:schemeClr val="accent1">
+              <a:shade val="15000"/>
+            </a:schemeClr>
+          </a:lnRef>
+          <a:fillRef idx="1">
+            <a:schemeClr val="accent1"/>
+          </a:fillRef>
+          <a:effectRef idx="0">
+            <a:schemeClr val="accent1"/>
+          </a:effectRef>
+          <a:fontRef idx="minor">
+            <a:schemeClr val="lt1"/>
+          </a:fontRef>
+        </p:style>
+        <p:txBody>
+          <a:bodyPr rtlCol="0" anchor="ctr"/>
+          <a:lstStyle/>
+          <a:p>
+            <a:pPr algn="ctr"/>
+            <a:r>
+              <a:rPr lang="en-US" sz="1400" dirty="0"/>
+              <a:t>Python</a:t>
+            </a:r>
+          </a:p>
+        </p:txBody>
+      </p:sp>
+      <p:sp>
+        <p:nvSpPr>
+          <p:cNvPr id="19" name="Content Placeholder 2">
+            <a:extLst>
+              <a:ext uri="{FF2B5EF4-FFF2-40B4-BE49-F238E27FC236}">
+                <a16:creationId xmlns:a16="http://schemas.microsoft.com/office/drawing/2014/main" id="{F8D7C319-6BA3-AB7E-C66E-85829E947658}"/>
+              </a:ext>
+            </a:extLst>
+          </p:cNvPr>
+          <p:cNvSpPr txBox="1">
+            <a:spLocks/>
+          </p:cNvSpPr>
+          <p:nvPr/>
+        </p:nvSpPr>
+        <p:spPr>
+          <a:xfrm>
+            <a:off x="0" y="4681098"/>
+            <a:ext cx="11287814" cy="462437"/>
+          </a:xfrm>
+          <a:prstGeom prst="rect">
+            <a:avLst/>
+          </a:prstGeom>
+        </p:spPr>
+        <p:txBody>
+          <a:bodyPr vert="horz" lIns="91440" tIns="45720" rIns="91440" bIns="45720" rtlCol="0">
+            <a:normAutofit/>
+          </a:bodyPr>
+          <a:lstStyle>
+            <a:lvl1pPr marL="342900" indent="-342900" algn="l" defTabSz="457200" rtl="0" eaLnBrk="1" latinLnBrk="0" hangingPunct="1">
+              <a:spcBef>
+                <a:spcPts val="1000"/>
+              </a:spcBef>
+              <a:spcAft>
+                <a:spcPts val="0"/>
+              </a:spcAft>
+              <a:buClr>
+                <a:schemeClr val="accent1"/>
+              </a:buClr>
+              <a:buSzPct val="80000"/>
+              <a:buFont typeface="Wingdings 3" charset="2"/>
+              <a:buChar char=""/>
+              <a:defRPr sz="1800" b="0" i="0" kern="1200">
+                <a:solidFill>
+                  <a:schemeClr val="tx1">
+                    <a:lumMod val="75000"/>
+                    <a:lumOff val="25000"/>
+                  </a:schemeClr>
+                </a:solidFill>
+                <a:latin typeface="+mn-lt"/>
+                <a:ea typeface="+mn-ea"/>
+                <a:cs typeface="+mn-cs"/>
+              </a:defRPr>
+            </a:lvl1pPr>
+            <a:lvl2pPr marL="742950" indent="-285750" algn="l" defTabSz="457200" rtl="0" eaLnBrk="1" latinLnBrk="0" hangingPunct="1">
+              <a:spcBef>
+                <a:spcPts val="1000"/>
+              </a:spcBef>
+              <a:spcAft>
+                <a:spcPts val="0"/>
+              </a:spcAft>
+              <a:buClr>
+                <a:schemeClr val="accent1"/>
+              </a:buClr>
+              <a:buSzPct val="80000"/>
+              <a:buFont typeface="Wingdings 3" charset="2"/>
+              <a:buChar char=""/>
+              <a:defRPr sz="1600" b="0" i="0" kern="1200">
+                <a:solidFill>
+                  <a:schemeClr val="tx1">
+                    <a:lumMod val="75000"/>
+                    <a:lumOff val="25000"/>
+                  </a:schemeClr>
+                </a:solidFill>
+                <a:latin typeface="+mn-lt"/>
+                <a:ea typeface="+mn-ea"/>
+                <a:cs typeface="+mn-cs"/>
+              </a:defRPr>
+            </a:lvl2pPr>
+            <a:lvl3pPr marL="1143000" indent="-228600" algn="l" defTabSz="457200" rtl="0" eaLnBrk="1" latinLnBrk="0" hangingPunct="1">
+              <a:spcBef>
+                <a:spcPts val="1000"/>
+              </a:spcBef>
+              <a:spcAft>
+                <a:spcPts val="0"/>
+              </a:spcAft>
+              <a:buClr>
+                <a:schemeClr val="accent1"/>
+              </a:buClr>
+              <a:buSzPct val="80000"/>
+              <a:buFont typeface="Wingdings 3" charset="2"/>
+              <a:buChar char=""/>
+              <a:defRPr sz="1400" b="0" i="0" kern="1200">
+                <a:solidFill>
+                  <a:schemeClr val="tx1">
+                    <a:lumMod val="75000"/>
+                    <a:lumOff val="25000"/>
+                  </a:schemeClr>
+                </a:solidFill>
+                <a:latin typeface="+mn-lt"/>
+                <a:ea typeface="+mn-ea"/>
+                <a:cs typeface="+mn-cs"/>
+              </a:defRPr>
+            </a:lvl3pPr>
+            <a:lvl4pPr marL="1600200" indent="-228600" algn="l" defTabSz="457200" rtl="0" eaLnBrk="1" latinLnBrk="0" hangingPunct="1">
+              <a:spcBef>
+                <a:spcPts val="1000"/>
+              </a:spcBef>
+              <a:spcAft>
+                <a:spcPts val="0"/>
+              </a:spcAft>
+              <a:buClr>
+                <a:schemeClr val="accent1"/>
+              </a:buClr>
+              <a:buSzPct val="80000"/>
+              <a:buFont typeface="Wingdings 3" charset="2"/>
+              <a:buChar char=""/>
+              <a:defRPr sz="1200" b="0" i="0" kern="1200">
+                <a:solidFill>
+                  <a:schemeClr val="tx1">
+                    <a:lumMod val="75000"/>
+                    <a:lumOff val="25000"/>
+                  </a:schemeClr>
+                </a:solidFill>
+                <a:latin typeface="+mn-lt"/>
+                <a:ea typeface="+mn-ea"/>
+                <a:cs typeface="+mn-cs"/>
+              </a:defRPr>
+            </a:lvl4pPr>
+            <a:lvl5pPr marL="2057400" indent="-228600" algn="l" defTabSz="457200" rtl="0" eaLnBrk="1" latinLnBrk="0" hangingPunct="1">
+              <a:spcBef>
+                <a:spcPts val="1000"/>
+              </a:spcBef>
+              <a:spcAft>
+                <a:spcPts val="0"/>
+              </a:spcAft>
+              <a:buClr>
+                <a:schemeClr val="accent1"/>
+              </a:buClr>
+              <a:buSzPct val="80000"/>
+              <a:buFont typeface="Wingdings 3" charset="2"/>
+              <a:buChar char=""/>
+              <a:defRPr sz="1200" b="0" i="0" kern="1200">
+                <a:solidFill>
+                  <a:schemeClr val="tx1">
+                    <a:lumMod val="75000"/>
+                    <a:lumOff val="25000"/>
+                  </a:schemeClr>
+                </a:solidFill>
+                <a:latin typeface="+mn-lt"/>
+                <a:ea typeface="+mn-ea"/>
+                <a:cs typeface="+mn-cs"/>
+              </a:defRPr>
+            </a:lvl5pPr>
+            <a:lvl6pPr marL="2514600" indent="-228600" algn="l" defTabSz="457200" rtl="0" eaLnBrk="1" latinLnBrk="0" hangingPunct="1">
+              <a:spcBef>
+                <a:spcPts val="1000"/>
+              </a:spcBef>
+              <a:spcAft>
+                <a:spcPts val="0"/>
+              </a:spcAft>
+              <a:buClr>
+                <a:schemeClr val="accent1"/>
+              </a:buClr>
+              <a:buSzPct val="80000"/>
+              <a:buFont typeface="Wingdings 3" charset="2"/>
+              <a:buChar char=""/>
+              <a:defRPr sz="1200" b="0" i="0" kern="1200">
+                <a:solidFill>
+                  <a:schemeClr val="tx1">
+                    <a:lumMod val="75000"/>
+                    <a:lumOff val="25000"/>
+                  </a:schemeClr>
+                </a:solidFill>
+                <a:latin typeface="+mn-lt"/>
+                <a:ea typeface="+mn-ea"/>
+                <a:cs typeface="+mn-cs"/>
+              </a:defRPr>
+            </a:lvl6pPr>
+            <a:lvl7pPr marL="2971800" indent="-228600" algn="l" defTabSz="457200" rtl="0" eaLnBrk="1" latinLnBrk="0" hangingPunct="1">
+              <a:spcBef>
+                <a:spcPts val="1000"/>
+              </a:spcBef>
+              <a:spcAft>
+                <a:spcPts val="0"/>
+              </a:spcAft>
+              <a:buClr>
+                <a:schemeClr val="accent1"/>
+              </a:buClr>
+              <a:buSzPct val="80000"/>
+              <a:buFont typeface="Wingdings 3" charset="2"/>
+              <a:buChar char=""/>
+              <a:defRPr sz="1200" b="0" i="0" kern="1200">
+                <a:solidFill>
+                  <a:schemeClr val="tx1">
+                    <a:lumMod val="75000"/>
+                    <a:lumOff val="25000"/>
+                  </a:schemeClr>
+                </a:solidFill>
+                <a:latin typeface="+mn-lt"/>
+                <a:ea typeface="+mn-ea"/>
+                <a:cs typeface="+mn-cs"/>
+              </a:defRPr>
+            </a:lvl7pPr>
+            <a:lvl8pPr marL="3429000" indent="-228600" algn="l" defTabSz="457200" rtl="0" eaLnBrk="1" latinLnBrk="0" hangingPunct="1">
+              <a:spcBef>
+                <a:spcPts val="1000"/>
+              </a:spcBef>
+              <a:spcAft>
+                <a:spcPts val="0"/>
+              </a:spcAft>
+              <a:buClr>
+                <a:schemeClr val="accent1"/>
+              </a:buClr>
+              <a:buSzPct val="80000"/>
+              <a:buFont typeface="Wingdings 3" charset="2"/>
+              <a:buChar char=""/>
+              <a:defRPr sz="1200" b="0" i="0" kern="1200">
+                <a:solidFill>
+                  <a:schemeClr val="tx1">
+                    <a:lumMod val="75000"/>
+                    <a:lumOff val="25000"/>
+                  </a:schemeClr>
+                </a:solidFill>
+                <a:latin typeface="+mn-lt"/>
+                <a:ea typeface="+mn-ea"/>
+                <a:cs typeface="+mn-cs"/>
+              </a:defRPr>
+            </a:lvl8pPr>
+            <a:lvl9pPr marL="3886200" indent="-228600" algn="l" defTabSz="457200" rtl="0" eaLnBrk="1" latinLnBrk="0" hangingPunct="1">
+              <a:spcBef>
+                <a:spcPts val="1000"/>
+              </a:spcBef>
+              <a:spcAft>
+                <a:spcPts val="0"/>
+              </a:spcAft>
+              <a:buClr>
+                <a:schemeClr val="accent1"/>
+              </a:buClr>
+              <a:buSzPct val="80000"/>
+              <a:buFont typeface="Wingdings 3" charset="2"/>
+              <a:buChar char=""/>
+              <a:defRPr sz="1200" b="0" i="0" kern="1200">
+                <a:solidFill>
+                  <a:schemeClr val="tx1">
+                    <a:lumMod val="75000"/>
+                    <a:lumOff val="25000"/>
+                  </a:schemeClr>
+                </a:solidFill>
+                <a:latin typeface="+mn-lt"/>
+                <a:ea typeface="+mn-ea"/>
+                <a:cs typeface="+mn-cs"/>
+              </a:defRPr>
+            </a:lvl9pPr>
+          </a:lstStyle>
+          <a:p>
+            <a:r>
+              <a:rPr lang="en-US" altLang="zh-CN" dirty="0"/>
+              <a:t>Technologies:</a:t>
+            </a:r>
+            <a:endParaRPr lang="en-US" dirty="0"/>
+          </a:p>
+        </p:txBody>
+      </p:sp>
+      <p:cxnSp>
+        <p:nvCxnSpPr>
+          <p:cNvPr id="21" name="Straight Arrow Connector 20">
+            <a:extLst>
+              <a:ext uri="{FF2B5EF4-FFF2-40B4-BE49-F238E27FC236}">
+                <a16:creationId xmlns:a16="http://schemas.microsoft.com/office/drawing/2014/main" id="{96B7C64D-A991-32E6-C2D8-9B9B57914C51}"/>
+              </a:ext>
+            </a:extLst>
+          </p:cNvPr>
+          <p:cNvCxnSpPr>
+            <a:stCxn id="12" idx="3"/>
+            <a:endCxn id="13" idx="1"/>
+          </p:cNvCxnSpPr>
+          <p:nvPr/>
+        </p:nvCxnSpPr>
+        <p:spPr>
+          <a:xfrm flipV="1">
+            <a:off x="1541314" y="5443765"/>
+            <a:ext cx="899852" cy="336181"/>
+          </a:xfrm>
+          <a:prstGeom prst="straightConnector1">
+            <a:avLst/>
+          </a:prstGeom>
+          <a:ln>
+            <a:tailEnd type="triangle"/>
+          </a:ln>
+        </p:spPr>
+        <p:style>
+          <a:lnRef idx="1">
+            <a:schemeClr val="accent1"/>
+          </a:lnRef>
+          <a:fillRef idx="0">
+            <a:schemeClr val="accent1"/>
+          </a:fillRef>
+          <a:effectRef idx="0">
+            <a:schemeClr val="accent1"/>
+          </a:effectRef>
+          <a:fontRef idx="minor">
+            <a:schemeClr val="tx1"/>
+          </a:fontRef>
+        </p:style>
+      </p:cxnSp>
+      <p:cxnSp>
+        <p:nvCxnSpPr>
+          <p:cNvPr id="23" name="Straight Arrow Connector 22">
+            <a:extLst>
+              <a:ext uri="{FF2B5EF4-FFF2-40B4-BE49-F238E27FC236}">
+                <a16:creationId xmlns:a16="http://schemas.microsoft.com/office/drawing/2014/main" id="{D3F47D91-8991-0B5B-DEA9-A18F30F1CFF6}"/>
+              </a:ext>
+            </a:extLst>
+          </p:cNvPr>
+          <p:cNvCxnSpPr>
+            <a:stCxn id="12" idx="3"/>
+            <a:endCxn id="18" idx="1"/>
+          </p:cNvCxnSpPr>
+          <p:nvPr/>
+        </p:nvCxnSpPr>
+        <p:spPr>
+          <a:xfrm>
+            <a:off x="1541314" y="5779946"/>
+            <a:ext cx="894211" cy="591773"/>
+          </a:xfrm>
+          <a:prstGeom prst="straightConnector1">
+            <a:avLst/>
+          </a:prstGeom>
+          <a:ln>
+            <a:tailEnd type="triangle"/>
+          </a:ln>
+        </p:spPr>
+        <p:style>
+          <a:lnRef idx="1">
+            <a:schemeClr val="accent1"/>
+          </a:lnRef>
+          <a:fillRef idx="0">
+            <a:schemeClr val="accent1"/>
+          </a:fillRef>
+          <a:effectRef idx="0">
+            <a:schemeClr val="accent1"/>
+          </a:effectRef>
+          <a:fontRef idx="minor">
+            <a:schemeClr val="tx1"/>
+          </a:fontRef>
+        </p:style>
+      </p:cxnSp>
+      <p:sp>
+        <p:nvSpPr>
+          <p:cNvPr id="8" name="TextBox 7">
+            <a:extLst>
+              <a:ext uri="{FF2B5EF4-FFF2-40B4-BE49-F238E27FC236}">
+                <a16:creationId xmlns:a16="http://schemas.microsoft.com/office/drawing/2014/main" id="{9B5F8E24-132B-C328-20AD-389B40BDFB6D}"/>
+              </a:ext>
+            </a:extLst>
+          </p:cNvPr>
+          <p:cNvSpPr txBox="1"/>
+          <p:nvPr/>
+        </p:nvSpPr>
+        <p:spPr>
+          <a:xfrm>
+            <a:off x="8318270" y="6642556"/>
+            <a:ext cx="3873730" cy="215444"/>
+          </a:xfrm>
+          <a:prstGeom prst="rect">
+            <a:avLst/>
+          </a:prstGeom>
+          <a:noFill/>
+        </p:spPr>
+        <p:txBody>
+          <a:bodyPr wrap="square" rtlCol="0">
+            <a:spAutoFit/>
+          </a:bodyPr>
+          <a:lstStyle/>
+          <a:p>
+            <a:r>
+              <a:rPr lang="en-US" sz="800" dirty="0"/>
+              <a:t>2026 Women in Statistics and Data Science Conference, Cincinnati, OH</a:t>
+            </a:r>
+          </a:p>
+        </p:txBody>
+      </p:sp>
+    </p:spTree>
+    <p:extLst>
+      <p:ext uri="{BB962C8B-B14F-4D97-AF65-F5344CB8AC3E}">
+        <p14:creationId xmlns:p14="http://schemas.microsoft.com/office/powerpoint/2010/main" val="1906971029"/>
+      </p:ext>
+    </p:extLst>
+  </p:cSld>
+  <p:clrMapOvr>
+    <a:masterClrMapping/>
+  </p:clrMapOvr>
+</p:sld>
+</file>
+
+<file path=ppt/slides/slide7.xml><?xml version="1.0" encoding="utf-8"?>
+<p:sld xmlns:a="http://schemas.openxmlformats.org/drawingml/2006/main" xmlns:r="http://schemas.openxmlformats.org/officeDocument/2006/relationships" xmlns:p="http://schemas.openxmlformats.org/presentationml/2006/main">
+  <p:cSld>
+    <p:spTree>
+      <p:nvGrpSpPr>
+        <p:cNvPr id="1" name=""/>
+        <p:cNvGrpSpPr/>
+        <p:nvPr/>
+      </p:nvGrpSpPr>
+      <p:grpSpPr>
+        <a:xfrm>
+          <a:off x="0" y="0"/>
+          <a:ext cx="0" cy="0"/>
+          <a:chOff x="0" y="0"/>
+          <a:chExt cx="0" cy="0"/>
+        </a:xfrm>
+      </p:grpSpPr>
+      <p:sp>
+        <p:nvSpPr>
+          <p:cNvPr id="2" name="Title 1">
+            <a:extLst>
+              <a:ext uri="{FF2B5EF4-FFF2-40B4-BE49-F238E27FC236}">
+                <a16:creationId xmlns:a16="http://schemas.microsoft.com/office/drawing/2014/main" id="{3474E6D8-5629-464B-16EF-F19EF89AB1B2}"/>
+              </a:ext>
+            </a:extLst>
+          </p:cNvPr>
+          <p:cNvSpPr>
+            <a:spLocks noGrp="1"/>
+          </p:cNvSpPr>
+          <p:nvPr>
+            <p:ph type="title"/>
+          </p:nvPr>
+        </p:nvSpPr>
+        <p:spPr>
+          <a:xfrm>
+            <a:off x="656190" y="890541"/>
+            <a:ext cx="8761413" cy="706964"/>
+          </a:xfrm>
+        </p:spPr>
+        <p:txBody>
+          <a:bodyPr/>
+          <a:lstStyle/>
+          <a:p>
+            <a:r>
+              <a:rPr lang="en-US" dirty="0"/>
+              <a:t>3. My work in the cloud migration</a:t>
+            </a:r>
+          </a:p>
+        </p:txBody>
+      </p:sp>
+      <p:sp>
+        <p:nvSpPr>
+          <p:cNvPr id="3" name="Content Placeholder 2">
+            <a:extLst>
+              <a:ext uri="{FF2B5EF4-FFF2-40B4-BE49-F238E27FC236}">
+                <a16:creationId xmlns:a16="http://schemas.microsoft.com/office/drawing/2014/main" id="{A092FB1B-D47B-36EB-3272-31AFE74731A4}"/>
+              </a:ext>
+            </a:extLst>
+          </p:cNvPr>
+          <p:cNvSpPr>
+            <a:spLocks noGrp="1"/>
+          </p:cNvSpPr>
+          <p:nvPr>
+            <p:ph idx="1"/>
+          </p:nvPr>
+        </p:nvSpPr>
+        <p:spPr>
+          <a:xfrm>
+            <a:off x="249381" y="2345805"/>
+            <a:ext cx="11829012" cy="355831"/>
+          </a:xfrm>
+        </p:spPr>
+        <p:txBody>
+          <a:bodyPr>
+            <a:normAutofit fontScale="77500" lnSpcReduction="20000"/>
+          </a:bodyPr>
+          <a:lstStyle/>
+          <a:p>
+            <a:r>
+              <a:rPr lang="en-US" dirty="0"/>
+              <a:t>I don’t have access to SAS. I only have the SAS code and log files. I asked my teammates to create some intermediate datasets.</a:t>
+            </a:r>
+          </a:p>
+        </p:txBody>
+      </p:sp>
+      <p:pic>
+        <p:nvPicPr>
+          <p:cNvPr id="7" name="Picture 6">
+            <a:extLst>
+              <a:ext uri="{FF2B5EF4-FFF2-40B4-BE49-F238E27FC236}">
+                <a16:creationId xmlns:a16="http://schemas.microsoft.com/office/drawing/2014/main" id="{1A611D1E-7478-2FC3-6B1F-4EF0867A79F4}"/>
+              </a:ext>
+            </a:extLst>
+          </p:cNvPr>
+          <p:cNvPicPr>
+            <a:picLocks noChangeAspect="1"/>
+          </p:cNvPicPr>
+          <p:nvPr/>
+        </p:nvPicPr>
+        <p:blipFill>
+          <a:blip r:embed="rId2"/>
+          <a:stretch>
+            <a:fillRect/>
+          </a:stretch>
+        </p:blipFill>
+        <p:spPr>
+          <a:xfrm>
+            <a:off x="2679969" y="2816815"/>
+            <a:ext cx="4362386" cy="3657457"/>
+          </a:xfrm>
+          <a:prstGeom prst="rect">
+            <a:avLst/>
+          </a:prstGeom>
+        </p:spPr>
+      </p:pic>
+      <p:pic>
+        <p:nvPicPr>
+          <p:cNvPr id="9" name="Picture 8">
+            <a:extLst>
+              <a:ext uri="{FF2B5EF4-FFF2-40B4-BE49-F238E27FC236}">
+                <a16:creationId xmlns:a16="http://schemas.microsoft.com/office/drawing/2014/main" id="{5F158359-594C-41DC-CFE5-FE178A4C5B5A}"/>
+              </a:ext>
+            </a:extLst>
+          </p:cNvPr>
+          <p:cNvPicPr>
+            <a:picLocks noChangeAspect="1"/>
+          </p:cNvPicPr>
+          <p:nvPr/>
+        </p:nvPicPr>
+        <p:blipFill>
+          <a:blip r:embed="rId3"/>
+          <a:stretch>
+            <a:fillRect/>
+          </a:stretch>
+        </p:blipFill>
+        <p:spPr>
+          <a:xfrm>
+            <a:off x="432261" y="2820971"/>
+            <a:ext cx="2247708" cy="3821585"/>
+          </a:xfrm>
+          <a:prstGeom prst="rect">
+            <a:avLst/>
+          </a:prstGeom>
+        </p:spPr>
+      </p:pic>
+      <p:pic>
+        <p:nvPicPr>
+          <p:cNvPr id="13" name="Picture 12">
+            <a:extLst>
+              <a:ext uri="{FF2B5EF4-FFF2-40B4-BE49-F238E27FC236}">
+                <a16:creationId xmlns:a16="http://schemas.microsoft.com/office/drawing/2014/main" id="{EC766DBC-F7D3-BB94-232C-E7402B4003EE}"/>
+              </a:ext>
+            </a:extLst>
+          </p:cNvPr>
+          <p:cNvPicPr>
+            <a:picLocks noChangeAspect="1"/>
+          </p:cNvPicPr>
+          <p:nvPr/>
+        </p:nvPicPr>
+        <p:blipFill>
+          <a:blip r:embed="rId4"/>
+          <a:stretch>
+            <a:fillRect/>
+          </a:stretch>
+        </p:blipFill>
+        <p:spPr>
+          <a:xfrm>
+            <a:off x="7448305" y="2867543"/>
+            <a:ext cx="4743695" cy="3657457"/>
+          </a:xfrm>
+          <a:prstGeom prst="rect">
+            <a:avLst/>
+          </a:prstGeom>
+        </p:spPr>
+      </p:pic>
+      <p:sp>
+        <p:nvSpPr>
+          <p:cNvPr id="4" name="TextBox 3">
+            <a:extLst>
+              <a:ext uri="{FF2B5EF4-FFF2-40B4-BE49-F238E27FC236}">
+                <a16:creationId xmlns:a16="http://schemas.microsoft.com/office/drawing/2014/main" id="{8D79C72A-35A2-9C99-559F-E435C87ABD65}"/>
+              </a:ext>
+            </a:extLst>
+          </p:cNvPr>
+          <p:cNvSpPr txBox="1"/>
+          <p:nvPr/>
+        </p:nvSpPr>
+        <p:spPr>
+          <a:xfrm>
+            <a:off x="8318270" y="6642556"/>
+            <a:ext cx="3873730" cy="215444"/>
+          </a:xfrm>
+          <a:prstGeom prst="rect">
+            <a:avLst/>
+          </a:prstGeom>
+          <a:noFill/>
+        </p:spPr>
+        <p:txBody>
+          <a:bodyPr wrap="square" rtlCol="0">
+            <a:spAutoFit/>
+          </a:bodyPr>
+          <a:lstStyle/>
+          <a:p>
+            <a:r>
+              <a:rPr lang="en-US" sz="800" dirty="0"/>
+              <a:t>2026 Women in Statistics and Data Science Conference, Cincinnati, OH</a:t>
+            </a:r>
+          </a:p>
+        </p:txBody>
+      </p:sp>
+      <p:sp>
+        <p:nvSpPr>
+          <p:cNvPr id="6" name="Rectangle 5">
+            <a:extLst>
+              <a:ext uri="{FF2B5EF4-FFF2-40B4-BE49-F238E27FC236}">
+                <a16:creationId xmlns:a16="http://schemas.microsoft.com/office/drawing/2014/main" id="{3A614D2D-0E06-7D9D-06C1-162B4B6D1463}"/>
+              </a:ext>
+            </a:extLst>
+          </p:cNvPr>
+          <p:cNvSpPr/>
+          <p:nvPr/>
+        </p:nvSpPr>
+        <p:spPr>
+          <a:xfrm>
+            <a:off x="4384102" y="3344158"/>
+            <a:ext cx="2658253" cy="707886"/>
+          </a:xfrm>
+          <a:prstGeom prst="rect">
+            <a:avLst/>
+          </a:prstGeom>
+          <a:noFill/>
+        </p:spPr>
+        <p:txBody>
+          <a:bodyPr wrap="square" lIns="91440" tIns="45720" rIns="91440" bIns="45720">
+            <a:spAutoFit/>
+          </a:bodyPr>
+          <a:lstStyle/>
+          <a:p>
+            <a:pPr algn="ctr"/>
+            <a:r>
+              <a:rPr lang="en-US" sz="4000" b="1" cap="none" spc="50" dirty="0">
+                <a:ln w="0"/>
+                <a:solidFill>
+                  <a:schemeClr val="bg2"/>
+                </a:solidFill>
+                <a:effectLst>
+                  <a:innerShdw blurRad="63500" dist="50800" dir="13500000">
+                    <a:srgbClr val="000000">
+                      <a:alpha val="50000"/>
+                    </a:srgbClr>
+                  </a:innerShdw>
+                </a:effectLst>
+              </a:rPr>
+              <a:t>Sample</a:t>
+            </a:r>
+          </a:p>
+        </p:txBody>
+      </p:sp>
+    </p:spTree>
+    <p:extLst>
+      <p:ext uri="{BB962C8B-B14F-4D97-AF65-F5344CB8AC3E}">
+        <p14:creationId xmlns:p14="http://schemas.microsoft.com/office/powerpoint/2010/main" val="17387068"/>
+      </p:ext>
+    </p:extLst>
+  </p:cSld>
+  <p:clrMapOvr>
+    <a:masterClrMapping/>
+  </p:clrMapOvr>
+</p:sld>
+</file>
+
+<file path=ppt/slides/slide8.xml><?xml version="1.0" encoding="utf-8"?>
+<p:sld xmlns:a="http://schemas.openxmlformats.org/drawingml/2006/main" xmlns:r="http://schemas.openxmlformats.org/officeDocument/2006/relationships" xmlns:p="http://schemas.openxmlformats.org/presentationml/2006/main">
+  <p:cSld>
+    <p:spTree>
+      <p:nvGrpSpPr>
+        <p:cNvPr id="1" name=""/>
+        <p:cNvGrpSpPr/>
+        <p:nvPr/>
+      </p:nvGrpSpPr>
+      <p:grpSpPr>
+        <a:xfrm>
+          <a:off x="0" y="0"/>
+          <a:ext cx="0" cy="0"/>
+          <a:chOff x="0" y="0"/>
+          <a:chExt cx="0" cy="0"/>
+        </a:xfrm>
+      </p:grpSpPr>
+      <p:sp>
+        <p:nvSpPr>
+          <p:cNvPr id="2" name="Title 1">
+            <a:extLst>
+              <a:ext uri="{FF2B5EF4-FFF2-40B4-BE49-F238E27FC236}">
+                <a16:creationId xmlns:a16="http://schemas.microsoft.com/office/drawing/2014/main" id="{1D7337D7-0147-3295-D795-C3F0374F0F7D}"/>
+              </a:ext>
+            </a:extLst>
+          </p:cNvPr>
+          <p:cNvSpPr>
+            <a:spLocks noGrp="1"/>
+          </p:cNvSpPr>
+          <p:nvPr>
+            <p:ph type="title"/>
+          </p:nvPr>
+        </p:nvSpPr>
+        <p:spPr>
+          <a:xfrm>
+            <a:off x="631252" y="838200"/>
+            <a:ext cx="8761413" cy="706964"/>
+          </a:xfrm>
+        </p:spPr>
+        <p:txBody>
+          <a:bodyPr/>
+          <a:lstStyle/>
+          <a:p>
+            <a:r>
+              <a:rPr lang="en-US" dirty="0"/>
+              <a:t>3. My work in the cloud migration</a:t>
+            </a:r>
+          </a:p>
+        </p:txBody>
+      </p:sp>
+      <p:sp>
+        <p:nvSpPr>
+          <p:cNvPr id="3" name="Content Placeholder 2">
+            <a:extLst>
+              <a:ext uri="{FF2B5EF4-FFF2-40B4-BE49-F238E27FC236}">
+                <a16:creationId xmlns:a16="http://schemas.microsoft.com/office/drawing/2014/main" id="{0067F445-5021-145D-6E5E-ABD15CE5BE20}"/>
+              </a:ext>
+            </a:extLst>
+          </p:cNvPr>
+          <p:cNvSpPr>
+            <a:spLocks noGrp="1"/>
+          </p:cNvSpPr>
+          <p:nvPr>
+            <p:ph idx="1"/>
+          </p:nvPr>
+        </p:nvSpPr>
+        <p:spPr/>
+        <p:txBody>
+          <a:bodyPr/>
+          <a:lstStyle/>
+          <a:p>
+            <a:endParaRPr lang="en-US"/>
+          </a:p>
+        </p:txBody>
+      </p:sp>
+    </p:spTree>
+    <p:extLst>
+      <p:ext uri="{BB962C8B-B14F-4D97-AF65-F5344CB8AC3E}">
+        <p14:creationId xmlns:p14="http://schemas.microsoft.com/office/powerpoint/2010/main" val="4213553775"/>
       </p:ext>
     </p:extLst>
   </p:cSld>

--- a/From On-Premises to Cloud.pptx
+++ b/From On-Premises to Cloud.pptx
@@ -13,6 +13,13 @@
     <p:sldId id="261" r:id="rId7"/>
     <p:sldId id="262" r:id="rId8"/>
     <p:sldId id="263" r:id="rId9"/>
+    <p:sldId id="264" r:id="rId10"/>
+    <p:sldId id="265" r:id="rId11"/>
+    <p:sldId id="266" r:id="rId12"/>
+    <p:sldId id="269" r:id="rId13"/>
+    <p:sldId id="270" r:id="rId14"/>
+    <p:sldId id="268" r:id="rId15"/>
+    <p:sldId id="267" r:id="rId16"/>
   </p:sldIdLst>
   <p:sldSz cx="12192000" cy="6858000"/>
   <p:notesSz cx="6858000" cy="9144000"/>
@@ -120,6 +127,753 @@
 </file>
 
 <file path=ppt/diagrams/colors1.xml><?xml version="1.0" encoding="utf-8"?>
+<dgm:colorsDef xmlns:dgm="http://schemas.openxmlformats.org/drawingml/2006/diagram" xmlns:a="http://schemas.openxmlformats.org/drawingml/2006/main" uniqueId="urn:microsoft.com/office/officeart/2005/8/colors/accent1_2">
+  <dgm:title val=""/>
+  <dgm:desc val=""/>
+  <dgm:catLst>
+    <dgm:cat type="accent1" pri="11200"/>
+  </dgm:catLst>
+  <dgm:styleLbl name="node0">
+    <dgm:fillClrLst meth="repeat">
+      <a:schemeClr val="accent1"/>
+    </dgm:fillClrLst>
+    <dgm:linClrLst meth="repeat">
+      <a:schemeClr val="lt1"/>
+    </dgm:linClrLst>
+    <dgm:effectClrLst/>
+    <dgm:txLinClrLst/>
+    <dgm:txFillClrLst/>
+    <dgm:txEffectClrLst/>
+  </dgm:styleLbl>
+  <dgm:styleLbl name="alignNode1">
+    <dgm:fillClrLst meth="repeat">
+      <a:schemeClr val="accent1"/>
+    </dgm:fillClrLst>
+    <dgm:linClrLst meth="repeat">
+      <a:schemeClr val="accent1"/>
+    </dgm:linClrLst>
+    <dgm:effectClrLst/>
+    <dgm:txLinClrLst/>
+    <dgm:txFillClrLst/>
+    <dgm:txEffectClrLst/>
+  </dgm:styleLbl>
+  <dgm:styleLbl name="node1">
+    <dgm:fillClrLst meth="repeat">
+      <a:schemeClr val="accent1"/>
+    </dgm:fillClrLst>
+    <dgm:linClrLst meth="repeat">
+      <a:schemeClr val="lt1"/>
+    </dgm:linClrLst>
+    <dgm:effectClrLst/>
+    <dgm:txLinClrLst/>
+    <dgm:txFillClrLst/>
+    <dgm:txEffectClrLst/>
+  </dgm:styleLbl>
+  <dgm:styleLbl name="lnNode1">
+    <dgm:fillClrLst meth="repeat">
+      <a:schemeClr val="accent1"/>
+    </dgm:fillClrLst>
+    <dgm:linClrLst meth="repeat">
+      <a:schemeClr val="lt1"/>
+    </dgm:linClrLst>
+    <dgm:effectClrLst/>
+    <dgm:txLinClrLst/>
+    <dgm:txFillClrLst/>
+    <dgm:txEffectClrLst/>
+  </dgm:styleLbl>
+  <dgm:styleLbl name="vennNode1">
+    <dgm:fillClrLst meth="repeat">
+      <a:schemeClr val="accent1">
+        <a:alpha val="50000"/>
+      </a:schemeClr>
+    </dgm:fillClrLst>
+    <dgm:linClrLst meth="repeat">
+      <a:schemeClr val="lt1"/>
+    </dgm:linClrLst>
+    <dgm:effectClrLst/>
+    <dgm:txLinClrLst/>
+    <dgm:txFillClrLst/>
+    <dgm:txEffectClrLst/>
+  </dgm:styleLbl>
+  <dgm:styleLbl name="node2">
+    <dgm:fillClrLst meth="repeat">
+      <a:schemeClr val="accent1"/>
+    </dgm:fillClrLst>
+    <dgm:linClrLst meth="repeat">
+      <a:schemeClr val="lt1"/>
+    </dgm:linClrLst>
+    <dgm:effectClrLst/>
+    <dgm:txLinClrLst/>
+    <dgm:txFillClrLst/>
+    <dgm:txEffectClrLst/>
+  </dgm:styleLbl>
+  <dgm:styleLbl name="node3">
+    <dgm:fillClrLst meth="repeat">
+      <a:schemeClr val="accent1"/>
+    </dgm:fillClrLst>
+    <dgm:linClrLst meth="repeat">
+      <a:schemeClr val="lt1"/>
+    </dgm:linClrLst>
+    <dgm:effectClrLst/>
+    <dgm:txLinClrLst/>
+    <dgm:txFillClrLst/>
+    <dgm:txEffectClrLst/>
+  </dgm:styleLbl>
+  <dgm:styleLbl name="node4">
+    <dgm:fillClrLst meth="repeat">
+      <a:schemeClr val="accent1"/>
+    </dgm:fillClrLst>
+    <dgm:linClrLst meth="repeat">
+      <a:schemeClr val="lt1"/>
+    </dgm:linClrLst>
+    <dgm:effectClrLst/>
+    <dgm:txLinClrLst/>
+    <dgm:txFillClrLst/>
+    <dgm:txEffectClrLst/>
+  </dgm:styleLbl>
+  <dgm:styleLbl name="fgImgPlace1">
+    <dgm:fillClrLst meth="repeat">
+      <a:schemeClr val="accent1">
+        <a:tint val="50000"/>
+      </a:schemeClr>
+    </dgm:fillClrLst>
+    <dgm:linClrLst meth="repeat">
+      <a:schemeClr val="lt1"/>
+    </dgm:linClrLst>
+    <dgm:effectClrLst/>
+    <dgm:txLinClrLst/>
+    <dgm:txFillClrLst meth="repeat">
+      <a:schemeClr val="lt1"/>
+    </dgm:txFillClrLst>
+    <dgm:txEffectClrLst/>
+  </dgm:styleLbl>
+  <dgm:styleLbl name="alignImgPlace1">
+    <dgm:fillClrLst meth="repeat">
+      <a:schemeClr val="accent1">
+        <a:tint val="50000"/>
+      </a:schemeClr>
+    </dgm:fillClrLst>
+    <dgm:linClrLst meth="repeat">
+      <a:schemeClr val="lt1"/>
+    </dgm:linClrLst>
+    <dgm:effectClrLst/>
+    <dgm:txLinClrLst/>
+    <dgm:txFillClrLst meth="repeat">
+      <a:schemeClr val="lt1"/>
+    </dgm:txFillClrLst>
+    <dgm:txEffectClrLst/>
+  </dgm:styleLbl>
+  <dgm:styleLbl name="bgImgPlace1">
+    <dgm:fillClrLst meth="repeat">
+      <a:schemeClr val="accent1">
+        <a:tint val="50000"/>
+      </a:schemeClr>
+    </dgm:fillClrLst>
+    <dgm:linClrLst meth="repeat">
+      <a:schemeClr val="lt1"/>
+    </dgm:linClrLst>
+    <dgm:effectClrLst/>
+    <dgm:txLinClrLst/>
+    <dgm:txFillClrLst meth="repeat">
+      <a:schemeClr val="lt1"/>
+    </dgm:txFillClrLst>
+    <dgm:txEffectClrLst/>
+  </dgm:styleLbl>
+  <dgm:styleLbl name="sibTrans2D1">
+    <dgm:fillClrLst meth="repeat">
+      <a:schemeClr val="accent1">
+        <a:tint val="60000"/>
+      </a:schemeClr>
+    </dgm:fillClrLst>
+    <dgm:linClrLst meth="repeat">
+      <a:schemeClr val="accent1">
+        <a:tint val="60000"/>
+      </a:schemeClr>
+    </dgm:linClrLst>
+    <dgm:effectClrLst/>
+    <dgm:txLinClrLst/>
+    <dgm:txFillClrLst/>
+    <dgm:txEffectClrLst/>
+  </dgm:styleLbl>
+  <dgm:styleLbl name="fgSibTrans2D1">
+    <dgm:fillClrLst meth="repeat">
+      <a:schemeClr val="accent1">
+        <a:tint val="60000"/>
+      </a:schemeClr>
+    </dgm:fillClrLst>
+    <dgm:linClrLst meth="repeat">
+      <a:schemeClr val="accent1">
+        <a:tint val="60000"/>
+      </a:schemeClr>
+    </dgm:linClrLst>
+    <dgm:effectClrLst/>
+    <dgm:txLinClrLst/>
+    <dgm:txFillClrLst/>
+    <dgm:txEffectClrLst/>
+  </dgm:styleLbl>
+  <dgm:styleLbl name="bgSibTrans2D1">
+    <dgm:fillClrLst meth="repeat">
+      <a:schemeClr val="accent1">
+        <a:tint val="60000"/>
+      </a:schemeClr>
+    </dgm:fillClrLst>
+    <dgm:linClrLst meth="repeat">
+      <a:schemeClr val="accent1">
+        <a:tint val="60000"/>
+      </a:schemeClr>
+    </dgm:linClrLst>
+    <dgm:effectClrLst/>
+    <dgm:txLinClrLst/>
+    <dgm:txFillClrLst/>
+    <dgm:txEffectClrLst/>
+  </dgm:styleLbl>
+  <dgm:styleLbl name="sibTrans1D1">
+    <dgm:fillClrLst meth="repeat">
+      <a:schemeClr val="accent1"/>
+    </dgm:fillClrLst>
+    <dgm:linClrLst meth="repeat">
+      <a:schemeClr val="accent1"/>
+    </dgm:linClrLst>
+    <dgm:effectClrLst/>
+    <dgm:txLinClrLst/>
+    <dgm:txFillClrLst meth="repeat">
+      <a:schemeClr val="tx1"/>
+    </dgm:txFillClrLst>
+    <dgm:txEffectClrLst/>
+  </dgm:styleLbl>
+  <dgm:styleLbl name="callout">
+    <dgm:fillClrLst meth="repeat">
+      <a:schemeClr val="accent1"/>
+    </dgm:fillClrLst>
+    <dgm:linClrLst meth="repeat">
+      <a:schemeClr val="accent1">
+        <a:tint val="50000"/>
+      </a:schemeClr>
+    </dgm:linClrLst>
+    <dgm:effectClrLst/>
+    <dgm:txLinClrLst/>
+    <dgm:txFillClrLst meth="repeat">
+      <a:schemeClr val="tx1"/>
+    </dgm:txFillClrLst>
+    <dgm:txEffectClrLst/>
+  </dgm:styleLbl>
+  <dgm:styleLbl name="asst0">
+    <dgm:fillClrLst meth="repeat">
+      <a:schemeClr val="accent1"/>
+    </dgm:fillClrLst>
+    <dgm:linClrLst meth="repeat">
+      <a:schemeClr val="lt1"/>
+    </dgm:linClrLst>
+    <dgm:effectClrLst/>
+    <dgm:txLinClrLst/>
+    <dgm:txFillClrLst/>
+    <dgm:txEffectClrLst/>
+  </dgm:styleLbl>
+  <dgm:styleLbl name="asst1">
+    <dgm:fillClrLst meth="repeat">
+      <a:schemeClr val="accent1"/>
+    </dgm:fillClrLst>
+    <dgm:linClrLst meth="repeat">
+      <a:schemeClr val="lt1"/>
+    </dgm:linClrLst>
+    <dgm:effectClrLst/>
+    <dgm:txLinClrLst/>
+    <dgm:txFillClrLst/>
+    <dgm:txEffectClrLst/>
+  </dgm:styleLbl>
+  <dgm:styleLbl name="asst2">
+    <dgm:fillClrLst meth="repeat">
+      <a:schemeClr val="accent1"/>
+    </dgm:fillClrLst>
+    <dgm:linClrLst meth="repeat">
+      <a:schemeClr val="lt1"/>
+    </dgm:linClrLst>
+    <dgm:effectClrLst/>
+    <dgm:txLinClrLst/>
+    <dgm:txFillClrLst/>
+    <dgm:txEffectClrLst/>
+  </dgm:styleLbl>
+  <dgm:styleLbl name="asst3">
+    <dgm:fillClrLst meth="repeat">
+      <a:schemeClr val="accent1"/>
+    </dgm:fillClrLst>
+    <dgm:linClrLst meth="repeat">
+      <a:schemeClr val="lt1"/>
+    </dgm:linClrLst>
+    <dgm:effectClrLst/>
+    <dgm:txLinClrLst/>
+    <dgm:txFillClrLst/>
+    <dgm:txEffectClrLst/>
+  </dgm:styleLbl>
+  <dgm:styleLbl name="asst4">
+    <dgm:fillClrLst meth="repeat">
+      <a:schemeClr val="accent1"/>
+    </dgm:fillClrLst>
+    <dgm:linClrLst meth="repeat">
+      <a:schemeClr val="lt1"/>
+    </dgm:linClrLst>
+    <dgm:effectClrLst/>
+    <dgm:txLinClrLst/>
+    <dgm:txFillClrLst/>
+    <dgm:txEffectClrLst/>
+  </dgm:styleLbl>
+  <dgm:styleLbl name="parChTrans2D1">
+    <dgm:fillClrLst meth="repeat">
+      <a:schemeClr val="accent1">
+        <a:tint val="60000"/>
+      </a:schemeClr>
+    </dgm:fillClrLst>
+    <dgm:linClrLst meth="repeat">
+      <a:schemeClr val="accent1">
+        <a:tint val="60000"/>
+      </a:schemeClr>
+    </dgm:linClrLst>
+    <dgm:effectClrLst/>
+    <dgm:txLinClrLst/>
+    <dgm:txFillClrLst meth="repeat">
+      <a:schemeClr val="lt1"/>
+    </dgm:txFillClrLst>
+    <dgm:txEffectClrLst/>
+  </dgm:styleLbl>
+  <dgm:styleLbl name="parChTrans2D2">
+    <dgm:fillClrLst meth="repeat">
+      <a:schemeClr val="accent1"/>
+    </dgm:fillClrLst>
+    <dgm:linClrLst meth="repeat">
+      <a:schemeClr val="accent1"/>
+    </dgm:linClrLst>
+    <dgm:effectClrLst/>
+    <dgm:txLinClrLst/>
+    <dgm:txFillClrLst meth="repeat">
+      <a:schemeClr val="lt1"/>
+    </dgm:txFillClrLst>
+    <dgm:txEffectClrLst/>
+  </dgm:styleLbl>
+  <dgm:styleLbl name="parChTrans2D3">
+    <dgm:fillClrLst meth="repeat">
+      <a:schemeClr val="accent1"/>
+    </dgm:fillClrLst>
+    <dgm:linClrLst meth="repeat">
+      <a:schemeClr val="accent1"/>
+    </dgm:linClrLst>
+    <dgm:effectClrLst/>
+    <dgm:txLinClrLst/>
+    <dgm:txFillClrLst meth="repeat">
+      <a:schemeClr val="lt1"/>
+    </dgm:txFillClrLst>
+    <dgm:txEffectClrLst/>
+  </dgm:styleLbl>
+  <dgm:styleLbl name="parChTrans2D4">
+    <dgm:fillClrLst meth="repeat">
+      <a:schemeClr val="accent1"/>
+    </dgm:fillClrLst>
+    <dgm:linClrLst meth="repeat">
+      <a:schemeClr val="accent1"/>
+    </dgm:linClrLst>
+    <dgm:effectClrLst/>
+    <dgm:txLinClrLst/>
+    <dgm:txFillClrLst meth="repeat">
+      <a:schemeClr val="lt1"/>
+    </dgm:txFillClrLst>
+    <dgm:txEffectClrLst/>
+  </dgm:styleLbl>
+  <dgm:styleLbl name="parChTrans1D1">
+    <dgm:fillClrLst meth="repeat">
+      <a:schemeClr val="accent1"/>
+    </dgm:fillClrLst>
+    <dgm:linClrLst meth="repeat">
+      <a:schemeClr val="accent1">
+        <a:shade val="60000"/>
+      </a:schemeClr>
+    </dgm:linClrLst>
+    <dgm:effectClrLst/>
+    <dgm:txLinClrLst/>
+    <dgm:txFillClrLst meth="repeat">
+      <a:schemeClr val="tx1"/>
+    </dgm:txFillClrLst>
+    <dgm:txEffectClrLst/>
+  </dgm:styleLbl>
+  <dgm:styleLbl name="parChTrans1D2">
+    <dgm:fillClrLst meth="repeat">
+      <a:schemeClr val="accent1"/>
+    </dgm:fillClrLst>
+    <dgm:linClrLst meth="repeat">
+      <a:schemeClr val="accent1">
+        <a:shade val="60000"/>
+      </a:schemeClr>
+    </dgm:linClrLst>
+    <dgm:effectClrLst/>
+    <dgm:txLinClrLst/>
+    <dgm:txFillClrLst meth="repeat">
+      <a:schemeClr val="tx1"/>
+    </dgm:txFillClrLst>
+    <dgm:txEffectClrLst/>
+  </dgm:styleLbl>
+  <dgm:styleLbl name="parChTrans1D3">
+    <dgm:fillClrLst meth="repeat">
+      <a:schemeClr val="accent1"/>
+    </dgm:fillClrLst>
+    <dgm:linClrLst meth="repeat">
+      <a:schemeClr val="accent1">
+        <a:shade val="80000"/>
+      </a:schemeClr>
+    </dgm:linClrLst>
+    <dgm:effectClrLst/>
+    <dgm:txLinClrLst/>
+    <dgm:txFillClrLst meth="repeat">
+      <a:schemeClr val="tx1"/>
+    </dgm:txFillClrLst>
+    <dgm:txEffectClrLst/>
+  </dgm:styleLbl>
+  <dgm:styleLbl name="parChTrans1D4">
+    <dgm:fillClrLst meth="repeat">
+      <a:schemeClr val="accent1"/>
+    </dgm:fillClrLst>
+    <dgm:linClrLst meth="repeat">
+      <a:schemeClr val="accent1">
+        <a:shade val="80000"/>
+      </a:schemeClr>
+    </dgm:linClrLst>
+    <dgm:effectClrLst/>
+    <dgm:txLinClrLst/>
+    <dgm:txFillClrLst meth="repeat">
+      <a:schemeClr val="tx1"/>
+    </dgm:txFillClrLst>
+    <dgm:txEffectClrLst/>
+  </dgm:styleLbl>
+  <dgm:styleLbl name="fgAcc1">
+    <dgm:fillClrLst meth="repeat">
+      <a:schemeClr val="lt1">
+        <a:alpha val="90000"/>
+      </a:schemeClr>
+    </dgm:fillClrLst>
+    <dgm:linClrLst meth="repeat">
+      <a:schemeClr val="accent1"/>
+    </dgm:linClrLst>
+    <dgm:effectClrLst/>
+    <dgm:txLinClrLst/>
+    <dgm:txFillClrLst meth="repeat">
+      <a:schemeClr val="dk1"/>
+    </dgm:txFillClrLst>
+    <dgm:txEffectClrLst/>
+  </dgm:styleLbl>
+  <dgm:styleLbl name="conFgAcc1">
+    <dgm:fillClrLst meth="repeat">
+      <a:schemeClr val="lt1">
+        <a:alpha val="90000"/>
+      </a:schemeClr>
+    </dgm:fillClrLst>
+    <dgm:linClrLst meth="repeat">
+      <a:schemeClr val="accent1"/>
+    </dgm:linClrLst>
+    <dgm:effectClrLst/>
+    <dgm:txLinClrLst/>
+    <dgm:txFillClrLst meth="repeat">
+      <a:schemeClr val="dk1"/>
+    </dgm:txFillClrLst>
+    <dgm:txEffectClrLst/>
+  </dgm:styleLbl>
+  <dgm:styleLbl name="alignAcc1">
+    <dgm:fillClrLst meth="repeat">
+      <a:schemeClr val="lt1">
+        <a:alpha val="90000"/>
+      </a:schemeClr>
+    </dgm:fillClrLst>
+    <dgm:linClrLst meth="repeat">
+      <a:schemeClr val="accent1"/>
+    </dgm:linClrLst>
+    <dgm:effectClrLst/>
+    <dgm:txLinClrLst/>
+    <dgm:txFillClrLst meth="repeat">
+      <a:schemeClr val="dk1"/>
+    </dgm:txFillClrLst>
+    <dgm:txEffectClrLst/>
+  </dgm:styleLbl>
+  <dgm:styleLbl name="trAlignAcc1">
+    <dgm:fillClrLst meth="repeat">
+      <a:schemeClr val="lt1">
+        <a:alpha val="40000"/>
+      </a:schemeClr>
+    </dgm:fillClrLst>
+    <dgm:linClrLst meth="repeat">
+      <a:schemeClr val="accent1"/>
+    </dgm:linClrLst>
+    <dgm:effectClrLst/>
+    <dgm:txLinClrLst/>
+    <dgm:txFillClrLst meth="repeat">
+      <a:schemeClr val="dk1"/>
+    </dgm:txFillClrLst>
+    <dgm:txEffectClrLst/>
+  </dgm:styleLbl>
+  <dgm:styleLbl name="bgAcc1">
+    <dgm:fillClrLst meth="repeat">
+      <a:schemeClr val="lt1">
+        <a:alpha val="90000"/>
+      </a:schemeClr>
+    </dgm:fillClrLst>
+    <dgm:linClrLst meth="repeat">
+      <a:schemeClr val="accent1"/>
+    </dgm:linClrLst>
+    <dgm:effectClrLst/>
+    <dgm:txLinClrLst/>
+    <dgm:txFillClrLst meth="repeat">
+      <a:schemeClr val="dk1"/>
+    </dgm:txFillClrLst>
+    <dgm:txEffectClrLst/>
+  </dgm:styleLbl>
+  <dgm:styleLbl name="solidFgAcc1">
+    <dgm:fillClrLst meth="repeat">
+      <a:schemeClr val="lt1"/>
+    </dgm:fillClrLst>
+    <dgm:linClrLst meth="repeat">
+      <a:schemeClr val="accent1"/>
+    </dgm:linClrLst>
+    <dgm:effectClrLst/>
+    <dgm:txLinClrLst/>
+    <dgm:txFillClrLst meth="repeat">
+      <a:schemeClr val="dk1"/>
+    </dgm:txFillClrLst>
+    <dgm:txEffectClrLst/>
+  </dgm:styleLbl>
+  <dgm:styleLbl name="solidAlignAcc1">
+    <dgm:fillClrLst meth="repeat">
+      <a:schemeClr val="lt1"/>
+    </dgm:fillClrLst>
+    <dgm:linClrLst meth="repeat">
+      <a:schemeClr val="accent1"/>
+    </dgm:linClrLst>
+    <dgm:effectClrLst/>
+    <dgm:txLinClrLst/>
+    <dgm:txFillClrLst meth="repeat">
+      <a:schemeClr val="dk1"/>
+    </dgm:txFillClrLst>
+    <dgm:txEffectClrLst/>
+  </dgm:styleLbl>
+  <dgm:styleLbl name="solidBgAcc1">
+    <dgm:fillClrLst meth="repeat">
+      <a:schemeClr val="lt1"/>
+    </dgm:fillClrLst>
+    <dgm:linClrLst meth="repeat">
+      <a:schemeClr val="accent1"/>
+    </dgm:linClrLst>
+    <dgm:effectClrLst/>
+    <dgm:txLinClrLst/>
+    <dgm:txFillClrLst meth="repeat">
+      <a:schemeClr val="dk1"/>
+    </dgm:txFillClrLst>
+    <dgm:txEffectClrLst/>
+  </dgm:styleLbl>
+  <dgm:styleLbl name="fgAccFollowNode1">
+    <dgm:fillClrLst meth="repeat">
+      <a:schemeClr val="accent1">
+        <a:alpha val="90000"/>
+        <a:tint val="40000"/>
+      </a:schemeClr>
+    </dgm:fillClrLst>
+    <dgm:linClrLst meth="repeat">
+      <a:schemeClr val="accent1">
+        <a:alpha val="90000"/>
+        <a:tint val="40000"/>
+      </a:schemeClr>
+    </dgm:linClrLst>
+    <dgm:effectClrLst/>
+    <dgm:txLinClrLst/>
+    <dgm:txFillClrLst meth="repeat">
+      <a:schemeClr val="dk1"/>
+    </dgm:txFillClrLst>
+    <dgm:txEffectClrLst/>
+  </dgm:styleLbl>
+  <dgm:styleLbl name="alignAccFollowNode1">
+    <dgm:fillClrLst meth="repeat">
+      <a:schemeClr val="accent1">
+        <a:alpha val="90000"/>
+        <a:tint val="40000"/>
+      </a:schemeClr>
+    </dgm:fillClrLst>
+    <dgm:linClrLst meth="repeat">
+      <a:schemeClr val="accent1">
+        <a:alpha val="90000"/>
+        <a:tint val="40000"/>
+      </a:schemeClr>
+    </dgm:linClrLst>
+    <dgm:effectClrLst/>
+    <dgm:txLinClrLst/>
+    <dgm:txFillClrLst meth="repeat">
+      <a:schemeClr val="dk1"/>
+    </dgm:txFillClrLst>
+    <dgm:txEffectClrLst/>
+  </dgm:styleLbl>
+  <dgm:styleLbl name="bgAccFollowNode1">
+    <dgm:fillClrLst meth="repeat">
+      <a:schemeClr val="accent1">
+        <a:alpha val="90000"/>
+        <a:tint val="40000"/>
+      </a:schemeClr>
+    </dgm:fillClrLst>
+    <dgm:linClrLst meth="repeat">
+      <a:schemeClr val="accent1">
+        <a:alpha val="90000"/>
+        <a:tint val="40000"/>
+      </a:schemeClr>
+    </dgm:linClrLst>
+    <dgm:effectClrLst/>
+    <dgm:txLinClrLst/>
+    <dgm:txFillClrLst meth="repeat">
+      <a:schemeClr val="dk1"/>
+    </dgm:txFillClrLst>
+    <dgm:txEffectClrLst/>
+  </dgm:styleLbl>
+  <dgm:styleLbl name="fgAcc0">
+    <dgm:fillClrLst meth="repeat">
+      <a:schemeClr val="lt1">
+        <a:alpha val="90000"/>
+      </a:schemeClr>
+    </dgm:fillClrLst>
+    <dgm:linClrLst meth="repeat">
+      <a:schemeClr val="accent1"/>
+    </dgm:linClrLst>
+    <dgm:effectClrLst/>
+    <dgm:txLinClrLst/>
+    <dgm:txFillClrLst meth="repeat">
+      <a:schemeClr val="dk1"/>
+    </dgm:txFillClrLst>
+    <dgm:txEffectClrLst/>
+  </dgm:styleLbl>
+  <dgm:styleLbl name="fgAcc2">
+    <dgm:fillClrLst meth="repeat">
+      <a:schemeClr val="lt1">
+        <a:alpha val="90000"/>
+      </a:schemeClr>
+    </dgm:fillClrLst>
+    <dgm:linClrLst meth="repeat">
+      <a:schemeClr val="accent1"/>
+    </dgm:linClrLst>
+    <dgm:effectClrLst/>
+    <dgm:txLinClrLst/>
+    <dgm:txFillClrLst meth="repeat">
+      <a:schemeClr val="dk1"/>
+    </dgm:txFillClrLst>
+    <dgm:txEffectClrLst/>
+  </dgm:styleLbl>
+  <dgm:styleLbl name="fgAcc3">
+    <dgm:fillClrLst meth="repeat">
+      <a:schemeClr val="lt1">
+        <a:alpha val="90000"/>
+      </a:schemeClr>
+    </dgm:fillClrLst>
+    <dgm:linClrLst meth="repeat">
+      <a:schemeClr val="accent1"/>
+    </dgm:linClrLst>
+    <dgm:effectClrLst/>
+    <dgm:txLinClrLst/>
+    <dgm:txFillClrLst meth="repeat">
+      <a:schemeClr val="dk1"/>
+    </dgm:txFillClrLst>
+    <dgm:txEffectClrLst/>
+  </dgm:styleLbl>
+  <dgm:styleLbl name="fgAcc4">
+    <dgm:fillClrLst meth="repeat">
+      <a:schemeClr val="lt1">
+        <a:alpha val="90000"/>
+      </a:schemeClr>
+    </dgm:fillClrLst>
+    <dgm:linClrLst meth="repeat">
+      <a:schemeClr val="accent1"/>
+    </dgm:linClrLst>
+    <dgm:effectClrLst/>
+    <dgm:txLinClrLst/>
+    <dgm:txFillClrLst meth="repeat">
+      <a:schemeClr val="dk1"/>
+    </dgm:txFillClrLst>
+    <dgm:txEffectClrLst/>
+  </dgm:styleLbl>
+  <dgm:styleLbl name="bgShp">
+    <dgm:fillClrLst meth="repeat">
+      <a:schemeClr val="accent1">
+        <a:tint val="40000"/>
+      </a:schemeClr>
+    </dgm:fillClrLst>
+    <dgm:linClrLst meth="repeat">
+      <a:schemeClr val="accent1"/>
+    </dgm:linClrLst>
+    <dgm:effectClrLst/>
+    <dgm:txLinClrLst/>
+    <dgm:txFillClrLst meth="repeat">
+      <a:schemeClr val="dk1"/>
+    </dgm:txFillClrLst>
+    <dgm:txEffectClrLst/>
+  </dgm:styleLbl>
+  <dgm:styleLbl name="dkBgShp">
+    <dgm:fillClrLst meth="repeat">
+      <a:schemeClr val="accent1">
+        <a:shade val="80000"/>
+      </a:schemeClr>
+    </dgm:fillClrLst>
+    <dgm:linClrLst meth="repeat">
+      <a:schemeClr val="accent1"/>
+    </dgm:linClrLst>
+    <dgm:effectClrLst/>
+    <dgm:txLinClrLst/>
+    <dgm:txFillClrLst meth="repeat">
+      <a:schemeClr val="lt1"/>
+    </dgm:txFillClrLst>
+    <dgm:txEffectClrLst/>
+  </dgm:styleLbl>
+  <dgm:styleLbl name="trBgShp">
+    <dgm:fillClrLst meth="repeat">
+      <a:schemeClr val="accent1">
+        <a:tint val="50000"/>
+        <a:alpha val="40000"/>
+      </a:schemeClr>
+    </dgm:fillClrLst>
+    <dgm:linClrLst meth="repeat">
+      <a:schemeClr val="accent1"/>
+    </dgm:linClrLst>
+    <dgm:effectClrLst/>
+    <dgm:txLinClrLst/>
+    <dgm:txFillClrLst meth="repeat">
+      <a:schemeClr val="lt1"/>
+    </dgm:txFillClrLst>
+    <dgm:txEffectClrLst/>
+  </dgm:styleLbl>
+  <dgm:styleLbl name="fgShp">
+    <dgm:fillClrLst meth="repeat">
+      <a:schemeClr val="accent1">
+        <a:tint val="60000"/>
+      </a:schemeClr>
+    </dgm:fillClrLst>
+    <dgm:linClrLst meth="repeat">
+      <a:schemeClr val="lt1"/>
+    </dgm:linClrLst>
+    <dgm:effectClrLst/>
+    <dgm:txLinClrLst/>
+    <dgm:txFillClrLst meth="repeat">
+      <a:schemeClr val="dk1"/>
+    </dgm:txFillClrLst>
+    <dgm:txEffectClrLst/>
+  </dgm:styleLbl>
+  <dgm:styleLbl name="revTx">
+    <dgm:fillClrLst meth="repeat">
+      <a:schemeClr val="lt1">
+        <a:alpha val="0"/>
+      </a:schemeClr>
+    </dgm:fillClrLst>
+    <dgm:linClrLst meth="repeat">
+      <a:schemeClr val="dk1">
+        <a:alpha val="0"/>
+      </a:schemeClr>
+    </dgm:linClrLst>
+    <dgm:effectClrLst/>
+    <dgm:txLinClrLst/>
+    <dgm:txFillClrLst meth="repeat">
+      <a:schemeClr val="tx1"/>
+    </dgm:txFillClrLst>
+    <dgm:txEffectClrLst/>
+  </dgm:styleLbl>
+</dgm:colorsDef>
+</file>
+
+<file path=ppt/diagrams/colors2.xml><?xml version="1.0" encoding="utf-8"?>
 <dgm:colorsDef xmlns:dgm="http://schemas.openxmlformats.org/drawingml/2006/diagram" xmlns:a="http://schemas.openxmlformats.org/drawingml/2006/main" uniqueId="urn:microsoft.com/office/officeart/2005/8/colors/accent1_2">
   <dgm:title val=""/>
   <dgm:desc val=""/>
@@ -1338,6 +2092,257 @@
 </dgm:dataModel>
 </file>
 
+<file path=ppt/diagrams/data2.xml><?xml version="1.0" encoding="utf-8"?>
+<dgm:dataModel xmlns:dgm="http://schemas.openxmlformats.org/drawingml/2006/diagram" xmlns:a="http://schemas.openxmlformats.org/drawingml/2006/main">
+  <dgm:ptLst>
+    <dgm:pt modelId="{CC82EFBF-7107-494A-8AAB-7C60D9A18C52}" type="doc">
+      <dgm:prSet loTypeId="urn:microsoft.com/office/officeart/2005/8/layout/hProcess9" loCatId="process" qsTypeId="urn:microsoft.com/office/officeart/2005/8/quickstyle/simple1" qsCatId="simple" csTypeId="urn:microsoft.com/office/officeart/2005/8/colors/accent1_2" csCatId="accent1" phldr="1"/>
+      <dgm:spPr/>
+      <dgm:t>
+        <a:bodyPr/>
+        <a:lstStyle/>
+        <a:p>
+          <a:endParaRPr lang="en-US"/>
+        </a:p>
+      </dgm:t>
+    </dgm:pt>
+    <dgm:pt modelId="{D5F06DD9-2FFF-4343-814C-B31E3889ACCB}">
+      <dgm:prSet phldrT="[Text]" phldr="0"/>
+      <dgm:spPr/>
+      <dgm:t>
+        <a:bodyPr/>
+        <a:lstStyle/>
+        <a:p>
+          <a:r>
+            <a:rPr lang="en-US" dirty="0"/>
+            <a:t>Data</a:t>
+          </a:r>
+        </a:p>
+      </dgm:t>
+    </dgm:pt>
+    <dgm:pt modelId="{3D5B19E5-87A6-4D3B-9B61-5918DF25FDF0}" type="parTrans" cxnId="{B1D4D4C1-723D-4F84-B522-078EBCE805CC}">
+      <dgm:prSet/>
+      <dgm:spPr/>
+      <dgm:t>
+        <a:bodyPr/>
+        <a:lstStyle/>
+        <a:p>
+          <a:endParaRPr lang="en-US"/>
+        </a:p>
+      </dgm:t>
+    </dgm:pt>
+    <dgm:pt modelId="{D670B910-3613-4ABD-B4EF-F8302081AD61}" type="sibTrans" cxnId="{B1D4D4C1-723D-4F84-B522-078EBCE805CC}">
+      <dgm:prSet/>
+      <dgm:spPr/>
+      <dgm:t>
+        <a:bodyPr/>
+        <a:lstStyle/>
+        <a:p>
+          <a:endParaRPr lang="en-US"/>
+        </a:p>
+      </dgm:t>
+    </dgm:pt>
+    <dgm:pt modelId="{97EF6E1C-BA7C-4636-98C5-BAF25E72A9EA}">
+      <dgm:prSet phldrT="[Text]" phldr="0"/>
+      <dgm:spPr/>
+      <dgm:t>
+        <a:bodyPr/>
+        <a:lstStyle/>
+        <a:p>
+          <a:r>
+            <a:rPr lang="en-US" dirty="0"/>
+            <a:t>model</a:t>
+          </a:r>
+        </a:p>
+      </dgm:t>
+    </dgm:pt>
+    <dgm:pt modelId="{CC6E4465-715C-44B9-8F5A-A614F0AF83EB}" type="parTrans" cxnId="{C83ED522-35C7-4177-8D72-358078CACD54}">
+      <dgm:prSet/>
+      <dgm:spPr/>
+      <dgm:t>
+        <a:bodyPr/>
+        <a:lstStyle/>
+        <a:p>
+          <a:endParaRPr lang="en-US"/>
+        </a:p>
+      </dgm:t>
+    </dgm:pt>
+    <dgm:pt modelId="{9AE711F1-83FF-473B-9D0A-AB57E372EB08}" type="sibTrans" cxnId="{C83ED522-35C7-4177-8D72-358078CACD54}">
+      <dgm:prSet/>
+      <dgm:spPr/>
+      <dgm:t>
+        <a:bodyPr/>
+        <a:lstStyle/>
+        <a:p>
+          <a:endParaRPr lang="en-US"/>
+        </a:p>
+      </dgm:t>
+    </dgm:pt>
+    <dgm:pt modelId="{5A9BC8F0-D7E0-407D-82A5-3EE52FE05DF5}">
+      <dgm:prSet phldrT="[Text]" phldr="0"/>
+      <dgm:spPr/>
+      <dgm:t>
+        <a:bodyPr/>
+        <a:lstStyle/>
+        <a:p>
+          <a:r>
+            <a:rPr lang="en-US" dirty="0"/>
+            <a:t>output</a:t>
+          </a:r>
+        </a:p>
+      </dgm:t>
+    </dgm:pt>
+    <dgm:pt modelId="{B5075FD9-CDA1-4398-AB61-C112EF4FC073}" type="parTrans" cxnId="{32D180CA-215D-4D8E-BC5A-ECBB7F3838EE}">
+      <dgm:prSet/>
+      <dgm:spPr/>
+      <dgm:t>
+        <a:bodyPr/>
+        <a:lstStyle/>
+        <a:p>
+          <a:endParaRPr lang="en-US"/>
+        </a:p>
+      </dgm:t>
+    </dgm:pt>
+    <dgm:pt modelId="{D954C522-4F7C-4CC3-8C16-5B8309720BC8}" type="sibTrans" cxnId="{32D180CA-215D-4D8E-BC5A-ECBB7F3838EE}">
+      <dgm:prSet/>
+      <dgm:spPr/>
+      <dgm:t>
+        <a:bodyPr/>
+        <a:lstStyle/>
+        <a:p>
+          <a:endParaRPr lang="en-US"/>
+        </a:p>
+      </dgm:t>
+    </dgm:pt>
+    <dgm:pt modelId="{544E611A-A92D-47AE-8209-1291FA008FC7}">
+      <dgm:prSet phldrT="[Text]" phldr="0"/>
+      <dgm:spPr/>
+      <dgm:t>
+        <a:bodyPr/>
+        <a:lstStyle/>
+        <a:p>
+          <a:r>
+            <a:rPr lang="en-US"/>
+            <a:t>Data Prep</a:t>
+          </a:r>
+          <a:endParaRPr lang="en-US" dirty="0"/>
+        </a:p>
+      </dgm:t>
+    </dgm:pt>
+    <dgm:pt modelId="{257DBADF-88C0-492E-A62A-4A73B487F3F0}" type="parTrans" cxnId="{437ACB81-26B8-4C36-928C-DE8051A9AA85}">
+      <dgm:prSet/>
+      <dgm:spPr/>
+      <dgm:t>
+        <a:bodyPr/>
+        <a:lstStyle/>
+        <a:p>
+          <a:endParaRPr lang="en-US"/>
+        </a:p>
+      </dgm:t>
+    </dgm:pt>
+    <dgm:pt modelId="{581760DF-0F87-43C8-AF78-7383A1D234FB}" type="sibTrans" cxnId="{437ACB81-26B8-4C36-928C-DE8051A9AA85}">
+      <dgm:prSet/>
+      <dgm:spPr/>
+      <dgm:t>
+        <a:bodyPr/>
+        <a:lstStyle/>
+        <a:p>
+          <a:endParaRPr lang="en-US"/>
+        </a:p>
+      </dgm:t>
+    </dgm:pt>
+    <dgm:pt modelId="{7047978F-7B94-453E-9392-49241B4E3952}" type="pres">
+      <dgm:prSet presAssocID="{CC82EFBF-7107-494A-8AAB-7C60D9A18C52}" presName="CompostProcess" presStyleCnt="0">
+        <dgm:presLayoutVars>
+          <dgm:dir/>
+          <dgm:resizeHandles val="exact"/>
+        </dgm:presLayoutVars>
+      </dgm:prSet>
+      <dgm:spPr/>
+    </dgm:pt>
+    <dgm:pt modelId="{E8E2B53E-EF74-4B45-95E3-9B5C82B1340C}" type="pres">
+      <dgm:prSet presAssocID="{CC82EFBF-7107-494A-8AAB-7C60D9A18C52}" presName="arrow" presStyleLbl="bgShp" presStyleIdx="0" presStyleCnt="1"/>
+      <dgm:spPr/>
+    </dgm:pt>
+    <dgm:pt modelId="{A97DD83C-6A98-4091-B61C-9812DDC6BF82}" type="pres">
+      <dgm:prSet presAssocID="{CC82EFBF-7107-494A-8AAB-7C60D9A18C52}" presName="linearProcess" presStyleCnt="0"/>
+      <dgm:spPr/>
+    </dgm:pt>
+    <dgm:pt modelId="{B5819A44-3F39-4942-91AB-6CD9827FCCA5}" type="pres">
+      <dgm:prSet presAssocID="{D5F06DD9-2FFF-4343-814C-B31E3889ACCB}" presName="textNode" presStyleLbl="node1" presStyleIdx="0" presStyleCnt="4">
+        <dgm:presLayoutVars>
+          <dgm:bulletEnabled val="1"/>
+        </dgm:presLayoutVars>
+      </dgm:prSet>
+      <dgm:spPr/>
+    </dgm:pt>
+    <dgm:pt modelId="{13E00F69-C04D-459C-9C6D-52BAA6ABF799}" type="pres">
+      <dgm:prSet presAssocID="{D670B910-3613-4ABD-B4EF-F8302081AD61}" presName="sibTrans" presStyleCnt="0"/>
+      <dgm:spPr/>
+    </dgm:pt>
+    <dgm:pt modelId="{02C6F657-DC22-4874-B839-ED01F19A363A}" type="pres">
+      <dgm:prSet presAssocID="{544E611A-A92D-47AE-8209-1291FA008FC7}" presName="textNode" presStyleLbl="node1" presStyleIdx="1" presStyleCnt="4">
+        <dgm:presLayoutVars>
+          <dgm:bulletEnabled val="1"/>
+        </dgm:presLayoutVars>
+      </dgm:prSet>
+      <dgm:spPr/>
+    </dgm:pt>
+    <dgm:pt modelId="{8A421316-76C1-42B6-99E9-1E657EFF2B4A}" type="pres">
+      <dgm:prSet presAssocID="{581760DF-0F87-43C8-AF78-7383A1D234FB}" presName="sibTrans" presStyleCnt="0"/>
+      <dgm:spPr/>
+    </dgm:pt>
+    <dgm:pt modelId="{C00E62EC-C631-4907-A6A9-ACFBFA247E6A}" type="pres">
+      <dgm:prSet presAssocID="{97EF6E1C-BA7C-4636-98C5-BAF25E72A9EA}" presName="textNode" presStyleLbl="node1" presStyleIdx="2" presStyleCnt="4">
+        <dgm:presLayoutVars>
+          <dgm:bulletEnabled val="1"/>
+        </dgm:presLayoutVars>
+      </dgm:prSet>
+      <dgm:spPr/>
+    </dgm:pt>
+    <dgm:pt modelId="{990CDBD4-F756-4EED-8B52-90FCFB437DE4}" type="pres">
+      <dgm:prSet presAssocID="{9AE711F1-83FF-473B-9D0A-AB57E372EB08}" presName="sibTrans" presStyleCnt="0"/>
+      <dgm:spPr/>
+    </dgm:pt>
+    <dgm:pt modelId="{2B39B381-C3F6-40EF-9153-96AC0478B650}" type="pres">
+      <dgm:prSet presAssocID="{5A9BC8F0-D7E0-407D-82A5-3EE52FE05DF5}" presName="textNode" presStyleLbl="node1" presStyleIdx="3" presStyleCnt="4">
+        <dgm:presLayoutVars>
+          <dgm:bulletEnabled val="1"/>
+        </dgm:presLayoutVars>
+      </dgm:prSet>
+      <dgm:spPr/>
+    </dgm:pt>
+  </dgm:ptLst>
+  <dgm:cxnLst>
+    <dgm:cxn modelId="{C83ED522-35C7-4177-8D72-358078CACD54}" srcId="{CC82EFBF-7107-494A-8AAB-7C60D9A18C52}" destId="{97EF6E1C-BA7C-4636-98C5-BAF25E72A9EA}" srcOrd="2" destOrd="0" parTransId="{CC6E4465-715C-44B9-8F5A-A614F0AF83EB}" sibTransId="{9AE711F1-83FF-473B-9D0A-AB57E372EB08}"/>
+    <dgm:cxn modelId="{A12B8D56-7091-4E96-B4DA-9B12CBF3D848}" type="presOf" srcId="{544E611A-A92D-47AE-8209-1291FA008FC7}" destId="{02C6F657-DC22-4874-B839-ED01F19A363A}" srcOrd="0" destOrd="0" presId="urn:microsoft.com/office/officeart/2005/8/layout/hProcess9"/>
+    <dgm:cxn modelId="{8BE6B87B-BB74-499A-AA04-C383BD12B3AC}" type="presOf" srcId="{D5F06DD9-2FFF-4343-814C-B31E3889ACCB}" destId="{B5819A44-3F39-4942-91AB-6CD9827FCCA5}" srcOrd="0" destOrd="0" presId="urn:microsoft.com/office/officeart/2005/8/layout/hProcess9"/>
+    <dgm:cxn modelId="{437ACB81-26B8-4C36-928C-DE8051A9AA85}" srcId="{CC82EFBF-7107-494A-8AAB-7C60D9A18C52}" destId="{544E611A-A92D-47AE-8209-1291FA008FC7}" srcOrd="1" destOrd="0" parTransId="{257DBADF-88C0-492E-A62A-4A73B487F3F0}" sibTransId="{581760DF-0F87-43C8-AF78-7383A1D234FB}"/>
+    <dgm:cxn modelId="{F2F10E88-2076-4B33-A6FD-7D9F58D19910}" type="presOf" srcId="{97EF6E1C-BA7C-4636-98C5-BAF25E72A9EA}" destId="{C00E62EC-C631-4907-A6A9-ACFBFA247E6A}" srcOrd="0" destOrd="0" presId="urn:microsoft.com/office/officeart/2005/8/layout/hProcess9"/>
+    <dgm:cxn modelId="{F8063FC1-6BD8-4162-8CB9-8D3139B06914}" type="presOf" srcId="{CC82EFBF-7107-494A-8AAB-7C60D9A18C52}" destId="{7047978F-7B94-453E-9392-49241B4E3952}" srcOrd="0" destOrd="0" presId="urn:microsoft.com/office/officeart/2005/8/layout/hProcess9"/>
+    <dgm:cxn modelId="{B1D4D4C1-723D-4F84-B522-078EBCE805CC}" srcId="{CC82EFBF-7107-494A-8AAB-7C60D9A18C52}" destId="{D5F06DD9-2FFF-4343-814C-B31E3889ACCB}" srcOrd="0" destOrd="0" parTransId="{3D5B19E5-87A6-4D3B-9B61-5918DF25FDF0}" sibTransId="{D670B910-3613-4ABD-B4EF-F8302081AD61}"/>
+    <dgm:cxn modelId="{32D180CA-215D-4D8E-BC5A-ECBB7F3838EE}" srcId="{CC82EFBF-7107-494A-8AAB-7C60D9A18C52}" destId="{5A9BC8F0-D7E0-407D-82A5-3EE52FE05DF5}" srcOrd="3" destOrd="0" parTransId="{B5075FD9-CDA1-4398-AB61-C112EF4FC073}" sibTransId="{D954C522-4F7C-4CC3-8C16-5B8309720BC8}"/>
+    <dgm:cxn modelId="{DFB6F8FE-B388-4003-A03F-230FB289B3D0}" type="presOf" srcId="{5A9BC8F0-D7E0-407D-82A5-3EE52FE05DF5}" destId="{2B39B381-C3F6-40EF-9153-96AC0478B650}" srcOrd="0" destOrd="0" presId="urn:microsoft.com/office/officeart/2005/8/layout/hProcess9"/>
+    <dgm:cxn modelId="{A8BE6ECB-571B-444C-9AED-028DA600BB12}" type="presParOf" srcId="{7047978F-7B94-453E-9392-49241B4E3952}" destId="{E8E2B53E-EF74-4B45-95E3-9B5C82B1340C}" srcOrd="0" destOrd="0" presId="urn:microsoft.com/office/officeart/2005/8/layout/hProcess9"/>
+    <dgm:cxn modelId="{FF50508F-C8D3-41DC-B2DA-A7CB897F377C}" type="presParOf" srcId="{7047978F-7B94-453E-9392-49241B4E3952}" destId="{A97DD83C-6A98-4091-B61C-9812DDC6BF82}" srcOrd="1" destOrd="0" presId="urn:microsoft.com/office/officeart/2005/8/layout/hProcess9"/>
+    <dgm:cxn modelId="{E5C7D865-914A-43F9-A8E5-5D6486FF9CC7}" type="presParOf" srcId="{A97DD83C-6A98-4091-B61C-9812DDC6BF82}" destId="{B5819A44-3F39-4942-91AB-6CD9827FCCA5}" srcOrd="0" destOrd="0" presId="urn:microsoft.com/office/officeart/2005/8/layout/hProcess9"/>
+    <dgm:cxn modelId="{F0ECEBC4-E961-4C18-9E84-E14A33C433CD}" type="presParOf" srcId="{A97DD83C-6A98-4091-B61C-9812DDC6BF82}" destId="{13E00F69-C04D-459C-9C6D-52BAA6ABF799}" srcOrd="1" destOrd="0" presId="urn:microsoft.com/office/officeart/2005/8/layout/hProcess9"/>
+    <dgm:cxn modelId="{5168CB5F-752A-4896-A6CC-0217EAC4E0A5}" type="presParOf" srcId="{A97DD83C-6A98-4091-B61C-9812DDC6BF82}" destId="{02C6F657-DC22-4874-B839-ED01F19A363A}" srcOrd="2" destOrd="0" presId="urn:microsoft.com/office/officeart/2005/8/layout/hProcess9"/>
+    <dgm:cxn modelId="{0A24029F-0FBA-4B53-81C3-8E968BE3D3DE}" type="presParOf" srcId="{A97DD83C-6A98-4091-B61C-9812DDC6BF82}" destId="{8A421316-76C1-42B6-99E9-1E657EFF2B4A}" srcOrd="3" destOrd="0" presId="urn:microsoft.com/office/officeart/2005/8/layout/hProcess9"/>
+    <dgm:cxn modelId="{2E504A25-CAB0-4E1D-9DC9-10476FD2A1EB}" type="presParOf" srcId="{A97DD83C-6A98-4091-B61C-9812DDC6BF82}" destId="{C00E62EC-C631-4907-A6A9-ACFBFA247E6A}" srcOrd="4" destOrd="0" presId="urn:microsoft.com/office/officeart/2005/8/layout/hProcess9"/>
+    <dgm:cxn modelId="{293D8225-2230-46AA-9AD0-D4BDB887B88F}" type="presParOf" srcId="{A97DD83C-6A98-4091-B61C-9812DDC6BF82}" destId="{990CDBD4-F756-4EED-8B52-90FCFB437DE4}" srcOrd="5" destOrd="0" presId="urn:microsoft.com/office/officeart/2005/8/layout/hProcess9"/>
+    <dgm:cxn modelId="{E17C0112-6E1D-4442-982B-6F457DF83C11}" type="presParOf" srcId="{A97DD83C-6A98-4091-B61C-9812DDC6BF82}" destId="{2B39B381-C3F6-40EF-9153-96AC0478B650}" srcOrd="6" destOrd="0" presId="urn:microsoft.com/office/officeart/2005/8/layout/hProcess9"/>
+  </dgm:cxnLst>
+  <dgm:bg/>
+  <dgm:whole/>
+  <dgm:extLst>
+    <a:ext uri="http://schemas.microsoft.com/office/drawing/2008/diagram">
+      <dsp:dataModelExt xmlns:dsp="http://schemas.microsoft.com/office/drawing/2008/diagram" relId="rId6" minVer="http://schemas.openxmlformats.org/drawingml/2006/diagram"/>
+    </a:ext>
+  </dgm:extLst>
+</dgm:dataModel>
+</file>
+
 <file path=ppt/diagrams/drawing1.xml><?xml version="1.0" encoding="utf-8"?>
 <dsp:drawing xmlns:dgm="http://schemas.openxmlformats.org/drawingml/2006/diagram" xmlns:dsp="http://schemas.microsoft.com/office/drawing/2008/diagram" xmlns:a="http://schemas.openxmlformats.org/drawingml/2006/main">
   <dsp:spTree>
@@ -2095,6 +3100,367 @@
       <dsp:txXfrm>
         <a:off x="477290" y="759228"/>
         <a:ext cx="752780" cy="651243"/>
+      </dsp:txXfrm>
+    </dsp:sp>
+  </dsp:spTree>
+</dsp:drawing>
+</file>
+
+<file path=ppt/diagrams/drawing2.xml><?xml version="1.0" encoding="utf-8"?>
+<dsp:drawing xmlns:dgm="http://schemas.openxmlformats.org/drawingml/2006/diagram" xmlns:dsp="http://schemas.microsoft.com/office/drawing/2008/diagram" xmlns:a="http://schemas.openxmlformats.org/drawingml/2006/main">
+  <dsp:spTree>
+    <dsp:nvGrpSpPr>
+      <dsp:cNvPr id="0" name=""/>
+      <dsp:cNvGrpSpPr/>
+    </dsp:nvGrpSpPr>
+    <dsp:grpSpPr/>
+    <dsp:sp modelId="{E8E2B53E-EF74-4B45-95E3-9B5C82B1340C}">
+      <dsp:nvSpPr>
+        <dsp:cNvPr id="0" name=""/>
+        <dsp:cNvSpPr/>
+      </dsp:nvSpPr>
+      <dsp:spPr>
+        <a:xfrm>
+          <a:off x="842287" y="0"/>
+          <a:ext cx="9545919" cy="1136074"/>
+        </a:xfrm>
+        <a:prstGeom prst="rightArrow">
+          <a:avLst/>
+        </a:prstGeom>
+        <a:solidFill>
+          <a:schemeClr val="accent1">
+            <a:tint val="40000"/>
+            <a:hueOff val="0"/>
+            <a:satOff val="0"/>
+            <a:lumOff val="0"/>
+            <a:alphaOff val="0"/>
+          </a:schemeClr>
+        </a:solidFill>
+        <a:ln>
+          <a:noFill/>
+        </a:ln>
+        <a:effectLst/>
+      </dsp:spPr>
+      <dsp:style>
+        <a:lnRef idx="0">
+          <a:scrgbClr r="0" g="0" b="0"/>
+        </a:lnRef>
+        <a:fillRef idx="1">
+          <a:scrgbClr r="0" g="0" b="0"/>
+        </a:fillRef>
+        <a:effectRef idx="0">
+          <a:scrgbClr r="0" g="0" b="0"/>
+        </a:effectRef>
+        <a:fontRef idx="minor"/>
+      </dsp:style>
+    </dsp:sp>
+    <dsp:sp modelId="{B5819A44-3F39-4942-91AB-6CD9827FCCA5}">
+      <dsp:nvSpPr>
+        <dsp:cNvPr id="0" name=""/>
+        <dsp:cNvSpPr/>
+      </dsp:nvSpPr>
+      <dsp:spPr>
+        <a:xfrm>
+          <a:off x="3838" y="340822"/>
+          <a:ext cx="2493959" cy="454429"/>
+        </a:xfrm>
+        <a:prstGeom prst="roundRect">
+          <a:avLst/>
+        </a:prstGeom>
+        <a:solidFill>
+          <a:schemeClr val="accent1">
+            <a:hueOff val="0"/>
+            <a:satOff val="0"/>
+            <a:lumOff val="0"/>
+            <a:alphaOff val="0"/>
+          </a:schemeClr>
+        </a:solidFill>
+        <a:ln w="19050" cap="rnd" cmpd="sng" algn="ctr">
+          <a:solidFill>
+            <a:schemeClr val="lt1">
+              <a:hueOff val="0"/>
+              <a:satOff val="0"/>
+              <a:lumOff val="0"/>
+              <a:alphaOff val="0"/>
+            </a:schemeClr>
+          </a:solidFill>
+          <a:prstDash val="solid"/>
+        </a:ln>
+        <a:effectLst/>
+      </dsp:spPr>
+      <dsp:style>
+        <a:lnRef idx="2">
+          <a:scrgbClr r="0" g="0" b="0"/>
+        </a:lnRef>
+        <a:fillRef idx="1">
+          <a:scrgbClr r="0" g="0" b="0"/>
+        </a:fillRef>
+        <a:effectRef idx="0">
+          <a:scrgbClr r="0" g="0" b="0"/>
+        </a:effectRef>
+        <a:fontRef idx="minor">
+          <a:schemeClr val="lt1"/>
+        </a:fontRef>
+      </dsp:style>
+      <dsp:txBody>
+        <a:bodyPr spcFirstLastPara="0" vert="horz" wrap="square" lIns="68580" tIns="68580" rIns="68580" bIns="68580" numCol="1" spcCol="1270" anchor="ctr" anchorCtr="0">
+          <a:noAutofit/>
+        </a:bodyPr>
+        <a:lstStyle/>
+        <a:p>
+          <a:pPr marL="0" lvl="0" indent="0" algn="ctr" defTabSz="800100">
+            <a:lnSpc>
+              <a:spcPct val="90000"/>
+            </a:lnSpc>
+            <a:spcBef>
+              <a:spcPct val="0"/>
+            </a:spcBef>
+            <a:spcAft>
+              <a:spcPct val="35000"/>
+            </a:spcAft>
+            <a:buNone/>
+          </a:pPr>
+          <a:r>
+            <a:rPr lang="en-US" sz="1800" kern="1200" dirty="0"/>
+            <a:t>Data</a:t>
+          </a:r>
+        </a:p>
+      </dsp:txBody>
+      <dsp:txXfrm>
+        <a:off x="26021" y="363005"/>
+        <a:ext cx="2449593" cy="410063"/>
+      </dsp:txXfrm>
+    </dsp:sp>
+    <dsp:sp modelId="{02C6F657-DC22-4874-B839-ED01F19A363A}">
+      <dsp:nvSpPr>
+        <dsp:cNvPr id="0" name=""/>
+        <dsp:cNvSpPr/>
+      </dsp:nvSpPr>
+      <dsp:spPr>
+        <a:xfrm>
+          <a:off x="2913457" y="340822"/>
+          <a:ext cx="2493959" cy="454429"/>
+        </a:xfrm>
+        <a:prstGeom prst="roundRect">
+          <a:avLst/>
+        </a:prstGeom>
+        <a:solidFill>
+          <a:schemeClr val="accent1">
+            <a:hueOff val="0"/>
+            <a:satOff val="0"/>
+            <a:lumOff val="0"/>
+            <a:alphaOff val="0"/>
+          </a:schemeClr>
+        </a:solidFill>
+        <a:ln w="19050" cap="rnd" cmpd="sng" algn="ctr">
+          <a:solidFill>
+            <a:schemeClr val="lt1">
+              <a:hueOff val="0"/>
+              <a:satOff val="0"/>
+              <a:lumOff val="0"/>
+              <a:alphaOff val="0"/>
+            </a:schemeClr>
+          </a:solidFill>
+          <a:prstDash val="solid"/>
+        </a:ln>
+        <a:effectLst/>
+      </dsp:spPr>
+      <dsp:style>
+        <a:lnRef idx="2">
+          <a:scrgbClr r="0" g="0" b="0"/>
+        </a:lnRef>
+        <a:fillRef idx="1">
+          <a:scrgbClr r="0" g="0" b="0"/>
+        </a:fillRef>
+        <a:effectRef idx="0">
+          <a:scrgbClr r="0" g="0" b="0"/>
+        </a:effectRef>
+        <a:fontRef idx="minor">
+          <a:schemeClr val="lt1"/>
+        </a:fontRef>
+      </dsp:style>
+      <dsp:txBody>
+        <a:bodyPr spcFirstLastPara="0" vert="horz" wrap="square" lIns="68580" tIns="68580" rIns="68580" bIns="68580" numCol="1" spcCol="1270" anchor="ctr" anchorCtr="0">
+          <a:noAutofit/>
+        </a:bodyPr>
+        <a:lstStyle/>
+        <a:p>
+          <a:pPr marL="0" lvl="0" indent="0" algn="ctr" defTabSz="800100">
+            <a:lnSpc>
+              <a:spcPct val="90000"/>
+            </a:lnSpc>
+            <a:spcBef>
+              <a:spcPct val="0"/>
+            </a:spcBef>
+            <a:spcAft>
+              <a:spcPct val="35000"/>
+            </a:spcAft>
+            <a:buNone/>
+          </a:pPr>
+          <a:r>
+            <a:rPr lang="en-US" sz="1800" kern="1200"/>
+            <a:t>Data Prep</a:t>
+          </a:r>
+          <a:endParaRPr lang="en-US" sz="1800" kern="1200" dirty="0"/>
+        </a:p>
+      </dsp:txBody>
+      <dsp:txXfrm>
+        <a:off x="2935640" y="363005"/>
+        <a:ext cx="2449593" cy="410063"/>
+      </dsp:txXfrm>
+    </dsp:sp>
+    <dsp:sp modelId="{C00E62EC-C631-4907-A6A9-ACFBFA247E6A}">
+      <dsp:nvSpPr>
+        <dsp:cNvPr id="0" name=""/>
+        <dsp:cNvSpPr/>
+      </dsp:nvSpPr>
+      <dsp:spPr>
+        <a:xfrm>
+          <a:off x="5823076" y="340822"/>
+          <a:ext cx="2493959" cy="454429"/>
+        </a:xfrm>
+        <a:prstGeom prst="roundRect">
+          <a:avLst/>
+        </a:prstGeom>
+        <a:solidFill>
+          <a:schemeClr val="accent1">
+            <a:hueOff val="0"/>
+            <a:satOff val="0"/>
+            <a:lumOff val="0"/>
+            <a:alphaOff val="0"/>
+          </a:schemeClr>
+        </a:solidFill>
+        <a:ln w="19050" cap="rnd" cmpd="sng" algn="ctr">
+          <a:solidFill>
+            <a:schemeClr val="lt1">
+              <a:hueOff val="0"/>
+              <a:satOff val="0"/>
+              <a:lumOff val="0"/>
+              <a:alphaOff val="0"/>
+            </a:schemeClr>
+          </a:solidFill>
+          <a:prstDash val="solid"/>
+        </a:ln>
+        <a:effectLst/>
+      </dsp:spPr>
+      <dsp:style>
+        <a:lnRef idx="2">
+          <a:scrgbClr r="0" g="0" b="0"/>
+        </a:lnRef>
+        <a:fillRef idx="1">
+          <a:scrgbClr r="0" g="0" b="0"/>
+        </a:fillRef>
+        <a:effectRef idx="0">
+          <a:scrgbClr r="0" g="0" b="0"/>
+        </a:effectRef>
+        <a:fontRef idx="minor">
+          <a:schemeClr val="lt1"/>
+        </a:fontRef>
+      </dsp:style>
+      <dsp:txBody>
+        <a:bodyPr spcFirstLastPara="0" vert="horz" wrap="square" lIns="68580" tIns="68580" rIns="68580" bIns="68580" numCol="1" spcCol="1270" anchor="ctr" anchorCtr="0">
+          <a:noAutofit/>
+        </a:bodyPr>
+        <a:lstStyle/>
+        <a:p>
+          <a:pPr marL="0" lvl="0" indent="0" algn="ctr" defTabSz="800100">
+            <a:lnSpc>
+              <a:spcPct val="90000"/>
+            </a:lnSpc>
+            <a:spcBef>
+              <a:spcPct val="0"/>
+            </a:spcBef>
+            <a:spcAft>
+              <a:spcPct val="35000"/>
+            </a:spcAft>
+            <a:buNone/>
+          </a:pPr>
+          <a:r>
+            <a:rPr lang="en-US" sz="1800" kern="1200" dirty="0"/>
+            <a:t>model</a:t>
+          </a:r>
+        </a:p>
+      </dsp:txBody>
+      <dsp:txXfrm>
+        <a:off x="5845259" y="363005"/>
+        <a:ext cx="2449593" cy="410063"/>
+      </dsp:txXfrm>
+    </dsp:sp>
+    <dsp:sp modelId="{2B39B381-C3F6-40EF-9153-96AC0478B650}">
+      <dsp:nvSpPr>
+        <dsp:cNvPr id="0" name=""/>
+        <dsp:cNvSpPr/>
+      </dsp:nvSpPr>
+      <dsp:spPr>
+        <a:xfrm>
+          <a:off x="8732696" y="340822"/>
+          <a:ext cx="2493959" cy="454429"/>
+        </a:xfrm>
+        <a:prstGeom prst="roundRect">
+          <a:avLst/>
+        </a:prstGeom>
+        <a:solidFill>
+          <a:schemeClr val="accent1">
+            <a:hueOff val="0"/>
+            <a:satOff val="0"/>
+            <a:lumOff val="0"/>
+            <a:alphaOff val="0"/>
+          </a:schemeClr>
+        </a:solidFill>
+        <a:ln w="19050" cap="rnd" cmpd="sng" algn="ctr">
+          <a:solidFill>
+            <a:schemeClr val="lt1">
+              <a:hueOff val="0"/>
+              <a:satOff val="0"/>
+              <a:lumOff val="0"/>
+              <a:alphaOff val="0"/>
+            </a:schemeClr>
+          </a:solidFill>
+          <a:prstDash val="solid"/>
+        </a:ln>
+        <a:effectLst/>
+      </dsp:spPr>
+      <dsp:style>
+        <a:lnRef idx="2">
+          <a:scrgbClr r="0" g="0" b="0"/>
+        </a:lnRef>
+        <a:fillRef idx="1">
+          <a:scrgbClr r="0" g="0" b="0"/>
+        </a:fillRef>
+        <a:effectRef idx="0">
+          <a:scrgbClr r="0" g="0" b="0"/>
+        </a:effectRef>
+        <a:fontRef idx="minor">
+          <a:schemeClr val="lt1"/>
+        </a:fontRef>
+      </dsp:style>
+      <dsp:txBody>
+        <a:bodyPr spcFirstLastPara="0" vert="horz" wrap="square" lIns="68580" tIns="68580" rIns="68580" bIns="68580" numCol="1" spcCol="1270" anchor="ctr" anchorCtr="0">
+          <a:noAutofit/>
+        </a:bodyPr>
+        <a:lstStyle/>
+        <a:p>
+          <a:pPr marL="0" lvl="0" indent="0" algn="ctr" defTabSz="800100">
+            <a:lnSpc>
+              <a:spcPct val="90000"/>
+            </a:lnSpc>
+            <a:spcBef>
+              <a:spcPct val="0"/>
+            </a:spcBef>
+            <a:spcAft>
+              <a:spcPct val="35000"/>
+            </a:spcAft>
+            <a:buNone/>
+          </a:pPr>
+          <a:r>
+            <a:rPr lang="en-US" sz="1800" kern="1200" dirty="0"/>
+            <a:t>output</a:t>
+          </a:r>
+        </a:p>
+      </dsp:txBody>
+      <dsp:txXfrm>
+        <a:off x="8754879" y="363005"/>
+        <a:ext cx="2449593" cy="410063"/>
       </dsp:txXfrm>
     </dsp:sp>
   </dsp:spTree>
@@ -3100,7 +4466,1195 @@
 </dgm:layoutDef>
 </file>
 
+<file path=ppt/diagrams/layout2.xml><?xml version="1.0" encoding="utf-8"?>
+<dgm:layoutDef xmlns:dgm="http://schemas.openxmlformats.org/drawingml/2006/diagram" xmlns:a="http://schemas.openxmlformats.org/drawingml/2006/main" uniqueId="urn:microsoft.com/office/officeart/2005/8/layout/hProcess9">
+  <dgm:title val=""/>
+  <dgm:desc val=""/>
+  <dgm:catLst>
+    <dgm:cat type="process" pri="5000"/>
+    <dgm:cat type="convert" pri="13000"/>
+  </dgm:catLst>
+  <dgm:sampData useDef="1">
+    <dgm:dataModel>
+      <dgm:ptLst/>
+      <dgm:bg/>
+      <dgm:whole/>
+    </dgm:dataModel>
+  </dgm:sampData>
+  <dgm:styleData>
+    <dgm:dataModel>
+      <dgm:ptLst>
+        <dgm:pt modelId="0" type="doc"/>
+        <dgm:pt modelId="1"/>
+        <dgm:pt modelId="2"/>
+      </dgm:ptLst>
+      <dgm:cxnLst>
+        <dgm:cxn modelId="3" srcId="0" destId="1" srcOrd="0" destOrd="0"/>
+        <dgm:cxn modelId="4" srcId="0" destId="2" srcOrd="1" destOrd="0"/>
+      </dgm:cxnLst>
+      <dgm:bg/>
+      <dgm:whole/>
+    </dgm:dataModel>
+  </dgm:styleData>
+  <dgm:clrData>
+    <dgm:dataModel>
+      <dgm:ptLst>
+        <dgm:pt modelId="0" type="doc"/>
+        <dgm:pt modelId="1"/>
+        <dgm:pt modelId="2"/>
+        <dgm:pt modelId="3"/>
+        <dgm:pt modelId="4"/>
+      </dgm:ptLst>
+      <dgm:cxnLst>
+        <dgm:cxn modelId="5" srcId="0" destId="1" srcOrd="0" destOrd="0"/>
+        <dgm:cxn modelId="6" srcId="0" destId="2" srcOrd="1" destOrd="0"/>
+        <dgm:cxn modelId="7" srcId="0" destId="3" srcOrd="2" destOrd="0"/>
+        <dgm:cxn modelId="8" srcId="0" destId="4" srcOrd="3" destOrd="0"/>
+      </dgm:cxnLst>
+      <dgm:bg/>
+      <dgm:whole/>
+    </dgm:dataModel>
+  </dgm:clrData>
+  <dgm:layoutNode name="CompostProcess">
+    <dgm:varLst>
+      <dgm:dir/>
+      <dgm:resizeHandles val="exact"/>
+    </dgm:varLst>
+    <dgm:alg type="composite">
+      <dgm:param type="horzAlign" val="ctr"/>
+      <dgm:param type="vertAlign" val="mid"/>
+    </dgm:alg>
+    <dgm:shape xmlns:r="http://schemas.openxmlformats.org/officeDocument/2006/relationships" r:blip="">
+      <dgm:adjLst/>
+    </dgm:shape>
+    <dgm:presOf/>
+    <dgm:constrLst>
+      <dgm:constr type="w" for="ch" forName="arrow" refType="w" fact="0.85"/>
+      <dgm:constr type="h" for="ch" forName="arrow" refType="h"/>
+      <dgm:constr type="ctrX" for="ch" forName="arrow" refType="w" fact="0.5"/>
+      <dgm:constr type="ctrY" for="ch" forName="arrow" refType="h" fact="0.5"/>
+      <dgm:constr type="w" for="ch" forName="linearProcess" refType="w"/>
+      <dgm:constr type="h" for="ch" forName="linearProcess" refType="h" fact="0.4"/>
+      <dgm:constr type="ctrX" for="ch" forName="linearProcess" refType="w" fact="0.5"/>
+      <dgm:constr type="ctrY" for="ch" forName="linearProcess" refType="h" fact="0.5"/>
+    </dgm:constrLst>
+    <dgm:ruleLst/>
+    <dgm:layoutNode name="arrow" styleLbl="bgShp">
+      <dgm:alg type="sp"/>
+      <dgm:choose name="Name0">
+        <dgm:if name="Name1" func="var" arg="dir" op="equ" val="norm">
+          <dgm:shape xmlns:r="http://schemas.openxmlformats.org/officeDocument/2006/relationships" type="rightArrow" r:blip="">
+            <dgm:adjLst/>
+          </dgm:shape>
+        </dgm:if>
+        <dgm:else name="Name2">
+          <dgm:shape xmlns:r="http://schemas.openxmlformats.org/officeDocument/2006/relationships" type="leftArrow" r:blip="">
+            <dgm:adjLst/>
+          </dgm:shape>
+        </dgm:else>
+      </dgm:choose>
+      <dgm:presOf/>
+      <dgm:constrLst/>
+      <dgm:ruleLst/>
+    </dgm:layoutNode>
+    <dgm:layoutNode name="linearProcess">
+      <dgm:choose name="Name3">
+        <dgm:if name="Name4" func="var" arg="dir" op="equ" val="norm">
+          <dgm:alg type="lin"/>
+        </dgm:if>
+        <dgm:else name="Name5">
+          <dgm:alg type="lin">
+            <dgm:param type="linDir" val="fromR"/>
+          </dgm:alg>
+        </dgm:else>
+      </dgm:choose>
+      <dgm:shape xmlns:r="http://schemas.openxmlformats.org/officeDocument/2006/relationships" r:blip="">
+        <dgm:adjLst/>
+      </dgm:shape>
+      <dgm:presOf/>
+      <dgm:constrLst>
+        <dgm:constr type="userA" for="ch" ptType="node" refType="w"/>
+        <dgm:constr type="h" for="ch" ptType="node" refType="h"/>
+        <dgm:constr type="w" for="ch" ptType="node" op="equ"/>
+        <dgm:constr type="w" for="ch" forName="sibTrans" refType="w" fact="0.05"/>
+        <dgm:constr type="primFontSz" for="ch" ptType="node" op="equ" val="65"/>
+      </dgm:constrLst>
+      <dgm:ruleLst/>
+      <dgm:forEach name="Name6" axis="ch" ptType="node">
+        <dgm:layoutNode name="textNode" styleLbl="node1">
+          <dgm:varLst>
+            <dgm:bulletEnabled val="1"/>
+          </dgm:varLst>
+          <dgm:alg type="tx"/>
+          <dgm:shape xmlns:r="http://schemas.openxmlformats.org/officeDocument/2006/relationships" type="roundRect" r:blip="">
+            <dgm:adjLst/>
+          </dgm:shape>
+          <dgm:presOf axis="desOrSelf" ptType="node"/>
+          <dgm:constrLst>
+            <dgm:constr type="userA"/>
+            <dgm:constr type="w" refType="userA" fact="0.3"/>
+            <dgm:constr type="tMarg" refType="primFontSz" fact="0.3"/>
+            <dgm:constr type="bMarg" refType="primFontSz" fact="0.3"/>
+            <dgm:constr type="lMarg" refType="primFontSz" fact="0.3"/>
+            <dgm:constr type="rMarg" refType="primFontSz" fact="0.3"/>
+          </dgm:constrLst>
+          <dgm:ruleLst>
+            <dgm:rule type="w" val="NaN" fact="1" max="NaN"/>
+            <dgm:rule type="primFontSz" val="5" fact="NaN" max="NaN"/>
+          </dgm:ruleLst>
+        </dgm:layoutNode>
+        <dgm:forEach name="Name7" axis="followSib" ptType="sibTrans" cnt="1">
+          <dgm:layoutNode name="sibTrans">
+            <dgm:alg type="sp"/>
+            <dgm:shape xmlns:r="http://schemas.openxmlformats.org/officeDocument/2006/relationships" r:blip="">
+              <dgm:adjLst/>
+            </dgm:shape>
+            <dgm:presOf/>
+            <dgm:constrLst/>
+            <dgm:ruleLst/>
+          </dgm:layoutNode>
+        </dgm:forEach>
+      </dgm:forEach>
+    </dgm:layoutNode>
+  </dgm:layoutNode>
+</dgm:layoutDef>
+</file>
+
 <file path=ppt/diagrams/quickStyle1.xml><?xml version="1.0" encoding="utf-8"?>
+<dgm:styleDef xmlns:dgm="http://schemas.openxmlformats.org/drawingml/2006/diagram" xmlns:a="http://schemas.openxmlformats.org/drawingml/2006/main" uniqueId="urn:microsoft.com/office/officeart/2005/8/quickstyle/simple1">
+  <dgm:title val=""/>
+  <dgm:desc val=""/>
+  <dgm:catLst>
+    <dgm:cat type="simple" pri="10100"/>
+  </dgm:catLst>
+  <dgm:scene3d>
+    <a:camera prst="orthographicFront"/>
+    <a:lightRig rig="threePt" dir="t"/>
+  </dgm:scene3d>
+  <dgm:styleLbl name="node0">
+    <dgm:scene3d>
+      <a:camera prst="orthographicFront"/>
+      <a:lightRig rig="threePt" dir="t"/>
+    </dgm:scene3d>
+    <dgm:sp3d/>
+    <dgm:txPr/>
+    <dgm:style>
+      <a:lnRef idx="2">
+        <a:scrgbClr r="0" g="0" b="0"/>
+      </a:lnRef>
+      <a:fillRef idx="1">
+        <a:scrgbClr r="0" g="0" b="0"/>
+      </a:fillRef>
+      <a:effectRef idx="0">
+        <a:scrgbClr r="0" g="0" b="0"/>
+      </a:effectRef>
+      <a:fontRef idx="minor">
+        <a:schemeClr val="lt1"/>
+      </a:fontRef>
+    </dgm:style>
+  </dgm:styleLbl>
+  <dgm:styleLbl name="lnNode1">
+    <dgm:scene3d>
+      <a:camera prst="orthographicFront"/>
+      <a:lightRig rig="threePt" dir="t"/>
+    </dgm:scene3d>
+    <dgm:sp3d/>
+    <dgm:txPr/>
+    <dgm:style>
+      <a:lnRef idx="2">
+        <a:scrgbClr r="0" g="0" b="0"/>
+      </a:lnRef>
+      <a:fillRef idx="1">
+        <a:scrgbClr r="0" g="0" b="0"/>
+      </a:fillRef>
+      <a:effectRef idx="0">
+        <a:scrgbClr r="0" g="0" b="0"/>
+      </a:effectRef>
+      <a:fontRef idx="minor">
+        <a:schemeClr val="lt1"/>
+      </a:fontRef>
+    </dgm:style>
+  </dgm:styleLbl>
+  <dgm:styleLbl name="vennNode1">
+    <dgm:scene3d>
+      <a:camera prst="orthographicFront"/>
+      <a:lightRig rig="threePt" dir="t"/>
+    </dgm:scene3d>
+    <dgm:sp3d/>
+    <dgm:txPr/>
+    <dgm:style>
+      <a:lnRef idx="2">
+        <a:scrgbClr r="0" g="0" b="0"/>
+      </a:lnRef>
+      <a:fillRef idx="1">
+        <a:scrgbClr r="0" g="0" b="0"/>
+      </a:fillRef>
+      <a:effectRef idx="0">
+        <a:scrgbClr r="0" g="0" b="0"/>
+      </a:effectRef>
+      <a:fontRef idx="minor">
+        <a:schemeClr val="tx1"/>
+      </a:fontRef>
+    </dgm:style>
+  </dgm:styleLbl>
+  <dgm:styleLbl name="alignNode1">
+    <dgm:scene3d>
+      <a:camera prst="orthographicFront"/>
+      <a:lightRig rig="threePt" dir="t"/>
+    </dgm:scene3d>
+    <dgm:sp3d/>
+    <dgm:txPr/>
+    <dgm:style>
+      <a:lnRef idx="2">
+        <a:scrgbClr r="0" g="0" b="0"/>
+      </a:lnRef>
+      <a:fillRef idx="1">
+        <a:scrgbClr r="0" g="0" b="0"/>
+      </a:fillRef>
+      <a:effectRef idx="0">
+        <a:scrgbClr r="0" g="0" b="0"/>
+      </a:effectRef>
+      <a:fontRef idx="minor">
+        <a:schemeClr val="lt1"/>
+      </a:fontRef>
+    </dgm:style>
+  </dgm:styleLbl>
+  <dgm:styleLbl name="node1">
+    <dgm:scene3d>
+      <a:camera prst="orthographicFront"/>
+      <a:lightRig rig="threePt" dir="t"/>
+    </dgm:scene3d>
+    <dgm:sp3d/>
+    <dgm:txPr/>
+    <dgm:style>
+      <a:lnRef idx="2">
+        <a:scrgbClr r="0" g="0" b="0"/>
+      </a:lnRef>
+      <a:fillRef idx="1">
+        <a:scrgbClr r="0" g="0" b="0"/>
+      </a:fillRef>
+      <a:effectRef idx="0">
+        <a:scrgbClr r="0" g="0" b="0"/>
+      </a:effectRef>
+      <a:fontRef idx="minor">
+        <a:schemeClr val="lt1"/>
+      </a:fontRef>
+    </dgm:style>
+  </dgm:styleLbl>
+  <dgm:styleLbl name="node2">
+    <dgm:scene3d>
+      <a:camera prst="orthographicFront"/>
+      <a:lightRig rig="threePt" dir="t"/>
+    </dgm:scene3d>
+    <dgm:sp3d/>
+    <dgm:txPr/>
+    <dgm:style>
+      <a:lnRef idx="2">
+        <a:scrgbClr r="0" g="0" b="0"/>
+      </a:lnRef>
+      <a:fillRef idx="1">
+        <a:scrgbClr r="0" g="0" b="0"/>
+      </a:fillRef>
+      <a:effectRef idx="0">
+        <a:scrgbClr r="0" g="0" b="0"/>
+      </a:effectRef>
+      <a:fontRef idx="minor">
+        <a:schemeClr val="lt1"/>
+      </a:fontRef>
+    </dgm:style>
+  </dgm:styleLbl>
+  <dgm:styleLbl name="node3">
+    <dgm:scene3d>
+      <a:camera prst="orthographicFront"/>
+      <a:lightRig rig="threePt" dir="t"/>
+    </dgm:scene3d>
+    <dgm:sp3d/>
+    <dgm:txPr/>
+    <dgm:style>
+      <a:lnRef idx="2">
+        <a:scrgbClr r="0" g="0" b="0"/>
+      </a:lnRef>
+      <a:fillRef idx="1">
+        <a:scrgbClr r="0" g="0" b="0"/>
+      </a:fillRef>
+      <a:effectRef idx="0">
+        <a:scrgbClr r="0" g="0" b="0"/>
+      </a:effectRef>
+      <a:fontRef idx="minor">
+        <a:schemeClr val="lt1"/>
+      </a:fontRef>
+    </dgm:style>
+  </dgm:styleLbl>
+  <dgm:styleLbl name="node4">
+    <dgm:scene3d>
+      <a:camera prst="orthographicFront"/>
+      <a:lightRig rig="threePt" dir="t"/>
+    </dgm:scene3d>
+    <dgm:sp3d/>
+    <dgm:txPr/>
+    <dgm:style>
+      <a:lnRef idx="2">
+        <a:scrgbClr r="0" g="0" b="0"/>
+      </a:lnRef>
+      <a:fillRef idx="1">
+        <a:scrgbClr r="0" g="0" b="0"/>
+      </a:fillRef>
+      <a:effectRef idx="0">
+        <a:scrgbClr r="0" g="0" b="0"/>
+      </a:effectRef>
+      <a:fontRef idx="minor">
+        <a:schemeClr val="lt1"/>
+      </a:fontRef>
+    </dgm:style>
+  </dgm:styleLbl>
+  <dgm:styleLbl name="fgImgPlace1">
+    <dgm:scene3d>
+      <a:camera prst="orthographicFront"/>
+      <a:lightRig rig="threePt" dir="t"/>
+    </dgm:scene3d>
+    <dgm:sp3d/>
+    <dgm:txPr/>
+    <dgm:style>
+      <a:lnRef idx="2">
+        <a:scrgbClr r="0" g="0" b="0"/>
+      </a:lnRef>
+      <a:fillRef idx="1">
+        <a:scrgbClr r="0" g="0" b="0"/>
+      </a:fillRef>
+      <a:effectRef idx="0">
+        <a:scrgbClr r="0" g="0" b="0"/>
+      </a:effectRef>
+      <a:fontRef idx="minor"/>
+    </dgm:style>
+  </dgm:styleLbl>
+  <dgm:styleLbl name="alignImgPlace1">
+    <dgm:scene3d>
+      <a:camera prst="orthographicFront"/>
+      <a:lightRig rig="threePt" dir="t"/>
+    </dgm:scene3d>
+    <dgm:sp3d/>
+    <dgm:txPr/>
+    <dgm:style>
+      <a:lnRef idx="2">
+        <a:scrgbClr r="0" g="0" b="0"/>
+      </a:lnRef>
+      <a:fillRef idx="1">
+        <a:scrgbClr r="0" g="0" b="0"/>
+      </a:fillRef>
+      <a:effectRef idx="0">
+        <a:scrgbClr r="0" g="0" b="0"/>
+      </a:effectRef>
+      <a:fontRef idx="minor"/>
+    </dgm:style>
+  </dgm:styleLbl>
+  <dgm:styleLbl name="bgImgPlace1">
+    <dgm:scene3d>
+      <a:camera prst="orthographicFront"/>
+      <a:lightRig rig="threePt" dir="t"/>
+    </dgm:scene3d>
+    <dgm:sp3d/>
+    <dgm:txPr/>
+    <dgm:style>
+      <a:lnRef idx="2">
+        <a:scrgbClr r="0" g="0" b="0"/>
+      </a:lnRef>
+      <a:fillRef idx="1">
+        <a:scrgbClr r="0" g="0" b="0"/>
+      </a:fillRef>
+      <a:effectRef idx="0">
+        <a:scrgbClr r="0" g="0" b="0"/>
+      </a:effectRef>
+      <a:fontRef idx="minor"/>
+    </dgm:style>
+  </dgm:styleLbl>
+  <dgm:styleLbl name="sibTrans2D1">
+    <dgm:scene3d>
+      <a:camera prst="orthographicFront"/>
+      <a:lightRig rig="threePt" dir="t"/>
+    </dgm:scene3d>
+    <dgm:sp3d/>
+    <dgm:txPr/>
+    <dgm:style>
+      <a:lnRef idx="0">
+        <a:scrgbClr r="0" g="0" b="0"/>
+      </a:lnRef>
+      <a:fillRef idx="1">
+        <a:scrgbClr r="0" g="0" b="0"/>
+      </a:fillRef>
+      <a:effectRef idx="0">
+        <a:scrgbClr r="0" g="0" b="0"/>
+      </a:effectRef>
+      <a:fontRef idx="minor">
+        <a:schemeClr val="lt1"/>
+      </a:fontRef>
+    </dgm:style>
+  </dgm:styleLbl>
+  <dgm:styleLbl name="fgSibTrans2D1">
+    <dgm:scene3d>
+      <a:camera prst="orthographicFront"/>
+      <a:lightRig rig="threePt" dir="t"/>
+    </dgm:scene3d>
+    <dgm:sp3d/>
+    <dgm:txPr/>
+    <dgm:style>
+      <a:lnRef idx="0">
+        <a:scrgbClr r="0" g="0" b="0"/>
+      </a:lnRef>
+      <a:fillRef idx="1">
+        <a:scrgbClr r="0" g="0" b="0"/>
+      </a:fillRef>
+      <a:effectRef idx="0">
+        <a:scrgbClr r="0" g="0" b="0"/>
+      </a:effectRef>
+      <a:fontRef idx="minor">
+        <a:schemeClr val="lt1"/>
+      </a:fontRef>
+    </dgm:style>
+  </dgm:styleLbl>
+  <dgm:styleLbl name="bgSibTrans2D1">
+    <dgm:scene3d>
+      <a:camera prst="orthographicFront"/>
+      <a:lightRig rig="threePt" dir="t"/>
+    </dgm:scene3d>
+    <dgm:sp3d/>
+    <dgm:txPr/>
+    <dgm:style>
+      <a:lnRef idx="0">
+        <a:scrgbClr r="0" g="0" b="0"/>
+      </a:lnRef>
+      <a:fillRef idx="1">
+        <a:scrgbClr r="0" g="0" b="0"/>
+      </a:fillRef>
+      <a:effectRef idx="0">
+        <a:scrgbClr r="0" g="0" b="0"/>
+      </a:effectRef>
+      <a:fontRef idx="minor">
+        <a:schemeClr val="lt1"/>
+      </a:fontRef>
+    </dgm:style>
+  </dgm:styleLbl>
+  <dgm:styleLbl name="sibTrans1D1">
+    <dgm:scene3d>
+      <a:camera prst="orthographicFront"/>
+      <a:lightRig rig="threePt" dir="t"/>
+    </dgm:scene3d>
+    <dgm:sp3d/>
+    <dgm:txPr/>
+    <dgm:style>
+      <a:lnRef idx="1">
+        <a:scrgbClr r="0" g="0" b="0"/>
+      </a:lnRef>
+      <a:fillRef idx="0">
+        <a:scrgbClr r="0" g="0" b="0"/>
+      </a:fillRef>
+      <a:effectRef idx="0">
+        <a:scrgbClr r="0" g="0" b="0"/>
+      </a:effectRef>
+      <a:fontRef idx="minor"/>
+    </dgm:style>
+  </dgm:styleLbl>
+  <dgm:styleLbl name="callout">
+    <dgm:scene3d>
+      <a:camera prst="orthographicFront"/>
+      <a:lightRig rig="threePt" dir="t"/>
+    </dgm:scene3d>
+    <dgm:sp3d/>
+    <dgm:txPr/>
+    <dgm:style>
+      <a:lnRef idx="2">
+        <a:scrgbClr r="0" g="0" b="0"/>
+      </a:lnRef>
+      <a:fillRef idx="1">
+        <a:scrgbClr r="0" g="0" b="0"/>
+      </a:fillRef>
+      <a:effectRef idx="0">
+        <a:scrgbClr r="0" g="0" b="0"/>
+      </a:effectRef>
+      <a:fontRef idx="minor"/>
+    </dgm:style>
+  </dgm:styleLbl>
+  <dgm:styleLbl name="asst0">
+    <dgm:scene3d>
+      <a:camera prst="orthographicFront"/>
+      <a:lightRig rig="threePt" dir="t"/>
+    </dgm:scene3d>
+    <dgm:sp3d/>
+    <dgm:txPr/>
+    <dgm:style>
+      <a:lnRef idx="2">
+        <a:scrgbClr r="0" g="0" b="0"/>
+      </a:lnRef>
+      <a:fillRef idx="1">
+        <a:scrgbClr r="0" g="0" b="0"/>
+      </a:fillRef>
+      <a:effectRef idx="0">
+        <a:scrgbClr r="0" g="0" b="0"/>
+      </a:effectRef>
+      <a:fontRef idx="minor">
+        <a:schemeClr val="lt1"/>
+      </a:fontRef>
+    </dgm:style>
+  </dgm:styleLbl>
+  <dgm:styleLbl name="asst1">
+    <dgm:scene3d>
+      <a:camera prst="orthographicFront"/>
+      <a:lightRig rig="threePt" dir="t"/>
+    </dgm:scene3d>
+    <dgm:sp3d/>
+    <dgm:txPr/>
+    <dgm:style>
+      <a:lnRef idx="2">
+        <a:scrgbClr r="0" g="0" b="0"/>
+      </a:lnRef>
+      <a:fillRef idx="1">
+        <a:scrgbClr r="0" g="0" b="0"/>
+      </a:fillRef>
+      <a:effectRef idx="0">
+        <a:scrgbClr r="0" g="0" b="0"/>
+      </a:effectRef>
+      <a:fontRef idx="minor">
+        <a:schemeClr val="lt1"/>
+      </a:fontRef>
+    </dgm:style>
+  </dgm:styleLbl>
+  <dgm:styleLbl name="asst2">
+    <dgm:scene3d>
+      <a:camera prst="orthographicFront"/>
+      <a:lightRig rig="threePt" dir="t"/>
+    </dgm:scene3d>
+    <dgm:sp3d/>
+    <dgm:txPr/>
+    <dgm:style>
+      <a:lnRef idx="2">
+        <a:scrgbClr r="0" g="0" b="0"/>
+      </a:lnRef>
+      <a:fillRef idx="1">
+        <a:scrgbClr r="0" g="0" b="0"/>
+      </a:fillRef>
+      <a:effectRef idx="0">
+        <a:scrgbClr r="0" g="0" b="0"/>
+      </a:effectRef>
+      <a:fontRef idx="minor">
+        <a:schemeClr val="lt1"/>
+      </a:fontRef>
+    </dgm:style>
+  </dgm:styleLbl>
+  <dgm:styleLbl name="asst3">
+    <dgm:scene3d>
+      <a:camera prst="orthographicFront"/>
+      <a:lightRig rig="threePt" dir="t"/>
+    </dgm:scene3d>
+    <dgm:sp3d/>
+    <dgm:txPr/>
+    <dgm:style>
+      <a:lnRef idx="2">
+        <a:scrgbClr r="0" g="0" b="0"/>
+      </a:lnRef>
+      <a:fillRef idx="1">
+        <a:scrgbClr r="0" g="0" b="0"/>
+      </a:fillRef>
+      <a:effectRef idx="0">
+        <a:scrgbClr r="0" g="0" b="0"/>
+      </a:effectRef>
+      <a:fontRef idx="minor">
+        <a:schemeClr val="lt1"/>
+      </a:fontRef>
+    </dgm:style>
+  </dgm:styleLbl>
+  <dgm:styleLbl name="asst4">
+    <dgm:scene3d>
+      <a:camera prst="orthographicFront"/>
+      <a:lightRig rig="threePt" dir="t"/>
+    </dgm:scene3d>
+    <dgm:sp3d/>
+    <dgm:txPr/>
+    <dgm:style>
+      <a:lnRef idx="2">
+        <a:scrgbClr r="0" g="0" b="0"/>
+      </a:lnRef>
+      <a:fillRef idx="1">
+        <a:scrgbClr r="0" g="0" b="0"/>
+      </a:fillRef>
+      <a:effectRef idx="0">
+        <a:scrgbClr r="0" g="0" b="0"/>
+      </a:effectRef>
+      <a:fontRef idx="minor">
+        <a:schemeClr val="lt1"/>
+      </a:fontRef>
+    </dgm:style>
+  </dgm:styleLbl>
+  <dgm:styleLbl name="parChTrans2D1">
+    <dgm:scene3d>
+      <a:camera prst="orthographicFront"/>
+      <a:lightRig rig="threePt" dir="t"/>
+    </dgm:scene3d>
+    <dgm:sp3d/>
+    <dgm:txPr/>
+    <dgm:style>
+      <a:lnRef idx="2">
+        <a:scrgbClr r="0" g="0" b="0"/>
+      </a:lnRef>
+      <a:fillRef idx="1">
+        <a:scrgbClr r="0" g="0" b="0"/>
+      </a:fillRef>
+      <a:effectRef idx="0">
+        <a:scrgbClr r="0" g="0" b="0"/>
+      </a:effectRef>
+      <a:fontRef idx="minor">
+        <a:schemeClr val="lt1"/>
+      </a:fontRef>
+    </dgm:style>
+  </dgm:styleLbl>
+  <dgm:styleLbl name="parChTrans2D2">
+    <dgm:scene3d>
+      <a:camera prst="orthographicFront"/>
+      <a:lightRig rig="threePt" dir="t"/>
+    </dgm:scene3d>
+    <dgm:sp3d/>
+    <dgm:txPr/>
+    <dgm:style>
+      <a:lnRef idx="2">
+        <a:scrgbClr r="0" g="0" b="0"/>
+      </a:lnRef>
+      <a:fillRef idx="1">
+        <a:scrgbClr r="0" g="0" b="0"/>
+      </a:fillRef>
+      <a:effectRef idx="0">
+        <a:scrgbClr r="0" g="0" b="0"/>
+      </a:effectRef>
+      <a:fontRef idx="minor">
+        <a:schemeClr val="lt1"/>
+      </a:fontRef>
+    </dgm:style>
+  </dgm:styleLbl>
+  <dgm:styleLbl name="parChTrans2D3">
+    <dgm:scene3d>
+      <a:camera prst="orthographicFront"/>
+      <a:lightRig rig="threePt" dir="t"/>
+    </dgm:scene3d>
+    <dgm:sp3d/>
+    <dgm:txPr/>
+    <dgm:style>
+      <a:lnRef idx="2">
+        <a:scrgbClr r="0" g="0" b="0"/>
+      </a:lnRef>
+      <a:fillRef idx="1">
+        <a:scrgbClr r="0" g="0" b="0"/>
+      </a:fillRef>
+      <a:effectRef idx="0">
+        <a:scrgbClr r="0" g="0" b="0"/>
+      </a:effectRef>
+      <a:fontRef idx="minor">
+        <a:schemeClr val="lt1"/>
+      </a:fontRef>
+    </dgm:style>
+  </dgm:styleLbl>
+  <dgm:styleLbl name="parChTrans2D4">
+    <dgm:scene3d>
+      <a:camera prst="orthographicFront"/>
+      <a:lightRig rig="threePt" dir="t"/>
+    </dgm:scene3d>
+    <dgm:sp3d/>
+    <dgm:txPr/>
+    <dgm:style>
+      <a:lnRef idx="2">
+        <a:scrgbClr r="0" g="0" b="0"/>
+      </a:lnRef>
+      <a:fillRef idx="1">
+        <a:scrgbClr r="0" g="0" b="0"/>
+      </a:fillRef>
+      <a:effectRef idx="0">
+        <a:scrgbClr r="0" g="0" b="0"/>
+      </a:effectRef>
+      <a:fontRef idx="minor">
+        <a:schemeClr val="lt1"/>
+      </a:fontRef>
+    </dgm:style>
+  </dgm:styleLbl>
+  <dgm:styleLbl name="parChTrans1D1">
+    <dgm:scene3d>
+      <a:camera prst="orthographicFront"/>
+      <a:lightRig rig="threePt" dir="t"/>
+    </dgm:scene3d>
+    <dgm:sp3d/>
+    <dgm:txPr/>
+    <dgm:style>
+      <a:lnRef idx="2">
+        <a:scrgbClr r="0" g="0" b="0"/>
+      </a:lnRef>
+      <a:fillRef idx="0">
+        <a:scrgbClr r="0" g="0" b="0"/>
+      </a:fillRef>
+      <a:effectRef idx="0">
+        <a:scrgbClr r="0" g="0" b="0"/>
+      </a:effectRef>
+      <a:fontRef idx="minor"/>
+    </dgm:style>
+  </dgm:styleLbl>
+  <dgm:styleLbl name="parChTrans1D2">
+    <dgm:scene3d>
+      <a:camera prst="orthographicFront"/>
+      <a:lightRig rig="threePt" dir="t"/>
+    </dgm:scene3d>
+    <dgm:sp3d/>
+    <dgm:txPr/>
+    <dgm:style>
+      <a:lnRef idx="2">
+        <a:scrgbClr r="0" g="0" b="0"/>
+      </a:lnRef>
+      <a:fillRef idx="0">
+        <a:scrgbClr r="0" g="0" b="0"/>
+      </a:fillRef>
+      <a:effectRef idx="0">
+        <a:scrgbClr r="0" g="0" b="0"/>
+      </a:effectRef>
+      <a:fontRef idx="minor"/>
+    </dgm:style>
+  </dgm:styleLbl>
+  <dgm:styleLbl name="parChTrans1D3">
+    <dgm:scene3d>
+      <a:camera prst="orthographicFront"/>
+      <a:lightRig rig="threePt" dir="t"/>
+    </dgm:scene3d>
+    <dgm:sp3d/>
+    <dgm:txPr/>
+    <dgm:style>
+      <a:lnRef idx="2">
+        <a:scrgbClr r="0" g="0" b="0"/>
+      </a:lnRef>
+      <a:fillRef idx="0">
+        <a:scrgbClr r="0" g="0" b="0"/>
+      </a:fillRef>
+      <a:effectRef idx="0">
+        <a:scrgbClr r="0" g="0" b="0"/>
+      </a:effectRef>
+      <a:fontRef idx="minor"/>
+    </dgm:style>
+  </dgm:styleLbl>
+  <dgm:styleLbl name="parChTrans1D4">
+    <dgm:scene3d>
+      <a:camera prst="orthographicFront"/>
+      <a:lightRig rig="threePt" dir="t"/>
+    </dgm:scene3d>
+    <dgm:sp3d/>
+    <dgm:txPr/>
+    <dgm:style>
+      <a:lnRef idx="2">
+        <a:scrgbClr r="0" g="0" b="0"/>
+      </a:lnRef>
+      <a:fillRef idx="0">
+        <a:scrgbClr r="0" g="0" b="0"/>
+      </a:fillRef>
+      <a:effectRef idx="0">
+        <a:scrgbClr r="0" g="0" b="0"/>
+      </a:effectRef>
+      <a:fontRef idx="minor"/>
+    </dgm:style>
+  </dgm:styleLbl>
+  <dgm:styleLbl name="fgAcc1">
+    <dgm:scene3d>
+      <a:camera prst="orthographicFront"/>
+      <a:lightRig rig="threePt" dir="t"/>
+    </dgm:scene3d>
+    <dgm:sp3d/>
+    <dgm:txPr/>
+    <dgm:style>
+      <a:lnRef idx="2">
+        <a:scrgbClr r="0" g="0" b="0"/>
+      </a:lnRef>
+      <a:fillRef idx="1">
+        <a:scrgbClr r="0" g="0" b="0"/>
+      </a:fillRef>
+      <a:effectRef idx="0">
+        <a:scrgbClr r="0" g="0" b="0"/>
+      </a:effectRef>
+      <a:fontRef idx="minor"/>
+    </dgm:style>
+  </dgm:styleLbl>
+  <dgm:styleLbl name="conFgAcc1">
+    <dgm:scene3d>
+      <a:camera prst="orthographicFront"/>
+      <a:lightRig rig="threePt" dir="t"/>
+    </dgm:scene3d>
+    <dgm:sp3d/>
+    <dgm:txPr/>
+    <dgm:style>
+      <a:lnRef idx="2">
+        <a:scrgbClr r="0" g="0" b="0"/>
+      </a:lnRef>
+      <a:fillRef idx="1">
+        <a:scrgbClr r="0" g="0" b="0"/>
+      </a:fillRef>
+      <a:effectRef idx="0">
+        <a:scrgbClr r="0" g="0" b="0"/>
+      </a:effectRef>
+      <a:fontRef idx="minor"/>
+    </dgm:style>
+  </dgm:styleLbl>
+  <dgm:styleLbl name="alignAcc1">
+    <dgm:scene3d>
+      <a:camera prst="orthographicFront"/>
+      <a:lightRig rig="threePt" dir="t"/>
+    </dgm:scene3d>
+    <dgm:sp3d/>
+    <dgm:txPr/>
+    <dgm:style>
+      <a:lnRef idx="2">
+        <a:scrgbClr r="0" g="0" b="0"/>
+      </a:lnRef>
+      <a:fillRef idx="1">
+        <a:scrgbClr r="0" g="0" b="0"/>
+      </a:fillRef>
+      <a:effectRef idx="0">
+        <a:scrgbClr r="0" g="0" b="0"/>
+      </a:effectRef>
+      <a:fontRef idx="minor"/>
+    </dgm:style>
+  </dgm:styleLbl>
+  <dgm:styleLbl name="trAlignAcc1">
+    <dgm:scene3d>
+      <a:camera prst="orthographicFront"/>
+      <a:lightRig rig="threePt" dir="t"/>
+    </dgm:scene3d>
+    <dgm:sp3d/>
+    <dgm:txPr/>
+    <dgm:style>
+      <a:lnRef idx="1">
+        <a:scrgbClr r="0" g="0" b="0"/>
+      </a:lnRef>
+      <a:fillRef idx="1">
+        <a:scrgbClr r="0" g="0" b="0"/>
+      </a:fillRef>
+      <a:effectRef idx="0">
+        <a:scrgbClr r="0" g="0" b="0"/>
+      </a:effectRef>
+      <a:fontRef idx="minor"/>
+    </dgm:style>
+  </dgm:styleLbl>
+  <dgm:styleLbl name="bgAcc1">
+    <dgm:scene3d>
+      <a:camera prst="orthographicFront"/>
+      <a:lightRig rig="threePt" dir="t"/>
+    </dgm:scene3d>
+    <dgm:sp3d/>
+    <dgm:txPr/>
+    <dgm:style>
+      <a:lnRef idx="2">
+        <a:scrgbClr r="0" g="0" b="0"/>
+      </a:lnRef>
+      <a:fillRef idx="1">
+        <a:scrgbClr r="0" g="0" b="0"/>
+      </a:fillRef>
+      <a:effectRef idx="0">
+        <a:scrgbClr r="0" g="0" b="0"/>
+      </a:effectRef>
+      <a:fontRef idx="minor"/>
+    </dgm:style>
+  </dgm:styleLbl>
+  <dgm:styleLbl name="solidFgAcc1">
+    <dgm:scene3d>
+      <a:camera prst="orthographicFront"/>
+      <a:lightRig rig="threePt" dir="t"/>
+    </dgm:scene3d>
+    <dgm:sp3d/>
+    <dgm:txPr/>
+    <dgm:style>
+      <a:lnRef idx="2">
+        <a:scrgbClr r="0" g="0" b="0"/>
+      </a:lnRef>
+      <a:fillRef idx="1">
+        <a:scrgbClr r="0" g="0" b="0"/>
+      </a:fillRef>
+      <a:effectRef idx="0">
+        <a:scrgbClr r="0" g="0" b="0"/>
+      </a:effectRef>
+      <a:fontRef idx="minor"/>
+    </dgm:style>
+  </dgm:styleLbl>
+  <dgm:styleLbl name="solidAlignAcc1">
+    <dgm:scene3d>
+      <a:camera prst="orthographicFront"/>
+      <a:lightRig rig="threePt" dir="t"/>
+    </dgm:scene3d>
+    <dgm:sp3d/>
+    <dgm:txPr/>
+    <dgm:style>
+      <a:lnRef idx="2">
+        <a:scrgbClr r="0" g="0" b="0"/>
+      </a:lnRef>
+      <a:fillRef idx="1">
+        <a:scrgbClr r="0" g="0" b="0"/>
+      </a:fillRef>
+      <a:effectRef idx="0">
+        <a:scrgbClr r="0" g="0" b="0"/>
+      </a:effectRef>
+      <a:fontRef idx="minor"/>
+    </dgm:style>
+  </dgm:styleLbl>
+  <dgm:styleLbl name="solidBgAcc1">
+    <dgm:scene3d>
+      <a:camera prst="orthographicFront"/>
+      <a:lightRig rig="threePt" dir="t"/>
+    </dgm:scene3d>
+    <dgm:sp3d/>
+    <dgm:txPr/>
+    <dgm:style>
+      <a:lnRef idx="2">
+        <a:scrgbClr r="0" g="0" b="0"/>
+      </a:lnRef>
+      <a:fillRef idx="1">
+        <a:scrgbClr r="0" g="0" b="0"/>
+      </a:fillRef>
+      <a:effectRef idx="0">
+        <a:scrgbClr r="0" g="0" b="0"/>
+      </a:effectRef>
+      <a:fontRef idx="minor"/>
+    </dgm:style>
+  </dgm:styleLbl>
+  <dgm:styleLbl name="fgAccFollowNode1">
+    <dgm:scene3d>
+      <a:camera prst="orthographicFront"/>
+      <a:lightRig rig="threePt" dir="t"/>
+    </dgm:scene3d>
+    <dgm:sp3d/>
+    <dgm:txPr/>
+    <dgm:style>
+      <a:lnRef idx="2">
+        <a:scrgbClr r="0" g="0" b="0"/>
+      </a:lnRef>
+      <a:fillRef idx="1">
+        <a:scrgbClr r="0" g="0" b="0"/>
+      </a:fillRef>
+      <a:effectRef idx="0">
+        <a:scrgbClr r="0" g="0" b="0"/>
+      </a:effectRef>
+      <a:fontRef idx="minor"/>
+    </dgm:style>
+  </dgm:styleLbl>
+  <dgm:styleLbl name="alignAccFollowNode1">
+    <dgm:scene3d>
+      <a:camera prst="orthographicFront"/>
+      <a:lightRig rig="threePt" dir="t"/>
+    </dgm:scene3d>
+    <dgm:sp3d/>
+    <dgm:txPr/>
+    <dgm:style>
+      <a:lnRef idx="2">
+        <a:scrgbClr r="0" g="0" b="0"/>
+      </a:lnRef>
+      <a:fillRef idx="1">
+        <a:scrgbClr r="0" g="0" b="0"/>
+      </a:fillRef>
+      <a:effectRef idx="0">
+        <a:scrgbClr r="0" g="0" b="0"/>
+      </a:effectRef>
+      <a:fontRef idx="minor"/>
+    </dgm:style>
+  </dgm:styleLbl>
+  <dgm:styleLbl name="bgAccFollowNode1">
+    <dgm:scene3d>
+      <a:camera prst="orthographicFront"/>
+      <a:lightRig rig="threePt" dir="t"/>
+    </dgm:scene3d>
+    <dgm:sp3d/>
+    <dgm:txPr/>
+    <dgm:style>
+      <a:lnRef idx="2">
+        <a:scrgbClr r="0" g="0" b="0"/>
+      </a:lnRef>
+      <a:fillRef idx="1">
+        <a:scrgbClr r="0" g="0" b="0"/>
+      </a:fillRef>
+      <a:effectRef idx="0">
+        <a:scrgbClr r="0" g="0" b="0"/>
+      </a:effectRef>
+      <a:fontRef idx="minor"/>
+    </dgm:style>
+  </dgm:styleLbl>
+  <dgm:styleLbl name="fgAcc0">
+    <dgm:scene3d>
+      <a:camera prst="orthographicFront"/>
+      <a:lightRig rig="threePt" dir="t"/>
+    </dgm:scene3d>
+    <dgm:sp3d/>
+    <dgm:txPr/>
+    <dgm:style>
+      <a:lnRef idx="2">
+        <a:scrgbClr r="0" g="0" b="0"/>
+      </a:lnRef>
+      <a:fillRef idx="1">
+        <a:scrgbClr r="0" g="0" b="0"/>
+      </a:fillRef>
+      <a:effectRef idx="0">
+        <a:scrgbClr r="0" g="0" b="0"/>
+      </a:effectRef>
+      <a:fontRef idx="minor"/>
+    </dgm:style>
+  </dgm:styleLbl>
+  <dgm:styleLbl name="fgAcc2">
+    <dgm:scene3d>
+      <a:camera prst="orthographicFront"/>
+      <a:lightRig rig="threePt" dir="t"/>
+    </dgm:scene3d>
+    <dgm:sp3d/>
+    <dgm:txPr/>
+    <dgm:style>
+      <a:lnRef idx="2">
+        <a:scrgbClr r="0" g="0" b="0"/>
+      </a:lnRef>
+      <a:fillRef idx="1">
+        <a:scrgbClr r="0" g="0" b="0"/>
+      </a:fillRef>
+      <a:effectRef idx="0">
+        <a:scrgbClr r="0" g="0" b="0"/>
+      </a:effectRef>
+      <a:fontRef idx="minor"/>
+    </dgm:style>
+  </dgm:styleLbl>
+  <dgm:styleLbl name="fgAcc3">
+    <dgm:scene3d>
+      <a:camera prst="orthographicFront"/>
+      <a:lightRig rig="threePt" dir="t"/>
+    </dgm:scene3d>
+    <dgm:sp3d/>
+    <dgm:txPr/>
+    <dgm:style>
+      <a:lnRef idx="2">
+        <a:scrgbClr r="0" g="0" b="0"/>
+      </a:lnRef>
+      <a:fillRef idx="1">
+        <a:scrgbClr r="0" g="0" b="0"/>
+      </a:fillRef>
+      <a:effectRef idx="0">
+        <a:scrgbClr r="0" g="0" b="0"/>
+      </a:effectRef>
+      <a:fontRef idx="minor"/>
+    </dgm:style>
+  </dgm:styleLbl>
+  <dgm:styleLbl name="fgAcc4">
+    <dgm:scene3d>
+      <a:camera prst="orthographicFront"/>
+      <a:lightRig rig="threePt" dir="t"/>
+    </dgm:scene3d>
+    <dgm:sp3d/>
+    <dgm:txPr/>
+    <dgm:style>
+      <a:lnRef idx="2">
+        <a:scrgbClr r="0" g="0" b="0"/>
+      </a:lnRef>
+      <a:fillRef idx="1">
+        <a:scrgbClr r="0" g="0" b="0"/>
+      </a:fillRef>
+      <a:effectRef idx="0">
+        <a:scrgbClr r="0" g="0" b="0"/>
+      </a:effectRef>
+      <a:fontRef idx="minor"/>
+    </dgm:style>
+  </dgm:styleLbl>
+  <dgm:styleLbl name="bgShp">
+    <dgm:scene3d>
+      <a:camera prst="orthographicFront"/>
+      <a:lightRig rig="threePt" dir="t"/>
+    </dgm:scene3d>
+    <dgm:sp3d/>
+    <dgm:txPr/>
+    <dgm:style>
+      <a:lnRef idx="0">
+        <a:scrgbClr r="0" g="0" b="0"/>
+      </a:lnRef>
+      <a:fillRef idx="1">
+        <a:scrgbClr r="0" g="0" b="0"/>
+      </a:fillRef>
+      <a:effectRef idx="0">
+        <a:scrgbClr r="0" g="0" b="0"/>
+      </a:effectRef>
+      <a:fontRef idx="minor"/>
+    </dgm:style>
+  </dgm:styleLbl>
+  <dgm:styleLbl name="dkBgShp">
+    <dgm:scene3d>
+      <a:camera prst="orthographicFront"/>
+      <a:lightRig rig="threePt" dir="t"/>
+    </dgm:scene3d>
+    <dgm:sp3d/>
+    <dgm:txPr/>
+    <dgm:style>
+      <a:lnRef idx="0">
+        <a:scrgbClr r="0" g="0" b="0"/>
+      </a:lnRef>
+      <a:fillRef idx="1">
+        <a:scrgbClr r="0" g="0" b="0"/>
+      </a:fillRef>
+      <a:effectRef idx="0">
+        <a:scrgbClr r="0" g="0" b="0"/>
+      </a:effectRef>
+      <a:fontRef idx="minor"/>
+    </dgm:style>
+  </dgm:styleLbl>
+  <dgm:styleLbl name="trBgShp">
+    <dgm:scene3d>
+      <a:camera prst="orthographicFront"/>
+      <a:lightRig rig="threePt" dir="t"/>
+    </dgm:scene3d>
+    <dgm:sp3d/>
+    <dgm:txPr/>
+    <dgm:style>
+      <a:lnRef idx="0">
+        <a:scrgbClr r="0" g="0" b="0"/>
+      </a:lnRef>
+      <a:fillRef idx="1">
+        <a:scrgbClr r="0" g="0" b="0"/>
+      </a:fillRef>
+      <a:effectRef idx="0">
+        <a:scrgbClr r="0" g="0" b="0"/>
+      </a:effectRef>
+      <a:fontRef idx="minor"/>
+    </dgm:style>
+  </dgm:styleLbl>
+  <dgm:styleLbl name="fgShp">
+    <dgm:scene3d>
+      <a:camera prst="orthographicFront"/>
+      <a:lightRig rig="threePt" dir="t"/>
+    </dgm:scene3d>
+    <dgm:sp3d/>
+    <dgm:txPr/>
+    <dgm:style>
+      <a:lnRef idx="2">
+        <a:scrgbClr r="0" g="0" b="0"/>
+      </a:lnRef>
+      <a:fillRef idx="1">
+        <a:scrgbClr r="0" g="0" b="0"/>
+      </a:fillRef>
+      <a:effectRef idx="0">
+        <a:scrgbClr r="0" g="0" b="0"/>
+      </a:effectRef>
+      <a:fontRef idx="minor"/>
+    </dgm:style>
+  </dgm:styleLbl>
+  <dgm:styleLbl name="revTx">
+    <dgm:scene3d>
+      <a:camera prst="orthographicFront"/>
+      <a:lightRig rig="threePt" dir="t"/>
+    </dgm:scene3d>
+    <dgm:sp3d/>
+    <dgm:txPr/>
+    <dgm:style>
+      <a:lnRef idx="0">
+        <a:scrgbClr r="0" g="0" b="0"/>
+      </a:lnRef>
+      <a:fillRef idx="0">
+        <a:scrgbClr r="0" g="0" b="0"/>
+      </a:fillRef>
+      <a:effectRef idx="0">
+        <a:scrgbClr r="0" g="0" b="0"/>
+      </a:effectRef>
+      <a:fontRef idx="minor"/>
+    </dgm:style>
+  </dgm:styleLbl>
+</dgm:styleDef>
+</file>
+
+<file path=ppt/diagrams/quickStyle2.xml><?xml version="1.0" encoding="utf-8"?>
 <dgm:styleDef xmlns:dgm="http://schemas.openxmlformats.org/drawingml/2006/diagram" xmlns:a="http://schemas.openxmlformats.org/drawingml/2006/main" uniqueId="urn:microsoft.com/office/officeart/2005/8/quickstyle/simple1">
   <dgm:title val=""/>
   <dgm:desc val=""/>
@@ -4470,7 +7024,7 @@
             <a:fld id="{5923F103-BC34-4FE4-A40E-EDDEECFDA5D0}" type="datetimeFigureOut">
               <a:rPr lang="en-US" dirty="0"/>
               <a:pPr/>
-              <a:t>10/22/2026</a:t>
+              <a:t>10/23/2026</a:t>
             </a:fld>
             <a:endParaRPr lang="en-US" dirty="0"/>
           </a:p>
@@ -5554,7 +8108,7 @@
           <a:p>
             <a:fld id="{923A1CC3-2375-41D4-9E03-427CAF2A4C1A}" type="datetimeFigureOut">
               <a:rPr lang="en-US" dirty="0"/>
-              <a:t>10/22/2026</a:t>
+              <a:t>10/23/2026</a:t>
             </a:fld>
             <a:endParaRPr lang="en-US" dirty="0"/>
           </a:p>
@@ -6530,7 +9084,7 @@
           <a:p>
             <a:fld id="{AFF16868-8199-4C2C-A5B1-63AEE139F88E}" type="datetimeFigureOut">
               <a:rPr lang="en-US" dirty="0"/>
-              <a:t>10/22/2026</a:t>
+              <a:t>10/23/2026</a:t>
             </a:fld>
             <a:endParaRPr lang="en-US" dirty="0"/>
           </a:p>
@@ -7660,7 +10214,7 @@
           <a:p>
             <a:fld id="{AAD9FF7F-6988-44CC-821B-644E70CD2F73}" type="datetimeFigureOut">
               <a:rPr lang="en-US" dirty="0"/>
-              <a:t>10/22/2026</a:t>
+              <a:t>10/23/2026</a:t>
             </a:fld>
             <a:endParaRPr lang="en-US" dirty="0"/>
           </a:p>
@@ -8689,7 +11243,7 @@
           <a:p>
             <a:fld id="{5C12C299-16B2-4475-990D-751901EACC14}" type="datetimeFigureOut">
               <a:rPr lang="en-US" dirty="0"/>
-              <a:t>10/22/2026</a:t>
+              <a:t>10/23/2026</a:t>
             </a:fld>
             <a:endParaRPr lang="en-US" dirty="0"/>
           </a:p>
@@ -9345,7 +11899,7 @@
           <a:p>
             <a:fld id="{9FE86839-B9D8-4651-8783-F325ECE74E65}" type="datetimeFigureOut">
               <a:rPr lang="en-US" dirty="0"/>
-              <a:t>10/22/2026</a:t>
+              <a:t>10/23/2026</a:t>
             </a:fld>
             <a:endParaRPr lang="en-US" dirty="0"/>
           </a:p>
@@ -10202,7 +12756,7 @@
           <a:p>
             <a:fld id="{FD484F64-32F6-45C5-931F-ADC1662401D0}" type="datetimeFigureOut">
               <a:rPr lang="en-US" dirty="0"/>
-              <a:t>10/22/2026</a:t>
+              <a:t>10/23/2026</a:t>
             </a:fld>
             <a:endParaRPr lang="en-US" dirty="0"/>
           </a:p>
@@ -10388,7 +12942,7 @@
           <a:p>
             <a:fld id="{53086D93-FCAC-47E0-A2EE-787E62CA814C}" type="datetimeFigureOut">
               <a:rPr lang="en-US" dirty="0"/>
-              <a:t>10/22/2026</a:t>
+              <a:t>10/23/2026</a:t>
             </a:fld>
             <a:endParaRPr lang="en-US" dirty="0"/>
           </a:p>
@@ -11356,7 +13910,7 @@
           <a:p>
             <a:fld id="{CDA879A6-0FD0-4734-A311-86BFCA472E6E}" type="datetimeFigureOut">
               <a:rPr lang="en-US" dirty="0"/>
-              <a:t>10/22/2026</a:t>
+              <a:t>10/23/2026</a:t>
             </a:fld>
             <a:endParaRPr lang="en-US" dirty="0"/>
           </a:p>
@@ -11563,7 +14117,7 @@
           <a:p>
             <a:fld id="{19C9CA7B-DFD4-44B5-8C60-D14B8CD1FB59}" type="datetimeFigureOut">
               <a:rPr lang="en-US" dirty="0"/>
-              <a:t>10/22/2026</a:t>
+              <a:t>10/23/2026</a:t>
             </a:fld>
             <a:endParaRPr lang="en-US" dirty="0"/>
           </a:p>
@@ -12593,7 +15147,7 @@
           <a:p>
             <a:fld id="{F34E6425-0181-43F2-84FC-787E803FD2F8}" type="datetimeFigureOut">
               <a:rPr lang="en-US" dirty="0"/>
-              <a:t>10/22/2026</a:t>
+              <a:t>10/23/2026</a:t>
             </a:fld>
             <a:endParaRPr lang="en-US" dirty="0"/>
           </a:p>
@@ -12861,7 +15415,7 @@
           <a:p>
             <a:fld id="{3BDB8791-F1B0-41E7-B7FD-A781E65C4266}" type="datetimeFigureOut">
               <a:rPr lang="en-US" dirty="0"/>
-              <a:t>10/22/2026</a:t>
+              <a:t>10/23/2026</a:t>
             </a:fld>
             <a:endParaRPr lang="en-US" dirty="0"/>
           </a:p>
@@ -13267,7 +15821,7 @@
           <a:p>
             <a:fld id="{5FDD63B2-E120-4ED8-B27B-C685F510A5FE}" type="datetimeFigureOut">
               <a:rPr lang="en-US" dirty="0"/>
-              <a:t>10/22/2026</a:t>
+              <a:t>10/23/2026</a:t>
             </a:fld>
             <a:endParaRPr lang="en-US" dirty="0"/>
           </a:p>
@@ -13390,7 +15944,7 @@
           <a:p>
             <a:fld id="{7AA18ACC-A947-437B-A130-35BD54FDF1E9}" type="datetimeFigureOut">
               <a:rPr lang="en-US" dirty="0"/>
-              <a:t>10/22/2026</a:t>
+              <a:t>10/23/2026</a:t>
             </a:fld>
             <a:endParaRPr lang="en-US" dirty="0"/>
           </a:p>
@@ -13481,7 +16035,7 @@
           <a:p>
             <a:fld id="{7C8D7E02-BCB8-4D50-A234-369438C08659}" type="datetimeFigureOut">
               <a:rPr lang="en-US" dirty="0"/>
-              <a:t>10/22/2026</a:t>
+              <a:t>10/23/2026</a:t>
             </a:fld>
             <a:endParaRPr lang="en-US" dirty="0"/>
           </a:p>
@@ -14558,7 +17112,7 @@
           <a:p>
             <a:fld id="{76E86A4C-8E40-4F87-A4F0-01A0687C5742}" type="datetimeFigureOut">
               <a:rPr lang="en-US" dirty="0"/>
-              <a:t>10/22/2026</a:t>
+              <a:t>10/23/2026</a:t>
             </a:fld>
             <a:endParaRPr lang="en-US" dirty="0"/>
           </a:p>
@@ -15662,7 +18216,7 @@
           <a:p>
             <a:fld id="{35E72C73-2D91-4E12-BA25-F0AA0C03599B}" type="datetimeFigureOut">
               <a:rPr lang="en-US" dirty="0"/>
-              <a:t>10/22/2026</a:t>
+              <a:t>10/23/2026</a:t>
             </a:fld>
             <a:endParaRPr lang="en-US" dirty="0"/>
           </a:p>
@@ -16655,7 +19209,7 @@
           <a:p>
             <a:fld id="{2BE451C3-0FF4-47C4-B829-773ADF60F88C}" type="datetimeFigureOut">
               <a:rPr lang="en-US" dirty="0"/>
-              <a:t>10/22/2026</a:t>
+              <a:t>10/23/2026</a:t>
             </a:fld>
             <a:endParaRPr lang="en-US" dirty="0"/>
           </a:p>
@@ -17620,6 +20174,1567 @@
     <p:extLst>
       <p:ext uri="{BB962C8B-B14F-4D97-AF65-F5344CB8AC3E}">
         <p14:creationId xmlns:p14="http://schemas.microsoft.com/office/powerpoint/2010/main" val="3586269133"/>
+      </p:ext>
+    </p:extLst>
+  </p:cSld>
+  <p:clrMapOvr>
+    <a:masterClrMapping/>
+  </p:clrMapOvr>
+</p:sld>
+</file>
+
+<file path=ppt/slides/slide10.xml><?xml version="1.0" encoding="utf-8"?>
+<p:sld xmlns:a="http://schemas.openxmlformats.org/drawingml/2006/main" xmlns:r="http://schemas.openxmlformats.org/officeDocument/2006/relationships" xmlns:p="http://schemas.openxmlformats.org/presentationml/2006/main">
+  <p:cSld>
+    <p:spTree>
+      <p:nvGrpSpPr>
+        <p:cNvPr id="1" name=""/>
+        <p:cNvGrpSpPr/>
+        <p:nvPr/>
+      </p:nvGrpSpPr>
+      <p:grpSpPr>
+        <a:xfrm>
+          <a:off x="0" y="0"/>
+          <a:ext cx="0" cy="0"/>
+          <a:chOff x="0" y="0"/>
+          <a:chExt cx="0" cy="0"/>
+        </a:xfrm>
+      </p:grpSpPr>
+      <p:sp>
+        <p:nvSpPr>
+          <p:cNvPr id="2" name="Title 1">
+            <a:extLst>
+              <a:ext uri="{FF2B5EF4-FFF2-40B4-BE49-F238E27FC236}">
+                <a16:creationId xmlns:a16="http://schemas.microsoft.com/office/drawing/2014/main" id="{3154F2CF-D0AC-0E8C-9D04-8EB2FB39DC29}"/>
+              </a:ext>
+            </a:extLst>
+          </p:cNvPr>
+          <p:cNvSpPr>
+            <a:spLocks noGrp="1"/>
+          </p:cNvSpPr>
+          <p:nvPr>
+            <p:ph type="title"/>
+          </p:nvPr>
+        </p:nvSpPr>
+        <p:spPr/>
+        <p:txBody>
+          <a:bodyPr/>
+          <a:lstStyle/>
+          <a:p>
+            <a:r>
+              <a:rPr lang="en-US" dirty="0"/>
+              <a:t>Accuracy</a:t>
+            </a:r>
+          </a:p>
+        </p:txBody>
+      </p:sp>
+      <mc:AlternateContent xmlns:mc="http://schemas.openxmlformats.org/markup-compatibility/2006">
+        <mc:Choice xmlns:a14="http://schemas.microsoft.com/office/drawing/2010/main" Requires="a14">
+          <p:sp>
+            <p:nvSpPr>
+              <p:cNvPr id="3" name="Content Placeholder 2">
+                <a:extLst>
+                  <a:ext uri="{FF2B5EF4-FFF2-40B4-BE49-F238E27FC236}">
+                    <a16:creationId xmlns:a16="http://schemas.microsoft.com/office/drawing/2014/main" id="{1843D2D5-F349-838D-05CF-32056AA2E289}"/>
+                  </a:ext>
+                </a:extLst>
+              </p:cNvPr>
+              <p:cNvSpPr>
+                <a:spLocks noGrp="1"/>
+              </p:cNvSpPr>
+              <p:nvPr>
+                <p:ph idx="1"/>
+              </p:nvPr>
+            </p:nvSpPr>
+            <p:spPr>
+              <a:xfrm>
+                <a:off x="1154954" y="3341715"/>
+                <a:ext cx="8825659" cy="2836025"/>
+              </a:xfrm>
+            </p:spPr>
+            <p:txBody>
+              <a:bodyPr>
+                <a:normAutofit/>
+              </a:bodyPr>
+              <a:lstStyle/>
+              <a:p>
+                <a14:m>
+                  <m:oMath xmlns:m="http://schemas.openxmlformats.org/officeDocument/2006/math">
+                    <m:r>
+                      <a:rPr lang="en-US" i="1">
+                        <a:latin typeface="Cambria Math" panose="02040503050406030204" pitchFamily="18" charset="0"/>
+                      </a:rPr>
+                      <m:t>𝑉𝑎𝑟</m:t>
+                    </m:r>
+                    <m:r>
+                      <a:rPr lang="en-US" i="1">
+                        <a:latin typeface="Cambria Math" panose="02040503050406030204" pitchFamily="18" charset="0"/>
+                      </a:rPr>
+                      <m:t>1=</m:t>
+                    </m:r>
+                    <m:f>
+                      <m:fPr>
+                        <m:ctrlPr>
+                          <a:rPr lang="en-US" i="1">
+                            <a:latin typeface="Cambria Math" panose="02040503050406030204" pitchFamily="18" charset="0"/>
+                          </a:rPr>
+                        </m:ctrlPr>
+                      </m:fPr>
+                      <m:num>
+                        <m:r>
+                          <a:rPr lang="en-US" i="1">
+                            <a:latin typeface="Cambria Math" panose="02040503050406030204" pitchFamily="18" charset="0"/>
+                          </a:rPr>
+                          <m:t>𝑉𝑎𝑟</m:t>
+                        </m:r>
+                        <m:r>
+                          <a:rPr lang="en-US" i="1">
+                            <a:latin typeface="Cambria Math" panose="02040503050406030204" pitchFamily="18" charset="0"/>
+                          </a:rPr>
+                          <m:t>2</m:t>
+                        </m:r>
+                      </m:num>
+                      <m:den>
+                        <m:r>
+                          <a:rPr lang="en-US" i="1">
+                            <a:latin typeface="Cambria Math" panose="02040503050406030204" pitchFamily="18" charset="0"/>
+                          </a:rPr>
+                          <m:t>𝑉𝑎𝑟</m:t>
+                        </m:r>
+                        <m:r>
+                          <a:rPr lang="en-US" i="1">
+                            <a:latin typeface="Cambria Math" panose="02040503050406030204" pitchFamily="18" charset="0"/>
+                          </a:rPr>
+                          <m:t>3</m:t>
+                        </m:r>
+                      </m:den>
+                    </m:f>
+                    <m:r>
+                      <a:rPr lang="en-US" i="1">
+                        <a:latin typeface="Cambria Math" panose="02040503050406030204" pitchFamily="18" charset="0"/>
+                      </a:rPr>
+                      <m:t> ∗</m:t>
+                    </m:r>
+                    <m:r>
+                      <a:rPr lang="en-US" i="1">
+                        <a:latin typeface="Cambria Math" panose="02040503050406030204" pitchFamily="18" charset="0"/>
+                      </a:rPr>
+                      <m:t>𝐻𝑜𝑚𝑒</m:t>
+                    </m:r>
+                    <m:r>
+                      <a:rPr lang="en-US" i="1">
+                        <a:latin typeface="Cambria Math" panose="02040503050406030204" pitchFamily="18" charset="0"/>
+                      </a:rPr>
+                      <m:t>_</m:t>
+                    </m:r>
+                    <m:r>
+                      <a:rPr lang="en-US" i="1">
+                        <a:latin typeface="Cambria Math" panose="02040503050406030204" pitchFamily="18" charset="0"/>
+                      </a:rPr>
+                      <m:t>𝑝𝑟𝑖𝑐𝑒</m:t>
+                    </m:r>
+                  </m:oMath>
+                </a14:m>
+                <a:endParaRPr lang="en-US" dirty="0"/>
+              </a:p>
+              <a:p>
+                <a:r>
+                  <a:rPr lang="en-US" dirty="0"/>
+                  <a:t>Var2 and var3 have differences at  e-09 level.</a:t>
+                </a:r>
+              </a:p>
+              <a:p>
+                <a:r>
+                  <a:rPr lang="en-US" dirty="0"/>
+                  <a:t>Home prices are a large numbers </a:t>
+                </a:r>
+              </a:p>
+              <a:p>
+                <a:pPr lvl="1"/>
+                <a:r>
+                  <a:rPr lang="en-US" dirty="0"/>
+                  <a:t>median house price in the U.S. :$430,000</a:t>
+                </a:r>
+              </a:p>
+              <a:p>
+                <a:pPr lvl="1"/>
+                <a:r>
+                  <a:rPr lang="en-US" dirty="0"/>
+                  <a:t>median house price in the CA :$750,000</a:t>
+                </a:r>
+              </a:p>
+              <a:p>
+                <a:r>
+                  <a:rPr lang="en-US" dirty="0"/>
+                  <a:t>Var 1 are different</a:t>
+                </a:r>
+              </a:p>
+              <a:p>
+                <a:r>
+                  <a:rPr lang="en-US" dirty="0"/>
+                  <a:t>This can be applied to many cases, such as population, distance.</a:t>
+                </a:r>
+              </a:p>
+              <a:p>
+                <a:endParaRPr lang="en-US" dirty="0"/>
+              </a:p>
+            </p:txBody>
+          </p:sp>
+        </mc:Choice>
+        <mc:Fallback>
+          <p:sp>
+            <p:nvSpPr>
+              <p:cNvPr id="3" name="Content Placeholder 2">
+                <a:extLst>
+                  <a:ext uri="{FF2B5EF4-FFF2-40B4-BE49-F238E27FC236}">
+                    <a16:creationId xmlns:a16="http://schemas.microsoft.com/office/drawing/2014/main" id="{1843D2D5-F349-838D-05CF-32056AA2E289}"/>
+                  </a:ext>
+                </a:extLst>
+              </p:cNvPr>
+              <p:cNvSpPr>
+                <a:spLocks noGrp="1" noRot="1" noChangeAspect="1" noMove="1" noResize="1" noEditPoints="1" noAdjustHandles="1" noChangeArrowheads="1" noChangeShapeType="1" noTextEdit="1"/>
+              </p:cNvSpPr>
+              <p:nvPr>
+                <p:ph idx="1"/>
+              </p:nvPr>
+            </p:nvSpPr>
+            <p:spPr>
+              <a:xfrm>
+                <a:off x="1154954" y="3341715"/>
+                <a:ext cx="8825659" cy="2836025"/>
+              </a:xfrm>
+              <a:blipFill>
+                <a:blip r:embed="rId2"/>
+                <a:stretch>
+                  <a:fillRect l="-138" b="-3226"/>
+                </a:stretch>
+              </a:blipFill>
+            </p:spPr>
+            <p:txBody>
+              <a:bodyPr/>
+              <a:lstStyle/>
+              <a:p>
+                <a:r>
+                  <a:rPr lang="en-US">
+                    <a:noFill/>
+                  </a:rPr>
+                  <a:t> </a:t>
+                </a:r>
+              </a:p>
+            </p:txBody>
+          </p:sp>
+        </mc:Fallback>
+      </mc:AlternateContent>
+      <p:sp>
+        <p:nvSpPr>
+          <p:cNvPr id="4" name="Content Placeholder 2">
+            <a:extLst>
+              <a:ext uri="{FF2B5EF4-FFF2-40B4-BE49-F238E27FC236}">
+                <a16:creationId xmlns:a16="http://schemas.microsoft.com/office/drawing/2014/main" id="{F20C520B-F86E-C66F-3DB7-BC685CFD9C82}"/>
+              </a:ext>
+            </a:extLst>
+          </p:cNvPr>
+          <p:cNvSpPr txBox="1">
+            <a:spLocks/>
+          </p:cNvSpPr>
+          <p:nvPr/>
+        </p:nvSpPr>
+        <p:spPr>
+          <a:xfrm>
+            <a:off x="728234" y="2693863"/>
+            <a:ext cx="9737490" cy="402167"/>
+          </a:xfrm>
+          <a:prstGeom prst="rect">
+            <a:avLst/>
+          </a:prstGeom>
+        </p:spPr>
+        <p:txBody>
+          <a:bodyPr vert="horz" lIns="91440" tIns="45720" rIns="91440" bIns="45720" rtlCol="0">
+            <a:normAutofit/>
+          </a:bodyPr>
+          <a:lstStyle>
+            <a:lvl1pPr marL="342900" indent="-342900" algn="l" defTabSz="457200" rtl="0" eaLnBrk="1" latinLnBrk="0" hangingPunct="1">
+              <a:spcBef>
+                <a:spcPts val="1000"/>
+              </a:spcBef>
+              <a:spcAft>
+                <a:spcPts val="0"/>
+              </a:spcAft>
+              <a:buClr>
+                <a:schemeClr val="accent1"/>
+              </a:buClr>
+              <a:buSzPct val="80000"/>
+              <a:buFont typeface="Wingdings 3" charset="2"/>
+              <a:buChar char=""/>
+              <a:defRPr sz="1800" b="0" i="0" kern="1200">
+                <a:solidFill>
+                  <a:schemeClr val="tx1">
+                    <a:lumMod val="75000"/>
+                    <a:lumOff val="25000"/>
+                  </a:schemeClr>
+                </a:solidFill>
+                <a:latin typeface="+mn-lt"/>
+                <a:ea typeface="+mn-ea"/>
+                <a:cs typeface="+mn-cs"/>
+              </a:defRPr>
+            </a:lvl1pPr>
+            <a:lvl2pPr marL="742950" indent="-285750" algn="l" defTabSz="457200" rtl="0" eaLnBrk="1" latinLnBrk="0" hangingPunct="1">
+              <a:spcBef>
+                <a:spcPts val="1000"/>
+              </a:spcBef>
+              <a:spcAft>
+                <a:spcPts val="0"/>
+              </a:spcAft>
+              <a:buClr>
+                <a:schemeClr val="accent1"/>
+              </a:buClr>
+              <a:buSzPct val="80000"/>
+              <a:buFont typeface="Wingdings 3" charset="2"/>
+              <a:buChar char=""/>
+              <a:defRPr sz="1600" b="0" i="0" kern="1200">
+                <a:solidFill>
+                  <a:schemeClr val="tx1">
+                    <a:lumMod val="75000"/>
+                    <a:lumOff val="25000"/>
+                  </a:schemeClr>
+                </a:solidFill>
+                <a:latin typeface="+mn-lt"/>
+                <a:ea typeface="+mn-ea"/>
+                <a:cs typeface="+mn-cs"/>
+              </a:defRPr>
+            </a:lvl2pPr>
+            <a:lvl3pPr marL="1143000" indent="-228600" algn="l" defTabSz="457200" rtl="0" eaLnBrk="1" latinLnBrk="0" hangingPunct="1">
+              <a:spcBef>
+                <a:spcPts val="1000"/>
+              </a:spcBef>
+              <a:spcAft>
+                <a:spcPts val="0"/>
+              </a:spcAft>
+              <a:buClr>
+                <a:schemeClr val="accent1"/>
+              </a:buClr>
+              <a:buSzPct val="80000"/>
+              <a:buFont typeface="Wingdings 3" charset="2"/>
+              <a:buChar char=""/>
+              <a:defRPr sz="1400" b="0" i="0" kern="1200">
+                <a:solidFill>
+                  <a:schemeClr val="tx1">
+                    <a:lumMod val="75000"/>
+                    <a:lumOff val="25000"/>
+                  </a:schemeClr>
+                </a:solidFill>
+                <a:latin typeface="+mn-lt"/>
+                <a:ea typeface="+mn-ea"/>
+                <a:cs typeface="+mn-cs"/>
+              </a:defRPr>
+            </a:lvl3pPr>
+            <a:lvl4pPr marL="1600200" indent="-228600" algn="l" defTabSz="457200" rtl="0" eaLnBrk="1" latinLnBrk="0" hangingPunct="1">
+              <a:spcBef>
+                <a:spcPts val="1000"/>
+              </a:spcBef>
+              <a:spcAft>
+                <a:spcPts val="0"/>
+              </a:spcAft>
+              <a:buClr>
+                <a:schemeClr val="accent1"/>
+              </a:buClr>
+              <a:buSzPct val="80000"/>
+              <a:buFont typeface="Wingdings 3" charset="2"/>
+              <a:buChar char=""/>
+              <a:defRPr sz="1200" b="0" i="0" kern="1200">
+                <a:solidFill>
+                  <a:schemeClr val="tx1">
+                    <a:lumMod val="75000"/>
+                    <a:lumOff val="25000"/>
+                  </a:schemeClr>
+                </a:solidFill>
+                <a:latin typeface="+mn-lt"/>
+                <a:ea typeface="+mn-ea"/>
+                <a:cs typeface="+mn-cs"/>
+              </a:defRPr>
+            </a:lvl4pPr>
+            <a:lvl5pPr marL="2057400" indent="-228600" algn="l" defTabSz="457200" rtl="0" eaLnBrk="1" latinLnBrk="0" hangingPunct="1">
+              <a:spcBef>
+                <a:spcPts val="1000"/>
+              </a:spcBef>
+              <a:spcAft>
+                <a:spcPts val="0"/>
+              </a:spcAft>
+              <a:buClr>
+                <a:schemeClr val="accent1"/>
+              </a:buClr>
+              <a:buSzPct val="80000"/>
+              <a:buFont typeface="Wingdings 3" charset="2"/>
+              <a:buChar char=""/>
+              <a:defRPr sz="1200" b="0" i="0" kern="1200">
+                <a:solidFill>
+                  <a:schemeClr val="tx1">
+                    <a:lumMod val="75000"/>
+                    <a:lumOff val="25000"/>
+                  </a:schemeClr>
+                </a:solidFill>
+                <a:latin typeface="+mn-lt"/>
+                <a:ea typeface="+mn-ea"/>
+                <a:cs typeface="+mn-cs"/>
+              </a:defRPr>
+            </a:lvl5pPr>
+            <a:lvl6pPr marL="2514600" indent="-228600" algn="l" defTabSz="457200" rtl="0" eaLnBrk="1" latinLnBrk="0" hangingPunct="1">
+              <a:spcBef>
+                <a:spcPts val="1000"/>
+              </a:spcBef>
+              <a:spcAft>
+                <a:spcPts val="0"/>
+              </a:spcAft>
+              <a:buClr>
+                <a:schemeClr val="accent1"/>
+              </a:buClr>
+              <a:buSzPct val="80000"/>
+              <a:buFont typeface="Wingdings 3" charset="2"/>
+              <a:buChar char=""/>
+              <a:defRPr sz="1200" b="0" i="0" kern="1200">
+                <a:solidFill>
+                  <a:schemeClr val="tx1">
+                    <a:lumMod val="75000"/>
+                    <a:lumOff val="25000"/>
+                  </a:schemeClr>
+                </a:solidFill>
+                <a:latin typeface="+mn-lt"/>
+                <a:ea typeface="+mn-ea"/>
+                <a:cs typeface="+mn-cs"/>
+              </a:defRPr>
+            </a:lvl6pPr>
+            <a:lvl7pPr marL="2971800" indent="-228600" algn="l" defTabSz="457200" rtl="0" eaLnBrk="1" latinLnBrk="0" hangingPunct="1">
+              <a:spcBef>
+                <a:spcPts val="1000"/>
+              </a:spcBef>
+              <a:spcAft>
+                <a:spcPts val="0"/>
+              </a:spcAft>
+              <a:buClr>
+                <a:schemeClr val="accent1"/>
+              </a:buClr>
+              <a:buSzPct val="80000"/>
+              <a:buFont typeface="Wingdings 3" charset="2"/>
+              <a:buChar char=""/>
+              <a:defRPr sz="1200" b="0" i="0" kern="1200">
+                <a:solidFill>
+                  <a:schemeClr val="tx1">
+                    <a:lumMod val="75000"/>
+                    <a:lumOff val="25000"/>
+                  </a:schemeClr>
+                </a:solidFill>
+                <a:latin typeface="+mn-lt"/>
+                <a:ea typeface="+mn-ea"/>
+                <a:cs typeface="+mn-cs"/>
+              </a:defRPr>
+            </a:lvl7pPr>
+            <a:lvl8pPr marL="3429000" indent="-228600" algn="l" defTabSz="457200" rtl="0" eaLnBrk="1" latinLnBrk="0" hangingPunct="1">
+              <a:spcBef>
+                <a:spcPts val="1000"/>
+              </a:spcBef>
+              <a:spcAft>
+                <a:spcPts val="0"/>
+              </a:spcAft>
+              <a:buClr>
+                <a:schemeClr val="accent1"/>
+              </a:buClr>
+              <a:buSzPct val="80000"/>
+              <a:buFont typeface="Wingdings 3" charset="2"/>
+              <a:buChar char=""/>
+              <a:defRPr sz="1200" b="0" i="0" kern="1200">
+                <a:solidFill>
+                  <a:schemeClr val="tx1">
+                    <a:lumMod val="75000"/>
+                    <a:lumOff val="25000"/>
+                  </a:schemeClr>
+                </a:solidFill>
+                <a:latin typeface="+mn-lt"/>
+                <a:ea typeface="+mn-ea"/>
+                <a:cs typeface="+mn-cs"/>
+              </a:defRPr>
+            </a:lvl8pPr>
+            <a:lvl9pPr marL="3886200" indent="-228600" algn="l" defTabSz="457200" rtl="0" eaLnBrk="1" latinLnBrk="0" hangingPunct="1">
+              <a:spcBef>
+                <a:spcPts val="1000"/>
+              </a:spcBef>
+              <a:spcAft>
+                <a:spcPts val="0"/>
+              </a:spcAft>
+              <a:buClr>
+                <a:schemeClr val="accent1"/>
+              </a:buClr>
+              <a:buSzPct val="80000"/>
+              <a:buFont typeface="Wingdings 3" charset="2"/>
+              <a:buChar char=""/>
+              <a:defRPr sz="1200" b="0" i="0" kern="1200">
+                <a:solidFill>
+                  <a:schemeClr val="tx1">
+                    <a:lumMod val="75000"/>
+                    <a:lumOff val="25000"/>
+                  </a:schemeClr>
+                </a:solidFill>
+                <a:latin typeface="+mn-lt"/>
+                <a:ea typeface="+mn-ea"/>
+                <a:cs typeface="+mn-cs"/>
+              </a:defRPr>
+            </a:lvl9pPr>
+          </a:lstStyle>
+          <a:p>
+            <a:r>
+              <a:rPr lang="en-US" dirty="0"/>
+              <a:t>When small differences times large numbers, results may have large differences.</a:t>
+            </a:r>
+          </a:p>
+          <a:p>
+            <a:endParaRPr lang="en-US" dirty="0"/>
+          </a:p>
+        </p:txBody>
+      </p:sp>
+      <p:sp>
+        <p:nvSpPr>
+          <p:cNvPr id="5" name="TextBox 4">
+            <a:extLst>
+              <a:ext uri="{FF2B5EF4-FFF2-40B4-BE49-F238E27FC236}">
+                <a16:creationId xmlns:a16="http://schemas.microsoft.com/office/drawing/2014/main" id="{6E77B8A5-B1CB-CA23-C33F-23057A52FDAC}"/>
+              </a:ext>
+            </a:extLst>
+          </p:cNvPr>
+          <p:cNvSpPr txBox="1"/>
+          <p:nvPr/>
+        </p:nvSpPr>
+        <p:spPr>
+          <a:xfrm>
+            <a:off x="8318270" y="6642556"/>
+            <a:ext cx="3873730" cy="215444"/>
+          </a:xfrm>
+          <a:prstGeom prst="rect">
+            <a:avLst/>
+          </a:prstGeom>
+          <a:noFill/>
+        </p:spPr>
+        <p:txBody>
+          <a:bodyPr wrap="square" rtlCol="0">
+            <a:spAutoFit/>
+          </a:bodyPr>
+          <a:lstStyle/>
+          <a:p>
+            <a:r>
+              <a:rPr lang="en-US" sz="800" dirty="0"/>
+              <a:t>2026 Women in Statistics and Data Science Conference, Cincinnati, OH</a:t>
+            </a:r>
+          </a:p>
+        </p:txBody>
+      </p:sp>
+    </p:spTree>
+    <p:extLst>
+      <p:ext uri="{BB962C8B-B14F-4D97-AF65-F5344CB8AC3E}">
+        <p14:creationId xmlns:p14="http://schemas.microsoft.com/office/powerpoint/2010/main" val="1767184778"/>
+      </p:ext>
+    </p:extLst>
+  </p:cSld>
+  <p:clrMapOvr>
+    <a:masterClrMapping/>
+  </p:clrMapOvr>
+</p:sld>
+</file>
+
+<file path=ppt/slides/slide11.xml><?xml version="1.0" encoding="utf-8"?>
+<p:sld xmlns:a="http://schemas.openxmlformats.org/drawingml/2006/main" xmlns:r="http://schemas.openxmlformats.org/officeDocument/2006/relationships" xmlns:p="http://schemas.openxmlformats.org/presentationml/2006/main">
+  <p:cSld>
+    <p:spTree>
+      <p:nvGrpSpPr>
+        <p:cNvPr id="1" name=""/>
+        <p:cNvGrpSpPr/>
+        <p:nvPr/>
+      </p:nvGrpSpPr>
+      <p:grpSpPr>
+        <a:xfrm>
+          <a:off x="0" y="0"/>
+          <a:ext cx="0" cy="0"/>
+          <a:chOff x="0" y="0"/>
+          <a:chExt cx="0" cy="0"/>
+        </a:xfrm>
+      </p:grpSpPr>
+      <p:sp>
+        <p:nvSpPr>
+          <p:cNvPr id="2" name="Title 1">
+            <a:extLst>
+              <a:ext uri="{FF2B5EF4-FFF2-40B4-BE49-F238E27FC236}">
+                <a16:creationId xmlns:a16="http://schemas.microsoft.com/office/drawing/2014/main" id="{E1E5E978-EFBD-18A7-418D-6817463039B5}"/>
+              </a:ext>
+            </a:extLst>
+          </p:cNvPr>
+          <p:cNvSpPr>
+            <a:spLocks noGrp="1"/>
+          </p:cNvSpPr>
+          <p:nvPr>
+            <p:ph type="title"/>
+          </p:nvPr>
+        </p:nvSpPr>
+        <p:spPr/>
+        <p:txBody>
+          <a:bodyPr/>
+          <a:lstStyle/>
+          <a:p>
+            <a:r>
+              <a:rPr lang="en-US" dirty="0"/>
+              <a:t>Efficiency</a:t>
+            </a:r>
+          </a:p>
+        </p:txBody>
+      </p:sp>
+      <p:sp>
+        <p:nvSpPr>
+          <p:cNvPr id="3" name="Content Placeholder 2">
+            <a:extLst>
+              <a:ext uri="{FF2B5EF4-FFF2-40B4-BE49-F238E27FC236}">
+                <a16:creationId xmlns:a16="http://schemas.microsoft.com/office/drawing/2014/main" id="{F0760EC0-770E-4C8F-CC61-A292DAFC13C0}"/>
+              </a:ext>
+            </a:extLst>
+          </p:cNvPr>
+          <p:cNvSpPr>
+            <a:spLocks noGrp="1"/>
+          </p:cNvSpPr>
+          <p:nvPr>
+            <p:ph idx="1"/>
+          </p:nvPr>
+        </p:nvSpPr>
+        <p:spPr/>
+        <p:txBody>
+          <a:bodyPr/>
+          <a:lstStyle/>
+          <a:p>
+            <a:endParaRPr lang="en-US" dirty="0"/>
+          </a:p>
+        </p:txBody>
+      </p:sp>
+    </p:spTree>
+    <p:extLst>
+      <p:ext uri="{BB962C8B-B14F-4D97-AF65-F5344CB8AC3E}">
+        <p14:creationId xmlns:p14="http://schemas.microsoft.com/office/powerpoint/2010/main" val="3838937209"/>
+      </p:ext>
+    </p:extLst>
+  </p:cSld>
+  <p:clrMapOvr>
+    <a:masterClrMapping/>
+  </p:clrMapOvr>
+</p:sld>
+</file>
+
+<file path=ppt/slides/slide12.xml><?xml version="1.0" encoding="utf-8"?>
+<p:sld xmlns:a="http://schemas.openxmlformats.org/drawingml/2006/main" xmlns:r="http://schemas.openxmlformats.org/officeDocument/2006/relationships" xmlns:p="http://schemas.openxmlformats.org/presentationml/2006/main">
+  <p:cSld>
+    <p:spTree>
+      <p:nvGrpSpPr>
+        <p:cNvPr id="1" name=""/>
+        <p:cNvGrpSpPr/>
+        <p:nvPr/>
+      </p:nvGrpSpPr>
+      <p:grpSpPr>
+        <a:xfrm>
+          <a:off x="0" y="0"/>
+          <a:ext cx="0" cy="0"/>
+          <a:chOff x="0" y="0"/>
+          <a:chExt cx="0" cy="0"/>
+        </a:xfrm>
+      </p:grpSpPr>
+      <p:sp>
+        <p:nvSpPr>
+          <p:cNvPr id="2" name="Title 1">
+            <a:extLst>
+              <a:ext uri="{FF2B5EF4-FFF2-40B4-BE49-F238E27FC236}">
+                <a16:creationId xmlns:a16="http://schemas.microsoft.com/office/drawing/2014/main" id="{8389316A-BA5A-697B-1570-D44449413061}"/>
+              </a:ext>
+            </a:extLst>
+          </p:cNvPr>
+          <p:cNvSpPr>
+            <a:spLocks noGrp="1"/>
+          </p:cNvSpPr>
+          <p:nvPr>
+            <p:ph type="title"/>
+          </p:nvPr>
+        </p:nvSpPr>
+        <p:spPr/>
+        <p:txBody>
+          <a:bodyPr/>
+          <a:lstStyle/>
+          <a:p>
+            <a:r>
+              <a:rPr lang="en-US" dirty="0"/>
+              <a:t>Women in the cloud migration</a:t>
+            </a:r>
+          </a:p>
+        </p:txBody>
+      </p:sp>
+      <p:sp>
+        <p:nvSpPr>
+          <p:cNvPr id="3" name="Content Placeholder 2">
+            <a:extLst>
+              <a:ext uri="{FF2B5EF4-FFF2-40B4-BE49-F238E27FC236}">
+                <a16:creationId xmlns:a16="http://schemas.microsoft.com/office/drawing/2014/main" id="{2B5C1E90-8676-4A77-926E-A441CD5C5E9F}"/>
+              </a:ext>
+            </a:extLst>
+          </p:cNvPr>
+          <p:cNvSpPr>
+            <a:spLocks noGrp="1"/>
+          </p:cNvSpPr>
+          <p:nvPr>
+            <p:ph idx="1"/>
+          </p:nvPr>
+        </p:nvSpPr>
+        <p:spPr/>
+        <p:txBody>
+          <a:bodyPr/>
+          <a:lstStyle/>
+          <a:p>
+            <a:endParaRPr lang="en-US" dirty="0"/>
+          </a:p>
+        </p:txBody>
+      </p:sp>
+    </p:spTree>
+    <p:extLst>
+      <p:ext uri="{BB962C8B-B14F-4D97-AF65-F5344CB8AC3E}">
+        <p14:creationId xmlns:p14="http://schemas.microsoft.com/office/powerpoint/2010/main" val="3947488060"/>
+      </p:ext>
+    </p:extLst>
+  </p:cSld>
+  <p:clrMapOvr>
+    <a:masterClrMapping/>
+  </p:clrMapOvr>
+</p:sld>
+</file>
+
+<file path=ppt/slides/slide13.xml><?xml version="1.0" encoding="utf-8"?>
+<p:sld xmlns:a="http://schemas.openxmlformats.org/drawingml/2006/main" xmlns:r="http://schemas.openxmlformats.org/officeDocument/2006/relationships" xmlns:p="http://schemas.openxmlformats.org/presentationml/2006/main">
+  <p:cSld>
+    <p:spTree>
+      <p:nvGrpSpPr>
+        <p:cNvPr id="1" name=""/>
+        <p:cNvGrpSpPr/>
+        <p:nvPr/>
+      </p:nvGrpSpPr>
+      <p:grpSpPr>
+        <a:xfrm>
+          <a:off x="0" y="0"/>
+          <a:ext cx="0" cy="0"/>
+          <a:chOff x="0" y="0"/>
+          <a:chExt cx="0" cy="0"/>
+        </a:xfrm>
+      </p:grpSpPr>
+      <p:sp>
+        <p:nvSpPr>
+          <p:cNvPr id="2" name="Title 1">
+            <a:extLst>
+              <a:ext uri="{FF2B5EF4-FFF2-40B4-BE49-F238E27FC236}">
+                <a16:creationId xmlns:a16="http://schemas.microsoft.com/office/drawing/2014/main" id="{78B1E73B-C26C-1F3B-30DF-35A921F9EF1B}"/>
+              </a:ext>
+            </a:extLst>
+          </p:cNvPr>
+          <p:cNvSpPr>
+            <a:spLocks noGrp="1"/>
+          </p:cNvSpPr>
+          <p:nvPr>
+            <p:ph type="title"/>
+          </p:nvPr>
+        </p:nvSpPr>
+        <p:spPr/>
+        <p:txBody>
+          <a:bodyPr/>
+          <a:lstStyle/>
+          <a:p>
+            <a:r>
+              <a:rPr lang="en-US" dirty="0"/>
+              <a:t>Conclusions</a:t>
+            </a:r>
+          </a:p>
+        </p:txBody>
+      </p:sp>
+      <p:sp>
+        <p:nvSpPr>
+          <p:cNvPr id="3" name="Content Placeholder 2">
+            <a:extLst>
+              <a:ext uri="{FF2B5EF4-FFF2-40B4-BE49-F238E27FC236}">
+                <a16:creationId xmlns:a16="http://schemas.microsoft.com/office/drawing/2014/main" id="{9A8E9B1D-5AA5-C03E-14EC-CB02FBFB42E4}"/>
+              </a:ext>
+            </a:extLst>
+          </p:cNvPr>
+          <p:cNvSpPr>
+            <a:spLocks noGrp="1"/>
+          </p:cNvSpPr>
+          <p:nvPr>
+            <p:ph idx="1"/>
+          </p:nvPr>
+        </p:nvSpPr>
+        <p:spPr>
+          <a:xfrm>
+            <a:off x="1154954" y="2603500"/>
+            <a:ext cx="9015589" cy="3416300"/>
+          </a:xfrm>
+        </p:spPr>
+        <p:txBody>
+          <a:bodyPr/>
+          <a:lstStyle/>
+          <a:p>
+            <a:r>
+              <a:rPr lang="en-US" dirty="0"/>
+              <a:t>AWS “Lift and Shift” is the goal. But there are more things to consider in the real-world cloud migration.</a:t>
+            </a:r>
+          </a:p>
+          <a:p>
+            <a:r>
+              <a:rPr lang="en-US" dirty="0"/>
+              <a:t>Everything has a cost. Moving from SAS to free open-source software needs additional effort.</a:t>
+            </a:r>
+          </a:p>
+        </p:txBody>
+      </p:sp>
+    </p:spTree>
+    <p:extLst>
+      <p:ext uri="{BB962C8B-B14F-4D97-AF65-F5344CB8AC3E}">
+        <p14:creationId xmlns:p14="http://schemas.microsoft.com/office/powerpoint/2010/main" val="3950423458"/>
+      </p:ext>
+    </p:extLst>
+  </p:cSld>
+  <p:clrMapOvr>
+    <a:masterClrMapping/>
+  </p:clrMapOvr>
+</p:sld>
+</file>
+
+<file path=ppt/slides/slide14.xml><?xml version="1.0" encoding="utf-8"?>
+<p:sld xmlns:a="http://schemas.openxmlformats.org/drawingml/2006/main" xmlns:r="http://schemas.openxmlformats.org/officeDocument/2006/relationships" xmlns:p="http://schemas.openxmlformats.org/presentationml/2006/main">
+  <p:cSld>
+    <p:spTree>
+      <p:nvGrpSpPr>
+        <p:cNvPr id="1" name=""/>
+        <p:cNvGrpSpPr/>
+        <p:nvPr/>
+      </p:nvGrpSpPr>
+      <p:grpSpPr>
+        <a:xfrm>
+          <a:off x="0" y="0"/>
+          <a:ext cx="0" cy="0"/>
+          <a:chOff x="0" y="0"/>
+          <a:chExt cx="0" cy="0"/>
+        </a:xfrm>
+      </p:grpSpPr>
+      <p:sp>
+        <p:nvSpPr>
+          <p:cNvPr id="2" name="Title 1">
+            <a:extLst>
+              <a:ext uri="{FF2B5EF4-FFF2-40B4-BE49-F238E27FC236}">
+                <a16:creationId xmlns:a16="http://schemas.microsoft.com/office/drawing/2014/main" id="{C0DFF426-59A4-5223-447C-64525847C411}"/>
+              </a:ext>
+            </a:extLst>
+          </p:cNvPr>
+          <p:cNvSpPr>
+            <a:spLocks noGrp="1"/>
+          </p:cNvSpPr>
+          <p:nvPr>
+            <p:ph type="title"/>
+          </p:nvPr>
+        </p:nvSpPr>
+        <p:spPr/>
+        <p:txBody>
+          <a:bodyPr/>
+          <a:lstStyle/>
+          <a:p>
+            <a:r>
+              <a:rPr lang="en-US" dirty="0"/>
+              <a:t>Q&amp;A</a:t>
+            </a:r>
+          </a:p>
+        </p:txBody>
+      </p:sp>
+      <p:sp>
+        <p:nvSpPr>
+          <p:cNvPr id="3" name="Content Placeholder 2">
+            <a:extLst>
+              <a:ext uri="{FF2B5EF4-FFF2-40B4-BE49-F238E27FC236}">
+                <a16:creationId xmlns:a16="http://schemas.microsoft.com/office/drawing/2014/main" id="{43607343-168D-D994-90D1-2DD882C5732D}"/>
+              </a:ext>
+            </a:extLst>
+          </p:cNvPr>
+          <p:cNvSpPr>
+            <a:spLocks noGrp="1"/>
+          </p:cNvSpPr>
+          <p:nvPr>
+            <p:ph idx="1"/>
+          </p:nvPr>
+        </p:nvSpPr>
+        <p:spPr>
+          <a:xfrm>
+            <a:off x="2676183" y="5856698"/>
+            <a:ext cx="1571621" cy="347518"/>
+          </a:xfrm>
+        </p:spPr>
+        <p:txBody>
+          <a:bodyPr>
+            <a:normAutofit lnSpcReduction="10000"/>
+          </a:bodyPr>
+          <a:lstStyle/>
+          <a:p>
+            <a:r>
+              <a:rPr lang="en-US" dirty="0"/>
+              <a:t>LinkedIn</a:t>
+            </a:r>
+          </a:p>
+        </p:txBody>
+      </p:sp>
+      <p:pic>
+        <p:nvPicPr>
+          <p:cNvPr id="4" name="Picture 3">
+            <a:extLst>
+              <a:ext uri="{FF2B5EF4-FFF2-40B4-BE49-F238E27FC236}">
+                <a16:creationId xmlns:a16="http://schemas.microsoft.com/office/drawing/2014/main" id="{C5BE8A67-972C-0E8C-7674-B326F354016E}"/>
+              </a:ext>
+            </a:extLst>
+          </p:cNvPr>
+          <p:cNvPicPr>
+            <a:picLocks noChangeAspect="1"/>
+          </p:cNvPicPr>
+          <p:nvPr/>
+        </p:nvPicPr>
+        <p:blipFill>
+          <a:blip r:embed="rId2"/>
+          <a:stretch>
+            <a:fillRect/>
+          </a:stretch>
+        </p:blipFill>
+        <p:spPr>
+          <a:xfrm>
+            <a:off x="6700057" y="3384972"/>
+            <a:ext cx="2286875" cy="2286875"/>
+          </a:xfrm>
+          <a:prstGeom prst="rect">
+            <a:avLst/>
+          </a:prstGeom>
+        </p:spPr>
+      </p:pic>
+      <p:pic>
+        <p:nvPicPr>
+          <p:cNvPr id="5" name="Picture 4">
+            <a:extLst>
+              <a:ext uri="{FF2B5EF4-FFF2-40B4-BE49-F238E27FC236}">
+                <a16:creationId xmlns:a16="http://schemas.microsoft.com/office/drawing/2014/main" id="{A52FD9BF-3BDB-D204-C5A1-EB9B758D8926}"/>
+              </a:ext>
+            </a:extLst>
+          </p:cNvPr>
+          <p:cNvPicPr>
+            <a:picLocks noChangeAspect="1"/>
+          </p:cNvPicPr>
+          <p:nvPr/>
+        </p:nvPicPr>
+        <p:blipFill>
+          <a:blip r:embed="rId3"/>
+          <a:stretch>
+            <a:fillRect/>
+          </a:stretch>
+        </p:blipFill>
+        <p:spPr>
+          <a:xfrm>
+            <a:off x="2374721" y="3309994"/>
+            <a:ext cx="2415264" cy="2436829"/>
+          </a:xfrm>
+          <a:prstGeom prst="rect">
+            <a:avLst/>
+          </a:prstGeom>
+        </p:spPr>
+      </p:pic>
+      <p:sp>
+        <p:nvSpPr>
+          <p:cNvPr id="6" name="Content Placeholder 2">
+            <a:extLst>
+              <a:ext uri="{FF2B5EF4-FFF2-40B4-BE49-F238E27FC236}">
+                <a16:creationId xmlns:a16="http://schemas.microsoft.com/office/drawing/2014/main" id="{72CD7024-0B03-225D-3126-376E26376C15}"/>
+              </a:ext>
+            </a:extLst>
+          </p:cNvPr>
+          <p:cNvSpPr txBox="1">
+            <a:spLocks/>
+          </p:cNvSpPr>
+          <p:nvPr/>
+        </p:nvSpPr>
+        <p:spPr>
+          <a:xfrm>
+            <a:off x="7057683" y="5884332"/>
+            <a:ext cx="1571621" cy="347518"/>
+          </a:xfrm>
+          <a:prstGeom prst="rect">
+            <a:avLst/>
+          </a:prstGeom>
+        </p:spPr>
+        <p:txBody>
+          <a:bodyPr vert="horz" lIns="91440" tIns="45720" rIns="91440" bIns="45720" rtlCol="0">
+            <a:normAutofit lnSpcReduction="10000"/>
+          </a:bodyPr>
+          <a:lstStyle>
+            <a:lvl1pPr marL="342900" indent="-342900" algn="l" defTabSz="457200" rtl="0" eaLnBrk="1" latinLnBrk="0" hangingPunct="1">
+              <a:spcBef>
+                <a:spcPts val="1000"/>
+              </a:spcBef>
+              <a:spcAft>
+                <a:spcPts val="0"/>
+              </a:spcAft>
+              <a:buClr>
+                <a:schemeClr val="accent1"/>
+              </a:buClr>
+              <a:buSzPct val="80000"/>
+              <a:buFont typeface="Wingdings 3" charset="2"/>
+              <a:buChar char=""/>
+              <a:defRPr sz="1800" b="0" i="0" kern="1200">
+                <a:solidFill>
+                  <a:schemeClr val="tx1">
+                    <a:lumMod val="75000"/>
+                    <a:lumOff val="25000"/>
+                  </a:schemeClr>
+                </a:solidFill>
+                <a:latin typeface="+mn-lt"/>
+                <a:ea typeface="+mn-ea"/>
+                <a:cs typeface="+mn-cs"/>
+              </a:defRPr>
+            </a:lvl1pPr>
+            <a:lvl2pPr marL="742950" indent="-285750" algn="l" defTabSz="457200" rtl="0" eaLnBrk="1" latinLnBrk="0" hangingPunct="1">
+              <a:spcBef>
+                <a:spcPts val="1000"/>
+              </a:spcBef>
+              <a:spcAft>
+                <a:spcPts val="0"/>
+              </a:spcAft>
+              <a:buClr>
+                <a:schemeClr val="accent1"/>
+              </a:buClr>
+              <a:buSzPct val="80000"/>
+              <a:buFont typeface="Wingdings 3" charset="2"/>
+              <a:buChar char=""/>
+              <a:defRPr sz="1600" b="0" i="0" kern="1200">
+                <a:solidFill>
+                  <a:schemeClr val="tx1">
+                    <a:lumMod val="75000"/>
+                    <a:lumOff val="25000"/>
+                  </a:schemeClr>
+                </a:solidFill>
+                <a:latin typeface="+mn-lt"/>
+                <a:ea typeface="+mn-ea"/>
+                <a:cs typeface="+mn-cs"/>
+              </a:defRPr>
+            </a:lvl2pPr>
+            <a:lvl3pPr marL="1143000" indent="-228600" algn="l" defTabSz="457200" rtl="0" eaLnBrk="1" latinLnBrk="0" hangingPunct="1">
+              <a:spcBef>
+                <a:spcPts val="1000"/>
+              </a:spcBef>
+              <a:spcAft>
+                <a:spcPts val="0"/>
+              </a:spcAft>
+              <a:buClr>
+                <a:schemeClr val="accent1"/>
+              </a:buClr>
+              <a:buSzPct val="80000"/>
+              <a:buFont typeface="Wingdings 3" charset="2"/>
+              <a:buChar char=""/>
+              <a:defRPr sz="1400" b="0" i="0" kern="1200">
+                <a:solidFill>
+                  <a:schemeClr val="tx1">
+                    <a:lumMod val="75000"/>
+                    <a:lumOff val="25000"/>
+                  </a:schemeClr>
+                </a:solidFill>
+                <a:latin typeface="+mn-lt"/>
+                <a:ea typeface="+mn-ea"/>
+                <a:cs typeface="+mn-cs"/>
+              </a:defRPr>
+            </a:lvl3pPr>
+            <a:lvl4pPr marL="1600200" indent="-228600" algn="l" defTabSz="457200" rtl="0" eaLnBrk="1" latinLnBrk="0" hangingPunct="1">
+              <a:spcBef>
+                <a:spcPts val="1000"/>
+              </a:spcBef>
+              <a:spcAft>
+                <a:spcPts val="0"/>
+              </a:spcAft>
+              <a:buClr>
+                <a:schemeClr val="accent1"/>
+              </a:buClr>
+              <a:buSzPct val="80000"/>
+              <a:buFont typeface="Wingdings 3" charset="2"/>
+              <a:buChar char=""/>
+              <a:defRPr sz="1200" b="0" i="0" kern="1200">
+                <a:solidFill>
+                  <a:schemeClr val="tx1">
+                    <a:lumMod val="75000"/>
+                    <a:lumOff val="25000"/>
+                  </a:schemeClr>
+                </a:solidFill>
+                <a:latin typeface="+mn-lt"/>
+                <a:ea typeface="+mn-ea"/>
+                <a:cs typeface="+mn-cs"/>
+              </a:defRPr>
+            </a:lvl4pPr>
+            <a:lvl5pPr marL="2057400" indent="-228600" algn="l" defTabSz="457200" rtl="0" eaLnBrk="1" latinLnBrk="0" hangingPunct="1">
+              <a:spcBef>
+                <a:spcPts val="1000"/>
+              </a:spcBef>
+              <a:spcAft>
+                <a:spcPts val="0"/>
+              </a:spcAft>
+              <a:buClr>
+                <a:schemeClr val="accent1"/>
+              </a:buClr>
+              <a:buSzPct val="80000"/>
+              <a:buFont typeface="Wingdings 3" charset="2"/>
+              <a:buChar char=""/>
+              <a:defRPr sz="1200" b="0" i="0" kern="1200">
+                <a:solidFill>
+                  <a:schemeClr val="tx1">
+                    <a:lumMod val="75000"/>
+                    <a:lumOff val="25000"/>
+                  </a:schemeClr>
+                </a:solidFill>
+                <a:latin typeface="+mn-lt"/>
+                <a:ea typeface="+mn-ea"/>
+                <a:cs typeface="+mn-cs"/>
+              </a:defRPr>
+            </a:lvl5pPr>
+            <a:lvl6pPr marL="2514600" indent="-228600" algn="l" defTabSz="457200" rtl="0" eaLnBrk="1" latinLnBrk="0" hangingPunct="1">
+              <a:spcBef>
+                <a:spcPts val="1000"/>
+              </a:spcBef>
+              <a:spcAft>
+                <a:spcPts val="0"/>
+              </a:spcAft>
+              <a:buClr>
+                <a:schemeClr val="accent1"/>
+              </a:buClr>
+              <a:buSzPct val="80000"/>
+              <a:buFont typeface="Wingdings 3" charset="2"/>
+              <a:buChar char=""/>
+              <a:defRPr sz="1200" b="0" i="0" kern="1200">
+                <a:solidFill>
+                  <a:schemeClr val="tx1">
+                    <a:lumMod val="75000"/>
+                    <a:lumOff val="25000"/>
+                  </a:schemeClr>
+                </a:solidFill>
+                <a:latin typeface="+mn-lt"/>
+                <a:ea typeface="+mn-ea"/>
+                <a:cs typeface="+mn-cs"/>
+              </a:defRPr>
+            </a:lvl6pPr>
+            <a:lvl7pPr marL="2971800" indent="-228600" algn="l" defTabSz="457200" rtl="0" eaLnBrk="1" latinLnBrk="0" hangingPunct="1">
+              <a:spcBef>
+                <a:spcPts val="1000"/>
+              </a:spcBef>
+              <a:spcAft>
+                <a:spcPts val="0"/>
+              </a:spcAft>
+              <a:buClr>
+                <a:schemeClr val="accent1"/>
+              </a:buClr>
+              <a:buSzPct val="80000"/>
+              <a:buFont typeface="Wingdings 3" charset="2"/>
+              <a:buChar char=""/>
+              <a:defRPr sz="1200" b="0" i="0" kern="1200">
+                <a:solidFill>
+                  <a:schemeClr val="tx1">
+                    <a:lumMod val="75000"/>
+                    <a:lumOff val="25000"/>
+                  </a:schemeClr>
+                </a:solidFill>
+                <a:latin typeface="+mn-lt"/>
+                <a:ea typeface="+mn-ea"/>
+                <a:cs typeface="+mn-cs"/>
+              </a:defRPr>
+            </a:lvl7pPr>
+            <a:lvl8pPr marL="3429000" indent="-228600" algn="l" defTabSz="457200" rtl="0" eaLnBrk="1" latinLnBrk="0" hangingPunct="1">
+              <a:spcBef>
+                <a:spcPts val="1000"/>
+              </a:spcBef>
+              <a:spcAft>
+                <a:spcPts val="0"/>
+              </a:spcAft>
+              <a:buClr>
+                <a:schemeClr val="accent1"/>
+              </a:buClr>
+              <a:buSzPct val="80000"/>
+              <a:buFont typeface="Wingdings 3" charset="2"/>
+              <a:buChar char=""/>
+              <a:defRPr sz="1200" b="0" i="0" kern="1200">
+                <a:solidFill>
+                  <a:schemeClr val="tx1">
+                    <a:lumMod val="75000"/>
+                    <a:lumOff val="25000"/>
+                  </a:schemeClr>
+                </a:solidFill>
+                <a:latin typeface="+mn-lt"/>
+                <a:ea typeface="+mn-ea"/>
+                <a:cs typeface="+mn-cs"/>
+              </a:defRPr>
+            </a:lvl8pPr>
+            <a:lvl9pPr marL="3886200" indent="-228600" algn="l" defTabSz="457200" rtl="0" eaLnBrk="1" latinLnBrk="0" hangingPunct="1">
+              <a:spcBef>
+                <a:spcPts val="1000"/>
+              </a:spcBef>
+              <a:spcAft>
+                <a:spcPts val="0"/>
+              </a:spcAft>
+              <a:buClr>
+                <a:schemeClr val="accent1"/>
+              </a:buClr>
+              <a:buSzPct val="80000"/>
+              <a:buFont typeface="Wingdings 3" charset="2"/>
+              <a:buChar char=""/>
+              <a:defRPr sz="1200" b="0" i="0" kern="1200">
+                <a:solidFill>
+                  <a:schemeClr val="tx1">
+                    <a:lumMod val="75000"/>
+                    <a:lumOff val="25000"/>
+                  </a:schemeClr>
+                </a:solidFill>
+                <a:latin typeface="+mn-lt"/>
+                <a:ea typeface="+mn-ea"/>
+                <a:cs typeface="+mn-cs"/>
+              </a:defRPr>
+            </a:lvl9pPr>
+          </a:lstStyle>
+          <a:p>
+            <a:r>
+              <a:rPr lang="en-US" dirty="0" err="1"/>
+              <a:t>Github</a:t>
+            </a:r>
+            <a:endParaRPr lang="en-US" dirty="0"/>
+          </a:p>
+        </p:txBody>
+      </p:sp>
+    </p:spTree>
+    <p:extLst>
+      <p:ext uri="{BB962C8B-B14F-4D97-AF65-F5344CB8AC3E}">
+        <p14:creationId xmlns:p14="http://schemas.microsoft.com/office/powerpoint/2010/main" val="1557692416"/>
+      </p:ext>
+    </p:extLst>
+  </p:cSld>
+  <p:clrMapOvr>
+    <a:masterClrMapping/>
+  </p:clrMapOvr>
+</p:sld>
+</file>
+
+<file path=ppt/slides/slide15.xml><?xml version="1.0" encoding="utf-8"?>
+<p:sld xmlns:a="http://schemas.openxmlformats.org/drawingml/2006/main" xmlns:r="http://schemas.openxmlformats.org/officeDocument/2006/relationships" xmlns:p="http://schemas.openxmlformats.org/presentationml/2006/main">
+  <p:cSld>
+    <p:spTree>
+      <p:nvGrpSpPr>
+        <p:cNvPr id="1" name=""/>
+        <p:cNvGrpSpPr/>
+        <p:nvPr/>
+      </p:nvGrpSpPr>
+      <p:grpSpPr>
+        <a:xfrm>
+          <a:off x="0" y="0"/>
+          <a:ext cx="0" cy="0"/>
+          <a:chOff x="0" y="0"/>
+          <a:chExt cx="0" cy="0"/>
+        </a:xfrm>
+      </p:grpSpPr>
+      <p:sp>
+        <p:nvSpPr>
+          <p:cNvPr id="2" name="Title 1">
+            <a:extLst>
+              <a:ext uri="{FF2B5EF4-FFF2-40B4-BE49-F238E27FC236}">
+                <a16:creationId xmlns:a16="http://schemas.microsoft.com/office/drawing/2014/main" id="{67C620A4-3589-0D65-34EA-14EC02EEAFC1}"/>
+              </a:ext>
+            </a:extLst>
+          </p:cNvPr>
+          <p:cNvSpPr>
+            <a:spLocks noGrp="1"/>
+          </p:cNvSpPr>
+          <p:nvPr>
+            <p:ph type="title"/>
+          </p:nvPr>
+        </p:nvSpPr>
+        <p:spPr/>
+        <p:txBody>
+          <a:bodyPr/>
+          <a:lstStyle/>
+          <a:p>
+            <a:r>
+              <a:rPr lang="en-US" dirty="0"/>
+              <a:t>References:</a:t>
+            </a:r>
+          </a:p>
+        </p:txBody>
+      </p:sp>
+      <p:sp>
+        <p:nvSpPr>
+          <p:cNvPr id="3" name="Content Placeholder 2">
+            <a:extLst>
+              <a:ext uri="{FF2B5EF4-FFF2-40B4-BE49-F238E27FC236}">
+                <a16:creationId xmlns:a16="http://schemas.microsoft.com/office/drawing/2014/main" id="{22E9210A-0FDC-AC25-79CB-C0A7B4C7948D}"/>
+              </a:ext>
+            </a:extLst>
+          </p:cNvPr>
+          <p:cNvSpPr>
+            <a:spLocks noGrp="1"/>
+          </p:cNvSpPr>
+          <p:nvPr>
+            <p:ph idx="1"/>
+          </p:nvPr>
+        </p:nvSpPr>
+        <p:spPr>
+          <a:xfrm>
+            <a:off x="651675" y="2553623"/>
+            <a:ext cx="9767970" cy="1943562"/>
+          </a:xfrm>
+        </p:spPr>
+        <p:txBody>
+          <a:bodyPr>
+            <a:normAutofit/>
+          </a:bodyPr>
+          <a:lstStyle/>
+          <a:p>
+            <a:r>
+              <a:rPr lang="en-US" sz="1200" dirty="0">
+                <a:solidFill>
+                  <a:schemeClr val="tx1"/>
+                </a:solidFill>
+                <a:hlinkClick r:id="rId2">
+                  <a:extLst>
+                    <a:ext uri="{A12FA001-AC4F-418D-AE19-62706E023703}">
+                      <ahyp:hlinkClr xmlns:ahyp="http://schemas.microsoft.com/office/drawing/2018/hyperlinkcolor" val="tx"/>
+                    </a:ext>
+                  </a:extLst>
+                </a:hlinkClick>
+              </a:rPr>
+              <a:t>AWS </a:t>
+            </a:r>
+            <a:r>
+              <a:rPr lang="en-US" sz="1200" dirty="0" err="1">
+                <a:solidFill>
+                  <a:schemeClr val="tx1"/>
+                </a:solidFill>
+                <a:hlinkClick r:id="rId2">
+                  <a:extLst>
+                    <a:ext uri="{A12FA001-AC4F-418D-AE19-62706E023703}">
+                      <ahyp:hlinkClr xmlns:ahyp="http://schemas.microsoft.com/office/drawing/2018/hyperlinkcolor" val="tx"/>
+                    </a:ext>
+                  </a:extLst>
+                </a:hlinkClick>
+              </a:rPr>
+              <a:t>re:Invent</a:t>
+            </a:r>
+            <a:r>
+              <a:rPr lang="en-US" sz="1200" dirty="0">
+                <a:solidFill>
+                  <a:schemeClr val="tx1"/>
+                </a:solidFill>
+                <a:hlinkClick r:id="rId2">
+                  <a:extLst>
+                    <a:ext uri="{A12FA001-AC4F-418D-AE19-62706E023703}">
+                      <ahyp:hlinkClr xmlns:ahyp="http://schemas.microsoft.com/office/drawing/2018/hyperlinkcolor" val="tx"/>
+                    </a:ext>
+                  </a:extLst>
+                </a:hlinkClick>
+              </a:rPr>
+              <a:t> 2021 - Fannie Mae: Migrating at scale without lifting and shifting</a:t>
+            </a:r>
+            <a:endParaRPr lang="en-US" sz="1200" dirty="0">
+              <a:solidFill>
+                <a:schemeClr val="tx1"/>
+              </a:solidFill>
+            </a:endParaRPr>
+          </a:p>
+          <a:p>
+            <a:r>
+              <a:rPr lang="en-US" sz="1200" dirty="0">
+                <a:solidFill>
+                  <a:schemeClr val="tx1"/>
+                </a:solidFill>
+                <a:hlinkClick r:id="rId3">
+                  <a:extLst>
+                    <a:ext uri="{A12FA001-AC4F-418D-AE19-62706E023703}">
+                      <ahyp:hlinkClr xmlns:ahyp="http://schemas.microsoft.com/office/drawing/2018/hyperlinkcolor" val="tx"/>
+                    </a:ext>
+                  </a:extLst>
+                </a:hlinkClick>
+              </a:rPr>
+              <a:t>Fannie Mae’s Digital Transformation Journey with AWS | Amazon Web Services</a:t>
+            </a:r>
+            <a:endParaRPr lang="en-US" sz="1200" dirty="0">
+              <a:solidFill>
+                <a:schemeClr val="tx1"/>
+              </a:solidFill>
+            </a:endParaRPr>
+          </a:p>
+          <a:p>
+            <a:r>
+              <a:rPr lang="en-US" sz="1200" dirty="0">
+                <a:solidFill>
+                  <a:schemeClr val="tx1"/>
+                </a:solidFill>
+                <a:hlinkClick r:id="rId4">
+                  <a:extLst>
+                    <a:ext uri="{A12FA001-AC4F-418D-AE19-62706E023703}">
+                      <ahyp:hlinkClr xmlns:ahyp="http://schemas.microsoft.com/office/drawing/2018/hyperlinkcolor" val="tx"/>
+                    </a:ext>
+                  </a:extLst>
+                </a:hlinkClick>
+              </a:rPr>
+              <a:t>What is a Cloud Migration Strategy? - Cloud Migration Strategy Explained – AWS</a:t>
+            </a:r>
+            <a:endParaRPr lang="en-US" sz="1200" dirty="0">
+              <a:solidFill>
+                <a:schemeClr val="tx1"/>
+              </a:solidFill>
+            </a:endParaRPr>
+          </a:p>
+          <a:p>
+            <a:r>
+              <a:rPr lang="en-US" sz="1200" dirty="0">
+                <a:solidFill>
+                  <a:schemeClr val="tx1"/>
+                </a:solidFill>
+                <a:hlinkClick r:id="rId5">
+                  <a:extLst>
+                    <a:ext uri="{A12FA001-AC4F-418D-AE19-62706E023703}">
+                      <ahyp:hlinkClr xmlns:ahyp="http://schemas.microsoft.com/office/drawing/2018/hyperlinkcolor" val="tx"/>
+                    </a:ext>
+                  </a:extLst>
+                </a:hlinkClick>
+              </a:rPr>
+              <a:t>Understanding the “7 Rs” - Cloud Migration Strategies | AWS Builder Center</a:t>
+            </a:r>
+            <a:endParaRPr lang="en-US" sz="1200" dirty="0">
+              <a:solidFill>
+                <a:schemeClr val="tx1"/>
+              </a:solidFill>
+            </a:endParaRPr>
+          </a:p>
+          <a:p>
+            <a:r>
+              <a:rPr lang="en-US" sz="1200" dirty="0" err="1">
+                <a:solidFill>
+                  <a:schemeClr val="tx1"/>
+                </a:solidFill>
+                <a:hlinkClick r:id="rId6">
+                  <a:extLst>
+                    <a:ext uri="{A12FA001-AC4F-418D-AE19-62706E023703}">
+                      <ahyp:hlinkClr xmlns:ahyp="http://schemas.microsoft.com/office/drawing/2018/hyperlinkcolor" val="tx"/>
+                    </a:ext>
+                  </a:extLst>
+                </a:hlinkClick>
+              </a:rPr>
+              <a:t>asnr</a:t>
+            </a:r>
+            <a:r>
+              <a:rPr lang="en-US" sz="1200" dirty="0">
+                <a:solidFill>
+                  <a:schemeClr val="tx1"/>
+                </a:solidFill>
+                <a:hlinkClick r:id="rId6">
+                  <a:extLst>
+                    <a:ext uri="{A12FA001-AC4F-418D-AE19-62706E023703}">
+                      <ahyp:hlinkClr xmlns:ahyp="http://schemas.microsoft.com/office/drawing/2018/hyperlinkcolor" val="tx"/>
+                    </a:ext>
+                  </a:extLst>
+                </a:hlinkClick>
+              </a:rPr>
+              <a:t>/</a:t>
+            </a:r>
+            <a:r>
+              <a:rPr lang="en-US" sz="1200" dirty="0" err="1">
+                <a:solidFill>
+                  <a:schemeClr val="tx1"/>
+                </a:solidFill>
+                <a:hlinkClick r:id="rId6">
+                  <a:extLst>
+                    <a:ext uri="{A12FA001-AC4F-418D-AE19-62706E023703}">
+                      <ahyp:hlinkClr xmlns:ahyp="http://schemas.microsoft.com/office/drawing/2018/hyperlinkcolor" val="tx"/>
+                    </a:ext>
+                  </a:extLst>
+                </a:hlinkClick>
+              </a:rPr>
+              <a:t>sas</a:t>
+            </a:r>
+            <a:r>
+              <a:rPr lang="en-US" sz="1200" dirty="0">
+                <a:solidFill>
+                  <a:schemeClr val="tx1"/>
+                </a:solidFill>
+                <a:hlinkClick r:id="rId6">
+                  <a:extLst>
+                    <a:ext uri="{A12FA001-AC4F-418D-AE19-62706E023703}">
+                      <ahyp:hlinkClr xmlns:ahyp="http://schemas.microsoft.com/office/drawing/2018/hyperlinkcolor" val="tx"/>
+                    </a:ext>
+                  </a:extLst>
+                </a:hlinkClick>
+              </a:rPr>
+              <a:t>-to-r: Translate SAS to R</a:t>
+            </a:r>
+            <a:endParaRPr lang="en-US" sz="1200" dirty="0">
+              <a:solidFill>
+                <a:schemeClr val="tx1"/>
+              </a:solidFill>
+            </a:endParaRPr>
+          </a:p>
+          <a:p>
+            <a:r>
+              <a:rPr lang="en-US" sz="1200" dirty="0">
+                <a:solidFill>
+                  <a:schemeClr val="tx1"/>
+                </a:solidFill>
+                <a:hlinkClick r:id="rId7">
+                  <a:extLst>
+                    <a:ext uri="{A12FA001-AC4F-418D-AE19-62706E023703}">
+                      <ahyp:hlinkClr xmlns:ahyp="http://schemas.microsoft.com/office/drawing/2018/hyperlinkcolor" val="tx"/>
+                    </a:ext>
+                  </a:extLst>
+                </a:hlinkClick>
+              </a:rPr>
+              <a:t>Code-Transcompiler-using-LLMs-public/README.md at main · </a:t>
+            </a:r>
+            <a:r>
+              <a:rPr lang="en-US" sz="1200" dirty="0" err="1">
+                <a:solidFill>
+                  <a:schemeClr val="tx1"/>
+                </a:solidFill>
+                <a:hlinkClick r:id="rId7">
+                  <a:extLst>
+                    <a:ext uri="{A12FA001-AC4F-418D-AE19-62706E023703}">
+                      <ahyp:hlinkClr xmlns:ahyp="http://schemas.microsoft.com/office/drawing/2018/hyperlinkcolor" val="tx"/>
+                    </a:ext>
+                  </a:extLst>
+                </a:hlinkClick>
+              </a:rPr>
+              <a:t>CSOIreland</a:t>
+            </a:r>
+            <a:r>
+              <a:rPr lang="en-US" sz="1200" dirty="0">
+                <a:solidFill>
+                  <a:schemeClr val="tx1"/>
+                </a:solidFill>
+                <a:hlinkClick r:id="rId7">
+                  <a:extLst>
+                    <a:ext uri="{A12FA001-AC4F-418D-AE19-62706E023703}">
+                      <ahyp:hlinkClr xmlns:ahyp="http://schemas.microsoft.com/office/drawing/2018/hyperlinkcolor" val="tx"/>
+                    </a:ext>
+                  </a:extLst>
+                </a:hlinkClick>
+              </a:rPr>
+              <a:t>/Code-Transcompiler-using-LLMs-public</a:t>
+            </a:r>
+            <a:endParaRPr lang="en-US" sz="1200" dirty="0">
+              <a:solidFill>
+                <a:schemeClr val="tx1"/>
+              </a:solidFill>
+            </a:endParaRPr>
+          </a:p>
+          <a:p>
+            <a:endParaRPr lang="en-US" dirty="0"/>
+          </a:p>
+        </p:txBody>
+      </p:sp>
+    </p:spTree>
+    <p:extLst>
+      <p:ext uri="{BB962C8B-B14F-4D97-AF65-F5344CB8AC3E}">
+        <p14:creationId xmlns:p14="http://schemas.microsoft.com/office/powerpoint/2010/main" val="1955806376"/>
       </p:ext>
     </p:extLst>
   </p:cSld>
@@ -20648,18 +24763,26 @@
         <p:spPr>
           <a:xfrm>
             <a:off x="249381" y="2345805"/>
-            <a:ext cx="11829012" cy="355831"/>
+            <a:ext cx="11346874" cy="355831"/>
           </a:xfrm>
         </p:spPr>
         <p:txBody>
           <a:bodyPr>
-            <a:normAutofit fontScale="77500" lnSpcReduction="20000"/>
+            <a:normAutofit fontScale="70000" lnSpcReduction="20000"/>
           </a:bodyPr>
           <a:lstStyle/>
           <a:p>
             <a:r>
               <a:rPr lang="en-US" dirty="0"/>
-              <a:t>I don’t have access to SAS. I only have the SAS code and log files. I asked my teammates to create some intermediate datasets.</a:t>
+              <a:t>I d</a:t>
+            </a:r>
+            <a:r>
+              <a:rPr lang="en-US" altLang="zh-CN" dirty="0"/>
+              <a:t>idn’t</a:t>
+            </a:r>
+            <a:r>
+              <a:rPr lang="en-US" dirty="0"/>
+              <a:t> have access to SAS. I only had the SAS code and log files. I had to ask my teammates to create some intermediate datasets.</a:t>
             </a:r>
           </a:p>
         </p:txBody>
@@ -20886,7 +25009,7 @@
         <p:spPr>
           <a:xfrm>
             <a:off x="631252" y="838200"/>
-            <a:ext cx="8761413" cy="706964"/>
+            <a:ext cx="10042290" cy="706964"/>
           </a:xfrm>
         </p:spPr>
         <p:txBody>
@@ -20895,7 +25018,7 @@
           <a:p>
             <a:r>
               <a:rPr lang="en-US" dirty="0"/>
-              <a:t>3. My work in the cloud migration</a:t>
+              <a:t>3. My work – Steps for code conversion</a:t>
             </a:r>
           </a:p>
         </p:txBody>
@@ -20916,12 +25039,1058 @@
             <p:ph idx="1"/>
           </p:nvPr>
         </p:nvSpPr>
-        <p:spPr/>
+        <p:spPr>
+          <a:xfrm>
+            <a:off x="371302" y="3429000"/>
+            <a:ext cx="2510443" cy="2722418"/>
+          </a:xfrm>
+          <a:ln>
+            <a:solidFill>
+              <a:schemeClr val="accent1"/>
+            </a:solidFill>
+          </a:ln>
+        </p:spPr>
         <p:txBody>
-          <a:bodyPr/>
+          <a:bodyPr>
+            <a:normAutofit fontScale="92500" lnSpcReduction="10000"/>
+          </a:bodyPr>
           <a:lstStyle/>
           <a:p>
-            <a:endParaRPr lang="en-US"/>
+            <a:pPr marL="115888" indent="-115888"/>
+            <a:r>
+              <a:rPr lang="en-US" sz="1100" dirty="0"/>
+              <a:t>Convert sas7bdat to </a:t>
+            </a:r>
+            <a:r>
+              <a:rPr lang="en-US" sz="1100" dirty="0" err="1"/>
+              <a:t>rds</a:t>
+            </a:r>
+            <a:endParaRPr lang="en-US" sz="1100" dirty="0"/>
+          </a:p>
+          <a:p>
+            <a:pPr marL="115888" indent="-115888"/>
+            <a:r>
+              <a:rPr lang="en-US" sz="1100" dirty="0"/>
+              <a:t>Import dataset</a:t>
+            </a:r>
+          </a:p>
+          <a:p>
+            <a:pPr marL="115888" indent="-115888"/>
+            <a:r>
+              <a:rPr lang="en-US" sz="1100" dirty="0"/>
+              <a:t>Data format: sas7bdat/</a:t>
+            </a:r>
+            <a:r>
+              <a:rPr lang="en-US" sz="1100" dirty="0" err="1"/>
+              <a:t>rds</a:t>
+            </a:r>
+            <a:r>
+              <a:rPr lang="en-US" sz="1100" dirty="0"/>
+              <a:t>/parquet</a:t>
+            </a:r>
+          </a:p>
+          <a:p>
+            <a:pPr marL="115888" indent="-115888"/>
+            <a:endParaRPr lang="en-US" sz="1100" dirty="0"/>
+          </a:p>
+          <a:p>
+            <a:pPr marL="115888" indent="-115888"/>
+            <a:r>
+              <a:rPr lang="en-US" sz="1100" dirty="0"/>
+              <a:t>date/month/time,</a:t>
+            </a:r>
+          </a:p>
+          <a:p>
+            <a:pPr marL="115888" indent="-115888"/>
+            <a:r>
+              <a:rPr lang="en-US" sz="1100" dirty="0"/>
+              <a:t>Origin date</a:t>
+            </a:r>
+          </a:p>
+          <a:p>
+            <a:pPr marL="115888" indent="-115888"/>
+            <a:r>
+              <a:rPr lang="en-US" sz="1100" dirty="0"/>
+              <a:t>missing values, </a:t>
+            </a:r>
+          </a:p>
+          <a:p>
+            <a:pPr marL="115888" indent="-115888"/>
+            <a:r>
+              <a:rPr lang="en-US" sz="1100" dirty="0"/>
+              <a:t>N/A </a:t>
+            </a:r>
+          </a:p>
+          <a:p>
+            <a:pPr marL="115888" indent="-115888"/>
+            <a:endParaRPr lang="en-US" sz="1100" dirty="0"/>
+          </a:p>
+          <a:p>
+            <a:pPr marL="115888" indent="-115888"/>
+            <a:r>
+              <a:rPr lang="en-US" sz="1100" dirty="0"/>
+              <a:t>Updated monthly</a:t>
+            </a:r>
+          </a:p>
+          <a:p>
+            <a:endParaRPr lang="en-US" sz="1200" dirty="0"/>
+          </a:p>
+          <a:p>
+            <a:endParaRPr lang="en-US" dirty="0"/>
+          </a:p>
+        </p:txBody>
+      </p:sp>
+      <p:sp>
+        <p:nvSpPr>
+          <p:cNvPr id="9" name="Content Placeholder 2">
+            <a:extLst>
+              <a:ext uri="{FF2B5EF4-FFF2-40B4-BE49-F238E27FC236}">
+                <a16:creationId xmlns:a16="http://schemas.microsoft.com/office/drawing/2014/main" id="{89CA6D24-3ADA-E3BB-4FBE-869EADDB6510}"/>
+              </a:ext>
+            </a:extLst>
+          </p:cNvPr>
+          <p:cNvSpPr txBox="1">
+            <a:spLocks/>
+          </p:cNvSpPr>
+          <p:nvPr/>
+        </p:nvSpPr>
+        <p:spPr>
+          <a:xfrm>
+            <a:off x="3358705" y="3429000"/>
+            <a:ext cx="2755306" cy="2722418"/>
+          </a:xfrm>
+          <a:prstGeom prst="rect">
+            <a:avLst/>
+          </a:prstGeom>
+          <a:ln>
+            <a:solidFill>
+              <a:schemeClr val="accent1"/>
+            </a:solidFill>
+          </a:ln>
+        </p:spPr>
+        <p:txBody>
+          <a:bodyPr vert="horz" lIns="91440" tIns="45720" rIns="91440" bIns="45720" rtlCol="0">
+            <a:normAutofit/>
+          </a:bodyPr>
+          <a:lstStyle>
+            <a:lvl1pPr marL="342900" indent="-342900" algn="l" defTabSz="457200" rtl="0" eaLnBrk="1" latinLnBrk="0" hangingPunct="1">
+              <a:spcBef>
+                <a:spcPts val="1000"/>
+              </a:spcBef>
+              <a:spcAft>
+                <a:spcPts val="0"/>
+              </a:spcAft>
+              <a:buClr>
+                <a:schemeClr val="accent1"/>
+              </a:buClr>
+              <a:buSzPct val="80000"/>
+              <a:buFont typeface="Wingdings 3" charset="2"/>
+              <a:buChar char=""/>
+              <a:defRPr sz="1800" b="0" i="0" kern="1200">
+                <a:solidFill>
+                  <a:schemeClr val="tx1">
+                    <a:lumMod val="75000"/>
+                    <a:lumOff val="25000"/>
+                  </a:schemeClr>
+                </a:solidFill>
+                <a:latin typeface="+mn-lt"/>
+                <a:ea typeface="+mn-ea"/>
+                <a:cs typeface="+mn-cs"/>
+              </a:defRPr>
+            </a:lvl1pPr>
+            <a:lvl2pPr marL="742950" indent="-285750" algn="l" defTabSz="457200" rtl="0" eaLnBrk="1" latinLnBrk="0" hangingPunct="1">
+              <a:spcBef>
+                <a:spcPts val="1000"/>
+              </a:spcBef>
+              <a:spcAft>
+                <a:spcPts val="0"/>
+              </a:spcAft>
+              <a:buClr>
+                <a:schemeClr val="accent1"/>
+              </a:buClr>
+              <a:buSzPct val="80000"/>
+              <a:buFont typeface="Wingdings 3" charset="2"/>
+              <a:buChar char=""/>
+              <a:defRPr sz="1600" b="0" i="0" kern="1200">
+                <a:solidFill>
+                  <a:schemeClr val="tx1">
+                    <a:lumMod val="75000"/>
+                    <a:lumOff val="25000"/>
+                  </a:schemeClr>
+                </a:solidFill>
+                <a:latin typeface="+mn-lt"/>
+                <a:ea typeface="+mn-ea"/>
+                <a:cs typeface="+mn-cs"/>
+              </a:defRPr>
+            </a:lvl2pPr>
+            <a:lvl3pPr marL="1143000" indent="-228600" algn="l" defTabSz="457200" rtl="0" eaLnBrk="1" latinLnBrk="0" hangingPunct="1">
+              <a:spcBef>
+                <a:spcPts val="1000"/>
+              </a:spcBef>
+              <a:spcAft>
+                <a:spcPts val="0"/>
+              </a:spcAft>
+              <a:buClr>
+                <a:schemeClr val="accent1"/>
+              </a:buClr>
+              <a:buSzPct val="80000"/>
+              <a:buFont typeface="Wingdings 3" charset="2"/>
+              <a:buChar char=""/>
+              <a:defRPr sz="1400" b="0" i="0" kern="1200">
+                <a:solidFill>
+                  <a:schemeClr val="tx1">
+                    <a:lumMod val="75000"/>
+                    <a:lumOff val="25000"/>
+                  </a:schemeClr>
+                </a:solidFill>
+                <a:latin typeface="+mn-lt"/>
+                <a:ea typeface="+mn-ea"/>
+                <a:cs typeface="+mn-cs"/>
+              </a:defRPr>
+            </a:lvl3pPr>
+            <a:lvl4pPr marL="1600200" indent="-228600" algn="l" defTabSz="457200" rtl="0" eaLnBrk="1" latinLnBrk="0" hangingPunct="1">
+              <a:spcBef>
+                <a:spcPts val="1000"/>
+              </a:spcBef>
+              <a:spcAft>
+                <a:spcPts val="0"/>
+              </a:spcAft>
+              <a:buClr>
+                <a:schemeClr val="accent1"/>
+              </a:buClr>
+              <a:buSzPct val="80000"/>
+              <a:buFont typeface="Wingdings 3" charset="2"/>
+              <a:buChar char=""/>
+              <a:defRPr sz="1200" b="0" i="0" kern="1200">
+                <a:solidFill>
+                  <a:schemeClr val="tx1">
+                    <a:lumMod val="75000"/>
+                    <a:lumOff val="25000"/>
+                  </a:schemeClr>
+                </a:solidFill>
+                <a:latin typeface="+mn-lt"/>
+                <a:ea typeface="+mn-ea"/>
+                <a:cs typeface="+mn-cs"/>
+              </a:defRPr>
+            </a:lvl4pPr>
+            <a:lvl5pPr marL="2057400" indent="-228600" algn="l" defTabSz="457200" rtl="0" eaLnBrk="1" latinLnBrk="0" hangingPunct="1">
+              <a:spcBef>
+                <a:spcPts val="1000"/>
+              </a:spcBef>
+              <a:spcAft>
+                <a:spcPts val="0"/>
+              </a:spcAft>
+              <a:buClr>
+                <a:schemeClr val="accent1"/>
+              </a:buClr>
+              <a:buSzPct val="80000"/>
+              <a:buFont typeface="Wingdings 3" charset="2"/>
+              <a:buChar char=""/>
+              <a:defRPr sz="1200" b="0" i="0" kern="1200">
+                <a:solidFill>
+                  <a:schemeClr val="tx1">
+                    <a:lumMod val="75000"/>
+                    <a:lumOff val="25000"/>
+                  </a:schemeClr>
+                </a:solidFill>
+                <a:latin typeface="+mn-lt"/>
+                <a:ea typeface="+mn-ea"/>
+                <a:cs typeface="+mn-cs"/>
+              </a:defRPr>
+            </a:lvl5pPr>
+            <a:lvl6pPr marL="2514600" indent="-228600" algn="l" defTabSz="457200" rtl="0" eaLnBrk="1" latinLnBrk="0" hangingPunct="1">
+              <a:spcBef>
+                <a:spcPts val="1000"/>
+              </a:spcBef>
+              <a:spcAft>
+                <a:spcPts val="0"/>
+              </a:spcAft>
+              <a:buClr>
+                <a:schemeClr val="accent1"/>
+              </a:buClr>
+              <a:buSzPct val="80000"/>
+              <a:buFont typeface="Wingdings 3" charset="2"/>
+              <a:buChar char=""/>
+              <a:defRPr sz="1200" b="0" i="0" kern="1200">
+                <a:solidFill>
+                  <a:schemeClr val="tx1">
+                    <a:lumMod val="75000"/>
+                    <a:lumOff val="25000"/>
+                  </a:schemeClr>
+                </a:solidFill>
+                <a:latin typeface="+mn-lt"/>
+                <a:ea typeface="+mn-ea"/>
+                <a:cs typeface="+mn-cs"/>
+              </a:defRPr>
+            </a:lvl6pPr>
+            <a:lvl7pPr marL="2971800" indent="-228600" algn="l" defTabSz="457200" rtl="0" eaLnBrk="1" latinLnBrk="0" hangingPunct="1">
+              <a:spcBef>
+                <a:spcPts val="1000"/>
+              </a:spcBef>
+              <a:spcAft>
+                <a:spcPts val="0"/>
+              </a:spcAft>
+              <a:buClr>
+                <a:schemeClr val="accent1"/>
+              </a:buClr>
+              <a:buSzPct val="80000"/>
+              <a:buFont typeface="Wingdings 3" charset="2"/>
+              <a:buChar char=""/>
+              <a:defRPr sz="1200" b="0" i="0" kern="1200">
+                <a:solidFill>
+                  <a:schemeClr val="tx1">
+                    <a:lumMod val="75000"/>
+                    <a:lumOff val="25000"/>
+                  </a:schemeClr>
+                </a:solidFill>
+                <a:latin typeface="+mn-lt"/>
+                <a:ea typeface="+mn-ea"/>
+                <a:cs typeface="+mn-cs"/>
+              </a:defRPr>
+            </a:lvl7pPr>
+            <a:lvl8pPr marL="3429000" indent="-228600" algn="l" defTabSz="457200" rtl="0" eaLnBrk="1" latinLnBrk="0" hangingPunct="1">
+              <a:spcBef>
+                <a:spcPts val="1000"/>
+              </a:spcBef>
+              <a:spcAft>
+                <a:spcPts val="0"/>
+              </a:spcAft>
+              <a:buClr>
+                <a:schemeClr val="accent1"/>
+              </a:buClr>
+              <a:buSzPct val="80000"/>
+              <a:buFont typeface="Wingdings 3" charset="2"/>
+              <a:buChar char=""/>
+              <a:defRPr sz="1200" b="0" i="0" kern="1200">
+                <a:solidFill>
+                  <a:schemeClr val="tx1">
+                    <a:lumMod val="75000"/>
+                    <a:lumOff val="25000"/>
+                  </a:schemeClr>
+                </a:solidFill>
+                <a:latin typeface="+mn-lt"/>
+                <a:ea typeface="+mn-ea"/>
+                <a:cs typeface="+mn-cs"/>
+              </a:defRPr>
+            </a:lvl8pPr>
+            <a:lvl9pPr marL="3886200" indent="-228600" algn="l" defTabSz="457200" rtl="0" eaLnBrk="1" latinLnBrk="0" hangingPunct="1">
+              <a:spcBef>
+                <a:spcPts val="1000"/>
+              </a:spcBef>
+              <a:spcAft>
+                <a:spcPts val="0"/>
+              </a:spcAft>
+              <a:buClr>
+                <a:schemeClr val="accent1"/>
+              </a:buClr>
+              <a:buSzPct val="80000"/>
+              <a:buFont typeface="Wingdings 3" charset="2"/>
+              <a:buChar char=""/>
+              <a:defRPr sz="1200" b="0" i="0" kern="1200">
+                <a:solidFill>
+                  <a:schemeClr val="tx1">
+                    <a:lumMod val="75000"/>
+                    <a:lumOff val="25000"/>
+                  </a:schemeClr>
+                </a:solidFill>
+                <a:latin typeface="+mn-lt"/>
+                <a:ea typeface="+mn-ea"/>
+                <a:cs typeface="+mn-cs"/>
+              </a:defRPr>
+            </a:lvl9pPr>
+          </a:lstStyle>
+          <a:p>
+            <a:pPr marL="115888" indent="-115888"/>
+            <a:r>
+              <a:rPr lang="en-US" sz="1100" dirty="0"/>
+              <a:t>Variables: filter data </a:t>
+            </a:r>
+          </a:p>
+          <a:p>
+            <a:pPr marL="115888" indent="-115888"/>
+            <a:r>
+              <a:rPr lang="en-US" sz="1100" dirty="0"/>
+              <a:t>merge tables</a:t>
+            </a:r>
+          </a:p>
+          <a:p>
+            <a:pPr marL="515938" lvl="1" indent="-115888"/>
+            <a:r>
+              <a:rPr lang="en-US" sz="900" dirty="0"/>
+              <a:t>Concatenate</a:t>
+            </a:r>
+          </a:p>
+          <a:p>
+            <a:pPr marL="515938" lvl="1" indent="-115888"/>
+            <a:r>
+              <a:rPr lang="en-US" sz="900" dirty="0"/>
+              <a:t>match merging (with n= dataset option)</a:t>
+            </a:r>
+          </a:p>
+          <a:p>
+            <a:pPr marL="515938" lvl="1" indent="-115888"/>
+            <a:r>
+              <a:rPr lang="en-US" sz="900" dirty="0"/>
+              <a:t>match merging (if a and b)</a:t>
+            </a:r>
+          </a:p>
+          <a:p>
+            <a:pPr marL="115888" indent="-115888"/>
+            <a:r>
+              <a:rPr lang="en-US" sz="1100" dirty="0"/>
+              <a:t>Loops: </a:t>
+            </a:r>
+          </a:p>
+          <a:p>
+            <a:pPr marL="515938" lvl="1" indent="-115888"/>
+            <a:r>
+              <a:rPr lang="en-US" sz="900" dirty="0"/>
+              <a:t>do until</a:t>
+            </a:r>
+          </a:p>
+          <a:p>
+            <a:pPr marL="515938" lvl="1" indent="-115888"/>
+            <a:r>
+              <a:rPr lang="en-US" sz="900" dirty="0"/>
+              <a:t>Nested do loops</a:t>
+            </a:r>
+          </a:p>
+          <a:p>
+            <a:endParaRPr lang="en-US" sz="1200" dirty="0"/>
+          </a:p>
+          <a:p>
+            <a:endParaRPr lang="en-US" dirty="0"/>
+          </a:p>
+        </p:txBody>
+      </p:sp>
+      <p:sp>
+        <p:nvSpPr>
+          <p:cNvPr id="10" name="Content Placeholder 2">
+            <a:extLst>
+              <a:ext uri="{FF2B5EF4-FFF2-40B4-BE49-F238E27FC236}">
+                <a16:creationId xmlns:a16="http://schemas.microsoft.com/office/drawing/2014/main" id="{0B6D6B54-A311-EB16-8BD2-E3485F3BBABB}"/>
+              </a:ext>
+            </a:extLst>
+          </p:cNvPr>
+          <p:cNvSpPr txBox="1">
+            <a:spLocks/>
+          </p:cNvSpPr>
+          <p:nvPr/>
+        </p:nvSpPr>
+        <p:spPr>
+          <a:xfrm>
+            <a:off x="6400800" y="3429000"/>
+            <a:ext cx="2435629" cy="2722418"/>
+          </a:xfrm>
+          <a:prstGeom prst="rect">
+            <a:avLst/>
+          </a:prstGeom>
+          <a:ln>
+            <a:solidFill>
+              <a:schemeClr val="accent1"/>
+            </a:solidFill>
+          </a:ln>
+        </p:spPr>
+        <p:txBody>
+          <a:bodyPr vert="horz" lIns="91440" tIns="45720" rIns="91440" bIns="45720" rtlCol="0">
+            <a:normAutofit/>
+          </a:bodyPr>
+          <a:lstStyle>
+            <a:lvl1pPr marL="342900" indent="-342900" algn="l" defTabSz="457200" rtl="0" eaLnBrk="1" latinLnBrk="0" hangingPunct="1">
+              <a:spcBef>
+                <a:spcPts val="1000"/>
+              </a:spcBef>
+              <a:spcAft>
+                <a:spcPts val="0"/>
+              </a:spcAft>
+              <a:buClr>
+                <a:schemeClr val="accent1"/>
+              </a:buClr>
+              <a:buSzPct val="80000"/>
+              <a:buFont typeface="Wingdings 3" charset="2"/>
+              <a:buChar char=""/>
+              <a:defRPr sz="1800" b="0" i="0" kern="1200">
+                <a:solidFill>
+                  <a:schemeClr val="tx1">
+                    <a:lumMod val="75000"/>
+                    <a:lumOff val="25000"/>
+                  </a:schemeClr>
+                </a:solidFill>
+                <a:latin typeface="+mn-lt"/>
+                <a:ea typeface="+mn-ea"/>
+                <a:cs typeface="+mn-cs"/>
+              </a:defRPr>
+            </a:lvl1pPr>
+            <a:lvl2pPr marL="742950" indent="-285750" algn="l" defTabSz="457200" rtl="0" eaLnBrk="1" latinLnBrk="0" hangingPunct="1">
+              <a:spcBef>
+                <a:spcPts val="1000"/>
+              </a:spcBef>
+              <a:spcAft>
+                <a:spcPts val="0"/>
+              </a:spcAft>
+              <a:buClr>
+                <a:schemeClr val="accent1"/>
+              </a:buClr>
+              <a:buSzPct val="80000"/>
+              <a:buFont typeface="Wingdings 3" charset="2"/>
+              <a:buChar char=""/>
+              <a:defRPr sz="1600" b="0" i="0" kern="1200">
+                <a:solidFill>
+                  <a:schemeClr val="tx1">
+                    <a:lumMod val="75000"/>
+                    <a:lumOff val="25000"/>
+                  </a:schemeClr>
+                </a:solidFill>
+                <a:latin typeface="+mn-lt"/>
+                <a:ea typeface="+mn-ea"/>
+                <a:cs typeface="+mn-cs"/>
+              </a:defRPr>
+            </a:lvl2pPr>
+            <a:lvl3pPr marL="1143000" indent="-228600" algn="l" defTabSz="457200" rtl="0" eaLnBrk="1" latinLnBrk="0" hangingPunct="1">
+              <a:spcBef>
+                <a:spcPts val="1000"/>
+              </a:spcBef>
+              <a:spcAft>
+                <a:spcPts val="0"/>
+              </a:spcAft>
+              <a:buClr>
+                <a:schemeClr val="accent1"/>
+              </a:buClr>
+              <a:buSzPct val="80000"/>
+              <a:buFont typeface="Wingdings 3" charset="2"/>
+              <a:buChar char=""/>
+              <a:defRPr sz="1400" b="0" i="0" kern="1200">
+                <a:solidFill>
+                  <a:schemeClr val="tx1">
+                    <a:lumMod val="75000"/>
+                    <a:lumOff val="25000"/>
+                  </a:schemeClr>
+                </a:solidFill>
+                <a:latin typeface="+mn-lt"/>
+                <a:ea typeface="+mn-ea"/>
+                <a:cs typeface="+mn-cs"/>
+              </a:defRPr>
+            </a:lvl3pPr>
+            <a:lvl4pPr marL="1600200" indent="-228600" algn="l" defTabSz="457200" rtl="0" eaLnBrk="1" latinLnBrk="0" hangingPunct="1">
+              <a:spcBef>
+                <a:spcPts val="1000"/>
+              </a:spcBef>
+              <a:spcAft>
+                <a:spcPts val="0"/>
+              </a:spcAft>
+              <a:buClr>
+                <a:schemeClr val="accent1"/>
+              </a:buClr>
+              <a:buSzPct val="80000"/>
+              <a:buFont typeface="Wingdings 3" charset="2"/>
+              <a:buChar char=""/>
+              <a:defRPr sz="1200" b="0" i="0" kern="1200">
+                <a:solidFill>
+                  <a:schemeClr val="tx1">
+                    <a:lumMod val="75000"/>
+                    <a:lumOff val="25000"/>
+                  </a:schemeClr>
+                </a:solidFill>
+                <a:latin typeface="+mn-lt"/>
+                <a:ea typeface="+mn-ea"/>
+                <a:cs typeface="+mn-cs"/>
+              </a:defRPr>
+            </a:lvl4pPr>
+            <a:lvl5pPr marL="2057400" indent="-228600" algn="l" defTabSz="457200" rtl="0" eaLnBrk="1" latinLnBrk="0" hangingPunct="1">
+              <a:spcBef>
+                <a:spcPts val="1000"/>
+              </a:spcBef>
+              <a:spcAft>
+                <a:spcPts val="0"/>
+              </a:spcAft>
+              <a:buClr>
+                <a:schemeClr val="accent1"/>
+              </a:buClr>
+              <a:buSzPct val="80000"/>
+              <a:buFont typeface="Wingdings 3" charset="2"/>
+              <a:buChar char=""/>
+              <a:defRPr sz="1200" b="0" i="0" kern="1200">
+                <a:solidFill>
+                  <a:schemeClr val="tx1">
+                    <a:lumMod val="75000"/>
+                    <a:lumOff val="25000"/>
+                  </a:schemeClr>
+                </a:solidFill>
+                <a:latin typeface="+mn-lt"/>
+                <a:ea typeface="+mn-ea"/>
+                <a:cs typeface="+mn-cs"/>
+              </a:defRPr>
+            </a:lvl5pPr>
+            <a:lvl6pPr marL="2514600" indent="-228600" algn="l" defTabSz="457200" rtl="0" eaLnBrk="1" latinLnBrk="0" hangingPunct="1">
+              <a:spcBef>
+                <a:spcPts val="1000"/>
+              </a:spcBef>
+              <a:spcAft>
+                <a:spcPts val="0"/>
+              </a:spcAft>
+              <a:buClr>
+                <a:schemeClr val="accent1"/>
+              </a:buClr>
+              <a:buSzPct val="80000"/>
+              <a:buFont typeface="Wingdings 3" charset="2"/>
+              <a:buChar char=""/>
+              <a:defRPr sz="1200" b="0" i="0" kern="1200">
+                <a:solidFill>
+                  <a:schemeClr val="tx1">
+                    <a:lumMod val="75000"/>
+                    <a:lumOff val="25000"/>
+                  </a:schemeClr>
+                </a:solidFill>
+                <a:latin typeface="+mn-lt"/>
+                <a:ea typeface="+mn-ea"/>
+                <a:cs typeface="+mn-cs"/>
+              </a:defRPr>
+            </a:lvl6pPr>
+            <a:lvl7pPr marL="2971800" indent="-228600" algn="l" defTabSz="457200" rtl="0" eaLnBrk="1" latinLnBrk="0" hangingPunct="1">
+              <a:spcBef>
+                <a:spcPts val="1000"/>
+              </a:spcBef>
+              <a:spcAft>
+                <a:spcPts val="0"/>
+              </a:spcAft>
+              <a:buClr>
+                <a:schemeClr val="accent1"/>
+              </a:buClr>
+              <a:buSzPct val="80000"/>
+              <a:buFont typeface="Wingdings 3" charset="2"/>
+              <a:buChar char=""/>
+              <a:defRPr sz="1200" b="0" i="0" kern="1200">
+                <a:solidFill>
+                  <a:schemeClr val="tx1">
+                    <a:lumMod val="75000"/>
+                    <a:lumOff val="25000"/>
+                  </a:schemeClr>
+                </a:solidFill>
+                <a:latin typeface="+mn-lt"/>
+                <a:ea typeface="+mn-ea"/>
+                <a:cs typeface="+mn-cs"/>
+              </a:defRPr>
+            </a:lvl7pPr>
+            <a:lvl8pPr marL="3429000" indent="-228600" algn="l" defTabSz="457200" rtl="0" eaLnBrk="1" latinLnBrk="0" hangingPunct="1">
+              <a:spcBef>
+                <a:spcPts val="1000"/>
+              </a:spcBef>
+              <a:spcAft>
+                <a:spcPts val="0"/>
+              </a:spcAft>
+              <a:buClr>
+                <a:schemeClr val="accent1"/>
+              </a:buClr>
+              <a:buSzPct val="80000"/>
+              <a:buFont typeface="Wingdings 3" charset="2"/>
+              <a:buChar char=""/>
+              <a:defRPr sz="1200" b="0" i="0" kern="1200">
+                <a:solidFill>
+                  <a:schemeClr val="tx1">
+                    <a:lumMod val="75000"/>
+                    <a:lumOff val="25000"/>
+                  </a:schemeClr>
+                </a:solidFill>
+                <a:latin typeface="+mn-lt"/>
+                <a:ea typeface="+mn-ea"/>
+                <a:cs typeface="+mn-cs"/>
+              </a:defRPr>
+            </a:lvl8pPr>
+            <a:lvl9pPr marL="3886200" indent="-228600" algn="l" defTabSz="457200" rtl="0" eaLnBrk="1" latinLnBrk="0" hangingPunct="1">
+              <a:spcBef>
+                <a:spcPts val="1000"/>
+              </a:spcBef>
+              <a:spcAft>
+                <a:spcPts val="0"/>
+              </a:spcAft>
+              <a:buClr>
+                <a:schemeClr val="accent1"/>
+              </a:buClr>
+              <a:buSzPct val="80000"/>
+              <a:buFont typeface="Wingdings 3" charset="2"/>
+              <a:buChar char=""/>
+              <a:defRPr sz="1200" b="0" i="0" kern="1200">
+                <a:solidFill>
+                  <a:schemeClr val="tx1">
+                    <a:lumMod val="75000"/>
+                    <a:lumOff val="25000"/>
+                  </a:schemeClr>
+                </a:solidFill>
+                <a:latin typeface="+mn-lt"/>
+                <a:ea typeface="+mn-ea"/>
+                <a:cs typeface="+mn-cs"/>
+              </a:defRPr>
+            </a:lvl9pPr>
+          </a:lstStyle>
+          <a:p>
+            <a:pPr marL="115888" indent="-115888"/>
+            <a:r>
+              <a:rPr lang="en-US" sz="1200" dirty="0"/>
+              <a:t>Spline in Linear/logistic regression</a:t>
+            </a:r>
+          </a:p>
+          <a:p>
+            <a:pPr marL="115888" indent="-115888"/>
+            <a:r>
+              <a:rPr lang="en-US" sz="1200" dirty="0"/>
+              <a:t>Two step regression</a:t>
+            </a:r>
+          </a:p>
+          <a:p>
+            <a:endParaRPr lang="en-US" sz="1200" dirty="0"/>
+          </a:p>
+          <a:p>
+            <a:endParaRPr lang="en-US" dirty="0"/>
+          </a:p>
+        </p:txBody>
+      </p:sp>
+      <p:graphicFrame>
+        <p:nvGraphicFramePr>
+          <p:cNvPr id="11" name="Content Placeholder 9">
+            <a:extLst>
+              <a:ext uri="{FF2B5EF4-FFF2-40B4-BE49-F238E27FC236}">
+                <a16:creationId xmlns:a16="http://schemas.microsoft.com/office/drawing/2014/main" id="{4207582E-C159-7D00-332B-C4D21A4671D1}"/>
+              </a:ext>
+            </a:extLst>
+          </p:cNvPr>
+          <p:cNvGraphicFramePr>
+            <a:graphicFrameLocks/>
+          </p:cNvGraphicFramePr>
+          <p:nvPr>
+            <p:extLst>
+              <p:ext uri="{D42A27DB-BD31-4B8C-83A1-F6EECF244321}">
+                <p14:modId xmlns:p14="http://schemas.microsoft.com/office/powerpoint/2010/main" val="715554497"/>
+              </p:ext>
+            </p:extLst>
+          </p:nvPr>
+        </p:nvGraphicFramePr>
+        <p:xfrm>
+          <a:off x="498764" y="2292926"/>
+          <a:ext cx="11230494" cy="1136074"/>
+        </p:xfrm>
+        <a:graphic>
+          <a:graphicData uri="http://schemas.openxmlformats.org/drawingml/2006/diagram">
+            <dgm:relIds xmlns:dgm="http://schemas.openxmlformats.org/drawingml/2006/diagram" xmlns:r="http://schemas.openxmlformats.org/officeDocument/2006/relationships" r:dm="rId2" r:lo="rId3" r:qs="rId4" r:cs="rId5"/>
+          </a:graphicData>
+        </a:graphic>
+      </p:graphicFrame>
+      <p:sp>
+        <p:nvSpPr>
+          <p:cNvPr id="12" name="Content Placeholder 2">
+            <a:extLst>
+              <a:ext uri="{FF2B5EF4-FFF2-40B4-BE49-F238E27FC236}">
+                <a16:creationId xmlns:a16="http://schemas.microsoft.com/office/drawing/2014/main" id="{7FA28388-176F-6365-7397-2844E903A1F6}"/>
+              </a:ext>
+            </a:extLst>
+          </p:cNvPr>
+          <p:cNvSpPr txBox="1">
+            <a:spLocks/>
+          </p:cNvSpPr>
+          <p:nvPr/>
+        </p:nvSpPr>
+        <p:spPr>
+          <a:xfrm>
+            <a:off x="9320313" y="3429000"/>
+            <a:ext cx="2372924" cy="2722418"/>
+          </a:xfrm>
+          <a:prstGeom prst="rect">
+            <a:avLst/>
+          </a:prstGeom>
+          <a:ln>
+            <a:solidFill>
+              <a:schemeClr val="accent1"/>
+            </a:solidFill>
+          </a:ln>
+        </p:spPr>
+        <p:txBody>
+          <a:bodyPr vert="horz" lIns="91440" tIns="45720" rIns="91440" bIns="45720" rtlCol="0">
+            <a:normAutofit/>
+          </a:bodyPr>
+          <a:lstStyle>
+            <a:lvl1pPr marL="342900" indent="-342900" algn="l" defTabSz="457200" rtl="0" eaLnBrk="1" latinLnBrk="0" hangingPunct="1">
+              <a:spcBef>
+                <a:spcPts val="1000"/>
+              </a:spcBef>
+              <a:spcAft>
+                <a:spcPts val="0"/>
+              </a:spcAft>
+              <a:buClr>
+                <a:schemeClr val="accent1"/>
+              </a:buClr>
+              <a:buSzPct val="80000"/>
+              <a:buFont typeface="Wingdings 3" charset="2"/>
+              <a:buChar char=""/>
+              <a:defRPr sz="1800" b="0" i="0" kern="1200">
+                <a:solidFill>
+                  <a:schemeClr val="tx1">
+                    <a:lumMod val="75000"/>
+                    <a:lumOff val="25000"/>
+                  </a:schemeClr>
+                </a:solidFill>
+                <a:latin typeface="+mn-lt"/>
+                <a:ea typeface="+mn-ea"/>
+                <a:cs typeface="+mn-cs"/>
+              </a:defRPr>
+            </a:lvl1pPr>
+            <a:lvl2pPr marL="742950" indent="-285750" algn="l" defTabSz="457200" rtl="0" eaLnBrk="1" latinLnBrk="0" hangingPunct="1">
+              <a:spcBef>
+                <a:spcPts val="1000"/>
+              </a:spcBef>
+              <a:spcAft>
+                <a:spcPts val="0"/>
+              </a:spcAft>
+              <a:buClr>
+                <a:schemeClr val="accent1"/>
+              </a:buClr>
+              <a:buSzPct val="80000"/>
+              <a:buFont typeface="Wingdings 3" charset="2"/>
+              <a:buChar char=""/>
+              <a:defRPr sz="1600" b="0" i="0" kern="1200">
+                <a:solidFill>
+                  <a:schemeClr val="tx1">
+                    <a:lumMod val="75000"/>
+                    <a:lumOff val="25000"/>
+                  </a:schemeClr>
+                </a:solidFill>
+                <a:latin typeface="+mn-lt"/>
+                <a:ea typeface="+mn-ea"/>
+                <a:cs typeface="+mn-cs"/>
+              </a:defRPr>
+            </a:lvl2pPr>
+            <a:lvl3pPr marL="1143000" indent="-228600" algn="l" defTabSz="457200" rtl="0" eaLnBrk="1" latinLnBrk="0" hangingPunct="1">
+              <a:spcBef>
+                <a:spcPts val="1000"/>
+              </a:spcBef>
+              <a:spcAft>
+                <a:spcPts val="0"/>
+              </a:spcAft>
+              <a:buClr>
+                <a:schemeClr val="accent1"/>
+              </a:buClr>
+              <a:buSzPct val="80000"/>
+              <a:buFont typeface="Wingdings 3" charset="2"/>
+              <a:buChar char=""/>
+              <a:defRPr sz="1400" b="0" i="0" kern="1200">
+                <a:solidFill>
+                  <a:schemeClr val="tx1">
+                    <a:lumMod val="75000"/>
+                    <a:lumOff val="25000"/>
+                  </a:schemeClr>
+                </a:solidFill>
+                <a:latin typeface="+mn-lt"/>
+                <a:ea typeface="+mn-ea"/>
+                <a:cs typeface="+mn-cs"/>
+              </a:defRPr>
+            </a:lvl3pPr>
+            <a:lvl4pPr marL="1600200" indent="-228600" algn="l" defTabSz="457200" rtl="0" eaLnBrk="1" latinLnBrk="0" hangingPunct="1">
+              <a:spcBef>
+                <a:spcPts val="1000"/>
+              </a:spcBef>
+              <a:spcAft>
+                <a:spcPts val="0"/>
+              </a:spcAft>
+              <a:buClr>
+                <a:schemeClr val="accent1"/>
+              </a:buClr>
+              <a:buSzPct val="80000"/>
+              <a:buFont typeface="Wingdings 3" charset="2"/>
+              <a:buChar char=""/>
+              <a:defRPr sz="1200" b="0" i="0" kern="1200">
+                <a:solidFill>
+                  <a:schemeClr val="tx1">
+                    <a:lumMod val="75000"/>
+                    <a:lumOff val="25000"/>
+                  </a:schemeClr>
+                </a:solidFill>
+                <a:latin typeface="+mn-lt"/>
+                <a:ea typeface="+mn-ea"/>
+                <a:cs typeface="+mn-cs"/>
+              </a:defRPr>
+            </a:lvl4pPr>
+            <a:lvl5pPr marL="2057400" indent="-228600" algn="l" defTabSz="457200" rtl="0" eaLnBrk="1" latinLnBrk="0" hangingPunct="1">
+              <a:spcBef>
+                <a:spcPts val="1000"/>
+              </a:spcBef>
+              <a:spcAft>
+                <a:spcPts val="0"/>
+              </a:spcAft>
+              <a:buClr>
+                <a:schemeClr val="accent1"/>
+              </a:buClr>
+              <a:buSzPct val="80000"/>
+              <a:buFont typeface="Wingdings 3" charset="2"/>
+              <a:buChar char=""/>
+              <a:defRPr sz="1200" b="0" i="0" kern="1200">
+                <a:solidFill>
+                  <a:schemeClr val="tx1">
+                    <a:lumMod val="75000"/>
+                    <a:lumOff val="25000"/>
+                  </a:schemeClr>
+                </a:solidFill>
+                <a:latin typeface="+mn-lt"/>
+                <a:ea typeface="+mn-ea"/>
+                <a:cs typeface="+mn-cs"/>
+              </a:defRPr>
+            </a:lvl5pPr>
+            <a:lvl6pPr marL="2514600" indent="-228600" algn="l" defTabSz="457200" rtl="0" eaLnBrk="1" latinLnBrk="0" hangingPunct="1">
+              <a:spcBef>
+                <a:spcPts val="1000"/>
+              </a:spcBef>
+              <a:spcAft>
+                <a:spcPts val="0"/>
+              </a:spcAft>
+              <a:buClr>
+                <a:schemeClr val="accent1"/>
+              </a:buClr>
+              <a:buSzPct val="80000"/>
+              <a:buFont typeface="Wingdings 3" charset="2"/>
+              <a:buChar char=""/>
+              <a:defRPr sz="1200" b="0" i="0" kern="1200">
+                <a:solidFill>
+                  <a:schemeClr val="tx1">
+                    <a:lumMod val="75000"/>
+                    <a:lumOff val="25000"/>
+                  </a:schemeClr>
+                </a:solidFill>
+                <a:latin typeface="+mn-lt"/>
+                <a:ea typeface="+mn-ea"/>
+                <a:cs typeface="+mn-cs"/>
+              </a:defRPr>
+            </a:lvl6pPr>
+            <a:lvl7pPr marL="2971800" indent="-228600" algn="l" defTabSz="457200" rtl="0" eaLnBrk="1" latinLnBrk="0" hangingPunct="1">
+              <a:spcBef>
+                <a:spcPts val="1000"/>
+              </a:spcBef>
+              <a:spcAft>
+                <a:spcPts val="0"/>
+              </a:spcAft>
+              <a:buClr>
+                <a:schemeClr val="accent1"/>
+              </a:buClr>
+              <a:buSzPct val="80000"/>
+              <a:buFont typeface="Wingdings 3" charset="2"/>
+              <a:buChar char=""/>
+              <a:defRPr sz="1200" b="0" i="0" kern="1200">
+                <a:solidFill>
+                  <a:schemeClr val="tx1">
+                    <a:lumMod val="75000"/>
+                    <a:lumOff val="25000"/>
+                  </a:schemeClr>
+                </a:solidFill>
+                <a:latin typeface="+mn-lt"/>
+                <a:ea typeface="+mn-ea"/>
+                <a:cs typeface="+mn-cs"/>
+              </a:defRPr>
+            </a:lvl7pPr>
+            <a:lvl8pPr marL="3429000" indent="-228600" algn="l" defTabSz="457200" rtl="0" eaLnBrk="1" latinLnBrk="0" hangingPunct="1">
+              <a:spcBef>
+                <a:spcPts val="1000"/>
+              </a:spcBef>
+              <a:spcAft>
+                <a:spcPts val="0"/>
+              </a:spcAft>
+              <a:buClr>
+                <a:schemeClr val="accent1"/>
+              </a:buClr>
+              <a:buSzPct val="80000"/>
+              <a:buFont typeface="Wingdings 3" charset="2"/>
+              <a:buChar char=""/>
+              <a:defRPr sz="1200" b="0" i="0" kern="1200">
+                <a:solidFill>
+                  <a:schemeClr val="tx1">
+                    <a:lumMod val="75000"/>
+                    <a:lumOff val="25000"/>
+                  </a:schemeClr>
+                </a:solidFill>
+                <a:latin typeface="+mn-lt"/>
+                <a:ea typeface="+mn-ea"/>
+                <a:cs typeface="+mn-cs"/>
+              </a:defRPr>
+            </a:lvl8pPr>
+            <a:lvl9pPr marL="3886200" indent="-228600" algn="l" defTabSz="457200" rtl="0" eaLnBrk="1" latinLnBrk="0" hangingPunct="1">
+              <a:spcBef>
+                <a:spcPts val="1000"/>
+              </a:spcBef>
+              <a:spcAft>
+                <a:spcPts val="0"/>
+              </a:spcAft>
+              <a:buClr>
+                <a:schemeClr val="accent1"/>
+              </a:buClr>
+              <a:buSzPct val="80000"/>
+              <a:buFont typeface="Wingdings 3" charset="2"/>
+              <a:buChar char=""/>
+              <a:defRPr sz="1200" b="0" i="0" kern="1200">
+                <a:solidFill>
+                  <a:schemeClr val="tx1">
+                    <a:lumMod val="75000"/>
+                    <a:lumOff val="25000"/>
+                  </a:schemeClr>
+                </a:solidFill>
+                <a:latin typeface="+mn-lt"/>
+                <a:ea typeface="+mn-ea"/>
+                <a:cs typeface="+mn-cs"/>
+              </a:defRPr>
+            </a:lvl9pPr>
+          </a:lstStyle>
+          <a:p>
+            <a:pPr marL="115888" indent="-115888"/>
+            <a:r>
+              <a:rPr lang="en-US" sz="1200" dirty="0"/>
+              <a:t>Comparison </a:t>
+            </a:r>
+          </a:p>
+          <a:p>
+            <a:pPr marL="115888" indent="-115888"/>
+            <a:r>
+              <a:rPr lang="en-US" sz="1200" dirty="0"/>
+              <a:t>Explanations</a:t>
+            </a:r>
+          </a:p>
+          <a:p>
+            <a:pPr marL="115888" indent="-115888"/>
+            <a:r>
+              <a:rPr lang="en-US" sz="1200" dirty="0"/>
+              <a:t>Tables: modify R outputs</a:t>
+            </a:r>
+          </a:p>
+          <a:p>
+            <a:endParaRPr lang="en-US" dirty="0"/>
+          </a:p>
+        </p:txBody>
+      </p:sp>
+      <p:sp>
+        <p:nvSpPr>
+          <p:cNvPr id="4" name="TextBox 3">
+            <a:extLst>
+              <a:ext uri="{FF2B5EF4-FFF2-40B4-BE49-F238E27FC236}">
+                <a16:creationId xmlns:a16="http://schemas.microsoft.com/office/drawing/2014/main" id="{157131A5-54F0-841D-69D4-7EEE7184D6DB}"/>
+              </a:ext>
+            </a:extLst>
+          </p:cNvPr>
+          <p:cNvSpPr txBox="1"/>
+          <p:nvPr/>
+        </p:nvSpPr>
+        <p:spPr>
+          <a:xfrm>
+            <a:off x="8318270" y="6642556"/>
+            <a:ext cx="3873730" cy="215444"/>
+          </a:xfrm>
+          <a:prstGeom prst="rect">
+            <a:avLst/>
+          </a:prstGeom>
+          <a:noFill/>
+        </p:spPr>
+        <p:txBody>
+          <a:bodyPr wrap="square" rtlCol="0">
+            <a:spAutoFit/>
+          </a:bodyPr>
+          <a:lstStyle/>
+          <a:p>
+            <a:r>
+              <a:rPr lang="en-US" sz="800" dirty="0"/>
+              <a:t>2026 Women in Statistics and Data Science Conference, Cincinnati, OH</a:t>
+            </a:r>
           </a:p>
         </p:txBody>
       </p:sp>
@@ -20929,6 +26098,1040 @@
     <p:extLst>
       <p:ext uri="{BB962C8B-B14F-4D97-AF65-F5344CB8AC3E}">
         <p14:creationId xmlns:p14="http://schemas.microsoft.com/office/powerpoint/2010/main" val="4213553775"/>
+      </p:ext>
+    </p:extLst>
+  </p:cSld>
+  <p:clrMapOvr>
+    <a:masterClrMapping/>
+  </p:clrMapOvr>
+</p:sld>
+</file>
+
+<file path=ppt/slides/slide9.xml><?xml version="1.0" encoding="utf-8"?>
+<p:sld xmlns:a="http://schemas.openxmlformats.org/drawingml/2006/main" xmlns:r="http://schemas.openxmlformats.org/officeDocument/2006/relationships" xmlns:p="http://schemas.openxmlformats.org/presentationml/2006/main">
+  <p:cSld>
+    <p:spTree>
+      <p:nvGrpSpPr>
+        <p:cNvPr id="1" name=""/>
+        <p:cNvGrpSpPr/>
+        <p:nvPr/>
+      </p:nvGrpSpPr>
+      <p:grpSpPr>
+        <a:xfrm>
+          <a:off x="0" y="0"/>
+          <a:ext cx="0" cy="0"/>
+          <a:chOff x="0" y="0"/>
+          <a:chExt cx="0" cy="0"/>
+        </a:xfrm>
+      </p:grpSpPr>
+      <p:sp>
+        <p:nvSpPr>
+          <p:cNvPr id="2" name="Title 1">
+            <a:extLst>
+              <a:ext uri="{FF2B5EF4-FFF2-40B4-BE49-F238E27FC236}">
+                <a16:creationId xmlns:a16="http://schemas.microsoft.com/office/drawing/2014/main" id="{CF9F518D-1434-AE71-CCC6-D64E06915BE2}"/>
+              </a:ext>
+            </a:extLst>
+          </p:cNvPr>
+          <p:cNvSpPr>
+            <a:spLocks noGrp="1"/>
+          </p:cNvSpPr>
+          <p:nvPr>
+            <p:ph type="title"/>
+          </p:nvPr>
+        </p:nvSpPr>
+        <p:spPr>
+          <a:xfrm>
+            <a:off x="1154954" y="973668"/>
+            <a:ext cx="10607555" cy="706964"/>
+          </a:xfrm>
+        </p:spPr>
+        <p:txBody>
+          <a:bodyPr/>
+          <a:lstStyle/>
+          <a:p>
+            <a:r>
+              <a:rPr lang="en-US" dirty="0"/>
+              <a:t>Frequently used PROC/function/libraries</a:t>
+            </a:r>
+          </a:p>
+        </p:txBody>
+      </p:sp>
+      <p:pic>
+        <p:nvPicPr>
+          <p:cNvPr id="4" name="Content Placeholder 3">
+            <a:extLst>
+              <a:ext uri="{FF2B5EF4-FFF2-40B4-BE49-F238E27FC236}">
+                <a16:creationId xmlns:a16="http://schemas.microsoft.com/office/drawing/2014/main" id="{CBA42F75-680C-A81B-84A0-DA0E40F258FB}"/>
+              </a:ext>
+            </a:extLst>
+          </p:cNvPr>
+          <p:cNvPicPr>
+            <a:picLocks noGrp="1" noChangeAspect="1"/>
+          </p:cNvPicPr>
+          <p:nvPr>
+            <p:ph idx="1"/>
+          </p:nvPr>
+        </p:nvPicPr>
+        <p:blipFill>
+          <a:blip r:embed="rId2"/>
+          <a:stretch>
+            <a:fillRect/>
+          </a:stretch>
+        </p:blipFill>
+        <p:spPr>
+          <a:xfrm>
+            <a:off x="726399" y="2509751"/>
+            <a:ext cx="1626104" cy="666703"/>
+          </a:xfrm>
+          <a:prstGeom prst="rect">
+            <a:avLst/>
+          </a:prstGeom>
+        </p:spPr>
+      </p:pic>
+      <p:pic>
+        <p:nvPicPr>
+          <p:cNvPr id="5" name="Picture 4">
+            <a:extLst>
+              <a:ext uri="{FF2B5EF4-FFF2-40B4-BE49-F238E27FC236}">
+                <a16:creationId xmlns:a16="http://schemas.microsoft.com/office/drawing/2014/main" id="{57BD5840-F2C6-1A5A-1517-943BC2A3151A}"/>
+              </a:ext>
+            </a:extLst>
+          </p:cNvPr>
+          <p:cNvPicPr>
+            <a:picLocks noChangeAspect="1"/>
+          </p:cNvPicPr>
+          <p:nvPr/>
+        </p:nvPicPr>
+        <p:blipFill>
+          <a:blip r:embed="rId3"/>
+          <a:stretch>
+            <a:fillRect/>
+          </a:stretch>
+        </p:blipFill>
+        <p:spPr>
+          <a:xfrm>
+            <a:off x="4433120" y="2509751"/>
+            <a:ext cx="2143471" cy="803156"/>
+          </a:xfrm>
+          <a:prstGeom prst="rect">
+            <a:avLst/>
+          </a:prstGeom>
+        </p:spPr>
+      </p:pic>
+      <p:pic>
+        <p:nvPicPr>
+          <p:cNvPr id="6" name="Picture 5">
+            <a:extLst>
+              <a:ext uri="{FF2B5EF4-FFF2-40B4-BE49-F238E27FC236}">
+                <a16:creationId xmlns:a16="http://schemas.microsoft.com/office/drawing/2014/main" id="{716CB4E1-CEBD-AED6-2445-99887725046B}"/>
+              </a:ext>
+            </a:extLst>
+          </p:cNvPr>
+          <p:cNvPicPr>
+            <a:picLocks noChangeAspect="1"/>
+          </p:cNvPicPr>
+          <p:nvPr/>
+        </p:nvPicPr>
+        <p:blipFill>
+          <a:blip r:embed="rId4"/>
+          <a:stretch>
+            <a:fillRect/>
+          </a:stretch>
+        </p:blipFill>
+        <p:spPr>
+          <a:xfrm>
+            <a:off x="8874201" y="3434225"/>
+            <a:ext cx="992039" cy="1144660"/>
+          </a:xfrm>
+          <a:prstGeom prst="rect">
+            <a:avLst/>
+          </a:prstGeom>
+        </p:spPr>
+      </p:pic>
+      <p:pic>
+        <p:nvPicPr>
+          <p:cNvPr id="7" name="Picture 6">
+            <a:extLst>
+              <a:ext uri="{FF2B5EF4-FFF2-40B4-BE49-F238E27FC236}">
+                <a16:creationId xmlns:a16="http://schemas.microsoft.com/office/drawing/2014/main" id="{42AB084F-E479-8EF3-2BB0-A5822B0EF327}"/>
+              </a:ext>
+            </a:extLst>
+          </p:cNvPr>
+          <p:cNvPicPr>
+            <a:picLocks noChangeAspect="1"/>
+          </p:cNvPicPr>
+          <p:nvPr/>
+        </p:nvPicPr>
+        <p:blipFill>
+          <a:blip r:embed="rId5"/>
+          <a:stretch>
+            <a:fillRect/>
+          </a:stretch>
+        </p:blipFill>
+        <p:spPr>
+          <a:xfrm>
+            <a:off x="10844516" y="3434225"/>
+            <a:ext cx="990658" cy="1143256"/>
+          </a:xfrm>
+          <a:prstGeom prst="rect">
+            <a:avLst/>
+          </a:prstGeom>
+        </p:spPr>
+      </p:pic>
+      <p:pic>
+        <p:nvPicPr>
+          <p:cNvPr id="8" name="Picture 7">
+            <a:extLst>
+              <a:ext uri="{FF2B5EF4-FFF2-40B4-BE49-F238E27FC236}">
+                <a16:creationId xmlns:a16="http://schemas.microsoft.com/office/drawing/2014/main" id="{B04A1EED-0038-873F-C6BA-0E355F8E3150}"/>
+              </a:ext>
+            </a:extLst>
+          </p:cNvPr>
+          <p:cNvPicPr>
+            <a:picLocks noChangeAspect="1"/>
+          </p:cNvPicPr>
+          <p:nvPr/>
+        </p:nvPicPr>
+        <p:blipFill>
+          <a:blip r:embed="rId6"/>
+          <a:stretch>
+            <a:fillRect/>
+          </a:stretch>
+        </p:blipFill>
+        <p:spPr>
+          <a:xfrm>
+            <a:off x="9851097" y="4546149"/>
+            <a:ext cx="992039" cy="1144979"/>
+          </a:xfrm>
+          <a:prstGeom prst="rect">
+            <a:avLst/>
+          </a:prstGeom>
+        </p:spPr>
+      </p:pic>
+      <p:pic>
+        <p:nvPicPr>
+          <p:cNvPr id="9" name="Picture 8">
+            <a:extLst>
+              <a:ext uri="{FF2B5EF4-FFF2-40B4-BE49-F238E27FC236}">
+                <a16:creationId xmlns:a16="http://schemas.microsoft.com/office/drawing/2014/main" id="{8354C418-AD76-DC26-22AB-85602CD6D516}"/>
+              </a:ext>
+            </a:extLst>
+          </p:cNvPr>
+          <p:cNvPicPr>
+            <a:picLocks noChangeAspect="1"/>
+          </p:cNvPicPr>
+          <p:nvPr/>
+        </p:nvPicPr>
+        <p:blipFill>
+          <a:blip r:embed="rId7"/>
+          <a:stretch>
+            <a:fillRect/>
+          </a:stretch>
+        </p:blipFill>
+        <p:spPr>
+          <a:xfrm>
+            <a:off x="9717247" y="5759648"/>
+            <a:ext cx="1244595" cy="754459"/>
+          </a:xfrm>
+          <a:prstGeom prst="rect">
+            <a:avLst/>
+          </a:prstGeom>
+        </p:spPr>
+      </p:pic>
+      <p:sp>
+        <p:nvSpPr>
+          <p:cNvPr id="10" name="Content Placeholder 2">
+            <a:extLst>
+              <a:ext uri="{FF2B5EF4-FFF2-40B4-BE49-F238E27FC236}">
+                <a16:creationId xmlns:a16="http://schemas.microsoft.com/office/drawing/2014/main" id="{C22F3EEE-34DB-D712-B6B4-1B0950501B74}"/>
+              </a:ext>
+            </a:extLst>
+          </p:cNvPr>
+          <p:cNvSpPr txBox="1">
+            <a:spLocks/>
+          </p:cNvSpPr>
+          <p:nvPr/>
+        </p:nvSpPr>
+        <p:spPr>
+          <a:xfrm>
+            <a:off x="356827" y="3547788"/>
+            <a:ext cx="2512932" cy="3071181"/>
+          </a:xfrm>
+          <a:prstGeom prst="rect">
+            <a:avLst/>
+          </a:prstGeom>
+          <a:ln>
+            <a:solidFill>
+              <a:schemeClr val="accent1"/>
+            </a:solidFill>
+          </a:ln>
+        </p:spPr>
+        <p:txBody>
+          <a:bodyPr vert="horz" lIns="91440" tIns="45720" rIns="91440" bIns="45720" rtlCol="0">
+            <a:normAutofit/>
+          </a:bodyPr>
+          <a:lstStyle>
+            <a:lvl1pPr marL="342900" indent="-342900" algn="l" defTabSz="457200" rtl="0" eaLnBrk="1" latinLnBrk="0" hangingPunct="1">
+              <a:spcBef>
+                <a:spcPts val="1000"/>
+              </a:spcBef>
+              <a:spcAft>
+                <a:spcPts val="0"/>
+              </a:spcAft>
+              <a:buClr>
+                <a:schemeClr val="accent1"/>
+              </a:buClr>
+              <a:buSzPct val="80000"/>
+              <a:buFont typeface="Wingdings 3" charset="2"/>
+              <a:buChar char=""/>
+              <a:defRPr sz="1800" b="0" i="0" kern="1200">
+                <a:solidFill>
+                  <a:schemeClr val="tx1">
+                    <a:lumMod val="75000"/>
+                    <a:lumOff val="25000"/>
+                  </a:schemeClr>
+                </a:solidFill>
+                <a:latin typeface="+mn-lt"/>
+                <a:ea typeface="+mn-ea"/>
+                <a:cs typeface="+mn-cs"/>
+              </a:defRPr>
+            </a:lvl1pPr>
+            <a:lvl2pPr marL="742950" indent="-285750" algn="l" defTabSz="457200" rtl="0" eaLnBrk="1" latinLnBrk="0" hangingPunct="1">
+              <a:spcBef>
+                <a:spcPts val="1000"/>
+              </a:spcBef>
+              <a:spcAft>
+                <a:spcPts val="0"/>
+              </a:spcAft>
+              <a:buClr>
+                <a:schemeClr val="accent1"/>
+              </a:buClr>
+              <a:buSzPct val="80000"/>
+              <a:buFont typeface="Wingdings 3" charset="2"/>
+              <a:buChar char=""/>
+              <a:defRPr sz="1600" b="0" i="0" kern="1200">
+                <a:solidFill>
+                  <a:schemeClr val="tx1">
+                    <a:lumMod val="75000"/>
+                    <a:lumOff val="25000"/>
+                  </a:schemeClr>
+                </a:solidFill>
+                <a:latin typeface="+mn-lt"/>
+                <a:ea typeface="+mn-ea"/>
+                <a:cs typeface="+mn-cs"/>
+              </a:defRPr>
+            </a:lvl2pPr>
+            <a:lvl3pPr marL="1143000" indent="-228600" algn="l" defTabSz="457200" rtl="0" eaLnBrk="1" latinLnBrk="0" hangingPunct="1">
+              <a:spcBef>
+                <a:spcPts val="1000"/>
+              </a:spcBef>
+              <a:spcAft>
+                <a:spcPts val="0"/>
+              </a:spcAft>
+              <a:buClr>
+                <a:schemeClr val="accent1"/>
+              </a:buClr>
+              <a:buSzPct val="80000"/>
+              <a:buFont typeface="Wingdings 3" charset="2"/>
+              <a:buChar char=""/>
+              <a:defRPr sz="1400" b="0" i="0" kern="1200">
+                <a:solidFill>
+                  <a:schemeClr val="tx1">
+                    <a:lumMod val="75000"/>
+                    <a:lumOff val="25000"/>
+                  </a:schemeClr>
+                </a:solidFill>
+                <a:latin typeface="+mn-lt"/>
+                <a:ea typeface="+mn-ea"/>
+                <a:cs typeface="+mn-cs"/>
+              </a:defRPr>
+            </a:lvl3pPr>
+            <a:lvl4pPr marL="1600200" indent="-228600" algn="l" defTabSz="457200" rtl="0" eaLnBrk="1" latinLnBrk="0" hangingPunct="1">
+              <a:spcBef>
+                <a:spcPts val="1000"/>
+              </a:spcBef>
+              <a:spcAft>
+                <a:spcPts val="0"/>
+              </a:spcAft>
+              <a:buClr>
+                <a:schemeClr val="accent1"/>
+              </a:buClr>
+              <a:buSzPct val="80000"/>
+              <a:buFont typeface="Wingdings 3" charset="2"/>
+              <a:buChar char=""/>
+              <a:defRPr sz="1200" b="0" i="0" kern="1200">
+                <a:solidFill>
+                  <a:schemeClr val="tx1">
+                    <a:lumMod val="75000"/>
+                    <a:lumOff val="25000"/>
+                  </a:schemeClr>
+                </a:solidFill>
+                <a:latin typeface="+mn-lt"/>
+                <a:ea typeface="+mn-ea"/>
+                <a:cs typeface="+mn-cs"/>
+              </a:defRPr>
+            </a:lvl4pPr>
+            <a:lvl5pPr marL="2057400" indent="-228600" algn="l" defTabSz="457200" rtl="0" eaLnBrk="1" latinLnBrk="0" hangingPunct="1">
+              <a:spcBef>
+                <a:spcPts val="1000"/>
+              </a:spcBef>
+              <a:spcAft>
+                <a:spcPts val="0"/>
+              </a:spcAft>
+              <a:buClr>
+                <a:schemeClr val="accent1"/>
+              </a:buClr>
+              <a:buSzPct val="80000"/>
+              <a:buFont typeface="Wingdings 3" charset="2"/>
+              <a:buChar char=""/>
+              <a:defRPr sz="1200" b="0" i="0" kern="1200">
+                <a:solidFill>
+                  <a:schemeClr val="tx1">
+                    <a:lumMod val="75000"/>
+                    <a:lumOff val="25000"/>
+                  </a:schemeClr>
+                </a:solidFill>
+                <a:latin typeface="+mn-lt"/>
+                <a:ea typeface="+mn-ea"/>
+                <a:cs typeface="+mn-cs"/>
+              </a:defRPr>
+            </a:lvl5pPr>
+            <a:lvl6pPr marL="2514600" indent="-228600" algn="l" defTabSz="457200" rtl="0" eaLnBrk="1" latinLnBrk="0" hangingPunct="1">
+              <a:spcBef>
+                <a:spcPts val="1000"/>
+              </a:spcBef>
+              <a:spcAft>
+                <a:spcPts val="0"/>
+              </a:spcAft>
+              <a:buClr>
+                <a:schemeClr val="accent1"/>
+              </a:buClr>
+              <a:buSzPct val="80000"/>
+              <a:buFont typeface="Wingdings 3" charset="2"/>
+              <a:buChar char=""/>
+              <a:defRPr sz="1200" b="0" i="0" kern="1200">
+                <a:solidFill>
+                  <a:schemeClr val="tx1">
+                    <a:lumMod val="75000"/>
+                    <a:lumOff val="25000"/>
+                  </a:schemeClr>
+                </a:solidFill>
+                <a:latin typeface="+mn-lt"/>
+                <a:ea typeface="+mn-ea"/>
+                <a:cs typeface="+mn-cs"/>
+              </a:defRPr>
+            </a:lvl6pPr>
+            <a:lvl7pPr marL="2971800" indent="-228600" algn="l" defTabSz="457200" rtl="0" eaLnBrk="1" latinLnBrk="0" hangingPunct="1">
+              <a:spcBef>
+                <a:spcPts val="1000"/>
+              </a:spcBef>
+              <a:spcAft>
+                <a:spcPts val="0"/>
+              </a:spcAft>
+              <a:buClr>
+                <a:schemeClr val="accent1"/>
+              </a:buClr>
+              <a:buSzPct val="80000"/>
+              <a:buFont typeface="Wingdings 3" charset="2"/>
+              <a:buChar char=""/>
+              <a:defRPr sz="1200" b="0" i="0" kern="1200">
+                <a:solidFill>
+                  <a:schemeClr val="tx1">
+                    <a:lumMod val="75000"/>
+                    <a:lumOff val="25000"/>
+                  </a:schemeClr>
+                </a:solidFill>
+                <a:latin typeface="+mn-lt"/>
+                <a:ea typeface="+mn-ea"/>
+                <a:cs typeface="+mn-cs"/>
+              </a:defRPr>
+            </a:lvl7pPr>
+            <a:lvl8pPr marL="3429000" indent="-228600" algn="l" defTabSz="457200" rtl="0" eaLnBrk="1" latinLnBrk="0" hangingPunct="1">
+              <a:spcBef>
+                <a:spcPts val="1000"/>
+              </a:spcBef>
+              <a:spcAft>
+                <a:spcPts val="0"/>
+              </a:spcAft>
+              <a:buClr>
+                <a:schemeClr val="accent1"/>
+              </a:buClr>
+              <a:buSzPct val="80000"/>
+              <a:buFont typeface="Wingdings 3" charset="2"/>
+              <a:buChar char=""/>
+              <a:defRPr sz="1200" b="0" i="0" kern="1200">
+                <a:solidFill>
+                  <a:schemeClr val="tx1">
+                    <a:lumMod val="75000"/>
+                    <a:lumOff val="25000"/>
+                  </a:schemeClr>
+                </a:solidFill>
+                <a:latin typeface="+mn-lt"/>
+                <a:ea typeface="+mn-ea"/>
+                <a:cs typeface="+mn-cs"/>
+              </a:defRPr>
+            </a:lvl8pPr>
+            <a:lvl9pPr marL="3886200" indent="-228600" algn="l" defTabSz="457200" rtl="0" eaLnBrk="1" latinLnBrk="0" hangingPunct="1">
+              <a:spcBef>
+                <a:spcPts val="1000"/>
+              </a:spcBef>
+              <a:spcAft>
+                <a:spcPts val="0"/>
+              </a:spcAft>
+              <a:buClr>
+                <a:schemeClr val="accent1"/>
+              </a:buClr>
+              <a:buSzPct val="80000"/>
+              <a:buFont typeface="Wingdings 3" charset="2"/>
+              <a:buChar char=""/>
+              <a:defRPr sz="1200" b="0" i="0" kern="1200">
+                <a:solidFill>
+                  <a:schemeClr val="tx1">
+                    <a:lumMod val="75000"/>
+                    <a:lumOff val="25000"/>
+                  </a:schemeClr>
+                </a:solidFill>
+                <a:latin typeface="+mn-lt"/>
+                <a:ea typeface="+mn-ea"/>
+                <a:cs typeface="+mn-cs"/>
+              </a:defRPr>
+            </a:lvl9pPr>
+          </a:lstStyle>
+          <a:p>
+            <a:r>
+              <a:rPr lang="en-US" dirty="0"/>
+              <a:t>PROC GENMOD</a:t>
+            </a:r>
+          </a:p>
+          <a:p>
+            <a:r>
+              <a:rPr lang="en-US" dirty="0"/>
+              <a:t>PROC LOGISTIC</a:t>
+            </a:r>
+          </a:p>
+          <a:p>
+            <a:r>
+              <a:rPr lang="en-US" dirty="0"/>
+              <a:t>PROC FORMAT</a:t>
+            </a:r>
+          </a:p>
+          <a:p>
+            <a:r>
+              <a:rPr lang="en-US" dirty="0"/>
+              <a:t>PROC SORT</a:t>
+            </a:r>
+          </a:p>
+          <a:p>
+            <a:r>
+              <a:rPr lang="en-US" dirty="0"/>
+              <a:t>PROC TABULATE</a:t>
+            </a:r>
+          </a:p>
+          <a:p>
+            <a:r>
+              <a:rPr lang="en-US" dirty="0"/>
+              <a:t>PROC SQL</a:t>
+            </a:r>
+          </a:p>
+          <a:p>
+            <a:r>
+              <a:rPr lang="en-US" dirty="0"/>
+              <a:t>MACRO VAR/FUNCTIONS</a:t>
+            </a:r>
+          </a:p>
+        </p:txBody>
+      </p:sp>
+      <p:sp>
+        <p:nvSpPr>
+          <p:cNvPr id="11" name="Content Placeholder 2">
+            <a:extLst>
+              <a:ext uri="{FF2B5EF4-FFF2-40B4-BE49-F238E27FC236}">
+                <a16:creationId xmlns:a16="http://schemas.microsoft.com/office/drawing/2014/main" id="{30F11FFB-9D71-5055-F89A-8C96DA1AECF9}"/>
+              </a:ext>
+            </a:extLst>
+          </p:cNvPr>
+          <p:cNvSpPr txBox="1">
+            <a:spLocks/>
+          </p:cNvSpPr>
+          <p:nvPr/>
+        </p:nvSpPr>
+        <p:spPr>
+          <a:xfrm>
+            <a:off x="3831513" y="3575727"/>
+            <a:ext cx="3984020" cy="3043242"/>
+          </a:xfrm>
+          <a:prstGeom prst="rect">
+            <a:avLst/>
+          </a:prstGeom>
+          <a:ln>
+            <a:solidFill>
+              <a:schemeClr val="accent1"/>
+            </a:solidFill>
+          </a:ln>
+        </p:spPr>
+        <p:txBody>
+          <a:bodyPr vert="horz" lIns="91440" tIns="45720" rIns="91440" bIns="45720" rtlCol="0">
+            <a:normAutofit lnSpcReduction="10000"/>
+          </a:bodyPr>
+          <a:lstStyle>
+            <a:lvl1pPr marL="342900" indent="-342900" algn="l" defTabSz="457200" rtl="0" eaLnBrk="1" latinLnBrk="0" hangingPunct="1">
+              <a:spcBef>
+                <a:spcPts val="1000"/>
+              </a:spcBef>
+              <a:spcAft>
+                <a:spcPts val="0"/>
+              </a:spcAft>
+              <a:buClr>
+                <a:schemeClr val="accent1"/>
+              </a:buClr>
+              <a:buSzPct val="80000"/>
+              <a:buFont typeface="Wingdings 3" charset="2"/>
+              <a:buChar char=""/>
+              <a:defRPr sz="1800" b="0" i="0" kern="1200">
+                <a:solidFill>
+                  <a:schemeClr val="tx1">
+                    <a:lumMod val="75000"/>
+                    <a:lumOff val="25000"/>
+                  </a:schemeClr>
+                </a:solidFill>
+                <a:latin typeface="+mn-lt"/>
+                <a:ea typeface="+mn-ea"/>
+                <a:cs typeface="+mn-cs"/>
+              </a:defRPr>
+            </a:lvl1pPr>
+            <a:lvl2pPr marL="742950" indent="-285750" algn="l" defTabSz="457200" rtl="0" eaLnBrk="1" latinLnBrk="0" hangingPunct="1">
+              <a:spcBef>
+                <a:spcPts val="1000"/>
+              </a:spcBef>
+              <a:spcAft>
+                <a:spcPts val="0"/>
+              </a:spcAft>
+              <a:buClr>
+                <a:schemeClr val="accent1"/>
+              </a:buClr>
+              <a:buSzPct val="80000"/>
+              <a:buFont typeface="Wingdings 3" charset="2"/>
+              <a:buChar char=""/>
+              <a:defRPr sz="1600" b="0" i="0" kern="1200">
+                <a:solidFill>
+                  <a:schemeClr val="tx1">
+                    <a:lumMod val="75000"/>
+                    <a:lumOff val="25000"/>
+                  </a:schemeClr>
+                </a:solidFill>
+                <a:latin typeface="+mn-lt"/>
+                <a:ea typeface="+mn-ea"/>
+                <a:cs typeface="+mn-cs"/>
+              </a:defRPr>
+            </a:lvl2pPr>
+            <a:lvl3pPr marL="1143000" indent="-228600" algn="l" defTabSz="457200" rtl="0" eaLnBrk="1" latinLnBrk="0" hangingPunct="1">
+              <a:spcBef>
+                <a:spcPts val="1000"/>
+              </a:spcBef>
+              <a:spcAft>
+                <a:spcPts val="0"/>
+              </a:spcAft>
+              <a:buClr>
+                <a:schemeClr val="accent1"/>
+              </a:buClr>
+              <a:buSzPct val="80000"/>
+              <a:buFont typeface="Wingdings 3" charset="2"/>
+              <a:buChar char=""/>
+              <a:defRPr sz="1400" b="0" i="0" kern="1200">
+                <a:solidFill>
+                  <a:schemeClr val="tx1">
+                    <a:lumMod val="75000"/>
+                    <a:lumOff val="25000"/>
+                  </a:schemeClr>
+                </a:solidFill>
+                <a:latin typeface="+mn-lt"/>
+                <a:ea typeface="+mn-ea"/>
+                <a:cs typeface="+mn-cs"/>
+              </a:defRPr>
+            </a:lvl3pPr>
+            <a:lvl4pPr marL="1600200" indent="-228600" algn="l" defTabSz="457200" rtl="0" eaLnBrk="1" latinLnBrk="0" hangingPunct="1">
+              <a:spcBef>
+                <a:spcPts val="1000"/>
+              </a:spcBef>
+              <a:spcAft>
+                <a:spcPts val="0"/>
+              </a:spcAft>
+              <a:buClr>
+                <a:schemeClr val="accent1"/>
+              </a:buClr>
+              <a:buSzPct val="80000"/>
+              <a:buFont typeface="Wingdings 3" charset="2"/>
+              <a:buChar char=""/>
+              <a:defRPr sz="1200" b="0" i="0" kern="1200">
+                <a:solidFill>
+                  <a:schemeClr val="tx1">
+                    <a:lumMod val="75000"/>
+                    <a:lumOff val="25000"/>
+                  </a:schemeClr>
+                </a:solidFill>
+                <a:latin typeface="+mn-lt"/>
+                <a:ea typeface="+mn-ea"/>
+                <a:cs typeface="+mn-cs"/>
+              </a:defRPr>
+            </a:lvl4pPr>
+            <a:lvl5pPr marL="2057400" indent="-228600" algn="l" defTabSz="457200" rtl="0" eaLnBrk="1" latinLnBrk="0" hangingPunct="1">
+              <a:spcBef>
+                <a:spcPts val="1000"/>
+              </a:spcBef>
+              <a:spcAft>
+                <a:spcPts val="0"/>
+              </a:spcAft>
+              <a:buClr>
+                <a:schemeClr val="accent1"/>
+              </a:buClr>
+              <a:buSzPct val="80000"/>
+              <a:buFont typeface="Wingdings 3" charset="2"/>
+              <a:buChar char=""/>
+              <a:defRPr sz="1200" b="0" i="0" kern="1200">
+                <a:solidFill>
+                  <a:schemeClr val="tx1">
+                    <a:lumMod val="75000"/>
+                    <a:lumOff val="25000"/>
+                  </a:schemeClr>
+                </a:solidFill>
+                <a:latin typeface="+mn-lt"/>
+                <a:ea typeface="+mn-ea"/>
+                <a:cs typeface="+mn-cs"/>
+              </a:defRPr>
+            </a:lvl5pPr>
+            <a:lvl6pPr marL="2514600" indent="-228600" algn="l" defTabSz="457200" rtl="0" eaLnBrk="1" latinLnBrk="0" hangingPunct="1">
+              <a:spcBef>
+                <a:spcPts val="1000"/>
+              </a:spcBef>
+              <a:spcAft>
+                <a:spcPts val="0"/>
+              </a:spcAft>
+              <a:buClr>
+                <a:schemeClr val="accent1"/>
+              </a:buClr>
+              <a:buSzPct val="80000"/>
+              <a:buFont typeface="Wingdings 3" charset="2"/>
+              <a:buChar char=""/>
+              <a:defRPr sz="1200" b="0" i="0" kern="1200">
+                <a:solidFill>
+                  <a:schemeClr val="tx1">
+                    <a:lumMod val="75000"/>
+                    <a:lumOff val="25000"/>
+                  </a:schemeClr>
+                </a:solidFill>
+                <a:latin typeface="+mn-lt"/>
+                <a:ea typeface="+mn-ea"/>
+                <a:cs typeface="+mn-cs"/>
+              </a:defRPr>
+            </a:lvl6pPr>
+            <a:lvl7pPr marL="2971800" indent="-228600" algn="l" defTabSz="457200" rtl="0" eaLnBrk="1" latinLnBrk="0" hangingPunct="1">
+              <a:spcBef>
+                <a:spcPts val="1000"/>
+              </a:spcBef>
+              <a:spcAft>
+                <a:spcPts val="0"/>
+              </a:spcAft>
+              <a:buClr>
+                <a:schemeClr val="accent1"/>
+              </a:buClr>
+              <a:buSzPct val="80000"/>
+              <a:buFont typeface="Wingdings 3" charset="2"/>
+              <a:buChar char=""/>
+              <a:defRPr sz="1200" b="0" i="0" kern="1200">
+                <a:solidFill>
+                  <a:schemeClr val="tx1">
+                    <a:lumMod val="75000"/>
+                    <a:lumOff val="25000"/>
+                  </a:schemeClr>
+                </a:solidFill>
+                <a:latin typeface="+mn-lt"/>
+                <a:ea typeface="+mn-ea"/>
+                <a:cs typeface="+mn-cs"/>
+              </a:defRPr>
+            </a:lvl7pPr>
+            <a:lvl8pPr marL="3429000" indent="-228600" algn="l" defTabSz="457200" rtl="0" eaLnBrk="1" latinLnBrk="0" hangingPunct="1">
+              <a:spcBef>
+                <a:spcPts val="1000"/>
+              </a:spcBef>
+              <a:spcAft>
+                <a:spcPts val="0"/>
+              </a:spcAft>
+              <a:buClr>
+                <a:schemeClr val="accent1"/>
+              </a:buClr>
+              <a:buSzPct val="80000"/>
+              <a:buFont typeface="Wingdings 3" charset="2"/>
+              <a:buChar char=""/>
+              <a:defRPr sz="1200" b="0" i="0" kern="1200">
+                <a:solidFill>
+                  <a:schemeClr val="tx1">
+                    <a:lumMod val="75000"/>
+                    <a:lumOff val="25000"/>
+                  </a:schemeClr>
+                </a:solidFill>
+                <a:latin typeface="+mn-lt"/>
+                <a:ea typeface="+mn-ea"/>
+                <a:cs typeface="+mn-cs"/>
+              </a:defRPr>
+            </a:lvl8pPr>
+            <a:lvl9pPr marL="3886200" indent="-228600" algn="l" defTabSz="457200" rtl="0" eaLnBrk="1" latinLnBrk="0" hangingPunct="1">
+              <a:spcBef>
+                <a:spcPts val="1000"/>
+              </a:spcBef>
+              <a:spcAft>
+                <a:spcPts val="0"/>
+              </a:spcAft>
+              <a:buClr>
+                <a:schemeClr val="accent1"/>
+              </a:buClr>
+              <a:buSzPct val="80000"/>
+              <a:buFont typeface="Wingdings 3" charset="2"/>
+              <a:buChar char=""/>
+              <a:defRPr sz="1200" b="0" i="0" kern="1200">
+                <a:solidFill>
+                  <a:schemeClr val="tx1">
+                    <a:lumMod val="75000"/>
+                    <a:lumOff val="25000"/>
+                  </a:schemeClr>
+                </a:solidFill>
+                <a:latin typeface="+mn-lt"/>
+                <a:ea typeface="+mn-ea"/>
+                <a:cs typeface="+mn-cs"/>
+              </a:defRPr>
+            </a:lvl9pPr>
+          </a:lstStyle>
+          <a:p>
+            <a:r>
+              <a:rPr lang="en-US" dirty="0" err="1"/>
+              <a:t>readRDS</a:t>
+            </a:r>
+            <a:r>
+              <a:rPr lang="en-US" dirty="0"/>
+              <a:t>()/</a:t>
+            </a:r>
+            <a:r>
+              <a:rPr lang="en-US" dirty="0" err="1"/>
+              <a:t>save</a:t>
+            </a:r>
+            <a:r>
+              <a:rPr lang="en-US" altLang="zh-CN" dirty="0" err="1"/>
+              <a:t>RDS</a:t>
+            </a:r>
+            <a:r>
+              <a:rPr lang="en-US" altLang="zh-CN" dirty="0"/>
+              <a:t>()/</a:t>
+            </a:r>
+            <a:r>
+              <a:rPr lang="en-US" altLang="zh-CN" dirty="0" err="1"/>
+              <a:t>writecsv</a:t>
+            </a:r>
+            <a:r>
+              <a:rPr lang="en-US" altLang="zh-CN" dirty="0"/>
+              <a:t>()</a:t>
+            </a:r>
+          </a:p>
+          <a:p>
+            <a:r>
+              <a:rPr lang="en-US" dirty="0" err="1"/>
+              <a:t>tolower</a:t>
+            </a:r>
+            <a:r>
+              <a:rPr lang="en-US" dirty="0"/>
+              <a:t>()</a:t>
+            </a:r>
+          </a:p>
+          <a:p>
+            <a:r>
+              <a:rPr lang="en-US" dirty="0"/>
+              <a:t>Paste/paste0</a:t>
+            </a:r>
+          </a:p>
+          <a:p>
+            <a:r>
+              <a:rPr lang="en-US" dirty="0"/>
+              <a:t>filter()/mutate()/%&gt;%</a:t>
+            </a:r>
+          </a:p>
+          <a:p>
+            <a:r>
+              <a:rPr lang="en-US" dirty="0" err="1"/>
+              <a:t>glm</a:t>
+            </a:r>
+            <a:r>
+              <a:rPr lang="en-US" dirty="0"/>
+              <a:t>()</a:t>
+            </a:r>
+          </a:p>
+          <a:p>
+            <a:r>
+              <a:rPr lang="en-US" dirty="0"/>
+              <a:t>merge()</a:t>
+            </a:r>
+          </a:p>
+          <a:p>
+            <a:r>
+              <a:rPr lang="en-US" dirty="0" err="1"/>
+              <a:t>rbind</a:t>
+            </a:r>
+            <a:r>
+              <a:rPr lang="en-US" dirty="0"/>
+              <a:t>()/</a:t>
+            </a:r>
+            <a:r>
+              <a:rPr lang="en-US" dirty="0" err="1"/>
+              <a:t>cbind</a:t>
+            </a:r>
+            <a:r>
+              <a:rPr lang="en-US" dirty="0"/>
+              <a:t>()</a:t>
+            </a:r>
+          </a:p>
+          <a:p>
+            <a:r>
+              <a:rPr lang="en-US" altLang="zh-CN" dirty="0" err="1"/>
+              <a:t>comparedf</a:t>
+            </a:r>
+            <a:r>
+              <a:rPr lang="en-US" altLang="zh-CN" dirty="0"/>
+              <a:t>()</a:t>
+            </a:r>
+            <a:endParaRPr lang="en-US" dirty="0"/>
+          </a:p>
+          <a:p>
+            <a:endParaRPr lang="en-US" dirty="0"/>
+          </a:p>
+        </p:txBody>
+      </p:sp>
+      <p:pic>
+        <p:nvPicPr>
+          <p:cNvPr id="3" name="Picture 2">
+            <a:extLst>
+              <a:ext uri="{FF2B5EF4-FFF2-40B4-BE49-F238E27FC236}">
+                <a16:creationId xmlns:a16="http://schemas.microsoft.com/office/drawing/2014/main" id="{813F9B9C-956B-C732-641E-A581C2365DE6}"/>
+              </a:ext>
+            </a:extLst>
+          </p:cNvPr>
+          <p:cNvPicPr>
+            <a:picLocks noChangeAspect="1"/>
+          </p:cNvPicPr>
+          <p:nvPr/>
+        </p:nvPicPr>
+        <p:blipFill>
+          <a:blip r:embed="rId8"/>
+          <a:stretch>
+            <a:fillRect/>
+          </a:stretch>
+        </p:blipFill>
+        <p:spPr>
+          <a:xfrm>
+            <a:off x="8889344" y="4577481"/>
+            <a:ext cx="969324" cy="1122800"/>
+          </a:xfrm>
+          <a:prstGeom prst="rect">
+            <a:avLst/>
+          </a:prstGeom>
+        </p:spPr>
+      </p:pic>
+      <p:pic>
+        <p:nvPicPr>
+          <p:cNvPr id="12" name="Picture 11">
+            <a:extLst>
+              <a:ext uri="{FF2B5EF4-FFF2-40B4-BE49-F238E27FC236}">
+                <a16:creationId xmlns:a16="http://schemas.microsoft.com/office/drawing/2014/main" id="{270B4DE2-EDB8-7DD7-DB61-94C8F4CF759D}"/>
+              </a:ext>
+            </a:extLst>
+          </p:cNvPr>
+          <p:cNvPicPr>
+            <a:picLocks noChangeAspect="1"/>
+          </p:cNvPicPr>
+          <p:nvPr/>
+        </p:nvPicPr>
+        <p:blipFill>
+          <a:blip r:embed="rId9"/>
+          <a:stretch>
+            <a:fillRect/>
+          </a:stretch>
+        </p:blipFill>
+        <p:spPr>
+          <a:xfrm>
+            <a:off x="9866240" y="3429000"/>
+            <a:ext cx="992040" cy="1149885"/>
+          </a:xfrm>
+          <a:prstGeom prst="rect">
+            <a:avLst/>
+          </a:prstGeom>
+        </p:spPr>
+      </p:pic>
+      <p:pic>
+        <p:nvPicPr>
+          <p:cNvPr id="13" name="Picture 12">
+            <a:extLst>
+              <a:ext uri="{FF2B5EF4-FFF2-40B4-BE49-F238E27FC236}">
+                <a16:creationId xmlns:a16="http://schemas.microsoft.com/office/drawing/2014/main" id="{4C107CAE-DC38-55AC-4807-DBCA5CAFAA6E}"/>
+              </a:ext>
+            </a:extLst>
+          </p:cNvPr>
+          <p:cNvPicPr>
+            <a:picLocks noChangeAspect="1"/>
+          </p:cNvPicPr>
+          <p:nvPr/>
+        </p:nvPicPr>
+        <p:blipFill>
+          <a:blip r:embed="rId10"/>
+          <a:stretch>
+            <a:fillRect/>
+          </a:stretch>
+        </p:blipFill>
+        <p:spPr>
+          <a:xfrm>
+            <a:off x="10843136" y="4577480"/>
+            <a:ext cx="894461" cy="1032069"/>
+          </a:xfrm>
+          <a:prstGeom prst="rect">
+            <a:avLst/>
+          </a:prstGeom>
+        </p:spPr>
+      </p:pic>
+      <p:sp>
+        <p:nvSpPr>
+          <p:cNvPr id="14" name="TextBox 13">
+            <a:extLst>
+              <a:ext uri="{FF2B5EF4-FFF2-40B4-BE49-F238E27FC236}">
+                <a16:creationId xmlns:a16="http://schemas.microsoft.com/office/drawing/2014/main" id="{7B2D8D5F-D03C-1E61-BB36-D070D3F9BA54}"/>
+              </a:ext>
+            </a:extLst>
+          </p:cNvPr>
+          <p:cNvSpPr txBox="1"/>
+          <p:nvPr/>
+        </p:nvSpPr>
+        <p:spPr>
+          <a:xfrm>
+            <a:off x="8318270" y="6642556"/>
+            <a:ext cx="3873730" cy="215444"/>
+          </a:xfrm>
+          <a:prstGeom prst="rect">
+            <a:avLst/>
+          </a:prstGeom>
+          <a:noFill/>
+        </p:spPr>
+        <p:txBody>
+          <a:bodyPr wrap="square" rtlCol="0">
+            <a:spAutoFit/>
+          </a:bodyPr>
+          <a:lstStyle/>
+          <a:p>
+            <a:r>
+              <a:rPr lang="en-US" sz="800" dirty="0"/>
+              <a:t>2026 Women in Statistics and Data Science Conference, Cincinnati, OH</a:t>
+            </a:r>
+          </a:p>
+        </p:txBody>
+      </p:sp>
+    </p:spTree>
+    <p:extLst>
+      <p:ext uri="{BB962C8B-B14F-4D97-AF65-F5344CB8AC3E}">
+        <p14:creationId xmlns:p14="http://schemas.microsoft.com/office/powerpoint/2010/main" val="3860636418"/>
       </p:ext>
     </p:extLst>
   </p:cSld>

--- a/From On-Premises to Cloud.pptx
+++ b/From On-Premises to Cloud.pptx
@@ -874,6 +874,2247 @@
 </file>
 
 <file path=ppt/diagrams/colors2.xml><?xml version="1.0" encoding="utf-8"?>
+<dgm:colorsDef xmlns:dgm="http://schemas.openxmlformats.org/drawingml/2006/diagram" xmlns:a="http://schemas.openxmlformats.org/drawingml/2006/main" uniqueId="urn:microsoft.com/office/officeart/2005/8/colors/accent1_2">
+  <dgm:title val=""/>
+  <dgm:desc val=""/>
+  <dgm:catLst>
+    <dgm:cat type="accent1" pri="11200"/>
+  </dgm:catLst>
+  <dgm:styleLbl name="node0">
+    <dgm:fillClrLst meth="repeat">
+      <a:schemeClr val="accent1"/>
+    </dgm:fillClrLst>
+    <dgm:linClrLst meth="repeat">
+      <a:schemeClr val="lt1"/>
+    </dgm:linClrLst>
+    <dgm:effectClrLst/>
+    <dgm:txLinClrLst/>
+    <dgm:txFillClrLst/>
+    <dgm:txEffectClrLst/>
+  </dgm:styleLbl>
+  <dgm:styleLbl name="alignNode1">
+    <dgm:fillClrLst meth="repeat">
+      <a:schemeClr val="accent1"/>
+    </dgm:fillClrLst>
+    <dgm:linClrLst meth="repeat">
+      <a:schemeClr val="accent1"/>
+    </dgm:linClrLst>
+    <dgm:effectClrLst/>
+    <dgm:txLinClrLst/>
+    <dgm:txFillClrLst/>
+    <dgm:txEffectClrLst/>
+  </dgm:styleLbl>
+  <dgm:styleLbl name="node1">
+    <dgm:fillClrLst meth="repeat">
+      <a:schemeClr val="accent1"/>
+    </dgm:fillClrLst>
+    <dgm:linClrLst meth="repeat">
+      <a:schemeClr val="lt1"/>
+    </dgm:linClrLst>
+    <dgm:effectClrLst/>
+    <dgm:txLinClrLst/>
+    <dgm:txFillClrLst/>
+    <dgm:txEffectClrLst/>
+  </dgm:styleLbl>
+  <dgm:styleLbl name="lnNode1">
+    <dgm:fillClrLst meth="repeat">
+      <a:schemeClr val="accent1"/>
+    </dgm:fillClrLst>
+    <dgm:linClrLst meth="repeat">
+      <a:schemeClr val="lt1"/>
+    </dgm:linClrLst>
+    <dgm:effectClrLst/>
+    <dgm:txLinClrLst/>
+    <dgm:txFillClrLst/>
+    <dgm:txEffectClrLst/>
+  </dgm:styleLbl>
+  <dgm:styleLbl name="vennNode1">
+    <dgm:fillClrLst meth="repeat">
+      <a:schemeClr val="accent1">
+        <a:alpha val="50000"/>
+      </a:schemeClr>
+    </dgm:fillClrLst>
+    <dgm:linClrLst meth="repeat">
+      <a:schemeClr val="lt1"/>
+    </dgm:linClrLst>
+    <dgm:effectClrLst/>
+    <dgm:txLinClrLst/>
+    <dgm:txFillClrLst/>
+    <dgm:txEffectClrLst/>
+  </dgm:styleLbl>
+  <dgm:styleLbl name="node2">
+    <dgm:fillClrLst meth="repeat">
+      <a:schemeClr val="accent1"/>
+    </dgm:fillClrLst>
+    <dgm:linClrLst meth="repeat">
+      <a:schemeClr val="lt1"/>
+    </dgm:linClrLst>
+    <dgm:effectClrLst/>
+    <dgm:txLinClrLst/>
+    <dgm:txFillClrLst/>
+    <dgm:txEffectClrLst/>
+  </dgm:styleLbl>
+  <dgm:styleLbl name="node3">
+    <dgm:fillClrLst meth="repeat">
+      <a:schemeClr val="accent1"/>
+    </dgm:fillClrLst>
+    <dgm:linClrLst meth="repeat">
+      <a:schemeClr val="lt1"/>
+    </dgm:linClrLst>
+    <dgm:effectClrLst/>
+    <dgm:txLinClrLst/>
+    <dgm:txFillClrLst/>
+    <dgm:txEffectClrLst/>
+  </dgm:styleLbl>
+  <dgm:styleLbl name="node4">
+    <dgm:fillClrLst meth="repeat">
+      <a:schemeClr val="accent1"/>
+    </dgm:fillClrLst>
+    <dgm:linClrLst meth="repeat">
+      <a:schemeClr val="lt1"/>
+    </dgm:linClrLst>
+    <dgm:effectClrLst/>
+    <dgm:txLinClrLst/>
+    <dgm:txFillClrLst/>
+    <dgm:txEffectClrLst/>
+  </dgm:styleLbl>
+  <dgm:styleLbl name="fgImgPlace1">
+    <dgm:fillClrLst meth="repeat">
+      <a:schemeClr val="accent1">
+        <a:tint val="50000"/>
+      </a:schemeClr>
+    </dgm:fillClrLst>
+    <dgm:linClrLst meth="repeat">
+      <a:schemeClr val="lt1"/>
+    </dgm:linClrLst>
+    <dgm:effectClrLst/>
+    <dgm:txLinClrLst/>
+    <dgm:txFillClrLst meth="repeat">
+      <a:schemeClr val="lt1"/>
+    </dgm:txFillClrLst>
+    <dgm:txEffectClrLst/>
+  </dgm:styleLbl>
+  <dgm:styleLbl name="alignImgPlace1">
+    <dgm:fillClrLst meth="repeat">
+      <a:schemeClr val="accent1">
+        <a:tint val="50000"/>
+      </a:schemeClr>
+    </dgm:fillClrLst>
+    <dgm:linClrLst meth="repeat">
+      <a:schemeClr val="lt1"/>
+    </dgm:linClrLst>
+    <dgm:effectClrLst/>
+    <dgm:txLinClrLst/>
+    <dgm:txFillClrLst meth="repeat">
+      <a:schemeClr val="lt1"/>
+    </dgm:txFillClrLst>
+    <dgm:txEffectClrLst/>
+  </dgm:styleLbl>
+  <dgm:styleLbl name="bgImgPlace1">
+    <dgm:fillClrLst meth="repeat">
+      <a:schemeClr val="accent1">
+        <a:tint val="50000"/>
+      </a:schemeClr>
+    </dgm:fillClrLst>
+    <dgm:linClrLst meth="repeat">
+      <a:schemeClr val="lt1"/>
+    </dgm:linClrLst>
+    <dgm:effectClrLst/>
+    <dgm:txLinClrLst/>
+    <dgm:txFillClrLst meth="repeat">
+      <a:schemeClr val="lt1"/>
+    </dgm:txFillClrLst>
+    <dgm:txEffectClrLst/>
+  </dgm:styleLbl>
+  <dgm:styleLbl name="sibTrans2D1">
+    <dgm:fillClrLst meth="repeat">
+      <a:schemeClr val="accent1">
+        <a:tint val="60000"/>
+      </a:schemeClr>
+    </dgm:fillClrLst>
+    <dgm:linClrLst meth="repeat">
+      <a:schemeClr val="accent1">
+        <a:tint val="60000"/>
+      </a:schemeClr>
+    </dgm:linClrLst>
+    <dgm:effectClrLst/>
+    <dgm:txLinClrLst/>
+    <dgm:txFillClrLst/>
+    <dgm:txEffectClrLst/>
+  </dgm:styleLbl>
+  <dgm:styleLbl name="fgSibTrans2D1">
+    <dgm:fillClrLst meth="repeat">
+      <a:schemeClr val="accent1">
+        <a:tint val="60000"/>
+      </a:schemeClr>
+    </dgm:fillClrLst>
+    <dgm:linClrLst meth="repeat">
+      <a:schemeClr val="accent1">
+        <a:tint val="60000"/>
+      </a:schemeClr>
+    </dgm:linClrLst>
+    <dgm:effectClrLst/>
+    <dgm:txLinClrLst/>
+    <dgm:txFillClrLst/>
+    <dgm:txEffectClrLst/>
+  </dgm:styleLbl>
+  <dgm:styleLbl name="bgSibTrans2D1">
+    <dgm:fillClrLst meth="repeat">
+      <a:schemeClr val="accent1">
+        <a:tint val="60000"/>
+      </a:schemeClr>
+    </dgm:fillClrLst>
+    <dgm:linClrLst meth="repeat">
+      <a:schemeClr val="accent1">
+        <a:tint val="60000"/>
+      </a:schemeClr>
+    </dgm:linClrLst>
+    <dgm:effectClrLst/>
+    <dgm:txLinClrLst/>
+    <dgm:txFillClrLst/>
+    <dgm:txEffectClrLst/>
+  </dgm:styleLbl>
+  <dgm:styleLbl name="sibTrans1D1">
+    <dgm:fillClrLst meth="repeat">
+      <a:schemeClr val="accent1"/>
+    </dgm:fillClrLst>
+    <dgm:linClrLst meth="repeat">
+      <a:schemeClr val="accent1"/>
+    </dgm:linClrLst>
+    <dgm:effectClrLst/>
+    <dgm:txLinClrLst/>
+    <dgm:txFillClrLst meth="repeat">
+      <a:schemeClr val="tx1"/>
+    </dgm:txFillClrLst>
+    <dgm:txEffectClrLst/>
+  </dgm:styleLbl>
+  <dgm:styleLbl name="callout">
+    <dgm:fillClrLst meth="repeat">
+      <a:schemeClr val="accent1"/>
+    </dgm:fillClrLst>
+    <dgm:linClrLst meth="repeat">
+      <a:schemeClr val="accent1">
+        <a:tint val="50000"/>
+      </a:schemeClr>
+    </dgm:linClrLst>
+    <dgm:effectClrLst/>
+    <dgm:txLinClrLst/>
+    <dgm:txFillClrLst meth="repeat">
+      <a:schemeClr val="tx1"/>
+    </dgm:txFillClrLst>
+    <dgm:txEffectClrLst/>
+  </dgm:styleLbl>
+  <dgm:styleLbl name="asst0">
+    <dgm:fillClrLst meth="repeat">
+      <a:schemeClr val="accent1"/>
+    </dgm:fillClrLst>
+    <dgm:linClrLst meth="repeat">
+      <a:schemeClr val="lt1"/>
+    </dgm:linClrLst>
+    <dgm:effectClrLst/>
+    <dgm:txLinClrLst/>
+    <dgm:txFillClrLst/>
+    <dgm:txEffectClrLst/>
+  </dgm:styleLbl>
+  <dgm:styleLbl name="asst1">
+    <dgm:fillClrLst meth="repeat">
+      <a:schemeClr val="accent1"/>
+    </dgm:fillClrLst>
+    <dgm:linClrLst meth="repeat">
+      <a:schemeClr val="lt1"/>
+    </dgm:linClrLst>
+    <dgm:effectClrLst/>
+    <dgm:txLinClrLst/>
+    <dgm:txFillClrLst/>
+    <dgm:txEffectClrLst/>
+  </dgm:styleLbl>
+  <dgm:styleLbl name="asst2">
+    <dgm:fillClrLst meth="repeat">
+      <a:schemeClr val="accent1"/>
+    </dgm:fillClrLst>
+    <dgm:linClrLst meth="repeat">
+      <a:schemeClr val="lt1"/>
+    </dgm:linClrLst>
+    <dgm:effectClrLst/>
+    <dgm:txLinClrLst/>
+    <dgm:txFillClrLst/>
+    <dgm:txEffectClrLst/>
+  </dgm:styleLbl>
+  <dgm:styleLbl name="asst3">
+    <dgm:fillClrLst meth="repeat">
+      <a:schemeClr val="accent1"/>
+    </dgm:fillClrLst>
+    <dgm:linClrLst meth="repeat">
+      <a:schemeClr val="lt1"/>
+    </dgm:linClrLst>
+    <dgm:effectClrLst/>
+    <dgm:txLinClrLst/>
+    <dgm:txFillClrLst/>
+    <dgm:txEffectClrLst/>
+  </dgm:styleLbl>
+  <dgm:styleLbl name="asst4">
+    <dgm:fillClrLst meth="repeat">
+      <a:schemeClr val="accent1"/>
+    </dgm:fillClrLst>
+    <dgm:linClrLst meth="repeat">
+      <a:schemeClr val="lt1"/>
+    </dgm:linClrLst>
+    <dgm:effectClrLst/>
+    <dgm:txLinClrLst/>
+    <dgm:txFillClrLst/>
+    <dgm:txEffectClrLst/>
+  </dgm:styleLbl>
+  <dgm:styleLbl name="parChTrans2D1">
+    <dgm:fillClrLst meth="repeat">
+      <a:schemeClr val="accent1">
+        <a:tint val="60000"/>
+      </a:schemeClr>
+    </dgm:fillClrLst>
+    <dgm:linClrLst meth="repeat">
+      <a:schemeClr val="accent1">
+        <a:tint val="60000"/>
+      </a:schemeClr>
+    </dgm:linClrLst>
+    <dgm:effectClrLst/>
+    <dgm:txLinClrLst/>
+    <dgm:txFillClrLst meth="repeat">
+      <a:schemeClr val="lt1"/>
+    </dgm:txFillClrLst>
+    <dgm:txEffectClrLst/>
+  </dgm:styleLbl>
+  <dgm:styleLbl name="parChTrans2D2">
+    <dgm:fillClrLst meth="repeat">
+      <a:schemeClr val="accent1"/>
+    </dgm:fillClrLst>
+    <dgm:linClrLst meth="repeat">
+      <a:schemeClr val="accent1"/>
+    </dgm:linClrLst>
+    <dgm:effectClrLst/>
+    <dgm:txLinClrLst/>
+    <dgm:txFillClrLst meth="repeat">
+      <a:schemeClr val="lt1"/>
+    </dgm:txFillClrLst>
+    <dgm:txEffectClrLst/>
+  </dgm:styleLbl>
+  <dgm:styleLbl name="parChTrans2D3">
+    <dgm:fillClrLst meth="repeat">
+      <a:schemeClr val="accent1"/>
+    </dgm:fillClrLst>
+    <dgm:linClrLst meth="repeat">
+      <a:schemeClr val="accent1"/>
+    </dgm:linClrLst>
+    <dgm:effectClrLst/>
+    <dgm:txLinClrLst/>
+    <dgm:txFillClrLst meth="repeat">
+      <a:schemeClr val="lt1"/>
+    </dgm:txFillClrLst>
+    <dgm:txEffectClrLst/>
+  </dgm:styleLbl>
+  <dgm:styleLbl name="parChTrans2D4">
+    <dgm:fillClrLst meth="repeat">
+      <a:schemeClr val="accent1"/>
+    </dgm:fillClrLst>
+    <dgm:linClrLst meth="repeat">
+      <a:schemeClr val="accent1"/>
+    </dgm:linClrLst>
+    <dgm:effectClrLst/>
+    <dgm:txLinClrLst/>
+    <dgm:txFillClrLst meth="repeat">
+      <a:schemeClr val="lt1"/>
+    </dgm:txFillClrLst>
+    <dgm:txEffectClrLst/>
+  </dgm:styleLbl>
+  <dgm:styleLbl name="parChTrans1D1">
+    <dgm:fillClrLst meth="repeat">
+      <a:schemeClr val="accent1"/>
+    </dgm:fillClrLst>
+    <dgm:linClrLst meth="repeat">
+      <a:schemeClr val="accent1">
+        <a:shade val="60000"/>
+      </a:schemeClr>
+    </dgm:linClrLst>
+    <dgm:effectClrLst/>
+    <dgm:txLinClrLst/>
+    <dgm:txFillClrLst meth="repeat">
+      <a:schemeClr val="tx1"/>
+    </dgm:txFillClrLst>
+    <dgm:txEffectClrLst/>
+  </dgm:styleLbl>
+  <dgm:styleLbl name="parChTrans1D2">
+    <dgm:fillClrLst meth="repeat">
+      <a:schemeClr val="accent1"/>
+    </dgm:fillClrLst>
+    <dgm:linClrLst meth="repeat">
+      <a:schemeClr val="accent1">
+        <a:shade val="60000"/>
+      </a:schemeClr>
+    </dgm:linClrLst>
+    <dgm:effectClrLst/>
+    <dgm:txLinClrLst/>
+    <dgm:txFillClrLst meth="repeat">
+      <a:schemeClr val="tx1"/>
+    </dgm:txFillClrLst>
+    <dgm:txEffectClrLst/>
+  </dgm:styleLbl>
+  <dgm:styleLbl name="parChTrans1D3">
+    <dgm:fillClrLst meth="repeat">
+      <a:schemeClr val="accent1"/>
+    </dgm:fillClrLst>
+    <dgm:linClrLst meth="repeat">
+      <a:schemeClr val="accent1">
+        <a:shade val="80000"/>
+      </a:schemeClr>
+    </dgm:linClrLst>
+    <dgm:effectClrLst/>
+    <dgm:txLinClrLst/>
+    <dgm:txFillClrLst meth="repeat">
+      <a:schemeClr val="tx1"/>
+    </dgm:txFillClrLst>
+    <dgm:txEffectClrLst/>
+  </dgm:styleLbl>
+  <dgm:styleLbl name="parChTrans1D4">
+    <dgm:fillClrLst meth="repeat">
+      <a:schemeClr val="accent1"/>
+    </dgm:fillClrLst>
+    <dgm:linClrLst meth="repeat">
+      <a:schemeClr val="accent1">
+        <a:shade val="80000"/>
+      </a:schemeClr>
+    </dgm:linClrLst>
+    <dgm:effectClrLst/>
+    <dgm:txLinClrLst/>
+    <dgm:txFillClrLst meth="repeat">
+      <a:schemeClr val="tx1"/>
+    </dgm:txFillClrLst>
+    <dgm:txEffectClrLst/>
+  </dgm:styleLbl>
+  <dgm:styleLbl name="fgAcc1">
+    <dgm:fillClrLst meth="repeat">
+      <a:schemeClr val="lt1">
+        <a:alpha val="90000"/>
+      </a:schemeClr>
+    </dgm:fillClrLst>
+    <dgm:linClrLst meth="repeat">
+      <a:schemeClr val="accent1"/>
+    </dgm:linClrLst>
+    <dgm:effectClrLst/>
+    <dgm:txLinClrLst/>
+    <dgm:txFillClrLst meth="repeat">
+      <a:schemeClr val="dk1"/>
+    </dgm:txFillClrLst>
+    <dgm:txEffectClrLst/>
+  </dgm:styleLbl>
+  <dgm:styleLbl name="conFgAcc1">
+    <dgm:fillClrLst meth="repeat">
+      <a:schemeClr val="lt1">
+        <a:alpha val="90000"/>
+      </a:schemeClr>
+    </dgm:fillClrLst>
+    <dgm:linClrLst meth="repeat">
+      <a:schemeClr val="accent1"/>
+    </dgm:linClrLst>
+    <dgm:effectClrLst/>
+    <dgm:txLinClrLst/>
+    <dgm:txFillClrLst meth="repeat">
+      <a:schemeClr val="dk1"/>
+    </dgm:txFillClrLst>
+    <dgm:txEffectClrLst/>
+  </dgm:styleLbl>
+  <dgm:styleLbl name="alignAcc1">
+    <dgm:fillClrLst meth="repeat">
+      <a:schemeClr val="lt1">
+        <a:alpha val="90000"/>
+      </a:schemeClr>
+    </dgm:fillClrLst>
+    <dgm:linClrLst meth="repeat">
+      <a:schemeClr val="accent1"/>
+    </dgm:linClrLst>
+    <dgm:effectClrLst/>
+    <dgm:txLinClrLst/>
+    <dgm:txFillClrLst meth="repeat">
+      <a:schemeClr val="dk1"/>
+    </dgm:txFillClrLst>
+    <dgm:txEffectClrLst/>
+  </dgm:styleLbl>
+  <dgm:styleLbl name="trAlignAcc1">
+    <dgm:fillClrLst meth="repeat">
+      <a:schemeClr val="lt1">
+        <a:alpha val="40000"/>
+      </a:schemeClr>
+    </dgm:fillClrLst>
+    <dgm:linClrLst meth="repeat">
+      <a:schemeClr val="accent1"/>
+    </dgm:linClrLst>
+    <dgm:effectClrLst/>
+    <dgm:txLinClrLst/>
+    <dgm:txFillClrLst meth="repeat">
+      <a:schemeClr val="dk1"/>
+    </dgm:txFillClrLst>
+    <dgm:txEffectClrLst/>
+  </dgm:styleLbl>
+  <dgm:styleLbl name="bgAcc1">
+    <dgm:fillClrLst meth="repeat">
+      <a:schemeClr val="lt1">
+        <a:alpha val="90000"/>
+      </a:schemeClr>
+    </dgm:fillClrLst>
+    <dgm:linClrLst meth="repeat">
+      <a:schemeClr val="accent1"/>
+    </dgm:linClrLst>
+    <dgm:effectClrLst/>
+    <dgm:txLinClrLst/>
+    <dgm:txFillClrLst meth="repeat">
+      <a:schemeClr val="dk1"/>
+    </dgm:txFillClrLst>
+    <dgm:txEffectClrLst/>
+  </dgm:styleLbl>
+  <dgm:styleLbl name="solidFgAcc1">
+    <dgm:fillClrLst meth="repeat">
+      <a:schemeClr val="lt1"/>
+    </dgm:fillClrLst>
+    <dgm:linClrLst meth="repeat">
+      <a:schemeClr val="accent1"/>
+    </dgm:linClrLst>
+    <dgm:effectClrLst/>
+    <dgm:txLinClrLst/>
+    <dgm:txFillClrLst meth="repeat">
+      <a:schemeClr val="dk1"/>
+    </dgm:txFillClrLst>
+    <dgm:txEffectClrLst/>
+  </dgm:styleLbl>
+  <dgm:styleLbl name="solidAlignAcc1">
+    <dgm:fillClrLst meth="repeat">
+      <a:schemeClr val="lt1"/>
+    </dgm:fillClrLst>
+    <dgm:linClrLst meth="repeat">
+      <a:schemeClr val="accent1"/>
+    </dgm:linClrLst>
+    <dgm:effectClrLst/>
+    <dgm:txLinClrLst/>
+    <dgm:txFillClrLst meth="repeat">
+      <a:schemeClr val="dk1"/>
+    </dgm:txFillClrLst>
+    <dgm:txEffectClrLst/>
+  </dgm:styleLbl>
+  <dgm:styleLbl name="solidBgAcc1">
+    <dgm:fillClrLst meth="repeat">
+      <a:schemeClr val="lt1"/>
+    </dgm:fillClrLst>
+    <dgm:linClrLst meth="repeat">
+      <a:schemeClr val="accent1"/>
+    </dgm:linClrLst>
+    <dgm:effectClrLst/>
+    <dgm:txLinClrLst/>
+    <dgm:txFillClrLst meth="repeat">
+      <a:schemeClr val="dk1"/>
+    </dgm:txFillClrLst>
+    <dgm:txEffectClrLst/>
+  </dgm:styleLbl>
+  <dgm:styleLbl name="fgAccFollowNode1">
+    <dgm:fillClrLst meth="repeat">
+      <a:schemeClr val="accent1">
+        <a:alpha val="90000"/>
+        <a:tint val="40000"/>
+      </a:schemeClr>
+    </dgm:fillClrLst>
+    <dgm:linClrLst meth="repeat">
+      <a:schemeClr val="accent1">
+        <a:alpha val="90000"/>
+        <a:tint val="40000"/>
+      </a:schemeClr>
+    </dgm:linClrLst>
+    <dgm:effectClrLst/>
+    <dgm:txLinClrLst/>
+    <dgm:txFillClrLst meth="repeat">
+      <a:schemeClr val="dk1"/>
+    </dgm:txFillClrLst>
+    <dgm:txEffectClrLst/>
+  </dgm:styleLbl>
+  <dgm:styleLbl name="alignAccFollowNode1">
+    <dgm:fillClrLst meth="repeat">
+      <a:schemeClr val="accent1">
+        <a:alpha val="90000"/>
+        <a:tint val="40000"/>
+      </a:schemeClr>
+    </dgm:fillClrLst>
+    <dgm:linClrLst meth="repeat">
+      <a:schemeClr val="accent1">
+        <a:alpha val="90000"/>
+        <a:tint val="40000"/>
+      </a:schemeClr>
+    </dgm:linClrLst>
+    <dgm:effectClrLst/>
+    <dgm:txLinClrLst/>
+    <dgm:txFillClrLst meth="repeat">
+      <a:schemeClr val="dk1"/>
+    </dgm:txFillClrLst>
+    <dgm:txEffectClrLst/>
+  </dgm:styleLbl>
+  <dgm:styleLbl name="bgAccFollowNode1">
+    <dgm:fillClrLst meth="repeat">
+      <a:schemeClr val="accent1">
+        <a:alpha val="90000"/>
+        <a:tint val="40000"/>
+      </a:schemeClr>
+    </dgm:fillClrLst>
+    <dgm:linClrLst meth="repeat">
+      <a:schemeClr val="accent1">
+        <a:alpha val="90000"/>
+        <a:tint val="40000"/>
+      </a:schemeClr>
+    </dgm:linClrLst>
+    <dgm:effectClrLst/>
+    <dgm:txLinClrLst/>
+    <dgm:txFillClrLst meth="repeat">
+      <a:schemeClr val="dk1"/>
+    </dgm:txFillClrLst>
+    <dgm:txEffectClrLst/>
+  </dgm:styleLbl>
+  <dgm:styleLbl name="fgAcc0">
+    <dgm:fillClrLst meth="repeat">
+      <a:schemeClr val="lt1">
+        <a:alpha val="90000"/>
+      </a:schemeClr>
+    </dgm:fillClrLst>
+    <dgm:linClrLst meth="repeat">
+      <a:schemeClr val="accent1"/>
+    </dgm:linClrLst>
+    <dgm:effectClrLst/>
+    <dgm:txLinClrLst/>
+    <dgm:txFillClrLst meth="repeat">
+      <a:schemeClr val="dk1"/>
+    </dgm:txFillClrLst>
+    <dgm:txEffectClrLst/>
+  </dgm:styleLbl>
+  <dgm:styleLbl name="fgAcc2">
+    <dgm:fillClrLst meth="repeat">
+      <a:schemeClr val="lt1">
+        <a:alpha val="90000"/>
+      </a:schemeClr>
+    </dgm:fillClrLst>
+    <dgm:linClrLst meth="repeat">
+      <a:schemeClr val="accent1"/>
+    </dgm:linClrLst>
+    <dgm:effectClrLst/>
+    <dgm:txLinClrLst/>
+    <dgm:txFillClrLst meth="repeat">
+      <a:schemeClr val="dk1"/>
+    </dgm:txFillClrLst>
+    <dgm:txEffectClrLst/>
+  </dgm:styleLbl>
+  <dgm:styleLbl name="fgAcc3">
+    <dgm:fillClrLst meth="repeat">
+      <a:schemeClr val="lt1">
+        <a:alpha val="90000"/>
+      </a:schemeClr>
+    </dgm:fillClrLst>
+    <dgm:linClrLst meth="repeat">
+      <a:schemeClr val="accent1"/>
+    </dgm:linClrLst>
+    <dgm:effectClrLst/>
+    <dgm:txLinClrLst/>
+    <dgm:txFillClrLst meth="repeat">
+      <a:schemeClr val="dk1"/>
+    </dgm:txFillClrLst>
+    <dgm:txEffectClrLst/>
+  </dgm:styleLbl>
+  <dgm:styleLbl name="fgAcc4">
+    <dgm:fillClrLst meth="repeat">
+      <a:schemeClr val="lt1">
+        <a:alpha val="90000"/>
+      </a:schemeClr>
+    </dgm:fillClrLst>
+    <dgm:linClrLst meth="repeat">
+      <a:schemeClr val="accent1"/>
+    </dgm:linClrLst>
+    <dgm:effectClrLst/>
+    <dgm:txLinClrLst/>
+    <dgm:txFillClrLst meth="repeat">
+      <a:schemeClr val="dk1"/>
+    </dgm:txFillClrLst>
+    <dgm:txEffectClrLst/>
+  </dgm:styleLbl>
+  <dgm:styleLbl name="bgShp">
+    <dgm:fillClrLst meth="repeat">
+      <a:schemeClr val="accent1">
+        <a:tint val="40000"/>
+      </a:schemeClr>
+    </dgm:fillClrLst>
+    <dgm:linClrLst meth="repeat">
+      <a:schemeClr val="accent1"/>
+    </dgm:linClrLst>
+    <dgm:effectClrLst/>
+    <dgm:txLinClrLst/>
+    <dgm:txFillClrLst meth="repeat">
+      <a:schemeClr val="dk1"/>
+    </dgm:txFillClrLst>
+    <dgm:txEffectClrLst/>
+  </dgm:styleLbl>
+  <dgm:styleLbl name="dkBgShp">
+    <dgm:fillClrLst meth="repeat">
+      <a:schemeClr val="accent1">
+        <a:shade val="80000"/>
+      </a:schemeClr>
+    </dgm:fillClrLst>
+    <dgm:linClrLst meth="repeat">
+      <a:schemeClr val="accent1"/>
+    </dgm:linClrLst>
+    <dgm:effectClrLst/>
+    <dgm:txLinClrLst/>
+    <dgm:txFillClrLst meth="repeat">
+      <a:schemeClr val="lt1"/>
+    </dgm:txFillClrLst>
+    <dgm:txEffectClrLst/>
+  </dgm:styleLbl>
+  <dgm:styleLbl name="trBgShp">
+    <dgm:fillClrLst meth="repeat">
+      <a:schemeClr val="accent1">
+        <a:tint val="50000"/>
+        <a:alpha val="40000"/>
+      </a:schemeClr>
+    </dgm:fillClrLst>
+    <dgm:linClrLst meth="repeat">
+      <a:schemeClr val="accent1"/>
+    </dgm:linClrLst>
+    <dgm:effectClrLst/>
+    <dgm:txLinClrLst/>
+    <dgm:txFillClrLst meth="repeat">
+      <a:schemeClr val="lt1"/>
+    </dgm:txFillClrLst>
+    <dgm:txEffectClrLst/>
+  </dgm:styleLbl>
+  <dgm:styleLbl name="fgShp">
+    <dgm:fillClrLst meth="repeat">
+      <a:schemeClr val="accent1">
+        <a:tint val="60000"/>
+      </a:schemeClr>
+    </dgm:fillClrLst>
+    <dgm:linClrLst meth="repeat">
+      <a:schemeClr val="lt1"/>
+    </dgm:linClrLst>
+    <dgm:effectClrLst/>
+    <dgm:txLinClrLst/>
+    <dgm:txFillClrLst meth="repeat">
+      <a:schemeClr val="dk1"/>
+    </dgm:txFillClrLst>
+    <dgm:txEffectClrLst/>
+  </dgm:styleLbl>
+  <dgm:styleLbl name="revTx">
+    <dgm:fillClrLst meth="repeat">
+      <a:schemeClr val="lt1">
+        <a:alpha val="0"/>
+      </a:schemeClr>
+    </dgm:fillClrLst>
+    <dgm:linClrLst meth="repeat">
+      <a:schemeClr val="dk1">
+        <a:alpha val="0"/>
+      </a:schemeClr>
+    </dgm:linClrLst>
+    <dgm:effectClrLst/>
+    <dgm:txLinClrLst/>
+    <dgm:txFillClrLst meth="repeat">
+      <a:schemeClr val="tx1"/>
+    </dgm:txFillClrLst>
+    <dgm:txEffectClrLst/>
+  </dgm:styleLbl>
+</dgm:colorsDef>
+</file>
+
+<file path=ppt/diagrams/colors3.xml><?xml version="1.0" encoding="utf-8"?>
+<dgm:colorsDef xmlns:dgm="http://schemas.openxmlformats.org/drawingml/2006/diagram" xmlns:a="http://schemas.openxmlformats.org/drawingml/2006/main" uniqueId="urn:microsoft.com/office/officeart/2005/8/colors/accent1_2">
+  <dgm:title val=""/>
+  <dgm:desc val=""/>
+  <dgm:catLst>
+    <dgm:cat type="accent1" pri="11200"/>
+  </dgm:catLst>
+  <dgm:styleLbl name="node0">
+    <dgm:fillClrLst meth="repeat">
+      <a:schemeClr val="accent1"/>
+    </dgm:fillClrLst>
+    <dgm:linClrLst meth="repeat">
+      <a:schemeClr val="lt1"/>
+    </dgm:linClrLst>
+    <dgm:effectClrLst/>
+    <dgm:txLinClrLst/>
+    <dgm:txFillClrLst/>
+    <dgm:txEffectClrLst/>
+  </dgm:styleLbl>
+  <dgm:styleLbl name="alignNode1">
+    <dgm:fillClrLst meth="repeat">
+      <a:schemeClr val="accent1"/>
+    </dgm:fillClrLst>
+    <dgm:linClrLst meth="repeat">
+      <a:schemeClr val="accent1"/>
+    </dgm:linClrLst>
+    <dgm:effectClrLst/>
+    <dgm:txLinClrLst/>
+    <dgm:txFillClrLst/>
+    <dgm:txEffectClrLst/>
+  </dgm:styleLbl>
+  <dgm:styleLbl name="node1">
+    <dgm:fillClrLst meth="repeat">
+      <a:schemeClr val="accent1"/>
+    </dgm:fillClrLst>
+    <dgm:linClrLst meth="repeat">
+      <a:schemeClr val="lt1"/>
+    </dgm:linClrLst>
+    <dgm:effectClrLst/>
+    <dgm:txLinClrLst/>
+    <dgm:txFillClrLst/>
+    <dgm:txEffectClrLst/>
+  </dgm:styleLbl>
+  <dgm:styleLbl name="lnNode1">
+    <dgm:fillClrLst meth="repeat">
+      <a:schemeClr val="accent1"/>
+    </dgm:fillClrLst>
+    <dgm:linClrLst meth="repeat">
+      <a:schemeClr val="lt1"/>
+    </dgm:linClrLst>
+    <dgm:effectClrLst/>
+    <dgm:txLinClrLst/>
+    <dgm:txFillClrLst/>
+    <dgm:txEffectClrLst/>
+  </dgm:styleLbl>
+  <dgm:styleLbl name="vennNode1">
+    <dgm:fillClrLst meth="repeat">
+      <a:schemeClr val="accent1">
+        <a:alpha val="50000"/>
+      </a:schemeClr>
+    </dgm:fillClrLst>
+    <dgm:linClrLst meth="repeat">
+      <a:schemeClr val="lt1"/>
+    </dgm:linClrLst>
+    <dgm:effectClrLst/>
+    <dgm:txLinClrLst/>
+    <dgm:txFillClrLst/>
+    <dgm:txEffectClrLst/>
+  </dgm:styleLbl>
+  <dgm:styleLbl name="node2">
+    <dgm:fillClrLst meth="repeat">
+      <a:schemeClr val="accent1"/>
+    </dgm:fillClrLst>
+    <dgm:linClrLst meth="repeat">
+      <a:schemeClr val="lt1"/>
+    </dgm:linClrLst>
+    <dgm:effectClrLst/>
+    <dgm:txLinClrLst/>
+    <dgm:txFillClrLst/>
+    <dgm:txEffectClrLst/>
+  </dgm:styleLbl>
+  <dgm:styleLbl name="node3">
+    <dgm:fillClrLst meth="repeat">
+      <a:schemeClr val="accent1"/>
+    </dgm:fillClrLst>
+    <dgm:linClrLst meth="repeat">
+      <a:schemeClr val="lt1"/>
+    </dgm:linClrLst>
+    <dgm:effectClrLst/>
+    <dgm:txLinClrLst/>
+    <dgm:txFillClrLst/>
+    <dgm:txEffectClrLst/>
+  </dgm:styleLbl>
+  <dgm:styleLbl name="node4">
+    <dgm:fillClrLst meth="repeat">
+      <a:schemeClr val="accent1"/>
+    </dgm:fillClrLst>
+    <dgm:linClrLst meth="repeat">
+      <a:schemeClr val="lt1"/>
+    </dgm:linClrLst>
+    <dgm:effectClrLst/>
+    <dgm:txLinClrLst/>
+    <dgm:txFillClrLst/>
+    <dgm:txEffectClrLst/>
+  </dgm:styleLbl>
+  <dgm:styleLbl name="fgImgPlace1">
+    <dgm:fillClrLst meth="repeat">
+      <a:schemeClr val="accent1">
+        <a:tint val="50000"/>
+      </a:schemeClr>
+    </dgm:fillClrLst>
+    <dgm:linClrLst meth="repeat">
+      <a:schemeClr val="lt1"/>
+    </dgm:linClrLst>
+    <dgm:effectClrLst/>
+    <dgm:txLinClrLst/>
+    <dgm:txFillClrLst meth="repeat">
+      <a:schemeClr val="lt1"/>
+    </dgm:txFillClrLst>
+    <dgm:txEffectClrLst/>
+  </dgm:styleLbl>
+  <dgm:styleLbl name="alignImgPlace1">
+    <dgm:fillClrLst meth="repeat">
+      <a:schemeClr val="accent1">
+        <a:tint val="50000"/>
+      </a:schemeClr>
+    </dgm:fillClrLst>
+    <dgm:linClrLst meth="repeat">
+      <a:schemeClr val="lt1"/>
+    </dgm:linClrLst>
+    <dgm:effectClrLst/>
+    <dgm:txLinClrLst/>
+    <dgm:txFillClrLst meth="repeat">
+      <a:schemeClr val="lt1"/>
+    </dgm:txFillClrLst>
+    <dgm:txEffectClrLst/>
+  </dgm:styleLbl>
+  <dgm:styleLbl name="bgImgPlace1">
+    <dgm:fillClrLst meth="repeat">
+      <a:schemeClr val="accent1">
+        <a:tint val="50000"/>
+      </a:schemeClr>
+    </dgm:fillClrLst>
+    <dgm:linClrLst meth="repeat">
+      <a:schemeClr val="lt1"/>
+    </dgm:linClrLst>
+    <dgm:effectClrLst/>
+    <dgm:txLinClrLst/>
+    <dgm:txFillClrLst meth="repeat">
+      <a:schemeClr val="lt1"/>
+    </dgm:txFillClrLst>
+    <dgm:txEffectClrLst/>
+  </dgm:styleLbl>
+  <dgm:styleLbl name="sibTrans2D1">
+    <dgm:fillClrLst meth="repeat">
+      <a:schemeClr val="accent1">
+        <a:tint val="60000"/>
+      </a:schemeClr>
+    </dgm:fillClrLst>
+    <dgm:linClrLst meth="repeat">
+      <a:schemeClr val="accent1">
+        <a:tint val="60000"/>
+      </a:schemeClr>
+    </dgm:linClrLst>
+    <dgm:effectClrLst/>
+    <dgm:txLinClrLst/>
+    <dgm:txFillClrLst/>
+    <dgm:txEffectClrLst/>
+  </dgm:styleLbl>
+  <dgm:styleLbl name="fgSibTrans2D1">
+    <dgm:fillClrLst meth="repeat">
+      <a:schemeClr val="accent1">
+        <a:tint val="60000"/>
+      </a:schemeClr>
+    </dgm:fillClrLst>
+    <dgm:linClrLst meth="repeat">
+      <a:schemeClr val="accent1">
+        <a:tint val="60000"/>
+      </a:schemeClr>
+    </dgm:linClrLst>
+    <dgm:effectClrLst/>
+    <dgm:txLinClrLst/>
+    <dgm:txFillClrLst/>
+    <dgm:txEffectClrLst/>
+  </dgm:styleLbl>
+  <dgm:styleLbl name="bgSibTrans2D1">
+    <dgm:fillClrLst meth="repeat">
+      <a:schemeClr val="accent1">
+        <a:tint val="60000"/>
+      </a:schemeClr>
+    </dgm:fillClrLst>
+    <dgm:linClrLst meth="repeat">
+      <a:schemeClr val="accent1">
+        <a:tint val="60000"/>
+      </a:schemeClr>
+    </dgm:linClrLst>
+    <dgm:effectClrLst/>
+    <dgm:txLinClrLst/>
+    <dgm:txFillClrLst/>
+    <dgm:txEffectClrLst/>
+  </dgm:styleLbl>
+  <dgm:styleLbl name="sibTrans1D1">
+    <dgm:fillClrLst meth="repeat">
+      <a:schemeClr val="accent1"/>
+    </dgm:fillClrLst>
+    <dgm:linClrLst meth="repeat">
+      <a:schemeClr val="accent1"/>
+    </dgm:linClrLst>
+    <dgm:effectClrLst/>
+    <dgm:txLinClrLst/>
+    <dgm:txFillClrLst meth="repeat">
+      <a:schemeClr val="tx1"/>
+    </dgm:txFillClrLst>
+    <dgm:txEffectClrLst/>
+  </dgm:styleLbl>
+  <dgm:styleLbl name="callout">
+    <dgm:fillClrLst meth="repeat">
+      <a:schemeClr val="accent1"/>
+    </dgm:fillClrLst>
+    <dgm:linClrLst meth="repeat">
+      <a:schemeClr val="accent1">
+        <a:tint val="50000"/>
+      </a:schemeClr>
+    </dgm:linClrLst>
+    <dgm:effectClrLst/>
+    <dgm:txLinClrLst/>
+    <dgm:txFillClrLst meth="repeat">
+      <a:schemeClr val="tx1"/>
+    </dgm:txFillClrLst>
+    <dgm:txEffectClrLst/>
+  </dgm:styleLbl>
+  <dgm:styleLbl name="asst0">
+    <dgm:fillClrLst meth="repeat">
+      <a:schemeClr val="accent1"/>
+    </dgm:fillClrLst>
+    <dgm:linClrLst meth="repeat">
+      <a:schemeClr val="lt1"/>
+    </dgm:linClrLst>
+    <dgm:effectClrLst/>
+    <dgm:txLinClrLst/>
+    <dgm:txFillClrLst/>
+    <dgm:txEffectClrLst/>
+  </dgm:styleLbl>
+  <dgm:styleLbl name="asst1">
+    <dgm:fillClrLst meth="repeat">
+      <a:schemeClr val="accent1"/>
+    </dgm:fillClrLst>
+    <dgm:linClrLst meth="repeat">
+      <a:schemeClr val="lt1"/>
+    </dgm:linClrLst>
+    <dgm:effectClrLst/>
+    <dgm:txLinClrLst/>
+    <dgm:txFillClrLst/>
+    <dgm:txEffectClrLst/>
+  </dgm:styleLbl>
+  <dgm:styleLbl name="asst2">
+    <dgm:fillClrLst meth="repeat">
+      <a:schemeClr val="accent1"/>
+    </dgm:fillClrLst>
+    <dgm:linClrLst meth="repeat">
+      <a:schemeClr val="lt1"/>
+    </dgm:linClrLst>
+    <dgm:effectClrLst/>
+    <dgm:txLinClrLst/>
+    <dgm:txFillClrLst/>
+    <dgm:txEffectClrLst/>
+  </dgm:styleLbl>
+  <dgm:styleLbl name="asst3">
+    <dgm:fillClrLst meth="repeat">
+      <a:schemeClr val="accent1"/>
+    </dgm:fillClrLst>
+    <dgm:linClrLst meth="repeat">
+      <a:schemeClr val="lt1"/>
+    </dgm:linClrLst>
+    <dgm:effectClrLst/>
+    <dgm:txLinClrLst/>
+    <dgm:txFillClrLst/>
+    <dgm:txEffectClrLst/>
+  </dgm:styleLbl>
+  <dgm:styleLbl name="asst4">
+    <dgm:fillClrLst meth="repeat">
+      <a:schemeClr val="accent1"/>
+    </dgm:fillClrLst>
+    <dgm:linClrLst meth="repeat">
+      <a:schemeClr val="lt1"/>
+    </dgm:linClrLst>
+    <dgm:effectClrLst/>
+    <dgm:txLinClrLst/>
+    <dgm:txFillClrLst/>
+    <dgm:txEffectClrLst/>
+  </dgm:styleLbl>
+  <dgm:styleLbl name="parChTrans2D1">
+    <dgm:fillClrLst meth="repeat">
+      <a:schemeClr val="accent1">
+        <a:tint val="60000"/>
+      </a:schemeClr>
+    </dgm:fillClrLst>
+    <dgm:linClrLst meth="repeat">
+      <a:schemeClr val="accent1">
+        <a:tint val="60000"/>
+      </a:schemeClr>
+    </dgm:linClrLst>
+    <dgm:effectClrLst/>
+    <dgm:txLinClrLst/>
+    <dgm:txFillClrLst meth="repeat">
+      <a:schemeClr val="lt1"/>
+    </dgm:txFillClrLst>
+    <dgm:txEffectClrLst/>
+  </dgm:styleLbl>
+  <dgm:styleLbl name="parChTrans2D2">
+    <dgm:fillClrLst meth="repeat">
+      <a:schemeClr val="accent1"/>
+    </dgm:fillClrLst>
+    <dgm:linClrLst meth="repeat">
+      <a:schemeClr val="accent1"/>
+    </dgm:linClrLst>
+    <dgm:effectClrLst/>
+    <dgm:txLinClrLst/>
+    <dgm:txFillClrLst meth="repeat">
+      <a:schemeClr val="lt1"/>
+    </dgm:txFillClrLst>
+    <dgm:txEffectClrLst/>
+  </dgm:styleLbl>
+  <dgm:styleLbl name="parChTrans2D3">
+    <dgm:fillClrLst meth="repeat">
+      <a:schemeClr val="accent1"/>
+    </dgm:fillClrLst>
+    <dgm:linClrLst meth="repeat">
+      <a:schemeClr val="accent1"/>
+    </dgm:linClrLst>
+    <dgm:effectClrLst/>
+    <dgm:txLinClrLst/>
+    <dgm:txFillClrLst meth="repeat">
+      <a:schemeClr val="lt1"/>
+    </dgm:txFillClrLst>
+    <dgm:txEffectClrLst/>
+  </dgm:styleLbl>
+  <dgm:styleLbl name="parChTrans2D4">
+    <dgm:fillClrLst meth="repeat">
+      <a:schemeClr val="accent1"/>
+    </dgm:fillClrLst>
+    <dgm:linClrLst meth="repeat">
+      <a:schemeClr val="accent1"/>
+    </dgm:linClrLst>
+    <dgm:effectClrLst/>
+    <dgm:txLinClrLst/>
+    <dgm:txFillClrLst meth="repeat">
+      <a:schemeClr val="lt1"/>
+    </dgm:txFillClrLst>
+    <dgm:txEffectClrLst/>
+  </dgm:styleLbl>
+  <dgm:styleLbl name="parChTrans1D1">
+    <dgm:fillClrLst meth="repeat">
+      <a:schemeClr val="accent1"/>
+    </dgm:fillClrLst>
+    <dgm:linClrLst meth="repeat">
+      <a:schemeClr val="accent1">
+        <a:shade val="60000"/>
+      </a:schemeClr>
+    </dgm:linClrLst>
+    <dgm:effectClrLst/>
+    <dgm:txLinClrLst/>
+    <dgm:txFillClrLst meth="repeat">
+      <a:schemeClr val="tx1"/>
+    </dgm:txFillClrLst>
+    <dgm:txEffectClrLst/>
+  </dgm:styleLbl>
+  <dgm:styleLbl name="parChTrans1D2">
+    <dgm:fillClrLst meth="repeat">
+      <a:schemeClr val="accent1"/>
+    </dgm:fillClrLst>
+    <dgm:linClrLst meth="repeat">
+      <a:schemeClr val="accent1">
+        <a:shade val="60000"/>
+      </a:schemeClr>
+    </dgm:linClrLst>
+    <dgm:effectClrLst/>
+    <dgm:txLinClrLst/>
+    <dgm:txFillClrLst meth="repeat">
+      <a:schemeClr val="tx1"/>
+    </dgm:txFillClrLst>
+    <dgm:txEffectClrLst/>
+  </dgm:styleLbl>
+  <dgm:styleLbl name="parChTrans1D3">
+    <dgm:fillClrLst meth="repeat">
+      <a:schemeClr val="accent1"/>
+    </dgm:fillClrLst>
+    <dgm:linClrLst meth="repeat">
+      <a:schemeClr val="accent1">
+        <a:shade val="80000"/>
+      </a:schemeClr>
+    </dgm:linClrLst>
+    <dgm:effectClrLst/>
+    <dgm:txLinClrLst/>
+    <dgm:txFillClrLst meth="repeat">
+      <a:schemeClr val="tx1"/>
+    </dgm:txFillClrLst>
+    <dgm:txEffectClrLst/>
+  </dgm:styleLbl>
+  <dgm:styleLbl name="parChTrans1D4">
+    <dgm:fillClrLst meth="repeat">
+      <a:schemeClr val="accent1"/>
+    </dgm:fillClrLst>
+    <dgm:linClrLst meth="repeat">
+      <a:schemeClr val="accent1">
+        <a:shade val="80000"/>
+      </a:schemeClr>
+    </dgm:linClrLst>
+    <dgm:effectClrLst/>
+    <dgm:txLinClrLst/>
+    <dgm:txFillClrLst meth="repeat">
+      <a:schemeClr val="tx1"/>
+    </dgm:txFillClrLst>
+    <dgm:txEffectClrLst/>
+  </dgm:styleLbl>
+  <dgm:styleLbl name="fgAcc1">
+    <dgm:fillClrLst meth="repeat">
+      <a:schemeClr val="lt1">
+        <a:alpha val="90000"/>
+      </a:schemeClr>
+    </dgm:fillClrLst>
+    <dgm:linClrLst meth="repeat">
+      <a:schemeClr val="accent1"/>
+    </dgm:linClrLst>
+    <dgm:effectClrLst/>
+    <dgm:txLinClrLst/>
+    <dgm:txFillClrLst meth="repeat">
+      <a:schemeClr val="dk1"/>
+    </dgm:txFillClrLst>
+    <dgm:txEffectClrLst/>
+  </dgm:styleLbl>
+  <dgm:styleLbl name="conFgAcc1">
+    <dgm:fillClrLst meth="repeat">
+      <a:schemeClr val="lt1">
+        <a:alpha val="90000"/>
+      </a:schemeClr>
+    </dgm:fillClrLst>
+    <dgm:linClrLst meth="repeat">
+      <a:schemeClr val="accent1"/>
+    </dgm:linClrLst>
+    <dgm:effectClrLst/>
+    <dgm:txLinClrLst/>
+    <dgm:txFillClrLst meth="repeat">
+      <a:schemeClr val="dk1"/>
+    </dgm:txFillClrLst>
+    <dgm:txEffectClrLst/>
+  </dgm:styleLbl>
+  <dgm:styleLbl name="alignAcc1">
+    <dgm:fillClrLst meth="repeat">
+      <a:schemeClr val="lt1">
+        <a:alpha val="90000"/>
+      </a:schemeClr>
+    </dgm:fillClrLst>
+    <dgm:linClrLst meth="repeat">
+      <a:schemeClr val="accent1"/>
+    </dgm:linClrLst>
+    <dgm:effectClrLst/>
+    <dgm:txLinClrLst/>
+    <dgm:txFillClrLst meth="repeat">
+      <a:schemeClr val="dk1"/>
+    </dgm:txFillClrLst>
+    <dgm:txEffectClrLst/>
+  </dgm:styleLbl>
+  <dgm:styleLbl name="trAlignAcc1">
+    <dgm:fillClrLst meth="repeat">
+      <a:schemeClr val="lt1">
+        <a:alpha val="40000"/>
+      </a:schemeClr>
+    </dgm:fillClrLst>
+    <dgm:linClrLst meth="repeat">
+      <a:schemeClr val="accent1"/>
+    </dgm:linClrLst>
+    <dgm:effectClrLst/>
+    <dgm:txLinClrLst/>
+    <dgm:txFillClrLst meth="repeat">
+      <a:schemeClr val="dk1"/>
+    </dgm:txFillClrLst>
+    <dgm:txEffectClrLst/>
+  </dgm:styleLbl>
+  <dgm:styleLbl name="bgAcc1">
+    <dgm:fillClrLst meth="repeat">
+      <a:schemeClr val="lt1">
+        <a:alpha val="90000"/>
+      </a:schemeClr>
+    </dgm:fillClrLst>
+    <dgm:linClrLst meth="repeat">
+      <a:schemeClr val="accent1"/>
+    </dgm:linClrLst>
+    <dgm:effectClrLst/>
+    <dgm:txLinClrLst/>
+    <dgm:txFillClrLst meth="repeat">
+      <a:schemeClr val="dk1"/>
+    </dgm:txFillClrLst>
+    <dgm:txEffectClrLst/>
+  </dgm:styleLbl>
+  <dgm:styleLbl name="solidFgAcc1">
+    <dgm:fillClrLst meth="repeat">
+      <a:schemeClr val="lt1"/>
+    </dgm:fillClrLst>
+    <dgm:linClrLst meth="repeat">
+      <a:schemeClr val="accent1"/>
+    </dgm:linClrLst>
+    <dgm:effectClrLst/>
+    <dgm:txLinClrLst/>
+    <dgm:txFillClrLst meth="repeat">
+      <a:schemeClr val="dk1"/>
+    </dgm:txFillClrLst>
+    <dgm:txEffectClrLst/>
+  </dgm:styleLbl>
+  <dgm:styleLbl name="solidAlignAcc1">
+    <dgm:fillClrLst meth="repeat">
+      <a:schemeClr val="lt1"/>
+    </dgm:fillClrLst>
+    <dgm:linClrLst meth="repeat">
+      <a:schemeClr val="accent1"/>
+    </dgm:linClrLst>
+    <dgm:effectClrLst/>
+    <dgm:txLinClrLst/>
+    <dgm:txFillClrLst meth="repeat">
+      <a:schemeClr val="dk1"/>
+    </dgm:txFillClrLst>
+    <dgm:txEffectClrLst/>
+  </dgm:styleLbl>
+  <dgm:styleLbl name="solidBgAcc1">
+    <dgm:fillClrLst meth="repeat">
+      <a:schemeClr val="lt1"/>
+    </dgm:fillClrLst>
+    <dgm:linClrLst meth="repeat">
+      <a:schemeClr val="accent1"/>
+    </dgm:linClrLst>
+    <dgm:effectClrLst/>
+    <dgm:txLinClrLst/>
+    <dgm:txFillClrLst meth="repeat">
+      <a:schemeClr val="dk1"/>
+    </dgm:txFillClrLst>
+    <dgm:txEffectClrLst/>
+  </dgm:styleLbl>
+  <dgm:styleLbl name="fgAccFollowNode1">
+    <dgm:fillClrLst meth="repeat">
+      <a:schemeClr val="accent1">
+        <a:alpha val="90000"/>
+        <a:tint val="40000"/>
+      </a:schemeClr>
+    </dgm:fillClrLst>
+    <dgm:linClrLst meth="repeat">
+      <a:schemeClr val="accent1">
+        <a:alpha val="90000"/>
+        <a:tint val="40000"/>
+      </a:schemeClr>
+    </dgm:linClrLst>
+    <dgm:effectClrLst/>
+    <dgm:txLinClrLst/>
+    <dgm:txFillClrLst meth="repeat">
+      <a:schemeClr val="dk1"/>
+    </dgm:txFillClrLst>
+    <dgm:txEffectClrLst/>
+  </dgm:styleLbl>
+  <dgm:styleLbl name="alignAccFollowNode1">
+    <dgm:fillClrLst meth="repeat">
+      <a:schemeClr val="accent1">
+        <a:alpha val="90000"/>
+        <a:tint val="40000"/>
+      </a:schemeClr>
+    </dgm:fillClrLst>
+    <dgm:linClrLst meth="repeat">
+      <a:schemeClr val="accent1">
+        <a:alpha val="90000"/>
+        <a:tint val="40000"/>
+      </a:schemeClr>
+    </dgm:linClrLst>
+    <dgm:effectClrLst/>
+    <dgm:txLinClrLst/>
+    <dgm:txFillClrLst meth="repeat">
+      <a:schemeClr val="dk1"/>
+    </dgm:txFillClrLst>
+    <dgm:txEffectClrLst/>
+  </dgm:styleLbl>
+  <dgm:styleLbl name="bgAccFollowNode1">
+    <dgm:fillClrLst meth="repeat">
+      <a:schemeClr val="accent1">
+        <a:alpha val="90000"/>
+        <a:tint val="40000"/>
+      </a:schemeClr>
+    </dgm:fillClrLst>
+    <dgm:linClrLst meth="repeat">
+      <a:schemeClr val="accent1">
+        <a:alpha val="90000"/>
+        <a:tint val="40000"/>
+      </a:schemeClr>
+    </dgm:linClrLst>
+    <dgm:effectClrLst/>
+    <dgm:txLinClrLst/>
+    <dgm:txFillClrLst meth="repeat">
+      <a:schemeClr val="dk1"/>
+    </dgm:txFillClrLst>
+    <dgm:txEffectClrLst/>
+  </dgm:styleLbl>
+  <dgm:styleLbl name="fgAcc0">
+    <dgm:fillClrLst meth="repeat">
+      <a:schemeClr val="lt1">
+        <a:alpha val="90000"/>
+      </a:schemeClr>
+    </dgm:fillClrLst>
+    <dgm:linClrLst meth="repeat">
+      <a:schemeClr val="accent1"/>
+    </dgm:linClrLst>
+    <dgm:effectClrLst/>
+    <dgm:txLinClrLst/>
+    <dgm:txFillClrLst meth="repeat">
+      <a:schemeClr val="dk1"/>
+    </dgm:txFillClrLst>
+    <dgm:txEffectClrLst/>
+  </dgm:styleLbl>
+  <dgm:styleLbl name="fgAcc2">
+    <dgm:fillClrLst meth="repeat">
+      <a:schemeClr val="lt1">
+        <a:alpha val="90000"/>
+      </a:schemeClr>
+    </dgm:fillClrLst>
+    <dgm:linClrLst meth="repeat">
+      <a:schemeClr val="accent1"/>
+    </dgm:linClrLst>
+    <dgm:effectClrLst/>
+    <dgm:txLinClrLst/>
+    <dgm:txFillClrLst meth="repeat">
+      <a:schemeClr val="dk1"/>
+    </dgm:txFillClrLst>
+    <dgm:txEffectClrLst/>
+  </dgm:styleLbl>
+  <dgm:styleLbl name="fgAcc3">
+    <dgm:fillClrLst meth="repeat">
+      <a:schemeClr val="lt1">
+        <a:alpha val="90000"/>
+      </a:schemeClr>
+    </dgm:fillClrLst>
+    <dgm:linClrLst meth="repeat">
+      <a:schemeClr val="accent1"/>
+    </dgm:linClrLst>
+    <dgm:effectClrLst/>
+    <dgm:txLinClrLst/>
+    <dgm:txFillClrLst meth="repeat">
+      <a:schemeClr val="dk1"/>
+    </dgm:txFillClrLst>
+    <dgm:txEffectClrLst/>
+  </dgm:styleLbl>
+  <dgm:styleLbl name="fgAcc4">
+    <dgm:fillClrLst meth="repeat">
+      <a:schemeClr val="lt1">
+        <a:alpha val="90000"/>
+      </a:schemeClr>
+    </dgm:fillClrLst>
+    <dgm:linClrLst meth="repeat">
+      <a:schemeClr val="accent1"/>
+    </dgm:linClrLst>
+    <dgm:effectClrLst/>
+    <dgm:txLinClrLst/>
+    <dgm:txFillClrLst meth="repeat">
+      <a:schemeClr val="dk1"/>
+    </dgm:txFillClrLst>
+    <dgm:txEffectClrLst/>
+  </dgm:styleLbl>
+  <dgm:styleLbl name="bgShp">
+    <dgm:fillClrLst meth="repeat">
+      <a:schemeClr val="accent1">
+        <a:tint val="40000"/>
+      </a:schemeClr>
+    </dgm:fillClrLst>
+    <dgm:linClrLst meth="repeat">
+      <a:schemeClr val="accent1"/>
+    </dgm:linClrLst>
+    <dgm:effectClrLst/>
+    <dgm:txLinClrLst/>
+    <dgm:txFillClrLst meth="repeat">
+      <a:schemeClr val="dk1"/>
+    </dgm:txFillClrLst>
+    <dgm:txEffectClrLst/>
+  </dgm:styleLbl>
+  <dgm:styleLbl name="dkBgShp">
+    <dgm:fillClrLst meth="repeat">
+      <a:schemeClr val="accent1">
+        <a:shade val="80000"/>
+      </a:schemeClr>
+    </dgm:fillClrLst>
+    <dgm:linClrLst meth="repeat">
+      <a:schemeClr val="accent1"/>
+    </dgm:linClrLst>
+    <dgm:effectClrLst/>
+    <dgm:txLinClrLst/>
+    <dgm:txFillClrLst meth="repeat">
+      <a:schemeClr val="lt1"/>
+    </dgm:txFillClrLst>
+    <dgm:txEffectClrLst/>
+  </dgm:styleLbl>
+  <dgm:styleLbl name="trBgShp">
+    <dgm:fillClrLst meth="repeat">
+      <a:schemeClr val="accent1">
+        <a:tint val="50000"/>
+        <a:alpha val="40000"/>
+      </a:schemeClr>
+    </dgm:fillClrLst>
+    <dgm:linClrLst meth="repeat">
+      <a:schemeClr val="accent1"/>
+    </dgm:linClrLst>
+    <dgm:effectClrLst/>
+    <dgm:txLinClrLst/>
+    <dgm:txFillClrLst meth="repeat">
+      <a:schemeClr val="lt1"/>
+    </dgm:txFillClrLst>
+    <dgm:txEffectClrLst/>
+  </dgm:styleLbl>
+  <dgm:styleLbl name="fgShp">
+    <dgm:fillClrLst meth="repeat">
+      <a:schemeClr val="accent1">
+        <a:tint val="60000"/>
+      </a:schemeClr>
+    </dgm:fillClrLst>
+    <dgm:linClrLst meth="repeat">
+      <a:schemeClr val="lt1"/>
+    </dgm:linClrLst>
+    <dgm:effectClrLst/>
+    <dgm:txLinClrLst/>
+    <dgm:txFillClrLst meth="repeat">
+      <a:schemeClr val="dk1"/>
+    </dgm:txFillClrLst>
+    <dgm:txEffectClrLst/>
+  </dgm:styleLbl>
+  <dgm:styleLbl name="revTx">
+    <dgm:fillClrLst meth="repeat">
+      <a:schemeClr val="lt1">
+        <a:alpha val="0"/>
+      </a:schemeClr>
+    </dgm:fillClrLst>
+    <dgm:linClrLst meth="repeat">
+      <a:schemeClr val="dk1">
+        <a:alpha val="0"/>
+      </a:schemeClr>
+    </dgm:linClrLst>
+    <dgm:effectClrLst/>
+    <dgm:txLinClrLst/>
+    <dgm:txFillClrLst meth="repeat">
+      <a:schemeClr val="tx1"/>
+    </dgm:txFillClrLst>
+    <dgm:txEffectClrLst/>
+  </dgm:styleLbl>
+</dgm:colorsDef>
+</file>
+
+<file path=ppt/diagrams/colors4.xml><?xml version="1.0" encoding="utf-8"?>
+<dgm:colorsDef xmlns:dgm="http://schemas.openxmlformats.org/drawingml/2006/diagram" xmlns:a="http://schemas.openxmlformats.org/drawingml/2006/main" uniqueId="urn:microsoft.com/office/officeart/2005/8/colors/accent1_2">
+  <dgm:title val=""/>
+  <dgm:desc val=""/>
+  <dgm:catLst>
+    <dgm:cat type="accent1" pri="11200"/>
+  </dgm:catLst>
+  <dgm:styleLbl name="node0">
+    <dgm:fillClrLst meth="repeat">
+      <a:schemeClr val="accent1"/>
+    </dgm:fillClrLst>
+    <dgm:linClrLst meth="repeat">
+      <a:schemeClr val="lt1"/>
+    </dgm:linClrLst>
+    <dgm:effectClrLst/>
+    <dgm:txLinClrLst/>
+    <dgm:txFillClrLst/>
+    <dgm:txEffectClrLst/>
+  </dgm:styleLbl>
+  <dgm:styleLbl name="alignNode1">
+    <dgm:fillClrLst meth="repeat">
+      <a:schemeClr val="accent1"/>
+    </dgm:fillClrLst>
+    <dgm:linClrLst meth="repeat">
+      <a:schemeClr val="accent1"/>
+    </dgm:linClrLst>
+    <dgm:effectClrLst/>
+    <dgm:txLinClrLst/>
+    <dgm:txFillClrLst/>
+    <dgm:txEffectClrLst/>
+  </dgm:styleLbl>
+  <dgm:styleLbl name="node1">
+    <dgm:fillClrLst meth="repeat">
+      <a:schemeClr val="accent1"/>
+    </dgm:fillClrLst>
+    <dgm:linClrLst meth="repeat">
+      <a:schemeClr val="lt1"/>
+    </dgm:linClrLst>
+    <dgm:effectClrLst/>
+    <dgm:txLinClrLst/>
+    <dgm:txFillClrLst/>
+    <dgm:txEffectClrLst/>
+  </dgm:styleLbl>
+  <dgm:styleLbl name="lnNode1">
+    <dgm:fillClrLst meth="repeat">
+      <a:schemeClr val="accent1"/>
+    </dgm:fillClrLst>
+    <dgm:linClrLst meth="repeat">
+      <a:schemeClr val="lt1"/>
+    </dgm:linClrLst>
+    <dgm:effectClrLst/>
+    <dgm:txLinClrLst/>
+    <dgm:txFillClrLst/>
+    <dgm:txEffectClrLst/>
+  </dgm:styleLbl>
+  <dgm:styleLbl name="vennNode1">
+    <dgm:fillClrLst meth="repeat">
+      <a:schemeClr val="accent1">
+        <a:alpha val="50000"/>
+      </a:schemeClr>
+    </dgm:fillClrLst>
+    <dgm:linClrLst meth="repeat">
+      <a:schemeClr val="lt1"/>
+    </dgm:linClrLst>
+    <dgm:effectClrLst/>
+    <dgm:txLinClrLst/>
+    <dgm:txFillClrLst/>
+    <dgm:txEffectClrLst/>
+  </dgm:styleLbl>
+  <dgm:styleLbl name="node2">
+    <dgm:fillClrLst meth="repeat">
+      <a:schemeClr val="accent1"/>
+    </dgm:fillClrLst>
+    <dgm:linClrLst meth="repeat">
+      <a:schemeClr val="lt1"/>
+    </dgm:linClrLst>
+    <dgm:effectClrLst/>
+    <dgm:txLinClrLst/>
+    <dgm:txFillClrLst/>
+    <dgm:txEffectClrLst/>
+  </dgm:styleLbl>
+  <dgm:styleLbl name="node3">
+    <dgm:fillClrLst meth="repeat">
+      <a:schemeClr val="accent1"/>
+    </dgm:fillClrLst>
+    <dgm:linClrLst meth="repeat">
+      <a:schemeClr val="lt1"/>
+    </dgm:linClrLst>
+    <dgm:effectClrLst/>
+    <dgm:txLinClrLst/>
+    <dgm:txFillClrLst/>
+    <dgm:txEffectClrLst/>
+  </dgm:styleLbl>
+  <dgm:styleLbl name="node4">
+    <dgm:fillClrLst meth="repeat">
+      <a:schemeClr val="accent1"/>
+    </dgm:fillClrLst>
+    <dgm:linClrLst meth="repeat">
+      <a:schemeClr val="lt1"/>
+    </dgm:linClrLst>
+    <dgm:effectClrLst/>
+    <dgm:txLinClrLst/>
+    <dgm:txFillClrLst/>
+    <dgm:txEffectClrLst/>
+  </dgm:styleLbl>
+  <dgm:styleLbl name="fgImgPlace1">
+    <dgm:fillClrLst meth="repeat">
+      <a:schemeClr val="accent1">
+        <a:tint val="50000"/>
+      </a:schemeClr>
+    </dgm:fillClrLst>
+    <dgm:linClrLst meth="repeat">
+      <a:schemeClr val="lt1"/>
+    </dgm:linClrLst>
+    <dgm:effectClrLst/>
+    <dgm:txLinClrLst/>
+    <dgm:txFillClrLst meth="repeat">
+      <a:schemeClr val="lt1"/>
+    </dgm:txFillClrLst>
+    <dgm:txEffectClrLst/>
+  </dgm:styleLbl>
+  <dgm:styleLbl name="alignImgPlace1">
+    <dgm:fillClrLst meth="repeat">
+      <a:schemeClr val="accent1">
+        <a:tint val="50000"/>
+      </a:schemeClr>
+    </dgm:fillClrLst>
+    <dgm:linClrLst meth="repeat">
+      <a:schemeClr val="lt1"/>
+    </dgm:linClrLst>
+    <dgm:effectClrLst/>
+    <dgm:txLinClrLst/>
+    <dgm:txFillClrLst meth="repeat">
+      <a:schemeClr val="lt1"/>
+    </dgm:txFillClrLst>
+    <dgm:txEffectClrLst/>
+  </dgm:styleLbl>
+  <dgm:styleLbl name="bgImgPlace1">
+    <dgm:fillClrLst meth="repeat">
+      <a:schemeClr val="accent1">
+        <a:tint val="50000"/>
+      </a:schemeClr>
+    </dgm:fillClrLst>
+    <dgm:linClrLst meth="repeat">
+      <a:schemeClr val="lt1"/>
+    </dgm:linClrLst>
+    <dgm:effectClrLst/>
+    <dgm:txLinClrLst/>
+    <dgm:txFillClrLst meth="repeat">
+      <a:schemeClr val="lt1"/>
+    </dgm:txFillClrLst>
+    <dgm:txEffectClrLst/>
+  </dgm:styleLbl>
+  <dgm:styleLbl name="sibTrans2D1">
+    <dgm:fillClrLst meth="repeat">
+      <a:schemeClr val="accent1">
+        <a:tint val="60000"/>
+      </a:schemeClr>
+    </dgm:fillClrLst>
+    <dgm:linClrLst meth="repeat">
+      <a:schemeClr val="accent1">
+        <a:tint val="60000"/>
+      </a:schemeClr>
+    </dgm:linClrLst>
+    <dgm:effectClrLst/>
+    <dgm:txLinClrLst/>
+    <dgm:txFillClrLst/>
+    <dgm:txEffectClrLst/>
+  </dgm:styleLbl>
+  <dgm:styleLbl name="fgSibTrans2D1">
+    <dgm:fillClrLst meth="repeat">
+      <a:schemeClr val="accent1">
+        <a:tint val="60000"/>
+      </a:schemeClr>
+    </dgm:fillClrLst>
+    <dgm:linClrLst meth="repeat">
+      <a:schemeClr val="accent1">
+        <a:tint val="60000"/>
+      </a:schemeClr>
+    </dgm:linClrLst>
+    <dgm:effectClrLst/>
+    <dgm:txLinClrLst/>
+    <dgm:txFillClrLst/>
+    <dgm:txEffectClrLst/>
+  </dgm:styleLbl>
+  <dgm:styleLbl name="bgSibTrans2D1">
+    <dgm:fillClrLst meth="repeat">
+      <a:schemeClr val="accent1">
+        <a:tint val="60000"/>
+      </a:schemeClr>
+    </dgm:fillClrLst>
+    <dgm:linClrLst meth="repeat">
+      <a:schemeClr val="accent1">
+        <a:tint val="60000"/>
+      </a:schemeClr>
+    </dgm:linClrLst>
+    <dgm:effectClrLst/>
+    <dgm:txLinClrLst/>
+    <dgm:txFillClrLst/>
+    <dgm:txEffectClrLst/>
+  </dgm:styleLbl>
+  <dgm:styleLbl name="sibTrans1D1">
+    <dgm:fillClrLst meth="repeat">
+      <a:schemeClr val="accent1"/>
+    </dgm:fillClrLst>
+    <dgm:linClrLst meth="repeat">
+      <a:schemeClr val="accent1"/>
+    </dgm:linClrLst>
+    <dgm:effectClrLst/>
+    <dgm:txLinClrLst/>
+    <dgm:txFillClrLst meth="repeat">
+      <a:schemeClr val="tx1"/>
+    </dgm:txFillClrLst>
+    <dgm:txEffectClrLst/>
+  </dgm:styleLbl>
+  <dgm:styleLbl name="callout">
+    <dgm:fillClrLst meth="repeat">
+      <a:schemeClr val="accent1"/>
+    </dgm:fillClrLst>
+    <dgm:linClrLst meth="repeat">
+      <a:schemeClr val="accent1">
+        <a:tint val="50000"/>
+      </a:schemeClr>
+    </dgm:linClrLst>
+    <dgm:effectClrLst/>
+    <dgm:txLinClrLst/>
+    <dgm:txFillClrLst meth="repeat">
+      <a:schemeClr val="tx1"/>
+    </dgm:txFillClrLst>
+    <dgm:txEffectClrLst/>
+  </dgm:styleLbl>
+  <dgm:styleLbl name="asst0">
+    <dgm:fillClrLst meth="repeat">
+      <a:schemeClr val="accent1"/>
+    </dgm:fillClrLst>
+    <dgm:linClrLst meth="repeat">
+      <a:schemeClr val="lt1"/>
+    </dgm:linClrLst>
+    <dgm:effectClrLst/>
+    <dgm:txLinClrLst/>
+    <dgm:txFillClrLst/>
+    <dgm:txEffectClrLst/>
+  </dgm:styleLbl>
+  <dgm:styleLbl name="asst1">
+    <dgm:fillClrLst meth="repeat">
+      <a:schemeClr val="accent1"/>
+    </dgm:fillClrLst>
+    <dgm:linClrLst meth="repeat">
+      <a:schemeClr val="lt1"/>
+    </dgm:linClrLst>
+    <dgm:effectClrLst/>
+    <dgm:txLinClrLst/>
+    <dgm:txFillClrLst/>
+    <dgm:txEffectClrLst/>
+  </dgm:styleLbl>
+  <dgm:styleLbl name="asst2">
+    <dgm:fillClrLst meth="repeat">
+      <a:schemeClr val="accent1"/>
+    </dgm:fillClrLst>
+    <dgm:linClrLst meth="repeat">
+      <a:schemeClr val="lt1"/>
+    </dgm:linClrLst>
+    <dgm:effectClrLst/>
+    <dgm:txLinClrLst/>
+    <dgm:txFillClrLst/>
+    <dgm:txEffectClrLst/>
+  </dgm:styleLbl>
+  <dgm:styleLbl name="asst3">
+    <dgm:fillClrLst meth="repeat">
+      <a:schemeClr val="accent1"/>
+    </dgm:fillClrLst>
+    <dgm:linClrLst meth="repeat">
+      <a:schemeClr val="lt1"/>
+    </dgm:linClrLst>
+    <dgm:effectClrLst/>
+    <dgm:txLinClrLst/>
+    <dgm:txFillClrLst/>
+    <dgm:txEffectClrLst/>
+  </dgm:styleLbl>
+  <dgm:styleLbl name="asst4">
+    <dgm:fillClrLst meth="repeat">
+      <a:schemeClr val="accent1"/>
+    </dgm:fillClrLst>
+    <dgm:linClrLst meth="repeat">
+      <a:schemeClr val="lt1"/>
+    </dgm:linClrLst>
+    <dgm:effectClrLst/>
+    <dgm:txLinClrLst/>
+    <dgm:txFillClrLst/>
+    <dgm:txEffectClrLst/>
+  </dgm:styleLbl>
+  <dgm:styleLbl name="parChTrans2D1">
+    <dgm:fillClrLst meth="repeat">
+      <a:schemeClr val="accent1">
+        <a:tint val="60000"/>
+      </a:schemeClr>
+    </dgm:fillClrLst>
+    <dgm:linClrLst meth="repeat">
+      <a:schemeClr val="accent1">
+        <a:tint val="60000"/>
+      </a:schemeClr>
+    </dgm:linClrLst>
+    <dgm:effectClrLst/>
+    <dgm:txLinClrLst/>
+    <dgm:txFillClrLst meth="repeat">
+      <a:schemeClr val="lt1"/>
+    </dgm:txFillClrLst>
+    <dgm:txEffectClrLst/>
+  </dgm:styleLbl>
+  <dgm:styleLbl name="parChTrans2D2">
+    <dgm:fillClrLst meth="repeat">
+      <a:schemeClr val="accent1"/>
+    </dgm:fillClrLst>
+    <dgm:linClrLst meth="repeat">
+      <a:schemeClr val="accent1"/>
+    </dgm:linClrLst>
+    <dgm:effectClrLst/>
+    <dgm:txLinClrLst/>
+    <dgm:txFillClrLst meth="repeat">
+      <a:schemeClr val="lt1"/>
+    </dgm:txFillClrLst>
+    <dgm:txEffectClrLst/>
+  </dgm:styleLbl>
+  <dgm:styleLbl name="parChTrans2D3">
+    <dgm:fillClrLst meth="repeat">
+      <a:schemeClr val="accent1"/>
+    </dgm:fillClrLst>
+    <dgm:linClrLst meth="repeat">
+      <a:schemeClr val="accent1"/>
+    </dgm:linClrLst>
+    <dgm:effectClrLst/>
+    <dgm:txLinClrLst/>
+    <dgm:txFillClrLst meth="repeat">
+      <a:schemeClr val="lt1"/>
+    </dgm:txFillClrLst>
+    <dgm:txEffectClrLst/>
+  </dgm:styleLbl>
+  <dgm:styleLbl name="parChTrans2D4">
+    <dgm:fillClrLst meth="repeat">
+      <a:schemeClr val="accent1"/>
+    </dgm:fillClrLst>
+    <dgm:linClrLst meth="repeat">
+      <a:schemeClr val="accent1"/>
+    </dgm:linClrLst>
+    <dgm:effectClrLst/>
+    <dgm:txLinClrLst/>
+    <dgm:txFillClrLst meth="repeat">
+      <a:schemeClr val="lt1"/>
+    </dgm:txFillClrLst>
+    <dgm:txEffectClrLst/>
+  </dgm:styleLbl>
+  <dgm:styleLbl name="parChTrans1D1">
+    <dgm:fillClrLst meth="repeat">
+      <a:schemeClr val="accent1"/>
+    </dgm:fillClrLst>
+    <dgm:linClrLst meth="repeat">
+      <a:schemeClr val="accent1">
+        <a:shade val="60000"/>
+      </a:schemeClr>
+    </dgm:linClrLst>
+    <dgm:effectClrLst/>
+    <dgm:txLinClrLst/>
+    <dgm:txFillClrLst meth="repeat">
+      <a:schemeClr val="tx1"/>
+    </dgm:txFillClrLst>
+    <dgm:txEffectClrLst/>
+  </dgm:styleLbl>
+  <dgm:styleLbl name="parChTrans1D2">
+    <dgm:fillClrLst meth="repeat">
+      <a:schemeClr val="accent1"/>
+    </dgm:fillClrLst>
+    <dgm:linClrLst meth="repeat">
+      <a:schemeClr val="accent1">
+        <a:shade val="60000"/>
+      </a:schemeClr>
+    </dgm:linClrLst>
+    <dgm:effectClrLst/>
+    <dgm:txLinClrLst/>
+    <dgm:txFillClrLst meth="repeat">
+      <a:schemeClr val="tx1"/>
+    </dgm:txFillClrLst>
+    <dgm:txEffectClrLst/>
+  </dgm:styleLbl>
+  <dgm:styleLbl name="parChTrans1D3">
+    <dgm:fillClrLst meth="repeat">
+      <a:schemeClr val="accent1"/>
+    </dgm:fillClrLst>
+    <dgm:linClrLst meth="repeat">
+      <a:schemeClr val="accent1">
+        <a:shade val="80000"/>
+      </a:schemeClr>
+    </dgm:linClrLst>
+    <dgm:effectClrLst/>
+    <dgm:txLinClrLst/>
+    <dgm:txFillClrLst meth="repeat">
+      <a:schemeClr val="tx1"/>
+    </dgm:txFillClrLst>
+    <dgm:txEffectClrLst/>
+  </dgm:styleLbl>
+  <dgm:styleLbl name="parChTrans1D4">
+    <dgm:fillClrLst meth="repeat">
+      <a:schemeClr val="accent1"/>
+    </dgm:fillClrLst>
+    <dgm:linClrLst meth="repeat">
+      <a:schemeClr val="accent1">
+        <a:shade val="80000"/>
+      </a:schemeClr>
+    </dgm:linClrLst>
+    <dgm:effectClrLst/>
+    <dgm:txLinClrLst/>
+    <dgm:txFillClrLst meth="repeat">
+      <a:schemeClr val="tx1"/>
+    </dgm:txFillClrLst>
+    <dgm:txEffectClrLst/>
+  </dgm:styleLbl>
+  <dgm:styleLbl name="fgAcc1">
+    <dgm:fillClrLst meth="repeat">
+      <a:schemeClr val="lt1">
+        <a:alpha val="90000"/>
+      </a:schemeClr>
+    </dgm:fillClrLst>
+    <dgm:linClrLst meth="repeat">
+      <a:schemeClr val="accent1"/>
+    </dgm:linClrLst>
+    <dgm:effectClrLst/>
+    <dgm:txLinClrLst/>
+    <dgm:txFillClrLst meth="repeat">
+      <a:schemeClr val="dk1"/>
+    </dgm:txFillClrLst>
+    <dgm:txEffectClrLst/>
+  </dgm:styleLbl>
+  <dgm:styleLbl name="conFgAcc1">
+    <dgm:fillClrLst meth="repeat">
+      <a:schemeClr val="lt1">
+        <a:alpha val="90000"/>
+      </a:schemeClr>
+    </dgm:fillClrLst>
+    <dgm:linClrLst meth="repeat">
+      <a:schemeClr val="accent1"/>
+    </dgm:linClrLst>
+    <dgm:effectClrLst/>
+    <dgm:txLinClrLst/>
+    <dgm:txFillClrLst meth="repeat">
+      <a:schemeClr val="dk1"/>
+    </dgm:txFillClrLst>
+    <dgm:txEffectClrLst/>
+  </dgm:styleLbl>
+  <dgm:styleLbl name="alignAcc1">
+    <dgm:fillClrLst meth="repeat">
+      <a:schemeClr val="lt1">
+        <a:alpha val="90000"/>
+      </a:schemeClr>
+    </dgm:fillClrLst>
+    <dgm:linClrLst meth="repeat">
+      <a:schemeClr val="accent1"/>
+    </dgm:linClrLst>
+    <dgm:effectClrLst/>
+    <dgm:txLinClrLst/>
+    <dgm:txFillClrLst meth="repeat">
+      <a:schemeClr val="dk1"/>
+    </dgm:txFillClrLst>
+    <dgm:txEffectClrLst/>
+  </dgm:styleLbl>
+  <dgm:styleLbl name="trAlignAcc1">
+    <dgm:fillClrLst meth="repeat">
+      <a:schemeClr val="lt1">
+        <a:alpha val="40000"/>
+      </a:schemeClr>
+    </dgm:fillClrLst>
+    <dgm:linClrLst meth="repeat">
+      <a:schemeClr val="accent1"/>
+    </dgm:linClrLst>
+    <dgm:effectClrLst/>
+    <dgm:txLinClrLst/>
+    <dgm:txFillClrLst meth="repeat">
+      <a:schemeClr val="dk1"/>
+    </dgm:txFillClrLst>
+    <dgm:txEffectClrLst/>
+  </dgm:styleLbl>
+  <dgm:styleLbl name="bgAcc1">
+    <dgm:fillClrLst meth="repeat">
+      <a:schemeClr val="lt1">
+        <a:alpha val="90000"/>
+      </a:schemeClr>
+    </dgm:fillClrLst>
+    <dgm:linClrLst meth="repeat">
+      <a:schemeClr val="accent1"/>
+    </dgm:linClrLst>
+    <dgm:effectClrLst/>
+    <dgm:txLinClrLst/>
+    <dgm:txFillClrLst meth="repeat">
+      <a:schemeClr val="dk1"/>
+    </dgm:txFillClrLst>
+    <dgm:txEffectClrLst/>
+  </dgm:styleLbl>
+  <dgm:styleLbl name="solidFgAcc1">
+    <dgm:fillClrLst meth="repeat">
+      <a:schemeClr val="lt1"/>
+    </dgm:fillClrLst>
+    <dgm:linClrLst meth="repeat">
+      <a:schemeClr val="accent1"/>
+    </dgm:linClrLst>
+    <dgm:effectClrLst/>
+    <dgm:txLinClrLst/>
+    <dgm:txFillClrLst meth="repeat">
+      <a:schemeClr val="dk1"/>
+    </dgm:txFillClrLst>
+    <dgm:txEffectClrLst/>
+  </dgm:styleLbl>
+  <dgm:styleLbl name="solidAlignAcc1">
+    <dgm:fillClrLst meth="repeat">
+      <a:schemeClr val="lt1"/>
+    </dgm:fillClrLst>
+    <dgm:linClrLst meth="repeat">
+      <a:schemeClr val="accent1"/>
+    </dgm:linClrLst>
+    <dgm:effectClrLst/>
+    <dgm:txLinClrLst/>
+    <dgm:txFillClrLst meth="repeat">
+      <a:schemeClr val="dk1"/>
+    </dgm:txFillClrLst>
+    <dgm:txEffectClrLst/>
+  </dgm:styleLbl>
+  <dgm:styleLbl name="solidBgAcc1">
+    <dgm:fillClrLst meth="repeat">
+      <a:schemeClr val="lt1"/>
+    </dgm:fillClrLst>
+    <dgm:linClrLst meth="repeat">
+      <a:schemeClr val="accent1"/>
+    </dgm:linClrLst>
+    <dgm:effectClrLst/>
+    <dgm:txLinClrLst/>
+    <dgm:txFillClrLst meth="repeat">
+      <a:schemeClr val="dk1"/>
+    </dgm:txFillClrLst>
+    <dgm:txEffectClrLst/>
+  </dgm:styleLbl>
+  <dgm:styleLbl name="fgAccFollowNode1">
+    <dgm:fillClrLst meth="repeat">
+      <a:schemeClr val="accent1">
+        <a:alpha val="90000"/>
+        <a:tint val="40000"/>
+      </a:schemeClr>
+    </dgm:fillClrLst>
+    <dgm:linClrLst meth="repeat">
+      <a:schemeClr val="accent1">
+        <a:alpha val="90000"/>
+        <a:tint val="40000"/>
+      </a:schemeClr>
+    </dgm:linClrLst>
+    <dgm:effectClrLst/>
+    <dgm:txLinClrLst/>
+    <dgm:txFillClrLst meth="repeat">
+      <a:schemeClr val="dk1"/>
+    </dgm:txFillClrLst>
+    <dgm:txEffectClrLst/>
+  </dgm:styleLbl>
+  <dgm:styleLbl name="alignAccFollowNode1">
+    <dgm:fillClrLst meth="repeat">
+      <a:schemeClr val="accent1">
+        <a:alpha val="90000"/>
+        <a:tint val="40000"/>
+      </a:schemeClr>
+    </dgm:fillClrLst>
+    <dgm:linClrLst meth="repeat">
+      <a:schemeClr val="accent1">
+        <a:alpha val="90000"/>
+        <a:tint val="40000"/>
+      </a:schemeClr>
+    </dgm:linClrLst>
+    <dgm:effectClrLst/>
+    <dgm:txLinClrLst/>
+    <dgm:txFillClrLst meth="repeat">
+      <a:schemeClr val="dk1"/>
+    </dgm:txFillClrLst>
+    <dgm:txEffectClrLst/>
+  </dgm:styleLbl>
+  <dgm:styleLbl name="bgAccFollowNode1">
+    <dgm:fillClrLst meth="repeat">
+      <a:schemeClr val="accent1">
+        <a:alpha val="90000"/>
+        <a:tint val="40000"/>
+      </a:schemeClr>
+    </dgm:fillClrLst>
+    <dgm:linClrLst meth="repeat">
+      <a:schemeClr val="accent1">
+        <a:alpha val="90000"/>
+        <a:tint val="40000"/>
+      </a:schemeClr>
+    </dgm:linClrLst>
+    <dgm:effectClrLst/>
+    <dgm:txLinClrLst/>
+    <dgm:txFillClrLst meth="repeat">
+      <a:schemeClr val="dk1"/>
+    </dgm:txFillClrLst>
+    <dgm:txEffectClrLst/>
+  </dgm:styleLbl>
+  <dgm:styleLbl name="fgAcc0">
+    <dgm:fillClrLst meth="repeat">
+      <a:schemeClr val="lt1">
+        <a:alpha val="90000"/>
+      </a:schemeClr>
+    </dgm:fillClrLst>
+    <dgm:linClrLst meth="repeat">
+      <a:schemeClr val="accent1"/>
+    </dgm:linClrLst>
+    <dgm:effectClrLst/>
+    <dgm:txLinClrLst/>
+    <dgm:txFillClrLst meth="repeat">
+      <a:schemeClr val="dk1"/>
+    </dgm:txFillClrLst>
+    <dgm:txEffectClrLst/>
+  </dgm:styleLbl>
+  <dgm:styleLbl name="fgAcc2">
+    <dgm:fillClrLst meth="repeat">
+      <a:schemeClr val="lt1">
+        <a:alpha val="90000"/>
+      </a:schemeClr>
+    </dgm:fillClrLst>
+    <dgm:linClrLst meth="repeat">
+      <a:schemeClr val="accent1"/>
+    </dgm:linClrLst>
+    <dgm:effectClrLst/>
+    <dgm:txLinClrLst/>
+    <dgm:txFillClrLst meth="repeat">
+      <a:schemeClr val="dk1"/>
+    </dgm:txFillClrLst>
+    <dgm:txEffectClrLst/>
+  </dgm:styleLbl>
+  <dgm:styleLbl name="fgAcc3">
+    <dgm:fillClrLst meth="repeat">
+      <a:schemeClr val="lt1">
+        <a:alpha val="90000"/>
+      </a:schemeClr>
+    </dgm:fillClrLst>
+    <dgm:linClrLst meth="repeat">
+      <a:schemeClr val="accent1"/>
+    </dgm:linClrLst>
+    <dgm:effectClrLst/>
+    <dgm:txLinClrLst/>
+    <dgm:txFillClrLst meth="repeat">
+      <a:schemeClr val="dk1"/>
+    </dgm:txFillClrLst>
+    <dgm:txEffectClrLst/>
+  </dgm:styleLbl>
+  <dgm:styleLbl name="fgAcc4">
+    <dgm:fillClrLst meth="repeat">
+      <a:schemeClr val="lt1">
+        <a:alpha val="90000"/>
+      </a:schemeClr>
+    </dgm:fillClrLst>
+    <dgm:linClrLst meth="repeat">
+      <a:schemeClr val="accent1"/>
+    </dgm:linClrLst>
+    <dgm:effectClrLst/>
+    <dgm:txLinClrLst/>
+    <dgm:txFillClrLst meth="repeat">
+      <a:schemeClr val="dk1"/>
+    </dgm:txFillClrLst>
+    <dgm:txEffectClrLst/>
+  </dgm:styleLbl>
+  <dgm:styleLbl name="bgShp">
+    <dgm:fillClrLst meth="repeat">
+      <a:schemeClr val="accent1">
+        <a:tint val="40000"/>
+      </a:schemeClr>
+    </dgm:fillClrLst>
+    <dgm:linClrLst meth="repeat">
+      <a:schemeClr val="accent1"/>
+    </dgm:linClrLst>
+    <dgm:effectClrLst/>
+    <dgm:txLinClrLst/>
+    <dgm:txFillClrLst meth="repeat">
+      <a:schemeClr val="dk1"/>
+    </dgm:txFillClrLst>
+    <dgm:txEffectClrLst/>
+  </dgm:styleLbl>
+  <dgm:styleLbl name="dkBgShp">
+    <dgm:fillClrLst meth="repeat">
+      <a:schemeClr val="accent1">
+        <a:shade val="80000"/>
+      </a:schemeClr>
+    </dgm:fillClrLst>
+    <dgm:linClrLst meth="repeat">
+      <a:schemeClr val="accent1"/>
+    </dgm:linClrLst>
+    <dgm:effectClrLst/>
+    <dgm:txLinClrLst/>
+    <dgm:txFillClrLst meth="repeat">
+      <a:schemeClr val="lt1"/>
+    </dgm:txFillClrLst>
+    <dgm:txEffectClrLst/>
+  </dgm:styleLbl>
+  <dgm:styleLbl name="trBgShp">
+    <dgm:fillClrLst meth="repeat">
+      <a:schemeClr val="accent1">
+        <a:tint val="50000"/>
+        <a:alpha val="40000"/>
+      </a:schemeClr>
+    </dgm:fillClrLst>
+    <dgm:linClrLst meth="repeat">
+      <a:schemeClr val="accent1"/>
+    </dgm:linClrLst>
+    <dgm:effectClrLst/>
+    <dgm:txLinClrLst/>
+    <dgm:txFillClrLst meth="repeat">
+      <a:schemeClr val="lt1"/>
+    </dgm:txFillClrLst>
+    <dgm:txEffectClrLst/>
+  </dgm:styleLbl>
+  <dgm:styleLbl name="fgShp">
+    <dgm:fillClrLst meth="repeat">
+      <a:schemeClr val="accent1">
+        <a:tint val="60000"/>
+      </a:schemeClr>
+    </dgm:fillClrLst>
+    <dgm:linClrLst meth="repeat">
+      <a:schemeClr val="lt1"/>
+    </dgm:linClrLst>
+    <dgm:effectClrLst/>
+    <dgm:txLinClrLst/>
+    <dgm:txFillClrLst meth="repeat">
+      <a:schemeClr val="dk1"/>
+    </dgm:txFillClrLst>
+    <dgm:txEffectClrLst/>
+  </dgm:styleLbl>
+  <dgm:styleLbl name="revTx">
+    <dgm:fillClrLst meth="repeat">
+      <a:schemeClr val="lt1">
+        <a:alpha val="0"/>
+      </a:schemeClr>
+    </dgm:fillClrLst>
+    <dgm:linClrLst meth="repeat">
+      <a:schemeClr val="dk1">
+        <a:alpha val="0"/>
+      </a:schemeClr>
+    </dgm:linClrLst>
+    <dgm:effectClrLst/>
+    <dgm:txLinClrLst/>
+    <dgm:txFillClrLst meth="repeat">
+      <a:schemeClr val="tx1"/>
+    </dgm:txFillClrLst>
+    <dgm:txEffectClrLst/>
+  </dgm:styleLbl>
+</dgm:colorsDef>
+</file>
+
+<file path=ppt/diagrams/colors5.xml><?xml version="1.0" encoding="utf-8"?>
 <dgm:colorsDef xmlns:dgm="http://schemas.openxmlformats.org/drawingml/2006/diagram" xmlns:a="http://schemas.openxmlformats.org/drawingml/2006/main" uniqueId="urn:microsoft.com/office/officeart/2005/8/colors/accent1_2">
   <dgm:title val=""/>
   <dgm:desc val=""/>
@@ -2093,6 +4334,664 @@
 </file>
 
 <file path=ppt/diagrams/data2.xml><?xml version="1.0" encoding="utf-8"?>
+<dgm:dataModel xmlns:dgm="http://schemas.openxmlformats.org/drawingml/2006/diagram" xmlns:a="http://schemas.openxmlformats.org/drawingml/2006/main">
+  <dgm:ptLst>
+    <dgm:pt modelId="{5359AC54-C077-4F20-8BA0-07AB60BBCF7B}" type="doc">
+      <dgm:prSet loTypeId="urn:microsoft.com/office/officeart/2005/8/layout/hierarchy2" loCatId="hierarchy" qsTypeId="urn:microsoft.com/office/officeart/2005/8/quickstyle/simple1" qsCatId="simple" csTypeId="urn:microsoft.com/office/officeart/2005/8/colors/accent1_2" csCatId="accent1" phldr="1"/>
+      <dgm:spPr/>
+      <dgm:t>
+        <a:bodyPr/>
+        <a:lstStyle/>
+        <a:p>
+          <a:endParaRPr lang="en-US"/>
+        </a:p>
+      </dgm:t>
+    </dgm:pt>
+    <dgm:pt modelId="{60E0BFDE-8E4F-4DF7-83FA-750D549853C2}">
+      <dgm:prSet phldrT="[Text]" phldr="0"/>
+      <dgm:spPr/>
+      <dgm:t>
+        <a:bodyPr/>
+        <a:lstStyle/>
+        <a:p>
+          <a:r>
+            <a:rPr lang="en-US" dirty="0"/>
+            <a:t>SAS</a:t>
+          </a:r>
+        </a:p>
+      </dgm:t>
+    </dgm:pt>
+    <dgm:pt modelId="{EF36957E-8A17-4887-87CE-84AC487564B9}" type="parTrans" cxnId="{91DFE5B3-51F3-4761-9B8B-62F3AA2985CE}">
+      <dgm:prSet/>
+      <dgm:spPr/>
+      <dgm:t>
+        <a:bodyPr/>
+        <a:lstStyle/>
+        <a:p>
+          <a:endParaRPr lang="en-US"/>
+        </a:p>
+      </dgm:t>
+    </dgm:pt>
+    <dgm:pt modelId="{BFBD4E85-2458-48C5-AE18-7BC7F112227B}" type="sibTrans" cxnId="{91DFE5B3-51F3-4761-9B8B-62F3AA2985CE}">
+      <dgm:prSet/>
+      <dgm:spPr/>
+      <dgm:t>
+        <a:bodyPr/>
+        <a:lstStyle/>
+        <a:p>
+          <a:endParaRPr lang="en-US"/>
+        </a:p>
+      </dgm:t>
+    </dgm:pt>
+    <dgm:pt modelId="{D4246179-824B-4DC4-8A7C-A9F0CBFC8832}">
+      <dgm:prSet phldrT="[Text]" phldr="0"/>
+      <dgm:spPr/>
+      <dgm:t>
+        <a:bodyPr/>
+        <a:lstStyle/>
+        <a:p>
+          <a:r>
+            <a:rPr lang="en-US" dirty="0"/>
+            <a:t>R</a:t>
+          </a:r>
+        </a:p>
+      </dgm:t>
+    </dgm:pt>
+    <dgm:pt modelId="{718EF08F-174C-4039-AF76-97E96AB6E283}" type="parTrans" cxnId="{DB601E40-8480-4C5B-9BE0-3B28655872F6}">
+      <dgm:prSet/>
+      <dgm:spPr/>
+      <dgm:t>
+        <a:bodyPr/>
+        <a:lstStyle/>
+        <a:p>
+          <a:endParaRPr lang="en-US"/>
+        </a:p>
+      </dgm:t>
+    </dgm:pt>
+    <dgm:pt modelId="{61434210-8BBC-4A3A-9310-D6F3F3232608}" type="sibTrans" cxnId="{DB601E40-8480-4C5B-9BE0-3B28655872F6}">
+      <dgm:prSet/>
+      <dgm:spPr/>
+      <dgm:t>
+        <a:bodyPr/>
+        <a:lstStyle/>
+        <a:p>
+          <a:endParaRPr lang="en-US"/>
+        </a:p>
+      </dgm:t>
+    </dgm:pt>
+    <dgm:pt modelId="{1CF01D51-7744-46DE-AD1E-B33E5AC5DDC4}">
+      <dgm:prSet phldrT="[Text]" phldr="0"/>
+      <dgm:spPr/>
+      <dgm:t>
+        <a:bodyPr/>
+        <a:lstStyle/>
+        <a:p>
+          <a:r>
+            <a:rPr lang="en-US" dirty="0"/>
+            <a:t>Python</a:t>
+          </a:r>
+        </a:p>
+      </dgm:t>
+    </dgm:pt>
+    <dgm:pt modelId="{3A65EA20-1F98-4FD6-8585-E24364C35285}" type="parTrans" cxnId="{2E51398D-BC6E-4C98-8FF7-D477CAE0EFF5}">
+      <dgm:prSet/>
+      <dgm:spPr/>
+      <dgm:t>
+        <a:bodyPr/>
+        <a:lstStyle/>
+        <a:p>
+          <a:endParaRPr lang="en-US"/>
+        </a:p>
+      </dgm:t>
+    </dgm:pt>
+    <dgm:pt modelId="{DBF77947-0AA8-4B91-8234-0C0DAEEB42E4}" type="sibTrans" cxnId="{2E51398D-BC6E-4C98-8FF7-D477CAE0EFF5}">
+      <dgm:prSet/>
+      <dgm:spPr/>
+      <dgm:t>
+        <a:bodyPr/>
+        <a:lstStyle/>
+        <a:p>
+          <a:endParaRPr lang="en-US"/>
+        </a:p>
+      </dgm:t>
+    </dgm:pt>
+    <dgm:pt modelId="{5F8EA75F-EC62-4E91-976A-A02045F4C260}" type="pres">
+      <dgm:prSet presAssocID="{5359AC54-C077-4F20-8BA0-07AB60BBCF7B}" presName="diagram" presStyleCnt="0">
+        <dgm:presLayoutVars>
+          <dgm:chPref val="1"/>
+          <dgm:dir/>
+          <dgm:animOne val="branch"/>
+          <dgm:animLvl val="lvl"/>
+          <dgm:resizeHandles val="exact"/>
+        </dgm:presLayoutVars>
+      </dgm:prSet>
+      <dgm:spPr/>
+    </dgm:pt>
+    <dgm:pt modelId="{D73C5EAD-FE13-4464-A023-A579E7527B0D}" type="pres">
+      <dgm:prSet presAssocID="{60E0BFDE-8E4F-4DF7-83FA-750D549853C2}" presName="root1" presStyleCnt="0"/>
+      <dgm:spPr/>
+    </dgm:pt>
+    <dgm:pt modelId="{3BCAB6E7-3C8B-4AD1-96A7-E15ED4DC1AB0}" type="pres">
+      <dgm:prSet presAssocID="{60E0BFDE-8E4F-4DF7-83FA-750D549853C2}" presName="LevelOneTextNode" presStyleLbl="node0" presStyleIdx="0" presStyleCnt="1">
+        <dgm:presLayoutVars>
+          <dgm:chPref val="3"/>
+        </dgm:presLayoutVars>
+      </dgm:prSet>
+      <dgm:spPr/>
+    </dgm:pt>
+    <dgm:pt modelId="{8F740A56-505D-4FF6-95FF-91ABBA25BC9B}" type="pres">
+      <dgm:prSet presAssocID="{60E0BFDE-8E4F-4DF7-83FA-750D549853C2}" presName="level2hierChild" presStyleCnt="0"/>
+      <dgm:spPr/>
+    </dgm:pt>
+    <dgm:pt modelId="{02DBC75F-EC9B-4A1C-B9DE-6892275ED7C8}" type="pres">
+      <dgm:prSet presAssocID="{718EF08F-174C-4039-AF76-97E96AB6E283}" presName="conn2-1" presStyleLbl="parChTrans1D2" presStyleIdx="0" presStyleCnt="2"/>
+      <dgm:spPr/>
+    </dgm:pt>
+    <dgm:pt modelId="{6DE6DF5F-FDFB-498F-9C05-7C9C22DA9A5D}" type="pres">
+      <dgm:prSet presAssocID="{718EF08F-174C-4039-AF76-97E96AB6E283}" presName="connTx" presStyleLbl="parChTrans1D2" presStyleIdx="0" presStyleCnt="2"/>
+      <dgm:spPr/>
+    </dgm:pt>
+    <dgm:pt modelId="{9F18E91C-831F-40F9-B9F3-7913006B6543}" type="pres">
+      <dgm:prSet presAssocID="{D4246179-824B-4DC4-8A7C-A9F0CBFC8832}" presName="root2" presStyleCnt="0"/>
+      <dgm:spPr/>
+    </dgm:pt>
+    <dgm:pt modelId="{856966A0-B3E8-4AAF-BADE-F7D74F234487}" type="pres">
+      <dgm:prSet presAssocID="{D4246179-824B-4DC4-8A7C-A9F0CBFC8832}" presName="LevelTwoTextNode" presStyleLbl="node2" presStyleIdx="0" presStyleCnt="2">
+        <dgm:presLayoutVars>
+          <dgm:chPref val="3"/>
+        </dgm:presLayoutVars>
+      </dgm:prSet>
+      <dgm:spPr/>
+    </dgm:pt>
+    <dgm:pt modelId="{AB728882-FE2A-4955-B847-56733D23CD26}" type="pres">
+      <dgm:prSet presAssocID="{D4246179-824B-4DC4-8A7C-A9F0CBFC8832}" presName="level3hierChild" presStyleCnt="0"/>
+      <dgm:spPr/>
+    </dgm:pt>
+    <dgm:pt modelId="{33F576D8-77B8-46AC-942C-78072A82BCB5}" type="pres">
+      <dgm:prSet presAssocID="{3A65EA20-1F98-4FD6-8585-E24364C35285}" presName="conn2-1" presStyleLbl="parChTrans1D2" presStyleIdx="1" presStyleCnt="2"/>
+      <dgm:spPr/>
+    </dgm:pt>
+    <dgm:pt modelId="{F7BD3A8E-4790-415D-B029-B7D0C221DAFD}" type="pres">
+      <dgm:prSet presAssocID="{3A65EA20-1F98-4FD6-8585-E24364C35285}" presName="connTx" presStyleLbl="parChTrans1D2" presStyleIdx="1" presStyleCnt="2"/>
+      <dgm:spPr/>
+    </dgm:pt>
+    <dgm:pt modelId="{BCA482E7-D9A8-49E1-89DC-71594284EC62}" type="pres">
+      <dgm:prSet presAssocID="{1CF01D51-7744-46DE-AD1E-B33E5AC5DDC4}" presName="root2" presStyleCnt="0"/>
+      <dgm:spPr/>
+    </dgm:pt>
+    <dgm:pt modelId="{53CBCBE4-8058-4DC4-8A24-70C23610BF67}" type="pres">
+      <dgm:prSet presAssocID="{1CF01D51-7744-46DE-AD1E-B33E5AC5DDC4}" presName="LevelTwoTextNode" presStyleLbl="node2" presStyleIdx="1" presStyleCnt="2">
+        <dgm:presLayoutVars>
+          <dgm:chPref val="3"/>
+        </dgm:presLayoutVars>
+      </dgm:prSet>
+      <dgm:spPr/>
+    </dgm:pt>
+    <dgm:pt modelId="{5F9F091C-84EE-44AA-8328-BF021BF379AF}" type="pres">
+      <dgm:prSet presAssocID="{1CF01D51-7744-46DE-AD1E-B33E5AC5DDC4}" presName="level3hierChild" presStyleCnt="0"/>
+      <dgm:spPr/>
+    </dgm:pt>
+  </dgm:ptLst>
+  <dgm:cxnLst>
+    <dgm:cxn modelId="{04571B10-68D9-4BB6-96D5-AA470C9449DE}" type="presOf" srcId="{3A65EA20-1F98-4FD6-8585-E24364C35285}" destId="{F7BD3A8E-4790-415D-B029-B7D0C221DAFD}" srcOrd="1" destOrd="0" presId="urn:microsoft.com/office/officeart/2005/8/layout/hierarchy2"/>
+    <dgm:cxn modelId="{DB601E40-8480-4C5B-9BE0-3B28655872F6}" srcId="{60E0BFDE-8E4F-4DF7-83FA-750D549853C2}" destId="{D4246179-824B-4DC4-8A7C-A9F0CBFC8832}" srcOrd="0" destOrd="0" parTransId="{718EF08F-174C-4039-AF76-97E96AB6E283}" sibTransId="{61434210-8BBC-4A3A-9310-D6F3F3232608}"/>
+    <dgm:cxn modelId="{17E03A5B-533B-4814-B969-04292DA179A6}" type="presOf" srcId="{D4246179-824B-4DC4-8A7C-A9F0CBFC8832}" destId="{856966A0-B3E8-4AAF-BADE-F7D74F234487}" srcOrd="0" destOrd="0" presId="urn:microsoft.com/office/officeart/2005/8/layout/hierarchy2"/>
+    <dgm:cxn modelId="{B6BB5A62-96D3-447F-88FC-FB78A62B455D}" type="presOf" srcId="{60E0BFDE-8E4F-4DF7-83FA-750D549853C2}" destId="{3BCAB6E7-3C8B-4AD1-96A7-E15ED4DC1AB0}" srcOrd="0" destOrd="0" presId="urn:microsoft.com/office/officeart/2005/8/layout/hierarchy2"/>
+    <dgm:cxn modelId="{AB8C5E4A-0783-41D3-9A46-A2BBA46A9105}" type="presOf" srcId="{3A65EA20-1F98-4FD6-8585-E24364C35285}" destId="{33F576D8-77B8-46AC-942C-78072A82BCB5}" srcOrd="0" destOrd="0" presId="urn:microsoft.com/office/officeart/2005/8/layout/hierarchy2"/>
+    <dgm:cxn modelId="{82A71850-2D32-497D-B19B-A812D4432542}" type="presOf" srcId="{5359AC54-C077-4F20-8BA0-07AB60BBCF7B}" destId="{5F8EA75F-EC62-4E91-976A-A02045F4C260}" srcOrd="0" destOrd="0" presId="urn:microsoft.com/office/officeart/2005/8/layout/hierarchy2"/>
+    <dgm:cxn modelId="{2E51398D-BC6E-4C98-8FF7-D477CAE0EFF5}" srcId="{60E0BFDE-8E4F-4DF7-83FA-750D549853C2}" destId="{1CF01D51-7744-46DE-AD1E-B33E5AC5DDC4}" srcOrd="1" destOrd="0" parTransId="{3A65EA20-1F98-4FD6-8585-E24364C35285}" sibTransId="{DBF77947-0AA8-4B91-8234-0C0DAEEB42E4}"/>
+    <dgm:cxn modelId="{D0BC3C90-5F64-43CC-B7F7-18231C607F08}" type="presOf" srcId="{718EF08F-174C-4039-AF76-97E96AB6E283}" destId="{6DE6DF5F-FDFB-498F-9C05-7C9C22DA9A5D}" srcOrd="1" destOrd="0" presId="urn:microsoft.com/office/officeart/2005/8/layout/hierarchy2"/>
+    <dgm:cxn modelId="{315BD194-E9EE-4440-A843-4867B7033A4E}" type="presOf" srcId="{1CF01D51-7744-46DE-AD1E-B33E5AC5DDC4}" destId="{53CBCBE4-8058-4DC4-8A24-70C23610BF67}" srcOrd="0" destOrd="0" presId="urn:microsoft.com/office/officeart/2005/8/layout/hierarchy2"/>
+    <dgm:cxn modelId="{91DFE5B3-51F3-4761-9B8B-62F3AA2985CE}" srcId="{5359AC54-C077-4F20-8BA0-07AB60BBCF7B}" destId="{60E0BFDE-8E4F-4DF7-83FA-750D549853C2}" srcOrd="0" destOrd="0" parTransId="{EF36957E-8A17-4887-87CE-84AC487564B9}" sibTransId="{BFBD4E85-2458-48C5-AE18-7BC7F112227B}"/>
+    <dgm:cxn modelId="{5CFF4EC8-1AA8-4D6A-872B-03ED75B7F555}" type="presOf" srcId="{718EF08F-174C-4039-AF76-97E96AB6E283}" destId="{02DBC75F-EC9B-4A1C-B9DE-6892275ED7C8}" srcOrd="0" destOrd="0" presId="urn:microsoft.com/office/officeart/2005/8/layout/hierarchy2"/>
+    <dgm:cxn modelId="{56C9358B-CDC9-4DFE-8D6A-263B45105A60}" type="presParOf" srcId="{5F8EA75F-EC62-4E91-976A-A02045F4C260}" destId="{D73C5EAD-FE13-4464-A023-A579E7527B0D}" srcOrd="0" destOrd="0" presId="urn:microsoft.com/office/officeart/2005/8/layout/hierarchy2"/>
+    <dgm:cxn modelId="{14BD741F-E829-42F9-953F-256CC824BE9D}" type="presParOf" srcId="{D73C5EAD-FE13-4464-A023-A579E7527B0D}" destId="{3BCAB6E7-3C8B-4AD1-96A7-E15ED4DC1AB0}" srcOrd="0" destOrd="0" presId="urn:microsoft.com/office/officeart/2005/8/layout/hierarchy2"/>
+    <dgm:cxn modelId="{796EECED-7F27-4827-977C-108FD0BA6AD4}" type="presParOf" srcId="{D73C5EAD-FE13-4464-A023-A579E7527B0D}" destId="{8F740A56-505D-4FF6-95FF-91ABBA25BC9B}" srcOrd="1" destOrd="0" presId="urn:microsoft.com/office/officeart/2005/8/layout/hierarchy2"/>
+    <dgm:cxn modelId="{CFBC4AF2-5EDC-455C-A8C8-688A85DA759E}" type="presParOf" srcId="{8F740A56-505D-4FF6-95FF-91ABBA25BC9B}" destId="{02DBC75F-EC9B-4A1C-B9DE-6892275ED7C8}" srcOrd="0" destOrd="0" presId="urn:microsoft.com/office/officeart/2005/8/layout/hierarchy2"/>
+    <dgm:cxn modelId="{53D4B1F4-2B7F-48DA-9A18-5A005FCA79FC}" type="presParOf" srcId="{02DBC75F-EC9B-4A1C-B9DE-6892275ED7C8}" destId="{6DE6DF5F-FDFB-498F-9C05-7C9C22DA9A5D}" srcOrd="0" destOrd="0" presId="urn:microsoft.com/office/officeart/2005/8/layout/hierarchy2"/>
+    <dgm:cxn modelId="{2D8C66EE-332D-4623-8796-E8960A538CBB}" type="presParOf" srcId="{8F740A56-505D-4FF6-95FF-91ABBA25BC9B}" destId="{9F18E91C-831F-40F9-B9F3-7913006B6543}" srcOrd="1" destOrd="0" presId="urn:microsoft.com/office/officeart/2005/8/layout/hierarchy2"/>
+    <dgm:cxn modelId="{B4227B17-8320-4432-9142-1745612424D0}" type="presParOf" srcId="{9F18E91C-831F-40F9-B9F3-7913006B6543}" destId="{856966A0-B3E8-4AAF-BADE-F7D74F234487}" srcOrd="0" destOrd="0" presId="urn:microsoft.com/office/officeart/2005/8/layout/hierarchy2"/>
+    <dgm:cxn modelId="{FCC0CA6D-68BF-4F6F-80A2-3D11C3A289D0}" type="presParOf" srcId="{9F18E91C-831F-40F9-B9F3-7913006B6543}" destId="{AB728882-FE2A-4955-B847-56733D23CD26}" srcOrd="1" destOrd="0" presId="urn:microsoft.com/office/officeart/2005/8/layout/hierarchy2"/>
+    <dgm:cxn modelId="{9CCCB899-CC44-4597-A53D-1D29CF5C85DC}" type="presParOf" srcId="{8F740A56-505D-4FF6-95FF-91ABBA25BC9B}" destId="{33F576D8-77B8-46AC-942C-78072A82BCB5}" srcOrd="2" destOrd="0" presId="urn:microsoft.com/office/officeart/2005/8/layout/hierarchy2"/>
+    <dgm:cxn modelId="{B23C7F87-237F-4A7B-AA45-C720AFF78FB2}" type="presParOf" srcId="{33F576D8-77B8-46AC-942C-78072A82BCB5}" destId="{F7BD3A8E-4790-415D-B029-B7D0C221DAFD}" srcOrd="0" destOrd="0" presId="urn:microsoft.com/office/officeart/2005/8/layout/hierarchy2"/>
+    <dgm:cxn modelId="{6C3486A3-CDF1-4C8B-A2BB-8C5363E541E7}" type="presParOf" srcId="{8F740A56-505D-4FF6-95FF-91ABBA25BC9B}" destId="{BCA482E7-D9A8-49E1-89DC-71594284EC62}" srcOrd="3" destOrd="0" presId="urn:microsoft.com/office/officeart/2005/8/layout/hierarchy2"/>
+    <dgm:cxn modelId="{23F180CE-BF89-4BDF-8E1D-A377C434AE68}" type="presParOf" srcId="{BCA482E7-D9A8-49E1-89DC-71594284EC62}" destId="{53CBCBE4-8058-4DC4-8A24-70C23610BF67}" srcOrd="0" destOrd="0" presId="urn:microsoft.com/office/officeart/2005/8/layout/hierarchy2"/>
+    <dgm:cxn modelId="{24245EDC-3596-4269-8FC2-819AB357161A}" type="presParOf" srcId="{BCA482E7-D9A8-49E1-89DC-71594284EC62}" destId="{5F9F091C-84EE-44AA-8328-BF021BF379AF}" srcOrd="1" destOrd="0" presId="urn:microsoft.com/office/officeart/2005/8/layout/hierarchy2"/>
+  </dgm:cxnLst>
+  <dgm:bg/>
+  <dgm:whole/>
+  <dgm:extLst>
+    <a:ext uri="http://schemas.microsoft.com/office/drawing/2008/diagram">
+      <dsp:dataModelExt xmlns:dsp="http://schemas.microsoft.com/office/drawing/2008/diagram" relId="rId6" minVer="http://schemas.openxmlformats.org/drawingml/2006/diagram"/>
+    </a:ext>
+  </dgm:extLst>
+</dgm:dataModel>
+</file>
+
+<file path=ppt/diagrams/data3.xml><?xml version="1.0" encoding="utf-8"?>
+<dgm:dataModel xmlns:dgm="http://schemas.openxmlformats.org/drawingml/2006/diagram" xmlns:a="http://schemas.openxmlformats.org/drawingml/2006/main">
+  <dgm:ptLst>
+    <dgm:pt modelId="{5359AC54-C077-4F20-8BA0-07AB60BBCF7B}" type="doc">
+      <dgm:prSet loTypeId="urn:microsoft.com/office/officeart/2005/8/layout/hierarchy2" loCatId="hierarchy" qsTypeId="urn:microsoft.com/office/officeart/2005/8/quickstyle/simple1" qsCatId="simple" csTypeId="urn:microsoft.com/office/officeart/2005/8/colors/accent1_2" csCatId="accent1" phldr="1"/>
+      <dgm:spPr/>
+      <dgm:t>
+        <a:bodyPr/>
+        <a:lstStyle/>
+        <a:p>
+          <a:endParaRPr lang="en-US"/>
+        </a:p>
+      </dgm:t>
+    </dgm:pt>
+    <dgm:pt modelId="{60E0BFDE-8E4F-4DF7-83FA-750D549853C2}">
+      <dgm:prSet phldrT="[Text]" phldr="0"/>
+      <dgm:spPr/>
+      <dgm:t>
+        <a:bodyPr/>
+        <a:lstStyle/>
+        <a:p>
+          <a:r>
+            <a:rPr lang="en-US" dirty="0"/>
+            <a:t>CCFA</a:t>
+          </a:r>
+        </a:p>
+      </dgm:t>
+    </dgm:pt>
+    <dgm:pt modelId="{EF36957E-8A17-4887-87CE-84AC487564B9}" type="parTrans" cxnId="{91DFE5B3-51F3-4761-9B8B-62F3AA2985CE}">
+      <dgm:prSet/>
+      <dgm:spPr/>
+      <dgm:t>
+        <a:bodyPr/>
+        <a:lstStyle/>
+        <a:p>
+          <a:endParaRPr lang="en-US"/>
+        </a:p>
+      </dgm:t>
+    </dgm:pt>
+    <dgm:pt modelId="{BFBD4E85-2458-48C5-AE18-7BC7F112227B}" type="sibTrans" cxnId="{91DFE5B3-51F3-4761-9B8B-62F3AA2985CE}">
+      <dgm:prSet/>
+      <dgm:spPr/>
+      <dgm:t>
+        <a:bodyPr/>
+        <a:lstStyle/>
+        <a:p>
+          <a:endParaRPr lang="en-US"/>
+        </a:p>
+      </dgm:t>
+    </dgm:pt>
+    <dgm:pt modelId="{D4246179-824B-4DC4-8A7C-A9F0CBFC8832}">
+      <dgm:prSet phldrT="[Text]" phldr="0" custT="1"/>
+      <dgm:spPr>
+        <a:solidFill>
+          <a:schemeClr val="accent2">
+            <a:lumMod val="60000"/>
+            <a:lumOff val="40000"/>
+          </a:schemeClr>
+        </a:solidFill>
+      </dgm:spPr>
+      <dgm:t>
+        <a:bodyPr/>
+        <a:lstStyle/>
+        <a:p>
+          <a:r>
+            <a:rPr lang="en-US" altLang="zh-CN" sz="1600" dirty="0"/>
+            <a:t>Loss severity</a:t>
+          </a:r>
+          <a:endParaRPr lang="en-US" sz="1600" dirty="0"/>
+        </a:p>
+      </dgm:t>
+    </dgm:pt>
+    <dgm:pt modelId="{718EF08F-174C-4039-AF76-97E96AB6E283}" type="parTrans" cxnId="{DB601E40-8480-4C5B-9BE0-3B28655872F6}">
+      <dgm:prSet/>
+      <dgm:spPr/>
+      <dgm:t>
+        <a:bodyPr/>
+        <a:lstStyle/>
+        <a:p>
+          <a:endParaRPr lang="en-US"/>
+        </a:p>
+      </dgm:t>
+    </dgm:pt>
+    <dgm:pt modelId="{61434210-8BBC-4A3A-9310-D6F3F3232608}" type="sibTrans" cxnId="{DB601E40-8480-4C5B-9BE0-3B28655872F6}">
+      <dgm:prSet/>
+      <dgm:spPr/>
+      <dgm:t>
+        <a:bodyPr/>
+        <a:lstStyle/>
+        <a:p>
+          <a:endParaRPr lang="en-US"/>
+        </a:p>
+      </dgm:t>
+    </dgm:pt>
+    <dgm:pt modelId="{1CF01D51-7744-46DE-AD1E-B33E5AC5DDC4}">
+      <dgm:prSet phldrT="[Text]" phldr="0" custT="1"/>
+      <dgm:spPr>
+        <a:solidFill>
+          <a:schemeClr val="accent2">
+            <a:lumMod val="60000"/>
+            <a:lumOff val="40000"/>
+          </a:schemeClr>
+        </a:solidFill>
+      </dgm:spPr>
+      <dgm:t>
+        <a:bodyPr/>
+        <a:lstStyle/>
+        <a:p>
+          <a:r>
+            <a:rPr lang="en-US" sz="1600" dirty="0"/>
+            <a:t>Default Type</a:t>
+          </a:r>
+        </a:p>
+      </dgm:t>
+    </dgm:pt>
+    <dgm:pt modelId="{3A65EA20-1F98-4FD6-8585-E24364C35285}" type="parTrans" cxnId="{2E51398D-BC6E-4C98-8FF7-D477CAE0EFF5}">
+      <dgm:prSet/>
+      <dgm:spPr/>
+      <dgm:t>
+        <a:bodyPr/>
+        <a:lstStyle/>
+        <a:p>
+          <a:endParaRPr lang="en-US"/>
+        </a:p>
+      </dgm:t>
+    </dgm:pt>
+    <dgm:pt modelId="{DBF77947-0AA8-4B91-8234-0C0DAEEB42E4}" type="sibTrans" cxnId="{2E51398D-BC6E-4C98-8FF7-D477CAE0EFF5}">
+      <dgm:prSet/>
+      <dgm:spPr/>
+      <dgm:t>
+        <a:bodyPr/>
+        <a:lstStyle/>
+        <a:p>
+          <a:endParaRPr lang="en-US"/>
+        </a:p>
+      </dgm:t>
+    </dgm:pt>
+    <dgm:pt modelId="{49A949D1-D7FF-4AF7-8CE4-1729E1E1167E}">
+      <dgm:prSet phldrT="[Text]" phldr="0" custT="1"/>
+      <dgm:spPr>
+        <a:solidFill>
+          <a:schemeClr val="accent2">
+            <a:lumMod val="60000"/>
+            <a:lumOff val="40000"/>
+          </a:schemeClr>
+        </a:solidFill>
+      </dgm:spPr>
+      <dgm:t>
+        <a:bodyPr/>
+        <a:lstStyle/>
+        <a:p>
+          <a:r>
+            <a:rPr lang="en-US" sz="1600" dirty="0"/>
+            <a:t>Mortgage Insurance</a:t>
+          </a:r>
+        </a:p>
+      </dgm:t>
+    </dgm:pt>
+    <dgm:pt modelId="{002127E7-8AC5-4116-BD7C-7DEF0D826E4F}" type="parTrans" cxnId="{87031F8E-FC95-466D-B9EA-941F2E669A01}">
+      <dgm:prSet/>
+      <dgm:spPr/>
+      <dgm:t>
+        <a:bodyPr/>
+        <a:lstStyle/>
+        <a:p>
+          <a:endParaRPr lang="en-US"/>
+        </a:p>
+      </dgm:t>
+    </dgm:pt>
+    <dgm:pt modelId="{9679669E-9375-4779-A050-BA88460E3603}" type="sibTrans" cxnId="{87031F8E-FC95-466D-B9EA-941F2E669A01}">
+      <dgm:prSet/>
+      <dgm:spPr/>
+      <dgm:t>
+        <a:bodyPr/>
+        <a:lstStyle/>
+        <a:p>
+          <a:endParaRPr lang="en-US"/>
+        </a:p>
+      </dgm:t>
+    </dgm:pt>
+    <dgm:pt modelId="{5F8EA75F-EC62-4E91-976A-A02045F4C260}" type="pres">
+      <dgm:prSet presAssocID="{5359AC54-C077-4F20-8BA0-07AB60BBCF7B}" presName="diagram" presStyleCnt="0">
+        <dgm:presLayoutVars>
+          <dgm:chPref val="1"/>
+          <dgm:dir/>
+          <dgm:animOne val="branch"/>
+          <dgm:animLvl val="lvl"/>
+          <dgm:resizeHandles val="exact"/>
+        </dgm:presLayoutVars>
+      </dgm:prSet>
+      <dgm:spPr/>
+    </dgm:pt>
+    <dgm:pt modelId="{D73C5EAD-FE13-4464-A023-A579E7527B0D}" type="pres">
+      <dgm:prSet presAssocID="{60E0BFDE-8E4F-4DF7-83FA-750D549853C2}" presName="root1" presStyleCnt="0"/>
+      <dgm:spPr/>
+    </dgm:pt>
+    <dgm:pt modelId="{3BCAB6E7-3C8B-4AD1-96A7-E15ED4DC1AB0}" type="pres">
+      <dgm:prSet presAssocID="{60E0BFDE-8E4F-4DF7-83FA-750D549853C2}" presName="LevelOneTextNode" presStyleLbl="node0" presStyleIdx="0" presStyleCnt="1" custLinFactNeighborX="-61894" custLinFactNeighborY="-3668">
+        <dgm:presLayoutVars>
+          <dgm:chPref val="3"/>
+        </dgm:presLayoutVars>
+      </dgm:prSet>
+      <dgm:spPr/>
+    </dgm:pt>
+    <dgm:pt modelId="{8F740A56-505D-4FF6-95FF-91ABBA25BC9B}" type="pres">
+      <dgm:prSet presAssocID="{60E0BFDE-8E4F-4DF7-83FA-750D549853C2}" presName="level2hierChild" presStyleCnt="0"/>
+      <dgm:spPr/>
+    </dgm:pt>
+    <dgm:pt modelId="{02DBC75F-EC9B-4A1C-B9DE-6892275ED7C8}" type="pres">
+      <dgm:prSet presAssocID="{718EF08F-174C-4039-AF76-97E96AB6E283}" presName="conn2-1" presStyleLbl="parChTrans1D2" presStyleIdx="0" presStyleCnt="3"/>
+      <dgm:spPr/>
+    </dgm:pt>
+    <dgm:pt modelId="{6DE6DF5F-FDFB-498F-9C05-7C9C22DA9A5D}" type="pres">
+      <dgm:prSet presAssocID="{718EF08F-174C-4039-AF76-97E96AB6E283}" presName="connTx" presStyleLbl="parChTrans1D2" presStyleIdx="0" presStyleCnt="3"/>
+      <dgm:spPr/>
+    </dgm:pt>
+    <dgm:pt modelId="{9F18E91C-831F-40F9-B9F3-7913006B6543}" type="pres">
+      <dgm:prSet presAssocID="{D4246179-824B-4DC4-8A7C-A9F0CBFC8832}" presName="root2" presStyleCnt="0"/>
+      <dgm:spPr/>
+    </dgm:pt>
+    <dgm:pt modelId="{856966A0-B3E8-4AAF-BADE-F7D74F234487}" type="pres">
+      <dgm:prSet presAssocID="{D4246179-824B-4DC4-8A7C-A9F0CBFC8832}" presName="LevelTwoTextNode" presStyleLbl="node2" presStyleIdx="0" presStyleCnt="3">
+        <dgm:presLayoutVars>
+          <dgm:chPref val="3"/>
+        </dgm:presLayoutVars>
+      </dgm:prSet>
+      <dgm:spPr/>
+    </dgm:pt>
+    <dgm:pt modelId="{AB728882-FE2A-4955-B847-56733D23CD26}" type="pres">
+      <dgm:prSet presAssocID="{D4246179-824B-4DC4-8A7C-A9F0CBFC8832}" presName="level3hierChild" presStyleCnt="0"/>
+      <dgm:spPr/>
+    </dgm:pt>
+    <dgm:pt modelId="{33F576D8-77B8-46AC-942C-78072A82BCB5}" type="pres">
+      <dgm:prSet presAssocID="{3A65EA20-1F98-4FD6-8585-E24364C35285}" presName="conn2-1" presStyleLbl="parChTrans1D2" presStyleIdx="1" presStyleCnt="3"/>
+      <dgm:spPr/>
+    </dgm:pt>
+    <dgm:pt modelId="{F7BD3A8E-4790-415D-B029-B7D0C221DAFD}" type="pres">
+      <dgm:prSet presAssocID="{3A65EA20-1F98-4FD6-8585-E24364C35285}" presName="connTx" presStyleLbl="parChTrans1D2" presStyleIdx="1" presStyleCnt="3"/>
+      <dgm:spPr/>
+    </dgm:pt>
+    <dgm:pt modelId="{BCA482E7-D9A8-49E1-89DC-71594284EC62}" type="pres">
+      <dgm:prSet presAssocID="{1CF01D51-7744-46DE-AD1E-B33E5AC5DDC4}" presName="root2" presStyleCnt="0"/>
+      <dgm:spPr/>
+    </dgm:pt>
+    <dgm:pt modelId="{53CBCBE4-8058-4DC4-8A24-70C23610BF67}" type="pres">
+      <dgm:prSet presAssocID="{1CF01D51-7744-46DE-AD1E-B33E5AC5DDC4}" presName="LevelTwoTextNode" presStyleLbl="node2" presStyleIdx="1" presStyleCnt="3">
+        <dgm:presLayoutVars>
+          <dgm:chPref val="3"/>
+        </dgm:presLayoutVars>
+      </dgm:prSet>
+      <dgm:spPr/>
+    </dgm:pt>
+    <dgm:pt modelId="{5F9F091C-84EE-44AA-8328-BF021BF379AF}" type="pres">
+      <dgm:prSet presAssocID="{1CF01D51-7744-46DE-AD1E-B33E5AC5DDC4}" presName="level3hierChild" presStyleCnt="0"/>
+      <dgm:spPr/>
+    </dgm:pt>
+    <dgm:pt modelId="{AD5DA7A3-BB8B-4ED2-ADB7-EBF9C8A7B90C}" type="pres">
+      <dgm:prSet presAssocID="{002127E7-8AC5-4116-BD7C-7DEF0D826E4F}" presName="conn2-1" presStyleLbl="parChTrans1D2" presStyleIdx="2" presStyleCnt="3"/>
+      <dgm:spPr/>
+    </dgm:pt>
+    <dgm:pt modelId="{5AA69DEC-3041-44FD-BEA9-03B93F901A88}" type="pres">
+      <dgm:prSet presAssocID="{002127E7-8AC5-4116-BD7C-7DEF0D826E4F}" presName="connTx" presStyleLbl="parChTrans1D2" presStyleIdx="2" presStyleCnt="3"/>
+      <dgm:spPr/>
+    </dgm:pt>
+    <dgm:pt modelId="{27086270-9615-462E-BCFB-2F76F1B17EFB}" type="pres">
+      <dgm:prSet presAssocID="{49A949D1-D7FF-4AF7-8CE4-1729E1E1167E}" presName="root2" presStyleCnt="0"/>
+      <dgm:spPr/>
+    </dgm:pt>
+    <dgm:pt modelId="{657F305A-03D9-4556-BA21-F3EBCB0C16D5}" type="pres">
+      <dgm:prSet presAssocID="{49A949D1-D7FF-4AF7-8CE4-1729E1E1167E}" presName="LevelTwoTextNode" presStyleLbl="node2" presStyleIdx="2" presStyleCnt="3">
+        <dgm:presLayoutVars>
+          <dgm:chPref val="3"/>
+        </dgm:presLayoutVars>
+      </dgm:prSet>
+      <dgm:spPr/>
+    </dgm:pt>
+    <dgm:pt modelId="{36A38DDD-B3AB-40B8-B04E-A5AD30836395}" type="pres">
+      <dgm:prSet presAssocID="{49A949D1-D7FF-4AF7-8CE4-1729E1E1167E}" presName="level3hierChild" presStyleCnt="0"/>
+      <dgm:spPr/>
+    </dgm:pt>
+  </dgm:ptLst>
+  <dgm:cxnLst>
+    <dgm:cxn modelId="{04571B10-68D9-4BB6-96D5-AA470C9449DE}" type="presOf" srcId="{3A65EA20-1F98-4FD6-8585-E24364C35285}" destId="{F7BD3A8E-4790-415D-B029-B7D0C221DAFD}" srcOrd="1" destOrd="0" presId="urn:microsoft.com/office/officeart/2005/8/layout/hierarchy2"/>
+    <dgm:cxn modelId="{76A2422F-AF26-40A3-A77A-97D6907C82C3}" type="presOf" srcId="{002127E7-8AC5-4116-BD7C-7DEF0D826E4F}" destId="{5AA69DEC-3041-44FD-BEA9-03B93F901A88}" srcOrd="1" destOrd="0" presId="urn:microsoft.com/office/officeart/2005/8/layout/hierarchy2"/>
+    <dgm:cxn modelId="{DB601E40-8480-4C5B-9BE0-3B28655872F6}" srcId="{60E0BFDE-8E4F-4DF7-83FA-750D549853C2}" destId="{D4246179-824B-4DC4-8A7C-A9F0CBFC8832}" srcOrd="0" destOrd="0" parTransId="{718EF08F-174C-4039-AF76-97E96AB6E283}" sibTransId="{61434210-8BBC-4A3A-9310-D6F3F3232608}"/>
+    <dgm:cxn modelId="{17E03A5B-533B-4814-B969-04292DA179A6}" type="presOf" srcId="{D4246179-824B-4DC4-8A7C-A9F0CBFC8832}" destId="{856966A0-B3E8-4AAF-BADE-F7D74F234487}" srcOrd="0" destOrd="0" presId="urn:microsoft.com/office/officeart/2005/8/layout/hierarchy2"/>
+    <dgm:cxn modelId="{B6BB5A62-96D3-447F-88FC-FB78A62B455D}" type="presOf" srcId="{60E0BFDE-8E4F-4DF7-83FA-750D549853C2}" destId="{3BCAB6E7-3C8B-4AD1-96A7-E15ED4DC1AB0}" srcOrd="0" destOrd="0" presId="urn:microsoft.com/office/officeart/2005/8/layout/hierarchy2"/>
+    <dgm:cxn modelId="{AB8C5E4A-0783-41D3-9A46-A2BBA46A9105}" type="presOf" srcId="{3A65EA20-1F98-4FD6-8585-E24364C35285}" destId="{33F576D8-77B8-46AC-942C-78072A82BCB5}" srcOrd="0" destOrd="0" presId="urn:microsoft.com/office/officeart/2005/8/layout/hierarchy2"/>
+    <dgm:cxn modelId="{82A71850-2D32-497D-B19B-A812D4432542}" type="presOf" srcId="{5359AC54-C077-4F20-8BA0-07AB60BBCF7B}" destId="{5F8EA75F-EC62-4E91-976A-A02045F4C260}" srcOrd="0" destOrd="0" presId="urn:microsoft.com/office/officeart/2005/8/layout/hierarchy2"/>
+    <dgm:cxn modelId="{B2ED9775-4B92-4305-AF51-44A788B3B11D}" type="presOf" srcId="{49A949D1-D7FF-4AF7-8CE4-1729E1E1167E}" destId="{657F305A-03D9-4556-BA21-F3EBCB0C16D5}" srcOrd="0" destOrd="0" presId="urn:microsoft.com/office/officeart/2005/8/layout/hierarchy2"/>
+    <dgm:cxn modelId="{2E51398D-BC6E-4C98-8FF7-D477CAE0EFF5}" srcId="{60E0BFDE-8E4F-4DF7-83FA-750D549853C2}" destId="{1CF01D51-7744-46DE-AD1E-B33E5AC5DDC4}" srcOrd="1" destOrd="0" parTransId="{3A65EA20-1F98-4FD6-8585-E24364C35285}" sibTransId="{DBF77947-0AA8-4B91-8234-0C0DAEEB42E4}"/>
+    <dgm:cxn modelId="{87031F8E-FC95-466D-B9EA-941F2E669A01}" srcId="{60E0BFDE-8E4F-4DF7-83FA-750D549853C2}" destId="{49A949D1-D7FF-4AF7-8CE4-1729E1E1167E}" srcOrd="2" destOrd="0" parTransId="{002127E7-8AC5-4116-BD7C-7DEF0D826E4F}" sibTransId="{9679669E-9375-4779-A050-BA88460E3603}"/>
+    <dgm:cxn modelId="{D0BC3C90-5F64-43CC-B7F7-18231C607F08}" type="presOf" srcId="{718EF08F-174C-4039-AF76-97E96AB6E283}" destId="{6DE6DF5F-FDFB-498F-9C05-7C9C22DA9A5D}" srcOrd="1" destOrd="0" presId="urn:microsoft.com/office/officeart/2005/8/layout/hierarchy2"/>
+    <dgm:cxn modelId="{315BD194-E9EE-4440-A843-4867B7033A4E}" type="presOf" srcId="{1CF01D51-7744-46DE-AD1E-B33E5AC5DDC4}" destId="{53CBCBE4-8058-4DC4-8A24-70C23610BF67}" srcOrd="0" destOrd="0" presId="urn:microsoft.com/office/officeart/2005/8/layout/hierarchy2"/>
+    <dgm:cxn modelId="{A5CD6C9D-7E45-4A87-BC0A-64E34CC87364}" type="presOf" srcId="{002127E7-8AC5-4116-BD7C-7DEF0D826E4F}" destId="{AD5DA7A3-BB8B-4ED2-ADB7-EBF9C8A7B90C}" srcOrd="0" destOrd="0" presId="urn:microsoft.com/office/officeart/2005/8/layout/hierarchy2"/>
+    <dgm:cxn modelId="{91DFE5B3-51F3-4761-9B8B-62F3AA2985CE}" srcId="{5359AC54-C077-4F20-8BA0-07AB60BBCF7B}" destId="{60E0BFDE-8E4F-4DF7-83FA-750D549853C2}" srcOrd="0" destOrd="0" parTransId="{EF36957E-8A17-4887-87CE-84AC487564B9}" sibTransId="{BFBD4E85-2458-48C5-AE18-7BC7F112227B}"/>
+    <dgm:cxn modelId="{5CFF4EC8-1AA8-4D6A-872B-03ED75B7F555}" type="presOf" srcId="{718EF08F-174C-4039-AF76-97E96AB6E283}" destId="{02DBC75F-EC9B-4A1C-B9DE-6892275ED7C8}" srcOrd="0" destOrd="0" presId="urn:microsoft.com/office/officeart/2005/8/layout/hierarchy2"/>
+    <dgm:cxn modelId="{56C9358B-CDC9-4DFE-8D6A-263B45105A60}" type="presParOf" srcId="{5F8EA75F-EC62-4E91-976A-A02045F4C260}" destId="{D73C5EAD-FE13-4464-A023-A579E7527B0D}" srcOrd="0" destOrd="0" presId="urn:microsoft.com/office/officeart/2005/8/layout/hierarchy2"/>
+    <dgm:cxn modelId="{14BD741F-E829-42F9-953F-256CC824BE9D}" type="presParOf" srcId="{D73C5EAD-FE13-4464-A023-A579E7527B0D}" destId="{3BCAB6E7-3C8B-4AD1-96A7-E15ED4DC1AB0}" srcOrd="0" destOrd="0" presId="urn:microsoft.com/office/officeart/2005/8/layout/hierarchy2"/>
+    <dgm:cxn modelId="{796EECED-7F27-4827-977C-108FD0BA6AD4}" type="presParOf" srcId="{D73C5EAD-FE13-4464-A023-A579E7527B0D}" destId="{8F740A56-505D-4FF6-95FF-91ABBA25BC9B}" srcOrd="1" destOrd="0" presId="urn:microsoft.com/office/officeart/2005/8/layout/hierarchy2"/>
+    <dgm:cxn modelId="{CFBC4AF2-5EDC-455C-A8C8-688A85DA759E}" type="presParOf" srcId="{8F740A56-505D-4FF6-95FF-91ABBA25BC9B}" destId="{02DBC75F-EC9B-4A1C-B9DE-6892275ED7C8}" srcOrd="0" destOrd="0" presId="urn:microsoft.com/office/officeart/2005/8/layout/hierarchy2"/>
+    <dgm:cxn modelId="{53D4B1F4-2B7F-48DA-9A18-5A005FCA79FC}" type="presParOf" srcId="{02DBC75F-EC9B-4A1C-B9DE-6892275ED7C8}" destId="{6DE6DF5F-FDFB-498F-9C05-7C9C22DA9A5D}" srcOrd="0" destOrd="0" presId="urn:microsoft.com/office/officeart/2005/8/layout/hierarchy2"/>
+    <dgm:cxn modelId="{2D8C66EE-332D-4623-8796-E8960A538CBB}" type="presParOf" srcId="{8F740A56-505D-4FF6-95FF-91ABBA25BC9B}" destId="{9F18E91C-831F-40F9-B9F3-7913006B6543}" srcOrd="1" destOrd="0" presId="urn:microsoft.com/office/officeart/2005/8/layout/hierarchy2"/>
+    <dgm:cxn modelId="{B4227B17-8320-4432-9142-1745612424D0}" type="presParOf" srcId="{9F18E91C-831F-40F9-B9F3-7913006B6543}" destId="{856966A0-B3E8-4AAF-BADE-F7D74F234487}" srcOrd="0" destOrd="0" presId="urn:microsoft.com/office/officeart/2005/8/layout/hierarchy2"/>
+    <dgm:cxn modelId="{FCC0CA6D-68BF-4F6F-80A2-3D11C3A289D0}" type="presParOf" srcId="{9F18E91C-831F-40F9-B9F3-7913006B6543}" destId="{AB728882-FE2A-4955-B847-56733D23CD26}" srcOrd="1" destOrd="0" presId="urn:microsoft.com/office/officeart/2005/8/layout/hierarchy2"/>
+    <dgm:cxn modelId="{9CCCB899-CC44-4597-A53D-1D29CF5C85DC}" type="presParOf" srcId="{8F740A56-505D-4FF6-95FF-91ABBA25BC9B}" destId="{33F576D8-77B8-46AC-942C-78072A82BCB5}" srcOrd="2" destOrd="0" presId="urn:microsoft.com/office/officeart/2005/8/layout/hierarchy2"/>
+    <dgm:cxn modelId="{B23C7F87-237F-4A7B-AA45-C720AFF78FB2}" type="presParOf" srcId="{33F576D8-77B8-46AC-942C-78072A82BCB5}" destId="{F7BD3A8E-4790-415D-B029-B7D0C221DAFD}" srcOrd="0" destOrd="0" presId="urn:microsoft.com/office/officeart/2005/8/layout/hierarchy2"/>
+    <dgm:cxn modelId="{6C3486A3-CDF1-4C8B-A2BB-8C5363E541E7}" type="presParOf" srcId="{8F740A56-505D-4FF6-95FF-91ABBA25BC9B}" destId="{BCA482E7-D9A8-49E1-89DC-71594284EC62}" srcOrd="3" destOrd="0" presId="urn:microsoft.com/office/officeart/2005/8/layout/hierarchy2"/>
+    <dgm:cxn modelId="{23F180CE-BF89-4BDF-8E1D-A377C434AE68}" type="presParOf" srcId="{BCA482E7-D9A8-49E1-89DC-71594284EC62}" destId="{53CBCBE4-8058-4DC4-8A24-70C23610BF67}" srcOrd="0" destOrd="0" presId="urn:microsoft.com/office/officeart/2005/8/layout/hierarchy2"/>
+    <dgm:cxn modelId="{24245EDC-3596-4269-8FC2-819AB357161A}" type="presParOf" srcId="{BCA482E7-D9A8-49E1-89DC-71594284EC62}" destId="{5F9F091C-84EE-44AA-8328-BF021BF379AF}" srcOrd="1" destOrd="0" presId="urn:microsoft.com/office/officeart/2005/8/layout/hierarchy2"/>
+    <dgm:cxn modelId="{0777CC96-36E5-4D0F-8233-54B9AF5B78FA}" type="presParOf" srcId="{8F740A56-505D-4FF6-95FF-91ABBA25BC9B}" destId="{AD5DA7A3-BB8B-4ED2-ADB7-EBF9C8A7B90C}" srcOrd="4" destOrd="0" presId="urn:microsoft.com/office/officeart/2005/8/layout/hierarchy2"/>
+    <dgm:cxn modelId="{BC7148BC-021D-447E-A4CB-520463117AD3}" type="presParOf" srcId="{AD5DA7A3-BB8B-4ED2-ADB7-EBF9C8A7B90C}" destId="{5AA69DEC-3041-44FD-BEA9-03B93F901A88}" srcOrd="0" destOrd="0" presId="urn:microsoft.com/office/officeart/2005/8/layout/hierarchy2"/>
+    <dgm:cxn modelId="{D2345CC5-9802-42A5-B3D4-5E9BA58D9977}" type="presParOf" srcId="{8F740A56-505D-4FF6-95FF-91ABBA25BC9B}" destId="{27086270-9615-462E-BCFB-2F76F1B17EFB}" srcOrd="5" destOrd="0" presId="urn:microsoft.com/office/officeart/2005/8/layout/hierarchy2"/>
+    <dgm:cxn modelId="{4B2BD113-8E98-4E41-A9A3-653F93C93FED}" type="presParOf" srcId="{27086270-9615-462E-BCFB-2F76F1B17EFB}" destId="{657F305A-03D9-4556-BA21-F3EBCB0C16D5}" srcOrd="0" destOrd="0" presId="urn:microsoft.com/office/officeart/2005/8/layout/hierarchy2"/>
+    <dgm:cxn modelId="{D0BF2F68-0323-4CE9-9742-C23B592967DA}" type="presParOf" srcId="{27086270-9615-462E-BCFB-2F76F1B17EFB}" destId="{36A38DDD-B3AB-40B8-B04E-A5AD30836395}" srcOrd="1" destOrd="0" presId="urn:microsoft.com/office/officeart/2005/8/layout/hierarchy2"/>
+  </dgm:cxnLst>
+  <dgm:bg/>
+  <dgm:whole/>
+  <dgm:extLst>
+    <a:ext uri="http://schemas.microsoft.com/office/drawing/2008/diagram">
+      <dsp:dataModelExt xmlns:dsp="http://schemas.microsoft.com/office/drawing/2008/diagram" relId="rId11" minVer="http://schemas.openxmlformats.org/drawingml/2006/diagram"/>
+    </a:ext>
+  </dgm:extLst>
+</dgm:dataModel>
+</file>
+
+<file path=ppt/diagrams/data4.xml><?xml version="1.0" encoding="utf-8"?>
+<dgm:dataModel xmlns:dgm="http://schemas.openxmlformats.org/drawingml/2006/diagram" xmlns:a="http://schemas.openxmlformats.org/drawingml/2006/main">
+  <dgm:ptLst>
+    <dgm:pt modelId="{5359AC54-C077-4F20-8BA0-07AB60BBCF7B}" type="doc">
+      <dgm:prSet loTypeId="urn:microsoft.com/office/officeart/2005/8/layout/hierarchy2" loCatId="hierarchy" qsTypeId="urn:microsoft.com/office/officeart/2005/8/quickstyle/simple1" qsCatId="simple" csTypeId="urn:microsoft.com/office/officeart/2005/8/colors/accent1_2" csCatId="accent1" phldr="1"/>
+      <dgm:spPr/>
+      <dgm:t>
+        <a:bodyPr/>
+        <a:lstStyle/>
+        <a:p>
+          <a:endParaRPr lang="en-US"/>
+        </a:p>
+      </dgm:t>
+    </dgm:pt>
+    <dgm:pt modelId="{60E0BFDE-8E4F-4DF7-83FA-750D549853C2}">
+      <dgm:prSet phldrT="[Text]" phldr="0"/>
+      <dgm:spPr/>
+      <dgm:t>
+        <a:bodyPr/>
+        <a:lstStyle/>
+        <a:p>
+          <a:r>
+            <a:rPr lang="en-US" dirty="0"/>
+            <a:t>EMA</a:t>
+          </a:r>
+        </a:p>
+      </dgm:t>
+    </dgm:pt>
+    <dgm:pt modelId="{EF36957E-8A17-4887-87CE-84AC487564B9}" type="parTrans" cxnId="{91DFE5B3-51F3-4761-9B8B-62F3AA2985CE}">
+      <dgm:prSet/>
+      <dgm:spPr/>
+      <dgm:t>
+        <a:bodyPr/>
+        <a:lstStyle/>
+        <a:p>
+          <a:endParaRPr lang="en-US"/>
+        </a:p>
+      </dgm:t>
+    </dgm:pt>
+    <dgm:pt modelId="{BFBD4E85-2458-48C5-AE18-7BC7F112227B}" type="sibTrans" cxnId="{91DFE5B3-51F3-4761-9B8B-62F3AA2985CE}">
+      <dgm:prSet/>
+      <dgm:spPr/>
+      <dgm:t>
+        <a:bodyPr/>
+        <a:lstStyle/>
+        <a:p>
+          <a:endParaRPr lang="en-US"/>
+        </a:p>
+      </dgm:t>
+    </dgm:pt>
+    <dgm:pt modelId="{5F8EA75F-EC62-4E91-976A-A02045F4C260}" type="pres">
+      <dgm:prSet presAssocID="{5359AC54-C077-4F20-8BA0-07AB60BBCF7B}" presName="diagram" presStyleCnt="0">
+        <dgm:presLayoutVars>
+          <dgm:chPref val="1"/>
+          <dgm:dir/>
+          <dgm:animOne val="branch"/>
+          <dgm:animLvl val="lvl"/>
+          <dgm:resizeHandles val="exact"/>
+        </dgm:presLayoutVars>
+      </dgm:prSet>
+      <dgm:spPr/>
+    </dgm:pt>
+    <dgm:pt modelId="{D73C5EAD-FE13-4464-A023-A579E7527B0D}" type="pres">
+      <dgm:prSet presAssocID="{60E0BFDE-8E4F-4DF7-83FA-750D549853C2}" presName="root1" presStyleCnt="0"/>
+      <dgm:spPr/>
+    </dgm:pt>
+    <dgm:pt modelId="{3BCAB6E7-3C8B-4AD1-96A7-E15ED4DC1AB0}" type="pres">
+      <dgm:prSet presAssocID="{60E0BFDE-8E4F-4DF7-83FA-750D549853C2}" presName="LevelOneTextNode" presStyleLbl="node0" presStyleIdx="0" presStyleCnt="1" custLinFactNeighborX="-61894" custLinFactNeighborY="-3668">
+        <dgm:presLayoutVars>
+          <dgm:chPref val="3"/>
+        </dgm:presLayoutVars>
+      </dgm:prSet>
+      <dgm:spPr/>
+    </dgm:pt>
+    <dgm:pt modelId="{8F740A56-505D-4FF6-95FF-91ABBA25BC9B}" type="pres">
+      <dgm:prSet presAssocID="{60E0BFDE-8E4F-4DF7-83FA-750D549853C2}" presName="level2hierChild" presStyleCnt="0"/>
+      <dgm:spPr/>
+    </dgm:pt>
+  </dgm:ptLst>
+  <dgm:cxnLst>
+    <dgm:cxn modelId="{B6BB5A62-96D3-447F-88FC-FB78A62B455D}" type="presOf" srcId="{60E0BFDE-8E4F-4DF7-83FA-750D549853C2}" destId="{3BCAB6E7-3C8B-4AD1-96A7-E15ED4DC1AB0}" srcOrd="0" destOrd="0" presId="urn:microsoft.com/office/officeart/2005/8/layout/hierarchy2"/>
+    <dgm:cxn modelId="{82A71850-2D32-497D-B19B-A812D4432542}" type="presOf" srcId="{5359AC54-C077-4F20-8BA0-07AB60BBCF7B}" destId="{5F8EA75F-EC62-4E91-976A-A02045F4C260}" srcOrd="0" destOrd="0" presId="urn:microsoft.com/office/officeart/2005/8/layout/hierarchy2"/>
+    <dgm:cxn modelId="{91DFE5B3-51F3-4761-9B8B-62F3AA2985CE}" srcId="{5359AC54-C077-4F20-8BA0-07AB60BBCF7B}" destId="{60E0BFDE-8E4F-4DF7-83FA-750D549853C2}" srcOrd="0" destOrd="0" parTransId="{EF36957E-8A17-4887-87CE-84AC487564B9}" sibTransId="{BFBD4E85-2458-48C5-AE18-7BC7F112227B}"/>
+    <dgm:cxn modelId="{56C9358B-CDC9-4DFE-8D6A-263B45105A60}" type="presParOf" srcId="{5F8EA75F-EC62-4E91-976A-A02045F4C260}" destId="{D73C5EAD-FE13-4464-A023-A579E7527B0D}" srcOrd="0" destOrd="0" presId="urn:microsoft.com/office/officeart/2005/8/layout/hierarchy2"/>
+    <dgm:cxn modelId="{14BD741F-E829-42F9-953F-256CC824BE9D}" type="presParOf" srcId="{D73C5EAD-FE13-4464-A023-A579E7527B0D}" destId="{3BCAB6E7-3C8B-4AD1-96A7-E15ED4DC1AB0}" srcOrd="0" destOrd="0" presId="urn:microsoft.com/office/officeart/2005/8/layout/hierarchy2"/>
+    <dgm:cxn modelId="{796EECED-7F27-4827-977C-108FD0BA6AD4}" type="presParOf" srcId="{D73C5EAD-FE13-4464-A023-A579E7527B0D}" destId="{8F740A56-505D-4FF6-95FF-91ABBA25BC9B}" srcOrd="1" destOrd="0" presId="urn:microsoft.com/office/officeart/2005/8/layout/hierarchy2"/>
+  </dgm:cxnLst>
+  <dgm:bg/>
+  <dgm:whole/>
+  <dgm:extLst>
+    <a:ext uri="http://schemas.microsoft.com/office/drawing/2008/diagram">
+      <dsp:dataModelExt xmlns:dsp="http://schemas.microsoft.com/office/drawing/2008/diagram" relId="rId16" minVer="http://schemas.openxmlformats.org/drawingml/2006/diagram"/>
+    </a:ext>
+  </dgm:extLst>
+</dgm:dataModel>
+</file>
+
+<file path=ppt/diagrams/data5.xml><?xml version="1.0" encoding="utf-8"?>
 <dgm:dataModel xmlns:dgm="http://schemas.openxmlformats.org/drawingml/2006/diagram" xmlns:a="http://schemas.openxmlformats.org/drawingml/2006/main">
   <dgm:ptLst>
     <dgm:pt modelId="{CC82EFBF-7107-494A-8AAB-7C60D9A18C52}" type="doc">
@@ -3107,6 +6006,1069 @@
 </file>
 
 <file path=ppt/diagrams/drawing2.xml><?xml version="1.0" encoding="utf-8"?>
+<dsp:drawing xmlns:dgm="http://schemas.openxmlformats.org/drawingml/2006/diagram" xmlns:dsp="http://schemas.microsoft.com/office/drawing/2008/diagram" xmlns:a="http://schemas.openxmlformats.org/drawingml/2006/main">
+  <dsp:spTree>
+    <dsp:nvGrpSpPr>
+      <dsp:cNvPr id="0" name=""/>
+      <dsp:cNvGrpSpPr/>
+    </dsp:nvGrpSpPr>
+    <dsp:grpSpPr/>
+    <dsp:sp modelId="{3BCAB6E7-3C8B-4AD1-96A7-E15ED4DC1AB0}">
+      <dsp:nvSpPr>
+        <dsp:cNvPr id="0" name=""/>
+        <dsp:cNvSpPr/>
+      </dsp:nvSpPr>
+      <dsp:spPr>
+        <a:xfrm>
+          <a:off x="1508" y="357856"/>
+          <a:ext cx="1236053" cy="618026"/>
+        </a:xfrm>
+        <a:prstGeom prst="roundRect">
+          <a:avLst>
+            <a:gd name="adj" fmla="val 10000"/>
+          </a:avLst>
+        </a:prstGeom>
+        <a:solidFill>
+          <a:schemeClr val="accent1">
+            <a:hueOff val="0"/>
+            <a:satOff val="0"/>
+            <a:lumOff val="0"/>
+            <a:alphaOff val="0"/>
+          </a:schemeClr>
+        </a:solidFill>
+        <a:ln w="19050" cap="rnd" cmpd="sng" algn="ctr">
+          <a:solidFill>
+            <a:schemeClr val="lt1">
+              <a:hueOff val="0"/>
+              <a:satOff val="0"/>
+              <a:lumOff val="0"/>
+              <a:alphaOff val="0"/>
+            </a:schemeClr>
+          </a:solidFill>
+          <a:prstDash val="solid"/>
+        </a:ln>
+        <a:effectLst/>
+      </dsp:spPr>
+      <dsp:style>
+        <a:lnRef idx="2">
+          <a:scrgbClr r="0" g="0" b="0"/>
+        </a:lnRef>
+        <a:fillRef idx="1">
+          <a:scrgbClr r="0" g="0" b="0"/>
+        </a:fillRef>
+        <a:effectRef idx="0">
+          <a:scrgbClr r="0" g="0" b="0"/>
+        </a:effectRef>
+        <a:fontRef idx="minor">
+          <a:schemeClr val="lt1"/>
+        </a:fontRef>
+      </dsp:style>
+      <dsp:txBody>
+        <a:bodyPr spcFirstLastPara="0" vert="horz" wrap="square" lIns="17145" tIns="17145" rIns="17145" bIns="17145" numCol="1" spcCol="1270" anchor="ctr" anchorCtr="0">
+          <a:noAutofit/>
+        </a:bodyPr>
+        <a:lstStyle/>
+        <a:p>
+          <a:pPr marL="0" lvl="0" indent="0" algn="ctr" defTabSz="1200150">
+            <a:lnSpc>
+              <a:spcPct val="90000"/>
+            </a:lnSpc>
+            <a:spcBef>
+              <a:spcPct val="0"/>
+            </a:spcBef>
+            <a:spcAft>
+              <a:spcPct val="35000"/>
+            </a:spcAft>
+            <a:buNone/>
+          </a:pPr>
+          <a:r>
+            <a:rPr lang="en-US" sz="2700" kern="1200" dirty="0"/>
+            <a:t>SAS</a:t>
+          </a:r>
+        </a:p>
+      </dsp:txBody>
+      <dsp:txXfrm>
+        <a:off x="19609" y="375957"/>
+        <a:ext cx="1199851" cy="581824"/>
+      </dsp:txXfrm>
+    </dsp:sp>
+    <dsp:sp modelId="{02DBC75F-EC9B-4A1C-B9DE-6892275ED7C8}">
+      <dsp:nvSpPr>
+        <dsp:cNvPr id="0" name=""/>
+        <dsp:cNvSpPr/>
+      </dsp:nvSpPr>
+      <dsp:spPr>
+        <a:xfrm rot="19457599">
+          <a:off x="1180331" y="447482"/>
+          <a:ext cx="608881" cy="83408"/>
+        </a:xfrm>
+        <a:custGeom>
+          <a:avLst/>
+          <a:gdLst/>
+          <a:ahLst/>
+          <a:cxnLst/>
+          <a:rect l="0" t="0" r="0" b="0"/>
+          <a:pathLst>
+            <a:path>
+              <a:moveTo>
+                <a:pt x="0" y="41704"/>
+              </a:moveTo>
+              <a:lnTo>
+                <a:pt x="608881" y="41704"/>
+              </a:lnTo>
+            </a:path>
+          </a:pathLst>
+        </a:custGeom>
+        <a:noFill/>
+        <a:ln w="19050" cap="rnd" cmpd="sng" algn="ctr">
+          <a:solidFill>
+            <a:schemeClr val="accent1">
+              <a:shade val="60000"/>
+              <a:hueOff val="0"/>
+              <a:satOff val="0"/>
+              <a:lumOff val="0"/>
+              <a:alphaOff val="0"/>
+            </a:schemeClr>
+          </a:solidFill>
+          <a:prstDash val="solid"/>
+        </a:ln>
+        <a:effectLst/>
+      </dsp:spPr>
+      <dsp:style>
+        <a:lnRef idx="2">
+          <a:scrgbClr r="0" g="0" b="0"/>
+        </a:lnRef>
+        <a:fillRef idx="0">
+          <a:scrgbClr r="0" g="0" b="0"/>
+        </a:fillRef>
+        <a:effectRef idx="0">
+          <a:scrgbClr r="0" g="0" b="0"/>
+        </a:effectRef>
+        <a:fontRef idx="minor"/>
+      </dsp:style>
+      <dsp:txBody>
+        <a:bodyPr spcFirstLastPara="0" vert="horz" wrap="square" lIns="12700" tIns="0" rIns="12700" bIns="0" numCol="1" spcCol="1270" anchor="ctr" anchorCtr="0">
+          <a:noAutofit/>
+        </a:bodyPr>
+        <a:lstStyle/>
+        <a:p>
+          <a:pPr marL="0" lvl="0" indent="0" algn="ctr" defTabSz="222250">
+            <a:lnSpc>
+              <a:spcPct val="90000"/>
+            </a:lnSpc>
+            <a:spcBef>
+              <a:spcPct val="0"/>
+            </a:spcBef>
+            <a:spcAft>
+              <a:spcPct val="35000"/>
+            </a:spcAft>
+            <a:buNone/>
+          </a:pPr>
+          <a:endParaRPr lang="en-US" sz="500" kern="1200"/>
+        </a:p>
+      </dsp:txBody>
+      <dsp:txXfrm>
+        <a:off x="1469550" y="473964"/>
+        <a:ext cx="30444" cy="30444"/>
+      </dsp:txXfrm>
+    </dsp:sp>
+    <dsp:sp modelId="{856966A0-B3E8-4AAF-BADE-F7D74F234487}">
+      <dsp:nvSpPr>
+        <dsp:cNvPr id="0" name=""/>
+        <dsp:cNvSpPr/>
+      </dsp:nvSpPr>
+      <dsp:spPr>
+        <a:xfrm>
+          <a:off x="1731983" y="2490"/>
+          <a:ext cx="1236053" cy="618026"/>
+        </a:xfrm>
+        <a:prstGeom prst="roundRect">
+          <a:avLst>
+            <a:gd name="adj" fmla="val 10000"/>
+          </a:avLst>
+        </a:prstGeom>
+        <a:solidFill>
+          <a:schemeClr val="accent1">
+            <a:hueOff val="0"/>
+            <a:satOff val="0"/>
+            <a:lumOff val="0"/>
+            <a:alphaOff val="0"/>
+          </a:schemeClr>
+        </a:solidFill>
+        <a:ln w="19050" cap="rnd" cmpd="sng" algn="ctr">
+          <a:solidFill>
+            <a:schemeClr val="lt1">
+              <a:hueOff val="0"/>
+              <a:satOff val="0"/>
+              <a:lumOff val="0"/>
+              <a:alphaOff val="0"/>
+            </a:schemeClr>
+          </a:solidFill>
+          <a:prstDash val="solid"/>
+        </a:ln>
+        <a:effectLst/>
+      </dsp:spPr>
+      <dsp:style>
+        <a:lnRef idx="2">
+          <a:scrgbClr r="0" g="0" b="0"/>
+        </a:lnRef>
+        <a:fillRef idx="1">
+          <a:scrgbClr r="0" g="0" b="0"/>
+        </a:fillRef>
+        <a:effectRef idx="0">
+          <a:scrgbClr r="0" g="0" b="0"/>
+        </a:effectRef>
+        <a:fontRef idx="minor">
+          <a:schemeClr val="lt1"/>
+        </a:fontRef>
+      </dsp:style>
+      <dsp:txBody>
+        <a:bodyPr spcFirstLastPara="0" vert="horz" wrap="square" lIns="17145" tIns="17145" rIns="17145" bIns="17145" numCol="1" spcCol="1270" anchor="ctr" anchorCtr="0">
+          <a:noAutofit/>
+        </a:bodyPr>
+        <a:lstStyle/>
+        <a:p>
+          <a:pPr marL="0" lvl="0" indent="0" algn="ctr" defTabSz="1200150">
+            <a:lnSpc>
+              <a:spcPct val="90000"/>
+            </a:lnSpc>
+            <a:spcBef>
+              <a:spcPct val="0"/>
+            </a:spcBef>
+            <a:spcAft>
+              <a:spcPct val="35000"/>
+            </a:spcAft>
+            <a:buNone/>
+          </a:pPr>
+          <a:r>
+            <a:rPr lang="en-US" sz="2700" kern="1200" dirty="0"/>
+            <a:t>R</a:t>
+          </a:r>
+        </a:p>
+      </dsp:txBody>
+      <dsp:txXfrm>
+        <a:off x="1750084" y="20591"/>
+        <a:ext cx="1199851" cy="581824"/>
+      </dsp:txXfrm>
+    </dsp:sp>
+    <dsp:sp modelId="{33F576D8-77B8-46AC-942C-78072A82BCB5}">
+      <dsp:nvSpPr>
+        <dsp:cNvPr id="0" name=""/>
+        <dsp:cNvSpPr/>
+      </dsp:nvSpPr>
+      <dsp:spPr>
+        <a:xfrm rot="2142401">
+          <a:off x="1180331" y="802848"/>
+          <a:ext cx="608881" cy="83408"/>
+        </a:xfrm>
+        <a:custGeom>
+          <a:avLst/>
+          <a:gdLst/>
+          <a:ahLst/>
+          <a:cxnLst/>
+          <a:rect l="0" t="0" r="0" b="0"/>
+          <a:pathLst>
+            <a:path>
+              <a:moveTo>
+                <a:pt x="0" y="41704"/>
+              </a:moveTo>
+              <a:lnTo>
+                <a:pt x="608881" y="41704"/>
+              </a:lnTo>
+            </a:path>
+          </a:pathLst>
+        </a:custGeom>
+        <a:noFill/>
+        <a:ln w="19050" cap="rnd" cmpd="sng" algn="ctr">
+          <a:solidFill>
+            <a:schemeClr val="accent1">
+              <a:shade val="60000"/>
+              <a:hueOff val="0"/>
+              <a:satOff val="0"/>
+              <a:lumOff val="0"/>
+              <a:alphaOff val="0"/>
+            </a:schemeClr>
+          </a:solidFill>
+          <a:prstDash val="solid"/>
+        </a:ln>
+        <a:effectLst/>
+      </dsp:spPr>
+      <dsp:style>
+        <a:lnRef idx="2">
+          <a:scrgbClr r="0" g="0" b="0"/>
+        </a:lnRef>
+        <a:fillRef idx="0">
+          <a:scrgbClr r="0" g="0" b="0"/>
+        </a:fillRef>
+        <a:effectRef idx="0">
+          <a:scrgbClr r="0" g="0" b="0"/>
+        </a:effectRef>
+        <a:fontRef idx="minor"/>
+      </dsp:style>
+      <dsp:txBody>
+        <a:bodyPr spcFirstLastPara="0" vert="horz" wrap="square" lIns="12700" tIns="0" rIns="12700" bIns="0" numCol="1" spcCol="1270" anchor="ctr" anchorCtr="0">
+          <a:noAutofit/>
+        </a:bodyPr>
+        <a:lstStyle/>
+        <a:p>
+          <a:pPr marL="0" lvl="0" indent="0" algn="ctr" defTabSz="222250">
+            <a:lnSpc>
+              <a:spcPct val="90000"/>
+            </a:lnSpc>
+            <a:spcBef>
+              <a:spcPct val="0"/>
+            </a:spcBef>
+            <a:spcAft>
+              <a:spcPct val="35000"/>
+            </a:spcAft>
+            <a:buNone/>
+          </a:pPr>
+          <a:endParaRPr lang="en-US" sz="500" kern="1200"/>
+        </a:p>
+      </dsp:txBody>
+      <dsp:txXfrm>
+        <a:off x="1469550" y="829330"/>
+        <a:ext cx="30444" cy="30444"/>
+      </dsp:txXfrm>
+    </dsp:sp>
+    <dsp:sp modelId="{53CBCBE4-8058-4DC4-8A24-70C23610BF67}">
+      <dsp:nvSpPr>
+        <dsp:cNvPr id="0" name=""/>
+        <dsp:cNvSpPr/>
+      </dsp:nvSpPr>
+      <dsp:spPr>
+        <a:xfrm>
+          <a:off x="1731983" y="713221"/>
+          <a:ext cx="1236053" cy="618026"/>
+        </a:xfrm>
+        <a:prstGeom prst="roundRect">
+          <a:avLst>
+            <a:gd name="adj" fmla="val 10000"/>
+          </a:avLst>
+        </a:prstGeom>
+        <a:solidFill>
+          <a:schemeClr val="accent1">
+            <a:hueOff val="0"/>
+            <a:satOff val="0"/>
+            <a:lumOff val="0"/>
+            <a:alphaOff val="0"/>
+          </a:schemeClr>
+        </a:solidFill>
+        <a:ln w="19050" cap="rnd" cmpd="sng" algn="ctr">
+          <a:solidFill>
+            <a:schemeClr val="lt1">
+              <a:hueOff val="0"/>
+              <a:satOff val="0"/>
+              <a:lumOff val="0"/>
+              <a:alphaOff val="0"/>
+            </a:schemeClr>
+          </a:solidFill>
+          <a:prstDash val="solid"/>
+        </a:ln>
+        <a:effectLst/>
+      </dsp:spPr>
+      <dsp:style>
+        <a:lnRef idx="2">
+          <a:scrgbClr r="0" g="0" b="0"/>
+        </a:lnRef>
+        <a:fillRef idx="1">
+          <a:scrgbClr r="0" g="0" b="0"/>
+        </a:fillRef>
+        <a:effectRef idx="0">
+          <a:scrgbClr r="0" g="0" b="0"/>
+        </a:effectRef>
+        <a:fontRef idx="minor">
+          <a:schemeClr val="lt1"/>
+        </a:fontRef>
+      </dsp:style>
+      <dsp:txBody>
+        <a:bodyPr spcFirstLastPara="0" vert="horz" wrap="square" lIns="17145" tIns="17145" rIns="17145" bIns="17145" numCol="1" spcCol="1270" anchor="ctr" anchorCtr="0">
+          <a:noAutofit/>
+        </a:bodyPr>
+        <a:lstStyle/>
+        <a:p>
+          <a:pPr marL="0" lvl="0" indent="0" algn="ctr" defTabSz="1200150">
+            <a:lnSpc>
+              <a:spcPct val="90000"/>
+            </a:lnSpc>
+            <a:spcBef>
+              <a:spcPct val="0"/>
+            </a:spcBef>
+            <a:spcAft>
+              <a:spcPct val="35000"/>
+            </a:spcAft>
+            <a:buNone/>
+          </a:pPr>
+          <a:r>
+            <a:rPr lang="en-US" sz="2700" kern="1200" dirty="0"/>
+            <a:t>Python</a:t>
+          </a:r>
+        </a:p>
+      </dsp:txBody>
+      <dsp:txXfrm>
+        <a:off x="1750084" y="731322"/>
+        <a:ext cx="1199851" cy="581824"/>
+      </dsp:txXfrm>
+    </dsp:sp>
+  </dsp:spTree>
+</dsp:drawing>
+</file>
+
+<file path=ppt/diagrams/drawing3.xml><?xml version="1.0" encoding="utf-8"?>
+<dsp:drawing xmlns:dgm="http://schemas.openxmlformats.org/drawingml/2006/diagram" xmlns:dsp="http://schemas.microsoft.com/office/drawing/2008/diagram" xmlns:a="http://schemas.openxmlformats.org/drawingml/2006/main">
+  <dsp:spTree>
+    <dsp:nvGrpSpPr>
+      <dsp:cNvPr id="0" name=""/>
+      <dsp:cNvGrpSpPr/>
+    </dsp:nvGrpSpPr>
+    <dsp:grpSpPr/>
+    <dsp:sp modelId="{3BCAB6E7-3C8B-4AD1-96A7-E15ED4DC1AB0}">
+      <dsp:nvSpPr>
+        <dsp:cNvPr id="0" name=""/>
+        <dsp:cNvSpPr/>
+      </dsp:nvSpPr>
+      <dsp:spPr>
+        <a:xfrm>
+          <a:off x="229435" y="791579"/>
+          <a:ext cx="1419958" cy="709979"/>
+        </a:xfrm>
+        <a:prstGeom prst="roundRect">
+          <a:avLst>
+            <a:gd name="adj" fmla="val 10000"/>
+          </a:avLst>
+        </a:prstGeom>
+        <a:solidFill>
+          <a:schemeClr val="accent1">
+            <a:hueOff val="0"/>
+            <a:satOff val="0"/>
+            <a:lumOff val="0"/>
+            <a:alphaOff val="0"/>
+          </a:schemeClr>
+        </a:solidFill>
+        <a:ln w="19050" cap="rnd" cmpd="sng" algn="ctr">
+          <a:solidFill>
+            <a:schemeClr val="lt1">
+              <a:hueOff val="0"/>
+              <a:satOff val="0"/>
+              <a:lumOff val="0"/>
+              <a:alphaOff val="0"/>
+            </a:schemeClr>
+          </a:solidFill>
+          <a:prstDash val="solid"/>
+        </a:ln>
+        <a:effectLst/>
+      </dsp:spPr>
+      <dsp:style>
+        <a:lnRef idx="2">
+          <a:scrgbClr r="0" g="0" b="0"/>
+        </a:lnRef>
+        <a:fillRef idx="1">
+          <a:scrgbClr r="0" g="0" b="0"/>
+        </a:fillRef>
+        <a:effectRef idx="0">
+          <a:scrgbClr r="0" g="0" b="0"/>
+        </a:effectRef>
+        <a:fontRef idx="minor">
+          <a:schemeClr val="lt1"/>
+        </a:fontRef>
+      </dsp:style>
+      <dsp:txBody>
+        <a:bodyPr spcFirstLastPara="0" vert="horz" wrap="square" lIns="22860" tIns="22860" rIns="22860" bIns="22860" numCol="1" spcCol="1270" anchor="ctr" anchorCtr="0">
+          <a:noAutofit/>
+        </a:bodyPr>
+        <a:lstStyle/>
+        <a:p>
+          <a:pPr marL="0" lvl="0" indent="0" algn="ctr" defTabSz="1600200">
+            <a:lnSpc>
+              <a:spcPct val="90000"/>
+            </a:lnSpc>
+            <a:spcBef>
+              <a:spcPct val="0"/>
+            </a:spcBef>
+            <a:spcAft>
+              <a:spcPct val="35000"/>
+            </a:spcAft>
+            <a:buNone/>
+          </a:pPr>
+          <a:r>
+            <a:rPr lang="en-US" sz="3600" kern="1200" dirty="0"/>
+            <a:t>CCFA</a:t>
+          </a:r>
+        </a:p>
+      </dsp:txBody>
+      <dsp:txXfrm>
+        <a:off x="250230" y="812374"/>
+        <a:ext cx="1378368" cy="668389"/>
+      </dsp:txXfrm>
+    </dsp:sp>
+    <dsp:sp modelId="{02DBC75F-EC9B-4A1C-B9DE-6892275ED7C8}">
+      <dsp:nvSpPr>
+        <dsp:cNvPr id="0" name=""/>
+        <dsp:cNvSpPr/>
+      </dsp:nvSpPr>
+      <dsp:spPr>
+        <a:xfrm rot="19881099">
+          <a:off x="1548477" y="724105"/>
+          <a:ext cx="1648686" cy="54492"/>
+        </a:xfrm>
+        <a:custGeom>
+          <a:avLst/>
+          <a:gdLst/>
+          <a:ahLst/>
+          <a:cxnLst/>
+          <a:rect l="0" t="0" r="0" b="0"/>
+          <a:pathLst>
+            <a:path>
+              <a:moveTo>
+                <a:pt x="0" y="27246"/>
+              </a:moveTo>
+              <a:lnTo>
+                <a:pt x="1648686" y="27246"/>
+              </a:lnTo>
+            </a:path>
+          </a:pathLst>
+        </a:custGeom>
+        <a:noFill/>
+        <a:ln w="19050" cap="rnd" cmpd="sng" algn="ctr">
+          <a:solidFill>
+            <a:schemeClr val="accent1">
+              <a:shade val="60000"/>
+              <a:hueOff val="0"/>
+              <a:satOff val="0"/>
+              <a:lumOff val="0"/>
+              <a:alphaOff val="0"/>
+            </a:schemeClr>
+          </a:solidFill>
+          <a:prstDash val="solid"/>
+        </a:ln>
+        <a:effectLst/>
+      </dsp:spPr>
+      <dsp:style>
+        <a:lnRef idx="2">
+          <a:scrgbClr r="0" g="0" b="0"/>
+        </a:lnRef>
+        <a:fillRef idx="0">
+          <a:scrgbClr r="0" g="0" b="0"/>
+        </a:fillRef>
+        <a:effectRef idx="0">
+          <a:scrgbClr r="0" g="0" b="0"/>
+        </a:effectRef>
+        <a:fontRef idx="minor"/>
+      </dsp:style>
+      <dsp:txBody>
+        <a:bodyPr spcFirstLastPara="0" vert="horz" wrap="square" lIns="12700" tIns="0" rIns="12700" bIns="0" numCol="1" spcCol="1270" anchor="ctr" anchorCtr="0">
+          <a:noAutofit/>
+        </a:bodyPr>
+        <a:lstStyle/>
+        <a:p>
+          <a:pPr marL="0" lvl="0" indent="0" algn="ctr" defTabSz="222250">
+            <a:lnSpc>
+              <a:spcPct val="90000"/>
+            </a:lnSpc>
+            <a:spcBef>
+              <a:spcPct val="0"/>
+            </a:spcBef>
+            <a:spcAft>
+              <a:spcPct val="35000"/>
+            </a:spcAft>
+            <a:buNone/>
+          </a:pPr>
+          <a:endParaRPr lang="en-US" sz="500" kern="1200"/>
+        </a:p>
+      </dsp:txBody>
+      <dsp:txXfrm>
+        <a:off x="2331603" y="710134"/>
+        <a:ext cx="82434" cy="82434"/>
+      </dsp:txXfrm>
+    </dsp:sp>
+    <dsp:sp modelId="{856966A0-B3E8-4AAF-BADE-F7D74F234487}">
+      <dsp:nvSpPr>
+        <dsp:cNvPr id="0" name=""/>
+        <dsp:cNvSpPr/>
+      </dsp:nvSpPr>
+      <dsp:spPr>
+        <a:xfrm>
+          <a:off x="3096247" y="1145"/>
+          <a:ext cx="1419958" cy="709979"/>
+        </a:xfrm>
+        <a:prstGeom prst="roundRect">
+          <a:avLst>
+            <a:gd name="adj" fmla="val 10000"/>
+          </a:avLst>
+        </a:prstGeom>
+        <a:solidFill>
+          <a:schemeClr val="accent2">
+            <a:lumMod val="60000"/>
+            <a:lumOff val="40000"/>
+          </a:schemeClr>
+        </a:solidFill>
+        <a:ln w="19050" cap="rnd" cmpd="sng" algn="ctr">
+          <a:solidFill>
+            <a:schemeClr val="lt1">
+              <a:hueOff val="0"/>
+              <a:satOff val="0"/>
+              <a:lumOff val="0"/>
+              <a:alphaOff val="0"/>
+            </a:schemeClr>
+          </a:solidFill>
+          <a:prstDash val="solid"/>
+        </a:ln>
+        <a:effectLst/>
+      </dsp:spPr>
+      <dsp:style>
+        <a:lnRef idx="2">
+          <a:scrgbClr r="0" g="0" b="0"/>
+        </a:lnRef>
+        <a:fillRef idx="1">
+          <a:scrgbClr r="0" g="0" b="0"/>
+        </a:fillRef>
+        <a:effectRef idx="0">
+          <a:scrgbClr r="0" g="0" b="0"/>
+        </a:effectRef>
+        <a:fontRef idx="minor">
+          <a:schemeClr val="lt1"/>
+        </a:fontRef>
+      </dsp:style>
+      <dsp:txBody>
+        <a:bodyPr spcFirstLastPara="0" vert="horz" wrap="square" lIns="10160" tIns="10160" rIns="10160" bIns="10160" numCol="1" spcCol="1270" anchor="ctr" anchorCtr="0">
+          <a:noAutofit/>
+        </a:bodyPr>
+        <a:lstStyle/>
+        <a:p>
+          <a:pPr marL="0" lvl="0" indent="0" algn="ctr" defTabSz="711200">
+            <a:lnSpc>
+              <a:spcPct val="90000"/>
+            </a:lnSpc>
+            <a:spcBef>
+              <a:spcPct val="0"/>
+            </a:spcBef>
+            <a:spcAft>
+              <a:spcPct val="35000"/>
+            </a:spcAft>
+            <a:buNone/>
+          </a:pPr>
+          <a:r>
+            <a:rPr lang="en-US" altLang="zh-CN" sz="1600" kern="1200" dirty="0"/>
+            <a:t>Loss severity</a:t>
+          </a:r>
+          <a:endParaRPr lang="en-US" sz="1600" kern="1200" dirty="0"/>
+        </a:p>
+      </dsp:txBody>
+      <dsp:txXfrm>
+        <a:off x="3117042" y="21940"/>
+        <a:ext cx="1378368" cy="668389"/>
+      </dsp:txXfrm>
+    </dsp:sp>
+    <dsp:sp modelId="{33F576D8-77B8-46AC-942C-78072A82BCB5}">
+      <dsp:nvSpPr>
+        <dsp:cNvPr id="0" name=""/>
+        <dsp:cNvSpPr/>
+      </dsp:nvSpPr>
+      <dsp:spPr>
+        <a:xfrm rot="61870">
+          <a:off x="1649277" y="1132343"/>
+          <a:ext cx="1447086" cy="54492"/>
+        </a:xfrm>
+        <a:custGeom>
+          <a:avLst/>
+          <a:gdLst/>
+          <a:ahLst/>
+          <a:cxnLst/>
+          <a:rect l="0" t="0" r="0" b="0"/>
+          <a:pathLst>
+            <a:path>
+              <a:moveTo>
+                <a:pt x="0" y="27246"/>
+              </a:moveTo>
+              <a:lnTo>
+                <a:pt x="1447086" y="27246"/>
+              </a:lnTo>
+            </a:path>
+          </a:pathLst>
+        </a:custGeom>
+        <a:noFill/>
+        <a:ln w="19050" cap="rnd" cmpd="sng" algn="ctr">
+          <a:solidFill>
+            <a:schemeClr val="accent1">
+              <a:shade val="60000"/>
+              <a:hueOff val="0"/>
+              <a:satOff val="0"/>
+              <a:lumOff val="0"/>
+              <a:alphaOff val="0"/>
+            </a:schemeClr>
+          </a:solidFill>
+          <a:prstDash val="solid"/>
+        </a:ln>
+        <a:effectLst/>
+      </dsp:spPr>
+      <dsp:style>
+        <a:lnRef idx="2">
+          <a:scrgbClr r="0" g="0" b="0"/>
+        </a:lnRef>
+        <a:fillRef idx="0">
+          <a:scrgbClr r="0" g="0" b="0"/>
+        </a:fillRef>
+        <a:effectRef idx="0">
+          <a:scrgbClr r="0" g="0" b="0"/>
+        </a:effectRef>
+        <a:fontRef idx="minor"/>
+      </dsp:style>
+      <dsp:txBody>
+        <a:bodyPr spcFirstLastPara="0" vert="horz" wrap="square" lIns="12700" tIns="0" rIns="12700" bIns="0" numCol="1" spcCol="1270" anchor="ctr" anchorCtr="0">
+          <a:noAutofit/>
+        </a:bodyPr>
+        <a:lstStyle/>
+        <a:p>
+          <a:pPr marL="0" lvl="0" indent="0" algn="ctr" defTabSz="222250">
+            <a:lnSpc>
+              <a:spcPct val="90000"/>
+            </a:lnSpc>
+            <a:spcBef>
+              <a:spcPct val="0"/>
+            </a:spcBef>
+            <a:spcAft>
+              <a:spcPct val="35000"/>
+            </a:spcAft>
+            <a:buNone/>
+          </a:pPr>
+          <a:endParaRPr lang="en-US" sz="500" kern="1200"/>
+        </a:p>
+      </dsp:txBody>
+      <dsp:txXfrm>
+        <a:off x="2336643" y="1123412"/>
+        <a:ext cx="72354" cy="72354"/>
+      </dsp:txXfrm>
+    </dsp:sp>
+    <dsp:sp modelId="{53CBCBE4-8058-4DC4-8A24-70C23610BF67}">
+      <dsp:nvSpPr>
+        <dsp:cNvPr id="0" name=""/>
+        <dsp:cNvSpPr/>
+      </dsp:nvSpPr>
+      <dsp:spPr>
+        <a:xfrm>
+          <a:off x="3096247" y="817621"/>
+          <a:ext cx="1419958" cy="709979"/>
+        </a:xfrm>
+        <a:prstGeom prst="roundRect">
+          <a:avLst>
+            <a:gd name="adj" fmla="val 10000"/>
+          </a:avLst>
+        </a:prstGeom>
+        <a:solidFill>
+          <a:schemeClr val="accent2">
+            <a:lumMod val="60000"/>
+            <a:lumOff val="40000"/>
+          </a:schemeClr>
+        </a:solidFill>
+        <a:ln w="19050" cap="rnd" cmpd="sng" algn="ctr">
+          <a:solidFill>
+            <a:schemeClr val="lt1">
+              <a:hueOff val="0"/>
+              <a:satOff val="0"/>
+              <a:lumOff val="0"/>
+              <a:alphaOff val="0"/>
+            </a:schemeClr>
+          </a:solidFill>
+          <a:prstDash val="solid"/>
+        </a:ln>
+        <a:effectLst/>
+      </dsp:spPr>
+      <dsp:style>
+        <a:lnRef idx="2">
+          <a:scrgbClr r="0" g="0" b="0"/>
+        </a:lnRef>
+        <a:fillRef idx="1">
+          <a:scrgbClr r="0" g="0" b="0"/>
+        </a:fillRef>
+        <a:effectRef idx="0">
+          <a:scrgbClr r="0" g="0" b="0"/>
+        </a:effectRef>
+        <a:fontRef idx="minor">
+          <a:schemeClr val="lt1"/>
+        </a:fontRef>
+      </dsp:style>
+      <dsp:txBody>
+        <a:bodyPr spcFirstLastPara="0" vert="horz" wrap="square" lIns="10160" tIns="10160" rIns="10160" bIns="10160" numCol="1" spcCol="1270" anchor="ctr" anchorCtr="0">
+          <a:noAutofit/>
+        </a:bodyPr>
+        <a:lstStyle/>
+        <a:p>
+          <a:pPr marL="0" lvl="0" indent="0" algn="ctr" defTabSz="711200">
+            <a:lnSpc>
+              <a:spcPct val="90000"/>
+            </a:lnSpc>
+            <a:spcBef>
+              <a:spcPct val="0"/>
+            </a:spcBef>
+            <a:spcAft>
+              <a:spcPct val="35000"/>
+            </a:spcAft>
+            <a:buNone/>
+          </a:pPr>
+          <a:r>
+            <a:rPr lang="en-US" sz="1600" kern="1200" dirty="0"/>
+            <a:t>Default Type</a:t>
+          </a:r>
+        </a:p>
+      </dsp:txBody>
+      <dsp:txXfrm>
+        <a:off x="3117042" y="838416"/>
+        <a:ext cx="1378368" cy="668389"/>
+      </dsp:txXfrm>
+    </dsp:sp>
+    <dsp:sp modelId="{AD5DA7A3-BB8B-4ED2-ADB7-EBF9C8A7B90C}">
+      <dsp:nvSpPr>
+        <dsp:cNvPr id="0" name=""/>
+        <dsp:cNvSpPr/>
+      </dsp:nvSpPr>
+      <dsp:spPr>
+        <a:xfrm rot="1812763">
+          <a:off x="1535679" y="1540581"/>
+          <a:ext cx="1674281" cy="54492"/>
+        </a:xfrm>
+        <a:custGeom>
+          <a:avLst/>
+          <a:gdLst/>
+          <a:ahLst/>
+          <a:cxnLst/>
+          <a:rect l="0" t="0" r="0" b="0"/>
+          <a:pathLst>
+            <a:path>
+              <a:moveTo>
+                <a:pt x="0" y="27246"/>
+              </a:moveTo>
+              <a:lnTo>
+                <a:pt x="1674281" y="27246"/>
+              </a:lnTo>
+            </a:path>
+          </a:pathLst>
+        </a:custGeom>
+        <a:noFill/>
+        <a:ln w="19050" cap="rnd" cmpd="sng" algn="ctr">
+          <a:solidFill>
+            <a:schemeClr val="accent1">
+              <a:shade val="60000"/>
+              <a:hueOff val="0"/>
+              <a:satOff val="0"/>
+              <a:lumOff val="0"/>
+              <a:alphaOff val="0"/>
+            </a:schemeClr>
+          </a:solidFill>
+          <a:prstDash val="solid"/>
+        </a:ln>
+        <a:effectLst/>
+      </dsp:spPr>
+      <dsp:style>
+        <a:lnRef idx="2">
+          <a:scrgbClr r="0" g="0" b="0"/>
+        </a:lnRef>
+        <a:fillRef idx="0">
+          <a:scrgbClr r="0" g="0" b="0"/>
+        </a:fillRef>
+        <a:effectRef idx="0">
+          <a:scrgbClr r="0" g="0" b="0"/>
+        </a:effectRef>
+        <a:fontRef idx="minor"/>
+      </dsp:style>
+      <dsp:txBody>
+        <a:bodyPr spcFirstLastPara="0" vert="horz" wrap="square" lIns="12700" tIns="0" rIns="12700" bIns="0" numCol="1" spcCol="1270" anchor="ctr" anchorCtr="0">
+          <a:noAutofit/>
+        </a:bodyPr>
+        <a:lstStyle/>
+        <a:p>
+          <a:pPr marL="0" lvl="0" indent="0" algn="ctr" defTabSz="222250">
+            <a:lnSpc>
+              <a:spcPct val="90000"/>
+            </a:lnSpc>
+            <a:spcBef>
+              <a:spcPct val="0"/>
+            </a:spcBef>
+            <a:spcAft>
+              <a:spcPct val="35000"/>
+            </a:spcAft>
+            <a:buNone/>
+          </a:pPr>
+          <a:endParaRPr lang="en-US" sz="500" kern="1200"/>
+        </a:p>
+      </dsp:txBody>
+      <dsp:txXfrm>
+        <a:off x="2330963" y="1525971"/>
+        <a:ext cx="83714" cy="83714"/>
+      </dsp:txXfrm>
+    </dsp:sp>
+    <dsp:sp modelId="{657F305A-03D9-4556-BA21-F3EBCB0C16D5}">
+      <dsp:nvSpPr>
+        <dsp:cNvPr id="0" name=""/>
+        <dsp:cNvSpPr/>
+      </dsp:nvSpPr>
+      <dsp:spPr>
+        <a:xfrm>
+          <a:off x="3096247" y="1634097"/>
+          <a:ext cx="1419958" cy="709979"/>
+        </a:xfrm>
+        <a:prstGeom prst="roundRect">
+          <a:avLst>
+            <a:gd name="adj" fmla="val 10000"/>
+          </a:avLst>
+        </a:prstGeom>
+        <a:solidFill>
+          <a:schemeClr val="accent2">
+            <a:lumMod val="60000"/>
+            <a:lumOff val="40000"/>
+          </a:schemeClr>
+        </a:solidFill>
+        <a:ln w="19050" cap="rnd" cmpd="sng" algn="ctr">
+          <a:solidFill>
+            <a:schemeClr val="lt1">
+              <a:hueOff val="0"/>
+              <a:satOff val="0"/>
+              <a:lumOff val="0"/>
+              <a:alphaOff val="0"/>
+            </a:schemeClr>
+          </a:solidFill>
+          <a:prstDash val="solid"/>
+        </a:ln>
+        <a:effectLst/>
+      </dsp:spPr>
+      <dsp:style>
+        <a:lnRef idx="2">
+          <a:scrgbClr r="0" g="0" b="0"/>
+        </a:lnRef>
+        <a:fillRef idx="1">
+          <a:scrgbClr r="0" g="0" b="0"/>
+        </a:fillRef>
+        <a:effectRef idx="0">
+          <a:scrgbClr r="0" g="0" b="0"/>
+        </a:effectRef>
+        <a:fontRef idx="minor">
+          <a:schemeClr val="lt1"/>
+        </a:fontRef>
+      </dsp:style>
+      <dsp:txBody>
+        <a:bodyPr spcFirstLastPara="0" vert="horz" wrap="square" lIns="10160" tIns="10160" rIns="10160" bIns="10160" numCol="1" spcCol="1270" anchor="ctr" anchorCtr="0">
+          <a:noAutofit/>
+        </a:bodyPr>
+        <a:lstStyle/>
+        <a:p>
+          <a:pPr marL="0" lvl="0" indent="0" algn="ctr" defTabSz="711200">
+            <a:lnSpc>
+              <a:spcPct val="90000"/>
+            </a:lnSpc>
+            <a:spcBef>
+              <a:spcPct val="0"/>
+            </a:spcBef>
+            <a:spcAft>
+              <a:spcPct val="35000"/>
+            </a:spcAft>
+            <a:buNone/>
+          </a:pPr>
+          <a:r>
+            <a:rPr lang="en-US" sz="1600" kern="1200" dirty="0"/>
+            <a:t>Mortgage Insurance</a:t>
+          </a:r>
+        </a:p>
+      </dsp:txBody>
+      <dsp:txXfrm>
+        <a:off x="3117042" y="1654892"/>
+        <a:ext cx="1378368" cy="668389"/>
+      </dsp:txXfrm>
+    </dsp:sp>
+  </dsp:spTree>
+</dsp:drawing>
+</file>
+
+<file path=ppt/diagrams/drawing4.xml><?xml version="1.0" encoding="utf-8"?>
+<dsp:drawing xmlns:dgm="http://schemas.openxmlformats.org/drawingml/2006/diagram" xmlns:dsp="http://schemas.microsoft.com/office/drawing/2008/diagram" xmlns:a="http://schemas.openxmlformats.org/drawingml/2006/main">
+  <dsp:spTree>
+    <dsp:nvGrpSpPr>
+      <dsp:cNvPr id="0" name=""/>
+      <dsp:cNvGrpSpPr/>
+    </dsp:nvGrpSpPr>
+    <dsp:grpSpPr/>
+    <dsp:sp modelId="{3BCAB6E7-3C8B-4AD1-96A7-E15ED4DC1AB0}">
+      <dsp:nvSpPr>
+        <dsp:cNvPr id="0" name=""/>
+        <dsp:cNvSpPr/>
+      </dsp:nvSpPr>
+      <dsp:spPr>
+        <a:xfrm>
+          <a:off x="0" y="249587"/>
+          <a:ext cx="1327678" cy="663839"/>
+        </a:xfrm>
+        <a:prstGeom prst="roundRect">
+          <a:avLst>
+            <a:gd name="adj" fmla="val 10000"/>
+          </a:avLst>
+        </a:prstGeom>
+        <a:solidFill>
+          <a:schemeClr val="accent1">
+            <a:hueOff val="0"/>
+            <a:satOff val="0"/>
+            <a:lumOff val="0"/>
+            <a:alphaOff val="0"/>
+          </a:schemeClr>
+        </a:solidFill>
+        <a:ln w="19050" cap="rnd" cmpd="sng" algn="ctr">
+          <a:solidFill>
+            <a:schemeClr val="lt1">
+              <a:hueOff val="0"/>
+              <a:satOff val="0"/>
+              <a:lumOff val="0"/>
+              <a:alphaOff val="0"/>
+            </a:schemeClr>
+          </a:solidFill>
+          <a:prstDash val="solid"/>
+        </a:ln>
+        <a:effectLst/>
+      </dsp:spPr>
+      <dsp:style>
+        <a:lnRef idx="2">
+          <a:scrgbClr r="0" g="0" b="0"/>
+        </a:lnRef>
+        <a:fillRef idx="1">
+          <a:scrgbClr r="0" g="0" b="0"/>
+        </a:fillRef>
+        <a:effectRef idx="0">
+          <a:scrgbClr r="0" g="0" b="0"/>
+        </a:effectRef>
+        <a:fontRef idx="minor">
+          <a:schemeClr val="lt1"/>
+        </a:fontRef>
+      </dsp:style>
+      <dsp:txBody>
+        <a:bodyPr spcFirstLastPara="0" vert="horz" wrap="square" lIns="25400" tIns="25400" rIns="25400" bIns="25400" numCol="1" spcCol="1270" anchor="ctr" anchorCtr="0">
+          <a:noAutofit/>
+        </a:bodyPr>
+        <a:lstStyle/>
+        <a:p>
+          <a:pPr marL="0" lvl="0" indent="0" algn="ctr" defTabSz="1778000">
+            <a:lnSpc>
+              <a:spcPct val="90000"/>
+            </a:lnSpc>
+            <a:spcBef>
+              <a:spcPct val="0"/>
+            </a:spcBef>
+            <a:spcAft>
+              <a:spcPct val="35000"/>
+            </a:spcAft>
+            <a:buNone/>
+          </a:pPr>
+          <a:r>
+            <a:rPr lang="en-US" sz="4000" kern="1200" dirty="0"/>
+            <a:t>EMA</a:t>
+          </a:r>
+        </a:p>
+      </dsp:txBody>
+      <dsp:txXfrm>
+        <a:off x="19443" y="269030"/>
+        <a:ext cx="1288792" cy="624953"/>
+      </dsp:txXfrm>
+    </dsp:sp>
+  </dsp:spTree>
+</dsp:drawing>
+</file>
+
+<file path=ppt/diagrams/drawing5.xml><?xml version="1.0" encoding="utf-8"?>
 <dsp:drawing xmlns:dgm="http://schemas.openxmlformats.org/drawingml/2006/diagram" xmlns:dsp="http://schemas.microsoft.com/office/drawing/2008/diagram" xmlns:a="http://schemas.openxmlformats.org/drawingml/2006/main">
   <dsp:spTree>
     <dsp:nvGrpSpPr>
@@ -4467,6 +8429,966 @@
 </file>
 
 <file path=ppt/diagrams/layout2.xml><?xml version="1.0" encoding="utf-8"?>
+<dgm:layoutDef xmlns:dgm="http://schemas.openxmlformats.org/drawingml/2006/diagram" xmlns:a="http://schemas.openxmlformats.org/drawingml/2006/main" uniqueId="urn:microsoft.com/office/officeart/2005/8/layout/hierarchy2">
+  <dgm:title val=""/>
+  <dgm:desc val=""/>
+  <dgm:catLst>
+    <dgm:cat type="hierarchy" pri="5000"/>
+  </dgm:catLst>
+  <dgm:sampData>
+    <dgm:dataModel>
+      <dgm:ptLst>
+        <dgm:pt modelId="0" type="doc"/>
+        <dgm:pt modelId="1">
+          <dgm:prSet phldr="1"/>
+        </dgm:pt>
+        <dgm:pt modelId="2">
+          <dgm:prSet phldr="1"/>
+        </dgm:pt>
+        <dgm:pt modelId="21">
+          <dgm:prSet phldr="1"/>
+        </dgm:pt>
+        <dgm:pt modelId="22">
+          <dgm:prSet phldr="1"/>
+        </dgm:pt>
+        <dgm:pt modelId="3">
+          <dgm:prSet phldr="1"/>
+        </dgm:pt>
+        <dgm:pt modelId="31">
+          <dgm:prSet phldr="1"/>
+        </dgm:pt>
+      </dgm:ptLst>
+      <dgm:cxnLst>
+        <dgm:cxn modelId="4" srcId="0" destId="1" srcOrd="0" destOrd="0"/>
+        <dgm:cxn modelId="5" srcId="1" destId="2" srcOrd="0" destOrd="0"/>
+        <dgm:cxn modelId="6" srcId="1" destId="3" srcOrd="1" destOrd="0"/>
+        <dgm:cxn modelId="23" srcId="2" destId="21" srcOrd="0" destOrd="0"/>
+        <dgm:cxn modelId="24" srcId="2" destId="22" srcOrd="1" destOrd="0"/>
+        <dgm:cxn modelId="33" srcId="3" destId="31" srcOrd="0" destOrd="0"/>
+      </dgm:cxnLst>
+      <dgm:bg/>
+      <dgm:whole/>
+    </dgm:dataModel>
+  </dgm:sampData>
+  <dgm:styleData>
+    <dgm:dataModel>
+      <dgm:ptLst>
+        <dgm:pt modelId="0" type="doc"/>
+        <dgm:pt modelId="1"/>
+        <dgm:pt modelId="11"/>
+        <dgm:pt modelId="12"/>
+      </dgm:ptLst>
+      <dgm:cxnLst>
+        <dgm:cxn modelId="2" srcId="0" destId="1" srcOrd="0" destOrd="0"/>
+        <dgm:cxn modelId="13" srcId="1" destId="11" srcOrd="0" destOrd="0"/>
+        <dgm:cxn modelId="14" srcId="1" destId="12" srcOrd="1" destOrd="0"/>
+      </dgm:cxnLst>
+      <dgm:bg/>
+      <dgm:whole/>
+    </dgm:dataModel>
+  </dgm:styleData>
+  <dgm:clrData>
+    <dgm:dataModel>
+      <dgm:ptLst>
+        <dgm:pt modelId="0" type="doc"/>
+        <dgm:pt modelId="1"/>
+        <dgm:pt modelId="2"/>
+        <dgm:pt modelId="21"/>
+        <dgm:pt modelId="211"/>
+        <dgm:pt modelId="3"/>
+        <dgm:pt modelId="31"/>
+        <dgm:pt modelId="311"/>
+      </dgm:ptLst>
+      <dgm:cxnLst>
+        <dgm:cxn modelId="4" srcId="0" destId="1" srcOrd="0" destOrd="0"/>
+        <dgm:cxn modelId="5" srcId="1" destId="2" srcOrd="0" destOrd="0"/>
+        <dgm:cxn modelId="6" srcId="1" destId="3" srcOrd="1" destOrd="0"/>
+        <dgm:cxn modelId="23" srcId="2" destId="21" srcOrd="0" destOrd="0"/>
+        <dgm:cxn modelId="24" srcId="21" destId="211" srcOrd="0" destOrd="0"/>
+        <dgm:cxn modelId="33" srcId="3" destId="31" srcOrd="0" destOrd="0"/>
+        <dgm:cxn modelId="34" srcId="31" destId="311" srcOrd="0" destOrd="0"/>
+      </dgm:cxnLst>
+      <dgm:bg/>
+      <dgm:whole/>
+    </dgm:dataModel>
+  </dgm:clrData>
+  <dgm:layoutNode name="diagram">
+    <dgm:varLst>
+      <dgm:chPref val="1"/>
+      <dgm:dir/>
+      <dgm:animOne val="branch"/>
+      <dgm:animLvl val="lvl"/>
+      <dgm:resizeHandles val="exact"/>
+    </dgm:varLst>
+    <dgm:choose name="Name0">
+      <dgm:if name="Name1" func="var" arg="dir" op="equ" val="norm">
+        <dgm:alg type="hierChild">
+          <dgm:param type="linDir" val="fromT"/>
+          <dgm:param type="chAlign" val="l"/>
+        </dgm:alg>
+      </dgm:if>
+      <dgm:else name="Name2">
+        <dgm:alg type="hierChild">
+          <dgm:param type="linDir" val="fromT"/>
+          <dgm:param type="chAlign" val="r"/>
+        </dgm:alg>
+      </dgm:else>
+    </dgm:choose>
+    <dgm:shape xmlns:r="http://schemas.openxmlformats.org/officeDocument/2006/relationships" r:blip="">
+      <dgm:adjLst/>
+    </dgm:shape>
+    <dgm:presOf/>
+    <dgm:constrLst>
+      <dgm:constr type="h" for="des" ptType="node" refType="h"/>
+      <dgm:constr type="w" for="des" ptType="node" refType="h" refFor="des" refPtType="node" fact="2"/>
+      <dgm:constr type="sibSp" refType="h" refFor="des" refPtType="node" op="equ" fact="0.15"/>
+      <dgm:constr type="sibSp" for="des" forName="level2hierChild" refType="h" refFor="des" refPtType="node" op="equ" fact="0.15"/>
+      <dgm:constr type="sibSp" for="des" forName="level3hierChild" refType="h" refFor="des" refPtType="node" op="equ" fact="0.15"/>
+      <dgm:constr type="sp" for="des" forName="root1" refType="w" refFor="des" refPtType="node" fact="0.4"/>
+      <dgm:constr type="sp" for="des" forName="root2" refType="sp" refFor="des" refForName="root1" op="equ"/>
+      <dgm:constr type="primFontSz" for="des" ptType="node" op="equ" val="65"/>
+      <dgm:constr type="primFontSz" for="des" forName="connTx" op="equ" val="55"/>
+      <dgm:constr type="primFontSz" for="des" forName="connTx" refType="primFontSz" refFor="des" refPtType="node" op="lte" fact="0.8"/>
+    </dgm:constrLst>
+    <dgm:ruleLst/>
+    <dgm:forEach name="Name3" axis="ch">
+      <dgm:forEach name="Name4" axis="self" ptType="node">
+        <dgm:layoutNode name="root1">
+          <dgm:choose name="Name5">
+            <dgm:if name="Name6" func="var" arg="dir" op="equ" val="norm">
+              <dgm:alg type="hierRoot">
+                <dgm:param type="hierAlign" val="lCtrCh"/>
+              </dgm:alg>
+            </dgm:if>
+            <dgm:else name="Name7">
+              <dgm:alg type="hierRoot">
+                <dgm:param type="hierAlign" val="rCtrCh"/>
+              </dgm:alg>
+            </dgm:else>
+          </dgm:choose>
+          <dgm:shape xmlns:r="http://schemas.openxmlformats.org/officeDocument/2006/relationships" r:blip="">
+            <dgm:adjLst/>
+          </dgm:shape>
+          <dgm:presOf/>
+          <dgm:constrLst/>
+          <dgm:ruleLst/>
+          <dgm:layoutNode name="LevelOneTextNode" styleLbl="node0">
+            <dgm:varLst>
+              <dgm:chPref val="3"/>
+            </dgm:varLst>
+            <dgm:alg type="tx"/>
+            <dgm:shape xmlns:r="http://schemas.openxmlformats.org/officeDocument/2006/relationships" type="roundRect" r:blip="">
+              <dgm:adjLst>
+                <dgm:adj idx="1" val="0.1"/>
+              </dgm:adjLst>
+            </dgm:shape>
+            <dgm:presOf axis="self"/>
+            <dgm:constrLst>
+              <dgm:constr type="tMarg" refType="primFontSz" fact="0.05"/>
+              <dgm:constr type="bMarg" refType="primFontSz" fact="0.05"/>
+              <dgm:constr type="lMarg" refType="primFontSz" fact="0.05"/>
+              <dgm:constr type="rMarg" refType="primFontSz" fact="0.05"/>
+            </dgm:constrLst>
+            <dgm:ruleLst>
+              <dgm:rule type="primFontSz" val="5" fact="NaN" max="NaN"/>
+            </dgm:ruleLst>
+          </dgm:layoutNode>
+          <dgm:layoutNode name="level2hierChild">
+            <dgm:choose name="Name8">
+              <dgm:if name="Name9" func="var" arg="dir" op="equ" val="norm">
+                <dgm:alg type="hierChild">
+                  <dgm:param type="linDir" val="fromT"/>
+                  <dgm:param type="chAlign" val="l"/>
+                </dgm:alg>
+              </dgm:if>
+              <dgm:else name="Name10">
+                <dgm:alg type="hierChild">
+                  <dgm:param type="linDir" val="fromT"/>
+                  <dgm:param type="chAlign" val="r"/>
+                </dgm:alg>
+              </dgm:else>
+            </dgm:choose>
+            <dgm:shape xmlns:r="http://schemas.openxmlformats.org/officeDocument/2006/relationships" r:blip="">
+              <dgm:adjLst/>
+            </dgm:shape>
+            <dgm:presOf/>
+            <dgm:constrLst/>
+            <dgm:ruleLst/>
+            <dgm:forEach name="repeat" axis="ch">
+              <dgm:forEach name="Name11" axis="self" ptType="parTrans" cnt="1">
+                <dgm:layoutNode name="conn2-1">
+                  <dgm:choose name="Name12">
+                    <dgm:if name="Name13" func="var" arg="dir" op="equ" val="norm">
+                      <dgm:alg type="conn">
+                        <dgm:param type="dim" val="1D"/>
+                        <dgm:param type="begPts" val="midR"/>
+                        <dgm:param type="endPts" val="midL"/>
+                        <dgm:param type="endSty" val="noArr"/>
+                      </dgm:alg>
+                    </dgm:if>
+                    <dgm:else name="Name14">
+                      <dgm:alg type="conn">
+                        <dgm:param type="dim" val="1D"/>
+                        <dgm:param type="begPts" val="midL"/>
+                        <dgm:param type="endPts" val="midR"/>
+                        <dgm:param type="endSty" val="noArr"/>
+                      </dgm:alg>
+                    </dgm:else>
+                  </dgm:choose>
+                  <dgm:shape xmlns:r="http://schemas.openxmlformats.org/officeDocument/2006/relationships" type="conn" r:blip="">
+                    <dgm:adjLst/>
+                  </dgm:shape>
+                  <dgm:presOf axis="self"/>
+                  <dgm:constrLst>
+                    <dgm:constr type="w" val="1"/>
+                    <dgm:constr type="h" val="5"/>
+                    <dgm:constr type="connDist"/>
+                    <dgm:constr type="begPad"/>
+                    <dgm:constr type="endPad"/>
+                    <dgm:constr type="userA" for="ch" refType="connDist"/>
+                  </dgm:constrLst>
+                  <dgm:ruleLst/>
+                  <dgm:layoutNode name="connTx">
+                    <dgm:alg type="tx">
+                      <dgm:param type="autoTxRot" val="grav"/>
+                    </dgm:alg>
+                    <dgm:shape xmlns:r="http://schemas.openxmlformats.org/officeDocument/2006/relationships" type="rect" r:blip="" hideGeom="1">
+                      <dgm:adjLst/>
+                    </dgm:shape>
+                    <dgm:presOf axis="self"/>
+                    <dgm:constrLst>
+                      <dgm:constr type="userA"/>
+                      <dgm:constr type="w" refType="userA" fact="0.05"/>
+                      <dgm:constr type="h" refType="userA" fact="0.05"/>
+                      <dgm:constr type="lMarg" val="1"/>
+                      <dgm:constr type="rMarg" val="1"/>
+                      <dgm:constr type="tMarg"/>
+                      <dgm:constr type="bMarg"/>
+                    </dgm:constrLst>
+                    <dgm:ruleLst>
+                      <dgm:rule type="h" val="NaN" fact="0.25" max="NaN"/>
+                      <dgm:rule type="w" val="NaN" fact="0.8" max="NaN"/>
+                      <dgm:rule type="primFontSz" val="5" fact="NaN" max="NaN"/>
+                    </dgm:ruleLst>
+                  </dgm:layoutNode>
+                </dgm:layoutNode>
+              </dgm:forEach>
+              <dgm:forEach name="Name15" axis="self" ptType="node">
+                <dgm:layoutNode name="root2">
+                  <dgm:choose name="Name16">
+                    <dgm:if name="Name17" func="var" arg="dir" op="equ" val="norm">
+                      <dgm:alg type="hierRoot">
+                        <dgm:param type="hierAlign" val="lCtrCh"/>
+                      </dgm:alg>
+                    </dgm:if>
+                    <dgm:else name="Name18">
+                      <dgm:alg type="hierRoot">
+                        <dgm:param type="hierAlign" val="rCtrCh"/>
+                      </dgm:alg>
+                    </dgm:else>
+                  </dgm:choose>
+                  <dgm:shape xmlns:r="http://schemas.openxmlformats.org/officeDocument/2006/relationships" r:blip="">
+                    <dgm:adjLst/>
+                  </dgm:shape>
+                  <dgm:presOf/>
+                  <dgm:constrLst/>
+                  <dgm:ruleLst/>
+                  <dgm:layoutNode name="LevelTwoTextNode">
+                    <dgm:varLst>
+                      <dgm:chPref val="3"/>
+                    </dgm:varLst>
+                    <dgm:alg type="tx"/>
+                    <dgm:shape xmlns:r="http://schemas.openxmlformats.org/officeDocument/2006/relationships" type="roundRect" r:blip="">
+                      <dgm:adjLst>
+                        <dgm:adj idx="1" val="0.1"/>
+                      </dgm:adjLst>
+                    </dgm:shape>
+                    <dgm:presOf axis="self"/>
+                    <dgm:constrLst>
+                      <dgm:constr type="tMarg" refType="primFontSz" fact="0.05"/>
+                      <dgm:constr type="bMarg" refType="primFontSz" fact="0.05"/>
+                      <dgm:constr type="lMarg" refType="primFontSz" fact="0.05"/>
+                      <dgm:constr type="rMarg" refType="primFontSz" fact="0.05"/>
+                    </dgm:constrLst>
+                    <dgm:ruleLst>
+                      <dgm:rule type="primFontSz" val="5" fact="NaN" max="NaN"/>
+                    </dgm:ruleLst>
+                  </dgm:layoutNode>
+                  <dgm:layoutNode name="level3hierChild">
+                    <dgm:choose name="Name19">
+                      <dgm:if name="Name20" func="var" arg="dir" op="equ" val="norm">
+                        <dgm:alg type="hierChild">
+                          <dgm:param type="linDir" val="fromT"/>
+                          <dgm:param type="chAlign" val="l"/>
+                        </dgm:alg>
+                      </dgm:if>
+                      <dgm:else name="Name21">
+                        <dgm:alg type="hierChild">
+                          <dgm:param type="linDir" val="fromT"/>
+                          <dgm:param type="chAlign" val="r"/>
+                        </dgm:alg>
+                      </dgm:else>
+                    </dgm:choose>
+                    <dgm:shape xmlns:r="http://schemas.openxmlformats.org/officeDocument/2006/relationships" r:blip="">
+                      <dgm:adjLst/>
+                    </dgm:shape>
+                    <dgm:presOf/>
+                    <dgm:constrLst/>
+                    <dgm:ruleLst/>
+                    <dgm:forEach name="Name22" ref="repeat"/>
+                  </dgm:layoutNode>
+                </dgm:layoutNode>
+              </dgm:forEach>
+            </dgm:forEach>
+          </dgm:layoutNode>
+        </dgm:layoutNode>
+      </dgm:forEach>
+    </dgm:forEach>
+  </dgm:layoutNode>
+</dgm:layoutDef>
+</file>
+
+<file path=ppt/diagrams/layout3.xml><?xml version="1.0" encoding="utf-8"?>
+<dgm:layoutDef xmlns:dgm="http://schemas.openxmlformats.org/drawingml/2006/diagram" xmlns:a="http://schemas.openxmlformats.org/drawingml/2006/main" uniqueId="urn:microsoft.com/office/officeart/2005/8/layout/hierarchy2">
+  <dgm:title val=""/>
+  <dgm:desc val=""/>
+  <dgm:catLst>
+    <dgm:cat type="hierarchy" pri="5000"/>
+  </dgm:catLst>
+  <dgm:sampData>
+    <dgm:dataModel>
+      <dgm:ptLst>
+        <dgm:pt modelId="0" type="doc"/>
+        <dgm:pt modelId="1">
+          <dgm:prSet phldr="1"/>
+        </dgm:pt>
+        <dgm:pt modelId="2">
+          <dgm:prSet phldr="1"/>
+        </dgm:pt>
+        <dgm:pt modelId="21">
+          <dgm:prSet phldr="1"/>
+        </dgm:pt>
+        <dgm:pt modelId="22">
+          <dgm:prSet phldr="1"/>
+        </dgm:pt>
+        <dgm:pt modelId="3">
+          <dgm:prSet phldr="1"/>
+        </dgm:pt>
+        <dgm:pt modelId="31">
+          <dgm:prSet phldr="1"/>
+        </dgm:pt>
+      </dgm:ptLst>
+      <dgm:cxnLst>
+        <dgm:cxn modelId="4" srcId="0" destId="1" srcOrd="0" destOrd="0"/>
+        <dgm:cxn modelId="5" srcId="1" destId="2" srcOrd="0" destOrd="0"/>
+        <dgm:cxn modelId="6" srcId="1" destId="3" srcOrd="1" destOrd="0"/>
+        <dgm:cxn modelId="23" srcId="2" destId="21" srcOrd="0" destOrd="0"/>
+        <dgm:cxn modelId="24" srcId="2" destId="22" srcOrd="1" destOrd="0"/>
+        <dgm:cxn modelId="33" srcId="3" destId="31" srcOrd="0" destOrd="0"/>
+      </dgm:cxnLst>
+      <dgm:bg/>
+      <dgm:whole/>
+    </dgm:dataModel>
+  </dgm:sampData>
+  <dgm:styleData>
+    <dgm:dataModel>
+      <dgm:ptLst>
+        <dgm:pt modelId="0" type="doc"/>
+        <dgm:pt modelId="1"/>
+        <dgm:pt modelId="11"/>
+        <dgm:pt modelId="12"/>
+      </dgm:ptLst>
+      <dgm:cxnLst>
+        <dgm:cxn modelId="2" srcId="0" destId="1" srcOrd="0" destOrd="0"/>
+        <dgm:cxn modelId="13" srcId="1" destId="11" srcOrd="0" destOrd="0"/>
+        <dgm:cxn modelId="14" srcId="1" destId="12" srcOrd="1" destOrd="0"/>
+      </dgm:cxnLst>
+      <dgm:bg/>
+      <dgm:whole/>
+    </dgm:dataModel>
+  </dgm:styleData>
+  <dgm:clrData>
+    <dgm:dataModel>
+      <dgm:ptLst>
+        <dgm:pt modelId="0" type="doc"/>
+        <dgm:pt modelId="1"/>
+        <dgm:pt modelId="2"/>
+        <dgm:pt modelId="21"/>
+        <dgm:pt modelId="211"/>
+        <dgm:pt modelId="3"/>
+        <dgm:pt modelId="31"/>
+        <dgm:pt modelId="311"/>
+      </dgm:ptLst>
+      <dgm:cxnLst>
+        <dgm:cxn modelId="4" srcId="0" destId="1" srcOrd="0" destOrd="0"/>
+        <dgm:cxn modelId="5" srcId="1" destId="2" srcOrd="0" destOrd="0"/>
+        <dgm:cxn modelId="6" srcId="1" destId="3" srcOrd="1" destOrd="0"/>
+        <dgm:cxn modelId="23" srcId="2" destId="21" srcOrd="0" destOrd="0"/>
+        <dgm:cxn modelId="24" srcId="21" destId="211" srcOrd="0" destOrd="0"/>
+        <dgm:cxn modelId="33" srcId="3" destId="31" srcOrd="0" destOrd="0"/>
+        <dgm:cxn modelId="34" srcId="31" destId="311" srcOrd="0" destOrd="0"/>
+      </dgm:cxnLst>
+      <dgm:bg/>
+      <dgm:whole/>
+    </dgm:dataModel>
+  </dgm:clrData>
+  <dgm:layoutNode name="diagram">
+    <dgm:varLst>
+      <dgm:chPref val="1"/>
+      <dgm:dir/>
+      <dgm:animOne val="branch"/>
+      <dgm:animLvl val="lvl"/>
+      <dgm:resizeHandles val="exact"/>
+    </dgm:varLst>
+    <dgm:choose name="Name0">
+      <dgm:if name="Name1" func="var" arg="dir" op="equ" val="norm">
+        <dgm:alg type="hierChild">
+          <dgm:param type="linDir" val="fromT"/>
+          <dgm:param type="chAlign" val="l"/>
+        </dgm:alg>
+      </dgm:if>
+      <dgm:else name="Name2">
+        <dgm:alg type="hierChild">
+          <dgm:param type="linDir" val="fromT"/>
+          <dgm:param type="chAlign" val="r"/>
+        </dgm:alg>
+      </dgm:else>
+    </dgm:choose>
+    <dgm:shape xmlns:r="http://schemas.openxmlformats.org/officeDocument/2006/relationships" r:blip="">
+      <dgm:adjLst/>
+    </dgm:shape>
+    <dgm:presOf/>
+    <dgm:constrLst>
+      <dgm:constr type="h" for="des" ptType="node" refType="h"/>
+      <dgm:constr type="w" for="des" ptType="node" refType="h" refFor="des" refPtType="node" fact="2"/>
+      <dgm:constr type="sibSp" refType="h" refFor="des" refPtType="node" op="equ" fact="0.15"/>
+      <dgm:constr type="sibSp" for="des" forName="level2hierChild" refType="h" refFor="des" refPtType="node" op="equ" fact="0.15"/>
+      <dgm:constr type="sibSp" for="des" forName="level3hierChild" refType="h" refFor="des" refPtType="node" op="equ" fact="0.15"/>
+      <dgm:constr type="sp" for="des" forName="root1" refType="w" refFor="des" refPtType="node" fact="0.4"/>
+      <dgm:constr type="sp" for="des" forName="root2" refType="sp" refFor="des" refForName="root1" op="equ"/>
+      <dgm:constr type="primFontSz" for="des" ptType="node" op="equ" val="65"/>
+      <dgm:constr type="primFontSz" for="des" forName="connTx" op="equ" val="55"/>
+      <dgm:constr type="primFontSz" for="des" forName="connTx" refType="primFontSz" refFor="des" refPtType="node" op="lte" fact="0.8"/>
+    </dgm:constrLst>
+    <dgm:ruleLst/>
+    <dgm:forEach name="Name3" axis="ch">
+      <dgm:forEach name="Name4" axis="self" ptType="node">
+        <dgm:layoutNode name="root1">
+          <dgm:choose name="Name5">
+            <dgm:if name="Name6" func="var" arg="dir" op="equ" val="norm">
+              <dgm:alg type="hierRoot">
+                <dgm:param type="hierAlign" val="lCtrCh"/>
+              </dgm:alg>
+            </dgm:if>
+            <dgm:else name="Name7">
+              <dgm:alg type="hierRoot">
+                <dgm:param type="hierAlign" val="rCtrCh"/>
+              </dgm:alg>
+            </dgm:else>
+          </dgm:choose>
+          <dgm:shape xmlns:r="http://schemas.openxmlformats.org/officeDocument/2006/relationships" r:blip="">
+            <dgm:adjLst/>
+          </dgm:shape>
+          <dgm:presOf/>
+          <dgm:constrLst/>
+          <dgm:ruleLst/>
+          <dgm:layoutNode name="LevelOneTextNode" styleLbl="node0">
+            <dgm:varLst>
+              <dgm:chPref val="3"/>
+            </dgm:varLst>
+            <dgm:alg type="tx"/>
+            <dgm:shape xmlns:r="http://schemas.openxmlformats.org/officeDocument/2006/relationships" type="roundRect" r:blip="">
+              <dgm:adjLst>
+                <dgm:adj idx="1" val="0.1"/>
+              </dgm:adjLst>
+            </dgm:shape>
+            <dgm:presOf axis="self"/>
+            <dgm:constrLst>
+              <dgm:constr type="tMarg" refType="primFontSz" fact="0.05"/>
+              <dgm:constr type="bMarg" refType="primFontSz" fact="0.05"/>
+              <dgm:constr type="lMarg" refType="primFontSz" fact="0.05"/>
+              <dgm:constr type="rMarg" refType="primFontSz" fact="0.05"/>
+            </dgm:constrLst>
+            <dgm:ruleLst>
+              <dgm:rule type="primFontSz" val="5" fact="NaN" max="NaN"/>
+            </dgm:ruleLst>
+          </dgm:layoutNode>
+          <dgm:layoutNode name="level2hierChild">
+            <dgm:choose name="Name8">
+              <dgm:if name="Name9" func="var" arg="dir" op="equ" val="norm">
+                <dgm:alg type="hierChild">
+                  <dgm:param type="linDir" val="fromT"/>
+                  <dgm:param type="chAlign" val="l"/>
+                </dgm:alg>
+              </dgm:if>
+              <dgm:else name="Name10">
+                <dgm:alg type="hierChild">
+                  <dgm:param type="linDir" val="fromT"/>
+                  <dgm:param type="chAlign" val="r"/>
+                </dgm:alg>
+              </dgm:else>
+            </dgm:choose>
+            <dgm:shape xmlns:r="http://schemas.openxmlformats.org/officeDocument/2006/relationships" r:blip="">
+              <dgm:adjLst/>
+            </dgm:shape>
+            <dgm:presOf/>
+            <dgm:constrLst/>
+            <dgm:ruleLst/>
+            <dgm:forEach name="repeat" axis="ch">
+              <dgm:forEach name="Name11" axis="self" ptType="parTrans" cnt="1">
+                <dgm:layoutNode name="conn2-1">
+                  <dgm:choose name="Name12">
+                    <dgm:if name="Name13" func="var" arg="dir" op="equ" val="norm">
+                      <dgm:alg type="conn">
+                        <dgm:param type="dim" val="1D"/>
+                        <dgm:param type="begPts" val="midR"/>
+                        <dgm:param type="endPts" val="midL"/>
+                        <dgm:param type="endSty" val="noArr"/>
+                      </dgm:alg>
+                    </dgm:if>
+                    <dgm:else name="Name14">
+                      <dgm:alg type="conn">
+                        <dgm:param type="dim" val="1D"/>
+                        <dgm:param type="begPts" val="midL"/>
+                        <dgm:param type="endPts" val="midR"/>
+                        <dgm:param type="endSty" val="noArr"/>
+                      </dgm:alg>
+                    </dgm:else>
+                  </dgm:choose>
+                  <dgm:shape xmlns:r="http://schemas.openxmlformats.org/officeDocument/2006/relationships" type="conn" r:blip="">
+                    <dgm:adjLst/>
+                  </dgm:shape>
+                  <dgm:presOf axis="self"/>
+                  <dgm:constrLst>
+                    <dgm:constr type="w" val="1"/>
+                    <dgm:constr type="h" val="5"/>
+                    <dgm:constr type="connDist"/>
+                    <dgm:constr type="begPad"/>
+                    <dgm:constr type="endPad"/>
+                    <dgm:constr type="userA" for="ch" refType="connDist"/>
+                  </dgm:constrLst>
+                  <dgm:ruleLst/>
+                  <dgm:layoutNode name="connTx">
+                    <dgm:alg type="tx">
+                      <dgm:param type="autoTxRot" val="grav"/>
+                    </dgm:alg>
+                    <dgm:shape xmlns:r="http://schemas.openxmlformats.org/officeDocument/2006/relationships" type="rect" r:blip="" hideGeom="1">
+                      <dgm:adjLst/>
+                    </dgm:shape>
+                    <dgm:presOf axis="self"/>
+                    <dgm:constrLst>
+                      <dgm:constr type="userA"/>
+                      <dgm:constr type="w" refType="userA" fact="0.05"/>
+                      <dgm:constr type="h" refType="userA" fact="0.05"/>
+                      <dgm:constr type="lMarg" val="1"/>
+                      <dgm:constr type="rMarg" val="1"/>
+                      <dgm:constr type="tMarg"/>
+                      <dgm:constr type="bMarg"/>
+                    </dgm:constrLst>
+                    <dgm:ruleLst>
+                      <dgm:rule type="h" val="NaN" fact="0.25" max="NaN"/>
+                      <dgm:rule type="w" val="NaN" fact="0.8" max="NaN"/>
+                      <dgm:rule type="primFontSz" val="5" fact="NaN" max="NaN"/>
+                    </dgm:ruleLst>
+                  </dgm:layoutNode>
+                </dgm:layoutNode>
+              </dgm:forEach>
+              <dgm:forEach name="Name15" axis="self" ptType="node">
+                <dgm:layoutNode name="root2">
+                  <dgm:choose name="Name16">
+                    <dgm:if name="Name17" func="var" arg="dir" op="equ" val="norm">
+                      <dgm:alg type="hierRoot">
+                        <dgm:param type="hierAlign" val="lCtrCh"/>
+                      </dgm:alg>
+                    </dgm:if>
+                    <dgm:else name="Name18">
+                      <dgm:alg type="hierRoot">
+                        <dgm:param type="hierAlign" val="rCtrCh"/>
+                      </dgm:alg>
+                    </dgm:else>
+                  </dgm:choose>
+                  <dgm:shape xmlns:r="http://schemas.openxmlformats.org/officeDocument/2006/relationships" r:blip="">
+                    <dgm:adjLst/>
+                  </dgm:shape>
+                  <dgm:presOf/>
+                  <dgm:constrLst/>
+                  <dgm:ruleLst/>
+                  <dgm:layoutNode name="LevelTwoTextNode">
+                    <dgm:varLst>
+                      <dgm:chPref val="3"/>
+                    </dgm:varLst>
+                    <dgm:alg type="tx"/>
+                    <dgm:shape xmlns:r="http://schemas.openxmlformats.org/officeDocument/2006/relationships" type="roundRect" r:blip="">
+                      <dgm:adjLst>
+                        <dgm:adj idx="1" val="0.1"/>
+                      </dgm:adjLst>
+                    </dgm:shape>
+                    <dgm:presOf axis="self"/>
+                    <dgm:constrLst>
+                      <dgm:constr type="tMarg" refType="primFontSz" fact="0.05"/>
+                      <dgm:constr type="bMarg" refType="primFontSz" fact="0.05"/>
+                      <dgm:constr type="lMarg" refType="primFontSz" fact="0.05"/>
+                      <dgm:constr type="rMarg" refType="primFontSz" fact="0.05"/>
+                    </dgm:constrLst>
+                    <dgm:ruleLst>
+                      <dgm:rule type="primFontSz" val="5" fact="NaN" max="NaN"/>
+                    </dgm:ruleLst>
+                  </dgm:layoutNode>
+                  <dgm:layoutNode name="level3hierChild">
+                    <dgm:choose name="Name19">
+                      <dgm:if name="Name20" func="var" arg="dir" op="equ" val="norm">
+                        <dgm:alg type="hierChild">
+                          <dgm:param type="linDir" val="fromT"/>
+                          <dgm:param type="chAlign" val="l"/>
+                        </dgm:alg>
+                      </dgm:if>
+                      <dgm:else name="Name21">
+                        <dgm:alg type="hierChild">
+                          <dgm:param type="linDir" val="fromT"/>
+                          <dgm:param type="chAlign" val="r"/>
+                        </dgm:alg>
+                      </dgm:else>
+                    </dgm:choose>
+                    <dgm:shape xmlns:r="http://schemas.openxmlformats.org/officeDocument/2006/relationships" r:blip="">
+                      <dgm:adjLst/>
+                    </dgm:shape>
+                    <dgm:presOf/>
+                    <dgm:constrLst/>
+                    <dgm:ruleLst/>
+                    <dgm:forEach name="Name22" ref="repeat"/>
+                  </dgm:layoutNode>
+                </dgm:layoutNode>
+              </dgm:forEach>
+            </dgm:forEach>
+          </dgm:layoutNode>
+        </dgm:layoutNode>
+      </dgm:forEach>
+    </dgm:forEach>
+  </dgm:layoutNode>
+</dgm:layoutDef>
+</file>
+
+<file path=ppt/diagrams/layout4.xml><?xml version="1.0" encoding="utf-8"?>
+<dgm:layoutDef xmlns:dgm="http://schemas.openxmlformats.org/drawingml/2006/diagram" xmlns:a="http://schemas.openxmlformats.org/drawingml/2006/main" uniqueId="urn:microsoft.com/office/officeart/2005/8/layout/hierarchy2">
+  <dgm:title val=""/>
+  <dgm:desc val=""/>
+  <dgm:catLst>
+    <dgm:cat type="hierarchy" pri="5000"/>
+  </dgm:catLst>
+  <dgm:sampData>
+    <dgm:dataModel>
+      <dgm:ptLst>
+        <dgm:pt modelId="0" type="doc"/>
+        <dgm:pt modelId="1">
+          <dgm:prSet phldr="1"/>
+        </dgm:pt>
+        <dgm:pt modelId="2">
+          <dgm:prSet phldr="1"/>
+        </dgm:pt>
+        <dgm:pt modelId="21">
+          <dgm:prSet phldr="1"/>
+        </dgm:pt>
+        <dgm:pt modelId="22">
+          <dgm:prSet phldr="1"/>
+        </dgm:pt>
+        <dgm:pt modelId="3">
+          <dgm:prSet phldr="1"/>
+        </dgm:pt>
+        <dgm:pt modelId="31">
+          <dgm:prSet phldr="1"/>
+        </dgm:pt>
+      </dgm:ptLst>
+      <dgm:cxnLst>
+        <dgm:cxn modelId="4" srcId="0" destId="1" srcOrd="0" destOrd="0"/>
+        <dgm:cxn modelId="5" srcId="1" destId="2" srcOrd="0" destOrd="0"/>
+        <dgm:cxn modelId="6" srcId="1" destId="3" srcOrd="1" destOrd="0"/>
+        <dgm:cxn modelId="23" srcId="2" destId="21" srcOrd="0" destOrd="0"/>
+        <dgm:cxn modelId="24" srcId="2" destId="22" srcOrd="1" destOrd="0"/>
+        <dgm:cxn modelId="33" srcId="3" destId="31" srcOrd="0" destOrd="0"/>
+      </dgm:cxnLst>
+      <dgm:bg/>
+      <dgm:whole/>
+    </dgm:dataModel>
+  </dgm:sampData>
+  <dgm:styleData>
+    <dgm:dataModel>
+      <dgm:ptLst>
+        <dgm:pt modelId="0" type="doc"/>
+        <dgm:pt modelId="1"/>
+        <dgm:pt modelId="11"/>
+        <dgm:pt modelId="12"/>
+      </dgm:ptLst>
+      <dgm:cxnLst>
+        <dgm:cxn modelId="2" srcId="0" destId="1" srcOrd="0" destOrd="0"/>
+        <dgm:cxn modelId="13" srcId="1" destId="11" srcOrd="0" destOrd="0"/>
+        <dgm:cxn modelId="14" srcId="1" destId="12" srcOrd="1" destOrd="0"/>
+      </dgm:cxnLst>
+      <dgm:bg/>
+      <dgm:whole/>
+    </dgm:dataModel>
+  </dgm:styleData>
+  <dgm:clrData>
+    <dgm:dataModel>
+      <dgm:ptLst>
+        <dgm:pt modelId="0" type="doc"/>
+        <dgm:pt modelId="1"/>
+        <dgm:pt modelId="2"/>
+        <dgm:pt modelId="21"/>
+        <dgm:pt modelId="211"/>
+        <dgm:pt modelId="3"/>
+        <dgm:pt modelId="31"/>
+        <dgm:pt modelId="311"/>
+      </dgm:ptLst>
+      <dgm:cxnLst>
+        <dgm:cxn modelId="4" srcId="0" destId="1" srcOrd="0" destOrd="0"/>
+        <dgm:cxn modelId="5" srcId="1" destId="2" srcOrd="0" destOrd="0"/>
+        <dgm:cxn modelId="6" srcId="1" destId="3" srcOrd="1" destOrd="0"/>
+        <dgm:cxn modelId="23" srcId="2" destId="21" srcOrd="0" destOrd="0"/>
+        <dgm:cxn modelId="24" srcId="21" destId="211" srcOrd="0" destOrd="0"/>
+        <dgm:cxn modelId="33" srcId="3" destId="31" srcOrd="0" destOrd="0"/>
+        <dgm:cxn modelId="34" srcId="31" destId="311" srcOrd="0" destOrd="0"/>
+      </dgm:cxnLst>
+      <dgm:bg/>
+      <dgm:whole/>
+    </dgm:dataModel>
+  </dgm:clrData>
+  <dgm:layoutNode name="diagram">
+    <dgm:varLst>
+      <dgm:chPref val="1"/>
+      <dgm:dir/>
+      <dgm:animOne val="branch"/>
+      <dgm:animLvl val="lvl"/>
+      <dgm:resizeHandles val="exact"/>
+    </dgm:varLst>
+    <dgm:choose name="Name0">
+      <dgm:if name="Name1" func="var" arg="dir" op="equ" val="norm">
+        <dgm:alg type="hierChild">
+          <dgm:param type="linDir" val="fromT"/>
+          <dgm:param type="chAlign" val="l"/>
+        </dgm:alg>
+      </dgm:if>
+      <dgm:else name="Name2">
+        <dgm:alg type="hierChild">
+          <dgm:param type="linDir" val="fromT"/>
+          <dgm:param type="chAlign" val="r"/>
+        </dgm:alg>
+      </dgm:else>
+    </dgm:choose>
+    <dgm:shape xmlns:r="http://schemas.openxmlformats.org/officeDocument/2006/relationships" r:blip="">
+      <dgm:adjLst/>
+    </dgm:shape>
+    <dgm:presOf/>
+    <dgm:constrLst>
+      <dgm:constr type="h" for="des" ptType="node" refType="h"/>
+      <dgm:constr type="w" for="des" ptType="node" refType="h" refFor="des" refPtType="node" fact="2"/>
+      <dgm:constr type="sibSp" refType="h" refFor="des" refPtType="node" op="equ" fact="0.15"/>
+      <dgm:constr type="sibSp" for="des" forName="level2hierChild" refType="h" refFor="des" refPtType="node" op="equ" fact="0.15"/>
+      <dgm:constr type="sibSp" for="des" forName="level3hierChild" refType="h" refFor="des" refPtType="node" op="equ" fact="0.15"/>
+      <dgm:constr type="sp" for="des" forName="root1" refType="w" refFor="des" refPtType="node" fact="0.4"/>
+      <dgm:constr type="sp" for="des" forName="root2" refType="sp" refFor="des" refForName="root1" op="equ"/>
+      <dgm:constr type="primFontSz" for="des" ptType="node" op="equ" val="65"/>
+      <dgm:constr type="primFontSz" for="des" forName="connTx" op="equ" val="55"/>
+      <dgm:constr type="primFontSz" for="des" forName="connTx" refType="primFontSz" refFor="des" refPtType="node" op="lte" fact="0.8"/>
+    </dgm:constrLst>
+    <dgm:ruleLst/>
+    <dgm:forEach name="Name3" axis="ch">
+      <dgm:forEach name="Name4" axis="self" ptType="node">
+        <dgm:layoutNode name="root1">
+          <dgm:choose name="Name5">
+            <dgm:if name="Name6" func="var" arg="dir" op="equ" val="norm">
+              <dgm:alg type="hierRoot">
+                <dgm:param type="hierAlign" val="lCtrCh"/>
+              </dgm:alg>
+            </dgm:if>
+            <dgm:else name="Name7">
+              <dgm:alg type="hierRoot">
+                <dgm:param type="hierAlign" val="rCtrCh"/>
+              </dgm:alg>
+            </dgm:else>
+          </dgm:choose>
+          <dgm:shape xmlns:r="http://schemas.openxmlformats.org/officeDocument/2006/relationships" r:blip="">
+            <dgm:adjLst/>
+          </dgm:shape>
+          <dgm:presOf/>
+          <dgm:constrLst/>
+          <dgm:ruleLst/>
+          <dgm:layoutNode name="LevelOneTextNode" styleLbl="node0">
+            <dgm:varLst>
+              <dgm:chPref val="3"/>
+            </dgm:varLst>
+            <dgm:alg type="tx"/>
+            <dgm:shape xmlns:r="http://schemas.openxmlformats.org/officeDocument/2006/relationships" type="roundRect" r:blip="">
+              <dgm:adjLst>
+                <dgm:adj idx="1" val="0.1"/>
+              </dgm:adjLst>
+            </dgm:shape>
+            <dgm:presOf axis="self"/>
+            <dgm:constrLst>
+              <dgm:constr type="tMarg" refType="primFontSz" fact="0.05"/>
+              <dgm:constr type="bMarg" refType="primFontSz" fact="0.05"/>
+              <dgm:constr type="lMarg" refType="primFontSz" fact="0.05"/>
+              <dgm:constr type="rMarg" refType="primFontSz" fact="0.05"/>
+            </dgm:constrLst>
+            <dgm:ruleLst>
+              <dgm:rule type="primFontSz" val="5" fact="NaN" max="NaN"/>
+            </dgm:ruleLst>
+          </dgm:layoutNode>
+          <dgm:layoutNode name="level2hierChild">
+            <dgm:choose name="Name8">
+              <dgm:if name="Name9" func="var" arg="dir" op="equ" val="norm">
+                <dgm:alg type="hierChild">
+                  <dgm:param type="linDir" val="fromT"/>
+                  <dgm:param type="chAlign" val="l"/>
+                </dgm:alg>
+              </dgm:if>
+              <dgm:else name="Name10">
+                <dgm:alg type="hierChild">
+                  <dgm:param type="linDir" val="fromT"/>
+                  <dgm:param type="chAlign" val="r"/>
+                </dgm:alg>
+              </dgm:else>
+            </dgm:choose>
+            <dgm:shape xmlns:r="http://schemas.openxmlformats.org/officeDocument/2006/relationships" r:blip="">
+              <dgm:adjLst/>
+            </dgm:shape>
+            <dgm:presOf/>
+            <dgm:constrLst/>
+            <dgm:ruleLst/>
+            <dgm:forEach name="repeat" axis="ch">
+              <dgm:forEach name="Name11" axis="self" ptType="parTrans" cnt="1">
+                <dgm:layoutNode name="conn2-1">
+                  <dgm:choose name="Name12">
+                    <dgm:if name="Name13" func="var" arg="dir" op="equ" val="norm">
+                      <dgm:alg type="conn">
+                        <dgm:param type="dim" val="1D"/>
+                        <dgm:param type="begPts" val="midR"/>
+                        <dgm:param type="endPts" val="midL"/>
+                        <dgm:param type="endSty" val="noArr"/>
+                      </dgm:alg>
+                    </dgm:if>
+                    <dgm:else name="Name14">
+                      <dgm:alg type="conn">
+                        <dgm:param type="dim" val="1D"/>
+                        <dgm:param type="begPts" val="midL"/>
+                        <dgm:param type="endPts" val="midR"/>
+                        <dgm:param type="endSty" val="noArr"/>
+                      </dgm:alg>
+                    </dgm:else>
+                  </dgm:choose>
+                  <dgm:shape xmlns:r="http://schemas.openxmlformats.org/officeDocument/2006/relationships" type="conn" r:blip="">
+                    <dgm:adjLst/>
+                  </dgm:shape>
+                  <dgm:presOf axis="self"/>
+                  <dgm:constrLst>
+                    <dgm:constr type="w" val="1"/>
+                    <dgm:constr type="h" val="5"/>
+                    <dgm:constr type="connDist"/>
+                    <dgm:constr type="begPad"/>
+                    <dgm:constr type="endPad"/>
+                    <dgm:constr type="userA" for="ch" refType="connDist"/>
+                  </dgm:constrLst>
+                  <dgm:ruleLst/>
+                  <dgm:layoutNode name="connTx">
+                    <dgm:alg type="tx">
+                      <dgm:param type="autoTxRot" val="grav"/>
+                    </dgm:alg>
+                    <dgm:shape xmlns:r="http://schemas.openxmlformats.org/officeDocument/2006/relationships" type="rect" r:blip="" hideGeom="1">
+                      <dgm:adjLst/>
+                    </dgm:shape>
+                    <dgm:presOf axis="self"/>
+                    <dgm:constrLst>
+                      <dgm:constr type="userA"/>
+                      <dgm:constr type="w" refType="userA" fact="0.05"/>
+                      <dgm:constr type="h" refType="userA" fact="0.05"/>
+                      <dgm:constr type="lMarg" val="1"/>
+                      <dgm:constr type="rMarg" val="1"/>
+                      <dgm:constr type="tMarg"/>
+                      <dgm:constr type="bMarg"/>
+                    </dgm:constrLst>
+                    <dgm:ruleLst>
+                      <dgm:rule type="h" val="NaN" fact="0.25" max="NaN"/>
+                      <dgm:rule type="w" val="NaN" fact="0.8" max="NaN"/>
+                      <dgm:rule type="primFontSz" val="5" fact="NaN" max="NaN"/>
+                    </dgm:ruleLst>
+                  </dgm:layoutNode>
+                </dgm:layoutNode>
+              </dgm:forEach>
+              <dgm:forEach name="Name15" axis="self" ptType="node">
+                <dgm:layoutNode name="root2">
+                  <dgm:choose name="Name16">
+                    <dgm:if name="Name17" func="var" arg="dir" op="equ" val="norm">
+                      <dgm:alg type="hierRoot">
+                        <dgm:param type="hierAlign" val="lCtrCh"/>
+                      </dgm:alg>
+                    </dgm:if>
+                    <dgm:else name="Name18">
+                      <dgm:alg type="hierRoot">
+                        <dgm:param type="hierAlign" val="rCtrCh"/>
+                      </dgm:alg>
+                    </dgm:else>
+                  </dgm:choose>
+                  <dgm:shape xmlns:r="http://schemas.openxmlformats.org/officeDocument/2006/relationships" r:blip="">
+                    <dgm:adjLst/>
+                  </dgm:shape>
+                  <dgm:presOf/>
+                  <dgm:constrLst/>
+                  <dgm:ruleLst/>
+                  <dgm:layoutNode name="LevelTwoTextNode">
+                    <dgm:varLst>
+                      <dgm:chPref val="3"/>
+                    </dgm:varLst>
+                    <dgm:alg type="tx"/>
+                    <dgm:shape xmlns:r="http://schemas.openxmlformats.org/officeDocument/2006/relationships" type="roundRect" r:blip="">
+                      <dgm:adjLst>
+                        <dgm:adj idx="1" val="0.1"/>
+                      </dgm:adjLst>
+                    </dgm:shape>
+                    <dgm:presOf axis="self"/>
+                    <dgm:constrLst>
+                      <dgm:constr type="tMarg" refType="primFontSz" fact="0.05"/>
+                      <dgm:constr type="bMarg" refType="primFontSz" fact="0.05"/>
+                      <dgm:constr type="lMarg" refType="primFontSz" fact="0.05"/>
+                      <dgm:constr type="rMarg" refType="primFontSz" fact="0.05"/>
+                    </dgm:constrLst>
+                    <dgm:ruleLst>
+                      <dgm:rule type="primFontSz" val="5" fact="NaN" max="NaN"/>
+                    </dgm:ruleLst>
+                  </dgm:layoutNode>
+                  <dgm:layoutNode name="level3hierChild">
+                    <dgm:choose name="Name19">
+                      <dgm:if name="Name20" func="var" arg="dir" op="equ" val="norm">
+                        <dgm:alg type="hierChild">
+                          <dgm:param type="linDir" val="fromT"/>
+                          <dgm:param type="chAlign" val="l"/>
+                        </dgm:alg>
+                      </dgm:if>
+                      <dgm:else name="Name21">
+                        <dgm:alg type="hierChild">
+                          <dgm:param type="linDir" val="fromT"/>
+                          <dgm:param type="chAlign" val="r"/>
+                        </dgm:alg>
+                      </dgm:else>
+                    </dgm:choose>
+                    <dgm:shape xmlns:r="http://schemas.openxmlformats.org/officeDocument/2006/relationships" r:blip="">
+                      <dgm:adjLst/>
+                    </dgm:shape>
+                    <dgm:presOf/>
+                    <dgm:constrLst/>
+                    <dgm:ruleLst/>
+                    <dgm:forEach name="Name22" ref="repeat"/>
+                  </dgm:layoutNode>
+                </dgm:layoutNode>
+              </dgm:forEach>
+            </dgm:forEach>
+          </dgm:layoutNode>
+        </dgm:layoutNode>
+      </dgm:forEach>
+    </dgm:forEach>
+  </dgm:layoutNode>
+</dgm:layoutDef>
+</file>
+
+<file path=ppt/diagrams/layout5.xml><?xml version="1.0" encoding="utf-8"?>
 <dgm:layoutDef xmlns:dgm="http://schemas.openxmlformats.org/drawingml/2006/diagram" xmlns:a="http://schemas.openxmlformats.org/drawingml/2006/main" uniqueId="urn:microsoft.com/office/officeart/2005/8/layout/hProcess9">
   <dgm:title val=""/>
   <dgm:desc val=""/>
@@ -5655,6 +10577,3108 @@
 </file>
 
 <file path=ppt/diagrams/quickStyle2.xml><?xml version="1.0" encoding="utf-8"?>
+<dgm:styleDef xmlns:dgm="http://schemas.openxmlformats.org/drawingml/2006/diagram" xmlns:a="http://schemas.openxmlformats.org/drawingml/2006/main" uniqueId="urn:microsoft.com/office/officeart/2005/8/quickstyle/simple1">
+  <dgm:title val=""/>
+  <dgm:desc val=""/>
+  <dgm:catLst>
+    <dgm:cat type="simple" pri="10100"/>
+  </dgm:catLst>
+  <dgm:scene3d>
+    <a:camera prst="orthographicFront"/>
+    <a:lightRig rig="threePt" dir="t"/>
+  </dgm:scene3d>
+  <dgm:styleLbl name="node0">
+    <dgm:scene3d>
+      <a:camera prst="orthographicFront"/>
+      <a:lightRig rig="threePt" dir="t"/>
+    </dgm:scene3d>
+    <dgm:sp3d/>
+    <dgm:txPr/>
+    <dgm:style>
+      <a:lnRef idx="2">
+        <a:scrgbClr r="0" g="0" b="0"/>
+      </a:lnRef>
+      <a:fillRef idx="1">
+        <a:scrgbClr r="0" g="0" b="0"/>
+      </a:fillRef>
+      <a:effectRef idx="0">
+        <a:scrgbClr r="0" g="0" b="0"/>
+      </a:effectRef>
+      <a:fontRef idx="minor">
+        <a:schemeClr val="lt1"/>
+      </a:fontRef>
+    </dgm:style>
+  </dgm:styleLbl>
+  <dgm:styleLbl name="lnNode1">
+    <dgm:scene3d>
+      <a:camera prst="orthographicFront"/>
+      <a:lightRig rig="threePt" dir="t"/>
+    </dgm:scene3d>
+    <dgm:sp3d/>
+    <dgm:txPr/>
+    <dgm:style>
+      <a:lnRef idx="2">
+        <a:scrgbClr r="0" g="0" b="0"/>
+      </a:lnRef>
+      <a:fillRef idx="1">
+        <a:scrgbClr r="0" g="0" b="0"/>
+      </a:fillRef>
+      <a:effectRef idx="0">
+        <a:scrgbClr r="0" g="0" b="0"/>
+      </a:effectRef>
+      <a:fontRef idx="minor">
+        <a:schemeClr val="lt1"/>
+      </a:fontRef>
+    </dgm:style>
+  </dgm:styleLbl>
+  <dgm:styleLbl name="vennNode1">
+    <dgm:scene3d>
+      <a:camera prst="orthographicFront"/>
+      <a:lightRig rig="threePt" dir="t"/>
+    </dgm:scene3d>
+    <dgm:sp3d/>
+    <dgm:txPr/>
+    <dgm:style>
+      <a:lnRef idx="2">
+        <a:scrgbClr r="0" g="0" b="0"/>
+      </a:lnRef>
+      <a:fillRef idx="1">
+        <a:scrgbClr r="0" g="0" b="0"/>
+      </a:fillRef>
+      <a:effectRef idx="0">
+        <a:scrgbClr r="0" g="0" b="0"/>
+      </a:effectRef>
+      <a:fontRef idx="minor">
+        <a:schemeClr val="tx1"/>
+      </a:fontRef>
+    </dgm:style>
+  </dgm:styleLbl>
+  <dgm:styleLbl name="alignNode1">
+    <dgm:scene3d>
+      <a:camera prst="orthographicFront"/>
+      <a:lightRig rig="threePt" dir="t"/>
+    </dgm:scene3d>
+    <dgm:sp3d/>
+    <dgm:txPr/>
+    <dgm:style>
+      <a:lnRef idx="2">
+        <a:scrgbClr r="0" g="0" b="0"/>
+      </a:lnRef>
+      <a:fillRef idx="1">
+        <a:scrgbClr r="0" g="0" b="0"/>
+      </a:fillRef>
+      <a:effectRef idx="0">
+        <a:scrgbClr r="0" g="0" b="0"/>
+      </a:effectRef>
+      <a:fontRef idx="minor">
+        <a:schemeClr val="lt1"/>
+      </a:fontRef>
+    </dgm:style>
+  </dgm:styleLbl>
+  <dgm:styleLbl name="node1">
+    <dgm:scene3d>
+      <a:camera prst="orthographicFront"/>
+      <a:lightRig rig="threePt" dir="t"/>
+    </dgm:scene3d>
+    <dgm:sp3d/>
+    <dgm:txPr/>
+    <dgm:style>
+      <a:lnRef idx="2">
+        <a:scrgbClr r="0" g="0" b="0"/>
+      </a:lnRef>
+      <a:fillRef idx="1">
+        <a:scrgbClr r="0" g="0" b="0"/>
+      </a:fillRef>
+      <a:effectRef idx="0">
+        <a:scrgbClr r="0" g="0" b="0"/>
+      </a:effectRef>
+      <a:fontRef idx="minor">
+        <a:schemeClr val="lt1"/>
+      </a:fontRef>
+    </dgm:style>
+  </dgm:styleLbl>
+  <dgm:styleLbl name="node2">
+    <dgm:scene3d>
+      <a:camera prst="orthographicFront"/>
+      <a:lightRig rig="threePt" dir="t"/>
+    </dgm:scene3d>
+    <dgm:sp3d/>
+    <dgm:txPr/>
+    <dgm:style>
+      <a:lnRef idx="2">
+        <a:scrgbClr r="0" g="0" b="0"/>
+      </a:lnRef>
+      <a:fillRef idx="1">
+        <a:scrgbClr r="0" g="0" b="0"/>
+      </a:fillRef>
+      <a:effectRef idx="0">
+        <a:scrgbClr r="0" g="0" b="0"/>
+      </a:effectRef>
+      <a:fontRef idx="minor">
+        <a:schemeClr val="lt1"/>
+      </a:fontRef>
+    </dgm:style>
+  </dgm:styleLbl>
+  <dgm:styleLbl name="node3">
+    <dgm:scene3d>
+      <a:camera prst="orthographicFront"/>
+      <a:lightRig rig="threePt" dir="t"/>
+    </dgm:scene3d>
+    <dgm:sp3d/>
+    <dgm:txPr/>
+    <dgm:style>
+      <a:lnRef idx="2">
+        <a:scrgbClr r="0" g="0" b="0"/>
+      </a:lnRef>
+      <a:fillRef idx="1">
+        <a:scrgbClr r="0" g="0" b="0"/>
+      </a:fillRef>
+      <a:effectRef idx="0">
+        <a:scrgbClr r="0" g="0" b="0"/>
+      </a:effectRef>
+      <a:fontRef idx="minor">
+        <a:schemeClr val="lt1"/>
+      </a:fontRef>
+    </dgm:style>
+  </dgm:styleLbl>
+  <dgm:styleLbl name="node4">
+    <dgm:scene3d>
+      <a:camera prst="orthographicFront"/>
+      <a:lightRig rig="threePt" dir="t"/>
+    </dgm:scene3d>
+    <dgm:sp3d/>
+    <dgm:txPr/>
+    <dgm:style>
+      <a:lnRef idx="2">
+        <a:scrgbClr r="0" g="0" b="0"/>
+      </a:lnRef>
+      <a:fillRef idx="1">
+        <a:scrgbClr r="0" g="0" b="0"/>
+      </a:fillRef>
+      <a:effectRef idx="0">
+        <a:scrgbClr r="0" g="0" b="0"/>
+      </a:effectRef>
+      <a:fontRef idx="minor">
+        <a:schemeClr val="lt1"/>
+      </a:fontRef>
+    </dgm:style>
+  </dgm:styleLbl>
+  <dgm:styleLbl name="fgImgPlace1">
+    <dgm:scene3d>
+      <a:camera prst="orthographicFront"/>
+      <a:lightRig rig="threePt" dir="t"/>
+    </dgm:scene3d>
+    <dgm:sp3d/>
+    <dgm:txPr/>
+    <dgm:style>
+      <a:lnRef idx="2">
+        <a:scrgbClr r="0" g="0" b="0"/>
+      </a:lnRef>
+      <a:fillRef idx="1">
+        <a:scrgbClr r="0" g="0" b="0"/>
+      </a:fillRef>
+      <a:effectRef idx="0">
+        <a:scrgbClr r="0" g="0" b="0"/>
+      </a:effectRef>
+      <a:fontRef idx="minor"/>
+    </dgm:style>
+  </dgm:styleLbl>
+  <dgm:styleLbl name="alignImgPlace1">
+    <dgm:scene3d>
+      <a:camera prst="orthographicFront"/>
+      <a:lightRig rig="threePt" dir="t"/>
+    </dgm:scene3d>
+    <dgm:sp3d/>
+    <dgm:txPr/>
+    <dgm:style>
+      <a:lnRef idx="2">
+        <a:scrgbClr r="0" g="0" b="0"/>
+      </a:lnRef>
+      <a:fillRef idx="1">
+        <a:scrgbClr r="0" g="0" b="0"/>
+      </a:fillRef>
+      <a:effectRef idx="0">
+        <a:scrgbClr r="0" g="0" b="0"/>
+      </a:effectRef>
+      <a:fontRef idx="minor"/>
+    </dgm:style>
+  </dgm:styleLbl>
+  <dgm:styleLbl name="bgImgPlace1">
+    <dgm:scene3d>
+      <a:camera prst="orthographicFront"/>
+      <a:lightRig rig="threePt" dir="t"/>
+    </dgm:scene3d>
+    <dgm:sp3d/>
+    <dgm:txPr/>
+    <dgm:style>
+      <a:lnRef idx="2">
+        <a:scrgbClr r="0" g="0" b="0"/>
+      </a:lnRef>
+      <a:fillRef idx="1">
+        <a:scrgbClr r="0" g="0" b="0"/>
+      </a:fillRef>
+      <a:effectRef idx="0">
+        <a:scrgbClr r="0" g="0" b="0"/>
+      </a:effectRef>
+      <a:fontRef idx="minor"/>
+    </dgm:style>
+  </dgm:styleLbl>
+  <dgm:styleLbl name="sibTrans2D1">
+    <dgm:scene3d>
+      <a:camera prst="orthographicFront"/>
+      <a:lightRig rig="threePt" dir="t"/>
+    </dgm:scene3d>
+    <dgm:sp3d/>
+    <dgm:txPr/>
+    <dgm:style>
+      <a:lnRef idx="0">
+        <a:scrgbClr r="0" g="0" b="0"/>
+      </a:lnRef>
+      <a:fillRef idx="1">
+        <a:scrgbClr r="0" g="0" b="0"/>
+      </a:fillRef>
+      <a:effectRef idx="0">
+        <a:scrgbClr r="0" g="0" b="0"/>
+      </a:effectRef>
+      <a:fontRef idx="minor">
+        <a:schemeClr val="lt1"/>
+      </a:fontRef>
+    </dgm:style>
+  </dgm:styleLbl>
+  <dgm:styleLbl name="fgSibTrans2D1">
+    <dgm:scene3d>
+      <a:camera prst="orthographicFront"/>
+      <a:lightRig rig="threePt" dir="t"/>
+    </dgm:scene3d>
+    <dgm:sp3d/>
+    <dgm:txPr/>
+    <dgm:style>
+      <a:lnRef idx="0">
+        <a:scrgbClr r="0" g="0" b="0"/>
+      </a:lnRef>
+      <a:fillRef idx="1">
+        <a:scrgbClr r="0" g="0" b="0"/>
+      </a:fillRef>
+      <a:effectRef idx="0">
+        <a:scrgbClr r="0" g="0" b="0"/>
+      </a:effectRef>
+      <a:fontRef idx="minor">
+        <a:schemeClr val="lt1"/>
+      </a:fontRef>
+    </dgm:style>
+  </dgm:styleLbl>
+  <dgm:styleLbl name="bgSibTrans2D1">
+    <dgm:scene3d>
+      <a:camera prst="orthographicFront"/>
+      <a:lightRig rig="threePt" dir="t"/>
+    </dgm:scene3d>
+    <dgm:sp3d/>
+    <dgm:txPr/>
+    <dgm:style>
+      <a:lnRef idx="0">
+        <a:scrgbClr r="0" g="0" b="0"/>
+      </a:lnRef>
+      <a:fillRef idx="1">
+        <a:scrgbClr r="0" g="0" b="0"/>
+      </a:fillRef>
+      <a:effectRef idx="0">
+        <a:scrgbClr r="0" g="0" b="0"/>
+      </a:effectRef>
+      <a:fontRef idx="minor">
+        <a:schemeClr val="lt1"/>
+      </a:fontRef>
+    </dgm:style>
+  </dgm:styleLbl>
+  <dgm:styleLbl name="sibTrans1D1">
+    <dgm:scene3d>
+      <a:camera prst="orthographicFront"/>
+      <a:lightRig rig="threePt" dir="t"/>
+    </dgm:scene3d>
+    <dgm:sp3d/>
+    <dgm:txPr/>
+    <dgm:style>
+      <a:lnRef idx="1">
+        <a:scrgbClr r="0" g="0" b="0"/>
+      </a:lnRef>
+      <a:fillRef idx="0">
+        <a:scrgbClr r="0" g="0" b="0"/>
+      </a:fillRef>
+      <a:effectRef idx="0">
+        <a:scrgbClr r="0" g="0" b="0"/>
+      </a:effectRef>
+      <a:fontRef idx="minor"/>
+    </dgm:style>
+  </dgm:styleLbl>
+  <dgm:styleLbl name="callout">
+    <dgm:scene3d>
+      <a:camera prst="orthographicFront"/>
+      <a:lightRig rig="threePt" dir="t"/>
+    </dgm:scene3d>
+    <dgm:sp3d/>
+    <dgm:txPr/>
+    <dgm:style>
+      <a:lnRef idx="2">
+        <a:scrgbClr r="0" g="0" b="0"/>
+      </a:lnRef>
+      <a:fillRef idx="1">
+        <a:scrgbClr r="0" g="0" b="0"/>
+      </a:fillRef>
+      <a:effectRef idx="0">
+        <a:scrgbClr r="0" g="0" b="0"/>
+      </a:effectRef>
+      <a:fontRef idx="minor"/>
+    </dgm:style>
+  </dgm:styleLbl>
+  <dgm:styleLbl name="asst0">
+    <dgm:scene3d>
+      <a:camera prst="orthographicFront"/>
+      <a:lightRig rig="threePt" dir="t"/>
+    </dgm:scene3d>
+    <dgm:sp3d/>
+    <dgm:txPr/>
+    <dgm:style>
+      <a:lnRef idx="2">
+        <a:scrgbClr r="0" g="0" b="0"/>
+      </a:lnRef>
+      <a:fillRef idx="1">
+        <a:scrgbClr r="0" g="0" b="0"/>
+      </a:fillRef>
+      <a:effectRef idx="0">
+        <a:scrgbClr r="0" g="0" b="0"/>
+      </a:effectRef>
+      <a:fontRef idx="minor">
+        <a:schemeClr val="lt1"/>
+      </a:fontRef>
+    </dgm:style>
+  </dgm:styleLbl>
+  <dgm:styleLbl name="asst1">
+    <dgm:scene3d>
+      <a:camera prst="orthographicFront"/>
+      <a:lightRig rig="threePt" dir="t"/>
+    </dgm:scene3d>
+    <dgm:sp3d/>
+    <dgm:txPr/>
+    <dgm:style>
+      <a:lnRef idx="2">
+        <a:scrgbClr r="0" g="0" b="0"/>
+      </a:lnRef>
+      <a:fillRef idx="1">
+        <a:scrgbClr r="0" g="0" b="0"/>
+      </a:fillRef>
+      <a:effectRef idx="0">
+        <a:scrgbClr r="0" g="0" b="0"/>
+      </a:effectRef>
+      <a:fontRef idx="minor">
+        <a:schemeClr val="lt1"/>
+      </a:fontRef>
+    </dgm:style>
+  </dgm:styleLbl>
+  <dgm:styleLbl name="asst2">
+    <dgm:scene3d>
+      <a:camera prst="orthographicFront"/>
+      <a:lightRig rig="threePt" dir="t"/>
+    </dgm:scene3d>
+    <dgm:sp3d/>
+    <dgm:txPr/>
+    <dgm:style>
+      <a:lnRef idx="2">
+        <a:scrgbClr r="0" g="0" b="0"/>
+      </a:lnRef>
+      <a:fillRef idx="1">
+        <a:scrgbClr r="0" g="0" b="0"/>
+      </a:fillRef>
+      <a:effectRef idx="0">
+        <a:scrgbClr r="0" g="0" b="0"/>
+      </a:effectRef>
+      <a:fontRef idx="minor">
+        <a:schemeClr val="lt1"/>
+      </a:fontRef>
+    </dgm:style>
+  </dgm:styleLbl>
+  <dgm:styleLbl name="asst3">
+    <dgm:scene3d>
+      <a:camera prst="orthographicFront"/>
+      <a:lightRig rig="threePt" dir="t"/>
+    </dgm:scene3d>
+    <dgm:sp3d/>
+    <dgm:txPr/>
+    <dgm:style>
+      <a:lnRef idx="2">
+        <a:scrgbClr r="0" g="0" b="0"/>
+      </a:lnRef>
+      <a:fillRef idx="1">
+        <a:scrgbClr r="0" g="0" b="0"/>
+      </a:fillRef>
+      <a:effectRef idx="0">
+        <a:scrgbClr r="0" g="0" b="0"/>
+      </a:effectRef>
+      <a:fontRef idx="minor">
+        <a:schemeClr val="lt1"/>
+      </a:fontRef>
+    </dgm:style>
+  </dgm:styleLbl>
+  <dgm:styleLbl name="asst4">
+    <dgm:scene3d>
+      <a:camera prst="orthographicFront"/>
+      <a:lightRig rig="threePt" dir="t"/>
+    </dgm:scene3d>
+    <dgm:sp3d/>
+    <dgm:txPr/>
+    <dgm:style>
+      <a:lnRef idx="2">
+        <a:scrgbClr r="0" g="0" b="0"/>
+      </a:lnRef>
+      <a:fillRef idx="1">
+        <a:scrgbClr r="0" g="0" b="0"/>
+      </a:fillRef>
+      <a:effectRef idx="0">
+        <a:scrgbClr r="0" g="0" b="0"/>
+      </a:effectRef>
+      <a:fontRef idx="minor">
+        <a:schemeClr val="lt1"/>
+      </a:fontRef>
+    </dgm:style>
+  </dgm:styleLbl>
+  <dgm:styleLbl name="parChTrans2D1">
+    <dgm:scene3d>
+      <a:camera prst="orthographicFront"/>
+      <a:lightRig rig="threePt" dir="t"/>
+    </dgm:scene3d>
+    <dgm:sp3d/>
+    <dgm:txPr/>
+    <dgm:style>
+      <a:lnRef idx="2">
+        <a:scrgbClr r="0" g="0" b="0"/>
+      </a:lnRef>
+      <a:fillRef idx="1">
+        <a:scrgbClr r="0" g="0" b="0"/>
+      </a:fillRef>
+      <a:effectRef idx="0">
+        <a:scrgbClr r="0" g="0" b="0"/>
+      </a:effectRef>
+      <a:fontRef idx="minor">
+        <a:schemeClr val="lt1"/>
+      </a:fontRef>
+    </dgm:style>
+  </dgm:styleLbl>
+  <dgm:styleLbl name="parChTrans2D2">
+    <dgm:scene3d>
+      <a:camera prst="orthographicFront"/>
+      <a:lightRig rig="threePt" dir="t"/>
+    </dgm:scene3d>
+    <dgm:sp3d/>
+    <dgm:txPr/>
+    <dgm:style>
+      <a:lnRef idx="2">
+        <a:scrgbClr r="0" g="0" b="0"/>
+      </a:lnRef>
+      <a:fillRef idx="1">
+        <a:scrgbClr r="0" g="0" b="0"/>
+      </a:fillRef>
+      <a:effectRef idx="0">
+        <a:scrgbClr r="0" g="0" b="0"/>
+      </a:effectRef>
+      <a:fontRef idx="minor">
+        <a:schemeClr val="lt1"/>
+      </a:fontRef>
+    </dgm:style>
+  </dgm:styleLbl>
+  <dgm:styleLbl name="parChTrans2D3">
+    <dgm:scene3d>
+      <a:camera prst="orthographicFront"/>
+      <a:lightRig rig="threePt" dir="t"/>
+    </dgm:scene3d>
+    <dgm:sp3d/>
+    <dgm:txPr/>
+    <dgm:style>
+      <a:lnRef idx="2">
+        <a:scrgbClr r="0" g="0" b="0"/>
+      </a:lnRef>
+      <a:fillRef idx="1">
+        <a:scrgbClr r="0" g="0" b="0"/>
+      </a:fillRef>
+      <a:effectRef idx="0">
+        <a:scrgbClr r="0" g="0" b="0"/>
+      </a:effectRef>
+      <a:fontRef idx="minor">
+        <a:schemeClr val="lt1"/>
+      </a:fontRef>
+    </dgm:style>
+  </dgm:styleLbl>
+  <dgm:styleLbl name="parChTrans2D4">
+    <dgm:scene3d>
+      <a:camera prst="orthographicFront"/>
+      <a:lightRig rig="threePt" dir="t"/>
+    </dgm:scene3d>
+    <dgm:sp3d/>
+    <dgm:txPr/>
+    <dgm:style>
+      <a:lnRef idx="2">
+        <a:scrgbClr r="0" g="0" b="0"/>
+      </a:lnRef>
+      <a:fillRef idx="1">
+        <a:scrgbClr r="0" g="0" b="0"/>
+      </a:fillRef>
+      <a:effectRef idx="0">
+        <a:scrgbClr r="0" g="0" b="0"/>
+      </a:effectRef>
+      <a:fontRef idx="minor">
+        <a:schemeClr val="lt1"/>
+      </a:fontRef>
+    </dgm:style>
+  </dgm:styleLbl>
+  <dgm:styleLbl name="parChTrans1D1">
+    <dgm:scene3d>
+      <a:camera prst="orthographicFront"/>
+      <a:lightRig rig="threePt" dir="t"/>
+    </dgm:scene3d>
+    <dgm:sp3d/>
+    <dgm:txPr/>
+    <dgm:style>
+      <a:lnRef idx="2">
+        <a:scrgbClr r="0" g="0" b="0"/>
+      </a:lnRef>
+      <a:fillRef idx="0">
+        <a:scrgbClr r="0" g="0" b="0"/>
+      </a:fillRef>
+      <a:effectRef idx="0">
+        <a:scrgbClr r="0" g="0" b="0"/>
+      </a:effectRef>
+      <a:fontRef idx="minor"/>
+    </dgm:style>
+  </dgm:styleLbl>
+  <dgm:styleLbl name="parChTrans1D2">
+    <dgm:scene3d>
+      <a:camera prst="orthographicFront"/>
+      <a:lightRig rig="threePt" dir="t"/>
+    </dgm:scene3d>
+    <dgm:sp3d/>
+    <dgm:txPr/>
+    <dgm:style>
+      <a:lnRef idx="2">
+        <a:scrgbClr r="0" g="0" b="0"/>
+      </a:lnRef>
+      <a:fillRef idx="0">
+        <a:scrgbClr r="0" g="0" b="0"/>
+      </a:fillRef>
+      <a:effectRef idx="0">
+        <a:scrgbClr r="0" g="0" b="0"/>
+      </a:effectRef>
+      <a:fontRef idx="minor"/>
+    </dgm:style>
+  </dgm:styleLbl>
+  <dgm:styleLbl name="parChTrans1D3">
+    <dgm:scene3d>
+      <a:camera prst="orthographicFront"/>
+      <a:lightRig rig="threePt" dir="t"/>
+    </dgm:scene3d>
+    <dgm:sp3d/>
+    <dgm:txPr/>
+    <dgm:style>
+      <a:lnRef idx="2">
+        <a:scrgbClr r="0" g="0" b="0"/>
+      </a:lnRef>
+      <a:fillRef idx="0">
+        <a:scrgbClr r="0" g="0" b="0"/>
+      </a:fillRef>
+      <a:effectRef idx="0">
+        <a:scrgbClr r="0" g="0" b="0"/>
+      </a:effectRef>
+      <a:fontRef idx="minor"/>
+    </dgm:style>
+  </dgm:styleLbl>
+  <dgm:styleLbl name="parChTrans1D4">
+    <dgm:scene3d>
+      <a:camera prst="orthographicFront"/>
+      <a:lightRig rig="threePt" dir="t"/>
+    </dgm:scene3d>
+    <dgm:sp3d/>
+    <dgm:txPr/>
+    <dgm:style>
+      <a:lnRef idx="2">
+        <a:scrgbClr r="0" g="0" b="0"/>
+      </a:lnRef>
+      <a:fillRef idx="0">
+        <a:scrgbClr r="0" g="0" b="0"/>
+      </a:fillRef>
+      <a:effectRef idx="0">
+        <a:scrgbClr r="0" g="0" b="0"/>
+      </a:effectRef>
+      <a:fontRef idx="minor"/>
+    </dgm:style>
+  </dgm:styleLbl>
+  <dgm:styleLbl name="fgAcc1">
+    <dgm:scene3d>
+      <a:camera prst="orthographicFront"/>
+      <a:lightRig rig="threePt" dir="t"/>
+    </dgm:scene3d>
+    <dgm:sp3d/>
+    <dgm:txPr/>
+    <dgm:style>
+      <a:lnRef idx="2">
+        <a:scrgbClr r="0" g="0" b="0"/>
+      </a:lnRef>
+      <a:fillRef idx="1">
+        <a:scrgbClr r="0" g="0" b="0"/>
+      </a:fillRef>
+      <a:effectRef idx="0">
+        <a:scrgbClr r="0" g="0" b="0"/>
+      </a:effectRef>
+      <a:fontRef idx="minor"/>
+    </dgm:style>
+  </dgm:styleLbl>
+  <dgm:styleLbl name="conFgAcc1">
+    <dgm:scene3d>
+      <a:camera prst="orthographicFront"/>
+      <a:lightRig rig="threePt" dir="t"/>
+    </dgm:scene3d>
+    <dgm:sp3d/>
+    <dgm:txPr/>
+    <dgm:style>
+      <a:lnRef idx="2">
+        <a:scrgbClr r="0" g="0" b="0"/>
+      </a:lnRef>
+      <a:fillRef idx="1">
+        <a:scrgbClr r="0" g="0" b="0"/>
+      </a:fillRef>
+      <a:effectRef idx="0">
+        <a:scrgbClr r="0" g="0" b="0"/>
+      </a:effectRef>
+      <a:fontRef idx="minor"/>
+    </dgm:style>
+  </dgm:styleLbl>
+  <dgm:styleLbl name="alignAcc1">
+    <dgm:scene3d>
+      <a:camera prst="orthographicFront"/>
+      <a:lightRig rig="threePt" dir="t"/>
+    </dgm:scene3d>
+    <dgm:sp3d/>
+    <dgm:txPr/>
+    <dgm:style>
+      <a:lnRef idx="2">
+        <a:scrgbClr r="0" g="0" b="0"/>
+      </a:lnRef>
+      <a:fillRef idx="1">
+        <a:scrgbClr r="0" g="0" b="0"/>
+      </a:fillRef>
+      <a:effectRef idx="0">
+        <a:scrgbClr r="0" g="0" b="0"/>
+      </a:effectRef>
+      <a:fontRef idx="minor"/>
+    </dgm:style>
+  </dgm:styleLbl>
+  <dgm:styleLbl name="trAlignAcc1">
+    <dgm:scene3d>
+      <a:camera prst="orthographicFront"/>
+      <a:lightRig rig="threePt" dir="t"/>
+    </dgm:scene3d>
+    <dgm:sp3d/>
+    <dgm:txPr/>
+    <dgm:style>
+      <a:lnRef idx="1">
+        <a:scrgbClr r="0" g="0" b="0"/>
+      </a:lnRef>
+      <a:fillRef idx="1">
+        <a:scrgbClr r="0" g="0" b="0"/>
+      </a:fillRef>
+      <a:effectRef idx="0">
+        <a:scrgbClr r="0" g="0" b="0"/>
+      </a:effectRef>
+      <a:fontRef idx="minor"/>
+    </dgm:style>
+  </dgm:styleLbl>
+  <dgm:styleLbl name="bgAcc1">
+    <dgm:scene3d>
+      <a:camera prst="orthographicFront"/>
+      <a:lightRig rig="threePt" dir="t"/>
+    </dgm:scene3d>
+    <dgm:sp3d/>
+    <dgm:txPr/>
+    <dgm:style>
+      <a:lnRef idx="2">
+        <a:scrgbClr r="0" g="0" b="0"/>
+      </a:lnRef>
+      <a:fillRef idx="1">
+        <a:scrgbClr r="0" g="0" b="0"/>
+      </a:fillRef>
+      <a:effectRef idx="0">
+        <a:scrgbClr r="0" g="0" b="0"/>
+      </a:effectRef>
+      <a:fontRef idx="minor"/>
+    </dgm:style>
+  </dgm:styleLbl>
+  <dgm:styleLbl name="solidFgAcc1">
+    <dgm:scene3d>
+      <a:camera prst="orthographicFront"/>
+      <a:lightRig rig="threePt" dir="t"/>
+    </dgm:scene3d>
+    <dgm:sp3d/>
+    <dgm:txPr/>
+    <dgm:style>
+      <a:lnRef idx="2">
+        <a:scrgbClr r="0" g="0" b="0"/>
+      </a:lnRef>
+      <a:fillRef idx="1">
+        <a:scrgbClr r="0" g="0" b="0"/>
+      </a:fillRef>
+      <a:effectRef idx="0">
+        <a:scrgbClr r="0" g="0" b="0"/>
+      </a:effectRef>
+      <a:fontRef idx="minor"/>
+    </dgm:style>
+  </dgm:styleLbl>
+  <dgm:styleLbl name="solidAlignAcc1">
+    <dgm:scene3d>
+      <a:camera prst="orthographicFront"/>
+      <a:lightRig rig="threePt" dir="t"/>
+    </dgm:scene3d>
+    <dgm:sp3d/>
+    <dgm:txPr/>
+    <dgm:style>
+      <a:lnRef idx="2">
+        <a:scrgbClr r="0" g="0" b="0"/>
+      </a:lnRef>
+      <a:fillRef idx="1">
+        <a:scrgbClr r="0" g="0" b="0"/>
+      </a:fillRef>
+      <a:effectRef idx="0">
+        <a:scrgbClr r="0" g="0" b="0"/>
+      </a:effectRef>
+      <a:fontRef idx="minor"/>
+    </dgm:style>
+  </dgm:styleLbl>
+  <dgm:styleLbl name="solidBgAcc1">
+    <dgm:scene3d>
+      <a:camera prst="orthographicFront"/>
+      <a:lightRig rig="threePt" dir="t"/>
+    </dgm:scene3d>
+    <dgm:sp3d/>
+    <dgm:txPr/>
+    <dgm:style>
+      <a:lnRef idx="2">
+        <a:scrgbClr r="0" g="0" b="0"/>
+      </a:lnRef>
+      <a:fillRef idx="1">
+        <a:scrgbClr r="0" g="0" b="0"/>
+      </a:fillRef>
+      <a:effectRef idx="0">
+        <a:scrgbClr r="0" g="0" b="0"/>
+      </a:effectRef>
+      <a:fontRef idx="minor"/>
+    </dgm:style>
+  </dgm:styleLbl>
+  <dgm:styleLbl name="fgAccFollowNode1">
+    <dgm:scene3d>
+      <a:camera prst="orthographicFront"/>
+      <a:lightRig rig="threePt" dir="t"/>
+    </dgm:scene3d>
+    <dgm:sp3d/>
+    <dgm:txPr/>
+    <dgm:style>
+      <a:lnRef idx="2">
+        <a:scrgbClr r="0" g="0" b="0"/>
+      </a:lnRef>
+      <a:fillRef idx="1">
+        <a:scrgbClr r="0" g="0" b="0"/>
+      </a:fillRef>
+      <a:effectRef idx="0">
+        <a:scrgbClr r="0" g="0" b="0"/>
+      </a:effectRef>
+      <a:fontRef idx="minor"/>
+    </dgm:style>
+  </dgm:styleLbl>
+  <dgm:styleLbl name="alignAccFollowNode1">
+    <dgm:scene3d>
+      <a:camera prst="orthographicFront"/>
+      <a:lightRig rig="threePt" dir="t"/>
+    </dgm:scene3d>
+    <dgm:sp3d/>
+    <dgm:txPr/>
+    <dgm:style>
+      <a:lnRef idx="2">
+        <a:scrgbClr r="0" g="0" b="0"/>
+      </a:lnRef>
+      <a:fillRef idx="1">
+        <a:scrgbClr r="0" g="0" b="0"/>
+      </a:fillRef>
+      <a:effectRef idx="0">
+        <a:scrgbClr r="0" g="0" b="0"/>
+      </a:effectRef>
+      <a:fontRef idx="minor"/>
+    </dgm:style>
+  </dgm:styleLbl>
+  <dgm:styleLbl name="bgAccFollowNode1">
+    <dgm:scene3d>
+      <a:camera prst="orthographicFront"/>
+      <a:lightRig rig="threePt" dir="t"/>
+    </dgm:scene3d>
+    <dgm:sp3d/>
+    <dgm:txPr/>
+    <dgm:style>
+      <a:lnRef idx="2">
+        <a:scrgbClr r="0" g="0" b="0"/>
+      </a:lnRef>
+      <a:fillRef idx="1">
+        <a:scrgbClr r="0" g="0" b="0"/>
+      </a:fillRef>
+      <a:effectRef idx="0">
+        <a:scrgbClr r="0" g="0" b="0"/>
+      </a:effectRef>
+      <a:fontRef idx="minor"/>
+    </dgm:style>
+  </dgm:styleLbl>
+  <dgm:styleLbl name="fgAcc0">
+    <dgm:scene3d>
+      <a:camera prst="orthographicFront"/>
+      <a:lightRig rig="threePt" dir="t"/>
+    </dgm:scene3d>
+    <dgm:sp3d/>
+    <dgm:txPr/>
+    <dgm:style>
+      <a:lnRef idx="2">
+        <a:scrgbClr r="0" g="0" b="0"/>
+      </a:lnRef>
+      <a:fillRef idx="1">
+        <a:scrgbClr r="0" g="0" b="0"/>
+      </a:fillRef>
+      <a:effectRef idx="0">
+        <a:scrgbClr r="0" g="0" b="0"/>
+      </a:effectRef>
+      <a:fontRef idx="minor"/>
+    </dgm:style>
+  </dgm:styleLbl>
+  <dgm:styleLbl name="fgAcc2">
+    <dgm:scene3d>
+      <a:camera prst="orthographicFront"/>
+      <a:lightRig rig="threePt" dir="t"/>
+    </dgm:scene3d>
+    <dgm:sp3d/>
+    <dgm:txPr/>
+    <dgm:style>
+      <a:lnRef idx="2">
+        <a:scrgbClr r="0" g="0" b="0"/>
+      </a:lnRef>
+      <a:fillRef idx="1">
+        <a:scrgbClr r="0" g="0" b="0"/>
+      </a:fillRef>
+      <a:effectRef idx="0">
+        <a:scrgbClr r="0" g="0" b="0"/>
+      </a:effectRef>
+      <a:fontRef idx="minor"/>
+    </dgm:style>
+  </dgm:styleLbl>
+  <dgm:styleLbl name="fgAcc3">
+    <dgm:scene3d>
+      <a:camera prst="orthographicFront"/>
+      <a:lightRig rig="threePt" dir="t"/>
+    </dgm:scene3d>
+    <dgm:sp3d/>
+    <dgm:txPr/>
+    <dgm:style>
+      <a:lnRef idx="2">
+        <a:scrgbClr r="0" g="0" b="0"/>
+      </a:lnRef>
+      <a:fillRef idx="1">
+        <a:scrgbClr r="0" g="0" b="0"/>
+      </a:fillRef>
+      <a:effectRef idx="0">
+        <a:scrgbClr r="0" g="0" b="0"/>
+      </a:effectRef>
+      <a:fontRef idx="minor"/>
+    </dgm:style>
+  </dgm:styleLbl>
+  <dgm:styleLbl name="fgAcc4">
+    <dgm:scene3d>
+      <a:camera prst="orthographicFront"/>
+      <a:lightRig rig="threePt" dir="t"/>
+    </dgm:scene3d>
+    <dgm:sp3d/>
+    <dgm:txPr/>
+    <dgm:style>
+      <a:lnRef idx="2">
+        <a:scrgbClr r="0" g="0" b="0"/>
+      </a:lnRef>
+      <a:fillRef idx="1">
+        <a:scrgbClr r="0" g="0" b="0"/>
+      </a:fillRef>
+      <a:effectRef idx="0">
+        <a:scrgbClr r="0" g="0" b="0"/>
+      </a:effectRef>
+      <a:fontRef idx="minor"/>
+    </dgm:style>
+  </dgm:styleLbl>
+  <dgm:styleLbl name="bgShp">
+    <dgm:scene3d>
+      <a:camera prst="orthographicFront"/>
+      <a:lightRig rig="threePt" dir="t"/>
+    </dgm:scene3d>
+    <dgm:sp3d/>
+    <dgm:txPr/>
+    <dgm:style>
+      <a:lnRef idx="0">
+        <a:scrgbClr r="0" g="0" b="0"/>
+      </a:lnRef>
+      <a:fillRef idx="1">
+        <a:scrgbClr r="0" g="0" b="0"/>
+      </a:fillRef>
+      <a:effectRef idx="0">
+        <a:scrgbClr r="0" g="0" b="0"/>
+      </a:effectRef>
+      <a:fontRef idx="minor"/>
+    </dgm:style>
+  </dgm:styleLbl>
+  <dgm:styleLbl name="dkBgShp">
+    <dgm:scene3d>
+      <a:camera prst="orthographicFront"/>
+      <a:lightRig rig="threePt" dir="t"/>
+    </dgm:scene3d>
+    <dgm:sp3d/>
+    <dgm:txPr/>
+    <dgm:style>
+      <a:lnRef idx="0">
+        <a:scrgbClr r="0" g="0" b="0"/>
+      </a:lnRef>
+      <a:fillRef idx="1">
+        <a:scrgbClr r="0" g="0" b="0"/>
+      </a:fillRef>
+      <a:effectRef idx="0">
+        <a:scrgbClr r="0" g="0" b="0"/>
+      </a:effectRef>
+      <a:fontRef idx="minor"/>
+    </dgm:style>
+  </dgm:styleLbl>
+  <dgm:styleLbl name="trBgShp">
+    <dgm:scene3d>
+      <a:camera prst="orthographicFront"/>
+      <a:lightRig rig="threePt" dir="t"/>
+    </dgm:scene3d>
+    <dgm:sp3d/>
+    <dgm:txPr/>
+    <dgm:style>
+      <a:lnRef idx="0">
+        <a:scrgbClr r="0" g="0" b="0"/>
+      </a:lnRef>
+      <a:fillRef idx="1">
+        <a:scrgbClr r="0" g="0" b="0"/>
+      </a:fillRef>
+      <a:effectRef idx="0">
+        <a:scrgbClr r="0" g="0" b="0"/>
+      </a:effectRef>
+      <a:fontRef idx="minor"/>
+    </dgm:style>
+  </dgm:styleLbl>
+  <dgm:styleLbl name="fgShp">
+    <dgm:scene3d>
+      <a:camera prst="orthographicFront"/>
+      <a:lightRig rig="threePt" dir="t"/>
+    </dgm:scene3d>
+    <dgm:sp3d/>
+    <dgm:txPr/>
+    <dgm:style>
+      <a:lnRef idx="2">
+        <a:scrgbClr r="0" g="0" b="0"/>
+      </a:lnRef>
+      <a:fillRef idx="1">
+        <a:scrgbClr r="0" g="0" b="0"/>
+      </a:fillRef>
+      <a:effectRef idx="0">
+        <a:scrgbClr r="0" g="0" b="0"/>
+      </a:effectRef>
+      <a:fontRef idx="minor"/>
+    </dgm:style>
+  </dgm:styleLbl>
+  <dgm:styleLbl name="revTx">
+    <dgm:scene3d>
+      <a:camera prst="orthographicFront"/>
+      <a:lightRig rig="threePt" dir="t"/>
+    </dgm:scene3d>
+    <dgm:sp3d/>
+    <dgm:txPr/>
+    <dgm:style>
+      <a:lnRef idx="0">
+        <a:scrgbClr r="0" g="0" b="0"/>
+      </a:lnRef>
+      <a:fillRef idx="0">
+        <a:scrgbClr r="0" g="0" b="0"/>
+      </a:fillRef>
+      <a:effectRef idx="0">
+        <a:scrgbClr r="0" g="0" b="0"/>
+      </a:effectRef>
+      <a:fontRef idx="minor"/>
+    </dgm:style>
+  </dgm:styleLbl>
+</dgm:styleDef>
+</file>
+
+<file path=ppt/diagrams/quickStyle3.xml><?xml version="1.0" encoding="utf-8"?>
+<dgm:styleDef xmlns:dgm="http://schemas.openxmlformats.org/drawingml/2006/diagram" xmlns:a="http://schemas.openxmlformats.org/drawingml/2006/main" uniqueId="urn:microsoft.com/office/officeart/2005/8/quickstyle/simple1">
+  <dgm:title val=""/>
+  <dgm:desc val=""/>
+  <dgm:catLst>
+    <dgm:cat type="simple" pri="10100"/>
+  </dgm:catLst>
+  <dgm:scene3d>
+    <a:camera prst="orthographicFront"/>
+    <a:lightRig rig="threePt" dir="t"/>
+  </dgm:scene3d>
+  <dgm:styleLbl name="node0">
+    <dgm:scene3d>
+      <a:camera prst="orthographicFront"/>
+      <a:lightRig rig="threePt" dir="t"/>
+    </dgm:scene3d>
+    <dgm:sp3d/>
+    <dgm:txPr/>
+    <dgm:style>
+      <a:lnRef idx="2">
+        <a:scrgbClr r="0" g="0" b="0"/>
+      </a:lnRef>
+      <a:fillRef idx="1">
+        <a:scrgbClr r="0" g="0" b="0"/>
+      </a:fillRef>
+      <a:effectRef idx="0">
+        <a:scrgbClr r="0" g="0" b="0"/>
+      </a:effectRef>
+      <a:fontRef idx="minor">
+        <a:schemeClr val="lt1"/>
+      </a:fontRef>
+    </dgm:style>
+  </dgm:styleLbl>
+  <dgm:styleLbl name="lnNode1">
+    <dgm:scene3d>
+      <a:camera prst="orthographicFront"/>
+      <a:lightRig rig="threePt" dir="t"/>
+    </dgm:scene3d>
+    <dgm:sp3d/>
+    <dgm:txPr/>
+    <dgm:style>
+      <a:lnRef idx="2">
+        <a:scrgbClr r="0" g="0" b="0"/>
+      </a:lnRef>
+      <a:fillRef idx="1">
+        <a:scrgbClr r="0" g="0" b="0"/>
+      </a:fillRef>
+      <a:effectRef idx="0">
+        <a:scrgbClr r="0" g="0" b="0"/>
+      </a:effectRef>
+      <a:fontRef idx="minor">
+        <a:schemeClr val="lt1"/>
+      </a:fontRef>
+    </dgm:style>
+  </dgm:styleLbl>
+  <dgm:styleLbl name="vennNode1">
+    <dgm:scene3d>
+      <a:camera prst="orthographicFront"/>
+      <a:lightRig rig="threePt" dir="t"/>
+    </dgm:scene3d>
+    <dgm:sp3d/>
+    <dgm:txPr/>
+    <dgm:style>
+      <a:lnRef idx="2">
+        <a:scrgbClr r="0" g="0" b="0"/>
+      </a:lnRef>
+      <a:fillRef idx="1">
+        <a:scrgbClr r="0" g="0" b="0"/>
+      </a:fillRef>
+      <a:effectRef idx="0">
+        <a:scrgbClr r="0" g="0" b="0"/>
+      </a:effectRef>
+      <a:fontRef idx="minor">
+        <a:schemeClr val="tx1"/>
+      </a:fontRef>
+    </dgm:style>
+  </dgm:styleLbl>
+  <dgm:styleLbl name="alignNode1">
+    <dgm:scene3d>
+      <a:camera prst="orthographicFront"/>
+      <a:lightRig rig="threePt" dir="t"/>
+    </dgm:scene3d>
+    <dgm:sp3d/>
+    <dgm:txPr/>
+    <dgm:style>
+      <a:lnRef idx="2">
+        <a:scrgbClr r="0" g="0" b="0"/>
+      </a:lnRef>
+      <a:fillRef idx="1">
+        <a:scrgbClr r="0" g="0" b="0"/>
+      </a:fillRef>
+      <a:effectRef idx="0">
+        <a:scrgbClr r="0" g="0" b="0"/>
+      </a:effectRef>
+      <a:fontRef idx="minor">
+        <a:schemeClr val="lt1"/>
+      </a:fontRef>
+    </dgm:style>
+  </dgm:styleLbl>
+  <dgm:styleLbl name="node1">
+    <dgm:scene3d>
+      <a:camera prst="orthographicFront"/>
+      <a:lightRig rig="threePt" dir="t"/>
+    </dgm:scene3d>
+    <dgm:sp3d/>
+    <dgm:txPr/>
+    <dgm:style>
+      <a:lnRef idx="2">
+        <a:scrgbClr r="0" g="0" b="0"/>
+      </a:lnRef>
+      <a:fillRef idx="1">
+        <a:scrgbClr r="0" g="0" b="0"/>
+      </a:fillRef>
+      <a:effectRef idx="0">
+        <a:scrgbClr r="0" g="0" b="0"/>
+      </a:effectRef>
+      <a:fontRef idx="minor">
+        <a:schemeClr val="lt1"/>
+      </a:fontRef>
+    </dgm:style>
+  </dgm:styleLbl>
+  <dgm:styleLbl name="node2">
+    <dgm:scene3d>
+      <a:camera prst="orthographicFront"/>
+      <a:lightRig rig="threePt" dir="t"/>
+    </dgm:scene3d>
+    <dgm:sp3d/>
+    <dgm:txPr/>
+    <dgm:style>
+      <a:lnRef idx="2">
+        <a:scrgbClr r="0" g="0" b="0"/>
+      </a:lnRef>
+      <a:fillRef idx="1">
+        <a:scrgbClr r="0" g="0" b="0"/>
+      </a:fillRef>
+      <a:effectRef idx="0">
+        <a:scrgbClr r="0" g="0" b="0"/>
+      </a:effectRef>
+      <a:fontRef idx="minor">
+        <a:schemeClr val="lt1"/>
+      </a:fontRef>
+    </dgm:style>
+  </dgm:styleLbl>
+  <dgm:styleLbl name="node3">
+    <dgm:scene3d>
+      <a:camera prst="orthographicFront"/>
+      <a:lightRig rig="threePt" dir="t"/>
+    </dgm:scene3d>
+    <dgm:sp3d/>
+    <dgm:txPr/>
+    <dgm:style>
+      <a:lnRef idx="2">
+        <a:scrgbClr r="0" g="0" b="0"/>
+      </a:lnRef>
+      <a:fillRef idx="1">
+        <a:scrgbClr r="0" g="0" b="0"/>
+      </a:fillRef>
+      <a:effectRef idx="0">
+        <a:scrgbClr r="0" g="0" b="0"/>
+      </a:effectRef>
+      <a:fontRef idx="minor">
+        <a:schemeClr val="lt1"/>
+      </a:fontRef>
+    </dgm:style>
+  </dgm:styleLbl>
+  <dgm:styleLbl name="node4">
+    <dgm:scene3d>
+      <a:camera prst="orthographicFront"/>
+      <a:lightRig rig="threePt" dir="t"/>
+    </dgm:scene3d>
+    <dgm:sp3d/>
+    <dgm:txPr/>
+    <dgm:style>
+      <a:lnRef idx="2">
+        <a:scrgbClr r="0" g="0" b="0"/>
+      </a:lnRef>
+      <a:fillRef idx="1">
+        <a:scrgbClr r="0" g="0" b="0"/>
+      </a:fillRef>
+      <a:effectRef idx="0">
+        <a:scrgbClr r="0" g="0" b="0"/>
+      </a:effectRef>
+      <a:fontRef idx="minor">
+        <a:schemeClr val="lt1"/>
+      </a:fontRef>
+    </dgm:style>
+  </dgm:styleLbl>
+  <dgm:styleLbl name="fgImgPlace1">
+    <dgm:scene3d>
+      <a:camera prst="orthographicFront"/>
+      <a:lightRig rig="threePt" dir="t"/>
+    </dgm:scene3d>
+    <dgm:sp3d/>
+    <dgm:txPr/>
+    <dgm:style>
+      <a:lnRef idx="2">
+        <a:scrgbClr r="0" g="0" b="0"/>
+      </a:lnRef>
+      <a:fillRef idx="1">
+        <a:scrgbClr r="0" g="0" b="0"/>
+      </a:fillRef>
+      <a:effectRef idx="0">
+        <a:scrgbClr r="0" g="0" b="0"/>
+      </a:effectRef>
+      <a:fontRef idx="minor"/>
+    </dgm:style>
+  </dgm:styleLbl>
+  <dgm:styleLbl name="alignImgPlace1">
+    <dgm:scene3d>
+      <a:camera prst="orthographicFront"/>
+      <a:lightRig rig="threePt" dir="t"/>
+    </dgm:scene3d>
+    <dgm:sp3d/>
+    <dgm:txPr/>
+    <dgm:style>
+      <a:lnRef idx="2">
+        <a:scrgbClr r="0" g="0" b="0"/>
+      </a:lnRef>
+      <a:fillRef idx="1">
+        <a:scrgbClr r="0" g="0" b="0"/>
+      </a:fillRef>
+      <a:effectRef idx="0">
+        <a:scrgbClr r="0" g="0" b="0"/>
+      </a:effectRef>
+      <a:fontRef idx="minor"/>
+    </dgm:style>
+  </dgm:styleLbl>
+  <dgm:styleLbl name="bgImgPlace1">
+    <dgm:scene3d>
+      <a:camera prst="orthographicFront"/>
+      <a:lightRig rig="threePt" dir="t"/>
+    </dgm:scene3d>
+    <dgm:sp3d/>
+    <dgm:txPr/>
+    <dgm:style>
+      <a:lnRef idx="2">
+        <a:scrgbClr r="0" g="0" b="0"/>
+      </a:lnRef>
+      <a:fillRef idx="1">
+        <a:scrgbClr r="0" g="0" b="0"/>
+      </a:fillRef>
+      <a:effectRef idx="0">
+        <a:scrgbClr r="0" g="0" b="0"/>
+      </a:effectRef>
+      <a:fontRef idx="minor"/>
+    </dgm:style>
+  </dgm:styleLbl>
+  <dgm:styleLbl name="sibTrans2D1">
+    <dgm:scene3d>
+      <a:camera prst="orthographicFront"/>
+      <a:lightRig rig="threePt" dir="t"/>
+    </dgm:scene3d>
+    <dgm:sp3d/>
+    <dgm:txPr/>
+    <dgm:style>
+      <a:lnRef idx="0">
+        <a:scrgbClr r="0" g="0" b="0"/>
+      </a:lnRef>
+      <a:fillRef idx="1">
+        <a:scrgbClr r="0" g="0" b="0"/>
+      </a:fillRef>
+      <a:effectRef idx="0">
+        <a:scrgbClr r="0" g="0" b="0"/>
+      </a:effectRef>
+      <a:fontRef idx="minor">
+        <a:schemeClr val="lt1"/>
+      </a:fontRef>
+    </dgm:style>
+  </dgm:styleLbl>
+  <dgm:styleLbl name="fgSibTrans2D1">
+    <dgm:scene3d>
+      <a:camera prst="orthographicFront"/>
+      <a:lightRig rig="threePt" dir="t"/>
+    </dgm:scene3d>
+    <dgm:sp3d/>
+    <dgm:txPr/>
+    <dgm:style>
+      <a:lnRef idx="0">
+        <a:scrgbClr r="0" g="0" b="0"/>
+      </a:lnRef>
+      <a:fillRef idx="1">
+        <a:scrgbClr r="0" g="0" b="0"/>
+      </a:fillRef>
+      <a:effectRef idx="0">
+        <a:scrgbClr r="0" g="0" b="0"/>
+      </a:effectRef>
+      <a:fontRef idx="minor">
+        <a:schemeClr val="lt1"/>
+      </a:fontRef>
+    </dgm:style>
+  </dgm:styleLbl>
+  <dgm:styleLbl name="bgSibTrans2D1">
+    <dgm:scene3d>
+      <a:camera prst="orthographicFront"/>
+      <a:lightRig rig="threePt" dir="t"/>
+    </dgm:scene3d>
+    <dgm:sp3d/>
+    <dgm:txPr/>
+    <dgm:style>
+      <a:lnRef idx="0">
+        <a:scrgbClr r="0" g="0" b="0"/>
+      </a:lnRef>
+      <a:fillRef idx="1">
+        <a:scrgbClr r="0" g="0" b="0"/>
+      </a:fillRef>
+      <a:effectRef idx="0">
+        <a:scrgbClr r="0" g="0" b="0"/>
+      </a:effectRef>
+      <a:fontRef idx="minor">
+        <a:schemeClr val="lt1"/>
+      </a:fontRef>
+    </dgm:style>
+  </dgm:styleLbl>
+  <dgm:styleLbl name="sibTrans1D1">
+    <dgm:scene3d>
+      <a:camera prst="orthographicFront"/>
+      <a:lightRig rig="threePt" dir="t"/>
+    </dgm:scene3d>
+    <dgm:sp3d/>
+    <dgm:txPr/>
+    <dgm:style>
+      <a:lnRef idx="1">
+        <a:scrgbClr r="0" g="0" b="0"/>
+      </a:lnRef>
+      <a:fillRef idx="0">
+        <a:scrgbClr r="0" g="0" b="0"/>
+      </a:fillRef>
+      <a:effectRef idx="0">
+        <a:scrgbClr r="0" g="0" b="0"/>
+      </a:effectRef>
+      <a:fontRef idx="minor"/>
+    </dgm:style>
+  </dgm:styleLbl>
+  <dgm:styleLbl name="callout">
+    <dgm:scene3d>
+      <a:camera prst="orthographicFront"/>
+      <a:lightRig rig="threePt" dir="t"/>
+    </dgm:scene3d>
+    <dgm:sp3d/>
+    <dgm:txPr/>
+    <dgm:style>
+      <a:lnRef idx="2">
+        <a:scrgbClr r="0" g="0" b="0"/>
+      </a:lnRef>
+      <a:fillRef idx="1">
+        <a:scrgbClr r="0" g="0" b="0"/>
+      </a:fillRef>
+      <a:effectRef idx="0">
+        <a:scrgbClr r="0" g="0" b="0"/>
+      </a:effectRef>
+      <a:fontRef idx="minor"/>
+    </dgm:style>
+  </dgm:styleLbl>
+  <dgm:styleLbl name="asst0">
+    <dgm:scene3d>
+      <a:camera prst="orthographicFront"/>
+      <a:lightRig rig="threePt" dir="t"/>
+    </dgm:scene3d>
+    <dgm:sp3d/>
+    <dgm:txPr/>
+    <dgm:style>
+      <a:lnRef idx="2">
+        <a:scrgbClr r="0" g="0" b="0"/>
+      </a:lnRef>
+      <a:fillRef idx="1">
+        <a:scrgbClr r="0" g="0" b="0"/>
+      </a:fillRef>
+      <a:effectRef idx="0">
+        <a:scrgbClr r="0" g="0" b="0"/>
+      </a:effectRef>
+      <a:fontRef idx="minor">
+        <a:schemeClr val="lt1"/>
+      </a:fontRef>
+    </dgm:style>
+  </dgm:styleLbl>
+  <dgm:styleLbl name="asst1">
+    <dgm:scene3d>
+      <a:camera prst="orthographicFront"/>
+      <a:lightRig rig="threePt" dir="t"/>
+    </dgm:scene3d>
+    <dgm:sp3d/>
+    <dgm:txPr/>
+    <dgm:style>
+      <a:lnRef idx="2">
+        <a:scrgbClr r="0" g="0" b="0"/>
+      </a:lnRef>
+      <a:fillRef idx="1">
+        <a:scrgbClr r="0" g="0" b="0"/>
+      </a:fillRef>
+      <a:effectRef idx="0">
+        <a:scrgbClr r="0" g="0" b="0"/>
+      </a:effectRef>
+      <a:fontRef idx="minor">
+        <a:schemeClr val="lt1"/>
+      </a:fontRef>
+    </dgm:style>
+  </dgm:styleLbl>
+  <dgm:styleLbl name="asst2">
+    <dgm:scene3d>
+      <a:camera prst="orthographicFront"/>
+      <a:lightRig rig="threePt" dir="t"/>
+    </dgm:scene3d>
+    <dgm:sp3d/>
+    <dgm:txPr/>
+    <dgm:style>
+      <a:lnRef idx="2">
+        <a:scrgbClr r="0" g="0" b="0"/>
+      </a:lnRef>
+      <a:fillRef idx="1">
+        <a:scrgbClr r="0" g="0" b="0"/>
+      </a:fillRef>
+      <a:effectRef idx="0">
+        <a:scrgbClr r="0" g="0" b="0"/>
+      </a:effectRef>
+      <a:fontRef idx="minor">
+        <a:schemeClr val="lt1"/>
+      </a:fontRef>
+    </dgm:style>
+  </dgm:styleLbl>
+  <dgm:styleLbl name="asst3">
+    <dgm:scene3d>
+      <a:camera prst="orthographicFront"/>
+      <a:lightRig rig="threePt" dir="t"/>
+    </dgm:scene3d>
+    <dgm:sp3d/>
+    <dgm:txPr/>
+    <dgm:style>
+      <a:lnRef idx="2">
+        <a:scrgbClr r="0" g="0" b="0"/>
+      </a:lnRef>
+      <a:fillRef idx="1">
+        <a:scrgbClr r="0" g="0" b="0"/>
+      </a:fillRef>
+      <a:effectRef idx="0">
+        <a:scrgbClr r="0" g="0" b="0"/>
+      </a:effectRef>
+      <a:fontRef idx="minor">
+        <a:schemeClr val="lt1"/>
+      </a:fontRef>
+    </dgm:style>
+  </dgm:styleLbl>
+  <dgm:styleLbl name="asst4">
+    <dgm:scene3d>
+      <a:camera prst="orthographicFront"/>
+      <a:lightRig rig="threePt" dir="t"/>
+    </dgm:scene3d>
+    <dgm:sp3d/>
+    <dgm:txPr/>
+    <dgm:style>
+      <a:lnRef idx="2">
+        <a:scrgbClr r="0" g="0" b="0"/>
+      </a:lnRef>
+      <a:fillRef idx="1">
+        <a:scrgbClr r="0" g="0" b="0"/>
+      </a:fillRef>
+      <a:effectRef idx="0">
+        <a:scrgbClr r="0" g="0" b="0"/>
+      </a:effectRef>
+      <a:fontRef idx="minor">
+        <a:schemeClr val="lt1"/>
+      </a:fontRef>
+    </dgm:style>
+  </dgm:styleLbl>
+  <dgm:styleLbl name="parChTrans2D1">
+    <dgm:scene3d>
+      <a:camera prst="orthographicFront"/>
+      <a:lightRig rig="threePt" dir="t"/>
+    </dgm:scene3d>
+    <dgm:sp3d/>
+    <dgm:txPr/>
+    <dgm:style>
+      <a:lnRef idx="2">
+        <a:scrgbClr r="0" g="0" b="0"/>
+      </a:lnRef>
+      <a:fillRef idx="1">
+        <a:scrgbClr r="0" g="0" b="0"/>
+      </a:fillRef>
+      <a:effectRef idx="0">
+        <a:scrgbClr r="0" g="0" b="0"/>
+      </a:effectRef>
+      <a:fontRef idx="minor">
+        <a:schemeClr val="lt1"/>
+      </a:fontRef>
+    </dgm:style>
+  </dgm:styleLbl>
+  <dgm:styleLbl name="parChTrans2D2">
+    <dgm:scene3d>
+      <a:camera prst="orthographicFront"/>
+      <a:lightRig rig="threePt" dir="t"/>
+    </dgm:scene3d>
+    <dgm:sp3d/>
+    <dgm:txPr/>
+    <dgm:style>
+      <a:lnRef idx="2">
+        <a:scrgbClr r="0" g="0" b="0"/>
+      </a:lnRef>
+      <a:fillRef idx="1">
+        <a:scrgbClr r="0" g="0" b="0"/>
+      </a:fillRef>
+      <a:effectRef idx="0">
+        <a:scrgbClr r="0" g="0" b="0"/>
+      </a:effectRef>
+      <a:fontRef idx="minor">
+        <a:schemeClr val="lt1"/>
+      </a:fontRef>
+    </dgm:style>
+  </dgm:styleLbl>
+  <dgm:styleLbl name="parChTrans2D3">
+    <dgm:scene3d>
+      <a:camera prst="orthographicFront"/>
+      <a:lightRig rig="threePt" dir="t"/>
+    </dgm:scene3d>
+    <dgm:sp3d/>
+    <dgm:txPr/>
+    <dgm:style>
+      <a:lnRef idx="2">
+        <a:scrgbClr r="0" g="0" b="0"/>
+      </a:lnRef>
+      <a:fillRef idx="1">
+        <a:scrgbClr r="0" g="0" b="0"/>
+      </a:fillRef>
+      <a:effectRef idx="0">
+        <a:scrgbClr r="0" g="0" b="0"/>
+      </a:effectRef>
+      <a:fontRef idx="minor">
+        <a:schemeClr val="lt1"/>
+      </a:fontRef>
+    </dgm:style>
+  </dgm:styleLbl>
+  <dgm:styleLbl name="parChTrans2D4">
+    <dgm:scene3d>
+      <a:camera prst="orthographicFront"/>
+      <a:lightRig rig="threePt" dir="t"/>
+    </dgm:scene3d>
+    <dgm:sp3d/>
+    <dgm:txPr/>
+    <dgm:style>
+      <a:lnRef idx="2">
+        <a:scrgbClr r="0" g="0" b="0"/>
+      </a:lnRef>
+      <a:fillRef idx="1">
+        <a:scrgbClr r="0" g="0" b="0"/>
+      </a:fillRef>
+      <a:effectRef idx="0">
+        <a:scrgbClr r="0" g="0" b="0"/>
+      </a:effectRef>
+      <a:fontRef idx="minor">
+        <a:schemeClr val="lt1"/>
+      </a:fontRef>
+    </dgm:style>
+  </dgm:styleLbl>
+  <dgm:styleLbl name="parChTrans1D1">
+    <dgm:scene3d>
+      <a:camera prst="orthographicFront"/>
+      <a:lightRig rig="threePt" dir="t"/>
+    </dgm:scene3d>
+    <dgm:sp3d/>
+    <dgm:txPr/>
+    <dgm:style>
+      <a:lnRef idx="2">
+        <a:scrgbClr r="0" g="0" b="0"/>
+      </a:lnRef>
+      <a:fillRef idx="0">
+        <a:scrgbClr r="0" g="0" b="0"/>
+      </a:fillRef>
+      <a:effectRef idx="0">
+        <a:scrgbClr r="0" g="0" b="0"/>
+      </a:effectRef>
+      <a:fontRef idx="minor"/>
+    </dgm:style>
+  </dgm:styleLbl>
+  <dgm:styleLbl name="parChTrans1D2">
+    <dgm:scene3d>
+      <a:camera prst="orthographicFront"/>
+      <a:lightRig rig="threePt" dir="t"/>
+    </dgm:scene3d>
+    <dgm:sp3d/>
+    <dgm:txPr/>
+    <dgm:style>
+      <a:lnRef idx="2">
+        <a:scrgbClr r="0" g="0" b="0"/>
+      </a:lnRef>
+      <a:fillRef idx="0">
+        <a:scrgbClr r="0" g="0" b="0"/>
+      </a:fillRef>
+      <a:effectRef idx="0">
+        <a:scrgbClr r="0" g="0" b="0"/>
+      </a:effectRef>
+      <a:fontRef idx="minor"/>
+    </dgm:style>
+  </dgm:styleLbl>
+  <dgm:styleLbl name="parChTrans1D3">
+    <dgm:scene3d>
+      <a:camera prst="orthographicFront"/>
+      <a:lightRig rig="threePt" dir="t"/>
+    </dgm:scene3d>
+    <dgm:sp3d/>
+    <dgm:txPr/>
+    <dgm:style>
+      <a:lnRef idx="2">
+        <a:scrgbClr r="0" g="0" b="0"/>
+      </a:lnRef>
+      <a:fillRef idx="0">
+        <a:scrgbClr r="0" g="0" b="0"/>
+      </a:fillRef>
+      <a:effectRef idx="0">
+        <a:scrgbClr r="0" g="0" b="0"/>
+      </a:effectRef>
+      <a:fontRef idx="minor"/>
+    </dgm:style>
+  </dgm:styleLbl>
+  <dgm:styleLbl name="parChTrans1D4">
+    <dgm:scene3d>
+      <a:camera prst="orthographicFront"/>
+      <a:lightRig rig="threePt" dir="t"/>
+    </dgm:scene3d>
+    <dgm:sp3d/>
+    <dgm:txPr/>
+    <dgm:style>
+      <a:lnRef idx="2">
+        <a:scrgbClr r="0" g="0" b="0"/>
+      </a:lnRef>
+      <a:fillRef idx="0">
+        <a:scrgbClr r="0" g="0" b="0"/>
+      </a:fillRef>
+      <a:effectRef idx="0">
+        <a:scrgbClr r="0" g="0" b="0"/>
+      </a:effectRef>
+      <a:fontRef idx="minor"/>
+    </dgm:style>
+  </dgm:styleLbl>
+  <dgm:styleLbl name="fgAcc1">
+    <dgm:scene3d>
+      <a:camera prst="orthographicFront"/>
+      <a:lightRig rig="threePt" dir="t"/>
+    </dgm:scene3d>
+    <dgm:sp3d/>
+    <dgm:txPr/>
+    <dgm:style>
+      <a:lnRef idx="2">
+        <a:scrgbClr r="0" g="0" b="0"/>
+      </a:lnRef>
+      <a:fillRef idx="1">
+        <a:scrgbClr r="0" g="0" b="0"/>
+      </a:fillRef>
+      <a:effectRef idx="0">
+        <a:scrgbClr r="0" g="0" b="0"/>
+      </a:effectRef>
+      <a:fontRef idx="minor"/>
+    </dgm:style>
+  </dgm:styleLbl>
+  <dgm:styleLbl name="conFgAcc1">
+    <dgm:scene3d>
+      <a:camera prst="orthographicFront"/>
+      <a:lightRig rig="threePt" dir="t"/>
+    </dgm:scene3d>
+    <dgm:sp3d/>
+    <dgm:txPr/>
+    <dgm:style>
+      <a:lnRef idx="2">
+        <a:scrgbClr r="0" g="0" b="0"/>
+      </a:lnRef>
+      <a:fillRef idx="1">
+        <a:scrgbClr r="0" g="0" b="0"/>
+      </a:fillRef>
+      <a:effectRef idx="0">
+        <a:scrgbClr r="0" g="0" b="0"/>
+      </a:effectRef>
+      <a:fontRef idx="minor"/>
+    </dgm:style>
+  </dgm:styleLbl>
+  <dgm:styleLbl name="alignAcc1">
+    <dgm:scene3d>
+      <a:camera prst="orthographicFront"/>
+      <a:lightRig rig="threePt" dir="t"/>
+    </dgm:scene3d>
+    <dgm:sp3d/>
+    <dgm:txPr/>
+    <dgm:style>
+      <a:lnRef idx="2">
+        <a:scrgbClr r="0" g="0" b="0"/>
+      </a:lnRef>
+      <a:fillRef idx="1">
+        <a:scrgbClr r="0" g="0" b="0"/>
+      </a:fillRef>
+      <a:effectRef idx="0">
+        <a:scrgbClr r="0" g="0" b="0"/>
+      </a:effectRef>
+      <a:fontRef idx="minor"/>
+    </dgm:style>
+  </dgm:styleLbl>
+  <dgm:styleLbl name="trAlignAcc1">
+    <dgm:scene3d>
+      <a:camera prst="orthographicFront"/>
+      <a:lightRig rig="threePt" dir="t"/>
+    </dgm:scene3d>
+    <dgm:sp3d/>
+    <dgm:txPr/>
+    <dgm:style>
+      <a:lnRef idx="1">
+        <a:scrgbClr r="0" g="0" b="0"/>
+      </a:lnRef>
+      <a:fillRef idx="1">
+        <a:scrgbClr r="0" g="0" b="0"/>
+      </a:fillRef>
+      <a:effectRef idx="0">
+        <a:scrgbClr r="0" g="0" b="0"/>
+      </a:effectRef>
+      <a:fontRef idx="minor"/>
+    </dgm:style>
+  </dgm:styleLbl>
+  <dgm:styleLbl name="bgAcc1">
+    <dgm:scene3d>
+      <a:camera prst="orthographicFront"/>
+      <a:lightRig rig="threePt" dir="t"/>
+    </dgm:scene3d>
+    <dgm:sp3d/>
+    <dgm:txPr/>
+    <dgm:style>
+      <a:lnRef idx="2">
+        <a:scrgbClr r="0" g="0" b="0"/>
+      </a:lnRef>
+      <a:fillRef idx="1">
+        <a:scrgbClr r="0" g="0" b="0"/>
+      </a:fillRef>
+      <a:effectRef idx="0">
+        <a:scrgbClr r="0" g="0" b="0"/>
+      </a:effectRef>
+      <a:fontRef idx="minor"/>
+    </dgm:style>
+  </dgm:styleLbl>
+  <dgm:styleLbl name="solidFgAcc1">
+    <dgm:scene3d>
+      <a:camera prst="orthographicFront"/>
+      <a:lightRig rig="threePt" dir="t"/>
+    </dgm:scene3d>
+    <dgm:sp3d/>
+    <dgm:txPr/>
+    <dgm:style>
+      <a:lnRef idx="2">
+        <a:scrgbClr r="0" g="0" b="0"/>
+      </a:lnRef>
+      <a:fillRef idx="1">
+        <a:scrgbClr r="0" g="0" b="0"/>
+      </a:fillRef>
+      <a:effectRef idx="0">
+        <a:scrgbClr r="0" g="0" b="0"/>
+      </a:effectRef>
+      <a:fontRef idx="minor"/>
+    </dgm:style>
+  </dgm:styleLbl>
+  <dgm:styleLbl name="solidAlignAcc1">
+    <dgm:scene3d>
+      <a:camera prst="orthographicFront"/>
+      <a:lightRig rig="threePt" dir="t"/>
+    </dgm:scene3d>
+    <dgm:sp3d/>
+    <dgm:txPr/>
+    <dgm:style>
+      <a:lnRef idx="2">
+        <a:scrgbClr r="0" g="0" b="0"/>
+      </a:lnRef>
+      <a:fillRef idx="1">
+        <a:scrgbClr r="0" g="0" b="0"/>
+      </a:fillRef>
+      <a:effectRef idx="0">
+        <a:scrgbClr r="0" g="0" b="0"/>
+      </a:effectRef>
+      <a:fontRef idx="minor"/>
+    </dgm:style>
+  </dgm:styleLbl>
+  <dgm:styleLbl name="solidBgAcc1">
+    <dgm:scene3d>
+      <a:camera prst="orthographicFront"/>
+      <a:lightRig rig="threePt" dir="t"/>
+    </dgm:scene3d>
+    <dgm:sp3d/>
+    <dgm:txPr/>
+    <dgm:style>
+      <a:lnRef idx="2">
+        <a:scrgbClr r="0" g="0" b="0"/>
+      </a:lnRef>
+      <a:fillRef idx="1">
+        <a:scrgbClr r="0" g="0" b="0"/>
+      </a:fillRef>
+      <a:effectRef idx="0">
+        <a:scrgbClr r="0" g="0" b="0"/>
+      </a:effectRef>
+      <a:fontRef idx="minor"/>
+    </dgm:style>
+  </dgm:styleLbl>
+  <dgm:styleLbl name="fgAccFollowNode1">
+    <dgm:scene3d>
+      <a:camera prst="orthographicFront"/>
+      <a:lightRig rig="threePt" dir="t"/>
+    </dgm:scene3d>
+    <dgm:sp3d/>
+    <dgm:txPr/>
+    <dgm:style>
+      <a:lnRef idx="2">
+        <a:scrgbClr r="0" g="0" b="0"/>
+      </a:lnRef>
+      <a:fillRef idx="1">
+        <a:scrgbClr r="0" g="0" b="0"/>
+      </a:fillRef>
+      <a:effectRef idx="0">
+        <a:scrgbClr r="0" g="0" b="0"/>
+      </a:effectRef>
+      <a:fontRef idx="minor"/>
+    </dgm:style>
+  </dgm:styleLbl>
+  <dgm:styleLbl name="alignAccFollowNode1">
+    <dgm:scene3d>
+      <a:camera prst="orthographicFront"/>
+      <a:lightRig rig="threePt" dir="t"/>
+    </dgm:scene3d>
+    <dgm:sp3d/>
+    <dgm:txPr/>
+    <dgm:style>
+      <a:lnRef idx="2">
+        <a:scrgbClr r="0" g="0" b="0"/>
+      </a:lnRef>
+      <a:fillRef idx="1">
+        <a:scrgbClr r="0" g="0" b="0"/>
+      </a:fillRef>
+      <a:effectRef idx="0">
+        <a:scrgbClr r="0" g="0" b="0"/>
+      </a:effectRef>
+      <a:fontRef idx="minor"/>
+    </dgm:style>
+  </dgm:styleLbl>
+  <dgm:styleLbl name="bgAccFollowNode1">
+    <dgm:scene3d>
+      <a:camera prst="orthographicFront"/>
+      <a:lightRig rig="threePt" dir="t"/>
+    </dgm:scene3d>
+    <dgm:sp3d/>
+    <dgm:txPr/>
+    <dgm:style>
+      <a:lnRef idx="2">
+        <a:scrgbClr r="0" g="0" b="0"/>
+      </a:lnRef>
+      <a:fillRef idx="1">
+        <a:scrgbClr r="0" g="0" b="0"/>
+      </a:fillRef>
+      <a:effectRef idx="0">
+        <a:scrgbClr r="0" g="0" b="0"/>
+      </a:effectRef>
+      <a:fontRef idx="minor"/>
+    </dgm:style>
+  </dgm:styleLbl>
+  <dgm:styleLbl name="fgAcc0">
+    <dgm:scene3d>
+      <a:camera prst="orthographicFront"/>
+      <a:lightRig rig="threePt" dir="t"/>
+    </dgm:scene3d>
+    <dgm:sp3d/>
+    <dgm:txPr/>
+    <dgm:style>
+      <a:lnRef idx="2">
+        <a:scrgbClr r="0" g="0" b="0"/>
+      </a:lnRef>
+      <a:fillRef idx="1">
+        <a:scrgbClr r="0" g="0" b="0"/>
+      </a:fillRef>
+      <a:effectRef idx="0">
+        <a:scrgbClr r="0" g="0" b="0"/>
+      </a:effectRef>
+      <a:fontRef idx="minor"/>
+    </dgm:style>
+  </dgm:styleLbl>
+  <dgm:styleLbl name="fgAcc2">
+    <dgm:scene3d>
+      <a:camera prst="orthographicFront"/>
+      <a:lightRig rig="threePt" dir="t"/>
+    </dgm:scene3d>
+    <dgm:sp3d/>
+    <dgm:txPr/>
+    <dgm:style>
+      <a:lnRef idx="2">
+        <a:scrgbClr r="0" g="0" b="0"/>
+      </a:lnRef>
+      <a:fillRef idx="1">
+        <a:scrgbClr r="0" g="0" b="0"/>
+      </a:fillRef>
+      <a:effectRef idx="0">
+        <a:scrgbClr r="0" g="0" b="0"/>
+      </a:effectRef>
+      <a:fontRef idx="minor"/>
+    </dgm:style>
+  </dgm:styleLbl>
+  <dgm:styleLbl name="fgAcc3">
+    <dgm:scene3d>
+      <a:camera prst="orthographicFront"/>
+      <a:lightRig rig="threePt" dir="t"/>
+    </dgm:scene3d>
+    <dgm:sp3d/>
+    <dgm:txPr/>
+    <dgm:style>
+      <a:lnRef idx="2">
+        <a:scrgbClr r="0" g="0" b="0"/>
+      </a:lnRef>
+      <a:fillRef idx="1">
+        <a:scrgbClr r="0" g="0" b="0"/>
+      </a:fillRef>
+      <a:effectRef idx="0">
+        <a:scrgbClr r="0" g="0" b="0"/>
+      </a:effectRef>
+      <a:fontRef idx="minor"/>
+    </dgm:style>
+  </dgm:styleLbl>
+  <dgm:styleLbl name="fgAcc4">
+    <dgm:scene3d>
+      <a:camera prst="orthographicFront"/>
+      <a:lightRig rig="threePt" dir="t"/>
+    </dgm:scene3d>
+    <dgm:sp3d/>
+    <dgm:txPr/>
+    <dgm:style>
+      <a:lnRef idx="2">
+        <a:scrgbClr r="0" g="0" b="0"/>
+      </a:lnRef>
+      <a:fillRef idx="1">
+        <a:scrgbClr r="0" g="0" b="0"/>
+      </a:fillRef>
+      <a:effectRef idx="0">
+        <a:scrgbClr r="0" g="0" b="0"/>
+      </a:effectRef>
+      <a:fontRef idx="minor"/>
+    </dgm:style>
+  </dgm:styleLbl>
+  <dgm:styleLbl name="bgShp">
+    <dgm:scene3d>
+      <a:camera prst="orthographicFront"/>
+      <a:lightRig rig="threePt" dir="t"/>
+    </dgm:scene3d>
+    <dgm:sp3d/>
+    <dgm:txPr/>
+    <dgm:style>
+      <a:lnRef idx="0">
+        <a:scrgbClr r="0" g="0" b="0"/>
+      </a:lnRef>
+      <a:fillRef idx="1">
+        <a:scrgbClr r="0" g="0" b="0"/>
+      </a:fillRef>
+      <a:effectRef idx="0">
+        <a:scrgbClr r="0" g="0" b="0"/>
+      </a:effectRef>
+      <a:fontRef idx="minor"/>
+    </dgm:style>
+  </dgm:styleLbl>
+  <dgm:styleLbl name="dkBgShp">
+    <dgm:scene3d>
+      <a:camera prst="orthographicFront"/>
+      <a:lightRig rig="threePt" dir="t"/>
+    </dgm:scene3d>
+    <dgm:sp3d/>
+    <dgm:txPr/>
+    <dgm:style>
+      <a:lnRef idx="0">
+        <a:scrgbClr r="0" g="0" b="0"/>
+      </a:lnRef>
+      <a:fillRef idx="1">
+        <a:scrgbClr r="0" g="0" b="0"/>
+      </a:fillRef>
+      <a:effectRef idx="0">
+        <a:scrgbClr r="0" g="0" b="0"/>
+      </a:effectRef>
+      <a:fontRef idx="minor"/>
+    </dgm:style>
+  </dgm:styleLbl>
+  <dgm:styleLbl name="trBgShp">
+    <dgm:scene3d>
+      <a:camera prst="orthographicFront"/>
+      <a:lightRig rig="threePt" dir="t"/>
+    </dgm:scene3d>
+    <dgm:sp3d/>
+    <dgm:txPr/>
+    <dgm:style>
+      <a:lnRef idx="0">
+        <a:scrgbClr r="0" g="0" b="0"/>
+      </a:lnRef>
+      <a:fillRef idx="1">
+        <a:scrgbClr r="0" g="0" b="0"/>
+      </a:fillRef>
+      <a:effectRef idx="0">
+        <a:scrgbClr r="0" g="0" b="0"/>
+      </a:effectRef>
+      <a:fontRef idx="minor"/>
+    </dgm:style>
+  </dgm:styleLbl>
+  <dgm:styleLbl name="fgShp">
+    <dgm:scene3d>
+      <a:camera prst="orthographicFront"/>
+      <a:lightRig rig="threePt" dir="t"/>
+    </dgm:scene3d>
+    <dgm:sp3d/>
+    <dgm:txPr/>
+    <dgm:style>
+      <a:lnRef idx="2">
+        <a:scrgbClr r="0" g="0" b="0"/>
+      </a:lnRef>
+      <a:fillRef idx="1">
+        <a:scrgbClr r="0" g="0" b="0"/>
+      </a:fillRef>
+      <a:effectRef idx="0">
+        <a:scrgbClr r="0" g="0" b="0"/>
+      </a:effectRef>
+      <a:fontRef idx="minor"/>
+    </dgm:style>
+  </dgm:styleLbl>
+  <dgm:styleLbl name="revTx">
+    <dgm:scene3d>
+      <a:camera prst="orthographicFront"/>
+      <a:lightRig rig="threePt" dir="t"/>
+    </dgm:scene3d>
+    <dgm:sp3d/>
+    <dgm:txPr/>
+    <dgm:style>
+      <a:lnRef idx="0">
+        <a:scrgbClr r="0" g="0" b="0"/>
+      </a:lnRef>
+      <a:fillRef idx="0">
+        <a:scrgbClr r="0" g="0" b="0"/>
+      </a:fillRef>
+      <a:effectRef idx="0">
+        <a:scrgbClr r="0" g="0" b="0"/>
+      </a:effectRef>
+      <a:fontRef idx="minor"/>
+    </dgm:style>
+  </dgm:styleLbl>
+</dgm:styleDef>
+</file>
+
+<file path=ppt/diagrams/quickStyle4.xml><?xml version="1.0" encoding="utf-8"?>
+<dgm:styleDef xmlns:dgm="http://schemas.openxmlformats.org/drawingml/2006/diagram" xmlns:a="http://schemas.openxmlformats.org/drawingml/2006/main" uniqueId="urn:microsoft.com/office/officeart/2005/8/quickstyle/simple1">
+  <dgm:title val=""/>
+  <dgm:desc val=""/>
+  <dgm:catLst>
+    <dgm:cat type="simple" pri="10100"/>
+  </dgm:catLst>
+  <dgm:scene3d>
+    <a:camera prst="orthographicFront"/>
+    <a:lightRig rig="threePt" dir="t"/>
+  </dgm:scene3d>
+  <dgm:styleLbl name="node0">
+    <dgm:scene3d>
+      <a:camera prst="orthographicFront"/>
+      <a:lightRig rig="threePt" dir="t"/>
+    </dgm:scene3d>
+    <dgm:sp3d/>
+    <dgm:txPr/>
+    <dgm:style>
+      <a:lnRef idx="2">
+        <a:scrgbClr r="0" g="0" b="0"/>
+      </a:lnRef>
+      <a:fillRef idx="1">
+        <a:scrgbClr r="0" g="0" b="0"/>
+      </a:fillRef>
+      <a:effectRef idx="0">
+        <a:scrgbClr r="0" g="0" b="0"/>
+      </a:effectRef>
+      <a:fontRef idx="minor">
+        <a:schemeClr val="lt1"/>
+      </a:fontRef>
+    </dgm:style>
+  </dgm:styleLbl>
+  <dgm:styleLbl name="lnNode1">
+    <dgm:scene3d>
+      <a:camera prst="orthographicFront"/>
+      <a:lightRig rig="threePt" dir="t"/>
+    </dgm:scene3d>
+    <dgm:sp3d/>
+    <dgm:txPr/>
+    <dgm:style>
+      <a:lnRef idx="2">
+        <a:scrgbClr r="0" g="0" b="0"/>
+      </a:lnRef>
+      <a:fillRef idx="1">
+        <a:scrgbClr r="0" g="0" b="0"/>
+      </a:fillRef>
+      <a:effectRef idx="0">
+        <a:scrgbClr r="0" g="0" b="0"/>
+      </a:effectRef>
+      <a:fontRef idx="minor">
+        <a:schemeClr val="lt1"/>
+      </a:fontRef>
+    </dgm:style>
+  </dgm:styleLbl>
+  <dgm:styleLbl name="vennNode1">
+    <dgm:scene3d>
+      <a:camera prst="orthographicFront"/>
+      <a:lightRig rig="threePt" dir="t"/>
+    </dgm:scene3d>
+    <dgm:sp3d/>
+    <dgm:txPr/>
+    <dgm:style>
+      <a:lnRef idx="2">
+        <a:scrgbClr r="0" g="0" b="0"/>
+      </a:lnRef>
+      <a:fillRef idx="1">
+        <a:scrgbClr r="0" g="0" b="0"/>
+      </a:fillRef>
+      <a:effectRef idx="0">
+        <a:scrgbClr r="0" g="0" b="0"/>
+      </a:effectRef>
+      <a:fontRef idx="minor">
+        <a:schemeClr val="tx1"/>
+      </a:fontRef>
+    </dgm:style>
+  </dgm:styleLbl>
+  <dgm:styleLbl name="alignNode1">
+    <dgm:scene3d>
+      <a:camera prst="orthographicFront"/>
+      <a:lightRig rig="threePt" dir="t"/>
+    </dgm:scene3d>
+    <dgm:sp3d/>
+    <dgm:txPr/>
+    <dgm:style>
+      <a:lnRef idx="2">
+        <a:scrgbClr r="0" g="0" b="0"/>
+      </a:lnRef>
+      <a:fillRef idx="1">
+        <a:scrgbClr r="0" g="0" b="0"/>
+      </a:fillRef>
+      <a:effectRef idx="0">
+        <a:scrgbClr r="0" g="0" b="0"/>
+      </a:effectRef>
+      <a:fontRef idx="minor">
+        <a:schemeClr val="lt1"/>
+      </a:fontRef>
+    </dgm:style>
+  </dgm:styleLbl>
+  <dgm:styleLbl name="node1">
+    <dgm:scene3d>
+      <a:camera prst="orthographicFront"/>
+      <a:lightRig rig="threePt" dir="t"/>
+    </dgm:scene3d>
+    <dgm:sp3d/>
+    <dgm:txPr/>
+    <dgm:style>
+      <a:lnRef idx="2">
+        <a:scrgbClr r="0" g="0" b="0"/>
+      </a:lnRef>
+      <a:fillRef idx="1">
+        <a:scrgbClr r="0" g="0" b="0"/>
+      </a:fillRef>
+      <a:effectRef idx="0">
+        <a:scrgbClr r="0" g="0" b="0"/>
+      </a:effectRef>
+      <a:fontRef idx="minor">
+        <a:schemeClr val="lt1"/>
+      </a:fontRef>
+    </dgm:style>
+  </dgm:styleLbl>
+  <dgm:styleLbl name="node2">
+    <dgm:scene3d>
+      <a:camera prst="orthographicFront"/>
+      <a:lightRig rig="threePt" dir="t"/>
+    </dgm:scene3d>
+    <dgm:sp3d/>
+    <dgm:txPr/>
+    <dgm:style>
+      <a:lnRef idx="2">
+        <a:scrgbClr r="0" g="0" b="0"/>
+      </a:lnRef>
+      <a:fillRef idx="1">
+        <a:scrgbClr r="0" g="0" b="0"/>
+      </a:fillRef>
+      <a:effectRef idx="0">
+        <a:scrgbClr r="0" g="0" b="0"/>
+      </a:effectRef>
+      <a:fontRef idx="minor">
+        <a:schemeClr val="lt1"/>
+      </a:fontRef>
+    </dgm:style>
+  </dgm:styleLbl>
+  <dgm:styleLbl name="node3">
+    <dgm:scene3d>
+      <a:camera prst="orthographicFront"/>
+      <a:lightRig rig="threePt" dir="t"/>
+    </dgm:scene3d>
+    <dgm:sp3d/>
+    <dgm:txPr/>
+    <dgm:style>
+      <a:lnRef idx="2">
+        <a:scrgbClr r="0" g="0" b="0"/>
+      </a:lnRef>
+      <a:fillRef idx="1">
+        <a:scrgbClr r="0" g="0" b="0"/>
+      </a:fillRef>
+      <a:effectRef idx="0">
+        <a:scrgbClr r="0" g="0" b="0"/>
+      </a:effectRef>
+      <a:fontRef idx="minor">
+        <a:schemeClr val="lt1"/>
+      </a:fontRef>
+    </dgm:style>
+  </dgm:styleLbl>
+  <dgm:styleLbl name="node4">
+    <dgm:scene3d>
+      <a:camera prst="orthographicFront"/>
+      <a:lightRig rig="threePt" dir="t"/>
+    </dgm:scene3d>
+    <dgm:sp3d/>
+    <dgm:txPr/>
+    <dgm:style>
+      <a:lnRef idx="2">
+        <a:scrgbClr r="0" g="0" b="0"/>
+      </a:lnRef>
+      <a:fillRef idx="1">
+        <a:scrgbClr r="0" g="0" b="0"/>
+      </a:fillRef>
+      <a:effectRef idx="0">
+        <a:scrgbClr r="0" g="0" b="0"/>
+      </a:effectRef>
+      <a:fontRef idx="minor">
+        <a:schemeClr val="lt1"/>
+      </a:fontRef>
+    </dgm:style>
+  </dgm:styleLbl>
+  <dgm:styleLbl name="fgImgPlace1">
+    <dgm:scene3d>
+      <a:camera prst="orthographicFront"/>
+      <a:lightRig rig="threePt" dir="t"/>
+    </dgm:scene3d>
+    <dgm:sp3d/>
+    <dgm:txPr/>
+    <dgm:style>
+      <a:lnRef idx="2">
+        <a:scrgbClr r="0" g="0" b="0"/>
+      </a:lnRef>
+      <a:fillRef idx="1">
+        <a:scrgbClr r="0" g="0" b="0"/>
+      </a:fillRef>
+      <a:effectRef idx="0">
+        <a:scrgbClr r="0" g="0" b="0"/>
+      </a:effectRef>
+      <a:fontRef idx="minor"/>
+    </dgm:style>
+  </dgm:styleLbl>
+  <dgm:styleLbl name="alignImgPlace1">
+    <dgm:scene3d>
+      <a:camera prst="orthographicFront"/>
+      <a:lightRig rig="threePt" dir="t"/>
+    </dgm:scene3d>
+    <dgm:sp3d/>
+    <dgm:txPr/>
+    <dgm:style>
+      <a:lnRef idx="2">
+        <a:scrgbClr r="0" g="0" b="0"/>
+      </a:lnRef>
+      <a:fillRef idx="1">
+        <a:scrgbClr r="0" g="0" b="0"/>
+      </a:fillRef>
+      <a:effectRef idx="0">
+        <a:scrgbClr r="0" g="0" b="0"/>
+      </a:effectRef>
+      <a:fontRef idx="minor"/>
+    </dgm:style>
+  </dgm:styleLbl>
+  <dgm:styleLbl name="bgImgPlace1">
+    <dgm:scene3d>
+      <a:camera prst="orthographicFront"/>
+      <a:lightRig rig="threePt" dir="t"/>
+    </dgm:scene3d>
+    <dgm:sp3d/>
+    <dgm:txPr/>
+    <dgm:style>
+      <a:lnRef idx="2">
+        <a:scrgbClr r="0" g="0" b="0"/>
+      </a:lnRef>
+      <a:fillRef idx="1">
+        <a:scrgbClr r="0" g="0" b="0"/>
+      </a:fillRef>
+      <a:effectRef idx="0">
+        <a:scrgbClr r="0" g="0" b="0"/>
+      </a:effectRef>
+      <a:fontRef idx="minor"/>
+    </dgm:style>
+  </dgm:styleLbl>
+  <dgm:styleLbl name="sibTrans2D1">
+    <dgm:scene3d>
+      <a:camera prst="orthographicFront"/>
+      <a:lightRig rig="threePt" dir="t"/>
+    </dgm:scene3d>
+    <dgm:sp3d/>
+    <dgm:txPr/>
+    <dgm:style>
+      <a:lnRef idx="0">
+        <a:scrgbClr r="0" g="0" b="0"/>
+      </a:lnRef>
+      <a:fillRef idx="1">
+        <a:scrgbClr r="0" g="0" b="0"/>
+      </a:fillRef>
+      <a:effectRef idx="0">
+        <a:scrgbClr r="0" g="0" b="0"/>
+      </a:effectRef>
+      <a:fontRef idx="minor">
+        <a:schemeClr val="lt1"/>
+      </a:fontRef>
+    </dgm:style>
+  </dgm:styleLbl>
+  <dgm:styleLbl name="fgSibTrans2D1">
+    <dgm:scene3d>
+      <a:camera prst="orthographicFront"/>
+      <a:lightRig rig="threePt" dir="t"/>
+    </dgm:scene3d>
+    <dgm:sp3d/>
+    <dgm:txPr/>
+    <dgm:style>
+      <a:lnRef idx="0">
+        <a:scrgbClr r="0" g="0" b="0"/>
+      </a:lnRef>
+      <a:fillRef idx="1">
+        <a:scrgbClr r="0" g="0" b="0"/>
+      </a:fillRef>
+      <a:effectRef idx="0">
+        <a:scrgbClr r="0" g="0" b="0"/>
+      </a:effectRef>
+      <a:fontRef idx="minor">
+        <a:schemeClr val="lt1"/>
+      </a:fontRef>
+    </dgm:style>
+  </dgm:styleLbl>
+  <dgm:styleLbl name="bgSibTrans2D1">
+    <dgm:scene3d>
+      <a:camera prst="orthographicFront"/>
+      <a:lightRig rig="threePt" dir="t"/>
+    </dgm:scene3d>
+    <dgm:sp3d/>
+    <dgm:txPr/>
+    <dgm:style>
+      <a:lnRef idx="0">
+        <a:scrgbClr r="0" g="0" b="0"/>
+      </a:lnRef>
+      <a:fillRef idx="1">
+        <a:scrgbClr r="0" g="0" b="0"/>
+      </a:fillRef>
+      <a:effectRef idx="0">
+        <a:scrgbClr r="0" g="0" b="0"/>
+      </a:effectRef>
+      <a:fontRef idx="minor">
+        <a:schemeClr val="lt1"/>
+      </a:fontRef>
+    </dgm:style>
+  </dgm:styleLbl>
+  <dgm:styleLbl name="sibTrans1D1">
+    <dgm:scene3d>
+      <a:camera prst="orthographicFront"/>
+      <a:lightRig rig="threePt" dir="t"/>
+    </dgm:scene3d>
+    <dgm:sp3d/>
+    <dgm:txPr/>
+    <dgm:style>
+      <a:lnRef idx="1">
+        <a:scrgbClr r="0" g="0" b="0"/>
+      </a:lnRef>
+      <a:fillRef idx="0">
+        <a:scrgbClr r="0" g="0" b="0"/>
+      </a:fillRef>
+      <a:effectRef idx="0">
+        <a:scrgbClr r="0" g="0" b="0"/>
+      </a:effectRef>
+      <a:fontRef idx="minor"/>
+    </dgm:style>
+  </dgm:styleLbl>
+  <dgm:styleLbl name="callout">
+    <dgm:scene3d>
+      <a:camera prst="orthographicFront"/>
+      <a:lightRig rig="threePt" dir="t"/>
+    </dgm:scene3d>
+    <dgm:sp3d/>
+    <dgm:txPr/>
+    <dgm:style>
+      <a:lnRef idx="2">
+        <a:scrgbClr r="0" g="0" b="0"/>
+      </a:lnRef>
+      <a:fillRef idx="1">
+        <a:scrgbClr r="0" g="0" b="0"/>
+      </a:fillRef>
+      <a:effectRef idx="0">
+        <a:scrgbClr r="0" g="0" b="0"/>
+      </a:effectRef>
+      <a:fontRef idx="minor"/>
+    </dgm:style>
+  </dgm:styleLbl>
+  <dgm:styleLbl name="asst0">
+    <dgm:scene3d>
+      <a:camera prst="orthographicFront"/>
+      <a:lightRig rig="threePt" dir="t"/>
+    </dgm:scene3d>
+    <dgm:sp3d/>
+    <dgm:txPr/>
+    <dgm:style>
+      <a:lnRef idx="2">
+        <a:scrgbClr r="0" g="0" b="0"/>
+      </a:lnRef>
+      <a:fillRef idx="1">
+        <a:scrgbClr r="0" g="0" b="0"/>
+      </a:fillRef>
+      <a:effectRef idx="0">
+        <a:scrgbClr r="0" g="0" b="0"/>
+      </a:effectRef>
+      <a:fontRef idx="minor">
+        <a:schemeClr val="lt1"/>
+      </a:fontRef>
+    </dgm:style>
+  </dgm:styleLbl>
+  <dgm:styleLbl name="asst1">
+    <dgm:scene3d>
+      <a:camera prst="orthographicFront"/>
+      <a:lightRig rig="threePt" dir="t"/>
+    </dgm:scene3d>
+    <dgm:sp3d/>
+    <dgm:txPr/>
+    <dgm:style>
+      <a:lnRef idx="2">
+        <a:scrgbClr r="0" g="0" b="0"/>
+      </a:lnRef>
+      <a:fillRef idx="1">
+        <a:scrgbClr r="0" g="0" b="0"/>
+      </a:fillRef>
+      <a:effectRef idx="0">
+        <a:scrgbClr r="0" g="0" b="0"/>
+      </a:effectRef>
+      <a:fontRef idx="minor">
+        <a:schemeClr val="lt1"/>
+      </a:fontRef>
+    </dgm:style>
+  </dgm:styleLbl>
+  <dgm:styleLbl name="asst2">
+    <dgm:scene3d>
+      <a:camera prst="orthographicFront"/>
+      <a:lightRig rig="threePt" dir="t"/>
+    </dgm:scene3d>
+    <dgm:sp3d/>
+    <dgm:txPr/>
+    <dgm:style>
+      <a:lnRef idx="2">
+        <a:scrgbClr r="0" g="0" b="0"/>
+      </a:lnRef>
+      <a:fillRef idx="1">
+        <a:scrgbClr r="0" g="0" b="0"/>
+      </a:fillRef>
+      <a:effectRef idx="0">
+        <a:scrgbClr r="0" g="0" b="0"/>
+      </a:effectRef>
+      <a:fontRef idx="minor">
+        <a:schemeClr val="lt1"/>
+      </a:fontRef>
+    </dgm:style>
+  </dgm:styleLbl>
+  <dgm:styleLbl name="asst3">
+    <dgm:scene3d>
+      <a:camera prst="orthographicFront"/>
+      <a:lightRig rig="threePt" dir="t"/>
+    </dgm:scene3d>
+    <dgm:sp3d/>
+    <dgm:txPr/>
+    <dgm:style>
+      <a:lnRef idx="2">
+        <a:scrgbClr r="0" g="0" b="0"/>
+      </a:lnRef>
+      <a:fillRef idx="1">
+        <a:scrgbClr r="0" g="0" b="0"/>
+      </a:fillRef>
+      <a:effectRef idx="0">
+        <a:scrgbClr r="0" g="0" b="0"/>
+      </a:effectRef>
+      <a:fontRef idx="minor">
+        <a:schemeClr val="lt1"/>
+      </a:fontRef>
+    </dgm:style>
+  </dgm:styleLbl>
+  <dgm:styleLbl name="asst4">
+    <dgm:scene3d>
+      <a:camera prst="orthographicFront"/>
+      <a:lightRig rig="threePt" dir="t"/>
+    </dgm:scene3d>
+    <dgm:sp3d/>
+    <dgm:txPr/>
+    <dgm:style>
+      <a:lnRef idx="2">
+        <a:scrgbClr r="0" g="0" b="0"/>
+      </a:lnRef>
+      <a:fillRef idx="1">
+        <a:scrgbClr r="0" g="0" b="0"/>
+      </a:fillRef>
+      <a:effectRef idx="0">
+        <a:scrgbClr r="0" g="0" b="0"/>
+      </a:effectRef>
+      <a:fontRef idx="minor">
+        <a:schemeClr val="lt1"/>
+      </a:fontRef>
+    </dgm:style>
+  </dgm:styleLbl>
+  <dgm:styleLbl name="parChTrans2D1">
+    <dgm:scene3d>
+      <a:camera prst="orthographicFront"/>
+      <a:lightRig rig="threePt" dir="t"/>
+    </dgm:scene3d>
+    <dgm:sp3d/>
+    <dgm:txPr/>
+    <dgm:style>
+      <a:lnRef idx="2">
+        <a:scrgbClr r="0" g="0" b="0"/>
+      </a:lnRef>
+      <a:fillRef idx="1">
+        <a:scrgbClr r="0" g="0" b="0"/>
+      </a:fillRef>
+      <a:effectRef idx="0">
+        <a:scrgbClr r="0" g="0" b="0"/>
+      </a:effectRef>
+      <a:fontRef idx="minor">
+        <a:schemeClr val="lt1"/>
+      </a:fontRef>
+    </dgm:style>
+  </dgm:styleLbl>
+  <dgm:styleLbl name="parChTrans2D2">
+    <dgm:scene3d>
+      <a:camera prst="orthographicFront"/>
+      <a:lightRig rig="threePt" dir="t"/>
+    </dgm:scene3d>
+    <dgm:sp3d/>
+    <dgm:txPr/>
+    <dgm:style>
+      <a:lnRef idx="2">
+        <a:scrgbClr r="0" g="0" b="0"/>
+      </a:lnRef>
+      <a:fillRef idx="1">
+        <a:scrgbClr r="0" g="0" b="0"/>
+      </a:fillRef>
+      <a:effectRef idx="0">
+        <a:scrgbClr r="0" g="0" b="0"/>
+      </a:effectRef>
+      <a:fontRef idx="minor">
+        <a:schemeClr val="lt1"/>
+      </a:fontRef>
+    </dgm:style>
+  </dgm:styleLbl>
+  <dgm:styleLbl name="parChTrans2D3">
+    <dgm:scene3d>
+      <a:camera prst="orthographicFront"/>
+      <a:lightRig rig="threePt" dir="t"/>
+    </dgm:scene3d>
+    <dgm:sp3d/>
+    <dgm:txPr/>
+    <dgm:style>
+      <a:lnRef idx="2">
+        <a:scrgbClr r="0" g="0" b="0"/>
+      </a:lnRef>
+      <a:fillRef idx="1">
+        <a:scrgbClr r="0" g="0" b="0"/>
+      </a:fillRef>
+      <a:effectRef idx="0">
+        <a:scrgbClr r="0" g="0" b="0"/>
+      </a:effectRef>
+      <a:fontRef idx="minor">
+        <a:schemeClr val="lt1"/>
+      </a:fontRef>
+    </dgm:style>
+  </dgm:styleLbl>
+  <dgm:styleLbl name="parChTrans2D4">
+    <dgm:scene3d>
+      <a:camera prst="orthographicFront"/>
+      <a:lightRig rig="threePt" dir="t"/>
+    </dgm:scene3d>
+    <dgm:sp3d/>
+    <dgm:txPr/>
+    <dgm:style>
+      <a:lnRef idx="2">
+        <a:scrgbClr r="0" g="0" b="0"/>
+      </a:lnRef>
+      <a:fillRef idx="1">
+        <a:scrgbClr r="0" g="0" b="0"/>
+      </a:fillRef>
+      <a:effectRef idx="0">
+        <a:scrgbClr r="0" g="0" b="0"/>
+      </a:effectRef>
+      <a:fontRef idx="minor">
+        <a:schemeClr val="lt1"/>
+      </a:fontRef>
+    </dgm:style>
+  </dgm:styleLbl>
+  <dgm:styleLbl name="parChTrans1D1">
+    <dgm:scene3d>
+      <a:camera prst="orthographicFront"/>
+      <a:lightRig rig="threePt" dir="t"/>
+    </dgm:scene3d>
+    <dgm:sp3d/>
+    <dgm:txPr/>
+    <dgm:style>
+      <a:lnRef idx="2">
+        <a:scrgbClr r="0" g="0" b="0"/>
+      </a:lnRef>
+      <a:fillRef idx="0">
+        <a:scrgbClr r="0" g="0" b="0"/>
+      </a:fillRef>
+      <a:effectRef idx="0">
+        <a:scrgbClr r="0" g="0" b="0"/>
+      </a:effectRef>
+      <a:fontRef idx="minor"/>
+    </dgm:style>
+  </dgm:styleLbl>
+  <dgm:styleLbl name="parChTrans1D2">
+    <dgm:scene3d>
+      <a:camera prst="orthographicFront"/>
+      <a:lightRig rig="threePt" dir="t"/>
+    </dgm:scene3d>
+    <dgm:sp3d/>
+    <dgm:txPr/>
+    <dgm:style>
+      <a:lnRef idx="2">
+        <a:scrgbClr r="0" g="0" b="0"/>
+      </a:lnRef>
+      <a:fillRef idx="0">
+        <a:scrgbClr r="0" g="0" b="0"/>
+      </a:fillRef>
+      <a:effectRef idx="0">
+        <a:scrgbClr r="0" g="0" b="0"/>
+      </a:effectRef>
+      <a:fontRef idx="minor"/>
+    </dgm:style>
+  </dgm:styleLbl>
+  <dgm:styleLbl name="parChTrans1D3">
+    <dgm:scene3d>
+      <a:camera prst="orthographicFront"/>
+      <a:lightRig rig="threePt" dir="t"/>
+    </dgm:scene3d>
+    <dgm:sp3d/>
+    <dgm:txPr/>
+    <dgm:style>
+      <a:lnRef idx="2">
+        <a:scrgbClr r="0" g="0" b="0"/>
+      </a:lnRef>
+      <a:fillRef idx="0">
+        <a:scrgbClr r="0" g="0" b="0"/>
+      </a:fillRef>
+      <a:effectRef idx="0">
+        <a:scrgbClr r="0" g="0" b="0"/>
+      </a:effectRef>
+      <a:fontRef idx="minor"/>
+    </dgm:style>
+  </dgm:styleLbl>
+  <dgm:styleLbl name="parChTrans1D4">
+    <dgm:scene3d>
+      <a:camera prst="orthographicFront"/>
+      <a:lightRig rig="threePt" dir="t"/>
+    </dgm:scene3d>
+    <dgm:sp3d/>
+    <dgm:txPr/>
+    <dgm:style>
+      <a:lnRef idx="2">
+        <a:scrgbClr r="0" g="0" b="0"/>
+      </a:lnRef>
+      <a:fillRef idx="0">
+        <a:scrgbClr r="0" g="0" b="0"/>
+      </a:fillRef>
+      <a:effectRef idx="0">
+        <a:scrgbClr r="0" g="0" b="0"/>
+      </a:effectRef>
+      <a:fontRef idx="minor"/>
+    </dgm:style>
+  </dgm:styleLbl>
+  <dgm:styleLbl name="fgAcc1">
+    <dgm:scene3d>
+      <a:camera prst="orthographicFront"/>
+      <a:lightRig rig="threePt" dir="t"/>
+    </dgm:scene3d>
+    <dgm:sp3d/>
+    <dgm:txPr/>
+    <dgm:style>
+      <a:lnRef idx="2">
+        <a:scrgbClr r="0" g="0" b="0"/>
+      </a:lnRef>
+      <a:fillRef idx="1">
+        <a:scrgbClr r="0" g="0" b="0"/>
+      </a:fillRef>
+      <a:effectRef idx="0">
+        <a:scrgbClr r="0" g="0" b="0"/>
+      </a:effectRef>
+      <a:fontRef idx="minor"/>
+    </dgm:style>
+  </dgm:styleLbl>
+  <dgm:styleLbl name="conFgAcc1">
+    <dgm:scene3d>
+      <a:camera prst="orthographicFront"/>
+      <a:lightRig rig="threePt" dir="t"/>
+    </dgm:scene3d>
+    <dgm:sp3d/>
+    <dgm:txPr/>
+    <dgm:style>
+      <a:lnRef idx="2">
+        <a:scrgbClr r="0" g="0" b="0"/>
+      </a:lnRef>
+      <a:fillRef idx="1">
+        <a:scrgbClr r="0" g="0" b="0"/>
+      </a:fillRef>
+      <a:effectRef idx="0">
+        <a:scrgbClr r="0" g="0" b="0"/>
+      </a:effectRef>
+      <a:fontRef idx="minor"/>
+    </dgm:style>
+  </dgm:styleLbl>
+  <dgm:styleLbl name="alignAcc1">
+    <dgm:scene3d>
+      <a:camera prst="orthographicFront"/>
+      <a:lightRig rig="threePt" dir="t"/>
+    </dgm:scene3d>
+    <dgm:sp3d/>
+    <dgm:txPr/>
+    <dgm:style>
+      <a:lnRef idx="2">
+        <a:scrgbClr r="0" g="0" b="0"/>
+      </a:lnRef>
+      <a:fillRef idx="1">
+        <a:scrgbClr r="0" g="0" b="0"/>
+      </a:fillRef>
+      <a:effectRef idx="0">
+        <a:scrgbClr r="0" g="0" b="0"/>
+      </a:effectRef>
+      <a:fontRef idx="minor"/>
+    </dgm:style>
+  </dgm:styleLbl>
+  <dgm:styleLbl name="trAlignAcc1">
+    <dgm:scene3d>
+      <a:camera prst="orthographicFront"/>
+      <a:lightRig rig="threePt" dir="t"/>
+    </dgm:scene3d>
+    <dgm:sp3d/>
+    <dgm:txPr/>
+    <dgm:style>
+      <a:lnRef idx="1">
+        <a:scrgbClr r="0" g="0" b="0"/>
+      </a:lnRef>
+      <a:fillRef idx="1">
+        <a:scrgbClr r="0" g="0" b="0"/>
+      </a:fillRef>
+      <a:effectRef idx="0">
+        <a:scrgbClr r="0" g="0" b="0"/>
+      </a:effectRef>
+      <a:fontRef idx="minor"/>
+    </dgm:style>
+  </dgm:styleLbl>
+  <dgm:styleLbl name="bgAcc1">
+    <dgm:scene3d>
+      <a:camera prst="orthographicFront"/>
+      <a:lightRig rig="threePt" dir="t"/>
+    </dgm:scene3d>
+    <dgm:sp3d/>
+    <dgm:txPr/>
+    <dgm:style>
+      <a:lnRef idx="2">
+        <a:scrgbClr r="0" g="0" b="0"/>
+      </a:lnRef>
+      <a:fillRef idx="1">
+        <a:scrgbClr r="0" g="0" b="0"/>
+      </a:fillRef>
+      <a:effectRef idx="0">
+        <a:scrgbClr r="0" g="0" b="0"/>
+      </a:effectRef>
+      <a:fontRef idx="minor"/>
+    </dgm:style>
+  </dgm:styleLbl>
+  <dgm:styleLbl name="solidFgAcc1">
+    <dgm:scene3d>
+      <a:camera prst="orthographicFront"/>
+      <a:lightRig rig="threePt" dir="t"/>
+    </dgm:scene3d>
+    <dgm:sp3d/>
+    <dgm:txPr/>
+    <dgm:style>
+      <a:lnRef idx="2">
+        <a:scrgbClr r="0" g="0" b="0"/>
+      </a:lnRef>
+      <a:fillRef idx="1">
+        <a:scrgbClr r="0" g="0" b="0"/>
+      </a:fillRef>
+      <a:effectRef idx="0">
+        <a:scrgbClr r="0" g="0" b="0"/>
+      </a:effectRef>
+      <a:fontRef idx="minor"/>
+    </dgm:style>
+  </dgm:styleLbl>
+  <dgm:styleLbl name="solidAlignAcc1">
+    <dgm:scene3d>
+      <a:camera prst="orthographicFront"/>
+      <a:lightRig rig="threePt" dir="t"/>
+    </dgm:scene3d>
+    <dgm:sp3d/>
+    <dgm:txPr/>
+    <dgm:style>
+      <a:lnRef idx="2">
+        <a:scrgbClr r="0" g="0" b="0"/>
+      </a:lnRef>
+      <a:fillRef idx="1">
+        <a:scrgbClr r="0" g="0" b="0"/>
+      </a:fillRef>
+      <a:effectRef idx="0">
+        <a:scrgbClr r="0" g="0" b="0"/>
+      </a:effectRef>
+      <a:fontRef idx="minor"/>
+    </dgm:style>
+  </dgm:styleLbl>
+  <dgm:styleLbl name="solidBgAcc1">
+    <dgm:scene3d>
+      <a:camera prst="orthographicFront"/>
+      <a:lightRig rig="threePt" dir="t"/>
+    </dgm:scene3d>
+    <dgm:sp3d/>
+    <dgm:txPr/>
+    <dgm:style>
+      <a:lnRef idx="2">
+        <a:scrgbClr r="0" g="0" b="0"/>
+      </a:lnRef>
+      <a:fillRef idx="1">
+        <a:scrgbClr r="0" g="0" b="0"/>
+      </a:fillRef>
+      <a:effectRef idx="0">
+        <a:scrgbClr r="0" g="0" b="0"/>
+      </a:effectRef>
+      <a:fontRef idx="minor"/>
+    </dgm:style>
+  </dgm:styleLbl>
+  <dgm:styleLbl name="fgAccFollowNode1">
+    <dgm:scene3d>
+      <a:camera prst="orthographicFront"/>
+      <a:lightRig rig="threePt" dir="t"/>
+    </dgm:scene3d>
+    <dgm:sp3d/>
+    <dgm:txPr/>
+    <dgm:style>
+      <a:lnRef idx="2">
+        <a:scrgbClr r="0" g="0" b="0"/>
+      </a:lnRef>
+      <a:fillRef idx="1">
+        <a:scrgbClr r="0" g="0" b="0"/>
+      </a:fillRef>
+      <a:effectRef idx="0">
+        <a:scrgbClr r="0" g="0" b="0"/>
+      </a:effectRef>
+      <a:fontRef idx="minor"/>
+    </dgm:style>
+  </dgm:styleLbl>
+  <dgm:styleLbl name="alignAccFollowNode1">
+    <dgm:scene3d>
+      <a:camera prst="orthographicFront"/>
+      <a:lightRig rig="threePt" dir="t"/>
+    </dgm:scene3d>
+    <dgm:sp3d/>
+    <dgm:txPr/>
+    <dgm:style>
+      <a:lnRef idx="2">
+        <a:scrgbClr r="0" g="0" b="0"/>
+      </a:lnRef>
+      <a:fillRef idx="1">
+        <a:scrgbClr r="0" g="0" b="0"/>
+      </a:fillRef>
+      <a:effectRef idx="0">
+        <a:scrgbClr r="0" g="0" b="0"/>
+      </a:effectRef>
+      <a:fontRef idx="minor"/>
+    </dgm:style>
+  </dgm:styleLbl>
+  <dgm:styleLbl name="bgAccFollowNode1">
+    <dgm:scene3d>
+      <a:camera prst="orthographicFront"/>
+      <a:lightRig rig="threePt" dir="t"/>
+    </dgm:scene3d>
+    <dgm:sp3d/>
+    <dgm:txPr/>
+    <dgm:style>
+      <a:lnRef idx="2">
+        <a:scrgbClr r="0" g="0" b="0"/>
+      </a:lnRef>
+      <a:fillRef idx="1">
+        <a:scrgbClr r="0" g="0" b="0"/>
+      </a:fillRef>
+      <a:effectRef idx="0">
+        <a:scrgbClr r="0" g="0" b="0"/>
+      </a:effectRef>
+      <a:fontRef idx="minor"/>
+    </dgm:style>
+  </dgm:styleLbl>
+  <dgm:styleLbl name="fgAcc0">
+    <dgm:scene3d>
+      <a:camera prst="orthographicFront"/>
+      <a:lightRig rig="threePt" dir="t"/>
+    </dgm:scene3d>
+    <dgm:sp3d/>
+    <dgm:txPr/>
+    <dgm:style>
+      <a:lnRef idx="2">
+        <a:scrgbClr r="0" g="0" b="0"/>
+      </a:lnRef>
+      <a:fillRef idx="1">
+        <a:scrgbClr r="0" g="0" b="0"/>
+      </a:fillRef>
+      <a:effectRef idx="0">
+        <a:scrgbClr r="0" g="0" b="0"/>
+      </a:effectRef>
+      <a:fontRef idx="minor"/>
+    </dgm:style>
+  </dgm:styleLbl>
+  <dgm:styleLbl name="fgAcc2">
+    <dgm:scene3d>
+      <a:camera prst="orthographicFront"/>
+      <a:lightRig rig="threePt" dir="t"/>
+    </dgm:scene3d>
+    <dgm:sp3d/>
+    <dgm:txPr/>
+    <dgm:style>
+      <a:lnRef idx="2">
+        <a:scrgbClr r="0" g="0" b="0"/>
+      </a:lnRef>
+      <a:fillRef idx="1">
+        <a:scrgbClr r="0" g="0" b="0"/>
+      </a:fillRef>
+      <a:effectRef idx="0">
+        <a:scrgbClr r="0" g="0" b="0"/>
+      </a:effectRef>
+      <a:fontRef idx="minor"/>
+    </dgm:style>
+  </dgm:styleLbl>
+  <dgm:styleLbl name="fgAcc3">
+    <dgm:scene3d>
+      <a:camera prst="orthographicFront"/>
+      <a:lightRig rig="threePt" dir="t"/>
+    </dgm:scene3d>
+    <dgm:sp3d/>
+    <dgm:txPr/>
+    <dgm:style>
+      <a:lnRef idx="2">
+        <a:scrgbClr r="0" g="0" b="0"/>
+      </a:lnRef>
+      <a:fillRef idx="1">
+        <a:scrgbClr r="0" g="0" b="0"/>
+      </a:fillRef>
+      <a:effectRef idx="0">
+        <a:scrgbClr r="0" g="0" b="0"/>
+      </a:effectRef>
+      <a:fontRef idx="minor"/>
+    </dgm:style>
+  </dgm:styleLbl>
+  <dgm:styleLbl name="fgAcc4">
+    <dgm:scene3d>
+      <a:camera prst="orthographicFront"/>
+      <a:lightRig rig="threePt" dir="t"/>
+    </dgm:scene3d>
+    <dgm:sp3d/>
+    <dgm:txPr/>
+    <dgm:style>
+      <a:lnRef idx="2">
+        <a:scrgbClr r="0" g="0" b="0"/>
+      </a:lnRef>
+      <a:fillRef idx="1">
+        <a:scrgbClr r="0" g="0" b="0"/>
+      </a:fillRef>
+      <a:effectRef idx="0">
+        <a:scrgbClr r="0" g="0" b="0"/>
+      </a:effectRef>
+      <a:fontRef idx="minor"/>
+    </dgm:style>
+  </dgm:styleLbl>
+  <dgm:styleLbl name="bgShp">
+    <dgm:scene3d>
+      <a:camera prst="orthographicFront"/>
+      <a:lightRig rig="threePt" dir="t"/>
+    </dgm:scene3d>
+    <dgm:sp3d/>
+    <dgm:txPr/>
+    <dgm:style>
+      <a:lnRef idx="0">
+        <a:scrgbClr r="0" g="0" b="0"/>
+      </a:lnRef>
+      <a:fillRef idx="1">
+        <a:scrgbClr r="0" g="0" b="0"/>
+      </a:fillRef>
+      <a:effectRef idx="0">
+        <a:scrgbClr r="0" g="0" b="0"/>
+      </a:effectRef>
+      <a:fontRef idx="minor"/>
+    </dgm:style>
+  </dgm:styleLbl>
+  <dgm:styleLbl name="dkBgShp">
+    <dgm:scene3d>
+      <a:camera prst="orthographicFront"/>
+      <a:lightRig rig="threePt" dir="t"/>
+    </dgm:scene3d>
+    <dgm:sp3d/>
+    <dgm:txPr/>
+    <dgm:style>
+      <a:lnRef idx="0">
+        <a:scrgbClr r="0" g="0" b="0"/>
+      </a:lnRef>
+      <a:fillRef idx="1">
+        <a:scrgbClr r="0" g="0" b="0"/>
+      </a:fillRef>
+      <a:effectRef idx="0">
+        <a:scrgbClr r="0" g="0" b="0"/>
+      </a:effectRef>
+      <a:fontRef idx="minor"/>
+    </dgm:style>
+  </dgm:styleLbl>
+  <dgm:styleLbl name="trBgShp">
+    <dgm:scene3d>
+      <a:camera prst="orthographicFront"/>
+      <a:lightRig rig="threePt" dir="t"/>
+    </dgm:scene3d>
+    <dgm:sp3d/>
+    <dgm:txPr/>
+    <dgm:style>
+      <a:lnRef idx="0">
+        <a:scrgbClr r="0" g="0" b="0"/>
+      </a:lnRef>
+      <a:fillRef idx="1">
+        <a:scrgbClr r="0" g="0" b="0"/>
+      </a:fillRef>
+      <a:effectRef idx="0">
+        <a:scrgbClr r="0" g="0" b="0"/>
+      </a:effectRef>
+      <a:fontRef idx="minor"/>
+    </dgm:style>
+  </dgm:styleLbl>
+  <dgm:styleLbl name="fgShp">
+    <dgm:scene3d>
+      <a:camera prst="orthographicFront"/>
+      <a:lightRig rig="threePt" dir="t"/>
+    </dgm:scene3d>
+    <dgm:sp3d/>
+    <dgm:txPr/>
+    <dgm:style>
+      <a:lnRef idx="2">
+        <a:scrgbClr r="0" g="0" b="0"/>
+      </a:lnRef>
+      <a:fillRef idx="1">
+        <a:scrgbClr r="0" g="0" b="0"/>
+      </a:fillRef>
+      <a:effectRef idx="0">
+        <a:scrgbClr r="0" g="0" b="0"/>
+      </a:effectRef>
+      <a:fontRef idx="minor"/>
+    </dgm:style>
+  </dgm:styleLbl>
+  <dgm:styleLbl name="revTx">
+    <dgm:scene3d>
+      <a:camera prst="orthographicFront"/>
+      <a:lightRig rig="threePt" dir="t"/>
+    </dgm:scene3d>
+    <dgm:sp3d/>
+    <dgm:txPr/>
+    <dgm:style>
+      <a:lnRef idx="0">
+        <a:scrgbClr r="0" g="0" b="0"/>
+      </a:lnRef>
+      <a:fillRef idx="0">
+        <a:scrgbClr r="0" g="0" b="0"/>
+      </a:fillRef>
+      <a:effectRef idx="0">
+        <a:scrgbClr r="0" g="0" b="0"/>
+      </a:effectRef>
+      <a:fontRef idx="minor"/>
+    </dgm:style>
+  </dgm:styleLbl>
+</dgm:styleDef>
+</file>
+
+<file path=ppt/diagrams/quickStyle5.xml><?xml version="1.0" encoding="utf-8"?>
 <dgm:styleDef xmlns:dgm="http://schemas.openxmlformats.org/drawingml/2006/diagram" xmlns:a="http://schemas.openxmlformats.org/drawingml/2006/main" uniqueId="urn:microsoft.com/office/officeart/2005/8/quickstyle/simple1">
   <dgm:title val=""/>
   <dgm:desc val=""/>
@@ -7024,7 +15048,7 @@
             <a:fld id="{5923F103-BC34-4FE4-A40E-EDDEECFDA5D0}" type="datetimeFigureOut">
               <a:rPr lang="en-US" dirty="0"/>
               <a:pPr/>
-              <a:t>10/23/2026</a:t>
+              <a:t>10/24/2026</a:t>
             </a:fld>
             <a:endParaRPr lang="en-US" dirty="0"/>
           </a:p>
@@ -8108,7 +16132,7 @@
           <a:p>
             <a:fld id="{923A1CC3-2375-41D4-9E03-427CAF2A4C1A}" type="datetimeFigureOut">
               <a:rPr lang="en-US" dirty="0"/>
-              <a:t>10/23/2026</a:t>
+              <a:t>10/24/2026</a:t>
             </a:fld>
             <a:endParaRPr lang="en-US" dirty="0"/>
           </a:p>
@@ -9084,7 +17108,7 @@
           <a:p>
             <a:fld id="{AFF16868-8199-4C2C-A5B1-63AEE139F88E}" type="datetimeFigureOut">
               <a:rPr lang="en-US" dirty="0"/>
-              <a:t>10/23/2026</a:t>
+              <a:t>10/24/2026</a:t>
             </a:fld>
             <a:endParaRPr lang="en-US" dirty="0"/>
           </a:p>
@@ -10214,7 +18238,7 @@
           <a:p>
             <a:fld id="{AAD9FF7F-6988-44CC-821B-644E70CD2F73}" type="datetimeFigureOut">
               <a:rPr lang="en-US" dirty="0"/>
-              <a:t>10/23/2026</a:t>
+              <a:t>10/24/2026</a:t>
             </a:fld>
             <a:endParaRPr lang="en-US" dirty="0"/>
           </a:p>
@@ -11243,7 +19267,7 @@
           <a:p>
             <a:fld id="{5C12C299-16B2-4475-990D-751901EACC14}" type="datetimeFigureOut">
               <a:rPr lang="en-US" dirty="0"/>
-              <a:t>10/23/2026</a:t>
+              <a:t>10/24/2026</a:t>
             </a:fld>
             <a:endParaRPr lang="en-US" dirty="0"/>
           </a:p>
@@ -11899,7 +19923,7 @@
           <a:p>
             <a:fld id="{9FE86839-B9D8-4651-8783-F325ECE74E65}" type="datetimeFigureOut">
               <a:rPr lang="en-US" dirty="0"/>
-              <a:t>10/23/2026</a:t>
+              <a:t>10/24/2026</a:t>
             </a:fld>
             <a:endParaRPr lang="en-US" dirty="0"/>
           </a:p>
@@ -12756,7 +20780,7 @@
           <a:p>
             <a:fld id="{FD484F64-32F6-45C5-931F-ADC1662401D0}" type="datetimeFigureOut">
               <a:rPr lang="en-US" dirty="0"/>
-              <a:t>10/23/2026</a:t>
+              <a:t>10/24/2026</a:t>
             </a:fld>
             <a:endParaRPr lang="en-US" dirty="0"/>
           </a:p>
@@ -12942,7 +20966,7 @@
           <a:p>
             <a:fld id="{53086D93-FCAC-47E0-A2EE-787E62CA814C}" type="datetimeFigureOut">
               <a:rPr lang="en-US" dirty="0"/>
-              <a:t>10/23/2026</a:t>
+              <a:t>10/24/2026</a:t>
             </a:fld>
             <a:endParaRPr lang="en-US" dirty="0"/>
           </a:p>
@@ -13910,7 +21934,7 @@
           <a:p>
             <a:fld id="{CDA879A6-0FD0-4734-A311-86BFCA472E6E}" type="datetimeFigureOut">
               <a:rPr lang="en-US" dirty="0"/>
-              <a:t>10/23/2026</a:t>
+              <a:t>10/24/2026</a:t>
             </a:fld>
             <a:endParaRPr lang="en-US" dirty="0"/>
           </a:p>
@@ -14117,7 +22141,7 @@
           <a:p>
             <a:fld id="{19C9CA7B-DFD4-44B5-8C60-D14B8CD1FB59}" type="datetimeFigureOut">
               <a:rPr lang="en-US" dirty="0"/>
-              <a:t>10/23/2026</a:t>
+              <a:t>10/24/2026</a:t>
             </a:fld>
             <a:endParaRPr lang="en-US" dirty="0"/>
           </a:p>
@@ -15147,7 +23171,7 @@
           <a:p>
             <a:fld id="{F34E6425-0181-43F2-84FC-787E803FD2F8}" type="datetimeFigureOut">
               <a:rPr lang="en-US" dirty="0"/>
-              <a:t>10/23/2026</a:t>
+              <a:t>10/24/2026</a:t>
             </a:fld>
             <a:endParaRPr lang="en-US" dirty="0"/>
           </a:p>
@@ -15415,7 +23439,7 @@
           <a:p>
             <a:fld id="{3BDB8791-F1B0-41E7-B7FD-A781E65C4266}" type="datetimeFigureOut">
               <a:rPr lang="en-US" dirty="0"/>
-              <a:t>10/23/2026</a:t>
+              <a:t>10/24/2026</a:t>
             </a:fld>
             <a:endParaRPr lang="en-US" dirty="0"/>
           </a:p>
@@ -15821,7 +23845,7 @@
           <a:p>
             <a:fld id="{5FDD63B2-E120-4ED8-B27B-C685F510A5FE}" type="datetimeFigureOut">
               <a:rPr lang="en-US" dirty="0"/>
-              <a:t>10/23/2026</a:t>
+              <a:t>10/24/2026</a:t>
             </a:fld>
             <a:endParaRPr lang="en-US" dirty="0"/>
           </a:p>
@@ -15944,7 +23968,7 @@
           <a:p>
             <a:fld id="{7AA18ACC-A947-437B-A130-35BD54FDF1E9}" type="datetimeFigureOut">
               <a:rPr lang="en-US" dirty="0"/>
-              <a:t>10/23/2026</a:t>
+              <a:t>10/24/2026</a:t>
             </a:fld>
             <a:endParaRPr lang="en-US" dirty="0"/>
           </a:p>
@@ -16035,7 +24059,7 @@
           <a:p>
             <a:fld id="{7C8D7E02-BCB8-4D50-A234-369438C08659}" type="datetimeFigureOut">
               <a:rPr lang="en-US" dirty="0"/>
-              <a:t>10/23/2026</a:t>
+              <a:t>10/24/2026</a:t>
             </a:fld>
             <a:endParaRPr lang="en-US" dirty="0"/>
           </a:p>
@@ -17112,7 +25136,7 @@
           <a:p>
             <a:fld id="{76E86A4C-8E40-4F87-A4F0-01A0687C5742}" type="datetimeFigureOut">
               <a:rPr lang="en-US" dirty="0"/>
-              <a:t>10/23/2026</a:t>
+              <a:t>10/24/2026</a:t>
             </a:fld>
             <a:endParaRPr lang="en-US" dirty="0"/>
           </a:p>
@@ -18216,7 +26240,7 @@
           <a:p>
             <a:fld id="{35E72C73-2D91-4E12-BA25-F0AA0C03599B}" type="datetimeFigureOut">
               <a:rPr lang="en-US" dirty="0"/>
-              <a:t>10/23/2026</a:t>
+              <a:t>10/24/2026</a:t>
             </a:fld>
             <a:endParaRPr lang="en-US" dirty="0"/>
           </a:p>
@@ -19209,7 +27233,7 @@
           <a:p>
             <a:fld id="{2BE451C3-0FF4-47C4-B829-773ADF60F88C}" type="datetimeFigureOut">
               <a:rPr lang="en-US" dirty="0"/>
-              <a:t>10/23/2026</a:t>
+              <a:t>10/24/2026</a:t>
             </a:fld>
             <a:endParaRPr lang="en-US" dirty="0"/>
           </a:p>
@@ -20223,7 +28247,7 @@
           <a:p>
             <a:r>
               <a:rPr lang="en-US" dirty="0"/>
-              <a:t>Accuracy</a:t>
+              <a:t>Lessons learned: Accuracy</a:t>
             </a:r>
           </a:p>
         </p:txBody>
@@ -20248,7 +28272,7 @@
             </p:nvSpPr>
             <p:spPr>
               <a:xfrm>
-                <a:off x="1154954" y="3341715"/>
+                <a:off x="1154954" y="3617765"/>
                 <a:ext cx="8825659" cy="2836025"/>
               </a:xfrm>
             </p:spPr>
@@ -20400,13 +28424,13 @@
             </p:nvSpPr>
             <p:spPr>
               <a:xfrm>
-                <a:off x="1154954" y="3341715"/>
+                <a:off x="1154954" y="3617765"/>
                 <a:ext cx="8825659" cy="2836025"/>
               </a:xfrm>
               <a:blipFill>
                 <a:blip r:embed="rId2"/>
                 <a:stretch>
-                  <a:fillRect l="-138" b="-3226"/>
+                  <a:fillRect l="-138" b="-3004"/>
                 </a:stretch>
               </a:blipFill>
             </p:spPr>
@@ -20441,8 +28465,8 @@
         </p:nvSpPr>
         <p:spPr>
           <a:xfrm>
-            <a:off x="728234" y="2693863"/>
-            <a:ext cx="9737490" cy="402167"/>
+            <a:off x="634914" y="2478417"/>
+            <a:ext cx="11424814" cy="1139347"/>
           </a:xfrm>
           <a:prstGeom prst="rect">
             <a:avLst/>
@@ -20682,7 +28706,13 @@
           <a:p>
             <a:r>
               <a:rPr lang="en-US" dirty="0"/>
-              <a:t>When small differences times large numbers, results may have large differences.</a:t>
+              <a:t>We know the results from SAS and R can be different. We set tolerance values or percentages.</a:t>
+            </a:r>
+          </a:p>
+          <a:p>
+            <a:r>
+              <a:rPr lang="en-US" dirty="0"/>
+              <a:t>But there are still issues: When small differences times large numbers, results may have large differences.</a:t>
             </a:r>
           </a:p>
           <a:p>
@@ -21829,8 +29859,12 @@
           </a:p>
           <a:p>
             <a:r>
+              <a:rPr lang="en-US" altLang="zh-CN" dirty="0"/>
+              <a:t>Lessons learned</a:t>
+            </a:r>
+            <a:r>
               <a:rPr lang="en-US" dirty="0"/>
-              <a:t>Additional value: Efficiency and Accuracy</a:t>
+              <a:t>: Efficiency and Accuracy</a:t>
             </a:r>
           </a:p>
           <a:p>
@@ -22947,7 +30981,7 @@
         </p:nvSpPr>
         <p:spPr>
           <a:xfrm>
-            <a:off x="117248" y="2413649"/>
+            <a:off x="117248" y="2271461"/>
             <a:ext cx="11287814" cy="462437"/>
           </a:xfrm>
         </p:spPr>
@@ -22975,106 +31009,6 @@
       </p:sp>
       <p:sp>
         <p:nvSpPr>
-          <p:cNvPr id="4" name="Rectangle 3">
-            <a:extLst>
-              <a:ext uri="{FF2B5EF4-FFF2-40B4-BE49-F238E27FC236}">
-                <a16:creationId xmlns:a16="http://schemas.microsoft.com/office/drawing/2014/main" id="{44D608DF-4CF0-28B6-9BE2-8FDAC1198024}"/>
-              </a:ext>
-            </a:extLst>
-          </p:cNvPr>
-          <p:cNvSpPr/>
-          <p:nvPr/>
-        </p:nvSpPr>
-        <p:spPr>
-          <a:xfrm>
-            <a:off x="590197" y="2979089"/>
-            <a:ext cx="1850969" cy="894214"/>
-          </a:xfrm>
-          <a:prstGeom prst="rect">
-            <a:avLst/>
-          </a:prstGeom>
-        </p:spPr>
-        <p:style>
-          <a:lnRef idx="2">
-            <a:schemeClr val="accent1">
-              <a:shade val="15000"/>
-            </a:schemeClr>
-          </a:lnRef>
-          <a:fillRef idx="1">
-            <a:schemeClr val="accent1"/>
-          </a:fillRef>
-          <a:effectRef idx="0">
-            <a:schemeClr val="accent1"/>
-          </a:effectRef>
-          <a:fontRef idx="minor">
-            <a:schemeClr val="lt1"/>
-          </a:fontRef>
-        </p:style>
-        <p:txBody>
-          <a:bodyPr rtlCol="0" anchor="ctr"/>
-          <a:lstStyle/>
-          <a:p>
-            <a:pPr algn="ctr"/>
-            <a:r>
-              <a:rPr lang="en-US" altLang="zh-CN" dirty="0"/>
-              <a:t>EMA</a:t>
-            </a:r>
-            <a:endParaRPr lang="en-US" dirty="0"/>
-          </a:p>
-        </p:txBody>
-      </p:sp>
-      <p:sp>
-        <p:nvSpPr>
-          <p:cNvPr id="5" name="Rectangle 4">
-            <a:extLst>
-              <a:ext uri="{FF2B5EF4-FFF2-40B4-BE49-F238E27FC236}">
-                <a16:creationId xmlns:a16="http://schemas.microsoft.com/office/drawing/2014/main" id="{159B3F70-0DC5-D7B7-C565-FA648C385C04}"/>
-              </a:ext>
-            </a:extLst>
-          </p:cNvPr>
-          <p:cNvSpPr/>
-          <p:nvPr/>
-        </p:nvSpPr>
-        <p:spPr>
-          <a:xfrm>
-            <a:off x="5184498" y="2987326"/>
-            <a:ext cx="1823004" cy="894214"/>
-          </a:xfrm>
-          <a:prstGeom prst="rect">
-            <a:avLst/>
-          </a:prstGeom>
-        </p:spPr>
-        <p:style>
-          <a:lnRef idx="2">
-            <a:schemeClr val="accent1">
-              <a:shade val="15000"/>
-            </a:schemeClr>
-          </a:lnRef>
-          <a:fillRef idx="1">
-            <a:schemeClr val="accent1"/>
-          </a:fillRef>
-          <a:effectRef idx="0">
-            <a:schemeClr val="accent1"/>
-          </a:effectRef>
-          <a:fontRef idx="minor">
-            <a:schemeClr val="lt1"/>
-          </a:fontRef>
-        </p:style>
-        <p:txBody>
-          <a:bodyPr rtlCol="0" anchor="ctr"/>
-          <a:lstStyle/>
-          <a:p>
-            <a:pPr algn="ctr"/>
-            <a:r>
-              <a:rPr lang="en-US" altLang="zh-CN" dirty="0"/>
-              <a:t>CCFA</a:t>
-            </a:r>
-            <a:endParaRPr lang="en-US" dirty="0"/>
-          </a:p>
-        </p:txBody>
-      </p:sp>
-      <p:sp>
-        <p:nvSpPr>
           <p:cNvPr id="6" name="Content Placeholder 2">
             <a:extLst>
               <a:ext uri="{FF2B5EF4-FFF2-40B4-BE49-F238E27FC236}">
@@ -23089,7 +31023,7 @@
         </p:nvSpPr>
         <p:spPr>
           <a:xfrm>
-            <a:off x="4550349" y="4009561"/>
+            <a:off x="3545765" y="4355885"/>
             <a:ext cx="3461737" cy="377999"/>
           </a:xfrm>
           <a:prstGeom prst="rect">
@@ -23614,7 +31548,7 @@
         </p:nvSpPr>
         <p:spPr>
           <a:xfrm>
-            <a:off x="259643" y="4009561"/>
+            <a:off x="251374" y="4373321"/>
             <a:ext cx="3098700" cy="307777"/>
           </a:xfrm>
           <a:prstGeom prst="rect">
@@ -23637,56 +31571,6 @@
       </p:sp>
       <p:sp>
         <p:nvSpPr>
-          <p:cNvPr id="10" name="Rectangle 9">
-            <a:extLst>
-              <a:ext uri="{FF2B5EF4-FFF2-40B4-BE49-F238E27FC236}">
-                <a16:creationId xmlns:a16="http://schemas.microsoft.com/office/drawing/2014/main" id="{82420277-E640-F602-1271-98EC524CF2D6}"/>
-              </a:ext>
-            </a:extLst>
-          </p:cNvPr>
-          <p:cNvSpPr/>
-          <p:nvPr/>
-        </p:nvSpPr>
-        <p:spPr>
-          <a:xfrm>
-            <a:off x="9684328" y="2987326"/>
-            <a:ext cx="1850970" cy="890251"/>
-          </a:xfrm>
-          <a:prstGeom prst="rect">
-            <a:avLst/>
-          </a:prstGeom>
-        </p:spPr>
-        <p:style>
-          <a:lnRef idx="2">
-            <a:schemeClr val="accent1">
-              <a:shade val="15000"/>
-            </a:schemeClr>
-          </a:lnRef>
-          <a:fillRef idx="1">
-            <a:schemeClr val="accent1"/>
-          </a:fillRef>
-          <a:effectRef idx="0">
-            <a:schemeClr val="accent1"/>
-          </a:effectRef>
-          <a:fontRef idx="minor">
-            <a:schemeClr val="lt1"/>
-          </a:fontRef>
-        </p:style>
-        <p:txBody>
-          <a:bodyPr rtlCol="0" anchor="ctr"/>
-          <a:lstStyle/>
-          <a:p>
-            <a:pPr algn="ctr"/>
-            <a:r>
-              <a:rPr lang="en-US" altLang="zh-CN" dirty="0"/>
-              <a:t>Loss severity</a:t>
-            </a:r>
-            <a:endParaRPr lang="en-US" dirty="0"/>
-          </a:p>
-        </p:txBody>
-      </p:sp>
-      <p:sp>
-        <p:nvSpPr>
           <p:cNvPr id="11" name="Content Placeholder 2">
             <a:extLst>
               <a:ext uri="{FF2B5EF4-FFF2-40B4-BE49-F238E27FC236}">
@@ -23701,8 +31585,8 @@
         </p:nvSpPr>
         <p:spPr>
           <a:xfrm>
-            <a:off x="8753302" y="4001789"/>
-            <a:ext cx="3546764" cy="377999"/>
+            <a:off x="8503920" y="2887873"/>
+            <a:ext cx="3541222" cy="377999"/>
           </a:xfrm>
           <a:prstGeom prst="rect">
             <a:avLst/>
@@ -23952,106 +31836,6 @@
       </p:sp>
       <p:sp>
         <p:nvSpPr>
-          <p:cNvPr id="12" name="Rectangle 11">
-            <a:extLst>
-              <a:ext uri="{FF2B5EF4-FFF2-40B4-BE49-F238E27FC236}">
-                <a16:creationId xmlns:a16="http://schemas.microsoft.com/office/drawing/2014/main" id="{F346B9A0-8B8D-3E4A-DEC0-964368D39743}"/>
-              </a:ext>
-            </a:extLst>
-          </p:cNvPr>
-          <p:cNvSpPr/>
-          <p:nvPr/>
-        </p:nvSpPr>
-        <p:spPr>
-          <a:xfrm>
-            <a:off x="618597" y="5558667"/>
-            <a:ext cx="922717" cy="442557"/>
-          </a:xfrm>
-          <a:prstGeom prst="rect">
-            <a:avLst/>
-          </a:prstGeom>
-        </p:spPr>
-        <p:style>
-          <a:lnRef idx="2">
-            <a:schemeClr val="accent1">
-              <a:shade val="15000"/>
-            </a:schemeClr>
-          </a:lnRef>
-          <a:fillRef idx="1">
-            <a:schemeClr val="accent1"/>
-          </a:fillRef>
-          <a:effectRef idx="0">
-            <a:schemeClr val="accent1"/>
-          </a:effectRef>
-          <a:fontRef idx="minor">
-            <a:schemeClr val="lt1"/>
-          </a:fontRef>
-        </p:style>
-        <p:txBody>
-          <a:bodyPr rtlCol="0" anchor="ctr"/>
-          <a:lstStyle/>
-          <a:p>
-            <a:pPr algn="ctr"/>
-            <a:r>
-              <a:rPr lang="en-US" altLang="zh-CN" dirty="0"/>
-              <a:t>SAS</a:t>
-            </a:r>
-            <a:endParaRPr lang="en-US" dirty="0"/>
-          </a:p>
-        </p:txBody>
-      </p:sp>
-      <p:sp>
-        <p:nvSpPr>
-          <p:cNvPr id="13" name="Rectangle 12">
-            <a:extLst>
-              <a:ext uri="{FF2B5EF4-FFF2-40B4-BE49-F238E27FC236}">
-                <a16:creationId xmlns:a16="http://schemas.microsoft.com/office/drawing/2014/main" id="{D1A1B61F-DCDF-8FCC-0127-A0A9DE0F238C}"/>
-              </a:ext>
-            </a:extLst>
-          </p:cNvPr>
-          <p:cNvSpPr/>
-          <p:nvPr/>
-        </p:nvSpPr>
-        <p:spPr>
-          <a:xfrm>
-            <a:off x="2441166" y="5250713"/>
-            <a:ext cx="1023503" cy="386104"/>
-          </a:xfrm>
-          <a:prstGeom prst="rect">
-            <a:avLst/>
-          </a:prstGeom>
-        </p:spPr>
-        <p:style>
-          <a:lnRef idx="2">
-            <a:schemeClr val="accent1">
-              <a:shade val="15000"/>
-            </a:schemeClr>
-          </a:lnRef>
-          <a:fillRef idx="1">
-            <a:schemeClr val="accent1"/>
-          </a:fillRef>
-          <a:effectRef idx="0">
-            <a:schemeClr val="accent1"/>
-          </a:effectRef>
-          <a:fontRef idx="minor">
-            <a:schemeClr val="lt1"/>
-          </a:fontRef>
-        </p:style>
-        <p:txBody>
-          <a:bodyPr rtlCol="0" anchor="ctr"/>
-          <a:lstStyle/>
-          <a:p>
-            <a:pPr algn="ctr"/>
-            <a:r>
-              <a:rPr lang="en-US" altLang="zh-CN" sz="1400" dirty="0"/>
-              <a:t>R/RStudio</a:t>
-            </a:r>
-            <a:endParaRPr lang="en-US" sz="1400" dirty="0"/>
-          </a:p>
-        </p:txBody>
-      </p:sp>
-      <p:sp>
-        <p:nvSpPr>
           <p:cNvPr id="14" name="Rectangle 13">
             <a:extLst>
               <a:ext uri="{FF2B5EF4-FFF2-40B4-BE49-F238E27FC236}">
@@ -24214,7 +31998,7 @@
         </p:nvSpPr>
         <p:spPr>
           <a:xfrm>
-            <a:off x="10346874" y="5764108"/>
+            <a:off x="10346874" y="5788944"/>
             <a:ext cx="940940" cy="389723"/>
           </a:xfrm>
           <a:prstGeom prst="rect">
@@ -24252,55 +32036,6 @@
       </p:sp>
       <p:sp>
         <p:nvSpPr>
-          <p:cNvPr id="18" name="Rectangle 17">
-            <a:extLst>
-              <a:ext uri="{FF2B5EF4-FFF2-40B4-BE49-F238E27FC236}">
-                <a16:creationId xmlns:a16="http://schemas.microsoft.com/office/drawing/2014/main" id="{47A74971-E5B0-9D99-12DB-F048AD38DDA6}"/>
-              </a:ext>
-            </a:extLst>
-          </p:cNvPr>
-          <p:cNvSpPr/>
-          <p:nvPr/>
-        </p:nvSpPr>
-        <p:spPr>
-          <a:xfrm>
-            <a:off x="2435525" y="6178667"/>
-            <a:ext cx="922717" cy="386104"/>
-          </a:xfrm>
-          <a:prstGeom prst="rect">
-            <a:avLst/>
-          </a:prstGeom>
-        </p:spPr>
-        <p:style>
-          <a:lnRef idx="2">
-            <a:schemeClr val="accent1">
-              <a:shade val="15000"/>
-            </a:schemeClr>
-          </a:lnRef>
-          <a:fillRef idx="1">
-            <a:schemeClr val="accent1"/>
-          </a:fillRef>
-          <a:effectRef idx="0">
-            <a:schemeClr val="accent1"/>
-          </a:effectRef>
-          <a:fontRef idx="minor">
-            <a:schemeClr val="lt1"/>
-          </a:fontRef>
-        </p:style>
-        <p:txBody>
-          <a:bodyPr rtlCol="0" anchor="ctr"/>
-          <a:lstStyle/>
-          <a:p>
-            <a:pPr algn="ctr"/>
-            <a:r>
-              <a:rPr lang="en-US" sz="1400" dirty="0"/>
-              <a:t>Python</a:t>
-            </a:r>
-          </a:p>
-        </p:txBody>
-      </p:sp>
-      <p:sp>
-        <p:nvSpPr>
           <p:cNvPr id="19" name="Content Placeholder 2">
             <a:extLst>
               <a:ext uri="{FF2B5EF4-FFF2-40B4-BE49-F238E27FC236}">
@@ -24315,7 +32050,7 @@
         </p:nvSpPr>
         <p:spPr>
           <a:xfrm>
-            <a:off x="0" y="4681098"/>
+            <a:off x="2384" y="4998675"/>
             <a:ext cx="11287814" cy="462437"/>
           </a:xfrm>
           <a:prstGeom prst="rect">
@@ -24556,96 +32291,12 @@
           <a:p>
             <a:r>
               <a:rPr lang="en-US" altLang="zh-CN" dirty="0"/>
-              <a:t>Technologies:</a:t>
+              <a:t>Technologies used in the migration:</a:t>
             </a:r>
             <a:endParaRPr lang="en-US" dirty="0"/>
           </a:p>
         </p:txBody>
       </p:sp>
-      <p:cxnSp>
-        <p:nvCxnSpPr>
-          <p:cNvPr id="21" name="Straight Arrow Connector 20">
-            <a:extLst>
-              <a:ext uri="{FF2B5EF4-FFF2-40B4-BE49-F238E27FC236}">
-                <a16:creationId xmlns:a16="http://schemas.microsoft.com/office/drawing/2014/main" id="{96B7C64D-A991-32E6-C2D8-9B9B57914C51}"/>
-              </a:ext>
-            </a:extLst>
-          </p:cNvPr>
-          <p:cNvCxnSpPr>
-            <a:stCxn id="12" idx="3"/>
-            <a:endCxn id="13" idx="1"/>
-          </p:cNvCxnSpPr>
-          <p:nvPr/>
-        </p:nvCxnSpPr>
-        <p:spPr>
-          <a:xfrm flipV="1">
-            <a:off x="1541314" y="5443765"/>
-            <a:ext cx="899852" cy="336181"/>
-          </a:xfrm>
-          <a:prstGeom prst="straightConnector1">
-            <a:avLst/>
-          </a:prstGeom>
-          <a:ln>
-            <a:tailEnd type="triangle"/>
-          </a:ln>
-        </p:spPr>
-        <p:style>
-          <a:lnRef idx="1">
-            <a:schemeClr val="accent1"/>
-          </a:lnRef>
-          <a:fillRef idx="0">
-            <a:schemeClr val="accent1"/>
-          </a:fillRef>
-          <a:effectRef idx="0">
-            <a:schemeClr val="accent1"/>
-          </a:effectRef>
-          <a:fontRef idx="minor">
-            <a:schemeClr val="tx1"/>
-          </a:fontRef>
-        </p:style>
-      </p:cxnSp>
-      <p:cxnSp>
-        <p:nvCxnSpPr>
-          <p:cNvPr id="23" name="Straight Arrow Connector 22">
-            <a:extLst>
-              <a:ext uri="{FF2B5EF4-FFF2-40B4-BE49-F238E27FC236}">
-                <a16:creationId xmlns:a16="http://schemas.microsoft.com/office/drawing/2014/main" id="{D3F47D91-8991-0B5B-DEA9-A18F30F1CFF6}"/>
-              </a:ext>
-            </a:extLst>
-          </p:cNvPr>
-          <p:cNvCxnSpPr>
-            <a:stCxn id="12" idx="3"/>
-            <a:endCxn id="18" idx="1"/>
-          </p:cNvCxnSpPr>
-          <p:nvPr/>
-        </p:nvCxnSpPr>
-        <p:spPr>
-          <a:xfrm>
-            <a:off x="1541314" y="5779946"/>
-            <a:ext cx="894211" cy="591773"/>
-          </a:xfrm>
-          <a:prstGeom prst="straightConnector1">
-            <a:avLst/>
-          </a:prstGeom>
-          <a:ln>
-            <a:tailEnd type="triangle"/>
-          </a:ln>
-        </p:spPr>
-        <p:style>
-          <a:lnRef idx="1">
-            <a:schemeClr val="accent1"/>
-          </a:lnRef>
-          <a:fillRef idx="0">
-            <a:schemeClr val="accent1"/>
-          </a:fillRef>
-          <a:effectRef idx="0">
-            <a:schemeClr val="accent1"/>
-          </a:effectRef>
-          <a:fontRef idx="minor">
-            <a:schemeClr val="tx1"/>
-          </a:fontRef>
-        </p:style>
-      </p:cxnSp>
       <p:sp>
         <p:nvSpPr>
           <p:cNvPr id="8" name="TextBox 7">
@@ -24681,6 +32332,355 @@
           </a:p>
         </p:txBody>
       </p:sp>
+      <p:graphicFrame>
+        <p:nvGraphicFramePr>
+          <p:cNvPr id="24" name="Diagram 23">
+            <a:extLst>
+              <a:ext uri="{FF2B5EF4-FFF2-40B4-BE49-F238E27FC236}">
+                <a16:creationId xmlns:a16="http://schemas.microsoft.com/office/drawing/2014/main" id="{0A15DD1E-92CE-31F5-DDDA-D5633CAC2B86}"/>
+              </a:ext>
+            </a:extLst>
+          </p:cNvPr>
+          <p:cNvGraphicFramePr/>
+          <p:nvPr>
+            <p:extLst>
+              <p:ext uri="{D42A27DB-BD31-4B8C-83A1-F6EECF244321}">
+                <p14:modId xmlns:p14="http://schemas.microsoft.com/office/powerpoint/2010/main" val="222395865"/>
+              </p:ext>
+            </p:extLst>
+          </p:nvPr>
+        </p:nvGraphicFramePr>
+        <p:xfrm>
+          <a:off x="904186" y="5370021"/>
+          <a:ext cx="2969545" cy="1333739"/>
+        </p:xfrm>
+        <a:graphic>
+          <a:graphicData uri="http://schemas.openxmlformats.org/drawingml/2006/diagram">
+            <dgm:relIds xmlns:dgm="http://schemas.openxmlformats.org/drawingml/2006/diagram" xmlns:r="http://schemas.openxmlformats.org/officeDocument/2006/relationships" r:dm="rId2" r:lo="rId3" r:qs="rId4" r:cs="rId5"/>
+          </a:graphicData>
+        </a:graphic>
+      </p:graphicFrame>
+      <p:graphicFrame>
+        <p:nvGraphicFramePr>
+          <p:cNvPr id="25" name="Diagram 24">
+            <a:extLst>
+              <a:ext uri="{FF2B5EF4-FFF2-40B4-BE49-F238E27FC236}">
+                <a16:creationId xmlns:a16="http://schemas.microsoft.com/office/drawing/2014/main" id="{B20DBF33-8D8A-6D19-0630-C171097B5017}"/>
+              </a:ext>
+            </a:extLst>
+          </p:cNvPr>
+          <p:cNvGraphicFramePr/>
+          <p:nvPr>
+            <p:extLst>
+              <p:ext uri="{D42A27DB-BD31-4B8C-83A1-F6EECF244321}">
+                <p14:modId xmlns:p14="http://schemas.microsoft.com/office/powerpoint/2010/main" val="1787026739"/>
+              </p:ext>
+            </p:extLst>
+          </p:nvPr>
+        </p:nvGraphicFramePr>
+        <p:xfrm>
+          <a:off x="4058432" y="2725879"/>
+          <a:ext cx="5624511" cy="2345222"/>
+        </p:xfrm>
+        <a:graphic>
+          <a:graphicData uri="http://schemas.openxmlformats.org/drawingml/2006/diagram">
+            <dgm:relIds xmlns:dgm="http://schemas.openxmlformats.org/drawingml/2006/diagram" xmlns:r="http://schemas.openxmlformats.org/officeDocument/2006/relationships" r:dm="rId7" r:lo="rId8" r:qs="rId9" r:cs="rId10"/>
+          </a:graphicData>
+        </a:graphic>
+      </p:graphicFrame>
+      <p:sp>
+        <p:nvSpPr>
+          <p:cNvPr id="26" name="Content Placeholder 2">
+            <a:extLst>
+              <a:ext uri="{FF2B5EF4-FFF2-40B4-BE49-F238E27FC236}">
+                <a16:creationId xmlns:a16="http://schemas.microsoft.com/office/drawing/2014/main" id="{4D99993D-52A1-B0FA-788E-01115C444ABE}"/>
+              </a:ext>
+            </a:extLst>
+          </p:cNvPr>
+          <p:cNvSpPr txBox="1">
+            <a:spLocks/>
+          </p:cNvSpPr>
+          <p:nvPr/>
+        </p:nvSpPr>
+        <p:spPr>
+          <a:xfrm>
+            <a:off x="8576263" y="3760183"/>
+            <a:ext cx="1349133" cy="377999"/>
+          </a:xfrm>
+          <a:prstGeom prst="rect">
+            <a:avLst/>
+          </a:prstGeom>
+        </p:spPr>
+        <p:txBody>
+          <a:bodyPr vert="horz" lIns="91440" tIns="45720" rIns="91440" bIns="45720" rtlCol="0">
+            <a:noAutofit/>
+          </a:bodyPr>
+          <a:lstStyle>
+            <a:lvl1pPr marL="342900" indent="-342900" algn="l" defTabSz="457200" rtl="0" eaLnBrk="1" latinLnBrk="0" hangingPunct="1">
+              <a:spcBef>
+                <a:spcPts val="1000"/>
+              </a:spcBef>
+              <a:spcAft>
+                <a:spcPts val="0"/>
+              </a:spcAft>
+              <a:buClr>
+                <a:schemeClr val="accent1"/>
+              </a:buClr>
+              <a:buSzPct val="80000"/>
+              <a:buFont typeface="Wingdings 3" charset="2"/>
+              <a:buChar char=""/>
+              <a:defRPr sz="1800" b="0" i="0" kern="1200">
+                <a:solidFill>
+                  <a:schemeClr val="tx1">
+                    <a:lumMod val="75000"/>
+                    <a:lumOff val="25000"/>
+                  </a:schemeClr>
+                </a:solidFill>
+                <a:latin typeface="+mn-lt"/>
+                <a:ea typeface="+mn-ea"/>
+                <a:cs typeface="+mn-cs"/>
+              </a:defRPr>
+            </a:lvl1pPr>
+            <a:lvl2pPr marL="742950" indent="-285750" algn="l" defTabSz="457200" rtl="0" eaLnBrk="1" latinLnBrk="0" hangingPunct="1">
+              <a:spcBef>
+                <a:spcPts val="1000"/>
+              </a:spcBef>
+              <a:spcAft>
+                <a:spcPts val="0"/>
+              </a:spcAft>
+              <a:buClr>
+                <a:schemeClr val="accent1"/>
+              </a:buClr>
+              <a:buSzPct val="80000"/>
+              <a:buFont typeface="Wingdings 3" charset="2"/>
+              <a:buChar char=""/>
+              <a:defRPr sz="1600" b="0" i="0" kern="1200">
+                <a:solidFill>
+                  <a:schemeClr val="tx1">
+                    <a:lumMod val="75000"/>
+                    <a:lumOff val="25000"/>
+                  </a:schemeClr>
+                </a:solidFill>
+                <a:latin typeface="+mn-lt"/>
+                <a:ea typeface="+mn-ea"/>
+                <a:cs typeface="+mn-cs"/>
+              </a:defRPr>
+            </a:lvl2pPr>
+            <a:lvl3pPr marL="1143000" indent="-228600" algn="l" defTabSz="457200" rtl="0" eaLnBrk="1" latinLnBrk="0" hangingPunct="1">
+              <a:spcBef>
+                <a:spcPts val="1000"/>
+              </a:spcBef>
+              <a:spcAft>
+                <a:spcPts val="0"/>
+              </a:spcAft>
+              <a:buClr>
+                <a:schemeClr val="accent1"/>
+              </a:buClr>
+              <a:buSzPct val="80000"/>
+              <a:buFont typeface="Wingdings 3" charset="2"/>
+              <a:buChar char=""/>
+              <a:defRPr sz="1400" b="0" i="0" kern="1200">
+                <a:solidFill>
+                  <a:schemeClr val="tx1">
+                    <a:lumMod val="75000"/>
+                    <a:lumOff val="25000"/>
+                  </a:schemeClr>
+                </a:solidFill>
+                <a:latin typeface="+mn-lt"/>
+                <a:ea typeface="+mn-ea"/>
+                <a:cs typeface="+mn-cs"/>
+              </a:defRPr>
+            </a:lvl3pPr>
+            <a:lvl4pPr marL="1600200" indent="-228600" algn="l" defTabSz="457200" rtl="0" eaLnBrk="1" latinLnBrk="0" hangingPunct="1">
+              <a:spcBef>
+                <a:spcPts val="1000"/>
+              </a:spcBef>
+              <a:spcAft>
+                <a:spcPts val="0"/>
+              </a:spcAft>
+              <a:buClr>
+                <a:schemeClr val="accent1"/>
+              </a:buClr>
+              <a:buSzPct val="80000"/>
+              <a:buFont typeface="Wingdings 3" charset="2"/>
+              <a:buChar char=""/>
+              <a:defRPr sz="1200" b="0" i="0" kern="1200">
+                <a:solidFill>
+                  <a:schemeClr val="tx1">
+                    <a:lumMod val="75000"/>
+                    <a:lumOff val="25000"/>
+                  </a:schemeClr>
+                </a:solidFill>
+                <a:latin typeface="+mn-lt"/>
+                <a:ea typeface="+mn-ea"/>
+                <a:cs typeface="+mn-cs"/>
+              </a:defRPr>
+            </a:lvl4pPr>
+            <a:lvl5pPr marL="2057400" indent="-228600" algn="l" defTabSz="457200" rtl="0" eaLnBrk="1" latinLnBrk="0" hangingPunct="1">
+              <a:spcBef>
+                <a:spcPts val="1000"/>
+              </a:spcBef>
+              <a:spcAft>
+                <a:spcPts val="0"/>
+              </a:spcAft>
+              <a:buClr>
+                <a:schemeClr val="accent1"/>
+              </a:buClr>
+              <a:buSzPct val="80000"/>
+              <a:buFont typeface="Wingdings 3" charset="2"/>
+              <a:buChar char=""/>
+              <a:defRPr sz="1200" b="0" i="0" kern="1200">
+                <a:solidFill>
+                  <a:schemeClr val="tx1">
+                    <a:lumMod val="75000"/>
+                    <a:lumOff val="25000"/>
+                  </a:schemeClr>
+                </a:solidFill>
+                <a:latin typeface="+mn-lt"/>
+                <a:ea typeface="+mn-ea"/>
+                <a:cs typeface="+mn-cs"/>
+              </a:defRPr>
+            </a:lvl5pPr>
+            <a:lvl6pPr marL="2514600" indent="-228600" algn="l" defTabSz="457200" rtl="0" eaLnBrk="1" latinLnBrk="0" hangingPunct="1">
+              <a:spcBef>
+                <a:spcPts val="1000"/>
+              </a:spcBef>
+              <a:spcAft>
+                <a:spcPts val="0"/>
+              </a:spcAft>
+              <a:buClr>
+                <a:schemeClr val="accent1"/>
+              </a:buClr>
+              <a:buSzPct val="80000"/>
+              <a:buFont typeface="Wingdings 3" charset="2"/>
+              <a:buChar char=""/>
+              <a:defRPr sz="1200" b="0" i="0" kern="1200">
+                <a:solidFill>
+                  <a:schemeClr val="tx1">
+                    <a:lumMod val="75000"/>
+                    <a:lumOff val="25000"/>
+                  </a:schemeClr>
+                </a:solidFill>
+                <a:latin typeface="+mn-lt"/>
+                <a:ea typeface="+mn-ea"/>
+                <a:cs typeface="+mn-cs"/>
+              </a:defRPr>
+            </a:lvl6pPr>
+            <a:lvl7pPr marL="2971800" indent="-228600" algn="l" defTabSz="457200" rtl="0" eaLnBrk="1" latinLnBrk="0" hangingPunct="1">
+              <a:spcBef>
+                <a:spcPts val="1000"/>
+              </a:spcBef>
+              <a:spcAft>
+                <a:spcPts val="0"/>
+              </a:spcAft>
+              <a:buClr>
+                <a:schemeClr val="accent1"/>
+              </a:buClr>
+              <a:buSzPct val="80000"/>
+              <a:buFont typeface="Wingdings 3" charset="2"/>
+              <a:buChar char=""/>
+              <a:defRPr sz="1200" b="0" i="0" kern="1200">
+                <a:solidFill>
+                  <a:schemeClr val="tx1">
+                    <a:lumMod val="75000"/>
+                    <a:lumOff val="25000"/>
+                  </a:schemeClr>
+                </a:solidFill>
+                <a:latin typeface="+mn-lt"/>
+                <a:ea typeface="+mn-ea"/>
+                <a:cs typeface="+mn-cs"/>
+              </a:defRPr>
+            </a:lvl7pPr>
+            <a:lvl8pPr marL="3429000" indent="-228600" algn="l" defTabSz="457200" rtl="0" eaLnBrk="1" latinLnBrk="0" hangingPunct="1">
+              <a:spcBef>
+                <a:spcPts val="1000"/>
+              </a:spcBef>
+              <a:spcAft>
+                <a:spcPts val="0"/>
+              </a:spcAft>
+              <a:buClr>
+                <a:schemeClr val="accent1"/>
+              </a:buClr>
+              <a:buSzPct val="80000"/>
+              <a:buFont typeface="Wingdings 3" charset="2"/>
+              <a:buChar char=""/>
+              <a:defRPr sz="1200" b="0" i="0" kern="1200">
+                <a:solidFill>
+                  <a:schemeClr val="tx1">
+                    <a:lumMod val="75000"/>
+                    <a:lumOff val="25000"/>
+                  </a:schemeClr>
+                </a:solidFill>
+                <a:latin typeface="+mn-lt"/>
+                <a:ea typeface="+mn-ea"/>
+                <a:cs typeface="+mn-cs"/>
+              </a:defRPr>
+            </a:lvl8pPr>
+            <a:lvl9pPr marL="3886200" indent="-228600" algn="l" defTabSz="457200" rtl="0" eaLnBrk="1" latinLnBrk="0" hangingPunct="1">
+              <a:spcBef>
+                <a:spcPts val="1000"/>
+              </a:spcBef>
+              <a:spcAft>
+                <a:spcPts val="0"/>
+              </a:spcAft>
+              <a:buClr>
+                <a:schemeClr val="accent1"/>
+              </a:buClr>
+              <a:buSzPct val="80000"/>
+              <a:buFont typeface="Wingdings 3" charset="2"/>
+              <a:buChar char=""/>
+              <a:defRPr sz="1200" b="0" i="0" kern="1200">
+                <a:solidFill>
+                  <a:schemeClr val="tx1">
+                    <a:lumMod val="75000"/>
+                    <a:lumOff val="25000"/>
+                  </a:schemeClr>
+                </a:solidFill>
+                <a:latin typeface="+mn-lt"/>
+                <a:ea typeface="+mn-ea"/>
+                <a:cs typeface="+mn-cs"/>
+              </a:defRPr>
+            </a:lvl9pPr>
+          </a:lstStyle>
+          <a:p>
+            <a:pPr marL="0" indent="0">
+              <a:buNone/>
+            </a:pPr>
+            <a:r>
+              <a:rPr lang="en-US" sz="1400" dirty="0"/>
+              <a:t>PFS, TPS, REO</a:t>
+            </a:r>
+          </a:p>
+        </p:txBody>
+      </p:sp>
+      <p:graphicFrame>
+        <p:nvGraphicFramePr>
+          <p:cNvPr id="27" name="Diagram 26">
+            <a:extLst>
+              <a:ext uri="{FF2B5EF4-FFF2-40B4-BE49-F238E27FC236}">
+                <a16:creationId xmlns:a16="http://schemas.microsoft.com/office/drawing/2014/main" id="{22D1D931-35DC-91BC-A18C-0F06DD4FC998}"/>
+              </a:ext>
+            </a:extLst>
+          </p:cNvPr>
+          <p:cNvGraphicFramePr/>
+          <p:nvPr>
+            <p:extLst>
+              <p:ext uri="{D42A27DB-BD31-4B8C-83A1-F6EECF244321}">
+                <p14:modId xmlns:p14="http://schemas.microsoft.com/office/powerpoint/2010/main" val="826736822"/>
+              </p:ext>
+            </p:extLst>
+          </p:nvPr>
+        </p:nvGraphicFramePr>
+        <p:xfrm>
+          <a:off x="870324" y="3317682"/>
+          <a:ext cx="1329305" cy="1211714"/>
+        </p:xfrm>
+        <a:graphic>
+          <a:graphicData uri="http://schemas.openxmlformats.org/drawingml/2006/diagram">
+            <dgm:relIds xmlns:dgm="http://schemas.openxmlformats.org/drawingml/2006/diagram" xmlns:r="http://schemas.openxmlformats.org/officeDocument/2006/relationships" r:dm="rId12" r:lo="rId13" r:qs="rId14" r:cs="rId15"/>
+          </a:graphicData>
+        </a:graphic>
+      </p:graphicFrame>
     </p:spTree>
     <p:extLst>
       <p:ext uri="{BB962C8B-B14F-4D97-AF65-F5344CB8AC3E}">

--- a/From On-Premises to Cloud.pptx
+++ b/From On-Premises to Cloud.pptx
@@ -4591,8 +4591,13 @@
         <a:p>
           <a:r>
             <a:rPr lang="en-US" dirty="0"/>
-            <a:t>CCFA</a:t>
+            <a:t>C</a:t>
           </a:r>
+          <a:r>
+            <a:rPr lang="en-US" altLang="zh-CN" dirty="0"/>
+            <a:t>ash Flow</a:t>
+          </a:r>
+          <a:endParaRPr lang="en-US" dirty="0"/>
         </a:p>
       </dgm:t>
     </dgm:pt>
@@ -6473,12 +6478,12 @@
         </a:fontRef>
       </dsp:style>
       <dsp:txBody>
-        <a:bodyPr spcFirstLastPara="0" vert="horz" wrap="square" lIns="22860" tIns="22860" rIns="22860" bIns="22860" numCol="1" spcCol="1270" anchor="ctr" anchorCtr="0">
+        <a:bodyPr spcFirstLastPara="0" vert="horz" wrap="square" lIns="13970" tIns="13970" rIns="13970" bIns="13970" numCol="1" spcCol="1270" anchor="ctr" anchorCtr="0">
           <a:noAutofit/>
         </a:bodyPr>
         <a:lstStyle/>
         <a:p>
-          <a:pPr marL="0" lvl="0" indent="0" algn="ctr" defTabSz="1600200">
+          <a:pPr marL="0" lvl="0" indent="0" algn="ctr" defTabSz="977900">
             <a:lnSpc>
               <a:spcPct val="90000"/>
             </a:lnSpc>
@@ -6491,9 +6496,14 @@
             <a:buNone/>
           </a:pPr>
           <a:r>
-            <a:rPr lang="en-US" sz="3600" kern="1200" dirty="0"/>
-            <a:t>CCFA</a:t>
+            <a:rPr lang="en-US" sz="2200" kern="1200" dirty="0"/>
+            <a:t>C</a:t>
           </a:r>
+          <a:r>
+            <a:rPr lang="en-US" altLang="zh-CN" sz="2200" kern="1200" dirty="0"/>
+            <a:t>ash Flow</a:t>
+          </a:r>
+          <a:endParaRPr lang="en-US" sz="2200" kern="1200" dirty="0"/>
         </a:p>
       </dsp:txBody>
       <dsp:txXfrm>
@@ -15048,7 +15058,7 @@
             <a:fld id="{5923F103-BC34-4FE4-A40E-EDDEECFDA5D0}" type="datetimeFigureOut">
               <a:rPr lang="en-US" dirty="0"/>
               <a:pPr/>
-              <a:t>10/24/2026</a:t>
+              <a:t>10/25/2026</a:t>
             </a:fld>
             <a:endParaRPr lang="en-US" dirty="0"/>
           </a:p>
@@ -16132,7 +16142,7 @@
           <a:p>
             <a:fld id="{923A1CC3-2375-41D4-9E03-427CAF2A4C1A}" type="datetimeFigureOut">
               <a:rPr lang="en-US" dirty="0"/>
-              <a:t>10/24/2026</a:t>
+              <a:t>10/25/2026</a:t>
             </a:fld>
             <a:endParaRPr lang="en-US" dirty="0"/>
           </a:p>
@@ -17108,7 +17118,7 @@
           <a:p>
             <a:fld id="{AFF16868-8199-4C2C-A5B1-63AEE139F88E}" type="datetimeFigureOut">
               <a:rPr lang="en-US" dirty="0"/>
-              <a:t>10/24/2026</a:t>
+              <a:t>10/25/2026</a:t>
             </a:fld>
             <a:endParaRPr lang="en-US" dirty="0"/>
           </a:p>
@@ -18238,7 +18248,7 @@
           <a:p>
             <a:fld id="{AAD9FF7F-6988-44CC-821B-644E70CD2F73}" type="datetimeFigureOut">
               <a:rPr lang="en-US" dirty="0"/>
-              <a:t>10/24/2026</a:t>
+              <a:t>10/25/2026</a:t>
             </a:fld>
             <a:endParaRPr lang="en-US" dirty="0"/>
           </a:p>
@@ -19267,7 +19277,7 @@
           <a:p>
             <a:fld id="{5C12C299-16B2-4475-990D-751901EACC14}" type="datetimeFigureOut">
               <a:rPr lang="en-US" dirty="0"/>
-              <a:t>10/24/2026</a:t>
+              <a:t>10/25/2026</a:t>
             </a:fld>
             <a:endParaRPr lang="en-US" dirty="0"/>
           </a:p>
@@ -19923,7 +19933,7 @@
           <a:p>
             <a:fld id="{9FE86839-B9D8-4651-8783-F325ECE74E65}" type="datetimeFigureOut">
               <a:rPr lang="en-US" dirty="0"/>
-              <a:t>10/24/2026</a:t>
+              <a:t>10/25/2026</a:t>
             </a:fld>
             <a:endParaRPr lang="en-US" dirty="0"/>
           </a:p>
@@ -20780,7 +20790,7 @@
           <a:p>
             <a:fld id="{FD484F64-32F6-45C5-931F-ADC1662401D0}" type="datetimeFigureOut">
               <a:rPr lang="en-US" dirty="0"/>
-              <a:t>10/24/2026</a:t>
+              <a:t>10/25/2026</a:t>
             </a:fld>
             <a:endParaRPr lang="en-US" dirty="0"/>
           </a:p>
@@ -20966,7 +20976,7 @@
           <a:p>
             <a:fld id="{53086D93-FCAC-47E0-A2EE-787E62CA814C}" type="datetimeFigureOut">
               <a:rPr lang="en-US" dirty="0"/>
-              <a:t>10/24/2026</a:t>
+              <a:t>10/25/2026</a:t>
             </a:fld>
             <a:endParaRPr lang="en-US" dirty="0"/>
           </a:p>
@@ -21934,7 +21944,7 @@
           <a:p>
             <a:fld id="{CDA879A6-0FD0-4734-A311-86BFCA472E6E}" type="datetimeFigureOut">
               <a:rPr lang="en-US" dirty="0"/>
-              <a:t>10/24/2026</a:t>
+              <a:t>10/25/2026</a:t>
             </a:fld>
             <a:endParaRPr lang="en-US" dirty="0"/>
           </a:p>
@@ -22141,7 +22151,7 @@
           <a:p>
             <a:fld id="{19C9CA7B-DFD4-44B5-8C60-D14B8CD1FB59}" type="datetimeFigureOut">
               <a:rPr lang="en-US" dirty="0"/>
-              <a:t>10/24/2026</a:t>
+              <a:t>10/25/2026</a:t>
             </a:fld>
             <a:endParaRPr lang="en-US" dirty="0"/>
           </a:p>
@@ -23171,7 +23181,7 @@
           <a:p>
             <a:fld id="{F34E6425-0181-43F2-84FC-787E803FD2F8}" type="datetimeFigureOut">
               <a:rPr lang="en-US" dirty="0"/>
-              <a:t>10/24/2026</a:t>
+              <a:t>10/25/2026</a:t>
             </a:fld>
             <a:endParaRPr lang="en-US" dirty="0"/>
           </a:p>
@@ -23439,7 +23449,7 @@
           <a:p>
             <a:fld id="{3BDB8791-F1B0-41E7-B7FD-A781E65C4266}" type="datetimeFigureOut">
               <a:rPr lang="en-US" dirty="0"/>
-              <a:t>10/24/2026</a:t>
+              <a:t>10/25/2026</a:t>
             </a:fld>
             <a:endParaRPr lang="en-US" dirty="0"/>
           </a:p>
@@ -23845,7 +23855,7 @@
           <a:p>
             <a:fld id="{5FDD63B2-E120-4ED8-B27B-C685F510A5FE}" type="datetimeFigureOut">
               <a:rPr lang="en-US" dirty="0"/>
-              <a:t>10/24/2026</a:t>
+              <a:t>10/25/2026</a:t>
             </a:fld>
             <a:endParaRPr lang="en-US" dirty="0"/>
           </a:p>
@@ -23968,7 +23978,7 @@
           <a:p>
             <a:fld id="{7AA18ACC-A947-437B-A130-35BD54FDF1E9}" type="datetimeFigureOut">
               <a:rPr lang="en-US" dirty="0"/>
-              <a:t>10/24/2026</a:t>
+              <a:t>10/25/2026</a:t>
             </a:fld>
             <a:endParaRPr lang="en-US" dirty="0"/>
           </a:p>
@@ -24059,7 +24069,7 @@
           <a:p>
             <a:fld id="{7C8D7E02-BCB8-4D50-A234-369438C08659}" type="datetimeFigureOut">
               <a:rPr lang="en-US" dirty="0"/>
-              <a:t>10/24/2026</a:t>
+              <a:t>10/25/2026</a:t>
             </a:fld>
             <a:endParaRPr lang="en-US" dirty="0"/>
           </a:p>
@@ -25136,7 +25146,7 @@
           <a:p>
             <a:fld id="{76E86A4C-8E40-4F87-A4F0-01A0687C5742}" type="datetimeFigureOut">
               <a:rPr lang="en-US" dirty="0"/>
-              <a:t>10/24/2026</a:t>
+              <a:t>10/25/2026</a:t>
             </a:fld>
             <a:endParaRPr lang="en-US" dirty="0"/>
           </a:p>
@@ -26240,7 +26250,7 @@
           <a:p>
             <a:fld id="{35E72C73-2D91-4E12-BA25-F0AA0C03599B}" type="datetimeFigureOut">
               <a:rPr lang="en-US" dirty="0"/>
-              <a:t>10/24/2026</a:t>
+              <a:t>10/25/2026</a:t>
             </a:fld>
             <a:endParaRPr lang="en-US" dirty="0"/>
           </a:p>
@@ -27233,7 +27243,7 @@
           <a:p>
             <a:fld id="{2BE451C3-0FF4-47C4-B829-773ADF60F88C}" type="datetimeFigureOut">
               <a:rPr lang="en-US" dirty="0"/>
-              <a:t>10/24/2026</a:t>
+              <a:t>10/25/2026</a:t>
             </a:fld>
             <a:endParaRPr lang="en-US" dirty="0"/>
           </a:p>
@@ -28252,8 +28262,8 @@
           </a:p>
         </p:txBody>
       </p:sp>
-      <mc:AlternateContent xmlns:mc="http://schemas.openxmlformats.org/markup-compatibility/2006">
-        <mc:Choice xmlns:a14="http://schemas.microsoft.com/office/drawing/2010/main" Requires="a14">
+      <mc:AlternateContent xmlns:mc="http://schemas.openxmlformats.org/markup-compatibility/2006" xmlns:a14="http://schemas.microsoft.com/office/drawing/2010/main">
+        <mc:Choice Requires="a14">
           <p:sp>
             <p:nvSpPr>
               <p:cNvPr id="3" name="Content Placeholder 2">
@@ -28405,7 +28415,7 @@
             </p:txBody>
           </p:sp>
         </mc:Choice>
-        <mc:Fallback>
+        <mc:Fallback xmlns="">
           <p:sp>
             <p:nvSpPr>
               <p:cNvPr id="3" name="Content Placeholder 2">
@@ -31009,271 +31019,6 @@
       </p:sp>
       <p:sp>
         <p:nvSpPr>
-          <p:cNvPr id="6" name="Content Placeholder 2">
-            <a:extLst>
-              <a:ext uri="{FF2B5EF4-FFF2-40B4-BE49-F238E27FC236}">
-                <a16:creationId xmlns:a16="http://schemas.microsoft.com/office/drawing/2014/main" id="{7BCF8376-67F8-6314-44DB-92293730E99C}"/>
-              </a:ext>
-            </a:extLst>
-          </p:cNvPr>
-          <p:cNvSpPr txBox="1">
-            <a:spLocks/>
-          </p:cNvSpPr>
-          <p:nvPr/>
-        </p:nvSpPr>
-        <p:spPr>
-          <a:xfrm>
-            <a:off x="3545765" y="4355885"/>
-            <a:ext cx="3461737" cy="377999"/>
-          </a:xfrm>
-          <a:prstGeom prst="rect">
-            <a:avLst/>
-          </a:prstGeom>
-        </p:spPr>
-        <p:txBody>
-          <a:bodyPr vert="horz" lIns="91440" tIns="45720" rIns="91440" bIns="45720" rtlCol="0">
-            <a:normAutofit/>
-          </a:bodyPr>
-          <a:lstStyle>
-            <a:lvl1pPr marL="342900" indent="-342900" algn="l" defTabSz="457200" rtl="0" eaLnBrk="1" latinLnBrk="0" hangingPunct="1">
-              <a:spcBef>
-                <a:spcPts val="1000"/>
-              </a:spcBef>
-              <a:spcAft>
-                <a:spcPts val="0"/>
-              </a:spcAft>
-              <a:buClr>
-                <a:schemeClr val="accent1"/>
-              </a:buClr>
-              <a:buSzPct val="80000"/>
-              <a:buFont typeface="Wingdings 3" charset="2"/>
-              <a:buChar char=""/>
-              <a:defRPr sz="1800" b="0" i="0" kern="1200">
-                <a:solidFill>
-                  <a:schemeClr val="tx1">
-                    <a:lumMod val="75000"/>
-                    <a:lumOff val="25000"/>
-                  </a:schemeClr>
-                </a:solidFill>
-                <a:latin typeface="+mn-lt"/>
-                <a:ea typeface="+mn-ea"/>
-                <a:cs typeface="+mn-cs"/>
-              </a:defRPr>
-            </a:lvl1pPr>
-            <a:lvl2pPr marL="742950" indent="-285750" algn="l" defTabSz="457200" rtl="0" eaLnBrk="1" latinLnBrk="0" hangingPunct="1">
-              <a:spcBef>
-                <a:spcPts val="1000"/>
-              </a:spcBef>
-              <a:spcAft>
-                <a:spcPts val="0"/>
-              </a:spcAft>
-              <a:buClr>
-                <a:schemeClr val="accent1"/>
-              </a:buClr>
-              <a:buSzPct val="80000"/>
-              <a:buFont typeface="Wingdings 3" charset="2"/>
-              <a:buChar char=""/>
-              <a:defRPr sz="1600" b="0" i="0" kern="1200">
-                <a:solidFill>
-                  <a:schemeClr val="tx1">
-                    <a:lumMod val="75000"/>
-                    <a:lumOff val="25000"/>
-                  </a:schemeClr>
-                </a:solidFill>
-                <a:latin typeface="+mn-lt"/>
-                <a:ea typeface="+mn-ea"/>
-                <a:cs typeface="+mn-cs"/>
-              </a:defRPr>
-            </a:lvl2pPr>
-            <a:lvl3pPr marL="1143000" indent="-228600" algn="l" defTabSz="457200" rtl="0" eaLnBrk="1" latinLnBrk="0" hangingPunct="1">
-              <a:spcBef>
-                <a:spcPts val="1000"/>
-              </a:spcBef>
-              <a:spcAft>
-                <a:spcPts val="0"/>
-              </a:spcAft>
-              <a:buClr>
-                <a:schemeClr val="accent1"/>
-              </a:buClr>
-              <a:buSzPct val="80000"/>
-              <a:buFont typeface="Wingdings 3" charset="2"/>
-              <a:buChar char=""/>
-              <a:defRPr sz="1400" b="0" i="0" kern="1200">
-                <a:solidFill>
-                  <a:schemeClr val="tx1">
-                    <a:lumMod val="75000"/>
-                    <a:lumOff val="25000"/>
-                  </a:schemeClr>
-                </a:solidFill>
-                <a:latin typeface="+mn-lt"/>
-                <a:ea typeface="+mn-ea"/>
-                <a:cs typeface="+mn-cs"/>
-              </a:defRPr>
-            </a:lvl3pPr>
-            <a:lvl4pPr marL="1600200" indent="-228600" algn="l" defTabSz="457200" rtl="0" eaLnBrk="1" latinLnBrk="0" hangingPunct="1">
-              <a:spcBef>
-                <a:spcPts val="1000"/>
-              </a:spcBef>
-              <a:spcAft>
-                <a:spcPts val="0"/>
-              </a:spcAft>
-              <a:buClr>
-                <a:schemeClr val="accent1"/>
-              </a:buClr>
-              <a:buSzPct val="80000"/>
-              <a:buFont typeface="Wingdings 3" charset="2"/>
-              <a:buChar char=""/>
-              <a:defRPr sz="1200" b="0" i="0" kern="1200">
-                <a:solidFill>
-                  <a:schemeClr val="tx1">
-                    <a:lumMod val="75000"/>
-                    <a:lumOff val="25000"/>
-                  </a:schemeClr>
-                </a:solidFill>
-                <a:latin typeface="+mn-lt"/>
-                <a:ea typeface="+mn-ea"/>
-                <a:cs typeface="+mn-cs"/>
-              </a:defRPr>
-            </a:lvl4pPr>
-            <a:lvl5pPr marL="2057400" indent="-228600" algn="l" defTabSz="457200" rtl="0" eaLnBrk="1" latinLnBrk="0" hangingPunct="1">
-              <a:spcBef>
-                <a:spcPts val="1000"/>
-              </a:spcBef>
-              <a:spcAft>
-                <a:spcPts val="0"/>
-              </a:spcAft>
-              <a:buClr>
-                <a:schemeClr val="accent1"/>
-              </a:buClr>
-              <a:buSzPct val="80000"/>
-              <a:buFont typeface="Wingdings 3" charset="2"/>
-              <a:buChar char=""/>
-              <a:defRPr sz="1200" b="0" i="0" kern="1200">
-                <a:solidFill>
-                  <a:schemeClr val="tx1">
-                    <a:lumMod val="75000"/>
-                    <a:lumOff val="25000"/>
-                  </a:schemeClr>
-                </a:solidFill>
-                <a:latin typeface="+mn-lt"/>
-                <a:ea typeface="+mn-ea"/>
-                <a:cs typeface="+mn-cs"/>
-              </a:defRPr>
-            </a:lvl5pPr>
-            <a:lvl6pPr marL="2514600" indent="-228600" algn="l" defTabSz="457200" rtl="0" eaLnBrk="1" latinLnBrk="0" hangingPunct="1">
-              <a:spcBef>
-                <a:spcPts val="1000"/>
-              </a:spcBef>
-              <a:spcAft>
-                <a:spcPts val="0"/>
-              </a:spcAft>
-              <a:buClr>
-                <a:schemeClr val="accent1"/>
-              </a:buClr>
-              <a:buSzPct val="80000"/>
-              <a:buFont typeface="Wingdings 3" charset="2"/>
-              <a:buChar char=""/>
-              <a:defRPr sz="1200" b="0" i="0" kern="1200">
-                <a:solidFill>
-                  <a:schemeClr val="tx1">
-                    <a:lumMod val="75000"/>
-                    <a:lumOff val="25000"/>
-                  </a:schemeClr>
-                </a:solidFill>
-                <a:latin typeface="+mn-lt"/>
-                <a:ea typeface="+mn-ea"/>
-                <a:cs typeface="+mn-cs"/>
-              </a:defRPr>
-            </a:lvl6pPr>
-            <a:lvl7pPr marL="2971800" indent="-228600" algn="l" defTabSz="457200" rtl="0" eaLnBrk="1" latinLnBrk="0" hangingPunct="1">
-              <a:spcBef>
-                <a:spcPts val="1000"/>
-              </a:spcBef>
-              <a:spcAft>
-                <a:spcPts val="0"/>
-              </a:spcAft>
-              <a:buClr>
-                <a:schemeClr val="accent1"/>
-              </a:buClr>
-              <a:buSzPct val="80000"/>
-              <a:buFont typeface="Wingdings 3" charset="2"/>
-              <a:buChar char=""/>
-              <a:defRPr sz="1200" b="0" i="0" kern="1200">
-                <a:solidFill>
-                  <a:schemeClr val="tx1">
-                    <a:lumMod val="75000"/>
-                    <a:lumOff val="25000"/>
-                  </a:schemeClr>
-                </a:solidFill>
-                <a:latin typeface="+mn-lt"/>
-                <a:ea typeface="+mn-ea"/>
-                <a:cs typeface="+mn-cs"/>
-              </a:defRPr>
-            </a:lvl7pPr>
-            <a:lvl8pPr marL="3429000" indent="-228600" algn="l" defTabSz="457200" rtl="0" eaLnBrk="1" latinLnBrk="0" hangingPunct="1">
-              <a:spcBef>
-                <a:spcPts val="1000"/>
-              </a:spcBef>
-              <a:spcAft>
-                <a:spcPts val="0"/>
-              </a:spcAft>
-              <a:buClr>
-                <a:schemeClr val="accent1"/>
-              </a:buClr>
-              <a:buSzPct val="80000"/>
-              <a:buFont typeface="Wingdings 3" charset="2"/>
-              <a:buChar char=""/>
-              <a:defRPr sz="1200" b="0" i="0" kern="1200">
-                <a:solidFill>
-                  <a:schemeClr val="tx1">
-                    <a:lumMod val="75000"/>
-                    <a:lumOff val="25000"/>
-                  </a:schemeClr>
-                </a:solidFill>
-                <a:latin typeface="+mn-lt"/>
-                <a:ea typeface="+mn-ea"/>
-                <a:cs typeface="+mn-cs"/>
-              </a:defRPr>
-            </a:lvl8pPr>
-            <a:lvl9pPr marL="3886200" indent="-228600" algn="l" defTabSz="457200" rtl="0" eaLnBrk="1" latinLnBrk="0" hangingPunct="1">
-              <a:spcBef>
-                <a:spcPts val="1000"/>
-              </a:spcBef>
-              <a:spcAft>
-                <a:spcPts val="0"/>
-              </a:spcAft>
-              <a:buClr>
-                <a:schemeClr val="accent1"/>
-              </a:buClr>
-              <a:buSzPct val="80000"/>
-              <a:buFont typeface="Wingdings 3" charset="2"/>
-              <a:buChar char=""/>
-              <a:defRPr sz="1200" b="0" i="0" kern="1200">
-                <a:solidFill>
-                  <a:schemeClr val="tx1">
-                    <a:lumMod val="75000"/>
-                    <a:lumOff val="25000"/>
-                  </a:schemeClr>
-                </a:solidFill>
-                <a:latin typeface="+mn-lt"/>
-                <a:ea typeface="+mn-ea"/>
-                <a:cs typeface="+mn-cs"/>
-              </a:defRPr>
-            </a:lvl9pPr>
-          </a:lstStyle>
-          <a:p>
-            <a:pPr marL="0" indent="0">
-              <a:buNone/>
-            </a:pPr>
-            <a:r>
-              <a:rPr lang="en-US" sz="1400" dirty="0"/>
-              <a:t>Common Cash Flow Applications</a:t>
-            </a:r>
-          </a:p>
-        </p:txBody>
-      </p:sp>
-      <p:sp>
-        <p:nvSpPr>
           <p:cNvPr id="7" name="Content Placeholder 2">
             <a:extLst>
               <a:ext uri="{FF2B5EF4-FFF2-40B4-BE49-F238E27FC236}">
@@ -32373,7 +32118,7 @@
           <p:nvPr>
             <p:extLst>
               <p:ext uri="{D42A27DB-BD31-4B8C-83A1-F6EECF244321}">
-                <p14:modId xmlns:p14="http://schemas.microsoft.com/office/powerpoint/2010/main" val="1787026739"/>
+                <p14:modId xmlns:p14="http://schemas.microsoft.com/office/powerpoint/2010/main" val="2610204422"/>
               </p:ext>
             </p:extLst>
           </p:nvPr>
